--- a/docs/ipoe-lab/slides/setsumeikai.pptx
+++ b/docs/ipoe-lab/slides/setsumeikai.pptx
@@ -35,6 +35,9 @@
     <p:sldId id="283" r:id="rId34"/>
     <p:sldId id="284" r:id="rId35"/>
     <p:sldId id="285" r:id="rId36"/>
+    <p:sldId id="286" r:id="rId37"/>
+    <p:sldId id="287" r:id="rId38"/>
+    <p:sldId id="288" r:id="rId39"/>
   </p:sldIdLst>
   <p:sldSz cx="12191695" cy="6858000" type="screen4x3"/>
   <p:notesSz cx="6858000" cy="9144000"/>
@@ -3347,7 +3350,7 @@
                 </a:solidFill>
                 <a:latin typeface="Meiryo UI"/>
               </a:rPr>
-              <a:t>アドレスはどうやって決まるのか</a:t>
+              <a:t>アドレスの読み方と、なぜ /64 なのか</a:t>
             </a:r>
           </a:p>
         </p:txBody>
@@ -3404,7 +3407,7 @@
         <p:spPr>
           <a:xfrm>
             <a:off x="594360" y="1371600"/>
-            <a:ext cx="10972800" cy="4846320"/>
+            <a:ext cx="10972800" cy="4709160"/>
           </a:xfrm>
           <a:prstGeom prst="rect">
             <a:avLst/>
@@ -3419,193 +3422,209 @@
           <a:p>
             <a:pPr algn="l">
               <a:spcAft>
-                <a:spcPts val="700"/>
-              </a:spcAft>
-            </a:pPr>
-            <a:r>
-              <a:rPr sz="2000" b="1">
+                <a:spcPts val="900"/>
+              </a:spcAft>
+            </a:pPr>
+            <a:r>
+              <a:rPr sz="1900" b="1">
                 <a:solidFill>
                   <a:srgbClr val="1F3355"/>
                 </a:solidFill>
                 <a:latin typeface="Meiryo UI"/>
               </a:rPr>
-              <a:t>ルータが「私がゲートウェイだ」と自分から言いに来ます</a:t>
+              <a:t>書き方のルールは 3 つだけ</a:t>
             </a:r>
           </a:p>
           <a:p>
             <a:pPr lvl="1" algn="l">
               <a:spcAft>
-                <a:spcPts val="400"/>
-              </a:spcAft>
-            </a:pPr>
-            <a:r>
-              <a:rPr sz="1700" b="0">
+                <a:spcPts val="500"/>
+              </a:spcAft>
+            </a:pPr>
+            <a:r>
+              <a:rPr sz="1600" b="0">
                 <a:solidFill>
                   <a:srgbClr val="555555"/>
                 </a:solidFill>
                 <a:latin typeface="Meiryo UI"/>
               </a:rPr>
-              <a:t>① 端末が「ルータいますか」と聞く (RS)</a:t>
+              <a:t>各ブロック先頭の 0 は省ける → 2001:0db8:0000:0001 は 2001:db8:0:1</a:t>
             </a:r>
           </a:p>
           <a:p>
             <a:pPr lvl="1" algn="l">
               <a:spcAft>
-                <a:spcPts val="400"/>
-              </a:spcAft>
-            </a:pPr>
-            <a:r>
-              <a:rPr sz="1700" b="0">
+                <a:spcPts val="500"/>
+              </a:spcAft>
+            </a:pPr>
+            <a:r>
+              <a:rPr sz="1600" b="0">
                 <a:solidFill>
                   <a:srgbClr val="555555"/>
                 </a:solidFill>
                 <a:latin typeface="Meiryo UI"/>
               </a:rPr>
-              <a:t>② ルータが「私がいます。プレフィックスはこれです」と答える (RA)</a:t>
+              <a:t>:: は 0 が続くところを 1 回だけ省ける → 2001:db8:0:0:0:0:0:1 は 2001:db8::1</a:t>
             </a:r>
           </a:p>
           <a:p>
             <a:pPr lvl="1" algn="l">
               <a:spcAft>
-                <a:spcPts val="400"/>
-              </a:spcAft>
-            </a:pPr>
-            <a:r>
-              <a:rPr sz="1700" b="0">
+                <a:spcPts val="500"/>
+              </a:spcAft>
+            </a:pPr>
+            <a:r>
+              <a:rPr sz="1600" b="0">
                 <a:solidFill>
                   <a:srgbClr val="555555"/>
                 </a:solidFill>
                 <a:latin typeface="Meiryo UI"/>
               </a:rPr>
-              <a:t>③ 端末が下位 64 ビットを自分で作ってアドレスを完成させる (SLAAC = 自動設定)</a:t>
+              <a:t>URL に書くときは [ ] で囲む。忘れると動きません</a:t>
+            </a:r>
+          </a:p>
+          <a:p>
+            <a:pPr lvl="1" algn="l">
+              <a:spcAft>
+                <a:spcPts val="500"/>
+              </a:spcAft>
+            </a:pPr>
+            <a:r>
+              <a:rPr sz="1600" b="0">
+                <a:solidFill>
+                  <a:srgbClr val="0B6040"/>
+                </a:solidFill>
+                <a:latin typeface="Consolas"/>
+              </a:rPr>
+              <a:t>http://[2001:db8::1]/   ← 囲まないとポート番号のコロンと区別できません</a:t>
             </a:r>
           </a:p>
           <a:p>
             <a:pPr algn="l">
               <a:spcAft>
-                <a:spcPts val="700"/>
-              </a:spcAft>
-            </a:pPr>
-            <a:r>
-              <a:rPr sz="2000" b="1">
+                <a:spcPts val="900"/>
+              </a:spcAft>
+            </a:pPr>
+            <a:r>
+              <a:rPr sz="1900" b="1">
                 <a:solidFill>
                   <a:srgbClr val="1F3355"/>
                 </a:solidFill>
                 <a:latin typeface="Meiryo UI"/>
               </a:rPr>
-              <a:t>DHCPv6 を使う場合も、その指示自体は RA で伝えられます</a:t>
+              <a:t>なぜ /64 なのか — 決まりごとです</a:t>
             </a:r>
           </a:p>
           <a:p>
             <a:pPr lvl="1" algn="l">
               <a:spcAft>
-                <a:spcPts val="400"/>
-              </a:spcAft>
-            </a:pPr>
-            <a:r>
-              <a:rPr sz="1700" b="0">
+                <a:spcPts val="500"/>
+              </a:spcAft>
+            </a:pPr>
+            <a:r>
+              <a:rPr sz="1600" b="0">
                 <a:solidFill>
                   <a:srgbClr val="555555"/>
                 </a:solidFill>
                 <a:latin typeface="Meiryo UI"/>
               </a:rPr>
-              <a:t>A フラグ … 立っていれば SLAAC でアドレスを作ってよい</a:t>
+              <a:t>後ろの 64 ビットは「インタフェース ID」に使うと決まっている</a:t>
             </a:r>
           </a:p>
           <a:p>
             <a:pPr lvl="1" algn="l">
               <a:spcAft>
-                <a:spcPts val="400"/>
-              </a:spcAft>
-            </a:pPr>
-            <a:r>
-              <a:rPr sz="1700" b="0">
+                <a:spcPts val="500"/>
+              </a:spcAft>
+            </a:pPr>
+            <a:r>
+              <a:rPr sz="1600" b="0">
                 <a:solidFill>
                   <a:srgbClr val="555555"/>
                 </a:solidFill>
                 <a:latin typeface="Meiryo UI"/>
               </a:rPr>
-              <a:t>M フラグ … 立っていれば DHCPv6 でもアドレスをもらう</a:t>
+              <a:t>端末が MAC から作るかランダムに作る。つまり下位は端末が勝手に決める</a:t>
             </a:r>
           </a:p>
           <a:p>
             <a:pPr lvl="1" algn="l">
               <a:spcAft>
-                <a:spcPts val="400"/>
-              </a:spcAft>
-            </a:pPr>
-            <a:r>
-              <a:rPr sz="1700" b="0">
+                <a:spcPts val="500"/>
+              </a:spcAft>
+            </a:pPr>
+            <a:r>
+              <a:rPr sz="1600" b="1">
+                <a:solidFill>
+                  <a:srgbClr val="C0392B"/>
+                </a:solidFill>
+                <a:latin typeface="Meiryo UI"/>
+              </a:rPr>
+              <a:t>だから /64 より細かく切ると (たとえば /80) 自動設定が動きません</a:t>
+            </a:r>
+          </a:p>
+          <a:p>
+            <a:pPr algn="l">
+              <a:spcAft>
+                <a:spcPts val="900"/>
+              </a:spcAft>
+            </a:pPr>
+            <a:r>
+              <a:rPr sz="1900" b="1">
+                <a:solidFill>
+                  <a:srgbClr val="1F3355"/>
+                </a:solidFill>
+                <a:latin typeface="Meiryo UI"/>
+              </a:rPr>
+              <a:t>実務での見え方 — ここが後で効きます</a:t>
+            </a:r>
+          </a:p>
+          <a:p>
+            <a:pPr lvl="1" algn="l">
+              <a:spcAft>
+                <a:spcPts val="500"/>
+              </a:spcAft>
+            </a:pPr>
+            <a:r>
+              <a:rPr sz="1600" b="0">
                 <a:solidFill>
                   <a:srgbClr val="555555"/>
                 </a:solidFill>
                 <a:latin typeface="Meiryo UI"/>
               </a:rPr>
-              <a:t>O フラグ … 立っていれば DNS などの情報だけ DHCPv6 からもらう</a:t>
-            </a:r>
-          </a:p>
-          <a:p>
-            <a:pPr algn="l">
-              <a:spcAft>
-                <a:spcPts val="700"/>
-              </a:spcAft>
-            </a:pPr>
-            <a:r>
-              <a:rPr sz="2000" b="1">
-                <a:solidFill>
-                  <a:srgbClr val="C0392B"/>
-                </a:solidFill>
-                <a:latin typeface="Meiryo UI"/>
-              </a:rPr>
-              <a:t>よくある誤解: 「M が立っていれば SLAAC はしない」は違います</a:t>
+              <a:t>ひかり電話なし → /64 が 1 本だけ来る (RA 方式)</a:t>
             </a:r>
           </a:p>
           <a:p>
             <a:pPr lvl="1" algn="l">
               <a:spcAft>
-                <a:spcPts val="400"/>
-              </a:spcAft>
-            </a:pPr>
-            <a:r>
-              <a:rPr sz="1700" b="0">
+                <a:spcPts val="500"/>
+              </a:spcAft>
+            </a:pPr>
+            <a:r>
+              <a:rPr sz="1600" b="0">
                 <a:solidFill>
                   <a:srgbClr val="555555"/>
                 </a:solidFill>
                 <a:latin typeface="Meiryo UI"/>
               </a:rPr>
-              <a:t>SLAAC の可否を決めるのは A フラグ。M と A が両方立てば両方動いてアドレスが 2 本以上付きます</a:t>
+              <a:t>ひかり電話あり → /56 がまとめて貸し出される = /64 が 256 本 (PD 方式 = まとめ借り方式)</a:t>
             </a:r>
           </a:p>
           <a:p>
             <a:pPr lvl="1" algn="l">
               <a:spcAft>
-                <a:spcPts val="400"/>
-              </a:spcAft>
-            </a:pPr>
-            <a:r>
-              <a:rPr sz="1700" b="0">
+                <a:spcPts val="500"/>
+              </a:spcAft>
+            </a:pPr>
+            <a:r>
+              <a:rPr sz="1600" b="0">
                 <a:solidFill>
                   <a:srgbClr val="555555"/>
                 </a:solidFill>
                 <a:latin typeface="Meiryo UI"/>
               </a:rPr>
-              <a:t>そもそも M/O は推奨でしかなく、従うかは OS 次第です (Android は DHCPv6 を使いません)</a:t>
-            </a:r>
-          </a:p>
-          <a:p>
-            <a:pPr algn="l">
-              <a:spcAft>
-                <a:spcPts val="700"/>
-              </a:spcAft>
-            </a:pPr>
-            <a:r>
-              <a:rPr sz="2000" b="1">
-                <a:solidFill>
-                  <a:srgbClr val="1F3355"/>
-                </a:solidFill>
-                <a:latin typeface="Meiryo UI"/>
-              </a:rPr>
-              <a:t>ルータがもらう /56 は別枠で DHCPv6-PD。アドレスではなくプレフィックスの委譲です</a:t>
+              <a:t>この違いが効くのは「LAN をいくつに切れるか」。どちらでも MAP-E も DS-Lite も組めます</a:t>
             </a:r>
           </a:p>
         </p:txBody>
@@ -3618,8 +3637,8 @@
         </p:nvSpPr>
         <p:spPr>
           <a:xfrm>
-            <a:off x="594360" y="6263640"/>
-            <a:ext cx="10972800" cy="457200"/>
+            <a:off x="594360" y="6217920"/>
+            <a:ext cx="10972800" cy="502920"/>
           </a:xfrm>
           <a:prstGeom prst="rect">
             <a:avLst/>
@@ -3640,7 +3659,7 @@
                 </a:solidFill>
                 <a:latin typeface="Meiryo UI"/>
               </a:rPr>
-              <a:t>教科書: 第6章 (p.127) / 7.1「SLAAC の流れ」(p.160) / 第8章「DHCPv6」(p.179) / 8.7 (p.201)</a:t>
+              <a:t>教科書: 第3章「IPv6 アドレス体系」(p.67) / 7.7「グローバルアドレスの生成」(p.172) / 8.7「DHCPv6-PD」(p.201)</a:t>
             </a:r>
           </a:p>
         </p:txBody>
@@ -3654,6 +3673,650 @@
 </file>
 
 <file path=ppt/slides/slide11.xml><?xml version="1.0" encoding="utf-8"?>
+<p:sld xmlns:a="http://schemas.openxmlformats.org/drawingml/2006/main" xmlns:p="http://schemas.openxmlformats.org/presentationml/2006/main" xmlns:r="http://schemas.openxmlformats.org/officeDocument/2006/relationships">
+  <p:cSld>
+    <p:spTree>
+      <p:nvGrpSpPr>
+        <p:cNvPr id="1" name=""/>
+        <p:cNvGrpSpPr/>
+        <p:nvPr/>
+      </p:nvGrpSpPr>
+      <p:grpSpPr/>
+      <p:sp>
+        <p:nvSpPr>
+          <p:cNvPr id="2" name="TextBox 1"/>
+          <p:cNvSpPr txBox="1"/>
+          <p:nvPr/>
+        </p:nvSpPr>
+        <p:spPr>
+          <a:xfrm>
+            <a:off x="502920" y="320040"/>
+            <a:ext cx="11155680" cy="822960"/>
+          </a:xfrm>
+          <a:prstGeom prst="rect">
+            <a:avLst/>
+          </a:prstGeom>
+          <a:noFill/>
+        </p:spPr>
+        <p:txBody>
+          <a:bodyPr wrap="square">
+            <a:spAutoFit/>
+          </a:bodyPr>
+          <a:lstStyle/>
+          <a:p>
+            <a:pPr algn="l"/>
+            <a:r>
+              <a:rPr sz="2800" b="1">
+                <a:solidFill>
+                  <a:srgbClr val="1F3355"/>
+                </a:solidFill>
+                <a:latin typeface="Meiryo UI"/>
+              </a:rPr>
+              <a:t>fe80:: が必ず付いている理由 — IPv4 と一番違うところ</a:t>
+            </a:r>
+          </a:p>
+        </p:txBody>
+      </p:sp>
+      <p:sp>
+        <p:nvSpPr>
+          <p:cNvPr id="3" name="Rectangle 2"/>
+          <p:cNvSpPr/>
+          <p:nvPr/>
+        </p:nvSpPr>
+        <p:spPr>
+          <a:xfrm>
+            <a:off x="502920" y="1115568"/>
+            <a:ext cx="11155680" cy="31750"/>
+          </a:xfrm>
+          <a:prstGeom prst="rect">
+            <a:avLst/>
+          </a:prstGeom>
+          <a:solidFill>
+            <a:srgbClr val="007ACC"/>
+          </a:solidFill>
+          <a:ln>
+            <a:noFill/>
+          </a:ln>
+        </p:spPr>
+        <p:style>
+          <a:lnRef idx="1">
+            <a:schemeClr val="accent1"/>
+          </a:lnRef>
+          <a:fillRef idx="3">
+            <a:schemeClr val="accent1"/>
+          </a:fillRef>
+          <a:effectRef idx="2">
+            <a:schemeClr val="accent1"/>
+          </a:effectRef>
+          <a:fontRef idx="minor">
+            <a:schemeClr val="lt1"/>
+          </a:fontRef>
+        </p:style>
+        <p:txBody>
+          <a:bodyPr rtlCol="0" anchor="ctr"/>
+          <a:lstStyle/>
+          <a:p>
+            <a:pPr algn="ctr"/>
+          </a:p>
+        </p:txBody>
+      </p:sp>
+      <p:sp>
+        <p:nvSpPr>
+          <p:cNvPr id="4" name="TextBox 3"/>
+          <p:cNvSpPr txBox="1"/>
+          <p:nvPr/>
+        </p:nvSpPr>
+        <p:spPr>
+          <a:xfrm>
+            <a:off x="594360" y="1371600"/>
+            <a:ext cx="10972800" cy="4709160"/>
+          </a:xfrm>
+          <a:prstGeom prst="rect">
+            <a:avLst/>
+          </a:prstGeom>
+          <a:noFill/>
+        </p:spPr>
+        <p:txBody>
+          <a:bodyPr wrap="square">
+            <a:spAutoFit/>
+          </a:bodyPr>
+          <a:lstStyle/>
+          <a:p>
+            <a:pPr algn="l">
+              <a:spcAft>
+                <a:spcPts val="1000"/>
+              </a:spcAft>
+            </a:pPr>
+            <a:r>
+              <a:rPr sz="2000" b="1">
+                <a:solidFill>
+                  <a:srgbClr val="1F3355"/>
+                </a:solidFill>
+                <a:latin typeface="Meiryo UI"/>
+              </a:rPr>
+              <a:t>アドレスをもらう前に通信する必要があるからです</a:t>
+            </a:r>
+          </a:p>
+          <a:p>
+            <a:pPr lvl="1" algn="l">
+              <a:spcAft>
+                <a:spcPts val="600"/>
+              </a:spcAft>
+            </a:pPr>
+            <a:r>
+              <a:rPr sz="1700" b="0">
+                <a:solidFill>
+                  <a:srgbClr val="555555"/>
+                </a:solidFill>
+                <a:latin typeface="Meiryo UI"/>
+              </a:rPr>
+              <a:t>アドレスをくれるのはルータ。でもルータと話すにはアドレスが要る → 鶏と卵</a:t>
+            </a:r>
+          </a:p>
+          <a:p>
+            <a:pPr lvl="1" algn="l">
+              <a:spcAft>
+                <a:spcPts val="600"/>
+              </a:spcAft>
+            </a:pPr>
+            <a:r>
+              <a:rPr sz="1700" b="0">
+                <a:solidFill>
+                  <a:srgbClr val="555555"/>
+                </a:solidFill>
+                <a:latin typeface="Meiryo UI"/>
+              </a:rPr>
+              <a:t>だから NIC が上がった瞬間に自分だけで作れるアドレスを必ず持つ。それが fe80::</a:t>
+            </a:r>
+          </a:p>
+          <a:p>
+            <a:pPr algn="l">
+              <a:spcAft>
+                <a:spcPts val="1000"/>
+              </a:spcAft>
+            </a:pPr>
+            <a:r>
+              <a:rPr sz="2000" b="1">
+                <a:solidFill>
+                  <a:srgbClr val="1F3355"/>
+                </a:solidFill>
+                <a:latin typeface="Meiryo UI"/>
+              </a:rPr>
+              <a:t>その結果こうなります</a:t>
+            </a:r>
+          </a:p>
+          <a:p>
+            <a:pPr lvl="1" algn="l">
+              <a:spcAft>
+                <a:spcPts val="600"/>
+              </a:spcAft>
+            </a:pPr>
+            <a:r>
+              <a:rPr sz="1700" b="0">
+                <a:solidFill>
+                  <a:srgbClr val="555555"/>
+                </a:solidFill>
+                <a:latin typeface="Meiryo UI"/>
+              </a:rPr>
+              <a:t>RA も DHCPv6 も送信元は fe80::。グローバルアドレスは後から付く</a:t>
+            </a:r>
+          </a:p>
+          <a:p>
+            <a:pPr lvl="1" algn="l">
+              <a:spcAft>
+                <a:spcPts val="600"/>
+              </a:spcAft>
+            </a:pPr>
+            <a:r>
+              <a:rPr sz="1700" b="0">
+                <a:solidFill>
+                  <a:srgbClr val="555555"/>
+                </a:solidFill>
+                <a:latin typeface="Meiryo UI"/>
+              </a:rPr>
+              <a:t>既定ゲートウェイも fe80:: で指す。IPv4 のように 192.168.1.1 とは書かない</a:t>
+            </a:r>
+          </a:p>
+          <a:p>
+            <a:pPr lvl="1" algn="l">
+              <a:spcAft>
+                <a:spcPts val="600"/>
+              </a:spcAft>
+            </a:pPr>
+            <a:r>
+              <a:rPr sz="1700" b="0">
+                <a:solidFill>
+                  <a:srgbClr val="555555"/>
+                </a:solidFill>
+                <a:latin typeface="Meiryo UI"/>
+              </a:rPr>
+              <a:t>ルータ同士の経路のやり取りや隣接の会話も fe80:: が普通に使われます</a:t>
+            </a:r>
+          </a:p>
+          <a:p>
+            <a:pPr algn="l">
+              <a:spcAft>
+                <a:spcPts val="1000"/>
+              </a:spcAft>
+            </a:pPr>
+            <a:r>
+              <a:rPr sz="2000" b="1">
+                <a:solidFill>
+                  <a:srgbClr val="C0392B"/>
+                </a:solidFill>
+                <a:latin typeface="Meiryo UI"/>
+              </a:rPr>
+              <a:t>だから「グローバル IPv6 が無い = 壊れている」ではありません</a:t>
+            </a:r>
+          </a:p>
+          <a:p>
+            <a:pPr lvl="1" algn="l">
+              <a:spcAft>
+                <a:spcPts val="600"/>
+              </a:spcAft>
+            </a:pPr>
+            <a:r>
+              <a:rPr sz="1700" b="0">
+                <a:solidFill>
+                  <a:srgbClr val="555555"/>
+                </a:solidFill>
+                <a:latin typeface="Meiryo UI"/>
+              </a:rPr>
+              <a:t>うちの検証環境では、VM に管理 IP を振らず fe80:: だけで SSH して構築しました</a:t>
+            </a:r>
+          </a:p>
+          <a:p>
+            <a:pPr lvl="1" algn="l">
+              <a:spcAft>
+                <a:spcPts val="600"/>
+              </a:spcAft>
+            </a:pPr>
+            <a:r>
+              <a:rPr sz="1700" b="1">
+                <a:solidFill>
+                  <a:srgbClr val="C0392B"/>
+                </a:solidFill>
+                <a:latin typeface="Meiryo UI"/>
+              </a:rPr>
+              <a:t>※ fe80:: はどのインタフェース経由かを必ず書きます (fe80::1%eth0)。最初の関門です</a:t>
+            </a:r>
+          </a:p>
+          <a:p>
+            <a:pPr algn="l">
+              <a:spcAft>
+                <a:spcPts val="1000"/>
+              </a:spcAft>
+            </a:pPr>
+            <a:r>
+              <a:rPr sz="2000" b="0">
+                <a:solidFill>
+                  <a:srgbClr val="1F3355"/>
+                </a:solidFill>
+                <a:latin typeface="Meiryo UI"/>
+              </a:rPr>
+              <a:t>あわせて: 1 枚の NIC に fe80:: とグローバルが同時に付く。これが「複数が当たり前」の中身です</a:t>
+            </a:r>
+          </a:p>
+        </p:txBody>
+      </p:sp>
+      <p:sp>
+        <p:nvSpPr>
+          <p:cNvPr id="5" name="TextBox 4"/>
+          <p:cNvSpPr txBox="1"/>
+          <p:nvPr/>
+        </p:nvSpPr>
+        <p:spPr>
+          <a:xfrm>
+            <a:off x="594360" y="6217920"/>
+            <a:ext cx="10972800" cy="502920"/>
+          </a:xfrm>
+          <a:prstGeom prst="rect">
+            <a:avLst/>
+          </a:prstGeom>
+          <a:noFill/>
+        </p:spPr>
+        <p:txBody>
+          <a:bodyPr wrap="square">
+            <a:spAutoFit/>
+          </a:bodyPr>
+          <a:lstStyle/>
+          <a:p>
+            <a:pPr algn="l"/>
+            <a:r>
+              <a:rPr sz="1200" b="0">
+                <a:solidFill>
+                  <a:srgbClr val="007ACC"/>
+                </a:solidFill>
+                <a:latin typeface="Meiryo UI"/>
+              </a:rPr>
+              <a:t>教科書: 3.5「リンクローカルユニキャストアドレス」(p.74) / 3.6「スコープのゾーン」(p.76) / 2.9 (p.48)</a:t>
+            </a:r>
+          </a:p>
+        </p:txBody>
+      </p:sp>
+    </p:spTree>
+  </p:cSld>
+  <p:clrMapOvr>
+    <a:masterClrMapping/>
+  </p:clrMapOvr>
+</p:sld>
+</file>
+
+<file path=ppt/slides/slide12.xml><?xml version="1.0" encoding="utf-8"?>
+<p:sld xmlns:a="http://schemas.openxmlformats.org/drawingml/2006/main" xmlns:p="http://schemas.openxmlformats.org/presentationml/2006/main" xmlns:r="http://schemas.openxmlformats.org/officeDocument/2006/relationships">
+  <p:cSld>
+    <p:spTree>
+      <p:nvGrpSpPr>
+        <p:cNvPr id="1" name=""/>
+        <p:cNvGrpSpPr/>
+        <p:nvPr/>
+      </p:nvGrpSpPr>
+      <p:grpSpPr/>
+      <p:sp>
+        <p:nvSpPr>
+          <p:cNvPr id="2" name="TextBox 1"/>
+          <p:cNvSpPr txBox="1"/>
+          <p:nvPr/>
+        </p:nvSpPr>
+        <p:spPr>
+          <a:xfrm>
+            <a:off x="502920" y="320040"/>
+            <a:ext cx="11155680" cy="822960"/>
+          </a:xfrm>
+          <a:prstGeom prst="rect">
+            <a:avLst/>
+          </a:prstGeom>
+          <a:noFill/>
+        </p:spPr>
+        <p:txBody>
+          <a:bodyPr wrap="square">
+            <a:spAutoFit/>
+          </a:bodyPr>
+          <a:lstStyle/>
+          <a:p>
+            <a:pPr algn="l"/>
+            <a:r>
+              <a:rPr sz="2800" b="1">
+                <a:solidFill>
+                  <a:srgbClr val="1F3355"/>
+                </a:solidFill>
+                <a:latin typeface="Meiryo UI"/>
+              </a:rPr>
+              <a:t>アドレスはどうやって決まるのか</a:t>
+            </a:r>
+          </a:p>
+        </p:txBody>
+      </p:sp>
+      <p:sp>
+        <p:nvSpPr>
+          <p:cNvPr id="3" name="Rectangle 2"/>
+          <p:cNvSpPr/>
+          <p:nvPr/>
+        </p:nvSpPr>
+        <p:spPr>
+          <a:xfrm>
+            <a:off x="502920" y="1115568"/>
+            <a:ext cx="11155680" cy="31750"/>
+          </a:xfrm>
+          <a:prstGeom prst="rect">
+            <a:avLst/>
+          </a:prstGeom>
+          <a:solidFill>
+            <a:srgbClr val="007ACC"/>
+          </a:solidFill>
+          <a:ln>
+            <a:noFill/>
+          </a:ln>
+        </p:spPr>
+        <p:style>
+          <a:lnRef idx="1">
+            <a:schemeClr val="accent1"/>
+          </a:lnRef>
+          <a:fillRef idx="3">
+            <a:schemeClr val="accent1"/>
+          </a:fillRef>
+          <a:effectRef idx="2">
+            <a:schemeClr val="accent1"/>
+          </a:effectRef>
+          <a:fontRef idx="minor">
+            <a:schemeClr val="lt1"/>
+          </a:fontRef>
+        </p:style>
+        <p:txBody>
+          <a:bodyPr rtlCol="0" anchor="ctr"/>
+          <a:lstStyle/>
+          <a:p>
+            <a:pPr algn="ctr"/>
+          </a:p>
+        </p:txBody>
+      </p:sp>
+      <p:sp>
+        <p:nvSpPr>
+          <p:cNvPr id="4" name="TextBox 3"/>
+          <p:cNvSpPr txBox="1"/>
+          <p:nvPr/>
+        </p:nvSpPr>
+        <p:spPr>
+          <a:xfrm>
+            <a:off x="594360" y="1371600"/>
+            <a:ext cx="10972800" cy="4709160"/>
+          </a:xfrm>
+          <a:prstGeom prst="rect">
+            <a:avLst/>
+          </a:prstGeom>
+          <a:noFill/>
+        </p:spPr>
+        <p:txBody>
+          <a:bodyPr wrap="square">
+            <a:spAutoFit/>
+          </a:bodyPr>
+          <a:lstStyle/>
+          <a:p>
+            <a:pPr algn="l">
+              <a:spcAft>
+                <a:spcPts val="1000"/>
+              </a:spcAft>
+            </a:pPr>
+            <a:r>
+              <a:rPr sz="2000" b="1">
+                <a:solidFill>
+                  <a:srgbClr val="1F3355"/>
+                </a:solidFill>
+                <a:latin typeface="Meiryo UI"/>
+              </a:rPr>
+              <a:t>ルータが「私がゲートウェイだよ」と自分から言いに来ます</a:t>
+            </a:r>
+          </a:p>
+          <a:p>
+            <a:pPr lvl="1" algn="l">
+              <a:spcAft>
+                <a:spcPts val="600"/>
+              </a:spcAft>
+            </a:pPr>
+            <a:r>
+              <a:rPr sz="1700" b="0">
+                <a:solidFill>
+                  <a:srgbClr val="555555"/>
+                </a:solidFill>
+                <a:latin typeface="Meiryo UI"/>
+              </a:rPr>
+              <a:t>① 端末が「ルータいますか」と聞く</a:t>
+            </a:r>
+          </a:p>
+          <a:p>
+            <a:pPr lvl="1" algn="l">
+              <a:spcAft>
+                <a:spcPts val="600"/>
+              </a:spcAft>
+            </a:pPr>
+            <a:r>
+              <a:rPr sz="1700" b="0">
+                <a:solidFill>
+                  <a:srgbClr val="555555"/>
+                </a:solidFill>
+                <a:latin typeface="Meiryo UI"/>
+              </a:rPr>
+              <a:t>② ルータが「私がいます。住所の前半はこれです」と答える ← これが RA</a:t>
+            </a:r>
+          </a:p>
+          <a:p>
+            <a:pPr lvl="1" algn="l">
+              <a:spcAft>
+                <a:spcPts val="600"/>
+              </a:spcAft>
+            </a:pPr>
+            <a:r>
+              <a:rPr sz="1700" b="0">
+                <a:solidFill>
+                  <a:srgbClr val="555555"/>
+                </a:solidFill>
+                <a:latin typeface="Meiryo UI"/>
+              </a:rPr>
+              <a:t>③ 端末が住所の後半を自分で作ってアドレスを完成させる ← これを自動設定と呼びます</a:t>
+            </a:r>
+          </a:p>
+          <a:p>
+            <a:pPr algn="l">
+              <a:spcAft>
+                <a:spcPts val="1000"/>
+              </a:spcAft>
+            </a:pPr>
+            <a:r>
+              <a:rPr sz="2000" b="1">
+                <a:solidFill>
+                  <a:srgbClr val="1F3355"/>
+                </a:solidFill>
+                <a:latin typeface="Meiryo UI"/>
+              </a:rPr>
+              <a:t>IPv4 の DHCP と何が違うのか</a:t>
+            </a:r>
+          </a:p>
+          <a:p>
+            <a:pPr lvl="1" algn="l">
+              <a:spcAft>
+                <a:spcPts val="600"/>
+              </a:spcAft>
+            </a:pPr>
+            <a:r>
+              <a:rPr sz="1700" b="0">
+                <a:solidFill>
+                  <a:srgbClr val="555555"/>
+                </a:solidFill>
+                <a:latin typeface="Meiryo UI"/>
+              </a:rPr>
+              <a:t>IPv4 … 端末が聞きに行って、サーバが住所をまるごと渡す</a:t>
+            </a:r>
+          </a:p>
+          <a:p>
+            <a:pPr lvl="1" algn="l">
+              <a:spcAft>
+                <a:spcPts val="600"/>
+              </a:spcAft>
+            </a:pPr>
+            <a:r>
+              <a:rPr sz="1700" b="0">
+                <a:solidFill>
+                  <a:srgbClr val="555555"/>
+                </a:solidFill>
+                <a:latin typeface="Meiryo UI"/>
+              </a:rPr>
+              <a:t>IPv6 … ルータが前半だけ配って、後半は端末が自分で決める</a:t>
+            </a:r>
+          </a:p>
+          <a:p>
+            <a:pPr algn="l">
+              <a:spcAft>
+                <a:spcPts val="1000"/>
+              </a:spcAft>
+            </a:pPr>
+            <a:r>
+              <a:rPr sz="2000" b="1">
+                <a:solidFill>
+                  <a:srgbClr val="C0392B"/>
+                </a:solidFill>
+                <a:latin typeface="Meiryo UI"/>
+              </a:rPr>
+              <a:t>よくある誤解: 「アドレスが 2 つ以上付いている」のは正常です</a:t>
+            </a:r>
+          </a:p>
+          <a:p>
+            <a:pPr lvl="1" algn="l">
+              <a:spcAft>
+                <a:spcPts val="600"/>
+              </a:spcAft>
+            </a:pPr>
+            <a:r>
+              <a:rPr sz="1700" b="0">
+                <a:solidFill>
+                  <a:srgbClr val="555555"/>
+                </a:solidFill>
+                <a:latin typeface="Meiryo UI"/>
+              </a:rPr>
+              <a:t>住所を配る係 (DHCPv6) を併用しても、自分で作るのは止まりません。両方動きます</a:t>
+            </a:r>
+          </a:p>
+          <a:p>
+            <a:pPr algn="l">
+              <a:spcAft>
+                <a:spcPts val="1000"/>
+              </a:spcAft>
+            </a:pPr>
+            <a:r>
+              <a:rPr sz="2000" b="1">
+                <a:solidFill>
+                  <a:srgbClr val="1F3355"/>
+                </a:solidFill>
+                <a:latin typeface="Meiryo UI"/>
+              </a:rPr>
+              <a:t>ルータがもらう /56 は別の話。アドレスではなく「住所の前半」をまとめて借りるものです</a:t>
+            </a:r>
+          </a:p>
+        </p:txBody>
+      </p:sp>
+      <p:sp>
+        <p:nvSpPr>
+          <p:cNvPr id="5" name="TextBox 4"/>
+          <p:cNvSpPr txBox="1"/>
+          <p:nvPr/>
+        </p:nvSpPr>
+        <p:spPr>
+          <a:xfrm>
+            <a:off x="594360" y="6217920"/>
+            <a:ext cx="10972800" cy="502920"/>
+          </a:xfrm>
+          <a:prstGeom prst="rect">
+            <a:avLst/>
+          </a:prstGeom>
+          <a:noFill/>
+        </p:spPr>
+        <p:txBody>
+          <a:bodyPr wrap="square">
+            <a:spAutoFit/>
+          </a:bodyPr>
+          <a:lstStyle/>
+          <a:p>
+            <a:pPr algn="l"/>
+            <a:r>
+              <a:rPr sz="1200" b="0">
+                <a:solidFill>
+                  <a:srgbClr val="007ACC"/>
+                </a:solidFill>
+                <a:latin typeface="Meiryo UI"/>
+              </a:rPr>
+              <a:t>教科書: 第6章 (p.127) / 7.1「SLAAC の流れ」(p.160) / 第8章「DHCPv6」(p.179) / 8.7 (p.201)</a:t>
+            </a:r>
+          </a:p>
+        </p:txBody>
+      </p:sp>
+    </p:spTree>
+  </p:cSld>
+  <p:clrMapOvr>
+    <a:masterClrMapping/>
+  </p:clrMapOvr>
+</p:sld>
+</file>
+
+<file path=ppt/slides/slide13.xml><?xml version="1.0" encoding="utf-8"?>
 <p:sld xmlns:a="http://schemas.openxmlformats.org/drawingml/2006/main" xmlns:p="http://schemas.openxmlformats.org/presentationml/2006/main" xmlns:r="http://schemas.openxmlformats.org/officeDocument/2006/relationships">
   <p:cSld>
     <p:spTree>
@@ -3777,7 +4440,7 @@
 </p:sld>
 </file>
 
-<file path=ppt/slides/slide12.xml><?xml version="1.0" encoding="utf-8"?>
+<file path=ppt/slides/slide14.xml><?xml version="1.0" encoding="utf-8"?>
 <p:sld xmlns:a="http://schemas.openxmlformats.org/drawingml/2006/main" xmlns:p="http://schemas.openxmlformats.org/presentationml/2006/main" xmlns:r="http://schemas.openxmlformats.org/officeDocument/2006/relationships">
   <p:cSld>
     <p:spTree>
@@ -4314,7 +4977,7 @@
 </p:sld>
 </file>
 
-<file path=ppt/slides/slide13.xml><?xml version="1.0" encoding="utf-8"?>
+<file path=ppt/slides/slide15.xml><?xml version="1.0" encoding="utf-8"?>
 <p:sld xmlns:a="http://schemas.openxmlformats.org/drawingml/2006/main" xmlns:p="http://schemas.openxmlformats.org/presentationml/2006/main" xmlns:r="http://schemas.openxmlformats.org/officeDocument/2006/relationships">
   <p:cSld>
     <p:spTree>
@@ -4751,7 +5414,7 @@
                 </a:solidFill>
                 <a:latin typeface="Meiryo UI"/>
               </a:rPr>
-              <a:t>※ 切替当日は PPPoE を落としてから IPoE に切り替えてください。</a:t>
+              <a:t>※ PPPoE を電源断などで乱暴に切ると、網側にセッションが 1 分ほど残り、その間は再接続できません。</a:t>
             </a:r>
           </a:p>
           <a:p>
@@ -4767,7 +5430,7 @@
                 </a:solidFill>
                 <a:latin typeface="Meiryo UI"/>
               </a:rPr>
-              <a:t>  セッションが残っていると、原因の分からない不通になります。</a:t>
+              <a:t>  再接続すると払い出しアドレスが変わることも。切替は「正常に切断 → IPoE を確認 → 戻すときは 1 分待つ」の順で。</a:t>
             </a:r>
           </a:p>
           <a:p>
@@ -4796,7 +5459,7 @@
 </p:sld>
 </file>
 
-<file path=ppt/slides/slide14.xml><?xml version="1.0" encoding="utf-8"?>
+<file path=ppt/slides/slide16.xml><?xml version="1.0" encoding="utf-8"?>
 <p:sld xmlns:a="http://schemas.openxmlformats.org/drawingml/2006/main" xmlns:p="http://schemas.openxmlformats.org/presentationml/2006/main" xmlns:r="http://schemas.openxmlformats.org/officeDocument/2006/relationships">
   <p:cSld>
     <p:spTree>
@@ -4851,7 +5514,7 @@
         </p:nvGraphicFramePr>
         <p:xfrm>
           <a:off x="502920" y="1143000"/>
-          <a:ext cx="10881360" cy="2304288"/>
+          <a:ext cx="10881360" cy="2618232"/>
         </p:xfrm>
         <a:graphic>
           <a:graphicData uri="http://schemas.openxmlformats.org/drawingml/2006/table">
@@ -4864,7 +5527,7 @@
                 <a:gridCol w="4480560"/>
                 <a:gridCol w="4023360"/>
               </a:tblGrid>
-              <a:tr h="384048">
+              <a:tr h="327279">
                 <a:tc>
                   <a:txBody>
                     <a:bodyPr/>
@@ -4935,7 +5598,7 @@
                   </a:tcPr>
                 </a:tc>
               </a:tr>
-              <a:tr h="384048">
+              <a:tr h="327279">
                 <a:tc>
                   <a:txBody>
                     <a:bodyPr/>
@@ -4949,7 +5612,7 @@
                           </a:solidFill>
                           <a:latin typeface="Meiryo UI"/>
                         </a:rPr>
-                        <a:t>誰が NAT するか</a:t>
+                        <a:t>【宅配便でいうと】誰が仕分けするか</a:t>
                       </a:r>
                     </a:p>
                   </a:txBody>
@@ -4972,7 +5635,7 @@
                           </a:solidFill>
                           <a:latin typeface="Meiryo UI"/>
                         </a:rPr>
-                        <a:t>CPE (お客様のルータ)</a:t>
+                        <a:t>お客様のルータが自分でやる</a:t>
                       </a:r>
                     </a:p>
                   </a:txBody>
@@ -4995,7 +5658,7 @@
                           </a:solidFill>
                           <a:latin typeface="Meiryo UI"/>
                         </a:rPr>
-                        <a:t>網側 (AFTR という装置)</a:t>
+                        <a:t>高速の出口にいる業者がやる</a:t>
                       </a:r>
                     </a:p>
                   </a:txBody>
@@ -5006,7 +5669,149 @@
                   </a:tcPr>
                 </a:tc>
               </a:tr>
-              <a:tr h="384048">
+              <a:tr h="327279">
+                <a:tc>
+                  <a:txBody>
+                    <a:bodyPr/>
+                    <a:lstStyle/>
+                    <a:p>
+                      <a:pPr algn="l"/>
+                      <a:r>
+                        <a:rPr sz="1200" b="0">
+                          <a:solidFill>
+                            <a:srgbClr val="1F3355"/>
+                          </a:solidFill>
+                          <a:latin typeface="Meiryo UI"/>
+                        </a:rPr>
+                        <a:t>【宅配便でいうと】その結果</a:t>
+                      </a:r>
+                    </a:p>
+                  </a:txBody>
+                  <a:tcPr>
+                    <a:solidFill>
+                      <a:srgbClr val="F2F6FA"/>
+                    </a:solidFill>
+                  </a:tcPr>
+                </a:tc>
+                <a:tc>
+                  <a:txBody>
+                    <a:bodyPr/>
+                    <a:lstStyle/>
+                    <a:p>
+                      <a:pPr algn="l"/>
+                      <a:r>
+                        <a:rPr sz="1200" b="0">
+                          <a:solidFill>
+                            <a:srgbClr val="1F3355"/>
+                          </a:solidFill>
+                          <a:latin typeface="Meiryo UI"/>
+                        </a:rPr>
+                        <a:t>使える伝票番号が あらかじめ決まっている</a:t>
+                      </a:r>
+                    </a:p>
+                  </a:txBody>
+                  <a:tcPr>
+                    <a:solidFill>
+                      <a:srgbClr val="F2F6FA"/>
+                    </a:solidFill>
+                  </a:tcPr>
+                </a:tc>
+                <a:tc>
+                  <a:txBody>
+                    <a:bodyPr/>
+                    <a:lstStyle/>
+                    <a:p>
+                      <a:pPr algn="l"/>
+                      <a:r>
+                        <a:rPr sz="1200" b="0">
+                          <a:solidFill>
+                            <a:srgbClr val="1F3355"/>
+                          </a:solidFill>
+                          <a:latin typeface="Meiryo UI"/>
+                        </a:rPr>
+                        <a:t>伝票が自分では見えない</a:t>
+                      </a:r>
+                    </a:p>
+                  </a:txBody>
+                  <a:tcPr>
+                    <a:solidFill>
+                      <a:srgbClr val="F2F6FA"/>
+                    </a:solidFill>
+                  </a:tcPr>
+                </a:tc>
+              </a:tr>
+              <a:tr h="327279">
+                <a:tc>
+                  <a:txBody>
+                    <a:bodyPr/>
+                    <a:lstStyle/>
+                    <a:p>
+                      <a:pPr algn="l"/>
+                      <a:r>
+                        <a:rPr sz="1200" b="0">
+                          <a:solidFill>
+                            <a:srgbClr val="1F3355"/>
+                          </a:solidFill>
+                          <a:latin typeface="Meiryo UI"/>
+                        </a:rPr>
+                        <a:t>誰が変換するか</a:t>
+                      </a:r>
+                    </a:p>
+                  </a:txBody>
+                  <a:tcPr>
+                    <a:solidFill>
+                      <a:srgbClr val="FFFFFF"/>
+                    </a:solidFill>
+                  </a:tcPr>
+                </a:tc>
+                <a:tc>
+                  <a:txBody>
+                    <a:bodyPr/>
+                    <a:lstStyle/>
+                    <a:p>
+                      <a:pPr algn="l"/>
+                      <a:r>
+                        <a:rPr sz="1200" b="0">
+                          <a:solidFill>
+                            <a:srgbClr val="1F3355"/>
+                          </a:solidFill>
+                          <a:latin typeface="Meiryo UI"/>
+                        </a:rPr>
+                        <a:t>お客様のルータ</a:t>
+                      </a:r>
+                    </a:p>
+                  </a:txBody>
+                  <a:tcPr>
+                    <a:solidFill>
+                      <a:srgbClr val="FFFFFF"/>
+                    </a:solidFill>
+                  </a:tcPr>
+                </a:tc>
+                <a:tc>
+                  <a:txBody>
+                    <a:bodyPr/>
+                    <a:lstStyle/>
+                    <a:p>
+                      <a:pPr algn="l"/>
+                      <a:r>
+                        <a:rPr sz="1200" b="0">
+                          <a:solidFill>
+                            <a:srgbClr val="1F3355"/>
+                          </a:solidFill>
+                          <a:latin typeface="Meiryo UI"/>
+                        </a:rPr>
+                        <a:t>網側の装置 (AFTR と呼びます)</a:t>
+                      </a:r>
+                    </a:p>
+                  </a:txBody>
+                  <a:tcPr>
+                    <a:solidFill>
+                      <a:srgbClr val="FFFFFF"/>
+                    </a:solidFill>
+                  </a:tcPr>
+                </a:tc>
+              </a:tr>
+              <a:tr h="327279">
                 <a:tc>
                   <a:txBody>
                     <a:bodyPr/>
@@ -5077,7 +5882,7 @@
                   </a:tcPr>
                 </a:tc>
               </a:tr>
-              <a:tr h="384048">
+              <a:tr h="327279">
                 <a:tc>
                   <a:txBody>
                     <a:bodyPr/>
@@ -5148,7 +5953,7 @@
                   </a:tcPr>
                 </a:tc>
               </a:tr>
-              <a:tr h="384048">
+              <a:tr h="327279">
                 <a:tc>
                   <a:txBody>
                     <a:bodyPr/>
@@ -5219,7 +6024,7 @@
                   </a:tcPr>
                 </a:tc>
               </a:tr>
-              <a:tr h="384048">
+              <a:tr h="327279">
                 <a:tc>
                   <a:txBody>
                     <a:bodyPr/>
@@ -5302,7 +6107,7 @@
         </p:nvSpPr>
         <p:spPr>
           <a:xfrm>
-            <a:off x="502920" y="3630168"/>
+            <a:off x="502920" y="4017264"/>
             <a:ext cx="11155680" cy="548640"/>
           </a:xfrm>
           <a:prstGeom prst="rect">
@@ -5337,7 +6142,7 @@
 </p:sld>
 </file>
 
-<file path=ppt/slides/slide15.xml><?xml version="1.0" encoding="utf-8"?>
+<file path=ppt/slides/slide17.xml><?xml version="1.0" encoding="utf-8"?>
 <p:sld xmlns:a="http://schemas.openxmlformats.org/drawingml/2006/main" xmlns:p="http://schemas.openxmlformats.org/presentationml/2006/main" xmlns:r="http://schemas.openxmlformats.org/officeDocument/2006/relationships">
   <p:cSld>
     <p:spTree>
@@ -5392,7 +6197,7 @@
         </p:nvGraphicFramePr>
         <p:xfrm>
           <a:off x="502920" y="1143000"/>
-          <a:ext cx="10881360" cy="3072384"/>
+          <a:ext cx="10881360" cy="2487168"/>
         </p:xfrm>
         <a:graphic>
           <a:graphicData uri="http://schemas.openxmlformats.org/drawingml/2006/table">
@@ -5406,7 +6211,7 @@
                 <a:gridCol w="1463040"/>
                 <a:gridCol w="3017520"/>
               </a:tblGrid>
-              <a:tr h="384048">
+              <a:tr h="310896">
                 <a:tc>
                   <a:txBody>
                     <a:bodyPr/>
@@ -5500,7 +6305,7 @@
                   </a:tcPr>
                 </a:tc>
               </a:tr>
-              <a:tr h="384048">
+              <a:tr h="310896">
                 <a:tc>
                   <a:txBody>
                     <a:bodyPr/>
@@ -5594,7 +6399,7 @@
                   </a:tcPr>
                 </a:tc>
               </a:tr>
-              <a:tr h="384048">
+              <a:tr h="310896">
                 <a:tc>
                   <a:txBody>
                     <a:bodyPr/>
@@ -5688,7 +6493,7 @@
                   </a:tcPr>
                 </a:tc>
               </a:tr>
-              <a:tr h="384048">
+              <a:tr h="310896">
                 <a:tc>
                   <a:txBody>
                     <a:bodyPr/>
@@ -5782,7 +6587,7 @@
                   </a:tcPr>
                 </a:tc>
               </a:tr>
-              <a:tr h="384048">
+              <a:tr h="310896">
                 <a:tc>
                   <a:txBody>
                     <a:bodyPr/>
@@ -5876,7 +6681,7 @@
                   </a:tcPr>
                 </a:tc>
               </a:tr>
-              <a:tr h="384048">
+              <a:tr h="310896">
                 <a:tc>
                   <a:txBody>
                     <a:bodyPr/>
@@ -5970,7 +6775,7 @@
                   </a:tcPr>
                 </a:tc>
               </a:tr>
-              <a:tr h="384048">
+              <a:tr h="310896">
                 <a:tc>
                   <a:txBody>
                     <a:bodyPr/>
@@ -6064,7 +6869,7 @@
                   </a:tcPr>
                 </a:tc>
               </a:tr>
-              <a:tr h="384048">
+              <a:tr h="310896">
                 <a:tc>
                   <a:txBody>
                     <a:bodyPr/>
@@ -6170,7 +6975,7 @@
         </p:nvSpPr>
         <p:spPr>
           <a:xfrm>
-            <a:off x="502920" y="4398264"/>
+            <a:off x="502920" y="3886200"/>
             <a:ext cx="11155680" cy="548640"/>
           </a:xfrm>
           <a:prstGeom prst="rect">
@@ -6205,7 +7010,7 @@
 </p:sld>
 </file>
 
-<file path=ppt/slides/slide16.xml><?xml version="1.0" encoding="utf-8"?>
+<file path=ppt/slides/slide18.xml><?xml version="1.0" encoding="utf-8"?>
 <p:sld xmlns:a="http://schemas.openxmlformats.org/drawingml/2006/main" xmlns:p="http://schemas.openxmlformats.org/presentationml/2006/main" xmlns:r="http://schemas.openxmlformats.org/officeDocument/2006/relationships">
   <p:cSld>
     <p:spTree>
@@ -6329,7 +7134,7 @@
 </p:sld>
 </file>
 
-<file path=ppt/slides/slide17.xml><?xml version="1.0" encoding="utf-8"?>
+<file path=ppt/slides/slide19.xml><?xml version="1.0" encoding="utf-8"?>
 <p:sld xmlns:a="http://schemas.openxmlformats.org/drawingml/2006/main" xmlns:p="http://schemas.openxmlformats.org/presentationml/2006/main" xmlns:r="http://schemas.openxmlformats.org/officeDocument/2006/relationships">
   <p:cSld>
     <p:spTree>
@@ -6426,7 +7231,7 @@
         <p:spPr>
           <a:xfrm>
             <a:off x="594360" y="1371600"/>
-            <a:ext cx="10972800" cy="4846320"/>
+            <a:ext cx="10972800" cy="4709160"/>
           </a:xfrm>
           <a:prstGeom prst="rect">
             <a:avLst/>
@@ -6441,7 +7246,7 @@
           <a:p>
             <a:pPr algn="l">
               <a:spcAft>
-                <a:spcPts val="700"/>
+                <a:spcPts val="1000"/>
               </a:spcAft>
             </a:pPr>
             <a:r>
@@ -6457,7 +7262,7 @@
           <a:p>
             <a:pPr lvl="1" algn="l">
               <a:spcAft>
-                <a:spcPts val="400"/>
+                <a:spcPts val="600"/>
               </a:spcAft>
             </a:pPr>
             <a:r>
@@ -6473,7 +7278,7 @@
           <a:p>
             <a:pPr lvl="1" algn="l">
               <a:spcAft>
-                <a:spcPts val="400"/>
+                <a:spcPts val="600"/>
               </a:spcAft>
             </a:pPr>
             <a:r>
@@ -6489,7 +7294,7 @@
           <a:p>
             <a:pPr lvl="1" algn="l">
               <a:spcAft>
-                <a:spcPts val="400"/>
+                <a:spcPts val="600"/>
               </a:spcAft>
             </a:pPr>
             <a:r>
@@ -6505,7 +7310,7 @@
           <a:p>
             <a:pPr algn="l">
               <a:spcAft>
-                <a:spcPts val="700"/>
+                <a:spcPts val="1000"/>
               </a:spcAft>
             </a:pPr>
             <a:r>
@@ -6521,7 +7326,7 @@
           <a:p>
             <a:pPr lvl="1" algn="l">
               <a:spcAft>
-                <a:spcPts val="400"/>
+                <a:spcPts val="600"/>
               </a:spcAft>
             </a:pPr>
             <a:r>
@@ -6537,7 +7342,7 @@
           <a:p>
             <a:pPr lvl="1" algn="l">
               <a:spcAft>
-                <a:spcPts val="400"/>
+                <a:spcPts val="600"/>
               </a:spcAft>
             </a:pPr>
             <a:r>
@@ -6553,7 +7358,7 @@
           <a:p>
             <a:pPr algn="l">
               <a:spcAft>
-                <a:spcPts val="700"/>
+                <a:spcPts val="1000"/>
               </a:spcAft>
             </a:pPr>
             <a:r>
@@ -6569,7 +7374,7 @@
           <a:p>
             <a:pPr lvl="1" algn="l">
               <a:spcAft>
-                <a:spcPts val="400"/>
+                <a:spcPts val="600"/>
               </a:spcAft>
             </a:pPr>
             <a:r>
@@ -6585,7 +7390,7 @@
           <a:p>
             <a:pPr lvl="1" algn="l">
               <a:spcAft>
-                <a:spcPts val="400"/>
+                <a:spcPts val="600"/>
               </a:spcAft>
             </a:pPr>
             <a:r>
@@ -6608,8 +7413,8 @@
         </p:nvSpPr>
         <p:spPr>
           <a:xfrm>
-            <a:off x="594360" y="6263640"/>
-            <a:ext cx="10972800" cy="457200"/>
+            <a:off x="594360" y="6217920"/>
+            <a:ext cx="10972800" cy="502920"/>
           </a:xfrm>
           <a:prstGeom prst="rect">
             <a:avLst/>
@@ -6624,13 +7429,13 @@
           <a:p>
             <a:pPr algn="l"/>
             <a:r>
-              <a:rPr sz="1200" b="0">
+              <a:rPr sz="1100" b="0">
                 <a:solidFill>
                   <a:srgbClr val="007ACC"/>
                 </a:solidFill>
                 <a:latin typeface="Meiryo UI"/>
               </a:rPr>
-              <a:t>教科書: 第24章「IPv4 アドレス共有」(p.421〜) / 21.1「IPv4/IPv6 共存技術のバリエーション」(p.381)</a:t>
+              <a:t>教科書: 第24章「IPv4/IPv6 共存技術の運用形態」24.1〜24.4(p.421〜) / 第21章「IPv4/IPv6 共存技術の分類」21.1(p.381)</a:t>
             </a:r>
           </a:p>
         </p:txBody>
@@ -6643,7 +7448,131 @@
 </p:sld>
 </file>
 
-<file path=ppt/slides/slide18.xml><?xml version="1.0" encoding="utf-8"?>
+<file path=ppt/slides/slide2.xml><?xml version="1.0" encoding="utf-8"?>
+<p:sld xmlns:a="http://schemas.openxmlformats.org/drawingml/2006/main" xmlns:p="http://schemas.openxmlformats.org/presentationml/2006/main" xmlns:r="http://schemas.openxmlformats.org/officeDocument/2006/relationships">
+  <p:cSld>
+    <p:spTree>
+      <p:nvGrpSpPr>
+        <p:cNvPr id="1" name=""/>
+        <p:cNvGrpSpPr/>
+        <p:nvPr/>
+      </p:nvGrpSpPr>
+      <p:grpSpPr/>
+      <p:sp>
+        <p:nvSpPr>
+          <p:cNvPr id="2" name="Rectangle 1"/>
+          <p:cNvSpPr/>
+          <p:nvPr/>
+        </p:nvSpPr>
+        <p:spPr>
+          <a:xfrm>
+            <a:off x="0" y="0"/>
+            <a:ext cx="12191695" cy="6858000"/>
+          </a:xfrm>
+          <a:prstGeom prst="rect">
+            <a:avLst/>
+          </a:prstGeom>
+          <a:solidFill>
+            <a:srgbClr val="1F3355"/>
+          </a:solidFill>
+          <a:ln>
+            <a:noFill/>
+          </a:ln>
+        </p:spPr>
+        <p:style>
+          <a:lnRef idx="1">
+            <a:schemeClr val="accent1"/>
+          </a:lnRef>
+          <a:fillRef idx="3">
+            <a:schemeClr val="accent1"/>
+          </a:fillRef>
+          <a:effectRef idx="2">
+            <a:schemeClr val="accent1"/>
+          </a:effectRef>
+          <a:fontRef idx="minor">
+            <a:schemeClr val="lt1"/>
+          </a:fontRef>
+        </p:style>
+        <p:txBody>
+          <a:bodyPr rtlCol="0" anchor="ctr"/>
+          <a:lstStyle/>
+          <a:p>
+            <a:pPr algn="ctr"/>
+          </a:p>
+        </p:txBody>
+      </p:sp>
+      <p:sp>
+        <p:nvSpPr>
+          <p:cNvPr id="3" name="TextBox 2"/>
+          <p:cNvSpPr txBox="1"/>
+          <p:nvPr/>
+        </p:nvSpPr>
+        <p:spPr>
+          <a:xfrm>
+            <a:off x="914400" y="2194560"/>
+            <a:ext cx="10332720" cy="2377440"/>
+          </a:xfrm>
+          <a:prstGeom prst="rect">
+            <a:avLst/>
+          </a:prstGeom>
+          <a:noFill/>
+        </p:spPr>
+        <p:txBody>
+          <a:bodyPr wrap="square">
+            <a:spAutoFit/>
+          </a:bodyPr>
+          <a:lstStyle/>
+          <a:p>
+            <a:pPr algn="l"/>
+            <a:r>
+              <a:rPr sz="2000" b="1">
+                <a:solidFill>
+                  <a:srgbClr val="7FB8E0"/>
+                </a:solidFill>
+                <a:latin typeface="Meiryo UI"/>
+              </a:rPr>
+              <a:t>第0部</a:t>
+            </a:r>
+          </a:p>
+          <a:p>
+            <a:pPr algn="l"/>
+            <a:r>
+              <a:rPr sz="3600" b="1">
+                <a:solidFill>
+                  <a:srgbClr val="FFFFFF"/>
+                </a:solidFill>
+                <a:latin typeface="Meiryo UI"/>
+              </a:rPr>
+              <a:t>なぜこの話をするのか</a:t>
+            </a:r>
+          </a:p>
+          <a:p>
+            <a:pPr algn="l">
+              <a:spcBef>
+                <a:spcPts val="1600"/>
+              </a:spcBef>
+            </a:pPr>
+            <a:r>
+              <a:rPr sz="1600" b="0">
+                <a:solidFill>
+                  <a:srgbClr val="D5E5F2"/>
+                </a:solidFill>
+                <a:latin typeface="Meiryo UI"/>
+              </a:rPr>
+              <a:t>ゴール: 今日の地図と、出てくる言葉を先に配ります</a:t>
+            </a:r>
+          </a:p>
+        </p:txBody>
+      </p:sp>
+    </p:spTree>
+  </p:cSld>
+  <p:clrMapOvr>
+    <a:masterClrMapping/>
+  </p:clrMapOvr>
+</p:sld>
+</file>
+
+<file path=ppt/slides/slide20.xml><?xml version="1.0" encoding="utf-8"?>
 <p:sld xmlns:a="http://schemas.openxmlformats.org/drawingml/2006/main" xmlns:p="http://schemas.openxmlformats.org/presentationml/2006/main" xmlns:r="http://schemas.openxmlformats.org/officeDocument/2006/relationships">
   <p:cSld>
     <p:spTree>
@@ -6683,7 +7612,7 @@
                 </a:solidFill>
                 <a:latin typeface="Meiryo UI"/>
               </a:rPr>
-              <a:t>DS-Lite — CPE は包むだけ、NAT は網がやる</a:t>
+              <a:t>DS-Lite — お客様のルータは包むだけ、変換は網がやる</a:t>
             </a:r>
           </a:p>
         </p:txBody>
@@ -6740,7 +7669,7 @@
         <p:spPr>
           <a:xfrm>
             <a:off x="594360" y="1371600"/>
-            <a:ext cx="10972800" cy="4846320"/>
+            <a:ext cx="10972800" cy="4709160"/>
           </a:xfrm>
           <a:prstGeom prst="rect">
             <a:avLst/>
@@ -6755,91 +7684,107 @@
           <a:p>
             <a:pPr algn="l">
               <a:spcAft>
-                <a:spcPts val="700"/>
-              </a:spcAft>
-            </a:pPr>
-            <a:r>
-              <a:rPr sz="2000" b="0">
+                <a:spcPts val="900"/>
+              </a:spcAft>
+            </a:pPr>
+            <a:r>
+              <a:rPr sz="1900" b="0">
                 <a:solidFill>
                   <a:srgbClr val="0B6040"/>
                 </a:solidFill>
                 <a:latin typeface="Consolas"/>
               </a:rPr>
-              <a:t>PC 192.168.1.10 → CPE で IPv6 の箱に詰める → AFTR で箱を開けて NAT → インターネット</a:t>
+              <a:t>PC → お客様のルータで IPv6 の箱に詰める → 網側の装置で箱を開けて変換 → インターネット</a:t>
             </a:r>
           </a:p>
           <a:p>
             <a:pPr algn="l">
               <a:spcAft>
-                <a:spcPts val="700"/>
-              </a:spcAft>
-            </a:pPr>
-            <a:r>
-              <a:rPr sz="2000" b="1">
+                <a:spcPts val="900"/>
+              </a:spcAft>
+            </a:pPr>
+            <a:r>
+              <a:rPr sz="1900" b="1">
                 <a:solidFill>
                   <a:srgbClr val="1F3355"/>
                 </a:solidFill>
                 <a:latin typeface="Meiryo UI"/>
               </a:rPr>
+              <a:t>冒頭の宅配便で「出口の業者が仕分けする」と言ったのが、これです</a:t>
+            </a:r>
+          </a:p>
+          <a:p>
+            <a:pPr algn="l">
+              <a:spcAft>
+                <a:spcPts val="900"/>
+              </a:spcAft>
+            </a:pPr>
+            <a:r>
+              <a:rPr sz="1900" b="1">
+                <a:solidFill>
+                  <a:srgbClr val="1F3355"/>
+                </a:solidFill>
+                <a:latin typeface="Meiryo UI"/>
+              </a:rPr>
               <a:t>特徴</a:t>
             </a:r>
           </a:p>
           <a:p>
             <a:pPr lvl="1" algn="l">
               <a:spcAft>
-                <a:spcPts val="400"/>
-              </a:spcAft>
-            </a:pPr>
-            <a:r>
-              <a:rPr sz="1700" b="0">
+                <a:spcPts val="500"/>
+              </a:spcAft>
+            </a:pPr>
+            <a:r>
+              <a:rPr sz="1600" b="0">
                 <a:solidFill>
                   <a:srgbClr val="555555"/>
                 </a:solidFill>
                 <a:latin typeface="Meiryo UI"/>
               </a:rPr>
-              <a:t>CPE は NAT をしません。トンネルの入口 (B4) になるだけです</a:t>
+              <a:t>お客様のルータは アドレスの書き換え (NAT) をしません。ただの入口になるだけです</a:t>
             </a:r>
           </a:p>
           <a:p>
             <a:pPr lvl="1" algn="l">
               <a:spcAft>
-                <a:spcPts val="400"/>
-              </a:spcAft>
-            </a:pPr>
-            <a:r>
-              <a:rPr sz="1700" b="0">
+                <a:spcPts val="500"/>
+              </a:spcAft>
+            </a:pPr>
+            <a:r>
+              <a:rPr sz="1600" b="0">
                 <a:solidFill>
                   <a:srgbClr val="555555"/>
                 </a:solidFill>
                 <a:latin typeface="Meiryo UI"/>
               </a:rPr>
-              <a:t>NAT は網側の AFTR という装置がまとめてやります</a:t>
+              <a:t>変換は網側の装置 (AFTR) がまとめてやります</a:t>
             </a:r>
           </a:p>
           <a:p>
             <a:pPr lvl="1" algn="l">
               <a:spcAft>
-                <a:spcPts val="400"/>
-              </a:spcAft>
-            </a:pPr>
-            <a:r>
-              <a:rPr sz="1700" b="0">
+                <a:spcPts val="500"/>
+              </a:spcAft>
+            </a:pPr>
+            <a:r>
+              <a:rPr sz="1600" b="0">
                 <a:solidFill>
                   <a:srgbClr val="555555"/>
                 </a:solidFill>
                 <a:latin typeface="Meiryo UI"/>
               </a:rPr>
-              <a:t>だから CPE の負荷が軽く、設定も簡単です</a:t>
+              <a:t>だから お客様のルータの負荷が軽く、設定も簡単です</a:t>
             </a:r>
           </a:p>
           <a:p>
             <a:pPr algn="l">
               <a:spcAft>
-                <a:spcPts val="700"/>
-              </a:spcAft>
-            </a:pPr>
-            <a:r>
-              <a:rPr sz="2000" b="1">
+                <a:spcPts val="900"/>
+              </a:spcAft>
+            </a:pPr>
+            <a:r>
+              <a:rPr sz="1900" b="1">
                 <a:solidFill>
                   <a:srgbClr val="C0392B"/>
                 </a:solidFill>
@@ -6851,11 +7796,11 @@
           <a:p>
             <a:pPr lvl="1" algn="l">
               <a:spcAft>
-                <a:spcPts val="400"/>
-              </a:spcAft>
-            </a:pPr>
-            <a:r>
-              <a:rPr sz="1700" b="0">
+                <a:spcPts val="500"/>
+              </a:spcAft>
+            </a:pPr>
+            <a:r>
+              <a:rPr sz="1600" b="0">
                 <a:solidFill>
                   <a:srgbClr val="555555"/>
                 </a:solidFill>
@@ -6867,11 +7812,11 @@
           <a:p>
             <a:pPr algn="l">
               <a:spcAft>
-                <a:spcPts val="700"/>
-              </a:spcAft>
-            </a:pPr>
-            <a:r>
-              <a:rPr sz="2000" b="1">
+                <a:spcPts val="900"/>
+              </a:spcAft>
+            </a:pPr>
+            <a:r>
+              <a:rPr sz="1900" b="1">
                 <a:solidFill>
                   <a:srgbClr val="1F3355"/>
                 </a:solidFill>
@@ -6883,11 +7828,11 @@
           <a:p>
             <a:pPr lvl="1" algn="l">
               <a:spcAft>
-                <a:spcPts val="400"/>
-              </a:spcAft>
-            </a:pPr>
-            <a:r>
-              <a:rPr sz="1700" b="0">
+                <a:spcPts val="500"/>
+              </a:spcAft>
+            </a:pPr>
+            <a:r>
+              <a:rPr sz="1600" b="0">
                 <a:solidFill>
                   <a:srgbClr val="555555"/>
                 </a:solidFill>
@@ -6899,11 +7844,11 @@
           <a:p>
             <a:pPr lvl="1" algn="l">
               <a:spcAft>
-                <a:spcPts val="400"/>
-              </a:spcAft>
-            </a:pPr>
-            <a:r>
-              <a:rPr sz="1700" b="0">
+                <a:spcPts val="500"/>
+              </a:spcAft>
+            </a:pPr>
+            <a:r>
+              <a:rPr sz="1600" b="0">
                 <a:solidFill>
                   <a:srgbClr val="555555"/>
                 </a:solidFill>
@@ -6922,8 +7867,8 @@
         </p:nvSpPr>
         <p:spPr>
           <a:xfrm>
-            <a:off x="594360" y="6263640"/>
-            <a:ext cx="10972800" cy="457200"/>
+            <a:off x="594360" y="6217920"/>
+            <a:ext cx="10972800" cy="502920"/>
           </a:xfrm>
           <a:prstGeom prst="rect">
             <a:avLst/>
@@ -6957,7 +7902,7 @@
 </p:sld>
 </file>
 
-<file path=ppt/slides/slide19.xml><?xml version="1.0" encoding="utf-8"?>
+<file path=ppt/slides/slide21.xml><?xml version="1.0" encoding="utf-8"?>
 <p:sld xmlns:a="http://schemas.openxmlformats.org/drawingml/2006/main" xmlns:p="http://schemas.openxmlformats.org/presentationml/2006/main" xmlns:r="http://schemas.openxmlformats.org/officeDocument/2006/relationships">
   <p:cSld>
     <p:spTree>
@@ -7054,7 +7999,7 @@
         <p:spPr>
           <a:xfrm>
             <a:off x="594360" y="1371600"/>
-            <a:ext cx="10972800" cy="4846320"/>
+            <a:ext cx="10972800" cy="4709160"/>
           </a:xfrm>
           <a:prstGeom prst="rect">
             <a:avLst/>
@@ -7069,7 +8014,7 @@
           <a:p>
             <a:pPr algn="l">
               <a:spcAft>
-                <a:spcPts val="700"/>
+                <a:spcPts val="1000"/>
               </a:spcAft>
             </a:pPr>
             <a:r>
@@ -7085,7 +8030,7 @@
           <a:p>
             <a:pPr lvl="1" algn="l">
               <a:spcAft>
-                <a:spcPts val="400"/>
+                <a:spcPts val="600"/>
               </a:spcAft>
             </a:pPr>
             <a:r>
@@ -7101,7 +8046,7 @@
           <a:p>
             <a:pPr lvl="1" algn="l">
               <a:spcAft>
-                <a:spcPts val="400"/>
+                <a:spcPts val="600"/>
               </a:spcAft>
             </a:pPr>
             <a:r>
@@ -7117,7 +8062,7 @@
           <a:p>
             <a:pPr lvl="1" algn="l">
               <a:spcAft>
-                <a:spcPts val="400"/>
+                <a:spcPts val="600"/>
               </a:spcAft>
             </a:pPr>
             <a:r>
@@ -7127,13 +8072,13 @@
                 </a:solidFill>
                 <a:latin typeface="Meiryo UI"/>
               </a:rPr>
-              <a:t>どのアドレスとどのポートかは、降ってきた IPv6 プレフィックスから計算で決まります</a:t>
+              <a:t>どれを使うかは、降ってきた IPv6 の「住所の前半」(プレフィックス) から計算で決まります</a:t>
             </a:r>
           </a:p>
           <a:p>
             <a:pPr algn="l">
               <a:spcAft>
-                <a:spcPts val="700"/>
+                <a:spcPts val="1000"/>
               </a:spcAft>
             </a:pPr>
             <a:r>
@@ -7149,7 +8094,7 @@
           <a:p>
             <a:pPr lvl="1" algn="l">
               <a:spcAft>
-                <a:spcPts val="400"/>
+                <a:spcPts val="600"/>
               </a:spcAft>
             </a:pPr>
             <a:r>
@@ -7165,7 +8110,7 @@
           <a:p>
             <a:pPr lvl="1" algn="l">
               <a:spcAft>
-                <a:spcPts val="400"/>
+                <a:spcPts val="600"/>
               </a:spcAft>
             </a:pPr>
             <a:r>
@@ -7181,7 +8126,7 @@
           <a:p>
             <a:pPr lvl="1" algn="l">
               <a:spcAft>
-                <a:spcPts val="400"/>
+                <a:spcPts val="600"/>
               </a:spcAft>
             </a:pPr>
             <a:r>
@@ -7191,13 +8136,13 @@
                 </a:solidFill>
                 <a:latin typeface="Consolas"/>
               </a:rPr>
-              <a:t>使えるポート        16 個ずつ × 15 塊 = 240 個  (最初の塊は 4176〜4191)</a:t>
+              <a:t>使えるポート        240 個 (連続ではなく、とびとびの番号。最初は 4176〜4191)</a:t>
             </a:r>
           </a:p>
           <a:p>
             <a:pPr algn="l">
               <a:spcAft>
-                <a:spcPts val="700"/>
+                <a:spcPts val="1000"/>
               </a:spcAft>
             </a:pPr>
             <a:r>
@@ -7213,7 +8158,7 @@
           <a:p>
             <a:pPr lvl="1" algn="l">
               <a:spcAft>
-                <a:spcPts val="400"/>
+                <a:spcPts val="600"/>
               </a:spcAft>
             </a:pPr>
             <a:r>
@@ -7229,7 +8174,7 @@
           <a:p>
             <a:pPr lvl="1" algn="l">
               <a:spcAft>
-                <a:spcPts val="400"/>
+                <a:spcPts val="600"/>
               </a:spcAft>
             </a:pPr>
             <a:r>
@@ -7245,7 +8190,7 @@
           <a:p>
             <a:pPr lvl="1" algn="l">
               <a:spcAft>
-                <a:spcPts val="400"/>
+                <a:spcPts val="600"/>
               </a:spcAft>
             </a:pPr>
             <a:r>
@@ -7268,8 +8213,8 @@
         </p:nvSpPr>
         <p:spPr>
           <a:xfrm>
-            <a:off x="594360" y="6263640"/>
-            <a:ext cx="10972800" cy="457200"/>
+            <a:off x="594360" y="6217920"/>
+            <a:ext cx="10972800" cy="502920"/>
           </a:xfrm>
           <a:prstGeom prst="rect">
             <a:avLst/>
@@ -7303,131 +8248,7 @@
 </p:sld>
 </file>
 
-<file path=ppt/slides/slide2.xml><?xml version="1.0" encoding="utf-8"?>
-<p:sld xmlns:a="http://schemas.openxmlformats.org/drawingml/2006/main" xmlns:p="http://schemas.openxmlformats.org/presentationml/2006/main" xmlns:r="http://schemas.openxmlformats.org/officeDocument/2006/relationships">
-  <p:cSld>
-    <p:spTree>
-      <p:nvGrpSpPr>
-        <p:cNvPr id="1" name=""/>
-        <p:cNvGrpSpPr/>
-        <p:nvPr/>
-      </p:nvGrpSpPr>
-      <p:grpSpPr/>
-      <p:sp>
-        <p:nvSpPr>
-          <p:cNvPr id="2" name="Rectangle 1"/>
-          <p:cNvSpPr/>
-          <p:nvPr/>
-        </p:nvSpPr>
-        <p:spPr>
-          <a:xfrm>
-            <a:off x="0" y="0"/>
-            <a:ext cx="12191695" cy="6858000"/>
-          </a:xfrm>
-          <a:prstGeom prst="rect">
-            <a:avLst/>
-          </a:prstGeom>
-          <a:solidFill>
-            <a:srgbClr val="1F3355"/>
-          </a:solidFill>
-          <a:ln>
-            <a:noFill/>
-          </a:ln>
-        </p:spPr>
-        <p:style>
-          <a:lnRef idx="1">
-            <a:schemeClr val="accent1"/>
-          </a:lnRef>
-          <a:fillRef idx="3">
-            <a:schemeClr val="accent1"/>
-          </a:fillRef>
-          <a:effectRef idx="2">
-            <a:schemeClr val="accent1"/>
-          </a:effectRef>
-          <a:fontRef idx="minor">
-            <a:schemeClr val="lt1"/>
-          </a:fontRef>
-        </p:style>
-        <p:txBody>
-          <a:bodyPr rtlCol="0" anchor="ctr"/>
-          <a:lstStyle/>
-          <a:p>
-            <a:pPr algn="ctr"/>
-          </a:p>
-        </p:txBody>
-      </p:sp>
-      <p:sp>
-        <p:nvSpPr>
-          <p:cNvPr id="3" name="TextBox 2"/>
-          <p:cNvSpPr txBox="1"/>
-          <p:nvPr/>
-        </p:nvSpPr>
-        <p:spPr>
-          <a:xfrm>
-            <a:off x="914400" y="2194560"/>
-            <a:ext cx="10332720" cy="2377440"/>
-          </a:xfrm>
-          <a:prstGeom prst="rect">
-            <a:avLst/>
-          </a:prstGeom>
-          <a:noFill/>
-        </p:spPr>
-        <p:txBody>
-          <a:bodyPr wrap="square">
-            <a:spAutoFit/>
-          </a:bodyPr>
-          <a:lstStyle/>
-          <a:p>
-            <a:pPr algn="l"/>
-            <a:r>
-              <a:rPr sz="2000" b="1">
-                <a:solidFill>
-                  <a:srgbClr val="7FB8E0"/>
-                </a:solidFill>
-                <a:latin typeface="Meiryo UI"/>
-              </a:rPr>
-              <a:t>第0部</a:t>
-            </a:r>
-          </a:p>
-          <a:p>
-            <a:pPr algn="l"/>
-            <a:r>
-              <a:rPr sz="3600" b="1">
-                <a:solidFill>
-                  <a:srgbClr val="FFFFFF"/>
-                </a:solidFill>
-                <a:latin typeface="Meiryo UI"/>
-              </a:rPr>
-              <a:t>なぜこの話をするのか</a:t>
-            </a:r>
-          </a:p>
-          <a:p>
-            <a:pPr algn="l">
-              <a:spcBef>
-                <a:spcPts val="1600"/>
-              </a:spcBef>
-            </a:pPr>
-            <a:r>
-              <a:rPr sz="1600" b="0">
-                <a:solidFill>
-                  <a:srgbClr val="D5E5F2"/>
-                </a:solidFill>
-                <a:latin typeface="Meiryo UI"/>
-              </a:rPr>
-              <a:t>ゴール: 細かい話に入る前に、今日の地図を配ります</a:t>
-            </a:r>
-          </a:p>
-        </p:txBody>
-      </p:sp>
-    </p:spTree>
-  </p:cSld>
-  <p:clrMapOvr>
-    <a:masterClrMapping/>
-  </p:clrMapOvr>
-</p:sld>
-</file>
-
-<file path=ppt/slides/slide20.xml><?xml version="1.0" encoding="utf-8"?>
+<file path=ppt/slides/slide22.xml><?xml version="1.0" encoding="utf-8"?>
 <p:sld xmlns:a="http://schemas.openxmlformats.org/drawingml/2006/main" xmlns:p="http://schemas.openxmlformats.org/presentationml/2006/main" xmlns:r="http://schemas.openxmlformats.org/officeDocument/2006/relationships">
   <p:cSld>
     <p:spTree>
@@ -7467,7 +8288,7 @@
                 </a:solidFill>
                 <a:latin typeface="Meiryo UI"/>
               </a:rPr>
-              <a:t>「ポート開放できますか?」— これで即答できます</a:t>
+              <a:t>ここで話が 2 つに分かれます (混同しやすいので注意)</a:t>
             </a:r>
           </a:p>
         </p:txBody>
@@ -7482,7 +8303,335 @@
         </p:nvGraphicFramePr>
         <p:xfrm>
           <a:off x="502920" y="1143000"/>
-          <a:ext cx="10789920" cy="1536192"/>
+          <a:ext cx="10789920" cy="932688"/>
+        </p:xfrm>
+        <a:graphic>
+          <a:graphicData uri="http://schemas.openxmlformats.org/drawingml/2006/table">
+            <a:tbl>
+              <a:tblPr>
+                <a:tableStyleId>{5C22544A-7EE6-4342-B048-85BDC9FD1C3A}</a:tableStyleId>
+              </a:tblPr>
+              <a:tblGrid>
+                <a:gridCol w="2743200"/>
+                <a:gridCol w="4023360"/>
+                <a:gridCol w="4023360"/>
+              </a:tblGrid>
+              <a:tr h="310896">
+                <a:tc>
+                  <a:txBody>
+                    <a:bodyPr/>
+                    <a:lstStyle/>
+                    <a:p>
+                      <a:pPr algn="l"/>
+                      <a:r>
+                        <a:rPr sz="1500" b="1">
+                          <a:solidFill>
+                            <a:srgbClr val="FFFFFF"/>
+                          </a:solidFill>
+                          <a:latin typeface="Meiryo UI"/>
+                        </a:rPr>
+                        <a:t/>
+                      </a:r>
+                    </a:p>
+                  </a:txBody>
+                  <a:tcPr>
+                    <a:solidFill>
+                      <a:srgbClr val="1F3355"/>
+                    </a:solidFill>
+                  </a:tcPr>
+                </a:tc>
+                <a:tc>
+                  <a:txBody>
+                    <a:bodyPr/>
+                    <a:lstStyle/>
+                    <a:p>
+                      <a:pPr algn="l"/>
+                      <a:r>
+                        <a:rPr sz="1500" b="1">
+                          <a:solidFill>
+                            <a:srgbClr val="FFFFFF"/>
+                          </a:solidFill>
+                          <a:latin typeface="Meiryo UI"/>
+                        </a:rPr>
+                        <a:t>出ていく通信 (Web を見る)</a:t>
+                      </a:r>
+                    </a:p>
+                  </a:txBody>
+                  <a:tcPr>
+                    <a:solidFill>
+                      <a:srgbClr val="1F3355"/>
+                    </a:solidFill>
+                  </a:tcPr>
+                </a:tc>
+                <a:tc>
+                  <a:txBody>
+                    <a:bodyPr/>
+                    <a:lstStyle/>
+                    <a:p>
+                      <a:pPr algn="l"/>
+                      <a:r>
+                        <a:rPr sz="1500" b="1">
+                          <a:solidFill>
+                            <a:srgbClr val="FFFFFF"/>
+                          </a:solidFill>
+                          <a:latin typeface="Meiryo UI"/>
+                        </a:rPr>
+                        <a:t>入ってくる通信 (ポート開放)</a:t>
+                      </a:r>
+                    </a:p>
+                  </a:txBody>
+                  <a:tcPr>
+                    <a:solidFill>
+                      <a:srgbClr val="1F3355"/>
+                    </a:solidFill>
+                  </a:tcPr>
+                </a:tc>
+              </a:tr>
+              <a:tr h="310896">
+                <a:tc>
+                  <a:txBody>
+                    <a:bodyPr/>
+                    <a:lstStyle/>
+                    <a:p>
+                      <a:pPr algn="l"/>
+                      <a:r>
+                        <a:rPr sz="1400" b="0">
+                          <a:solidFill>
+                            <a:srgbClr val="1F3355"/>
+                          </a:solidFill>
+                          <a:latin typeface="Meiryo UI"/>
+                        </a:rPr>
+                        <a:t>240 個をどう使うか</a:t>
+                      </a:r>
+                    </a:p>
+                  </a:txBody>
+                  <a:tcPr>
+                    <a:solidFill>
+                      <a:srgbClr val="FFFFFF"/>
+                    </a:solidFill>
+                  </a:tcPr>
+                </a:tc>
+                <a:tc>
+                  <a:txBody>
+                    <a:bodyPr/>
+                    <a:lstStyle/>
+                    <a:p>
+                      <a:pPr algn="l"/>
+                      <a:r>
+                        <a:rPr sz="1400" b="0">
+                          <a:solidFill>
+                            <a:srgbClr val="1F3355"/>
+                          </a:solidFill>
+                          <a:latin typeface="Meiryo UI"/>
+                        </a:rPr>
+                        <a:t>使い回す</a:t>
+                      </a:r>
+                    </a:p>
+                  </a:txBody>
+                  <a:tcPr>
+                    <a:solidFill>
+                      <a:srgbClr val="FFFFFF"/>
+                    </a:solidFill>
+                  </a:tcPr>
+                </a:tc>
+                <a:tc>
+                  <a:txBody>
+                    <a:bodyPr/>
+                    <a:lstStyle/>
+                    <a:p>
+                      <a:pPr algn="l"/>
+                      <a:r>
+                        <a:rPr sz="1400" b="0">
+                          <a:solidFill>
+                            <a:srgbClr val="1F3355"/>
+                          </a:solidFill>
+                          <a:latin typeface="Meiryo UI"/>
+                        </a:rPr>
+                        <a:t>この中からしか選べない</a:t>
+                      </a:r>
+                    </a:p>
+                  </a:txBody>
+                  <a:tcPr>
+                    <a:solidFill>
+                      <a:srgbClr val="FFFFFF"/>
+                    </a:solidFill>
+                  </a:tcPr>
+                </a:tc>
+              </a:tr>
+              <a:tr h="310896">
+                <a:tc>
+                  <a:txBody>
+                    <a:bodyPr/>
+                    <a:lstStyle/>
+                    <a:p>
+                      <a:pPr algn="l"/>
+                      <a:r>
+                        <a:rPr sz="1400" b="0">
+                          <a:solidFill>
+                            <a:srgbClr val="1F3355"/>
+                          </a:solidFill>
+                          <a:latin typeface="Meiryo UI"/>
+                        </a:rPr>
+                        <a:t>何が問題になるか</a:t>
+                      </a:r>
+                    </a:p>
+                  </a:txBody>
+                  <a:tcPr>
+                    <a:solidFill>
+                      <a:srgbClr val="F2F6FA"/>
+                    </a:solidFill>
+                  </a:tcPr>
+                </a:tc>
+                <a:tc>
+                  <a:txBody>
+                    <a:bodyPr/>
+                    <a:lstStyle/>
+                    <a:p>
+                      <a:pPr algn="l"/>
+                      <a:r>
+                        <a:rPr sz="1400" b="0">
+                          <a:solidFill>
+                            <a:srgbClr val="1F3355"/>
+                          </a:solidFill>
+                          <a:latin typeface="Meiryo UI"/>
+                        </a:rPr>
+                        <a:t>足りるかどうか</a:t>
+                      </a:r>
+                    </a:p>
+                  </a:txBody>
+                  <a:tcPr>
+                    <a:solidFill>
+                      <a:srgbClr val="F2F6FA"/>
+                    </a:solidFill>
+                  </a:tcPr>
+                </a:tc>
+                <a:tc>
+                  <a:txBody>
+                    <a:bodyPr/>
+                    <a:lstStyle/>
+                    <a:p>
+                      <a:pPr algn="l"/>
+                      <a:r>
+                        <a:rPr sz="1400" b="0">
+                          <a:solidFill>
+                            <a:srgbClr val="1F3355"/>
+                          </a:solidFill>
+                          <a:latin typeface="Meiryo UI"/>
+                        </a:rPr>
+                        <a:t>番号が合うかどうか</a:t>
+                      </a:r>
+                    </a:p>
+                  </a:txBody>
+                  <a:tcPr>
+                    <a:solidFill>
+                      <a:srgbClr val="F2F6FA"/>
+                    </a:solidFill>
+                  </a:tcPr>
+                </a:tc>
+              </a:tr>
+            </a:tbl>
+          </a:graphicData>
+        </a:graphic>
+      </p:graphicFrame>
+      <p:sp>
+        <p:nvSpPr>
+          <p:cNvPr id="4" name="TextBox 3"/>
+          <p:cNvSpPr txBox="1"/>
+          <p:nvPr/>
+        </p:nvSpPr>
+        <p:spPr>
+          <a:xfrm>
+            <a:off x="502920" y="2331720"/>
+            <a:ext cx="11155680" cy="548640"/>
+          </a:xfrm>
+          <a:prstGeom prst="rect">
+            <a:avLst/>
+          </a:prstGeom>
+          <a:noFill/>
+        </p:spPr>
+        <p:txBody>
+          <a:bodyPr wrap="square">
+            <a:spAutoFit/>
+          </a:bodyPr>
+          <a:lstStyle/>
+          <a:p>
+            <a:pPr algn="l"/>
+            <a:r>
+              <a:rPr sz="1200" b="0">
+                <a:solidFill>
+                  <a:srgbClr val="007ACC"/>
+                </a:solidFill>
+                <a:latin typeface="Meiryo UI"/>
+              </a:rPr>
+              <a:t>「ポート開放できない」と「ポートが 240 個しかない」は別の話です。次のページは「入ってくる通信」の話</a:t>
+            </a:r>
+          </a:p>
+        </p:txBody>
+      </p:sp>
+    </p:spTree>
+  </p:cSld>
+  <p:clrMapOvr>
+    <a:masterClrMapping/>
+  </p:clrMapOvr>
+</p:sld>
+</file>
+
+<file path=ppt/slides/slide23.xml><?xml version="1.0" encoding="utf-8"?>
+<p:sld xmlns:a="http://schemas.openxmlformats.org/drawingml/2006/main" xmlns:p="http://schemas.openxmlformats.org/presentationml/2006/main" xmlns:r="http://schemas.openxmlformats.org/officeDocument/2006/relationships">
+  <p:cSld>
+    <p:spTree>
+      <p:nvGrpSpPr>
+        <p:cNvPr id="1" name=""/>
+        <p:cNvGrpSpPr/>
+        <p:nvPr/>
+      </p:nvGrpSpPr>
+      <p:grpSpPr/>
+      <p:sp>
+        <p:nvSpPr>
+          <p:cNvPr id="2" name="TextBox 1"/>
+          <p:cNvSpPr txBox="1"/>
+          <p:nvPr/>
+        </p:nvSpPr>
+        <p:spPr>
+          <a:xfrm>
+            <a:off x="502920" y="274320"/>
+            <a:ext cx="11155680" cy="731520"/>
+          </a:xfrm>
+          <a:prstGeom prst="rect">
+            <a:avLst/>
+          </a:prstGeom>
+          <a:noFill/>
+        </p:spPr>
+        <p:txBody>
+          <a:bodyPr wrap="square">
+            <a:spAutoFit/>
+          </a:bodyPr>
+          <a:lstStyle/>
+          <a:p>
+            <a:pPr algn="l"/>
+            <a:r>
+              <a:rPr sz="2600" b="1">
+                <a:solidFill>
+                  <a:srgbClr val="1F3355"/>
+                </a:solidFill>
+                <a:latin typeface="Meiryo UI"/>
+              </a:rPr>
+              <a:t>「ポート開放できますか?」— これで即答できます</a:t>
+            </a:r>
+          </a:p>
+        </p:txBody>
+      </p:sp>
+      <p:graphicFrame>
+        <p:nvGraphicFramePr>
+          <p:cNvPr id="3" name="Table 2"/>
+          <p:cNvGraphicFramePr>
+            <a:graphicFrameLocks noGrp="1"/>
+          </p:cNvGraphicFramePr>
+          <p:nvPr/>
+        </p:nvGraphicFramePr>
+        <p:xfrm>
+          <a:off x="502920" y="1143000"/>
+          <a:ext cx="10789920" cy="1243584"/>
         </p:xfrm>
         <a:graphic>
           <a:graphicData uri="http://schemas.openxmlformats.org/drawingml/2006/table">
@@ -7494,7 +8643,7 @@
                 <a:gridCol w="2377440"/>
                 <a:gridCol w="8412480"/>
               </a:tblGrid>
-              <a:tr h="384048">
+              <a:tr h="310896">
                 <a:tc>
                   <a:txBody>
                     <a:bodyPr/>
@@ -7542,7 +8691,7 @@
                   </a:tcPr>
                 </a:tc>
               </a:tr>
-              <a:tr h="384048">
+              <a:tr h="310896">
                 <a:tc>
                   <a:txBody>
                     <a:bodyPr/>
@@ -7590,7 +8739,7 @@
                   </a:tcPr>
                 </a:tc>
               </a:tr>
-              <a:tr h="384048">
+              <a:tr h="310896">
                 <a:tc>
                   <a:txBody>
                     <a:bodyPr/>
@@ -7638,7 +8787,7 @@
                   </a:tcPr>
                 </a:tc>
               </a:tr>
-              <a:tr h="384048">
+              <a:tr h="310896">
                 <a:tc>
                   <a:txBody>
                     <a:bodyPr/>
@@ -7698,7 +8847,7 @@
         </p:nvSpPr>
         <p:spPr>
           <a:xfrm>
-            <a:off x="502920" y="3136391"/>
+            <a:off x="502920" y="2642616"/>
             <a:ext cx="11155680" cy="548640"/>
           </a:xfrm>
           <a:prstGeom prst="rect">
@@ -7720,7 +8869,7 @@
                 </a:solidFill>
                 <a:latin typeface="Meiryo UI"/>
               </a:rPr>
-              <a:t>MAP-E で 80 番が無理なのは、使えるポートが計算で決まるから (例では 4176〜4191 のような番号だけ)</a:t>
+              <a:t>そもそもポート開放 = 「外から来た通信を、社内のこの機械に通してください」というルータへの指示です</a:t>
             </a:r>
           </a:p>
         </p:txBody>
@@ -7733,7 +8882,7 @@
 </p:sld>
 </file>
 
-<file path=ppt/slides/slide21.xml><?xml version="1.0" encoding="utf-8"?>
+<file path=ppt/slides/slide24.xml><?xml version="1.0" encoding="utf-8"?>
 <p:sld xmlns:a="http://schemas.openxmlformats.org/drawingml/2006/main" xmlns:p="http://schemas.openxmlformats.org/presentationml/2006/main" xmlns:r="http://schemas.openxmlformats.org/officeDocument/2006/relationships">
   <p:cSld>
     <p:spTree>
@@ -7773,7 +8922,7 @@
                 </a:solidFill>
                 <a:latin typeface="Meiryo UI"/>
               </a:rPr>
-              <a:t>切替前に必ず聞くこと / MTU 1460 の話</a:t>
+              <a:t>「カメラの 80 番はどうするの?」と聞かれたら</a:t>
             </a:r>
           </a:p>
         </p:txBody>
@@ -7830,7 +8979,7 @@
         <p:spPr>
           <a:xfrm>
             <a:off x="594360" y="1371600"/>
-            <a:ext cx="10972800" cy="4846320"/>
+            <a:ext cx="10972800" cy="4983480"/>
           </a:xfrm>
           <a:prstGeom prst="rect">
             <a:avLst/>
@@ -7845,7 +8994,7 @@
           <a:p>
             <a:pPr algn="l">
               <a:spcAft>
-                <a:spcPts val="700"/>
+                <a:spcPts val="1000"/>
               </a:spcAft>
             </a:pPr>
             <a:r>
@@ -7855,13 +9004,13 @@
                 </a:solidFill>
                 <a:latin typeface="Meiryo UI"/>
               </a:rPr>
-              <a:t>切替前のヒアリング — これを後で発覚させると事故になります</a:t>
+              <a:t>MAP-E でも、社内のカメラを外から見ることはできます</a:t>
             </a:r>
           </a:p>
           <a:p>
             <a:pPr lvl="1" algn="l">
               <a:spcAft>
-                <a:spcPts val="400"/>
+                <a:spcPts val="600"/>
               </a:spcAft>
             </a:pPr>
             <a:r>
@@ -7871,13 +9020,125 @@
                 </a:solidFill>
                 <a:latin typeface="Meiryo UI"/>
               </a:rPr>
+              <a:t>外側の番号は 割り当てられたポートから選ぶ (たとえば 4176 番)</a:t>
+            </a:r>
+          </a:p>
+          <a:p>
+            <a:pPr lvl="1" algn="l">
+              <a:spcAft>
+                <a:spcPts val="600"/>
+              </a:spcAft>
+            </a:pPr>
+            <a:r>
+              <a:rPr sz="1700" b="0">
+                <a:solidFill>
+                  <a:srgbClr val="555555"/>
+                </a:solidFill>
+                <a:latin typeface="Meiryo UI"/>
+              </a:rPr>
+              <a:t>社内側の 80 番へは ルータが読み替えてくれる</a:t>
+            </a:r>
+          </a:p>
+          <a:p>
+            <a:pPr lvl="1" algn="l">
+              <a:spcAft>
+                <a:spcPts val="600"/>
+              </a:spcAft>
+            </a:pPr>
+            <a:r>
+              <a:rPr sz="1700" b="0">
+                <a:solidFill>
+                  <a:srgbClr val="555555"/>
+                </a:solidFill>
+                <a:latin typeface="Meiryo UI"/>
+              </a:rPr>
+              <a:t>つまり「外から 4176 番で来てもらって、社内のカメラの 80 番に渡す」形にはできます</a:t>
+            </a:r>
+          </a:p>
+          <a:p>
+            <a:pPr algn="l">
+              <a:spcAft>
+                <a:spcPts val="1000"/>
+              </a:spcAft>
+            </a:pPr>
+            <a:r>
+              <a:rPr sz="2000" b="1">
+                <a:solidFill>
+                  <a:srgbClr val="C0392B"/>
+                </a:solidFill>
+                <a:latin typeface="Meiryo UI"/>
+              </a:rPr>
+              <a:t>できないのは「外側で 80 番を名乗ること」です</a:t>
+            </a:r>
+          </a:p>
+          <a:p>
+            <a:pPr lvl="1" algn="l">
+              <a:spcAft>
+                <a:spcPts val="600"/>
+              </a:spcAft>
+            </a:pPr>
+            <a:r>
+              <a:rPr sz="1700" b="0">
+                <a:solidFill>
+                  <a:srgbClr val="555555"/>
+                </a:solidFill>
+                <a:latin typeface="Meiryo UI"/>
+              </a:rPr>
+              <a:t>80 番や 443 番のような若い番号は、仕組みの上でそもそも配られません</a:t>
+            </a:r>
+          </a:p>
+          <a:p>
+            <a:pPr lvl="1" algn="l">
+              <a:spcAft>
+                <a:spcPts val="600"/>
+              </a:spcAft>
+            </a:pPr>
+            <a:r>
+              <a:rPr sz="1700" b="0">
+                <a:solidFill>
+                  <a:srgbClr val="555555"/>
+                </a:solidFill>
+                <a:latin typeface="Meiryo UI"/>
+              </a:rPr>
+              <a:t>だから「いつもの URL のまま、ポート番号なしで見たい」は かなえられません</a:t>
+            </a:r>
+          </a:p>
+          <a:p>
+            <a:pPr algn="l">
+              <a:spcAft>
+                <a:spcPts val="1000"/>
+              </a:spcAft>
+            </a:pPr>
+            <a:r>
+              <a:rPr sz="2000" b="1">
+                <a:solidFill>
+                  <a:srgbClr val="1F3355"/>
+                </a:solidFill>
+                <a:latin typeface="Meiryo UI"/>
+              </a:rPr>
+              <a:t>切替前に必ず聞くこと — 後で発覚させると事故になります</a:t>
+            </a:r>
+          </a:p>
+          <a:p>
+            <a:pPr lvl="1" algn="l">
+              <a:spcAft>
+                <a:spcPts val="600"/>
+              </a:spcAft>
+            </a:pPr>
+            <a:r>
+              <a:rPr sz="1700" b="0">
+                <a:solidFill>
+                  <a:srgbClr val="555555"/>
+                </a:solidFill>
+                <a:latin typeface="Meiryo UI"/>
+              </a:rPr>
               <a:t>外から入ってくる通信はありますか (VPN、拠点間、監視、カメラ、リモートデスクトップ)</a:t>
             </a:r>
           </a:p>
           <a:p>
             <a:pPr lvl="1" algn="l">
               <a:spcAft>
-                <a:spcPts val="400"/>
+                <a:spcPts val="600"/>
               </a:spcAft>
             </a:pPr>
             <a:r>
@@ -7893,7 +9154,7 @@
           <a:p>
             <a:pPr lvl="1" algn="l">
               <a:spcAft>
-                <a:spcPts val="400"/>
+                <a:spcPts val="600"/>
               </a:spcAft>
             </a:pPr>
             <a:r>
@@ -7904,169 +9165,6 @@
                 <a:latin typeface="Meiryo UI"/>
               </a:rPr>
               <a:t>1 つでもあれば DS-Lite と MAP-E は要注意。固定 IP か PPPoE 併用を検討します</a:t>
-            </a:r>
-          </a:p>
-          <a:p>
-            <a:pPr algn="l">
-              <a:spcAft>
-                <a:spcPts val="700"/>
-              </a:spcAft>
-            </a:pPr>
-            <a:r>
-              <a:rPr sz="2000" b="1">
-                <a:solidFill>
-                  <a:srgbClr val="1F3355"/>
-                </a:solidFill>
-                <a:latin typeface="Meiryo UI"/>
-              </a:rPr>
-              <a:t>MTU 1460 — 「Web は見えるのにファイルが落ちない」の正体</a:t>
-            </a:r>
-          </a:p>
-          <a:p>
-            <a:pPr lvl="1" algn="l">
-              <a:spcAft>
-                <a:spcPts val="400"/>
-              </a:spcAft>
-            </a:pPr>
-            <a:r>
-              <a:rPr sz="1700" b="0">
-                <a:solidFill>
-                  <a:srgbClr val="555555"/>
-                </a:solidFill>
-                <a:latin typeface="Meiryo UI"/>
-              </a:rPr>
-              <a:t>Ethernet は 1500 バイトまで。IPv6 の箱に詰めるとヘッダ 40 で中身は 1460 まで</a:t>
-            </a:r>
-          </a:p>
-          <a:p>
-            <a:pPr lvl="1" algn="l">
-              <a:spcAft>
-                <a:spcPts val="400"/>
-              </a:spcAft>
-            </a:pPr>
-            <a:r>
-              <a:rPr sz="1700" b="0">
-                <a:solidFill>
-                  <a:srgbClr val="555555"/>
-                </a:solidFill>
-                <a:latin typeface="Meiryo UI"/>
-              </a:rPr>
-              <a:t>小さいパケット (Web 表示、ping、DNS) は通る → 「つながってる」と見える</a:t>
-            </a:r>
-          </a:p>
-          <a:p>
-            <a:pPr lvl="1" algn="l">
-              <a:spcAft>
-                <a:spcPts val="400"/>
-              </a:spcAft>
-            </a:pPr>
-            <a:r>
-              <a:rPr sz="1700" b="1">
-                <a:solidFill>
-                  <a:srgbClr val="C0392B"/>
-                </a:solidFill>
-                <a:latin typeface="Meiryo UI"/>
-              </a:rPr>
-              <a:t>大きいパケット (ファイル送信、メール添付) だけ落ちる → 「たまに固まる」</a:t>
-            </a:r>
-          </a:p>
-          <a:p>
-            <a:pPr lvl="1" algn="l">
-              <a:spcAft>
-                <a:spcPts val="400"/>
-              </a:spcAft>
-            </a:pPr>
-            <a:r>
-              <a:rPr sz="1700" b="1">
-                <a:solidFill>
-                  <a:srgbClr val="C0392B"/>
-                </a:solidFill>
-                <a:latin typeface="Meiryo UI"/>
-              </a:rPr>
-              <a:t>だから「ping が通るから大丈夫」は通用しません</a:t>
-            </a:r>
-          </a:p>
-          <a:p>
-            <a:pPr algn="l">
-              <a:spcAft>
-                <a:spcPts val="700"/>
-              </a:spcAft>
-            </a:pPr>
-            <a:r>
-              <a:rPr sz="2000" b="1">
-                <a:solidFill>
-                  <a:srgbClr val="1F3355"/>
-                </a:solidFill>
-                <a:latin typeface="Meiryo UI"/>
-              </a:rPr>
-              <a:t>直し方は決まっています — TCP が 1 回に運ぶ上限 (MSS) を CPE で書き換える (MSS clamp)</a:t>
-            </a:r>
-          </a:p>
-          <a:p>
-            <a:pPr lvl="1" algn="l">
-              <a:spcAft>
-                <a:spcPts val="400"/>
-              </a:spcAft>
-            </a:pPr>
-            <a:r>
-              <a:rPr sz="1700" b="0">
-                <a:solidFill>
-                  <a:srgbClr val="0B6040"/>
-                </a:solidFill>
-                <a:latin typeface="Consolas"/>
-              </a:rPr>
-              <a:t>Cisco: ip tcp adjust-mss 1420   /   OpenWrt: ファイアウォールの mtu_fix</a:t>
-            </a:r>
-          </a:p>
-          <a:p>
-            <a:pPr lvl="1" algn="l">
-              <a:spcAft>
-                <a:spcPts val="400"/>
-              </a:spcAft>
-            </a:pPr>
-            <a:r>
-              <a:rPr sz="1700" b="0">
-                <a:solidFill>
-                  <a:srgbClr val="555555"/>
-                </a:solidFill>
-                <a:latin typeface="Meiryo UI"/>
-              </a:rPr>
-              <a:t>実機検証では、この 1 行が無いと 5MB のファイルが落ちてきませんでした</a:t>
-            </a:r>
-          </a:p>
-        </p:txBody>
-      </p:sp>
-      <p:sp>
-        <p:nvSpPr>
-          <p:cNvPr id="5" name="TextBox 4"/>
-          <p:cNvSpPr txBox="1"/>
-          <p:nvPr/>
-        </p:nvSpPr>
-        <p:spPr>
-          <a:xfrm>
-            <a:off x="594360" y="6263640"/>
-            <a:ext cx="10972800" cy="457200"/>
-          </a:xfrm>
-          <a:prstGeom prst="rect">
-            <a:avLst/>
-          </a:prstGeom>
-          <a:noFill/>
-        </p:spPr>
-        <p:txBody>
-          <a:bodyPr wrap="square">
-            <a:spAutoFit/>
-          </a:bodyPr>
-          <a:lstStyle/>
-          <a:p>
-            <a:pPr algn="l"/>
-            <a:r>
-              <a:rPr sz="1200" b="0">
-                <a:solidFill>
-                  <a:srgbClr val="007ACC"/>
-                </a:solidFill>
-                <a:latin typeface="Meiryo UI"/>
-              </a:rPr>
-              <a:t>教科書: 第10章「Path MTU Discovery」(p.215) / 第9章「IP フラグメンテーション」(p.205)</a:t>
             </a:r>
           </a:p>
         </p:txBody>
@@ -8079,7 +9177,321 @@
 </p:sld>
 </file>
 
-<file path=ppt/slides/slide22.xml><?xml version="1.0" encoding="utf-8"?>
+<file path=ppt/slides/slide25.xml><?xml version="1.0" encoding="utf-8"?>
+<p:sld xmlns:a="http://schemas.openxmlformats.org/drawingml/2006/main" xmlns:p="http://schemas.openxmlformats.org/presentationml/2006/main" xmlns:r="http://schemas.openxmlformats.org/officeDocument/2006/relationships">
+  <p:cSld>
+    <p:spTree>
+      <p:nvGrpSpPr>
+        <p:cNvPr id="1" name=""/>
+        <p:cNvGrpSpPr/>
+        <p:nvPr/>
+      </p:nvGrpSpPr>
+      <p:grpSpPr/>
+      <p:sp>
+        <p:nvSpPr>
+          <p:cNvPr id="2" name="TextBox 1"/>
+          <p:cNvSpPr txBox="1"/>
+          <p:nvPr/>
+        </p:nvSpPr>
+        <p:spPr>
+          <a:xfrm>
+            <a:off x="502920" y="320040"/>
+            <a:ext cx="11155680" cy="822960"/>
+          </a:xfrm>
+          <a:prstGeom prst="rect">
+            <a:avLst/>
+          </a:prstGeom>
+          <a:noFill/>
+        </p:spPr>
+        <p:txBody>
+          <a:bodyPr wrap="square">
+            <a:spAutoFit/>
+          </a:bodyPr>
+          <a:lstStyle/>
+          <a:p>
+            <a:pPr algn="l"/>
+            <a:r>
+              <a:rPr sz="2800" b="1">
+                <a:solidFill>
+                  <a:srgbClr val="1F3355"/>
+                </a:solidFill>
+                <a:latin typeface="Meiryo UI"/>
+              </a:rPr>
+              <a:t>MTU 1460 — 「Web は見えるのにファイルが落ちない」の正体</a:t>
+            </a:r>
+          </a:p>
+        </p:txBody>
+      </p:sp>
+      <p:sp>
+        <p:nvSpPr>
+          <p:cNvPr id="3" name="Rectangle 2"/>
+          <p:cNvSpPr/>
+          <p:nvPr/>
+        </p:nvSpPr>
+        <p:spPr>
+          <a:xfrm>
+            <a:off x="502920" y="1115568"/>
+            <a:ext cx="11155680" cy="31750"/>
+          </a:xfrm>
+          <a:prstGeom prst="rect">
+            <a:avLst/>
+          </a:prstGeom>
+          <a:solidFill>
+            <a:srgbClr val="007ACC"/>
+          </a:solidFill>
+          <a:ln>
+            <a:noFill/>
+          </a:ln>
+        </p:spPr>
+        <p:style>
+          <a:lnRef idx="1">
+            <a:schemeClr val="accent1"/>
+          </a:lnRef>
+          <a:fillRef idx="3">
+            <a:schemeClr val="accent1"/>
+          </a:fillRef>
+          <a:effectRef idx="2">
+            <a:schemeClr val="accent1"/>
+          </a:effectRef>
+          <a:fontRef idx="minor">
+            <a:schemeClr val="lt1"/>
+          </a:fontRef>
+        </p:style>
+        <p:txBody>
+          <a:bodyPr rtlCol="0" anchor="ctr"/>
+          <a:lstStyle/>
+          <a:p>
+            <a:pPr algn="ctr"/>
+          </a:p>
+        </p:txBody>
+      </p:sp>
+      <p:sp>
+        <p:nvSpPr>
+          <p:cNvPr id="4" name="TextBox 3"/>
+          <p:cNvSpPr txBox="1"/>
+          <p:nvPr/>
+        </p:nvSpPr>
+        <p:spPr>
+          <a:xfrm>
+            <a:off x="594360" y="1371600"/>
+            <a:ext cx="10972800" cy="4709160"/>
+          </a:xfrm>
+          <a:prstGeom prst="rect">
+            <a:avLst/>
+          </a:prstGeom>
+          <a:noFill/>
+        </p:spPr>
+        <p:txBody>
+          <a:bodyPr wrap="square">
+            <a:spAutoFit/>
+          </a:bodyPr>
+          <a:lstStyle/>
+          <a:p>
+            <a:pPr algn="l">
+              <a:spcAft>
+                <a:spcPts val="1000"/>
+              </a:spcAft>
+            </a:pPr>
+            <a:r>
+              <a:rPr sz="2000" b="1">
+                <a:solidFill>
+                  <a:srgbClr val="1F3355"/>
+                </a:solidFill>
+                <a:latin typeface="Meiryo UI"/>
+              </a:rPr>
+              <a:t>箱に詰めると、その分だけ中身が小さくなります</a:t>
+            </a:r>
+          </a:p>
+          <a:p>
+            <a:pPr lvl="1" algn="l">
+              <a:spcAft>
+                <a:spcPts val="600"/>
+              </a:spcAft>
+            </a:pPr>
+            <a:r>
+              <a:rPr sz="1700" b="0">
+                <a:solidFill>
+                  <a:srgbClr val="555555"/>
+                </a:solidFill>
+                <a:latin typeface="Meiryo UI"/>
+              </a:rPr>
+              <a:t>Ethernet は 1500 バイトまで。IPv6 の箱に詰めるとヘッダ 40 で中身は 1460 まで</a:t>
+            </a:r>
+          </a:p>
+          <a:p>
+            <a:pPr lvl="1" algn="l">
+              <a:spcAft>
+                <a:spcPts val="600"/>
+              </a:spcAft>
+            </a:pPr>
+            <a:r>
+              <a:rPr sz="1700" b="0">
+                <a:solidFill>
+                  <a:srgbClr val="555555"/>
+                </a:solidFill>
+                <a:latin typeface="Meiryo UI"/>
+              </a:rPr>
+              <a:t>小さいパケット (Web 表示、ping、DNS) は通る → 「つながってる」と見える</a:t>
+            </a:r>
+          </a:p>
+          <a:p>
+            <a:pPr lvl="1" algn="l">
+              <a:spcAft>
+                <a:spcPts val="600"/>
+              </a:spcAft>
+            </a:pPr>
+            <a:r>
+              <a:rPr sz="1700" b="1">
+                <a:solidFill>
+                  <a:srgbClr val="C0392B"/>
+                </a:solidFill>
+                <a:latin typeface="Meiryo UI"/>
+              </a:rPr>
+              <a:t>大きいパケット (ファイル送信、メール添付) だけ落ちる → 「たまに固まる」</a:t>
+            </a:r>
+          </a:p>
+          <a:p>
+            <a:pPr lvl="1" algn="l">
+              <a:spcAft>
+                <a:spcPts val="600"/>
+              </a:spcAft>
+            </a:pPr>
+            <a:r>
+              <a:rPr sz="1700" b="1">
+                <a:solidFill>
+                  <a:srgbClr val="C0392B"/>
+                </a:solidFill>
+                <a:latin typeface="Meiryo UI"/>
+              </a:rPr>
+              <a:t>だから「ping が通るから大丈夫」は通用しません</a:t>
+            </a:r>
+          </a:p>
+          <a:p>
+            <a:pPr algn="l">
+              <a:spcAft>
+                <a:spcPts val="1000"/>
+              </a:spcAft>
+            </a:pPr>
+            <a:r>
+              <a:rPr sz="2000" b="1">
+                <a:solidFill>
+                  <a:srgbClr val="1F3355"/>
+                </a:solidFill>
+                <a:latin typeface="Meiryo UI"/>
+              </a:rPr>
+              <a:t>直し方は決まっています (TCP の話です) — ルータに 1 行入れるだけ</a:t>
+            </a:r>
+          </a:p>
+          <a:p>
+            <a:pPr lvl="1" algn="l">
+              <a:spcAft>
+                <a:spcPts val="600"/>
+              </a:spcAft>
+            </a:pPr>
+            <a:r>
+              <a:rPr sz="1700" b="0">
+                <a:solidFill>
+                  <a:srgbClr val="555555"/>
+                </a:solidFill>
+                <a:latin typeface="Meiryo UI"/>
+              </a:rPr>
+              <a:t>「1 回に運ぶ荷物をこれ以上大きくするな」と、あらかじめ上限を教えてやります</a:t>
+            </a:r>
+          </a:p>
+          <a:p>
+            <a:pPr lvl="1" algn="l">
+              <a:spcAft>
+                <a:spcPts val="600"/>
+              </a:spcAft>
+            </a:pPr>
+            <a:r>
+              <a:rPr sz="1700" b="0">
+                <a:solidFill>
+                  <a:srgbClr val="0B6040"/>
+                </a:solidFill>
+                <a:latin typeface="Consolas"/>
+              </a:rPr>
+              <a:t>Cisco: ip tcp adjust-mss 1420   /   OpenWrt: ファイアウォールの mtu_fix</a:t>
+            </a:r>
+          </a:p>
+          <a:p>
+            <a:pPr lvl="1" algn="l">
+              <a:spcAft>
+                <a:spcPts val="600"/>
+              </a:spcAft>
+            </a:pPr>
+            <a:r>
+              <a:rPr sz="1700" b="0">
+                <a:solidFill>
+                  <a:srgbClr val="555555"/>
+                </a:solidFill>
+                <a:latin typeface="Meiryo UI"/>
+              </a:rPr>
+              <a:t>実機検証では、この 1 行が無いと 5MB のファイルが落ちてきませんでした</a:t>
+            </a:r>
+          </a:p>
+          <a:p>
+            <a:pPr lvl="1" algn="l">
+              <a:spcAft>
+                <a:spcPts val="600"/>
+              </a:spcAft>
+            </a:pPr>
+            <a:r>
+              <a:rPr sz="1700" b="0">
+                <a:solidFill>
+                  <a:srgbClr val="555555"/>
+                </a:solidFill>
+                <a:latin typeface="Meiryo UI"/>
+              </a:rPr>
+              <a:t>第4部でまた出てきます。「あの 1 行」と言ったらこれのことです</a:t>
+            </a:r>
+          </a:p>
+        </p:txBody>
+      </p:sp>
+      <p:sp>
+        <p:nvSpPr>
+          <p:cNvPr id="5" name="TextBox 4"/>
+          <p:cNvSpPr txBox="1"/>
+          <p:nvPr/>
+        </p:nvSpPr>
+        <p:spPr>
+          <a:xfrm>
+            <a:off x="594360" y="6217920"/>
+            <a:ext cx="10972800" cy="502920"/>
+          </a:xfrm>
+          <a:prstGeom prst="rect">
+            <a:avLst/>
+          </a:prstGeom>
+          <a:noFill/>
+        </p:spPr>
+        <p:txBody>
+          <a:bodyPr wrap="square">
+            <a:spAutoFit/>
+          </a:bodyPr>
+          <a:lstStyle/>
+          <a:p>
+            <a:pPr algn="l"/>
+            <a:r>
+              <a:rPr sz="1200" b="0">
+                <a:solidFill>
+                  <a:srgbClr val="007ACC"/>
+                </a:solidFill>
+                <a:latin typeface="Meiryo UI"/>
+              </a:rPr>
+              <a:t>教科書: 第10章「Path MTU Discovery」(p.215) / 第9章「IP フラグメンテーション」(p.205)</a:t>
+            </a:r>
+          </a:p>
+        </p:txBody>
+      </p:sp>
+    </p:spTree>
+  </p:cSld>
+  <p:clrMapOvr>
+    <a:masterClrMapping/>
+  </p:clrMapOvr>
+</p:sld>
+</file>
+
+<file path=ppt/slides/slide26.xml><?xml version="1.0" encoding="utf-8"?>
 <p:sld xmlns:a="http://schemas.openxmlformats.org/drawingml/2006/main" xmlns:p="http://schemas.openxmlformats.org/presentationml/2006/main" xmlns:r="http://schemas.openxmlformats.org/officeDocument/2006/relationships">
   <p:cSld>
     <p:spTree>
@@ -8203,270 +9615,7 @@
 </p:sld>
 </file>
 
-<file path=ppt/slides/slide23.xml><?xml version="1.0" encoding="utf-8"?>
-<p:sld xmlns:a="http://schemas.openxmlformats.org/drawingml/2006/main" xmlns:p="http://schemas.openxmlformats.org/presentationml/2006/main" xmlns:r="http://schemas.openxmlformats.org/officeDocument/2006/relationships">
-  <p:cSld>
-    <p:spTree>
-      <p:nvGrpSpPr>
-        <p:cNvPr id="1" name=""/>
-        <p:cNvGrpSpPr/>
-        <p:nvPr/>
-      </p:nvGrpSpPr>
-      <p:grpSpPr/>
-      <p:sp>
-        <p:nvSpPr>
-          <p:cNvPr id="2" name="TextBox 1"/>
-          <p:cNvSpPr txBox="1"/>
-          <p:nvPr/>
-        </p:nvSpPr>
-        <p:spPr>
-          <a:xfrm>
-            <a:off x="502920" y="320040"/>
-            <a:ext cx="11155680" cy="822960"/>
-          </a:xfrm>
-          <a:prstGeom prst="rect">
-            <a:avLst/>
-          </a:prstGeom>
-          <a:noFill/>
-        </p:spPr>
-        <p:txBody>
-          <a:bodyPr wrap="square">
-            <a:spAutoFit/>
-          </a:bodyPr>
-          <a:lstStyle/>
-          <a:p>
-            <a:pPr algn="l"/>
-            <a:r>
-              <a:rPr sz="2800" b="1">
-                <a:solidFill>
-                  <a:srgbClr val="1F3355"/>
-                </a:solidFill>
-                <a:latin typeface="Meiryo UI"/>
-              </a:rPr>
-              <a:t>なぜ検証環境を作ったのか</a:t>
-            </a:r>
-          </a:p>
-        </p:txBody>
-      </p:sp>
-      <p:sp>
-        <p:nvSpPr>
-          <p:cNvPr id="3" name="Rectangle 2"/>
-          <p:cNvSpPr/>
-          <p:nvPr/>
-        </p:nvSpPr>
-        <p:spPr>
-          <a:xfrm>
-            <a:off x="502920" y="1115568"/>
-            <a:ext cx="11155680" cy="31750"/>
-          </a:xfrm>
-          <a:prstGeom prst="rect">
-            <a:avLst/>
-          </a:prstGeom>
-          <a:solidFill>
-            <a:srgbClr val="007ACC"/>
-          </a:solidFill>
-          <a:ln>
-            <a:noFill/>
-          </a:ln>
-        </p:spPr>
-        <p:style>
-          <a:lnRef idx="1">
-            <a:schemeClr val="accent1"/>
-          </a:lnRef>
-          <a:fillRef idx="3">
-            <a:schemeClr val="accent1"/>
-          </a:fillRef>
-          <a:effectRef idx="2">
-            <a:schemeClr val="accent1"/>
-          </a:effectRef>
-          <a:fontRef idx="minor">
-            <a:schemeClr val="lt1"/>
-          </a:fontRef>
-        </p:style>
-        <p:txBody>
-          <a:bodyPr rtlCol="0" anchor="ctr"/>
-          <a:lstStyle/>
-          <a:p>
-            <a:pPr algn="ctr"/>
-          </a:p>
-        </p:txBody>
-      </p:sp>
-      <p:sp>
-        <p:nvSpPr>
-          <p:cNvPr id="4" name="TextBox 3"/>
-          <p:cNvSpPr txBox="1"/>
-          <p:nvPr/>
-        </p:nvSpPr>
-        <p:spPr>
-          <a:xfrm>
-            <a:off x="594360" y="1371600"/>
-            <a:ext cx="10972800" cy="4846320"/>
-          </a:xfrm>
-          <a:prstGeom prst="rect">
-            <a:avLst/>
-          </a:prstGeom>
-          <a:noFill/>
-        </p:spPr>
-        <p:txBody>
-          <a:bodyPr wrap="square">
-            <a:spAutoFit/>
-          </a:bodyPr>
-          <a:lstStyle/>
-          <a:p>
-            <a:pPr algn="l">
-              <a:spcAft>
-                <a:spcPts val="700"/>
-              </a:spcAft>
-            </a:pPr>
-            <a:r>
-              <a:rPr sz="2000" b="1">
-                <a:solidFill>
-                  <a:srgbClr val="1F3355"/>
-                </a:solidFill>
-                <a:latin typeface="Meiryo UI"/>
-              </a:rPr>
-              <a:t>「やってみたら動かない」を客先で起こさないためです</a:t>
-            </a:r>
-          </a:p>
-          <a:p>
-            <a:pPr algn="l">
-              <a:spcAft>
-                <a:spcPts val="700"/>
-              </a:spcAft>
-            </a:pPr>
-            <a:r>
-              <a:rPr sz="2000" b="1">
-                <a:solidFill>
-                  <a:srgbClr val="1F3355"/>
-                </a:solidFill>
-                <a:latin typeface="Meiryo UI"/>
-              </a:rPr>
-              <a:t>困っていたこと</a:t>
-            </a:r>
-          </a:p>
-          <a:p>
-            <a:pPr lvl="1" algn="l">
-              <a:spcAft>
-                <a:spcPts val="400"/>
-              </a:spcAft>
-            </a:pPr>
-            <a:r>
-              <a:rPr sz="1700" b="0">
-                <a:solidFill>
-                  <a:srgbClr val="555555"/>
-                </a:solidFill>
-                <a:latin typeface="Meiryo UI"/>
-              </a:rPr>
-              <a:t>① 組み合わせが多すぎる。IPv6 の配り方 × IPv4 の運び方 × CPE の機種 × 構成</a:t>
-            </a:r>
-          </a:p>
-          <a:p>
-            <a:pPr lvl="1" algn="l">
-              <a:spcAft>
-                <a:spcPts val="400"/>
-              </a:spcAft>
-            </a:pPr>
-            <a:r>
-              <a:rPr sz="1700" b="0">
-                <a:solidFill>
-                  <a:srgbClr val="555555"/>
-                </a:solidFill>
-                <a:latin typeface="Meiryo UI"/>
-              </a:rPr>
-              <a:t>② 本番の回線では試せない。お客様の回線を壊すわけにいかない</a:t>
-            </a:r>
-          </a:p>
-          <a:p>
-            <a:pPr lvl="1" algn="l">
-              <a:spcAft>
-                <a:spcPts val="400"/>
-              </a:spcAft>
-            </a:pPr>
-            <a:r>
-              <a:rPr sz="1700" b="0">
-                <a:solidFill>
-                  <a:srgbClr val="555555"/>
-                </a:solidFill>
-                <a:latin typeface="Meiryo UI"/>
-              </a:rPr>
-              <a:t>③ 座学だけでは身に付かない。RA も MAP-E も、パケットを一度見れば腹に落ちる</a:t>
-            </a:r>
-          </a:p>
-          <a:p>
-            <a:pPr algn="l">
-              <a:spcAft>
-                <a:spcPts val="700"/>
-              </a:spcAft>
-            </a:pPr>
-            <a:r>
-              <a:rPr sz="2000" b="1">
-                <a:solidFill>
-                  <a:srgbClr val="1F3355"/>
-                </a:solidFill>
-                <a:latin typeface="Meiryo UI"/>
-              </a:rPr>
-              <a:t>そこで</a:t>
-            </a:r>
-          </a:p>
-          <a:p>
-            <a:pPr lvl="1" algn="l">
-              <a:spcAft>
-                <a:spcPts val="400"/>
-              </a:spcAft>
-            </a:pPr>
-            <a:r>
-              <a:rPr sz="1700" b="0">
-                <a:solidFill>
-                  <a:srgbClr val="555555"/>
-                </a:solidFill>
-                <a:latin typeface="Meiryo UI"/>
-              </a:rPr>
-              <a:t>自宅に NTT の網と VNE を丸ごと再現した検証環境を作りました</a:t>
-            </a:r>
-          </a:p>
-          <a:p>
-            <a:pPr lvl="1" algn="l">
-              <a:spcAft>
-                <a:spcPts val="400"/>
-              </a:spcAft>
-            </a:pPr>
-            <a:r>
-              <a:rPr sz="1700" b="0">
-                <a:solidFill>
-                  <a:srgbClr val="555555"/>
-                </a:solidFill>
-                <a:latin typeface="Meiryo UI"/>
-              </a:rPr>
-              <a:t>これから会社の VMware にも同じものを持ち込みます</a:t>
-            </a:r>
-          </a:p>
-          <a:p>
-            <a:pPr algn="l">
-              <a:spcAft>
-                <a:spcPts val="700"/>
-              </a:spcAft>
-            </a:pPr>
-            <a:r>
-              <a:rPr sz="2000" b="1">
-                <a:solidFill>
-                  <a:srgbClr val="C0392B"/>
-                </a:solidFill>
-                <a:latin typeface="Meiryo UI"/>
-              </a:rPr>
-              <a:t>※ ここは 1 分で流してください。次の構成図から本番です</a:t>
-            </a:r>
-          </a:p>
-        </p:txBody>
-      </p:sp>
-    </p:spTree>
-  </p:cSld>
-  <p:clrMapOvr>
-    <a:masterClrMapping/>
-  </p:clrMapOvr>
-</p:sld>
-</file>
-
-<file path=ppt/slides/slide24.xml><?xml version="1.0" encoding="utf-8"?>
+<file path=ppt/slides/slide27.xml><?xml version="1.0" encoding="utf-8"?>
 <p:sld xmlns:a="http://schemas.openxmlformats.org/drawingml/2006/main" xmlns:p="http://schemas.openxmlformats.org/presentationml/2006/main" xmlns:r="http://schemas.openxmlformats.org/officeDocument/2006/relationships">
   <p:cSld>
     <p:spTree>
@@ -8560,7 +9709,7 @@
                 </a:solidFill>
                 <a:latin typeface="Meiryo UI"/>
               </a:rPr>
-              <a:t>CPE</a:t>
+              <a:t>お客様のルータ</a:t>
             </a:r>
           </a:p>
           <a:p>
@@ -8670,7 +9819,7 @@
                 </a:solidFill>
                 <a:latin typeface="Meiryo UI"/>
               </a:rPr>
-              <a:t>NGN-SIM</a:t>
+              <a:t>NTT の網の代わり</a:t>
             </a:r>
           </a:p>
           <a:p>
@@ -8682,8 +9831,8 @@
                 </a:solidFill>
                 <a:latin typeface="Meiryo UI"/>
               </a:rPr>
-              <a:t>NTT の網の代わり
-RA を撒き /56 を委譲</a:t>
+              <a:t>住所を配る役
+RA と DHCPv6</a:t>
             </a:r>
           </a:p>
         </p:txBody>
@@ -8780,7 +9929,7 @@
                 </a:solidFill>
                 <a:latin typeface="Meiryo UI"/>
               </a:rPr>
-              <a:t>VNE</a:t>
+              <a:t>受け口</a:t>
             </a:r>
           </a:p>
           <a:p>
@@ -8792,8 +9941,8 @@
                 </a:solidFill>
                 <a:latin typeface="Meiryo UI"/>
               </a:rPr>
-              <a:t>MAP-E の BR
-DS-Lite の AFTR</a:t>
+              <a:t>荷物を降ろす側
+MAP-E / DS-Lite</a:t>
             </a:r>
           </a:p>
         </p:txBody>
@@ -8890,7 +10039,7 @@
                 </a:solidFill>
                 <a:latin typeface="Meiryo UI"/>
               </a:rPr>
-              <a:t>INET-SIM</a:t>
+              <a:t>模擬インターネット</a:t>
             </a:r>
           </a:p>
           <a:p>
@@ -8902,8 +10051,8 @@
                 </a:solidFill>
                 <a:latin typeface="Meiryo UI"/>
               </a:rPr>
-              <a:t>模擬インターネット
-Web と DNS</a:t>
+              <a:t>Web と DNS
+アクセス元を表示する</a:t>
             </a:r>
           </a:p>
         </p:txBody>
@@ -8942,7 +10091,7 @@
                 </a:solidFill>
                 <a:latin typeface="Meiryo UI"/>
               </a:rPr>
-              <a:t>別に PPPoE の受け口 (BRAS) も立ててあるので、切替前の状態も再現できます。</a:t>
+              <a:t>本番の回線では試せないので、NTT の網と VNE を丸ごと自宅に再現しました。PPPoE の受け口もあるので切替前の状態も作れます。</a:t>
             </a:r>
           </a:p>
           <a:p>
@@ -8958,7 +10107,7 @@
                 </a:solidFill>
                 <a:latin typeface="Meiryo UI"/>
               </a:rPr>
-              <a:t>INET-SIM の Web はアクセス元のアドレスを表示します。これが経路を確かめる決め手になります。</a:t>
+              <a:t>模擬インターネットの Web はアクセス元のアドレスを表示します。これが経路を確かめる決め手になります。</a:t>
             </a:r>
           </a:p>
           <a:p>
@@ -9003,7 +10152,7 @@
 </p:sld>
 </file>
 
-<file path=ppt/slides/slide25.xml><?xml version="1.0" encoding="utf-8"?>
+<file path=ppt/slides/slide28.xml><?xml version="1.0" encoding="utf-8"?>
 <p:sld xmlns:a="http://schemas.openxmlformats.org/drawingml/2006/main" xmlns:p="http://schemas.openxmlformats.org/presentationml/2006/main" xmlns:r="http://schemas.openxmlformats.org/officeDocument/2006/relationships">
   <p:cSld>
     <p:spTree>
@@ -9058,7 +10207,7 @@
         </p:nvGraphicFramePr>
         <p:xfrm>
           <a:off x="502920" y="1143000"/>
-          <a:ext cx="10789920" cy="2304288"/>
+          <a:ext cx="10789920" cy="1865376"/>
         </p:xfrm>
         <a:graphic>
           <a:graphicData uri="http://schemas.openxmlformats.org/drawingml/2006/table">
@@ -9070,7 +10219,7 @@
                 <a:gridCol w="2743200"/>
                 <a:gridCol w="8046720"/>
               </a:tblGrid>
-              <a:tr h="384048">
+              <a:tr h="310896">
                 <a:tc>
                   <a:txBody>
                     <a:bodyPr/>
@@ -9118,7 +10267,7 @@
                   </a:tcPr>
                 </a:tc>
               </a:tr>
-              <a:tr h="384048">
+              <a:tr h="310896">
                 <a:tc>
                   <a:txBody>
                     <a:bodyPr/>
@@ -9166,7 +10315,7 @@
                   </a:tcPr>
                 </a:tc>
               </a:tr>
-              <a:tr h="384048">
+              <a:tr h="310896">
                 <a:tc>
                   <a:txBody>
                     <a:bodyPr/>
@@ -9203,7 +10352,7 @@
                           </a:solidFill>
                           <a:latin typeface="Meiryo UI"/>
                         </a:rPr>
-                        <a:t>MAP-E と DS-Lite を行き来できる。RA 方式と PD 方式も切り替えられる</a:t>
+                        <a:t>MAP-E と DS-Lite を行き来できる。RA 方式と PD 方式 (まとめ借り) も切替可</a:t>
                       </a:r>
                     </a:p>
                   </a:txBody>
@@ -9214,7 +10363,7 @@
                   </a:tcPr>
                 </a:tc>
               </a:tr>
-              <a:tr h="384048">
+              <a:tr h="310896">
                 <a:tc>
                   <a:txBody>
                     <a:bodyPr/>
@@ -9262,7 +10411,7 @@
                   </a:tcPr>
                 </a:tc>
               </a:tr>
-              <a:tr h="384048">
+              <a:tr h="310896">
                 <a:tc>
                   <a:txBody>
                     <a:bodyPr/>
@@ -9310,7 +10459,7 @@
                   </a:tcPr>
                 </a:tc>
               </a:tr>
-              <a:tr h="384048">
+              <a:tr h="310896">
                 <a:tc>
                   <a:txBody>
                     <a:bodyPr/>
@@ -9347,7 +10496,7 @@
                           </a:solidFill>
                           <a:latin typeface="Meiryo UI"/>
                         </a:rPr>
-                        <a:t>物理の Cisco 892FJ を収容して、本物の設定を投入できる</a:t>
+                        <a:t>物理の Cisco 892FJ を繋ぎ込んで、本物の設定を投入できる</a:t>
                       </a:r>
                     </a:p>
                   </a:txBody>
@@ -9370,7 +10519,7 @@
         </p:nvSpPr>
         <p:spPr>
           <a:xfrm>
-            <a:off x="502920" y="3904487"/>
+            <a:off x="502920" y="3264408"/>
             <a:ext cx="11155680" cy="548640"/>
           </a:xfrm>
           <a:prstGeom prst="rect">
@@ -9405,7 +10554,7 @@
 </p:sld>
 </file>
 
-<file path=ppt/slides/slide26.xml><?xml version="1.0" encoding="utf-8"?>
+<file path=ppt/slides/slide29.xml><?xml version="1.0" encoding="utf-8"?>
 <p:sld xmlns:a="http://schemas.openxmlformats.org/drawingml/2006/main" xmlns:p="http://schemas.openxmlformats.org/presentationml/2006/main" xmlns:r="http://schemas.openxmlformats.org/officeDocument/2006/relationships">
   <p:cSld>
     <p:spTree>
@@ -9460,7 +10609,7 @@
         </p:nvGraphicFramePr>
         <p:xfrm>
           <a:off x="502920" y="1143000"/>
-          <a:ext cx="10789920" cy="2304288"/>
+          <a:ext cx="10789920" cy="1996440"/>
         </p:xfrm>
         <a:graphic>
           <a:graphicData uri="http://schemas.openxmlformats.org/drawingml/2006/table">
@@ -9473,7 +10622,7 @@
                 <a:gridCol w="3108960"/>
                 <a:gridCol w="4754880"/>
               </a:tblGrid>
-              <a:tr h="384048">
+              <a:tr h="332740">
                 <a:tc>
                   <a:txBody>
                     <a:bodyPr/>
@@ -9544,7 +10693,7 @@
                   </a:tcPr>
                 </a:tc>
               </a:tr>
-              <a:tr h="384048">
+              <a:tr h="332740">
                 <a:tc>
                   <a:txBody>
                     <a:bodyPr/>
@@ -9615,7 +10764,7 @@
                   </a:tcPr>
                 </a:tc>
               </a:tr>
-              <a:tr h="384048">
+              <a:tr h="332740">
                 <a:tc>
                   <a:txBody>
                     <a:bodyPr/>
@@ -9686,7 +10835,7 @@
                   </a:tcPr>
                 </a:tc>
               </a:tr>
-              <a:tr h="384048">
+              <a:tr h="332740">
                 <a:tc>
                   <a:txBody>
                     <a:bodyPr/>
@@ -9757,7 +10906,7 @@
                   </a:tcPr>
                 </a:tc>
               </a:tr>
-              <a:tr h="384048">
+              <a:tr h="332740">
                 <a:tc>
                   <a:txBody>
                     <a:bodyPr/>
@@ -9828,7 +10977,7 @@
                   </a:tcPr>
                 </a:tc>
               </a:tr>
-              <a:tr h="384048">
+              <a:tr h="332740">
                 <a:tc>
                   <a:txBody>
                     <a:bodyPr/>
@@ -9888,7 +11037,7 @@
                           </a:solidFill>
                           <a:latin typeface="Meiryo UI"/>
                         </a:rPr>
-                        <a:t>MSS clamp が効いている</a:t>
+                        <a:t>3-5 で入れた「あの 1 行」が効いている</a:t>
                       </a:r>
                     </a:p>
                   </a:txBody>
@@ -9911,7 +11060,7 @@
         </p:nvSpPr>
         <p:spPr>
           <a:xfrm>
-            <a:off x="502920" y="3904487"/>
+            <a:off x="502920" y="3395472"/>
             <a:ext cx="11155680" cy="548640"/>
           </a:xfrm>
           <a:prstGeom prst="rect">
@@ -9946,7 +11095,7 @@
 </p:sld>
 </file>
 
-<file path=ppt/slides/slide27.xml><?xml version="1.0" encoding="utf-8"?>
+<file path=ppt/slides/slide3.xml><?xml version="1.0" encoding="utf-8"?>
 <p:sld xmlns:a="http://schemas.openxmlformats.org/drawingml/2006/main" xmlns:p="http://schemas.openxmlformats.org/presentationml/2006/main" xmlns:r="http://schemas.openxmlformats.org/officeDocument/2006/relationships">
   <p:cSld>
     <p:spTree>
@@ -9986,7 +11135,7 @@
                 </a:solidFill>
                 <a:latin typeface="Meiryo UI"/>
               </a:rPr>
-              <a:t>やってみて分かった「効かない直感」3 つ</a:t>
+              <a:t>今日 持ち帰ってほしいこと</a:t>
             </a:r>
           </a:p>
         </p:txBody>
@@ -10043,7 +11192,7 @@
         <p:spPr>
           <a:xfrm>
             <a:off x="594360" y="1371600"/>
-            <a:ext cx="10972800" cy="4846320"/>
+            <a:ext cx="10972800" cy="4983480"/>
           </a:xfrm>
           <a:prstGeom prst="rect">
             <a:avLst/>
@@ -10058,7 +11207,7 @@
           <a:p>
             <a:pPr algn="l">
               <a:spcAft>
-                <a:spcPts val="700"/>
+                <a:spcPts val="1000"/>
               </a:spcAft>
             </a:pPr>
             <a:r>
@@ -10068,13 +11217,61 @@
                 </a:solidFill>
                 <a:latin typeface="Meiryo UI"/>
               </a:rPr>
-              <a:t>この 3 つは、教科書を読んだだけでは絶対に気づけませんでした</a:t>
+              <a:t>3 つだけです</a:t>
+            </a:r>
+          </a:p>
+          <a:p>
+            <a:pPr lvl="1" algn="l">
+              <a:spcAft>
+                <a:spcPts val="600"/>
+              </a:spcAft>
+            </a:pPr>
+            <a:r>
+              <a:rPr sz="1700" b="0">
+                <a:solidFill>
+                  <a:srgbClr val="555555"/>
+                </a:solidFill>
+                <a:latin typeface="Meiryo UI"/>
+              </a:rPr>
+              <a:t>① なぜ IPv6 に変えるのか — 「アドレスが枯渇したから」ではありません</a:t>
+            </a:r>
+          </a:p>
+          <a:p>
+            <a:pPr lvl="1" algn="l">
+              <a:spcAft>
+                <a:spcPts val="600"/>
+              </a:spcAft>
+            </a:pPr>
+            <a:r>
+              <a:rPr sz="1700" b="0">
+                <a:solidFill>
+                  <a:srgbClr val="555555"/>
+                </a:solidFill>
+                <a:latin typeface="Meiryo UI"/>
+              </a:rPr>
+              <a:t>② お客様の回線がどの方式か、商品名から言えるようになる (v6プラス、transix など)</a:t>
+            </a:r>
+          </a:p>
+          <a:p>
+            <a:pPr lvl="1" algn="l">
+              <a:spcAft>
+                <a:spcPts val="600"/>
+              </a:spcAft>
+            </a:pPr>
+            <a:r>
+              <a:rPr sz="1700" b="0">
+                <a:solidFill>
+                  <a:srgbClr val="555555"/>
+                </a:solidFill>
+                <a:latin typeface="Meiryo UI"/>
+              </a:rPr>
+              <a:t>③ 「ポート開放できますか?」に即答できるようになる</a:t>
             </a:r>
           </a:p>
           <a:p>
             <a:pPr algn="l">
               <a:spcAft>
-                <a:spcPts val="700"/>
+                <a:spcPts val="1000"/>
               </a:spcAft>
             </a:pPr>
             <a:r>
@@ -10084,13 +11281,13 @@
                 </a:solidFill>
                 <a:latin typeface="Meiryo UI"/>
               </a:rPr>
-              <a:t>① 「疎通した」は「正しい経路を通った」ではない</a:t>
+              <a:t>話す順番 — 大きい話から細かい話へ降ります</a:t>
             </a:r>
           </a:p>
           <a:p>
             <a:pPr lvl="1" algn="l">
               <a:spcAft>
-                <a:spcPts val="400"/>
+                <a:spcPts val="600"/>
               </a:spcAft>
             </a:pPr>
             <a:r>
@@ -10100,13 +11297,13 @@
                 </a:solidFill>
                 <a:latin typeface="Meiryo UI"/>
               </a:rPr>
-              <a:t>検証スクリプトが全項目 PASS したのに、実は CPE を通らずに出ていたことがありました</a:t>
+              <a:t>第0部  なぜこの話をするのか</a:t>
             </a:r>
           </a:p>
           <a:p>
             <a:pPr lvl="1" algn="l">
               <a:spcAft>
-                <a:spcPts val="400"/>
+                <a:spcPts val="600"/>
               </a:spcAft>
             </a:pPr>
             <a:r>
@@ -10116,167 +11313,71 @@
                 </a:solidFill>
                 <a:latin typeface="Meiryo UI"/>
               </a:rPr>
-              <a:t>ping も curl も成功するので、見た目では絶対に分かりません</a:t>
+              <a:t>第1部  IPv6 そのもの — どこの国でも同じ話</a:t>
             </a:r>
           </a:p>
           <a:p>
             <a:pPr lvl="1" algn="l">
               <a:spcAft>
-                <a:spcPts val="400"/>
-              </a:spcAft>
-            </a:pPr>
-            <a:r>
-              <a:rPr sz="1700" b="1">
+                <a:spcPts val="600"/>
+              </a:spcAft>
+            </a:pPr>
+            <a:r>
+              <a:rPr sz="1700" b="0">
+                <a:solidFill>
+                  <a:srgbClr val="555555"/>
+                </a:solidFill>
+                <a:latin typeface="Meiryo UI"/>
+              </a:rPr>
+              <a:t>第2部  日本の回線 — ここからは日本だけの話</a:t>
+            </a:r>
+          </a:p>
+          <a:p>
+            <a:pPr lvl="1" algn="l">
+              <a:spcAft>
+                <a:spcPts val="600"/>
+              </a:spcAft>
+            </a:pPr>
+            <a:r>
+              <a:rPr sz="1700" b="0">
+                <a:solidFill>
+                  <a:srgbClr val="555555"/>
+                </a:solidFill>
+                <a:latin typeface="Meiryo UI"/>
+              </a:rPr>
+              <a:t>第3部  IPv4 をどうやって運ぶか — 今日の本題</a:t>
+            </a:r>
+          </a:p>
+          <a:p>
+            <a:pPr lvl="1" algn="l">
+              <a:spcAft>
+                <a:spcPts val="600"/>
+              </a:spcAft>
+            </a:pPr>
+            <a:r>
+              <a:rPr sz="1700" b="0">
+                <a:solidFill>
+                  <a:srgbClr val="555555"/>
+                </a:solidFill>
+                <a:latin typeface="Meiryo UI"/>
+              </a:rPr>
+              <a:t>第4部  検証環境で実際に見たもの</a:t>
+            </a:r>
+          </a:p>
+          <a:p>
+            <a:pPr algn="l">
+              <a:spcAft>
+                <a:spcPts val="1000"/>
+              </a:spcAft>
+            </a:pPr>
+            <a:r>
+              <a:rPr sz="2000" b="1">
                 <a:solidFill>
                   <a:srgbClr val="C0392B"/>
                 </a:solidFill>
                 <a:latin typeface="Meiryo UI"/>
               </a:rPr>
-              <a:t>→ 必ず「出口のアドレス」を確認する。これだけが唯一の証拠です</a:t>
-            </a:r>
-          </a:p>
-          <a:p>
-            <a:pPr algn="l">
-              <a:spcAft>
-                <a:spcPts val="700"/>
-              </a:spcAft>
-            </a:pPr>
-            <a:r>
-              <a:rPr sz="2000" b="1">
-                <a:solidFill>
-                  <a:srgbClr val="1F3355"/>
-                </a:solidFill>
-                <a:latin typeface="Meiryo UI"/>
-              </a:rPr>
-              <a:t>② 設定が入ることと、動くことは別物</a:t>
-            </a:r>
-          </a:p>
-          <a:p>
-            <a:pPr lvl="1" algn="l">
-              <a:spcAft>
-                <a:spcPts val="400"/>
-              </a:spcAft>
-            </a:pPr>
-            <a:r>
-              <a:rPr sz="1700" b="0">
-                <a:solidFill>
-                  <a:srgbClr val="555555"/>
-                </a:solidFill>
-                <a:latin typeface="Meiryo UI"/>
-              </a:rPr>
-              <a:t>Cisco の仮想ルータで MAP-E を試したら、設定は通り確認コマンドも正しい値を返した</a:t>
-            </a:r>
-          </a:p>
-          <a:p>
-            <a:pPr lvl="1" algn="l">
-              <a:spcAft>
-                <a:spcPts val="400"/>
-              </a:spcAft>
-            </a:pPr>
-            <a:r>
-              <a:rPr sz="1700" b="0">
-                <a:solidFill>
-                  <a:srgbClr val="555555"/>
-                </a:solidFill>
-                <a:latin typeface="Meiryo UI"/>
-              </a:rPr>
-              <a:t>それなのにパケットが 1 つも流れなかった。転送エンジンが落ちていました</a:t>
-            </a:r>
-          </a:p>
-          <a:p>
-            <a:pPr lvl="1" algn="l">
-              <a:spcAft>
-                <a:spcPts val="400"/>
-              </a:spcAft>
-            </a:pPr>
-            <a:r>
-              <a:rPr sz="1700" b="0">
-                <a:solidFill>
-                  <a:srgbClr val="555555"/>
-                </a:solidFill>
-                <a:latin typeface="Meiryo UI"/>
-              </a:rPr>
-              <a:t>※ 実機の Cisco で同じことが起きるかは確かめていません。仮想ルータでの話です</a:t>
-            </a:r>
-          </a:p>
-          <a:p>
-            <a:pPr lvl="1" algn="l">
-              <a:spcAft>
-                <a:spcPts val="400"/>
-              </a:spcAft>
-            </a:pPr>
-            <a:r>
-              <a:rPr sz="1700" b="1">
-                <a:solidFill>
-                  <a:srgbClr val="C0392B"/>
-                </a:solidFill>
-                <a:latin typeface="Meiryo UI"/>
-              </a:rPr>
-              <a:t>→ 確認コマンドで終わらせず、パケットを流して測るところまでやる</a:t>
-            </a:r>
-          </a:p>
-          <a:p>
-            <a:pPr algn="l">
-              <a:spcAft>
-                <a:spcPts val="700"/>
-              </a:spcAft>
-            </a:pPr>
-            <a:r>
-              <a:rPr sz="2000" b="1">
-                <a:solidFill>
-                  <a:srgbClr val="1F3355"/>
-                </a:solidFill>
-                <a:latin typeface="Meiryo UI"/>
-              </a:rPr>
-              <a:t>③ 症状が 1 つでも、原因は 1 つとは限らない</a:t>
-            </a:r>
-          </a:p>
-          <a:p>
-            <a:pPr lvl="1" algn="l">
-              <a:spcAft>
-                <a:spcPts val="400"/>
-              </a:spcAft>
-            </a:pPr>
-            <a:r>
-              <a:rPr sz="1700" b="0">
-                <a:solidFill>
-                  <a:srgbClr val="555555"/>
-                </a:solidFill>
-                <a:latin typeface="Meiryo UI"/>
-              </a:rPr>
-              <a:t>「ping は通るのに名前解決だけ死ぬ」を追ったら、独立した原因が 3 つ重なっていました</a:t>
-            </a:r>
-          </a:p>
-          <a:p>
-            <a:pPr lvl="1" algn="l">
-              <a:spcAft>
-                <a:spcPts val="400"/>
-              </a:spcAft>
-            </a:pPr>
-            <a:r>
-              <a:rPr sz="1700" b="0">
-                <a:solidFill>
-                  <a:srgbClr val="555555"/>
-                </a:solidFill>
-                <a:latin typeface="Meiryo UI"/>
-              </a:rPr>
-              <a:t>1 つ直しても直らないので「直したのに変わらない = 見当違い」と判断すると迷子になります</a:t>
-            </a:r>
-          </a:p>
-          <a:p>
-            <a:pPr lvl="1" algn="l">
-              <a:spcAft>
-                <a:spcPts val="400"/>
-              </a:spcAft>
-            </a:pPr>
-            <a:r>
-              <a:rPr sz="1700" b="1">
-                <a:solidFill>
-                  <a:srgbClr val="C0392B"/>
-                </a:solidFill>
-                <a:latin typeface="Meiryo UI"/>
-              </a:rPr>
-              <a:t>→ 1 つ直したら 1 つ確かめる。まとめて直さない</a:t>
+              <a:t>迷ったらこのページに戻ってください。どこの話か分かれば必ずついてこられます</a:t>
             </a:r>
           </a:p>
         </p:txBody>
@@ -10289,7 +11390,7 @@
 </p:sld>
 </file>
 
-<file path=ppt/slides/slide28.xml><?xml version="1.0" encoding="utf-8"?>
+<file path=ppt/slides/slide30.xml><?xml version="1.0" encoding="utf-8"?>
 <p:sld xmlns:a="http://schemas.openxmlformats.org/drawingml/2006/main" xmlns:p="http://schemas.openxmlformats.org/presentationml/2006/main" xmlns:r="http://schemas.openxmlformats.org/officeDocument/2006/relationships">
   <p:cSld>
     <p:spTree>
@@ -10329,7 +11430,7 @@
                 </a:solidFill>
                 <a:latin typeface="Meiryo UI"/>
               </a:rPr>
-              <a:t>会社でどう使うか</a:t>
+              <a:t>やってみて分かった「効かない直感」3 つ</a:t>
             </a:r>
           </a:p>
         </p:txBody>
@@ -10386,7 +11487,7 @@
         <p:spPr>
           <a:xfrm>
             <a:off x="594360" y="1371600"/>
-            <a:ext cx="10972800" cy="4846320"/>
+            <a:ext cx="10972800" cy="4983480"/>
           </a:xfrm>
           <a:prstGeom prst="rect">
             <a:avLst/>
@@ -10401,17 +11502,33 @@
           <a:p>
             <a:pPr algn="l">
               <a:spcAft>
-                <a:spcPts val="700"/>
-              </a:spcAft>
-            </a:pPr>
-            <a:r>
-              <a:rPr sz="2000" b="1">
+                <a:spcPts val="800"/>
+              </a:spcAft>
+            </a:pPr>
+            <a:r>
+              <a:rPr sz="1800" b="1">
                 <a:solidFill>
                   <a:srgbClr val="1F3355"/>
                 </a:solidFill>
                 <a:latin typeface="Meiryo UI"/>
               </a:rPr>
-              <a:t>同じものを会社の VMware に再現できるよう、一式を用意してあります</a:t>
+              <a:t>この 3 つは、教科書を読んだだけでは絶対に気づけませんでした</a:t>
+            </a:r>
+          </a:p>
+          <a:p>
+            <a:pPr algn="l">
+              <a:spcAft>
+                <a:spcPts val="800"/>
+              </a:spcAft>
+            </a:pPr>
+            <a:r>
+              <a:rPr sz="1800" b="1">
+                <a:solidFill>
+                  <a:srgbClr val="1F3355"/>
+                </a:solidFill>
+                <a:latin typeface="Meiryo UI"/>
+              </a:rPr>
+              <a:t>① 「疎通した」は「正しい経路を通った」ではない</a:t>
             </a:r>
           </a:p>
           <a:p>
@@ -10421,13 +11538,13 @@
               </a:spcAft>
             </a:pPr>
             <a:r>
-              <a:rPr sz="1700" b="0">
+              <a:rPr sz="1500" b="0">
                 <a:solidFill>
                   <a:srgbClr val="555555"/>
                 </a:solidFill>
                 <a:latin typeface="Meiryo UI"/>
               </a:rPr>
-              <a:t>構築ランブック … 上から順に実行すれば完成する手順書。詰まった箇所も全部載せてあります</a:t>
+              <a:t>検証スクリプトが全項目 PASS したのに、経路が間違っていたことがありました</a:t>
             </a:r>
           </a:p>
           <a:p>
@@ -10437,13 +11554,13 @@
               </a:spcAft>
             </a:pPr>
             <a:r>
-              <a:rPr sz="1700" b="0">
+              <a:rPr sz="1500" b="0">
                 <a:solidFill>
                   <a:srgbClr val="555555"/>
                 </a:solidFill>
                 <a:latin typeface="Meiryo UI"/>
               </a:rPr>
-              <a:t>セットアップスクリプト … 各サーバの設定を自動でやるもの</a:t>
+              <a:t>構成を誤った DS-Lite で PASS=10。出口を見たらクライアントの私設アドレスのままだった</a:t>
             </a:r>
           </a:p>
           <a:p>
@@ -10453,13 +11570,13 @@
               </a:spcAft>
             </a:pPr>
             <a:r>
-              <a:rPr sz="1700" b="0">
+              <a:rPr sz="1500" b="0">
                 <a:solidFill>
                   <a:srgbClr val="555555"/>
                 </a:solidFill>
                 <a:latin typeface="Meiryo UI"/>
               </a:rPr>
-              <a:t>チェックスクリプト … 切替の前後で流して証跡ログを残すもの (Windows 版もあります)</a:t>
+              <a:t>ping も curl も成功するので、見た目では絶対に分かりません</a:t>
             </a:r>
           </a:p>
           <a:p>
@@ -10469,13 +11586,45 @@
               </a:spcAft>
             </a:pPr>
             <a:r>
-              <a:rPr sz="1700" b="0">
+              <a:rPr sz="1500" b="1">
+                <a:solidFill>
+                  <a:srgbClr val="C0392B"/>
+                </a:solidFill>
+                <a:latin typeface="Meiryo UI"/>
+              </a:rPr>
+              <a:t>→ 必ず「出口のアドレス」を確認する。これだけが唯一の証拠です</a:t>
+            </a:r>
+          </a:p>
+          <a:p>
+            <a:pPr algn="l">
+              <a:spcAft>
+                <a:spcPts val="800"/>
+              </a:spcAft>
+            </a:pPr>
+            <a:r>
+              <a:rPr sz="1800" b="1">
+                <a:solidFill>
+                  <a:srgbClr val="1F3355"/>
+                </a:solidFill>
+                <a:latin typeface="Meiryo UI"/>
+              </a:rPr>
+              <a:t>② 設定が入ることと、動くことは別物</a:t>
+            </a:r>
+          </a:p>
+          <a:p>
+            <a:pPr lvl="1" algn="l">
+              <a:spcAft>
+                <a:spcPts val="400"/>
+              </a:spcAft>
+            </a:pPr>
+            <a:r>
+              <a:rPr sz="1500" b="0">
                 <a:solidFill>
                   <a:srgbClr val="555555"/>
                 </a:solidFill>
                 <a:latin typeface="Meiryo UI"/>
               </a:rPr>
-              <a:t>障害再現レシピ … わざと壊すための手順</a:t>
+              <a:t>Cisco の仮想ルータで MAP-E を試したら、設定は通り確認コマンドも正しい値を返した</a:t>
             </a:r>
           </a:p>
           <a:p>
@@ -10485,109 +11634,109 @@
               </a:spcAft>
             </a:pPr>
             <a:r>
-              <a:rPr sz="1700" b="0">
+              <a:rPr sz="1500" b="0">
                 <a:solidFill>
                   <a:srgbClr val="555555"/>
                 </a:solidFill>
                 <a:latin typeface="Meiryo UI"/>
               </a:rPr>
-              <a:t>実走の記録 … 何をやって何にハマったかの一次記録</a:t>
+              <a:t>それなのにパケットが 1 つも流れなかった。実際にパケットを運ぶ部分が落ちていました</a:t>
+            </a:r>
+          </a:p>
+          <a:p>
+            <a:pPr lvl="1" algn="l">
+              <a:spcAft>
+                <a:spcPts val="400"/>
+              </a:spcAft>
+            </a:pPr>
+            <a:r>
+              <a:rPr sz="1500" b="0">
+                <a:solidFill>
+                  <a:srgbClr val="555555"/>
+                </a:solidFill>
+                <a:latin typeface="Meiryo UI"/>
+              </a:rPr>
+              <a:t>※ 実機の Cisco で同じことが起きるかは確かめていません。仮想ルータでの話です</a:t>
+            </a:r>
+          </a:p>
+          <a:p>
+            <a:pPr lvl="1" algn="l">
+              <a:spcAft>
+                <a:spcPts val="400"/>
+              </a:spcAft>
+            </a:pPr>
+            <a:r>
+              <a:rPr sz="1500" b="1">
+                <a:solidFill>
+                  <a:srgbClr val="C0392B"/>
+                </a:solidFill>
+                <a:latin typeface="Meiryo UI"/>
+              </a:rPr>
+              <a:t>→ 確認コマンドで終わらせず、パケットを流して測るところまでやる</a:t>
             </a:r>
           </a:p>
           <a:p>
             <a:pPr algn="l">
               <a:spcAft>
-                <a:spcPts val="700"/>
-              </a:spcAft>
-            </a:pPr>
-            <a:r>
-              <a:rPr sz="2000" b="1">
+                <a:spcPts val="800"/>
+              </a:spcAft>
+            </a:pPr>
+            <a:r>
+              <a:rPr sz="1800" b="1">
+                <a:solidFill>
+                  <a:srgbClr val="1F3355"/>
+                </a:solidFill>
+                <a:latin typeface="Meiryo UI"/>
+              </a:rPr>
+              <a:t>③ 症状が 1 つでも、原因は 1 つとは限らない</a:t>
+            </a:r>
+          </a:p>
+          <a:p>
+            <a:pPr lvl="1" algn="l">
+              <a:spcAft>
+                <a:spcPts val="400"/>
+              </a:spcAft>
+            </a:pPr>
+            <a:r>
+              <a:rPr sz="1500" b="0">
+                <a:solidFill>
+                  <a:srgbClr val="555555"/>
+                </a:solidFill>
+                <a:latin typeface="Meiryo UI"/>
+              </a:rPr>
+              <a:t>「ping は通るのに名前解決だけ死ぬ」を追ったら、独立した原因が 3 つ重なっていました</a:t>
+            </a:r>
+          </a:p>
+          <a:p>
+            <a:pPr lvl="1" algn="l">
+              <a:spcAft>
+                <a:spcPts val="400"/>
+              </a:spcAft>
+            </a:pPr>
+            <a:r>
+              <a:rPr sz="1500" b="0">
+                <a:solidFill>
+                  <a:srgbClr val="555555"/>
+                </a:solidFill>
+                <a:latin typeface="Meiryo UI"/>
+              </a:rPr>
+              <a:t>1 つ直しても直らないので「直したのに変わらない = 見当違い」と判断すると迷子になります</a:t>
+            </a:r>
+          </a:p>
+          <a:p>
+            <a:pPr lvl="1" algn="l">
+              <a:spcAft>
+                <a:spcPts val="400"/>
+              </a:spcAft>
+            </a:pPr>
+            <a:r>
+              <a:rPr sz="1500" b="1">
                 <a:solidFill>
                   <a:srgbClr val="C0392B"/>
                 </a:solidFill>
                 <a:latin typeface="Meiryo UI"/>
               </a:rPr>
-              <a:t>会社は AI も GitHub も使えない前提で作ってあります</a:t>
-            </a:r>
-          </a:p>
-          <a:p>
-            <a:pPr lvl="1" algn="l">
-              <a:spcAft>
-                <a:spcPts val="400"/>
-              </a:spcAft>
-            </a:pPr>
-            <a:r>
-              <a:rPr sz="1700" b="0">
-                <a:solidFill>
-                  <a:srgbClr val="555555"/>
-                </a:solidFill>
-                <a:latin typeface="Meiryo UI"/>
-              </a:rPr>
-              <a:t>このバンドルだけ持ち込めば構築できます</a:t>
-            </a:r>
-          </a:p>
-          <a:p>
-            <a:pPr algn="l">
-              <a:spcAft>
-                <a:spcPts val="700"/>
-              </a:spcAft>
-            </a:pPr>
-            <a:r>
-              <a:rPr sz="2000" b="1">
-                <a:solidFill>
-                  <a:srgbClr val="1F3355"/>
-                </a:solidFill>
-                <a:latin typeface="Meiryo UI"/>
-              </a:rPr>
-              <a:t>想定している使い道</a:t>
-            </a:r>
-          </a:p>
-          <a:p>
-            <a:pPr lvl="1" algn="l">
-              <a:spcAft>
-                <a:spcPts val="400"/>
-              </a:spcAft>
-            </a:pPr>
-            <a:r>
-              <a:rPr sz="1700" b="0">
-                <a:solidFill>
-                  <a:srgbClr val="555555"/>
-                </a:solidFill>
-                <a:latin typeface="Meiryo UI"/>
-              </a:rPr>
-              <a:t>① 勉強会 (若手にパケットを見せる)</a:t>
-            </a:r>
-          </a:p>
-          <a:p>
-            <a:pPr lvl="1" algn="l">
-              <a:spcAft>
-                <a:spcPts val="400"/>
-              </a:spcAft>
-            </a:pPr>
-            <a:r>
-              <a:rPr sz="1700" b="0">
-                <a:solidFill>
-                  <a:srgbClr val="555555"/>
-                </a:solidFill>
-                <a:latin typeface="Meiryo UI"/>
-              </a:rPr>
-              <a:t>② 案件前の事前検証 (この構成で本当に動くかを先に確かめる)</a:t>
-            </a:r>
-          </a:p>
-          <a:p>
-            <a:pPr lvl="1" algn="l">
-              <a:spcAft>
-                <a:spcPts val="400"/>
-              </a:spcAft>
-            </a:pPr>
-            <a:r>
-              <a:rPr sz="1700" b="0">
-                <a:solidFill>
-                  <a:srgbClr val="555555"/>
-                </a:solidFill>
-                <a:latin typeface="Meiryo UI"/>
-              </a:rPr>
-              <a:t>③ 切替当日の判断材料 (同じ症状を先に見ておく)</a:t>
+              <a:t>→ 1 つ直したら 1 つ確かめる。まとめて直さない</a:t>
             </a:r>
           </a:p>
         </p:txBody>
@@ -10600,7 +11749,7 @@
 </p:sld>
 </file>
 
-<file path=ppt/slides/slide29.xml><?xml version="1.0" encoding="utf-8"?>
+<file path=ppt/slides/slide31.xml><?xml version="1.0" encoding="utf-8"?>
 <p:sld xmlns:a="http://schemas.openxmlformats.org/drawingml/2006/main" xmlns:p="http://schemas.openxmlformats.org/presentationml/2006/main" xmlns:r="http://schemas.openxmlformats.org/officeDocument/2006/relationships">
   <p:cSld>
     <p:spTree>
@@ -10640,7 +11789,7 @@
                 </a:solidFill>
                 <a:latin typeface="Meiryo UI"/>
               </a:rPr>
-              <a:t>まとめ — 3 行と、明日から使うチェックリスト</a:t>
+              <a:t>会社でどう使うか</a:t>
             </a:r>
           </a:p>
         </p:txBody>
@@ -10697,7 +11846,7 @@
         <p:spPr>
           <a:xfrm>
             <a:off x="594360" y="1371600"/>
-            <a:ext cx="10972800" cy="4846320"/>
+            <a:ext cx="10972800" cy="4983480"/>
           </a:xfrm>
           <a:prstGeom prst="rect">
             <a:avLst/>
@@ -10712,7 +11861,7 @@
           <a:p>
             <a:pPr algn="l">
               <a:spcAft>
-                <a:spcPts val="700"/>
+                <a:spcPts val="1000"/>
               </a:spcAft>
             </a:pPr>
             <a:r>
@@ -10722,13 +11871,13 @@
                 </a:solidFill>
                 <a:latin typeface="Meiryo UI"/>
               </a:rPr>
-              <a:t>今日の話を 3 行にすると</a:t>
+              <a:t>同じものを会社の VMware に再現できるよう、一式を用意してあります</a:t>
             </a:r>
           </a:p>
           <a:p>
             <a:pPr lvl="1" algn="l">
               <a:spcAft>
-                <a:spcPts val="400"/>
+                <a:spcPts val="600"/>
               </a:spcAft>
             </a:pPr>
             <a:r>
@@ -10738,13 +11887,13 @@
                 </a:solidFill>
                 <a:latin typeface="Meiryo UI"/>
               </a:rPr>
-              <a:t>① PPPoE が遅いから IPoE に変える。アドレス枯渇の話ではありません</a:t>
+              <a:t>構築ランブック … 上から順に実行すれば完成する手順書。詰まった箇所も全部載せてあります</a:t>
             </a:r>
           </a:p>
           <a:p>
             <a:pPr lvl="1" algn="l">
               <a:spcAft>
-                <a:spcPts val="400"/>
+                <a:spcPts val="600"/>
               </a:spcAft>
             </a:pPr>
             <a:r>
@@ -10754,13 +11903,13 @@
                 </a:solidFill>
                 <a:latin typeface="Meiryo UI"/>
               </a:rPr>
-              <a:t>② 社内は IPv4 のまま。だから IPv4 を IPv6 に載せて運ぶ。それが MAP-E と DS-Lite</a:t>
+              <a:t>セットアップスクリプト … 各サーバの設定を自動でやるもの</a:t>
             </a:r>
           </a:p>
           <a:p>
             <a:pPr lvl="1" algn="l">
               <a:spcAft>
-                <a:spcPts val="400"/>
+                <a:spcPts val="600"/>
               </a:spcAft>
             </a:pPr>
             <a:r>
@@ -10770,29 +11919,93 @@
                 </a:solidFill>
                 <a:latin typeface="Meiryo UI"/>
               </a:rPr>
-              <a:t>③ どちらになるかは選べない。VNE が決めています</a:t>
+              <a:t>チェックスクリプト … 切替の前後で流して証跡ログを残すもの (Windows 版もあります)</a:t>
+            </a:r>
+          </a:p>
+          <a:p>
+            <a:pPr lvl="1" algn="l">
+              <a:spcAft>
+                <a:spcPts val="600"/>
+              </a:spcAft>
+            </a:pPr>
+            <a:r>
+              <a:rPr sz="1700" b="0">
+                <a:solidFill>
+                  <a:srgbClr val="555555"/>
+                </a:solidFill>
+                <a:latin typeface="Meiryo UI"/>
+              </a:rPr>
+              <a:t>障害再現レシピ … わざと壊すための手順</a:t>
+            </a:r>
+          </a:p>
+          <a:p>
+            <a:pPr lvl="1" algn="l">
+              <a:spcAft>
+                <a:spcPts val="600"/>
+              </a:spcAft>
+            </a:pPr>
+            <a:r>
+              <a:rPr sz="1700" b="0">
+                <a:solidFill>
+                  <a:srgbClr val="555555"/>
+                </a:solidFill>
+                <a:latin typeface="Meiryo UI"/>
+              </a:rPr>
+              <a:t>実走の記録 … 何をやって何にハマったかの一次記録</a:t>
             </a:r>
           </a:p>
           <a:p>
             <a:pPr algn="l">
               <a:spcAft>
-                <a:spcPts val="700"/>
+                <a:spcPts val="1000"/>
               </a:spcAft>
             </a:pPr>
             <a:r>
               <a:rPr sz="2000" b="1">
                 <a:solidFill>
+                  <a:srgbClr val="C0392B"/>
+                </a:solidFill>
+                <a:latin typeface="Meiryo UI"/>
+              </a:rPr>
+              <a:t>会社は AI も GitHub も使えない前提で作ってあります</a:t>
+            </a:r>
+          </a:p>
+          <a:p>
+            <a:pPr lvl="1" algn="l">
+              <a:spcAft>
+                <a:spcPts val="600"/>
+              </a:spcAft>
+            </a:pPr>
+            <a:r>
+              <a:rPr sz="1700" b="0">
+                <a:solidFill>
+                  <a:srgbClr val="555555"/>
+                </a:solidFill>
+                <a:latin typeface="Meiryo UI"/>
+              </a:rPr>
+              <a:t>このバンドルだけ持ち込めば構築できます</a:t>
+            </a:r>
+          </a:p>
+          <a:p>
+            <a:pPr algn="l">
+              <a:spcAft>
+                <a:spcPts val="1000"/>
+              </a:spcAft>
+            </a:pPr>
+            <a:r>
+              <a:rPr sz="2000" b="1">
+                <a:solidFill>
                   <a:srgbClr val="1F3355"/>
                 </a:solidFill>
                 <a:latin typeface="Meiryo UI"/>
               </a:rPr>
-              <a:t>案件で最初に確認する 5 つ</a:t>
+              <a:t>想定している使い道</a:t>
             </a:r>
           </a:p>
           <a:p>
             <a:pPr lvl="1" algn="l">
               <a:spcAft>
-                <a:spcPts val="400"/>
+                <a:spcPts val="600"/>
               </a:spcAft>
             </a:pPr>
             <a:r>
@@ -10802,13 +12015,13 @@
                 </a:solidFill>
                 <a:latin typeface="Meiryo UI"/>
               </a:rPr>
-              <a:t>□ ひかり電話はありますか → /64 か /56 かが決まる</a:t>
+              <a:t>① 勉強会 (若手にパケットを見せる)</a:t>
             </a:r>
           </a:p>
           <a:p>
             <a:pPr lvl="1" algn="l">
               <a:spcAft>
-                <a:spcPts val="400"/>
+                <a:spcPts val="600"/>
               </a:spcAft>
             </a:pPr>
             <a:r>
@@ -10818,13 +12031,13 @@
                 </a:solidFill>
                 <a:latin typeface="Meiryo UI"/>
               </a:rPr>
-              <a:t>□ VNE はどこですか → 方式が決まる (ISP 名だけでは分かりません)</a:t>
+              <a:t>② 案件前の事前検証 (この構成で本当に動くかを先に確かめる)</a:t>
             </a:r>
           </a:p>
           <a:p>
             <a:pPr lvl="1" algn="l">
               <a:spcAft>
-                <a:spcPts val="400"/>
+                <a:spcPts val="600"/>
               </a:spcAft>
             </a:pPr>
             <a:r>
@@ -10834,71 +12047,7 @@
                 </a:solidFill>
                 <a:latin typeface="Meiryo UI"/>
               </a:rPr>
-              <a:t>□ 外から入ってくる通信はありますか → VPN / 拠点間 / 監視 / カメラ</a:t>
-            </a:r>
-          </a:p>
-          <a:p>
-            <a:pPr lvl="1" algn="l">
-              <a:spcAft>
-                <a:spcPts val="400"/>
-              </a:spcAft>
-            </a:pPr>
-            <a:r>
-              <a:rPr sz="1700" b="0">
-                <a:solidFill>
-                  <a:srgbClr val="555555"/>
-                </a:solidFill>
-                <a:latin typeface="Meiryo UI"/>
-              </a:rPr>
-              <a:t>□ ある場合、ポート番号は何番ですか → MAP-E でも開けられるかが決まる</a:t>
-            </a:r>
-          </a:p>
-          <a:p>
-            <a:pPr lvl="1" algn="l">
-              <a:spcAft>
-                <a:spcPts val="400"/>
-              </a:spcAft>
-            </a:pPr>
-            <a:r>
-              <a:rPr sz="1700" b="0">
-                <a:solidFill>
-                  <a:srgbClr val="555555"/>
-                </a:solidFill>
-                <a:latin typeface="Meiryo UI"/>
-              </a:rPr>
-              <a:t>□ 同時接続数はどれくらいですか → MAP-E のポート数 (240 など) で足りるか</a:t>
-            </a:r>
-          </a:p>
-          <a:p>
-            <a:pPr algn="l">
-              <a:spcAft>
-                <a:spcPts val="700"/>
-              </a:spcAft>
-            </a:pPr>
-            <a:r>
-              <a:rPr sz="2000" b="1">
-                <a:solidFill>
-                  <a:srgbClr val="1F3355"/>
-                </a:solidFill>
-                <a:latin typeface="Meiryo UI"/>
-              </a:rPr>
-              <a:t>切替後に必ず確認する 1 つ</a:t>
-            </a:r>
-          </a:p>
-          <a:p>
-            <a:pPr lvl="1" algn="l">
-              <a:spcAft>
-                <a:spcPts val="400"/>
-              </a:spcAft>
-            </a:pPr>
-            <a:r>
-              <a:rPr sz="1700" b="1">
-                <a:solidFill>
-                  <a:srgbClr val="C0392B"/>
-                </a:solidFill>
-                <a:latin typeface="Meiryo UI"/>
-              </a:rPr>
-              <a:t>□ どのアドレスで外に出たか。疎通確認だけでは経路が正しいことを示せません</a:t>
+              <a:t>③ 切替当日の判断材料 (同じ症状を先に見ておく)</a:t>
             </a:r>
           </a:p>
         </p:txBody>
@@ -10911,7 +12060,7 @@
 </p:sld>
 </file>
 
-<file path=ppt/slides/slide3.xml><?xml version="1.0" encoding="utf-8"?>
+<file path=ppt/slides/slide32.xml><?xml version="1.0" encoding="utf-8"?>
 <p:sld xmlns:a="http://schemas.openxmlformats.org/drawingml/2006/main" xmlns:p="http://schemas.openxmlformats.org/presentationml/2006/main" xmlns:r="http://schemas.openxmlformats.org/officeDocument/2006/relationships">
   <p:cSld>
     <p:spTree>
@@ -10951,7 +12100,7 @@
                 </a:solidFill>
                 <a:latin typeface="Meiryo UI"/>
               </a:rPr>
-              <a:t>今日 持ち帰ってほしいこと</a:t>
+              <a:t>まとめ — 3 行と、明日から使うチェックリスト</a:t>
             </a:r>
           </a:p>
         </p:txBody>
@@ -11008,7 +12157,7 @@
         <p:spPr>
           <a:xfrm>
             <a:off x="594360" y="1371600"/>
-            <a:ext cx="10972800" cy="4846320"/>
+            <a:ext cx="10972800" cy="4983480"/>
           </a:xfrm>
           <a:prstGeom prst="rect">
             <a:avLst/>
@@ -11023,7 +12172,7 @@
           <a:p>
             <a:pPr algn="l">
               <a:spcAft>
-                <a:spcPts val="700"/>
+                <a:spcPts val="1000"/>
               </a:spcAft>
             </a:pPr>
             <a:r>
@@ -11033,13 +12182,13 @@
                 </a:solidFill>
                 <a:latin typeface="Meiryo UI"/>
               </a:rPr>
-              <a:t>3 つだけです</a:t>
+              <a:t>今日の話を 3 行にすると</a:t>
             </a:r>
           </a:p>
           <a:p>
             <a:pPr lvl="1" algn="l">
               <a:spcAft>
-                <a:spcPts val="400"/>
+                <a:spcPts val="600"/>
               </a:spcAft>
             </a:pPr>
             <a:r>
@@ -11049,13 +12198,13 @@
                 </a:solidFill>
                 <a:latin typeface="Meiryo UI"/>
               </a:rPr>
-              <a:t>① なぜ IPv6 に変えるのか — 「アドレスが枯渇したから」ではありません</a:t>
+              <a:t>① PPPoE が遅いから IPoE に変える。アドレス枯渇の話ではありません</a:t>
             </a:r>
           </a:p>
           <a:p>
             <a:pPr lvl="1" algn="l">
               <a:spcAft>
-                <a:spcPts val="400"/>
+                <a:spcPts val="600"/>
               </a:spcAft>
             </a:pPr>
             <a:r>
@@ -11065,13 +12214,13 @@
                 </a:solidFill>
                 <a:latin typeface="Meiryo UI"/>
               </a:rPr>
-              <a:t>② お客様の回線がどの方式か、商品名から言えるようになる (v6プラス、transix など)</a:t>
+              <a:t>② 社内は IPv4 のまま。だから IPv4 を IPv6 に載せて運ぶ。それが MAP-E と DS-Lite</a:t>
             </a:r>
           </a:p>
           <a:p>
             <a:pPr lvl="1" algn="l">
               <a:spcAft>
-                <a:spcPts val="400"/>
+                <a:spcPts val="600"/>
               </a:spcAft>
             </a:pPr>
             <a:r>
@@ -11081,13 +12230,13 @@
                 </a:solidFill>
                 <a:latin typeface="Meiryo UI"/>
               </a:rPr>
-              <a:t>③ 「ポート開放できますか?」に即答できるようになる</a:t>
+              <a:t>③ どちらになるかは選べない。VNE が決めています</a:t>
             </a:r>
           </a:p>
           <a:p>
             <a:pPr algn="l">
               <a:spcAft>
-                <a:spcPts val="700"/>
+                <a:spcPts val="1000"/>
               </a:spcAft>
             </a:pPr>
             <a:r>
@@ -11097,13 +12246,13 @@
                 </a:solidFill>
                 <a:latin typeface="Meiryo UI"/>
               </a:rPr>
-              <a:t>話す順番 — 大きい話から細かい話へ降ります</a:t>
+              <a:t>案件で最初に確認する 5 つ</a:t>
             </a:r>
           </a:p>
           <a:p>
             <a:pPr lvl="1" algn="l">
               <a:spcAft>
-                <a:spcPts val="400"/>
+                <a:spcPts val="600"/>
               </a:spcAft>
             </a:pPr>
             <a:r>
@@ -11113,13 +12262,13 @@
                 </a:solidFill>
                 <a:latin typeface="Meiryo UI"/>
               </a:rPr>
-              <a:t>第0部  なぜこの話をするのか</a:t>
+              <a:t>□ ひかり電話はありますか → /64 か /56 かが決まる</a:t>
             </a:r>
           </a:p>
           <a:p>
             <a:pPr lvl="1" algn="l">
               <a:spcAft>
-                <a:spcPts val="400"/>
+                <a:spcPts val="600"/>
               </a:spcAft>
             </a:pPr>
             <a:r>
@@ -11129,13 +12278,13 @@
                 </a:solidFill>
                 <a:latin typeface="Meiryo UI"/>
               </a:rPr>
-              <a:t>第1部  IPv6 そのもの — どこの国でも同じ話</a:t>
+              <a:t>□ VNE はどこですか → 方式が決まる (ISP 名だけでは分かりません)</a:t>
             </a:r>
           </a:p>
           <a:p>
             <a:pPr lvl="1" algn="l">
               <a:spcAft>
-                <a:spcPts val="400"/>
+                <a:spcPts val="600"/>
               </a:spcAft>
             </a:pPr>
             <a:r>
@@ -11145,13 +12294,13 @@
                 </a:solidFill>
                 <a:latin typeface="Meiryo UI"/>
               </a:rPr>
-              <a:t>第2部  日本の回線 — ここからは日本だけの話</a:t>
+              <a:t>□ 外から入ってくる通信はありますか → VPN / 拠点間 / 監視 / カメラ</a:t>
             </a:r>
           </a:p>
           <a:p>
             <a:pPr lvl="1" algn="l">
               <a:spcAft>
-                <a:spcPts val="400"/>
+                <a:spcPts val="600"/>
               </a:spcAft>
             </a:pPr>
             <a:r>
@@ -11161,13 +12310,13 @@
                 </a:solidFill>
                 <a:latin typeface="Meiryo UI"/>
               </a:rPr>
-              <a:t>第3部  IPv4 をどうやって運ぶか — 今日の本題</a:t>
+              <a:t>□ ある場合、ポート番号は何番ですか → MAP-E でも開けられるかが決まる</a:t>
             </a:r>
           </a:p>
           <a:p>
             <a:pPr lvl="1" algn="l">
               <a:spcAft>
-                <a:spcPts val="400"/>
+                <a:spcPts val="600"/>
               </a:spcAft>
             </a:pPr>
             <a:r>
@@ -11177,23 +12326,39 @@
                 </a:solidFill>
                 <a:latin typeface="Meiryo UI"/>
               </a:rPr>
-              <a:t>第4部  検証環境で実際に見たもの</a:t>
+              <a:t>□ 同時接続数はどれくらいですか → MAP-E のポート数 (240 など) で足りるか</a:t>
             </a:r>
           </a:p>
           <a:p>
             <a:pPr algn="l">
               <a:spcAft>
-                <a:spcPts val="700"/>
+                <a:spcPts val="1000"/>
               </a:spcAft>
             </a:pPr>
             <a:r>
               <a:rPr sz="2000" b="1">
                 <a:solidFill>
+                  <a:srgbClr val="1F3355"/>
+                </a:solidFill>
+                <a:latin typeface="Meiryo UI"/>
+              </a:rPr>
+              <a:t>切替後に必ず確認する 1 つ</a:t>
+            </a:r>
+          </a:p>
+          <a:p>
+            <a:pPr lvl="1" algn="l">
+              <a:spcAft>
+                <a:spcPts val="600"/>
+              </a:spcAft>
+            </a:pPr>
+            <a:r>
+              <a:rPr sz="1700" b="1">
+                <a:solidFill>
                   <a:srgbClr val="C0392B"/>
                 </a:solidFill>
                 <a:latin typeface="Meiryo UI"/>
               </a:rPr>
-              <a:t>迷ったらこのページに戻ってください。どこの話か分かれば必ずついてこられます</a:t>
+              <a:t>□ どのアドレスで外に出たか。疎通確認だけでは経路が正しいことを示せません</a:t>
             </a:r>
           </a:p>
         </p:txBody>
@@ -11206,7 +12371,7 @@
 </p:sld>
 </file>
 
-<file path=ppt/slides/slide30.xml><?xml version="1.0" encoding="utf-8"?>
+<file path=ppt/slides/slide33.xml><?xml version="1.0" encoding="utf-8"?>
 <p:sld xmlns:a="http://schemas.openxmlformats.org/drawingml/2006/main" xmlns:p="http://schemas.openxmlformats.org/presentationml/2006/main" xmlns:r="http://schemas.openxmlformats.org/officeDocument/2006/relationships">
   <p:cSld>
     <p:spTree>
@@ -11303,7 +12468,7 @@
         <p:spPr>
           <a:xfrm>
             <a:off x="594360" y="1371600"/>
-            <a:ext cx="10972800" cy="4846320"/>
+            <a:ext cx="10972800" cy="4983480"/>
           </a:xfrm>
           <a:prstGeom prst="rect">
             <a:avLst/>
@@ -11318,11 +12483,11 @@
           <a:p>
             <a:pPr algn="l">
               <a:spcAft>
-                <a:spcPts val="700"/>
-              </a:spcAft>
-            </a:pPr>
-            <a:r>
-              <a:rPr sz="2000" b="1">
+                <a:spcPts val="600"/>
+              </a:spcAft>
+            </a:pPr>
+            <a:r>
+              <a:rPr sz="1600" b="1">
                 <a:solidFill>
                   <a:srgbClr val="1F3355"/>
                 </a:solidFill>
@@ -11334,11 +12499,11 @@
           <a:p>
             <a:pPr lvl="1" algn="l">
               <a:spcAft>
-                <a:spcPts val="400"/>
-              </a:spcAft>
-            </a:pPr>
-            <a:r>
-              <a:rPr sz="1700" b="0">
+                <a:spcPts val="300"/>
+              </a:spcAft>
+            </a:pPr>
+            <a:r>
+              <a:rPr sz="1300" b="0">
                 <a:solidFill>
                   <a:srgbClr val="555555"/>
                 </a:solidFill>
@@ -11350,11 +12515,11 @@
           <a:p>
             <a:pPr lvl="1" algn="l">
               <a:spcAft>
-                <a:spcPts val="400"/>
-              </a:spcAft>
-            </a:pPr>
-            <a:r>
-              <a:rPr sz="1700" b="0">
+                <a:spcPts val="300"/>
+              </a:spcAft>
+            </a:pPr>
+            <a:r>
+              <a:rPr sz="1300" b="0">
                 <a:solidFill>
                   <a:srgbClr val="555555"/>
                 </a:solidFill>
@@ -11366,11 +12531,11 @@
           <a:p>
             <a:pPr lvl="1" algn="l">
               <a:spcAft>
-                <a:spcPts val="400"/>
-              </a:spcAft>
-            </a:pPr>
-            <a:r>
-              <a:rPr sz="1700" b="0">
+                <a:spcPts val="300"/>
+              </a:spcAft>
+            </a:pPr>
+            <a:r>
+              <a:rPr sz="1300" b="0">
                 <a:solidFill>
                   <a:srgbClr val="555555"/>
                 </a:solidFill>
@@ -11382,11 +12547,11 @@
           <a:p>
             <a:pPr lvl="1" algn="l">
               <a:spcAft>
-                <a:spcPts val="400"/>
-              </a:spcAft>
-            </a:pPr>
-            <a:r>
-              <a:rPr sz="1700" b="0">
+                <a:spcPts val="300"/>
+              </a:spcAft>
+            </a:pPr>
+            <a:r>
+              <a:rPr sz="1300" b="0">
                 <a:solidFill>
                   <a:srgbClr val="555555"/>
                 </a:solidFill>
@@ -11398,11 +12563,11 @@
           <a:p>
             <a:pPr lvl="1" algn="l">
               <a:spcAft>
-                <a:spcPts val="400"/>
-              </a:spcAft>
-            </a:pPr>
-            <a:r>
-              <a:rPr sz="1700" b="0">
+                <a:spcPts val="300"/>
+              </a:spcAft>
+            </a:pPr>
+            <a:r>
+              <a:rPr sz="1300" b="0">
                 <a:solidFill>
                   <a:srgbClr val="555555"/>
                 </a:solidFill>
@@ -11414,11 +12579,11 @@
           <a:p>
             <a:pPr lvl="1" algn="l">
               <a:spcAft>
-                <a:spcPts val="400"/>
-              </a:spcAft>
-            </a:pPr>
-            <a:r>
-              <a:rPr sz="1700" b="0">
+                <a:spcPts val="300"/>
+              </a:spcAft>
+            </a:pPr>
+            <a:r>
+              <a:rPr sz="1300" b="0">
                 <a:solidFill>
                   <a:srgbClr val="555555"/>
                 </a:solidFill>
@@ -11430,11 +12595,11 @@
           <a:p>
             <a:pPr algn="l">
               <a:spcAft>
-                <a:spcPts val="700"/>
-              </a:spcAft>
-            </a:pPr>
-            <a:r>
-              <a:rPr sz="2000" b="1">
+                <a:spcPts val="600"/>
+              </a:spcAft>
+            </a:pPr>
+            <a:r>
+              <a:rPr sz="1600" b="1">
                 <a:solidFill>
                   <a:srgbClr val="C0392B"/>
                 </a:solidFill>
@@ -11446,11 +12611,11 @@
           <a:p>
             <a:pPr algn="l">
               <a:spcAft>
-                <a:spcPts val="700"/>
-              </a:spcAft>
-            </a:pPr>
-            <a:r>
-              <a:rPr sz="2000" b="1">
+                <a:spcPts val="600"/>
+              </a:spcAft>
+            </a:pPr>
+            <a:r>
+              <a:rPr sz="1600" b="1">
                 <a:solidFill>
                   <a:srgbClr val="1F3355"/>
                 </a:solidFill>
@@ -11462,11 +12627,11 @@
           <a:p>
             <a:pPr lvl="1" algn="l">
               <a:spcAft>
-                <a:spcPts val="400"/>
-              </a:spcAft>
-            </a:pPr>
-            <a:r>
-              <a:rPr sz="1700" b="0">
+                <a:spcPts val="300"/>
+              </a:spcAft>
+            </a:pPr>
+            <a:r>
+              <a:rPr sz="1300" b="0">
                 <a:solidFill>
                   <a:srgbClr val="555555"/>
                 </a:solidFill>
@@ -11478,11 +12643,11 @@
           <a:p>
             <a:pPr lvl="1" algn="l">
               <a:spcAft>
-                <a:spcPts val="400"/>
-              </a:spcAft>
-            </a:pPr>
-            <a:r>
-              <a:rPr sz="1700" b="0">
+                <a:spcPts val="300"/>
+              </a:spcAft>
+            </a:pPr>
+            <a:r>
+              <a:rPr sz="1300" b="0">
                 <a:solidFill>
                   <a:srgbClr val="555555"/>
                 </a:solidFill>
@@ -11494,11 +12659,11 @@
           <a:p>
             <a:pPr lvl="1" algn="l">
               <a:spcAft>
-                <a:spcPts val="400"/>
-              </a:spcAft>
-            </a:pPr>
-            <a:r>
-              <a:rPr sz="1700" b="0">
+                <a:spcPts val="300"/>
+              </a:spcAft>
+            </a:pPr>
+            <a:r>
+              <a:rPr sz="1300" b="0">
                 <a:solidFill>
                   <a:srgbClr val="555555"/>
                 </a:solidFill>
@@ -11510,11 +12675,11 @@
           <a:p>
             <a:pPr algn="l">
               <a:spcAft>
-                <a:spcPts val="700"/>
-              </a:spcAft>
-            </a:pPr>
-            <a:r>
-              <a:rPr sz="2000" b="1">
+                <a:spcPts val="600"/>
+              </a:spcAft>
+            </a:pPr>
+            <a:r>
+              <a:rPr sz="1600" b="1">
                 <a:solidFill>
                   <a:srgbClr val="1F3355"/>
                 </a:solidFill>
@@ -11526,11 +12691,11 @@
           <a:p>
             <a:pPr lvl="1" algn="l">
               <a:spcAft>
-                <a:spcPts val="400"/>
-              </a:spcAft>
-            </a:pPr>
-            <a:r>
-              <a:rPr sz="1700" b="0">
+                <a:spcPts val="300"/>
+              </a:spcAft>
+            </a:pPr>
+            <a:r>
+              <a:rPr sz="1300" b="0">
                 <a:solidFill>
                   <a:srgbClr val="555555"/>
                 </a:solidFill>
@@ -11542,11 +12707,11 @@
           <a:p>
             <a:pPr lvl="1" algn="l">
               <a:spcAft>
-                <a:spcPts val="400"/>
-              </a:spcAft>
-            </a:pPr>
-            <a:r>
-              <a:rPr sz="1700" b="0">
+                <a:spcPts val="300"/>
+              </a:spcAft>
+            </a:pPr>
+            <a:r>
+              <a:rPr sz="1300" b="0">
                 <a:solidFill>
                   <a:srgbClr val="0B6040"/>
                 </a:solidFill>
@@ -11558,11 +12723,11 @@
           <a:p>
             <a:pPr algn="l">
               <a:spcAft>
-                <a:spcPts val="700"/>
-              </a:spcAft>
-            </a:pPr>
-            <a:r>
-              <a:rPr sz="2000" b="1">
+                <a:spcPts val="600"/>
+              </a:spcAft>
+            </a:pPr>
+            <a:r>
+              <a:rPr sz="1600" b="1">
                 <a:solidFill>
                   <a:srgbClr val="1F3355"/>
                 </a:solidFill>
@@ -11574,11 +12739,11 @@
           <a:p>
             <a:pPr lvl="1" algn="l">
               <a:spcAft>
-                <a:spcPts val="400"/>
-              </a:spcAft>
-            </a:pPr>
-            <a:r>
-              <a:rPr sz="1700" b="0">
+                <a:spcPts val="300"/>
+              </a:spcAft>
+            </a:pPr>
+            <a:r>
+              <a:rPr sz="1300" b="0">
                 <a:solidFill>
                   <a:srgbClr val="555555"/>
                 </a:solidFill>
@@ -11615,6 +12780,648 @@
         </p:nvSpPr>
         <p:spPr>
           <a:xfrm>
+            <a:off x="502920" y="274320"/>
+            <a:ext cx="11155680" cy="731520"/>
+          </a:xfrm>
+          <a:prstGeom prst="rect">
+            <a:avLst/>
+          </a:prstGeom>
+          <a:noFill/>
+        </p:spPr>
+        <p:txBody>
+          <a:bodyPr wrap="square">
+            <a:spAutoFit/>
+          </a:bodyPr>
+          <a:lstStyle/>
+          <a:p>
+            <a:pPr algn="l"/>
+            <a:r>
+              <a:rPr sz="2600" b="1">
+                <a:solidFill>
+                  <a:srgbClr val="1F3355"/>
+                </a:solidFill>
+                <a:latin typeface="Meiryo UI"/>
+              </a:rPr>
+              <a:t>迷子になったら、この 10 個に戻ってください</a:t>
+            </a:r>
+          </a:p>
+        </p:txBody>
+      </p:sp>
+      <p:graphicFrame>
+        <p:nvGraphicFramePr>
+          <p:cNvPr id="3" name="Table 2"/>
+          <p:cNvGraphicFramePr>
+            <a:graphicFrameLocks noGrp="1"/>
+          </p:cNvGraphicFramePr>
+          <p:nvPr/>
+        </p:nvGraphicFramePr>
+        <p:xfrm>
+          <a:off x="502920" y="1143000"/>
+          <a:ext cx="10789919" cy="3419856"/>
+        </p:xfrm>
+        <a:graphic>
+          <a:graphicData uri="http://schemas.openxmlformats.org/drawingml/2006/table">
+            <a:tbl>
+              <a:tblPr>
+                <a:tableStyleId>{5C22544A-7EE6-4342-B048-85BDC9FD1C3A}</a:tableStyleId>
+              </a:tblPr>
+              <a:tblGrid>
+                <a:gridCol w="3291840"/>
+                <a:gridCol w="7498079"/>
+              </a:tblGrid>
+              <a:tr h="310896">
+                <a:tc>
+                  <a:txBody>
+                    <a:bodyPr/>
+                    <a:lstStyle/>
+                    <a:p>
+                      <a:pPr algn="l"/>
+                      <a:r>
+                        <a:rPr sz="1200" b="1">
+                          <a:solidFill>
+                            <a:srgbClr val="FFFFFF"/>
+                          </a:solidFill>
+                          <a:latin typeface="Meiryo UI"/>
+                        </a:rPr>
+                        <a:t>言葉</a:t>
+                      </a:r>
+                    </a:p>
+                  </a:txBody>
+                  <a:tcPr>
+                    <a:solidFill>
+                      <a:srgbClr val="1F3355"/>
+                    </a:solidFill>
+                  </a:tcPr>
+                </a:tc>
+                <a:tc>
+                  <a:txBody>
+                    <a:bodyPr/>
+                    <a:lstStyle/>
+                    <a:p>
+                      <a:pPr algn="l"/>
+                      <a:r>
+                        <a:rPr sz="1200" b="1">
+                          <a:solidFill>
+                            <a:srgbClr val="FFFFFF"/>
+                          </a:solidFill>
+                          <a:latin typeface="Meiryo UI"/>
+                        </a:rPr>
+                        <a:t>ひとことで言うと</a:t>
+                      </a:r>
+                    </a:p>
+                  </a:txBody>
+                  <a:tcPr>
+                    <a:solidFill>
+                      <a:srgbClr val="1F3355"/>
+                    </a:solidFill>
+                  </a:tcPr>
+                </a:tc>
+              </a:tr>
+              <a:tr h="310896">
+                <a:tc>
+                  <a:txBody>
+                    <a:bodyPr/>
+                    <a:lstStyle/>
+                    <a:p>
+                      <a:pPr algn="l"/>
+                      <a:r>
+                        <a:rPr sz="1100" b="0">
+                          <a:solidFill>
+                            <a:srgbClr val="1F3355"/>
+                          </a:solidFill>
+                          <a:latin typeface="Meiryo UI"/>
+                        </a:rPr>
+                        <a:t>PPPoE (ピーピーピーオーイー)</a:t>
+                      </a:r>
+                    </a:p>
+                  </a:txBody>
+                  <a:tcPr>
+                    <a:solidFill>
+                      <a:srgbClr val="FFFFFF"/>
+                    </a:solidFill>
+                  </a:tcPr>
+                </a:tc>
+                <a:tc>
+                  <a:txBody>
+                    <a:bodyPr/>
+                    <a:lstStyle/>
+                    <a:p>
+                      <a:pPr algn="l"/>
+                      <a:r>
+                        <a:rPr sz="1100" b="0">
+                          <a:solidFill>
+                            <a:srgbClr val="1F3355"/>
+                          </a:solidFill>
+                          <a:latin typeface="Meiryo UI"/>
+                        </a:rPr>
+                        <a:t>今までの繋ぎ方。ID とパスワードで認証してから通信する</a:t>
+                      </a:r>
+                    </a:p>
+                  </a:txBody>
+                  <a:tcPr>
+                    <a:solidFill>
+                      <a:srgbClr val="FFFFFF"/>
+                    </a:solidFill>
+                  </a:tcPr>
+                </a:tc>
+              </a:tr>
+              <a:tr h="310896">
+                <a:tc>
+                  <a:txBody>
+                    <a:bodyPr/>
+                    <a:lstStyle/>
+                    <a:p>
+                      <a:pPr algn="l"/>
+                      <a:r>
+                        <a:rPr sz="1100" b="0">
+                          <a:solidFill>
+                            <a:srgbClr val="1F3355"/>
+                          </a:solidFill>
+                          <a:latin typeface="Meiryo UI"/>
+                        </a:rPr>
+                        <a:t>IPoE (アイピーオーイー)</a:t>
+                      </a:r>
+                    </a:p>
+                  </a:txBody>
+                  <a:tcPr>
+                    <a:solidFill>
+                      <a:srgbClr val="F2F6FA"/>
+                    </a:solidFill>
+                  </a:tcPr>
+                </a:tc>
+                <a:tc>
+                  <a:txBody>
+                    <a:bodyPr/>
+                    <a:lstStyle/>
+                    <a:p>
+                      <a:pPr algn="l"/>
+                      <a:r>
+                        <a:rPr sz="1100" b="0">
+                          <a:solidFill>
+                            <a:srgbClr val="1F3355"/>
+                          </a:solidFill>
+                          <a:latin typeface="Meiryo UI"/>
+                        </a:rPr>
+                        <a:t>新しい繋ぎ方。認証なしで、回線に直接つながる</a:t>
+                      </a:r>
+                    </a:p>
+                  </a:txBody>
+                  <a:tcPr>
+                    <a:solidFill>
+                      <a:srgbClr val="F2F6FA"/>
+                    </a:solidFill>
+                  </a:tcPr>
+                </a:tc>
+              </a:tr>
+              <a:tr h="310896">
+                <a:tc>
+                  <a:txBody>
+                    <a:bodyPr/>
+                    <a:lstStyle/>
+                    <a:p>
+                      <a:pPr algn="l"/>
+                      <a:r>
+                        <a:rPr sz="1100" b="0">
+                          <a:solidFill>
+                            <a:srgbClr val="1F3355"/>
+                          </a:solidFill>
+                          <a:latin typeface="Meiryo UI"/>
+                        </a:rPr>
+                        <a:t>CPE (シーピーイー)</a:t>
+                      </a:r>
+                    </a:p>
+                  </a:txBody>
+                  <a:tcPr>
+                    <a:solidFill>
+                      <a:srgbClr val="FFFFFF"/>
+                    </a:solidFill>
+                  </a:tcPr>
+                </a:tc>
+                <a:tc>
+                  <a:txBody>
+                    <a:bodyPr/>
+                    <a:lstStyle/>
+                    <a:p>
+                      <a:pPr algn="l"/>
+                      <a:r>
+                        <a:rPr sz="1100" b="0">
+                          <a:solidFill>
+                            <a:srgbClr val="1F3355"/>
+                          </a:solidFill>
+                          <a:latin typeface="Meiryo UI"/>
+                        </a:rPr>
+                        <a:t>お客様側のルータのこと。それだけです</a:t>
+                      </a:r>
+                    </a:p>
+                  </a:txBody>
+                  <a:tcPr>
+                    <a:solidFill>
+                      <a:srgbClr val="FFFFFF"/>
+                    </a:solidFill>
+                  </a:tcPr>
+                </a:tc>
+              </a:tr>
+              <a:tr h="310896">
+                <a:tc>
+                  <a:txBody>
+                    <a:bodyPr/>
+                    <a:lstStyle/>
+                    <a:p>
+                      <a:pPr algn="l"/>
+                      <a:r>
+                        <a:rPr sz="1100" b="0">
+                          <a:solidFill>
+                            <a:srgbClr val="1F3355"/>
+                          </a:solidFill>
+                          <a:latin typeface="Meiryo UI"/>
+                        </a:rPr>
+                        <a:t>NGN (エヌジーエヌ)</a:t>
+                      </a:r>
+                    </a:p>
+                  </a:txBody>
+                  <a:tcPr>
+                    <a:solidFill>
+                      <a:srgbClr val="F2F6FA"/>
+                    </a:solidFill>
+                  </a:tcPr>
+                </a:tc>
+                <a:tc>
+                  <a:txBody>
+                    <a:bodyPr/>
+                    <a:lstStyle/>
+                    <a:p>
+                      <a:pPr algn="l"/>
+                      <a:r>
+                        <a:rPr sz="1100" b="0">
+                          <a:solidFill>
+                            <a:srgbClr val="1F3355"/>
+                          </a:solidFill>
+                          <a:latin typeface="Meiryo UI"/>
+                        </a:rPr>
+                        <a:t>NTT の網。フレッツ光の部分</a:t>
+                      </a:r>
+                    </a:p>
+                  </a:txBody>
+                  <a:tcPr>
+                    <a:solidFill>
+                      <a:srgbClr val="F2F6FA"/>
+                    </a:solidFill>
+                  </a:tcPr>
+                </a:tc>
+              </a:tr>
+              <a:tr h="310896">
+                <a:tc>
+                  <a:txBody>
+                    <a:bodyPr/>
+                    <a:lstStyle/>
+                    <a:p>
+                      <a:pPr algn="l"/>
+                      <a:r>
+                        <a:rPr sz="1100" b="0">
+                          <a:solidFill>
+                            <a:srgbClr val="1F3355"/>
+                          </a:solidFill>
+                          <a:latin typeface="Meiryo UI"/>
+                        </a:rPr>
+                        <a:t>VNE (ブイエヌイー)</a:t>
+                      </a:r>
+                    </a:p>
+                  </a:txBody>
+                  <a:tcPr>
+                    <a:solidFill>
+                      <a:srgbClr val="FFFFFF"/>
+                    </a:solidFill>
+                  </a:tcPr>
+                </a:tc>
+                <a:tc>
+                  <a:txBody>
+                    <a:bodyPr/>
+                    <a:lstStyle/>
+                    <a:p>
+                      <a:pPr algn="l"/>
+                      <a:r>
+                        <a:rPr sz="1100" b="0">
+                          <a:solidFill>
+                            <a:srgbClr val="1F3355"/>
+                          </a:solidFill>
+                          <a:latin typeface="Meiryo UI"/>
+                        </a:rPr>
+                        <a:t>IPv6 を実際に流している事業者。速度を決めているのはここ</a:t>
+                      </a:r>
+                    </a:p>
+                  </a:txBody>
+                  <a:tcPr>
+                    <a:solidFill>
+                      <a:srgbClr val="FFFFFF"/>
+                    </a:solidFill>
+                  </a:tcPr>
+                </a:tc>
+              </a:tr>
+              <a:tr h="310896">
+                <a:tc>
+                  <a:txBody>
+                    <a:bodyPr/>
+                    <a:lstStyle/>
+                    <a:p>
+                      <a:pPr algn="l"/>
+                      <a:r>
+                        <a:rPr sz="1100" b="0">
+                          <a:solidFill>
+                            <a:srgbClr val="1F3355"/>
+                          </a:solidFill>
+                          <a:latin typeface="Meiryo UI"/>
+                        </a:rPr>
+                        <a:t>RA (アールエー)</a:t>
+                      </a:r>
+                    </a:p>
+                  </a:txBody>
+                  <a:tcPr>
+                    <a:solidFill>
+                      <a:srgbClr val="F2F6FA"/>
+                    </a:solidFill>
+                  </a:tcPr>
+                </a:tc>
+                <a:tc>
+                  <a:txBody>
+                    <a:bodyPr/>
+                    <a:lstStyle/>
+                    <a:p>
+                      <a:pPr algn="l"/>
+                      <a:r>
+                        <a:rPr sz="1100" b="0">
+                          <a:solidFill>
+                            <a:srgbClr val="1F3355"/>
+                          </a:solidFill>
+                          <a:latin typeface="Meiryo UI"/>
+                        </a:rPr>
+                        <a:t>ルータが配る「私がゲートウェイです。住所の前半はこれです」という案内</a:t>
+                      </a:r>
+                    </a:p>
+                  </a:txBody>
+                  <a:tcPr>
+                    <a:solidFill>
+                      <a:srgbClr val="F2F6FA"/>
+                    </a:solidFill>
+                  </a:tcPr>
+                </a:tc>
+              </a:tr>
+              <a:tr h="310896">
+                <a:tc>
+                  <a:txBody>
+                    <a:bodyPr/>
+                    <a:lstStyle/>
+                    <a:p>
+                      <a:pPr algn="l"/>
+                      <a:r>
+                        <a:rPr sz="1100" b="0">
+                          <a:solidFill>
+                            <a:srgbClr val="1F3355"/>
+                          </a:solidFill>
+                          <a:latin typeface="Meiryo UI"/>
+                        </a:rPr>
+                        <a:t>DHCPv6</a:t>
+                      </a:r>
+                    </a:p>
+                  </a:txBody>
+                  <a:tcPr>
+                    <a:solidFill>
+                      <a:srgbClr val="FFFFFF"/>
+                    </a:solidFill>
+                  </a:tcPr>
+                </a:tc>
+                <a:tc>
+                  <a:txBody>
+                    <a:bodyPr/>
+                    <a:lstStyle/>
+                    <a:p>
+                      <a:pPr algn="l"/>
+                      <a:r>
+                        <a:rPr sz="1100" b="0">
+                          <a:solidFill>
+                            <a:srgbClr val="1F3355"/>
+                          </a:solidFill>
+                          <a:latin typeface="Meiryo UI"/>
+                        </a:rPr>
+                        <a:t>IPv6 版の DHCP。住所を配る係。RA だけで足りないときに使う</a:t>
+                      </a:r>
+                    </a:p>
+                  </a:txBody>
+                  <a:tcPr>
+                    <a:solidFill>
+                      <a:srgbClr val="FFFFFF"/>
+                    </a:solidFill>
+                  </a:tcPr>
+                </a:tc>
+              </a:tr>
+              <a:tr h="310896">
+                <a:tc>
+                  <a:txBody>
+                    <a:bodyPr/>
+                    <a:lstStyle/>
+                    <a:p>
+                      <a:pPr algn="l"/>
+                      <a:r>
+                        <a:rPr sz="1100" b="0">
+                          <a:solidFill>
+                            <a:srgbClr val="1F3355"/>
+                          </a:solidFill>
+                          <a:latin typeface="Meiryo UI"/>
+                        </a:rPr>
+                        <a:t>MAP-E (マップイー)</a:t>
+                      </a:r>
+                    </a:p>
+                  </a:txBody>
+                  <a:tcPr>
+                    <a:solidFill>
+                      <a:srgbClr val="F2F6FA"/>
+                    </a:solidFill>
+                  </a:tcPr>
+                </a:tc>
+                <a:tc>
+                  <a:txBody>
+                    <a:bodyPr/>
+                    <a:lstStyle/>
+                    <a:p>
+                      <a:pPr algn="l"/>
+                      <a:r>
+                        <a:rPr sz="1100" b="0">
+                          <a:solidFill>
+                            <a:srgbClr val="1F3355"/>
+                          </a:solidFill>
+                          <a:latin typeface="Meiryo UI"/>
+                        </a:rPr>
+                        <a:t>IPv4 を IPv6 に載せて運ぶやり方 その1。お客様のルータが変換する</a:t>
+                      </a:r>
+                    </a:p>
+                  </a:txBody>
+                  <a:tcPr>
+                    <a:solidFill>
+                      <a:srgbClr val="F2F6FA"/>
+                    </a:solidFill>
+                  </a:tcPr>
+                </a:tc>
+              </a:tr>
+              <a:tr h="310896">
+                <a:tc>
+                  <a:txBody>
+                    <a:bodyPr/>
+                    <a:lstStyle/>
+                    <a:p>
+                      <a:pPr algn="l"/>
+                      <a:r>
+                        <a:rPr sz="1100" b="0">
+                          <a:solidFill>
+                            <a:srgbClr val="1F3355"/>
+                          </a:solidFill>
+                          <a:latin typeface="Meiryo UI"/>
+                        </a:rPr>
+                        <a:t>DS-Lite (ディーエスライト)</a:t>
+                      </a:r>
+                    </a:p>
+                  </a:txBody>
+                  <a:tcPr>
+                    <a:solidFill>
+                      <a:srgbClr val="FFFFFF"/>
+                    </a:solidFill>
+                  </a:tcPr>
+                </a:tc>
+                <a:tc>
+                  <a:txBody>
+                    <a:bodyPr/>
+                    <a:lstStyle/>
+                    <a:p>
+                      <a:pPr algn="l"/>
+                      <a:r>
+                        <a:rPr sz="1100" b="0">
+                          <a:solidFill>
+                            <a:srgbClr val="1F3355"/>
+                          </a:solidFill>
+                          <a:latin typeface="Meiryo UI"/>
+                        </a:rPr>
+                        <a:t>IPv4 を IPv6 に載せて運ぶやり方 その2。網側の装置が変換する</a:t>
+                      </a:r>
+                    </a:p>
+                  </a:txBody>
+                  <a:tcPr>
+                    <a:solidFill>
+                      <a:srgbClr val="FFFFFF"/>
+                    </a:solidFill>
+                  </a:tcPr>
+                </a:tc>
+              </a:tr>
+              <a:tr h="310896">
+                <a:tc>
+                  <a:txBody>
+                    <a:bodyPr/>
+                    <a:lstStyle/>
+                    <a:p>
+                      <a:pPr algn="l"/>
+                      <a:r>
+                        <a:rPr sz="1100" b="0">
+                          <a:solidFill>
+                            <a:srgbClr val="1F3355"/>
+                          </a:solidFill>
+                          <a:latin typeface="Meiryo UI"/>
+                        </a:rPr>
+                        <a:t>MTU (エムティーユー)</a:t>
+                      </a:r>
+                    </a:p>
+                  </a:txBody>
+                  <a:tcPr>
+                    <a:solidFill>
+                      <a:srgbClr val="F2F6FA"/>
+                    </a:solidFill>
+                  </a:tcPr>
+                </a:tc>
+                <a:tc>
+                  <a:txBody>
+                    <a:bodyPr/>
+                    <a:lstStyle/>
+                    <a:p>
+                      <a:pPr algn="l"/>
+                      <a:r>
+                        <a:rPr sz="1100" b="0">
+                          <a:solidFill>
+                            <a:srgbClr val="1F3355"/>
+                          </a:solidFill>
+                          <a:latin typeface="Meiryo UI"/>
+                        </a:rPr>
+                        <a:t>1 回に運べる荷物の大きさ。IPv6 に載せると小さくなります</a:t>
+                      </a:r>
+                    </a:p>
+                  </a:txBody>
+                  <a:tcPr>
+                    <a:solidFill>
+                      <a:srgbClr val="F2F6FA"/>
+                    </a:solidFill>
+                  </a:tcPr>
+                </a:tc>
+              </a:tr>
+            </a:tbl>
+          </a:graphicData>
+        </a:graphic>
+      </p:graphicFrame>
+      <p:sp>
+        <p:nvSpPr>
+          <p:cNvPr id="4" name="TextBox 3"/>
+          <p:cNvSpPr txBox="1"/>
+          <p:nvPr/>
+        </p:nvSpPr>
+        <p:spPr>
+          <a:xfrm>
+            <a:off x="502920" y="4818888"/>
+            <a:ext cx="11155680" cy="548640"/>
+          </a:xfrm>
+          <a:prstGeom prst="rect">
+            <a:avLst/>
+          </a:prstGeom>
+          <a:noFill/>
+        </p:spPr>
+        <p:txBody>
+          <a:bodyPr wrap="square">
+            <a:spAutoFit/>
+          </a:bodyPr>
+          <a:lstStyle/>
+          <a:p>
+            <a:pPr algn="l"/>
+            <a:r>
+              <a:rPr sz="1200" b="0">
+                <a:solidFill>
+                  <a:srgbClr val="007ACC"/>
+                </a:solidFill>
+                <a:latin typeface="Meiryo UI"/>
+              </a:rPr>
+              <a:t>話す人へ: このページは読み上げないこと。「分からなくなったらここに戻ります」とだけ言って 30 秒で次へ</a:t>
+            </a:r>
+          </a:p>
+        </p:txBody>
+      </p:sp>
+    </p:spTree>
+  </p:cSld>
+  <p:clrMapOvr>
+    <a:masterClrMapping/>
+  </p:clrMapOvr>
+</p:sld>
+</file>
+
+<file path=ppt/slides/slide5.xml><?xml version="1.0" encoding="utf-8"?>
+<p:sld xmlns:a="http://schemas.openxmlformats.org/drawingml/2006/main" xmlns:p="http://schemas.openxmlformats.org/presentationml/2006/main" xmlns:r="http://schemas.openxmlformats.org/officeDocument/2006/relationships">
+  <p:cSld>
+    <p:spTree>
+      <p:nvGrpSpPr>
+        <p:cNvPr id="1" name=""/>
+        <p:cNvGrpSpPr/>
+        <p:nvPr/>
+      </p:nvGrpSpPr>
+      <p:grpSpPr/>
+      <p:sp>
+        <p:nvSpPr>
+          <p:cNvPr id="2" name="TextBox 1"/>
+          <p:cNvSpPr txBox="1"/>
+          <p:nvPr/>
+        </p:nvSpPr>
+        <p:spPr>
+          <a:xfrm>
             <a:off x="502920" y="320040"/>
             <a:ext cx="11155680" cy="822960"/>
           </a:xfrm>
@@ -11637,7 +13444,7 @@
                 </a:solidFill>
                 <a:latin typeface="Meiryo UI"/>
               </a:rPr>
-              <a:t>なぜ IPv6 に変えるのか — 建前と本音を分けます</a:t>
+              <a:t>話の全体を、宅配便でたとえます (この 1 時間ずっとこれで通します)</a:t>
             </a:r>
           </a:p>
         </p:txBody>
@@ -11694,7 +13501,7 @@
         <p:spPr>
           <a:xfrm>
             <a:off x="594360" y="1371600"/>
-            <a:ext cx="10972800" cy="4846320"/>
+            <a:ext cx="10972800" cy="4983480"/>
           </a:xfrm>
           <a:prstGeom prst="rect">
             <a:avLst/>
@@ -11709,7 +13516,7 @@
           <a:p>
             <a:pPr algn="l">
               <a:spcAft>
-                <a:spcPts val="700"/>
+                <a:spcPts val="1000"/>
               </a:spcAft>
             </a:pPr>
             <a:r>
@@ -11719,13 +13526,77 @@
                 </a:solidFill>
                 <a:latin typeface="Meiryo UI"/>
               </a:rPr>
-              <a:t>教科書に書いてある理由(建前)</a:t>
+              <a:t>IPv6 の道 = 新しくできた広い高速道路。空いていて速い</a:t>
+            </a:r>
+          </a:p>
+          <a:p>
+            <a:pPr algn="l">
+              <a:spcAft>
+                <a:spcPts val="1000"/>
+              </a:spcAft>
+            </a:pPr>
+            <a:r>
+              <a:rPr sz="2000" b="1">
+                <a:solidFill>
+                  <a:srgbClr val="1F3355"/>
+                </a:solidFill>
+                <a:latin typeface="Meiryo UI"/>
+              </a:rPr>
+              <a:t>IPv4 の荷物 = 社内の機器が出す荷物。この高速道路をそのままでは走れない</a:t>
+            </a:r>
+          </a:p>
+          <a:p>
+            <a:pPr algn="l">
+              <a:spcAft>
+                <a:spcPts val="1000"/>
+              </a:spcAft>
+            </a:pPr>
+            <a:r>
+              <a:rPr sz="2000" b="1">
+                <a:solidFill>
+                  <a:srgbClr val="1F3355"/>
+                </a:solidFill>
+                <a:latin typeface="Meiryo UI"/>
+              </a:rPr>
+              <a:t>だから IPv4 の荷物を IPv6 のトラックに積んで運びます</a:t>
+            </a:r>
+          </a:p>
+          <a:p>
+            <a:pPr algn="l">
+              <a:spcAft>
+                <a:spcPts val="1000"/>
+              </a:spcAft>
+            </a:pPr>
+            <a:r>
+              <a:rPr sz="2000" b="0">
+                <a:solidFill>
+                  <a:srgbClr val="1F3355"/>
+                </a:solidFill>
+                <a:latin typeface="Meiryo UI"/>
+              </a:rPr>
+              <a:t/>
+            </a:r>
+          </a:p>
+          <a:p>
+            <a:pPr algn="l">
+              <a:spcAft>
+                <a:spcPts val="1000"/>
+              </a:spcAft>
+            </a:pPr>
+            <a:r>
+              <a:rPr sz="2000" b="1">
+                <a:solidFill>
+                  <a:srgbClr val="1F3355"/>
+                </a:solidFill>
+                <a:latin typeface="Meiryo UI"/>
+              </a:rPr>
+              <a:t>積み方が 2 通りあります。それが MAP-E と DS-Lite です</a:t>
             </a:r>
           </a:p>
           <a:p>
             <a:pPr lvl="1" algn="l">
               <a:spcAft>
-                <a:spcPts val="400"/>
+                <a:spcPts val="600"/>
               </a:spcAft>
             </a:pPr>
             <a:r>
@@ -11735,13 +13606,13 @@
                 </a:solidFill>
                 <a:latin typeface="Meiryo UI"/>
               </a:rPr>
-              <a:t>IPv4 アドレスが足りなくなった。だから IPv6 に移行する</a:t>
+              <a:t>違いは第3部でやります。そこが今日の本題です</a:t>
             </a:r>
           </a:p>
           <a:p>
             <a:pPr lvl="1" algn="l">
               <a:spcAft>
-                <a:spcPts val="400"/>
+                <a:spcPts val="600"/>
               </a:spcAft>
             </a:pPr>
             <a:r>
@@ -11751,186 +13622,7 @@
                 </a:solidFill>
                 <a:latin typeface="Meiryo UI"/>
               </a:rPr>
-              <a:t>正しいのですが、目の前の案件でハンコを押す理由ではありません</a:t>
-            </a:r>
-          </a:p>
-          <a:p>
-            <a:pPr algn="l">
-              <a:spcAft>
-                <a:spcPts val="700"/>
-              </a:spcAft>
-            </a:pPr>
-            <a:r>
-              <a:rPr sz="2000" b="1">
-                <a:solidFill>
-                  <a:srgbClr val="1F3355"/>
-                </a:solidFill>
-                <a:latin typeface="Meiryo UI"/>
-              </a:rPr>
-              <a:t>現場でお金が動く理由(本音)</a:t>
-            </a:r>
-          </a:p>
-          <a:p>
-            <a:pPr lvl="1" algn="l">
-              <a:spcAft>
-                <a:spcPts val="400"/>
-              </a:spcAft>
-            </a:pPr>
-            <a:r>
-              <a:rPr sz="1700" b="0">
-                <a:solidFill>
-                  <a:srgbClr val="555555"/>
-                </a:solidFill>
-                <a:latin typeface="Meiryo UI"/>
-              </a:rPr>
-              <a:t>夜になると遅い。Web 会議が切れる。この相談から始まります</a:t>
-            </a:r>
-          </a:p>
-          <a:p>
-            <a:pPr lvl="1" algn="l">
-              <a:spcAft>
-                <a:spcPts val="400"/>
-              </a:spcAft>
-            </a:pPr>
-            <a:r>
-              <a:rPr sz="1700" b="0">
-                <a:solidFill>
-                  <a:srgbClr val="555555"/>
-                </a:solidFill>
-                <a:latin typeface="Meiryo UI"/>
-              </a:rPr>
-              <a:t>原因は回線速度ではなく、多くの場合 PPPoE が通る「網終端装置」の混雑です</a:t>
-            </a:r>
-          </a:p>
-          <a:p>
-            <a:pPr lvl="1" algn="l">
-              <a:spcAft>
-                <a:spcPts val="400"/>
-              </a:spcAft>
-            </a:pPr>
-            <a:r>
-              <a:rPr sz="1700" b="0">
-                <a:solidFill>
-                  <a:srgbClr val="555555"/>
-                </a:solidFill>
-                <a:latin typeface="Meiryo UI"/>
-              </a:rPr>
-              <a:t>IPoE (認証なしで回線に直接つなぐ方式。仕組みは第2部) にすると この装置を通らなくなる</a:t>
-            </a:r>
-          </a:p>
-          <a:p>
-            <a:pPr algn="l">
-              <a:spcAft>
-                <a:spcPts val="700"/>
-              </a:spcAft>
-            </a:pPr>
-            <a:r>
-              <a:rPr sz="2000" b="1">
-                <a:solidFill>
-                  <a:srgbClr val="1F3355"/>
-                </a:solidFill>
-                <a:latin typeface="Meiryo UI"/>
-              </a:rPr>
-              <a:t>この区別ができると、この質問に答えられます</a:t>
-            </a:r>
-          </a:p>
-          <a:p>
-            <a:pPr lvl="1" algn="l">
-              <a:spcAft>
-                <a:spcPts val="400"/>
-              </a:spcAft>
-            </a:pPr>
-            <a:r>
-              <a:rPr sz="1700" b="0">
-                <a:solidFill>
-                  <a:srgbClr val="555555"/>
-                </a:solidFill>
-                <a:latin typeface="Meiryo UI"/>
-              </a:rPr>
-              <a:t>「社内も IPv6 にするんですか?」→ 普通はしません。LAN は IPv4 のままです</a:t>
-            </a:r>
-          </a:p>
-          <a:p>
-            <a:pPr lvl="1" algn="l">
-              <a:spcAft>
-                <a:spcPts val="400"/>
-              </a:spcAft>
-            </a:pPr>
-            <a:r>
-              <a:rPr sz="1700" b="0">
-                <a:solidFill>
-                  <a:srgbClr val="555555"/>
-                </a:solidFill>
-                <a:latin typeface="Meiryo UI"/>
-              </a:rPr>
-              <a:t>IPv6 にするとアドレス設計のやり直し・FW 見直し・アプリ検証が発生します</a:t>
-            </a:r>
-          </a:p>
-          <a:p>
-            <a:pPr lvl="1" algn="l">
-              <a:spcAft>
-                <a:spcPts val="400"/>
-              </a:spcAft>
-            </a:pPr>
-            <a:r>
-              <a:rPr sz="1700" b="0">
-                <a:solidFill>
-                  <a:srgbClr val="555555"/>
-                </a:solidFill>
-                <a:latin typeface="Meiryo UI"/>
-              </a:rPr>
-              <a:t>IPv6 は「外を速く通るための道」。社内を作り替える話ではありません</a:t>
-            </a:r>
-          </a:p>
-          <a:p>
-            <a:pPr algn="l">
-              <a:spcAft>
-                <a:spcPts val="700"/>
-              </a:spcAft>
-            </a:pPr>
-            <a:r>
-              <a:rPr sz="2000" b="1">
-                <a:solidFill>
-                  <a:srgbClr val="C0392B"/>
-                </a:solidFill>
-                <a:latin typeface="Meiryo UI"/>
-              </a:rPr>
-              <a:t>※ ただし「将来も IPv6 化しない」とは言わないこと。今回やらないだけです</a:t>
-            </a:r>
-          </a:p>
-        </p:txBody>
-      </p:sp>
-      <p:sp>
-        <p:nvSpPr>
-          <p:cNvPr id="5" name="TextBox 4"/>
-          <p:cNvSpPr txBox="1"/>
-          <p:nvPr/>
-        </p:nvSpPr>
-        <p:spPr>
-          <a:xfrm>
-            <a:off x="594360" y="6263640"/>
-            <a:ext cx="10972800" cy="457200"/>
-          </a:xfrm>
-          <a:prstGeom prst="rect">
-            <a:avLst/>
-          </a:prstGeom>
-          <a:noFill/>
-        </p:spPr>
-        <p:txBody>
-          <a:bodyPr wrap="square">
-            <a:spAutoFit/>
-          </a:bodyPr>
-          <a:lstStyle/>
-          <a:p>
-            <a:pPr algn="l"/>
-            <a:r>
-              <a:rPr sz="1200" b="0">
-                <a:solidFill>
-                  <a:srgbClr val="007ACC"/>
-                </a:solidFill>
-                <a:latin typeface="Meiryo UI"/>
-              </a:rPr>
-              <a:t>教科書: 第18章「IPv4 アドレスの在庫枯渇」(p.335) / 付録 A.3「IPv6 PPPoE と IPv6 IPoE」(p.443)</a:t>
+              <a:t>いまは「2 通りあるんだな」だけで大丈夫です</a:t>
             </a:r>
           </a:p>
         </p:txBody>
@@ -11943,7 +13635,369 @@
 </p:sld>
 </file>
 
-<file path=ppt/slides/slide5.xml><?xml version="1.0" encoding="utf-8"?>
+<file path=ppt/slides/slide6.xml><?xml version="1.0" encoding="utf-8"?>
+<p:sld xmlns:a="http://schemas.openxmlformats.org/drawingml/2006/main" xmlns:p="http://schemas.openxmlformats.org/presentationml/2006/main" xmlns:r="http://schemas.openxmlformats.org/officeDocument/2006/relationships">
+  <p:cSld>
+    <p:spTree>
+      <p:nvGrpSpPr>
+        <p:cNvPr id="1" name=""/>
+        <p:cNvGrpSpPr/>
+        <p:nvPr/>
+      </p:nvGrpSpPr>
+      <p:grpSpPr/>
+      <p:sp>
+        <p:nvSpPr>
+          <p:cNvPr id="2" name="TextBox 1"/>
+          <p:cNvSpPr txBox="1"/>
+          <p:nvPr/>
+        </p:nvSpPr>
+        <p:spPr>
+          <a:xfrm>
+            <a:off x="502920" y="320040"/>
+            <a:ext cx="11155680" cy="822960"/>
+          </a:xfrm>
+          <a:prstGeom prst="rect">
+            <a:avLst/>
+          </a:prstGeom>
+          <a:noFill/>
+        </p:spPr>
+        <p:txBody>
+          <a:bodyPr wrap="square">
+            <a:spAutoFit/>
+          </a:bodyPr>
+          <a:lstStyle/>
+          <a:p>
+            <a:pPr algn="l"/>
+            <a:r>
+              <a:rPr sz="2800" b="1">
+                <a:solidFill>
+                  <a:srgbClr val="1F3355"/>
+                </a:solidFill>
+                <a:latin typeface="Meiryo UI"/>
+              </a:rPr>
+              <a:t>なぜ IPv6 に変えるのか — 建前と本音を分けます</a:t>
+            </a:r>
+          </a:p>
+        </p:txBody>
+      </p:sp>
+      <p:sp>
+        <p:nvSpPr>
+          <p:cNvPr id="3" name="Rectangle 2"/>
+          <p:cNvSpPr/>
+          <p:nvPr/>
+        </p:nvSpPr>
+        <p:spPr>
+          <a:xfrm>
+            <a:off x="502920" y="1115568"/>
+            <a:ext cx="11155680" cy="31750"/>
+          </a:xfrm>
+          <a:prstGeom prst="rect">
+            <a:avLst/>
+          </a:prstGeom>
+          <a:solidFill>
+            <a:srgbClr val="007ACC"/>
+          </a:solidFill>
+          <a:ln>
+            <a:noFill/>
+          </a:ln>
+        </p:spPr>
+        <p:style>
+          <a:lnRef idx="1">
+            <a:schemeClr val="accent1"/>
+          </a:lnRef>
+          <a:fillRef idx="3">
+            <a:schemeClr val="accent1"/>
+          </a:fillRef>
+          <a:effectRef idx="2">
+            <a:schemeClr val="accent1"/>
+          </a:effectRef>
+          <a:fontRef idx="minor">
+            <a:schemeClr val="lt1"/>
+          </a:fontRef>
+        </p:style>
+        <p:txBody>
+          <a:bodyPr rtlCol="0" anchor="ctr"/>
+          <a:lstStyle/>
+          <a:p>
+            <a:pPr algn="ctr"/>
+          </a:p>
+        </p:txBody>
+      </p:sp>
+      <p:sp>
+        <p:nvSpPr>
+          <p:cNvPr id="4" name="TextBox 3"/>
+          <p:cNvSpPr txBox="1"/>
+          <p:nvPr/>
+        </p:nvSpPr>
+        <p:spPr>
+          <a:xfrm>
+            <a:off x="594360" y="1371600"/>
+            <a:ext cx="10972800" cy="4709160"/>
+          </a:xfrm>
+          <a:prstGeom prst="rect">
+            <a:avLst/>
+          </a:prstGeom>
+          <a:noFill/>
+        </p:spPr>
+        <p:txBody>
+          <a:bodyPr wrap="square">
+            <a:spAutoFit/>
+          </a:bodyPr>
+          <a:lstStyle/>
+          <a:p>
+            <a:pPr algn="l">
+              <a:spcAft>
+                <a:spcPts val="900"/>
+              </a:spcAft>
+            </a:pPr>
+            <a:r>
+              <a:rPr sz="1900" b="1">
+                <a:solidFill>
+                  <a:srgbClr val="1F3355"/>
+                </a:solidFill>
+                <a:latin typeface="Meiryo UI"/>
+              </a:rPr>
+              <a:t>教科書に書いてある理由(建前)</a:t>
+            </a:r>
+          </a:p>
+          <a:p>
+            <a:pPr lvl="1" algn="l">
+              <a:spcAft>
+                <a:spcPts val="500"/>
+              </a:spcAft>
+            </a:pPr>
+            <a:r>
+              <a:rPr sz="1600" b="0">
+                <a:solidFill>
+                  <a:srgbClr val="555555"/>
+                </a:solidFill>
+                <a:latin typeface="Meiryo UI"/>
+              </a:rPr>
+              <a:t>IPv4 アドレスが足りなくなった。だから IPv6 に移行する</a:t>
+            </a:r>
+          </a:p>
+          <a:p>
+            <a:pPr lvl="1" algn="l">
+              <a:spcAft>
+                <a:spcPts val="500"/>
+              </a:spcAft>
+            </a:pPr>
+            <a:r>
+              <a:rPr sz="1600" b="0">
+                <a:solidFill>
+                  <a:srgbClr val="555555"/>
+                </a:solidFill>
+                <a:latin typeface="Meiryo UI"/>
+              </a:rPr>
+              <a:t>正しいのですが、目の前の案件でハンコを押す理由ではありません</a:t>
+            </a:r>
+          </a:p>
+          <a:p>
+            <a:pPr algn="l">
+              <a:spcAft>
+                <a:spcPts val="900"/>
+              </a:spcAft>
+            </a:pPr>
+            <a:r>
+              <a:rPr sz="1900" b="1">
+                <a:solidFill>
+                  <a:srgbClr val="1F3355"/>
+                </a:solidFill>
+                <a:latin typeface="Meiryo UI"/>
+              </a:rPr>
+              <a:t>現場でお金が動く理由(本音)</a:t>
+            </a:r>
+          </a:p>
+          <a:p>
+            <a:pPr lvl="1" algn="l">
+              <a:spcAft>
+                <a:spcPts val="500"/>
+              </a:spcAft>
+            </a:pPr>
+            <a:r>
+              <a:rPr sz="1600" b="0">
+                <a:solidFill>
+                  <a:srgbClr val="555555"/>
+                </a:solidFill>
+                <a:latin typeface="Meiryo UI"/>
+              </a:rPr>
+              <a:t>夜になると遅い。Web 会議が切れる。この相談から始まります</a:t>
+            </a:r>
+          </a:p>
+          <a:p>
+            <a:pPr lvl="1" algn="l">
+              <a:spcAft>
+                <a:spcPts val="500"/>
+              </a:spcAft>
+            </a:pPr>
+            <a:r>
+              <a:rPr sz="1600" b="0">
+                <a:solidFill>
+                  <a:srgbClr val="555555"/>
+                </a:solidFill>
+                <a:latin typeface="Meiryo UI"/>
+              </a:rPr>
+              <a:t>原因は回線速度ではなく、多くの場合「網終端装置」の混雑です</a:t>
+            </a:r>
+          </a:p>
+          <a:p>
+            <a:pPr lvl="1" algn="l">
+              <a:spcAft>
+                <a:spcPts val="500"/>
+              </a:spcAft>
+            </a:pPr>
+            <a:r>
+              <a:rPr sz="1600" b="0">
+                <a:solidFill>
+                  <a:srgbClr val="555555"/>
+                </a:solidFill>
+                <a:latin typeface="Meiryo UI"/>
+              </a:rPr>
+              <a:t>網終端装置 = PPPoE の通信が全部集まってくる装置。ここが混みます</a:t>
+            </a:r>
+          </a:p>
+          <a:p>
+            <a:pPr lvl="1" algn="l">
+              <a:spcAft>
+                <a:spcPts val="500"/>
+              </a:spcAft>
+            </a:pPr>
+            <a:r>
+              <a:rPr sz="1600" b="0">
+                <a:solidFill>
+                  <a:srgbClr val="555555"/>
+                </a:solidFill>
+                <a:latin typeface="Meiryo UI"/>
+              </a:rPr>
+              <a:t>IPoE (認証なしで回線に直接つなぐ方式。仕組みは第2部) にすると この装置を通らなくなる</a:t>
+            </a:r>
+          </a:p>
+          <a:p>
+            <a:pPr algn="l">
+              <a:spcAft>
+                <a:spcPts val="900"/>
+              </a:spcAft>
+            </a:pPr>
+            <a:r>
+              <a:rPr sz="1900" b="1">
+                <a:solidFill>
+                  <a:srgbClr val="1F3355"/>
+                </a:solidFill>
+                <a:latin typeface="Meiryo UI"/>
+              </a:rPr>
+              <a:t>この区別ができると、この質問に答えられます</a:t>
+            </a:r>
+          </a:p>
+          <a:p>
+            <a:pPr lvl="1" algn="l">
+              <a:spcAft>
+                <a:spcPts val="500"/>
+              </a:spcAft>
+            </a:pPr>
+            <a:r>
+              <a:rPr sz="1600" b="0">
+                <a:solidFill>
+                  <a:srgbClr val="555555"/>
+                </a:solidFill>
+                <a:latin typeface="Meiryo UI"/>
+              </a:rPr>
+              <a:t>「社内も IPv6 にするんですか?」→ 普通はしません。LAN は IPv4 のままです</a:t>
+            </a:r>
+          </a:p>
+          <a:p>
+            <a:pPr lvl="1" algn="l">
+              <a:spcAft>
+                <a:spcPts val="500"/>
+              </a:spcAft>
+            </a:pPr>
+            <a:r>
+              <a:rPr sz="1600" b="0">
+                <a:solidFill>
+                  <a:srgbClr val="555555"/>
+                </a:solidFill>
+                <a:latin typeface="Meiryo UI"/>
+              </a:rPr>
+              <a:t>IPv6 にするとアドレス設計のやり直し・FW 見直し・アプリ検証が発生します</a:t>
+            </a:r>
+          </a:p>
+          <a:p>
+            <a:pPr lvl="1" algn="l">
+              <a:spcAft>
+                <a:spcPts val="500"/>
+              </a:spcAft>
+            </a:pPr>
+            <a:r>
+              <a:rPr sz="1600" b="0">
+                <a:solidFill>
+                  <a:srgbClr val="555555"/>
+                </a:solidFill>
+                <a:latin typeface="Meiryo UI"/>
+              </a:rPr>
+              <a:t>IPv6 は「外を速く通るための道」。社内を作り替える話ではありません</a:t>
+            </a:r>
+          </a:p>
+          <a:p>
+            <a:pPr algn="l">
+              <a:spcAft>
+                <a:spcPts val="900"/>
+              </a:spcAft>
+            </a:pPr>
+            <a:r>
+              <a:rPr sz="1900" b="1">
+                <a:solidFill>
+                  <a:srgbClr val="C0392B"/>
+                </a:solidFill>
+                <a:latin typeface="Meiryo UI"/>
+              </a:rPr>
+              <a:t>※ ただし「将来も IPv6 化しない」とは言わないこと。今回やらないだけです</a:t>
+            </a:r>
+          </a:p>
+        </p:txBody>
+      </p:sp>
+      <p:sp>
+        <p:nvSpPr>
+          <p:cNvPr id="5" name="TextBox 4"/>
+          <p:cNvSpPr txBox="1"/>
+          <p:nvPr/>
+        </p:nvSpPr>
+        <p:spPr>
+          <a:xfrm>
+            <a:off x="594360" y="6217920"/>
+            <a:ext cx="10972800" cy="502920"/>
+          </a:xfrm>
+          <a:prstGeom prst="rect">
+            <a:avLst/>
+          </a:prstGeom>
+          <a:noFill/>
+        </p:spPr>
+        <p:txBody>
+          <a:bodyPr wrap="square">
+            <a:spAutoFit/>
+          </a:bodyPr>
+          <a:lstStyle/>
+          <a:p>
+            <a:pPr algn="l"/>
+            <a:r>
+              <a:rPr sz="1200" b="0">
+                <a:solidFill>
+                  <a:srgbClr val="007ACC"/>
+                </a:solidFill>
+                <a:latin typeface="Meiryo UI"/>
+              </a:rPr>
+              <a:t>教科書: 第18章「IPv4 アドレス在庫枯渇とその解決策」(p.335) / 付録 A.3「IPv6 PPPoE と IPv6 IPoE」(p.443)</a:t>
+            </a:r>
+          </a:p>
+        </p:txBody>
+      </p:sp>
+    </p:spTree>
+  </p:cSld>
+  <p:clrMapOvr>
+    <a:masterClrMapping/>
+  </p:clrMapOvr>
+</p:sld>
+</file>
+
+<file path=ppt/slides/slide7.xml><?xml version="1.0" encoding="utf-8"?>
 <p:sld xmlns:a="http://schemas.openxmlformats.org/drawingml/2006/main" xmlns:p="http://schemas.openxmlformats.org/presentationml/2006/main" xmlns:r="http://schemas.openxmlformats.org/officeDocument/2006/relationships">
   <p:cSld>
     <p:spTree>
@@ -12354,7 +14408,7 @@
 </p:sld>
 </file>
 
-<file path=ppt/slides/slide6.xml><?xml version="1.0" encoding="utf-8"?>
+<file path=ppt/slides/slide8.xml><?xml version="1.0" encoding="utf-8"?>
 <p:sld xmlns:a="http://schemas.openxmlformats.org/drawingml/2006/main" xmlns:p="http://schemas.openxmlformats.org/presentationml/2006/main" xmlns:r="http://schemas.openxmlformats.org/officeDocument/2006/relationships">
   <p:cSld>
     <p:spTree>
@@ -12465,7 +14519,7 @@
                 </a:solidFill>
                 <a:latin typeface="Meiryo UI"/>
               </a:rPr>
-              <a:t>ゴール: 全部は要りません。現場で効くところだけ 9 分で</a:t>
+              <a:t>ゴール: 全部は要りません。現場で効くところだけ 7 分で</a:t>
             </a:r>
           </a:p>
         </p:txBody>
@@ -12478,7 +14532,7 @@
 </p:sld>
 </file>
 
-<file path=ppt/slides/slide7.xml><?xml version="1.0" encoding="utf-8"?>
+<file path=ppt/slides/slide9.xml><?xml version="1.0" encoding="utf-8"?>
 <p:sld xmlns:a="http://schemas.openxmlformats.org/drawingml/2006/main" xmlns:p="http://schemas.openxmlformats.org/presentationml/2006/main" xmlns:r="http://schemas.openxmlformats.org/officeDocument/2006/relationships">
   <p:cSld>
     <p:spTree>
@@ -12533,7 +14587,7 @@
         </p:nvGraphicFramePr>
         <p:xfrm>
           <a:off x="502920" y="1143000"/>
-          <a:ext cx="10881360" cy="2304288"/>
+          <a:ext cx="10881360" cy="1865376"/>
         </p:xfrm>
         <a:graphic>
           <a:graphicData uri="http://schemas.openxmlformats.org/drawingml/2006/table">
@@ -12547,7 +14601,7 @@
                 <a:gridCol w="2194560"/>
                 <a:gridCol w="4389120"/>
               </a:tblGrid>
-              <a:tr h="384048">
+              <a:tr h="310896">
                 <a:tc>
                   <a:txBody>
                     <a:bodyPr/>
@@ -12641,7 +14695,7 @@
                   </a:tcPr>
                 </a:tc>
               </a:tr>
-              <a:tr h="384048">
+              <a:tr h="310896">
                 <a:tc>
                   <a:txBody>
                     <a:bodyPr/>
@@ -12735,7 +14789,7 @@
                   </a:tcPr>
                 </a:tc>
               </a:tr>
-              <a:tr h="384048">
+              <a:tr h="310896">
                 <a:tc>
                   <a:txBody>
                     <a:bodyPr/>
@@ -12829,7 +14883,7 @@
                   </a:tcPr>
                 </a:tc>
               </a:tr>
-              <a:tr h="384048">
+              <a:tr h="310896">
                 <a:tc>
                   <a:txBody>
                     <a:bodyPr/>
@@ -12923,7 +14977,7 @@
                   </a:tcPr>
                 </a:tc>
               </a:tr>
-              <a:tr h="384048">
+              <a:tr h="310896">
                 <a:tc>
                   <a:txBody>
                     <a:bodyPr/>
@@ -12937,7 +14991,7 @@
                           </a:solidFill>
                           <a:latin typeface="Meiryo UI"/>
                         </a:rPr>
-                        <a:t>ARP</a:t>
+                        <a:t>相手の探し方</a:t>
                       </a:r>
                     </a:p>
                   </a:txBody>
@@ -12960,7 +15014,7 @@
                           </a:solidFill>
                           <a:latin typeface="Meiryo UI"/>
                         </a:rPr>
-                        <a:t>ある</a:t>
+                        <a:t>ARP で探す</a:t>
                       </a:r>
                     </a:p>
                   </a:txBody>
@@ -12983,7 +15037,7 @@
                           </a:solidFill>
                           <a:latin typeface="Meiryo UI"/>
                         </a:rPr>
-                        <a:t>無い (NDP = 近隣探索 に変わる)</a:t>
+                        <a:t>ARP が無い。ICMPv6 で探す</a:t>
                       </a:r>
                     </a:p>
                   </a:txBody>
@@ -13017,7 +15071,7 @@
                   </a:tcPr>
                 </a:tc>
               </a:tr>
-              <a:tr h="384048">
+              <a:tr h="310896">
                 <a:tc>
                   <a:txBody>
                     <a:bodyPr/>
@@ -13123,7 +15177,7 @@
         </p:nvSpPr>
         <p:spPr>
           <a:xfrm>
-            <a:off x="502920" y="3630168"/>
+            <a:off x="502920" y="3264408"/>
             <a:ext cx="11155680" cy="548640"/>
           </a:xfrm>
           <a:prstGeom prst="rect">
@@ -13146,698 +15200,6 @@
                 <a:latin typeface="Meiryo UI"/>
               </a:rPr>
               <a:t>一番大事なのは 4 つめ。「ICMP は ping だから止めていい」は IPv4 の感覚です</a:t>
-            </a:r>
-          </a:p>
-        </p:txBody>
-      </p:sp>
-    </p:spTree>
-  </p:cSld>
-  <p:clrMapOvr>
-    <a:masterClrMapping/>
-  </p:clrMapOvr>
-</p:sld>
-</file>
-
-<file path=ppt/slides/slide8.xml><?xml version="1.0" encoding="utf-8"?>
-<p:sld xmlns:a="http://schemas.openxmlformats.org/drawingml/2006/main" xmlns:p="http://schemas.openxmlformats.org/presentationml/2006/main" xmlns:r="http://schemas.openxmlformats.org/officeDocument/2006/relationships">
-  <p:cSld>
-    <p:spTree>
-      <p:nvGrpSpPr>
-        <p:cNvPr id="1" name=""/>
-        <p:cNvGrpSpPr/>
-        <p:nvPr/>
-      </p:nvGrpSpPr>
-      <p:grpSpPr/>
-      <p:sp>
-        <p:nvSpPr>
-          <p:cNvPr id="2" name="TextBox 1"/>
-          <p:cNvSpPr txBox="1"/>
-          <p:nvPr/>
-        </p:nvSpPr>
-        <p:spPr>
-          <a:xfrm>
-            <a:off x="502920" y="320040"/>
-            <a:ext cx="11155680" cy="822960"/>
-          </a:xfrm>
-          <a:prstGeom prst="rect">
-            <a:avLst/>
-          </a:prstGeom>
-          <a:noFill/>
-        </p:spPr>
-        <p:txBody>
-          <a:bodyPr wrap="square">
-            <a:spAutoFit/>
-          </a:bodyPr>
-          <a:lstStyle/>
-          <a:p>
-            <a:pPr algn="l"/>
-            <a:r>
-              <a:rPr sz="2800" b="1">
-                <a:solidFill>
-                  <a:srgbClr val="1F3355"/>
-                </a:solidFill>
-                <a:latin typeface="Meiryo UI"/>
-              </a:rPr>
-              <a:t>アドレスの読み方と、なぜ /64 なのか</a:t>
-            </a:r>
-          </a:p>
-        </p:txBody>
-      </p:sp>
-      <p:sp>
-        <p:nvSpPr>
-          <p:cNvPr id="3" name="Rectangle 2"/>
-          <p:cNvSpPr/>
-          <p:nvPr/>
-        </p:nvSpPr>
-        <p:spPr>
-          <a:xfrm>
-            <a:off x="502920" y="1115568"/>
-            <a:ext cx="11155680" cy="31750"/>
-          </a:xfrm>
-          <a:prstGeom prst="rect">
-            <a:avLst/>
-          </a:prstGeom>
-          <a:solidFill>
-            <a:srgbClr val="007ACC"/>
-          </a:solidFill>
-          <a:ln>
-            <a:noFill/>
-          </a:ln>
-        </p:spPr>
-        <p:style>
-          <a:lnRef idx="1">
-            <a:schemeClr val="accent1"/>
-          </a:lnRef>
-          <a:fillRef idx="3">
-            <a:schemeClr val="accent1"/>
-          </a:fillRef>
-          <a:effectRef idx="2">
-            <a:schemeClr val="accent1"/>
-          </a:effectRef>
-          <a:fontRef idx="minor">
-            <a:schemeClr val="lt1"/>
-          </a:fontRef>
-        </p:style>
-        <p:txBody>
-          <a:bodyPr rtlCol="0" anchor="ctr"/>
-          <a:lstStyle/>
-          <a:p>
-            <a:pPr algn="ctr"/>
-          </a:p>
-        </p:txBody>
-      </p:sp>
-      <p:sp>
-        <p:nvSpPr>
-          <p:cNvPr id="4" name="TextBox 3"/>
-          <p:cNvSpPr txBox="1"/>
-          <p:nvPr/>
-        </p:nvSpPr>
-        <p:spPr>
-          <a:xfrm>
-            <a:off x="594360" y="1371600"/>
-            <a:ext cx="10972800" cy="4846320"/>
-          </a:xfrm>
-          <a:prstGeom prst="rect">
-            <a:avLst/>
-          </a:prstGeom>
-          <a:noFill/>
-        </p:spPr>
-        <p:txBody>
-          <a:bodyPr wrap="square">
-            <a:spAutoFit/>
-          </a:bodyPr>
-          <a:lstStyle/>
-          <a:p>
-            <a:pPr algn="l">
-              <a:spcAft>
-                <a:spcPts val="700"/>
-              </a:spcAft>
-            </a:pPr>
-            <a:r>
-              <a:rPr sz="2000" b="1">
-                <a:solidFill>
-                  <a:srgbClr val="1F3355"/>
-                </a:solidFill>
-                <a:latin typeface="Meiryo UI"/>
-              </a:rPr>
-              <a:t>書き方のルールは 3 つだけ</a:t>
-            </a:r>
-          </a:p>
-          <a:p>
-            <a:pPr lvl="1" algn="l">
-              <a:spcAft>
-                <a:spcPts val="400"/>
-              </a:spcAft>
-            </a:pPr>
-            <a:r>
-              <a:rPr sz="1700" b="0">
-                <a:solidFill>
-                  <a:srgbClr val="555555"/>
-                </a:solidFill>
-                <a:latin typeface="Meiryo UI"/>
-              </a:rPr>
-              <a:t>各ブロック先頭の 0 は省ける → 2001:0db8:0000:0001 は 2001:db8:0:1</a:t>
-            </a:r>
-          </a:p>
-          <a:p>
-            <a:pPr lvl="1" algn="l">
-              <a:spcAft>
-                <a:spcPts val="400"/>
-              </a:spcAft>
-            </a:pPr>
-            <a:r>
-              <a:rPr sz="1700" b="0">
-                <a:solidFill>
-                  <a:srgbClr val="555555"/>
-                </a:solidFill>
-                <a:latin typeface="Meiryo UI"/>
-              </a:rPr>
-              <a:t>:: は 0 が続くところを 1 回だけ省ける → 2001:db8:0:0:0:0:0:1 は 2001:db8::1</a:t>
-            </a:r>
-          </a:p>
-          <a:p>
-            <a:pPr lvl="1" algn="l">
-              <a:spcAft>
-                <a:spcPts val="400"/>
-              </a:spcAft>
-            </a:pPr>
-            <a:r>
-              <a:rPr sz="1700" b="0">
-                <a:solidFill>
-                  <a:srgbClr val="555555"/>
-                </a:solidFill>
-                <a:latin typeface="Meiryo UI"/>
-              </a:rPr>
-              <a:t>URL に書くときは [ ] で囲む。忘れると動きません</a:t>
-            </a:r>
-          </a:p>
-          <a:p>
-            <a:pPr lvl="1" algn="l">
-              <a:spcAft>
-                <a:spcPts val="400"/>
-              </a:spcAft>
-            </a:pPr>
-            <a:r>
-              <a:rPr sz="1700" b="0">
-                <a:solidFill>
-                  <a:srgbClr val="0B6040"/>
-                </a:solidFill>
-                <a:latin typeface="Consolas"/>
-              </a:rPr>
-              <a:t>http://[2001:db8::1]/   ← 囲まないとポート番号のコロンと区別できません</a:t>
-            </a:r>
-          </a:p>
-          <a:p>
-            <a:pPr algn="l">
-              <a:spcAft>
-                <a:spcPts val="700"/>
-              </a:spcAft>
-            </a:pPr>
-            <a:r>
-              <a:rPr sz="2000" b="1">
-                <a:solidFill>
-                  <a:srgbClr val="1F3355"/>
-                </a:solidFill>
-                <a:latin typeface="Meiryo UI"/>
-              </a:rPr>
-              <a:t>なぜ /64 なのか — 決まりごとです</a:t>
-            </a:r>
-          </a:p>
-          <a:p>
-            <a:pPr lvl="1" algn="l">
-              <a:spcAft>
-                <a:spcPts val="400"/>
-              </a:spcAft>
-            </a:pPr>
-            <a:r>
-              <a:rPr sz="1700" b="0">
-                <a:solidFill>
-                  <a:srgbClr val="555555"/>
-                </a:solidFill>
-                <a:latin typeface="Meiryo UI"/>
-              </a:rPr>
-              <a:t>後ろの 64 ビットは「インタフェース ID」に使うと決まっている</a:t>
-            </a:r>
-          </a:p>
-          <a:p>
-            <a:pPr lvl="1" algn="l">
-              <a:spcAft>
-                <a:spcPts val="400"/>
-              </a:spcAft>
-            </a:pPr>
-            <a:r>
-              <a:rPr sz="1700" b="0">
-                <a:solidFill>
-                  <a:srgbClr val="555555"/>
-                </a:solidFill>
-                <a:latin typeface="Meiryo UI"/>
-              </a:rPr>
-              <a:t>端末が MAC から作るかランダムに作る。つまり下位は端末が勝手に決める</a:t>
-            </a:r>
-          </a:p>
-          <a:p>
-            <a:pPr lvl="1" algn="l">
-              <a:spcAft>
-                <a:spcPts val="400"/>
-              </a:spcAft>
-            </a:pPr>
-            <a:r>
-              <a:rPr sz="1700" b="1">
-                <a:solidFill>
-                  <a:srgbClr val="C0392B"/>
-                </a:solidFill>
-                <a:latin typeface="Meiryo UI"/>
-              </a:rPr>
-              <a:t>だから /64 より細かく切ると (たとえば /80) 自動設定が動きません</a:t>
-            </a:r>
-          </a:p>
-          <a:p>
-            <a:pPr algn="l">
-              <a:spcAft>
-                <a:spcPts val="700"/>
-              </a:spcAft>
-            </a:pPr>
-            <a:r>
-              <a:rPr sz="2000" b="1">
-                <a:solidFill>
-                  <a:srgbClr val="1F3355"/>
-                </a:solidFill>
-                <a:latin typeface="Meiryo UI"/>
-              </a:rPr>
-              <a:t>実務での見え方 — ここが後で効きます</a:t>
-            </a:r>
-          </a:p>
-          <a:p>
-            <a:pPr lvl="1" algn="l">
-              <a:spcAft>
-                <a:spcPts val="400"/>
-              </a:spcAft>
-            </a:pPr>
-            <a:r>
-              <a:rPr sz="1700" b="0">
-                <a:solidFill>
-                  <a:srgbClr val="555555"/>
-                </a:solidFill>
-                <a:latin typeface="Meiryo UI"/>
-              </a:rPr>
-              <a:t>ひかり電話なし → /64 が 1 本だけ来る (RA 方式)</a:t>
-            </a:r>
-          </a:p>
-          <a:p>
-            <a:pPr lvl="1" algn="l">
-              <a:spcAft>
-                <a:spcPts val="400"/>
-              </a:spcAft>
-            </a:pPr>
-            <a:r>
-              <a:rPr sz="1700" b="0">
-                <a:solidFill>
-                  <a:srgbClr val="555555"/>
-                </a:solidFill>
-                <a:latin typeface="Meiryo UI"/>
-              </a:rPr>
-              <a:t>ひかり電話あり → /56 が委譲される = /64 が 256 本使える (PD 方式)</a:t>
-            </a:r>
-          </a:p>
-          <a:p>
-            <a:pPr lvl="1" algn="l">
-              <a:spcAft>
-                <a:spcPts val="400"/>
-              </a:spcAft>
-            </a:pPr>
-            <a:r>
-              <a:rPr sz="1700" b="0">
-                <a:solidFill>
-                  <a:srgbClr val="555555"/>
-                </a:solidFill>
-                <a:latin typeface="Meiryo UI"/>
-              </a:rPr>
-              <a:t>この違いが効くのは「LAN をいくつに切れるか」。どちらでも MAP-E も DS-Lite も組めます</a:t>
-            </a:r>
-          </a:p>
-        </p:txBody>
-      </p:sp>
-      <p:sp>
-        <p:nvSpPr>
-          <p:cNvPr id="5" name="TextBox 4"/>
-          <p:cNvSpPr txBox="1"/>
-          <p:nvPr/>
-        </p:nvSpPr>
-        <p:spPr>
-          <a:xfrm>
-            <a:off x="594360" y="6263640"/>
-            <a:ext cx="10972800" cy="457200"/>
-          </a:xfrm>
-          <a:prstGeom prst="rect">
-            <a:avLst/>
-          </a:prstGeom>
-          <a:noFill/>
-        </p:spPr>
-        <p:txBody>
-          <a:bodyPr wrap="square">
-            <a:spAutoFit/>
-          </a:bodyPr>
-          <a:lstStyle/>
-          <a:p>
-            <a:pPr algn="l"/>
-            <a:r>
-              <a:rPr sz="1200" b="0">
-                <a:solidFill>
-                  <a:srgbClr val="007ACC"/>
-                </a:solidFill>
-                <a:latin typeface="Meiryo UI"/>
-              </a:rPr>
-              <a:t>教科書: 第3章「IPv6 アドレス体系」(p.67) / 7.7「グローバルアドレスの生成」(p.172) / 8.7「DHCPv6-PD」(p.201)</a:t>
-            </a:r>
-          </a:p>
-        </p:txBody>
-      </p:sp>
-    </p:spTree>
-  </p:cSld>
-  <p:clrMapOvr>
-    <a:masterClrMapping/>
-  </p:clrMapOvr>
-</p:sld>
-</file>
-
-<file path=ppt/slides/slide9.xml><?xml version="1.0" encoding="utf-8"?>
-<p:sld xmlns:a="http://schemas.openxmlformats.org/drawingml/2006/main" xmlns:p="http://schemas.openxmlformats.org/presentationml/2006/main" xmlns:r="http://schemas.openxmlformats.org/officeDocument/2006/relationships">
-  <p:cSld>
-    <p:spTree>
-      <p:nvGrpSpPr>
-        <p:cNvPr id="1" name=""/>
-        <p:cNvGrpSpPr/>
-        <p:nvPr/>
-      </p:nvGrpSpPr>
-      <p:grpSpPr/>
-      <p:sp>
-        <p:nvSpPr>
-          <p:cNvPr id="2" name="TextBox 1"/>
-          <p:cNvSpPr txBox="1"/>
-          <p:nvPr/>
-        </p:nvSpPr>
-        <p:spPr>
-          <a:xfrm>
-            <a:off x="502920" y="320040"/>
-            <a:ext cx="11155680" cy="822960"/>
-          </a:xfrm>
-          <a:prstGeom prst="rect">
-            <a:avLst/>
-          </a:prstGeom>
-          <a:noFill/>
-        </p:spPr>
-        <p:txBody>
-          <a:bodyPr wrap="square">
-            <a:spAutoFit/>
-          </a:bodyPr>
-          <a:lstStyle/>
-          <a:p>
-            <a:pPr algn="l"/>
-            <a:r>
-              <a:rPr sz="2800" b="1">
-                <a:solidFill>
-                  <a:srgbClr val="1F3355"/>
-                </a:solidFill>
-                <a:latin typeface="Meiryo UI"/>
-              </a:rPr>
-              <a:t>fe80:: が必ず付いている理由 — IPv4 と一番違うところ</a:t>
-            </a:r>
-          </a:p>
-        </p:txBody>
-      </p:sp>
-      <p:sp>
-        <p:nvSpPr>
-          <p:cNvPr id="3" name="Rectangle 2"/>
-          <p:cNvSpPr/>
-          <p:nvPr/>
-        </p:nvSpPr>
-        <p:spPr>
-          <a:xfrm>
-            <a:off x="502920" y="1115568"/>
-            <a:ext cx="11155680" cy="31750"/>
-          </a:xfrm>
-          <a:prstGeom prst="rect">
-            <a:avLst/>
-          </a:prstGeom>
-          <a:solidFill>
-            <a:srgbClr val="007ACC"/>
-          </a:solidFill>
-          <a:ln>
-            <a:noFill/>
-          </a:ln>
-        </p:spPr>
-        <p:style>
-          <a:lnRef idx="1">
-            <a:schemeClr val="accent1"/>
-          </a:lnRef>
-          <a:fillRef idx="3">
-            <a:schemeClr val="accent1"/>
-          </a:fillRef>
-          <a:effectRef idx="2">
-            <a:schemeClr val="accent1"/>
-          </a:effectRef>
-          <a:fontRef idx="minor">
-            <a:schemeClr val="lt1"/>
-          </a:fontRef>
-        </p:style>
-        <p:txBody>
-          <a:bodyPr rtlCol="0" anchor="ctr"/>
-          <a:lstStyle/>
-          <a:p>
-            <a:pPr algn="ctr"/>
-          </a:p>
-        </p:txBody>
-      </p:sp>
-      <p:sp>
-        <p:nvSpPr>
-          <p:cNvPr id="4" name="TextBox 3"/>
-          <p:cNvSpPr txBox="1"/>
-          <p:nvPr/>
-        </p:nvSpPr>
-        <p:spPr>
-          <a:xfrm>
-            <a:off x="594360" y="1371600"/>
-            <a:ext cx="10972800" cy="4846320"/>
-          </a:xfrm>
-          <a:prstGeom prst="rect">
-            <a:avLst/>
-          </a:prstGeom>
-          <a:noFill/>
-        </p:spPr>
-        <p:txBody>
-          <a:bodyPr wrap="square">
-            <a:spAutoFit/>
-          </a:bodyPr>
-          <a:lstStyle/>
-          <a:p>
-            <a:pPr algn="l">
-              <a:spcAft>
-                <a:spcPts val="700"/>
-              </a:spcAft>
-            </a:pPr>
-            <a:r>
-              <a:rPr sz="2000" b="1">
-                <a:solidFill>
-                  <a:srgbClr val="1F3355"/>
-                </a:solidFill>
-                <a:latin typeface="Meiryo UI"/>
-              </a:rPr>
-              <a:t>アドレスをもらう前に通信する必要があるからです</a:t>
-            </a:r>
-          </a:p>
-          <a:p>
-            <a:pPr lvl="1" algn="l">
-              <a:spcAft>
-                <a:spcPts val="400"/>
-              </a:spcAft>
-            </a:pPr>
-            <a:r>
-              <a:rPr sz="1700" b="0">
-                <a:solidFill>
-                  <a:srgbClr val="555555"/>
-                </a:solidFill>
-                <a:latin typeface="Meiryo UI"/>
-              </a:rPr>
-              <a:t>アドレスをくれるのはルータ。でもルータと話すにはアドレスが要る → 鶏と卵</a:t>
-            </a:r>
-          </a:p>
-          <a:p>
-            <a:pPr lvl="1" algn="l">
-              <a:spcAft>
-                <a:spcPts val="400"/>
-              </a:spcAft>
-            </a:pPr>
-            <a:r>
-              <a:rPr sz="1700" b="0">
-                <a:solidFill>
-                  <a:srgbClr val="555555"/>
-                </a:solidFill>
-                <a:latin typeface="Meiryo UI"/>
-              </a:rPr>
-              <a:t>だから NIC が上がった瞬間に自分だけで作れるアドレスを必ず持つ。それが fe80::</a:t>
-            </a:r>
-          </a:p>
-          <a:p>
-            <a:pPr algn="l">
-              <a:spcAft>
-                <a:spcPts val="700"/>
-              </a:spcAft>
-            </a:pPr>
-            <a:r>
-              <a:rPr sz="2000" b="1">
-                <a:solidFill>
-                  <a:srgbClr val="1F3355"/>
-                </a:solidFill>
-                <a:latin typeface="Meiryo UI"/>
-              </a:rPr>
-              <a:t>その結果こうなります</a:t>
-            </a:r>
-          </a:p>
-          <a:p>
-            <a:pPr lvl="1" algn="l">
-              <a:spcAft>
-                <a:spcPts val="400"/>
-              </a:spcAft>
-            </a:pPr>
-            <a:r>
-              <a:rPr sz="1700" b="0">
-                <a:solidFill>
-                  <a:srgbClr val="555555"/>
-                </a:solidFill>
-                <a:latin typeface="Meiryo UI"/>
-              </a:rPr>
-              <a:t>RA も DHCPv6 も送信元は fe80::。グローバルアドレスは後から付く</a:t>
-            </a:r>
-          </a:p>
-          <a:p>
-            <a:pPr lvl="1" algn="l">
-              <a:spcAft>
-                <a:spcPts val="400"/>
-              </a:spcAft>
-            </a:pPr>
-            <a:r>
-              <a:rPr sz="1700" b="0">
-                <a:solidFill>
-                  <a:srgbClr val="555555"/>
-                </a:solidFill>
-                <a:latin typeface="Meiryo UI"/>
-              </a:rPr>
-              <a:t>既定ゲートウェイも fe80:: で指す。IPv4 のように 192.168.1.1 とは書かない</a:t>
-            </a:r>
-          </a:p>
-          <a:p>
-            <a:pPr lvl="1" algn="l">
-              <a:spcAft>
-                <a:spcPts val="400"/>
-              </a:spcAft>
-            </a:pPr>
-            <a:r>
-              <a:rPr sz="1700" b="0">
-                <a:solidFill>
-                  <a:srgbClr val="555555"/>
-                </a:solidFill>
-                <a:latin typeface="Meiryo UI"/>
-              </a:rPr>
-              <a:t>ルーティングプロトコルの隣接も fe80::</a:t>
-            </a:r>
-          </a:p>
-          <a:p>
-            <a:pPr algn="l">
-              <a:spcAft>
-                <a:spcPts val="700"/>
-              </a:spcAft>
-            </a:pPr>
-            <a:r>
-              <a:rPr sz="2000" b="1">
-                <a:solidFill>
-                  <a:srgbClr val="C0392B"/>
-                </a:solidFill>
-                <a:latin typeface="Meiryo UI"/>
-              </a:rPr>
-              <a:t>だから「グローバル IPv6 が無い = 壊れている」ではありません</a:t>
-            </a:r>
-          </a:p>
-          <a:p>
-            <a:pPr lvl="1" algn="l">
-              <a:spcAft>
-                <a:spcPts val="400"/>
-              </a:spcAft>
-            </a:pPr>
-            <a:r>
-              <a:rPr sz="1700" b="0">
-                <a:solidFill>
-                  <a:srgbClr val="555555"/>
-                </a:solidFill>
-                <a:latin typeface="Meiryo UI"/>
-              </a:rPr>
-              <a:t>うちの検証環境では、VM に管理 IP を振らず fe80:: だけで SSH して構築しました</a:t>
-            </a:r>
-          </a:p>
-          <a:p>
-            <a:pPr lvl="1" algn="l">
-              <a:spcAft>
-                <a:spcPts val="400"/>
-              </a:spcAft>
-            </a:pPr>
-            <a:r>
-              <a:rPr sz="1700" b="1">
-                <a:solidFill>
-                  <a:srgbClr val="C0392B"/>
-                </a:solidFill>
-                <a:latin typeface="Meiryo UI"/>
-              </a:rPr>
-              <a:t>※ fe80:: はどのインタフェース経由かを必ず書きます (fe80::1%eth0)。最初の関門です</a:t>
-            </a:r>
-          </a:p>
-          <a:p>
-            <a:pPr algn="l">
-              <a:spcAft>
-                <a:spcPts val="700"/>
-              </a:spcAft>
-            </a:pPr>
-            <a:r>
-              <a:rPr sz="2000" b="0">
-                <a:solidFill>
-                  <a:srgbClr val="1F3355"/>
-                </a:solidFill>
-                <a:latin typeface="Meiryo UI"/>
-              </a:rPr>
-              <a:t>あわせて: 1 枚の NIC に fe80:: とグローバルが同時に付く。これが「複数が当たり前」の中身です</a:t>
-            </a:r>
-          </a:p>
-        </p:txBody>
-      </p:sp>
-      <p:sp>
-        <p:nvSpPr>
-          <p:cNvPr id="5" name="TextBox 4"/>
-          <p:cNvSpPr txBox="1"/>
-          <p:nvPr/>
-        </p:nvSpPr>
-        <p:spPr>
-          <a:xfrm>
-            <a:off x="594360" y="6263640"/>
-            <a:ext cx="10972800" cy="457200"/>
-          </a:xfrm>
-          <a:prstGeom prst="rect">
-            <a:avLst/>
-          </a:prstGeom>
-          <a:noFill/>
-        </p:spPr>
-        <p:txBody>
-          <a:bodyPr wrap="square">
-            <a:spAutoFit/>
-          </a:bodyPr>
-          <a:lstStyle/>
-          <a:p>
-            <a:pPr algn="l"/>
-            <a:r>
-              <a:rPr sz="1200" b="0">
-                <a:solidFill>
-                  <a:srgbClr val="007ACC"/>
-                </a:solidFill>
-                <a:latin typeface="Meiryo UI"/>
-              </a:rPr>
-              <a:t>教科書: 3.5「リンクローカルユニキャストアドレス」(p.74) / 3.6「スコープのゾーン」(p.76) / 2.9 (p.48)</a:t>
             </a:r>
           </a:p>
         </p:txBody>

--- a/docs/ipoe-lab/slides/setsumeikai.pptx
+++ b/docs/ipoe-lab/slides/setsumeikai.pptx
@@ -38,6 +38,11 @@
     <p:sldId id="286" r:id="rId37"/>
     <p:sldId id="287" r:id="rId38"/>
     <p:sldId id="288" r:id="rId39"/>
+    <p:sldId id="289" r:id="rId40"/>
+    <p:sldId id="290" r:id="rId41"/>
+    <p:sldId id="291" r:id="rId42"/>
+    <p:sldId id="292" r:id="rId43"/>
+    <p:sldId id="293" r:id="rId44"/>
   </p:sldIdLst>
   <p:sldSz cx="12191695" cy="6858000" type="screen4x3"/>
   <p:notesSz cx="6858000" cy="9144000"/>
@@ -3350,7 +3355,7 @@
                 </a:solidFill>
                 <a:latin typeface="Meiryo UI"/>
               </a:rPr>
-              <a:t>アドレスの読み方と、なぜ /64 なのか</a:t>
+              <a:t>ICMPv6 は「まとめて落とす」をやってはいけません</a:t>
             </a:r>
           </a:p>
         </p:txBody>
@@ -3422,209 +3427,161 @@
           <a:p>
             <a:pPr algn="l">
               <a:spcAft>
-                <a:spcPts val="900"/>
-              </a:spcAft>
-            </a:pPr>
-            <a:r>
-              <a:rPr sz="1900" b="1">
+                <a:spcPts val="1000"/>
+              </a:spcAft>
+            </a:pPr>
+            <a:r>
+              <a:rPr sz="2000" b="1">
+                <a:solidFill>
+                  <a:srgbClr val="C0392B"/>
+                </a:solidFill>
+                <a:latin typeface="Meiryo UI"/>
+              </a:rPr>
+              <a:t>IPv4 の感覚で deny icmp を書くと、IPv6 では通信そのものが死にます</a:t>
+            </a:r>
+          </a:p>
+          <a:p>
+            <a:pPr lvl="1" algn="l">
+              <a:spcAft>
+                <a:spcPts val="600"/>
+              </a:spcAft>
+            </a:pPr>
+            <a:r>
+              <a:rPr sz="1700" b="0">
+                <a:solidFill>
+                  <a:srgbClr val="555555"/>
+                </a:solidFill>
+                <a:latin typeface="Meiryo UI"/>
+              </a:rPr>
+              <a:t>IPv6 では相手の MAC を調べるのも ICMPv6。ARP の代わりだからです</a:t>
+            </a:r>
+          </a:p>
+          <a:p>
+            <a:pPr lvl="1" algn="l">
+              <a:spcAft>
+                <a:spcPts val="600"/>
+              </a:spcAft>
+            </a:pPr>
+            <a:r>
+              <a:rPr sz="1700" b="0">
+                <a:solidFill>
+                  <a:srgbClr val="555555"/>
+                </a:solidFill>
+                <a:latin typeface="Meiryo UI"/>
+              </a:rPr>
+              <a:t>経路の途中で「そのサイズは無理」と教えるのも ICMPv6 (第3部の MTU の話)</a:t>
+            </a:r>
+          </a:p>
+          <a:p>
+            <a:pPr algn="l">
+              <a:spcAft>
+                <a:spcPts val="1000"/>
+              </a:spcAft>
+            </a:pPr>
+            <a:r>
+              <a:rPr sz="2000" b="1">
                 <a:solidFill>
                   <a:srgbClr val="1F3355"/>
                 </a:solidFill>
                 <a:latin typeface="Meiryo UI"/>
               </a:rPr>
-              <a:t>書き方のルールは 3 つだけ</a:t>
+              <a:t>最低限これは通してください</a:t>
             </a:r>
           </a:p>
           <a:p>
             <a:pPr lvl="1" algn="l">
               <a:spcAft>
-                <a:spcPts val="500"/>
-              </a:spcAft>
-            </a:pPr>
-            <a:r>
-              <a:rPr sz="1600" b="0">
+                <a:spcPts val="600"/>
+              </a:spcAft>
+            </a:pPr>
+            <a:r>
+              <a:rPr sz="1700" b="0">
                 <a:solidFill>
                   <a:srgbClr val="555555"/>
                 </a:solidFill>
                 <a:latin typeface="Meiryo UI"/>
               </a:rPr>
-              <a:t>各ブロック先頭の 0 は省ける → 2001:0db8:0000:0001 は 2001:db8:0:1</a:t>
+              <a:t>エラー通知 4 種 (宛先到達不能 / パケット過大 / 時間超過 / パラメータ異常)</a:t>
             </a:r>
           </a:p>
           <a:p>
             <a:pPr lvl="1" algn="l">
               <a:spcAft>
-                <a:spcPts val="500"/>
-              </a:spcAft>
-            </a:pPr>
-            <a:r>
-              <a:rPr sz="1600" b="0">
+                <a:spcPts val="600"/>
+              </a:spcAft>
+            </a:pPr>
+            <a:r>
+              <a:rPr sz="1700" b="1">
+                <a:solidFill>
+                  <a:srgbClr val="C0392B"/>
+                </a:solidFill>
+                <a:latin typeface="Meiryo UI"/>
+              </a:rPr>
+              <a:t>  ← とくに「パケット過大」を落とすと 大きいファイルが送れなくなります</a:t>
+            </a:r>
+          </a:p>
+          <a:p>
+            <a:pPr lvl="1" algn="l">
+              <a:spcAft>
+                <a:spcPts val="600"/>
+              </a:spcAft>
+            </a:pPr>
+            <a:r>
+              <a:rPr sz="1700" b="0">
                 <a:solidFill>
                   <a:srgbClr val="555555"/>
                 </a:solidFill>
                 <a:latin typeface="Meiryo UI"/>
               </a:rPr>
-              <a:t>:: は 0 が続くところを 1 回だけ省ける → 2001:db8:0:0:0:0:0:1 は 2001:db8::1</a:t>
+              <a:t>近隣探索 (相手を探す・アドレス重複を確かめる・ルータを探す)</a:t>
             </a:r>
           </a:p>
           <a:p>
             <a:pPr lvl="1" algn="l">
               <a:spcAft>
-                <a:spcPts val="500"/>
-              </a:spcAft>
-            </a:pPr>
-            <a:r>
-              <a:rPr sz="1600" b="0">
+                <a:spcPts val="600"/>
+              </a:spcAft>
+            </a:pPr>
+            <a:r>
+              <a:rPr sz="1700" b="0">
                 <a:solidFill>
                   <a:srgbClr val="555555"/>
                 </a:solidFill>
                 <a:latin typeface="Meiryo UI"/>
               </a:rPr>
-              <a:t>URL に書くときは [ ] で囲む。忘れると動きません</a:t>
+              <a:t>エコー要求 / 応答 (ping。運用で要るので普通は通します)</a:t>
+            </a:r>
+          </a:p>
+          <a:p>
+            <a:pPr algn="l">
+              <a:spcAft>
+                <a:spcPts val="1000"/>
+              </a:spcAft>
+            </a:pPr>
+            <a:r>
+              <a:rPr sz="2000" b="0">
+                <a:solidFill>
+                  <a:srgbClr val="1F3355"/>
+                </a:solidFill>
+                <a:latin typeface="Meiryo UI"/>
+              </a:rPr>
+              <a:t>細かい番号は RFC 4890 と教科書 第5章 (p.115) を見てください</a:t>
             </a:r>
           </a:p>
           <a:p>
             <a:pPr lvl="1" algn="l">
               <a:spcAft>
-                <a:spcPts val="500"/>
-              </a:spcAft>
-            </a:pPr>
-            <a:r>
-              <a:rPr sz="1600" b="0">
-                <a:solidFill>
-                  <a:srgbClr val="0B6040"/>
-                </a:solidFill>
-                <a:latin typeface="Consolas"/>
-              </a:rPr>
-              <a:t>http://[2001:db8::1]/   ← 囲まないとポート番号のコロンと区別できません</a:t>
-            </a:r>
-          </a:p>
-          <a:p>
-            <a:pPr algn="l">
-              <a:spcAft>
-                <a:spcPts val="900"/>
-              </a:spcAft>
-            </a:pPr>
-            <a:r>
-              <a:rPr sz="1900" b="1">
-                <a:solidFill>
-                  <a:srgbClr val="1F3355"/>
-                </a:solidFill>
-                <a:latin typeface="Meiryo UI"/>
-              </a:rPr>
-              <a:t>なぜ /64 なのか — 決まりごとです</a:t>
-            </a:r>
-          </a:p>
-          <a:p>
-            <a:pPr lvl="1" algn="l">
-              <a:spcAft>
-                <a:spcPts val="500"/>
-              </a:spcAft>
-            </a:pPr>
-            <a:r>
-              <a:rPr sz="1600" b="0">
-                <a:solidFill>
-                  <a:srgbClr val="555555"/>
-                </a:solidFill>
-                <a:latin typeface="Meiryo UI"/>
-              </a:rPr>
-              <a:t>後ろの 64 ビットは「インタフェース ID」に使うと決まっている</a:t>
-            </a:r>
-          </a:p>
-          <a:p>
-            <a:pPr lvl="1" algn="l">
-              <a:spcAft>
-                <a:spcPts val="500"/>
-              </a:spcAft>
-            </a:pPr>
-            <a:r>
-              <a:rPr sz="1600" b="0">
-                <a:solidFill>
-                  <a:srgbClr val="555555"/>
-                </a:solidFill>
-                <a:latin typeface="Meiryo UI"/>
-              </a:rPr>
-              <a:t>端末が MAC から作るかランダムに作る。つまり下位は端末が勝手に決める</a:t>
-            </a:r>
-          </a:p>
-          <a:p>
-            <a:pPr lvl="1" algn="l">
-              <a:spcAft>
-                <a:spcPts val="500"/>
-              </a:spcAft>
-            </a:pPr>
-            <a:r>
-              <a:rPr sz="1600" b="1">
+                <a:spcPts val="600"/>
+              </a:spcAft>
+            </a:pPr>
+            <a:r>
+              <a:rPr sz="1700" b="1">
                 <a:solidFill>
                   <a:srgbClr val="C0392B"/>
                 </a:solidFill>
                 <a:latin typeface="Meiryo UI"/>
               </a:rPr>
-              <a:t>だから /64 より細かく切ると (たとえば /80) 自動設定が動きません</a:t>
-            </a:r>
-          </a:p>
-          <a:p>
-            <a:pPr algn="l">
-              <a:spcAft>
-                <a:spcPts val="900"/>
-              </a:spcAft>
-            </a:pPr>
-            <a:r>
-              <a:rPr sz="1900" b="1">
-                <a:solidFill>
-                  <a:srgbClr val="1F3355"/>
-                </a:solidFill>
-                <a:latin typeface="Meiryo UI"/>
-              </a:rPr>
-              <a:t>実務での見え方 — ここが後で効きます</a:t>
-            </a:r>
-          </a:p>
-          <a:p>
-            <a:pPr lvl="1" algn="l">
-              <a:spcAft>
-                <a:spcPts val="500"/>
-              </a:spcAft>
-            </a:pPr>
-            <a:r>
-              <a:rPr sz="1600" b="0">
-                <a:solidFill>
-                  <a:srgbClr val="555555"/>
-                </a:solidFill>
-                <a:latin typeface="Meiryo UI"/>
-              </a:rPr>
-              <a:t>ひかり電話なし → /64 が 1 本だけ来る (RA 方式)</a:t>
-            </a:r>
-          </a:p>
-          <a:p>
-            <a:pPr lvl="1" algn="l">
-              <a:spcAft>
-                <a:spcPts val="500"/>
-              </a:spcAft>
-            </a:pPr>
-            <a:r>
-              <a:rPr sz="1600" b="0">
-                <a:solidFill>
-                  <a:srgbClr val="555555"/>
-                </a:solidFill>
-                <a:latin typeface="Meiryo UI"/>
-              </a:rPr>
-              <a:t>ひかり電話あり → /56 がまとめて貸し出される = /64 が 256 本 (PD 方式 = まとめ借り方式)</a:t>
-            </a:r>
-          </a:p>
-          <a:p>
-            <a:pPr lvl="1" algn="l">
-              <a:spcAft>
-                <a:spcPts val="500"/>
-              </a:spcAft>
-            </a:pPr>
-            <a:r>
-              <a:rPr sz="1600" b="0">
-                <a:solidFill>
-                  <a:srgbClr val="555555"/>
-                </a:solidFill>
-                <a:latin typeface="Meiryo UI"/>
-              </a:rPr>
-              <a:t>この違いが効くのは「LAN をいくつに切れるか」。どちらでも MAP-E も DS-Lite も組めます</a:t>
+              <a:t>案件で ACL を書く前に、必ず一度は目を通すこと</a:t>
             </a:r>
           </a:p>
         </p:txBody>
@@ -3659,7 +3616,7 @@
                 </a:solidFill>
                 <a:latin typeface="Meiryo UI"/>
               </a:rPr>
-              <a:t>教科書: 第3章「IPv6 アドレス体系」(p.67) / 7.7「グローバルアドレスの生成」(p.172) / 8.7「DHCPv6-PD」(p.201)</a:t>
+              <a:t>「よく分からないから全部落とす」は IPv6 では成立しません。ここは事故が最も多い場所です</a:t>
             </a:r>
           </a:p>
         </p:txBody>
@@ -3712,7 +3669,7 @@
                 </a:solidFill>
                 <a:latin typeface="Meiryo UI"/>
               </a:rPr>
-              <a:t>fe80:: が必ず付いている理由 — IPv4 と一番違うところ</a:t>
+              <a:t>アドレスの読み方 — ルールは 3 つだけ</a:t>
             </a:r>
           </a:p>
         </p:txBody>
@@ -3794,7 +3751,7 @@
                 </a:solidFill>
                 <a:latin typeface="Meiryo UI"/>
               </a:rPr>
-              <a:t>アドレスをもらう前に通信する必要があるからです</a:t>
+              <a:t>① 各ブロック先頭の 0 は省ける</a:t>
             </a:r>
           </a:p>
           <a:p>
@@ -3806,11 +3763,75 @@
             <a:r>
               <a:rPr sz="1700" b="0">
                 <a:solidFill>
+                  <a:srgbClr val="0B6040"/>
+                </a:solidFill>
+                <a:latin typeface="Consolas"/>
+              </a:rPr>
+              <a:t>2001:0db8:0000:0001 → 2001:db8:0:1</a:t>
+            </a:r>
+          </a:p>
+          <a:p>
+            <a:pPr algn="l">
+              <a:spcAft>
+                <a:spcPts val="1000"/>
+              </a:spcAft>
+            </a:pPr>
+            <a:r>
+              <a:rPr sz="2000" b="1">
+                <a:solidFill>
+                  <a:srgbClr val="1F3355"/>
+                </a:solidFill>
+                <a:latin typeface="Meiryo UI"/>
+              </a:rPr>
+              <a:t>② 0 が続くところは :: で 1 回だけ省ける</a:t>
+            </a:r>
+          </a:p>
+          <a:p>
+            <a:pPr lvl="1" algn="l">
+              <a:spcAft>
+                <a:spcPts val="600"/>
+              </a:spcAft>
+            </a:pPr>
+            <a:r>
+              <a:rPr sz="1700" b="0">
+                <a:solidFill>
+                  <a:srgbClr val="0B6040"/>
+                </a:solidFill>
+                <a:latin typeface="Consolas"/>
+              </a:rPr>
+              <a:t>2001:db8:0:0:0:0:0:1 → 2001:db8::1</a:t>
+            </a:r>
+          </a:p>
+          <a:p>
+            <a:pPr lvl="1" algn="l">
+              <a:spcAft>
+                <a:spcPts val="600"/>
+              </a:spcAft>
+            </a:pPr>
+            <a:r>
+              <a:rPr sz="1700" b="0">
+                <a:solidFill>
                   <a:srgbClr val="555555"/>
                 </a:solidFill>
                 <a:latin typeface="Meiryo UI"/>
               </a:rPr>
-              <a:t>アドレスをくれるのはルータ。でもルータと話すにはアドレスが要る → 鶏と卵</a:t>
+              <a:t>2 か所以上でやると、どこが何個か分からなくなるので 1 回だけです</a:t>
+            </a:r>
+          </a:p>
+          <a:p>
+            <a:pPr algn="l">
+              <a:spcAft>
+                <a:spcPts val="1000"/>
+              </a:spcAft>
+            </a:pPr>
+            <a:r>
+              <a:rPr sz="2000" b="1">
+                <a:solidFill>
+                  <a:srgbClr val="1F3355"/>
+                </a:solidFill>
+                <a:latin typeface="Meiryo UI"/>
+              </a:rPr>
+              <a:t>③ URL に書くときは [ ] で囲む。忘れると動きません</a:t>
             </a:r>
           </a:p>
           <a:p>
@@ -3822,139 +3843,27 @@
             <a:r>
               <a:rPr sz="1700" b="0">
                 <a:solidFill>
+                  <a:srgbClr val="0B6040"/>
+                </a:solidFill>
+                <a:latin typeface="Consolas"/>
+              </a:rPr>
+              <a:t>http://[2001:db8::1]/</a:t>
+            </a:r>
+          </a:p>
+          <a:p>
+            <a:pPr lvl="1" algn="l">
+              <a:spcAft>
+                <a:spcPts val="600"/>
+              </a:spcAft>
+            </a:pPr>
+            <a:r>
+              <a:rPr sz="1700" b="0">
+                <a:solidFill>
                   <a:srgbClr val="555555"/>
                 </a:solidFill>
                 <a:latin typeface="Meiryo UI"/>
               </a:rPr>
-              <a:t>だから NIC が上がった瞬間に自分だけで作れるアドレスを必ず持つ。それが fe80::</a:t>
-            </a:r>
-          </a:p>
-          <a:p>
-            <a:pPr algn="l">
-              <a:spcAft>
-                <a:spcPts val="1000"/>
-              </a:spcAft>
-            </a:pPr>
-            <a:r>
-              <a:rPr sz="2000" b="1">
-                <a:solidFill>
-                  <a:srgbClr val="1F3355"/>
-                </a:solidFill>
-                <a:latin typeface="Meiryo UI"/>
-              </a:rPr>
-              <a:t>その結果こうなります</a:t>
-            </a:r>
-          </a:p>
-          <a:p>
-            <a:pPr lvl="1" algn="l">
-              <a:spcAft>
-                <a:spcPts val="600"/>
-              </a:spcAft>
-            </a:pPr>
-            <a:r>
-              <a:rPr sz="1700" b="0">
-                <a:solidFill>
-                  <a:srgbClr val="555555"/>
-                </a:solidFill>
-                <a:latin typeface="Meiryo UI"/>
-              </a:rPr>
-              <a:t>RA も DHCPv6 も送信元は fe80::。グローバルアドレスは後から付く</a:t>
-            </a:r>
-          </a:p>
-          <a:p>
-            <a:pPr lvl="1" algn="l">
-              <a:spcAft>
-                <a:spcPts val="600"/>
-              </a:spcAft>
-            </a:pPr>
-            <a:r>
-              <a:rPr sz="1700" b="0">
-                <a:solidFill>
-                  <a:srgbClr val="555555"/>
-                </a:solidFill>
-                <a:latin typeface="Meiryo UI"/>
-              </a:rPr>
-              <a:t>既定ゲートウェイも fe80:: で指す。IPv4 のように 192.168.1.1 とは書かない</a:t>
-            </a:r>
-          </a:p>
-          <a:p>
-            <a:pPr lvl="1" algn="l">
-              <a:spcAft>
-                <a:spcPts val="600"/>
-              </a:spcAft>
-            </a:pPr>
-            <a:r>
-              <a:rPr sz="1700" b="0">
-                <a:solidFill>
-                  <a:srgbClr val="555555"/>
-                </a:solidFill>
-                <a:latin typeface="Meiryo UI"/>
-              </a:rPr>
-              <a:t>ルータ同士の経路のやり取りや隣接の会話も fe80:: が普通に使われます</a:t>
-            </a:r>
-          </a:p>
-          <a:p>
-            <a:pPr algn="l">
-              <a:spcAft>
-                <a:spcPts val="1000"/>
-              </a:spcAft>
-            </a:pPr>
-            <a:r>
-              <a:rPr sz="2000" b="1">
-                <a:solidFill>
-                  <a:srgbClr val="C0392B"/>
-                </a:solidFill>
-                <a:latin typeface="Meiryo UI"/>
-              </a:rPr>
-              <a:t>だから「グローバル IPv6 が無い = 壊れている」ではありません</a:t>
-            </a:r>
-          </a:p>
-          <a:p>
-            <a:pPr lvl="1" algn="l">
-              <a:spcAft>
-                <a:spcPts val="600"/>
-              </a:spcAft>
-            </a:pPr>
-            <a:r>
-              <a:rPr sz="1700" b="0">
-                <a:solidFill>
-                  <a:srgbClr val="555555"/>
-                </a:solidFill>
-                <a:latin typeface="Meiryo UI"/>
-              </a:rPr>
-              <a:t>うちの検証環境では、VM に管理 IP を振らず fe80:: だけで SSH して構築しました</a:t>
-            </a:r>
-          </a:p>
-          <a:p>
-            <a:pPr lvl="1" algn="l">
-              <a:spcAft>
-                <a:spcPts val="600"/>
-              </a:spcAft>
-            </a:pPr>
-            <a:r>
-              <a:rPr sz="1700" b="1">
-                <a:solidFill>
-                  <a:srgbClr val="C0392B"/>
-                </a:solidFill>
-                <a:latin typeface="Meiryo UI"/>
-              </a:rPr>
-              <a:t>※ fe80:: はどのインタフェース経由かを必ず書きます (fe80::1%eth0)。最初の関門です</a:t>
-            </a:r>
-          </a:p>
-          <a:p>
-            <a:pPr algn="l">
-              <a:spcAft>
-                <a:spcPts val="1000"/>
-              </a:spcAft>
-            </a:pPr>
-            <a:r>
-              <a:rPr sz="2000" b="0">
-                <a:solidFill>
-                  <a:srgbClr val="1F3355"/>
-                </a:solidFill>
-                <a:latin typeface="Meiryo UI"/>
-              </a:rPr>
-              <a:t>あわせて: 1 枚の NIC に fe80:: とグローバルが同時に付く。これが「複数が当たり前」の中身です</a:t>
+              <a:t>囲まないと、アドレスのコロンと ポート番号のコロン が区別できないためです</a:t>
             </a:r>
           </a:p>
         </p:txBody>
@@ -3989,7 +3898,7 @@
                 </a:solidFill>
                 <a:latin typeface="Meiryo UI"/>
               </a:rPr>
-              <a:t>教科書: 3.5「リンクローカルユニキャストアドレス」(p.74) / 3.6「スコープのゾーン」(p.76) / 2.9 (p.48)</a:t>
+              <a:t>教科書: 第3章「IPv6 アドレス体系」(p.67)</a:t>
             </a:r>
           </a:p>
         </p:txBody>
@@ -4042,7 +3951,7 @@
                 </a:solidFill>
                 <a:latin typeface="Meiryo UI"/>
               </a:rPr>
-              <a:t>アドレスはどうやって決まるのか</a:t>
+              <a:t>なぜ /64 で切るのか — ここは案件のヒアリングに直結します</a:t>
             </a:r>
           </a:p>
         </p:txBody>
@@ -4124,7 +4033,7 @@
                 </a:solidFill>
                 <a:latin typeface="Meiryo UI"/>
               </a:rPr>
-              <a:t>ルータが「私がゲートウェイだよ」と自分から言いに来ます</a:t>
+              <a:t>/64 は決まりごとです。「なんとなく」ではありません</a:t>
             </a:r>
           </a:p>
           <a:p>
@@ -4140,7 +4049,7 @@
                 </a:solidFill>
                 <a:latin typeface="Meiryo UI"/>
               </a:rPr>
-              <a:t>① 端末が「ルータいますか」と聞く</a:t>
+              <a:t>後ろの 64 ビットは「端末が自分で決める場所」と決まっている</a:t>
             </a:r>
           </a:p>
           <a:p>
@@ -4156,7 +4065,7 @@
                 </a:solidFill>
                 <a:latin typeface="Meiryo UI"/>
               </a:rPr>
-              <a:t>② ルータが「私がいます。住所の前半はこれです」と答える ← これが RA</a:t>
+              <a:t>端末が MAC から作るか、ランダムに作ります</a:t>
             </a:r>
           </a:p>
           <a:p>
@@ -4166,13 +4075,61 @@
               </a:spcAft>
             </a:pPr>
             <a:r>
+              <a:rPr sz="1700" b="1">
+                <a:solidFill>
+                  <a:srgbClr val="C0392B"/>
+                </a:solidFill>
+                <a:latin typeface="Meiryo UI"/>
+              </a:rPr>
+              <a:t>だから /64 より細かく切ると (たとえば /80) 自動設定が動きません</a:t>
+            </a:r>
+          </a:p>
+          <a:p>
+            <a:pPr algn="l">
+              <a:spcAft>
+                <a:spcPts val="1000"/>
+              </a:spcAft>
+            </a:pPr>
+            <a:r>
+              <a:rPr sz="2000" b="1">
+                <a:solidFill>
+                  <a:srgbClr val="1F3355"/>
+                </a:solidFill>
+                <a:latin typeface="Meiryo UI"/>
+              </a:rPr>
+              <a:t>案件で最初に聞く質問がここから出ます — 「ひかり電話はありますか?」</a:t>
+            </a:r>
+          </a:p>
+          <a:p>
+            <a:pPr lvl="1" algn="l">
+              <a:spcAft>
+                <a:spcPts val="600"/>
+              </a:spcAft>
+            </a:pPr>
+            <a:r>
               <a:rPr sz="1700" b="0">
                 <a:solidFill>
                   <a:srgbClr val="555555"/>
                 </a:solidFill>
                 <a:latin typeface="Meiryo UI"/>
               </a:rPr>
-              <a:t>③ 端末が住所の後半を自分で作ってアドレスを完成させる ← これを自動設定と呼びます</a:t>
+              <a:t>なし → /64 が 1 本だけ来る (RA 方式)</a:t>
+            </a:r>
+          </a:p>
+          <a:p>
+            <a:pPr lvl="1" algn="l">
+              <a:spcAft>
+                <a:spcPts val="600"/>
+              </a:spcAft>
+            </a:pPr>
+            <a:r>
+              <a:rPr sz="1700" b="0">
+                <a:solidFill>
+                  <a:srgbClr val="555555"/>
+                </a:solidFill>
+                <a:latin typeface="Meiryo UI"/>
+              </a:rPr>
+              <a:t>あり → /56 がまとめて貸し出される = /64 が 256 本 (PD 方式 = まとめ借り)</a:t>
             </a:r>
           </a:p>
           <a:p>
@@ -4184,91 +4141,59 @@
             <a:r>
               <a:rPr sz="2000" b="1">
                 <a:solidFill>
+                  <a:srgbClr val="C0392B"/>
+                </a:solidFill>
+                <a:latin typeface="Meiryo UI"/>
+              </a:rPr>
+              <a:t>「なんで電話の有無で変わるの?」と思ったら</a:t>
+            </a:r>
+          </a:p>
+          <a:p>
+            <a:pPr lvl="1" algn="l">
+              <a:spcAft>
+                <a:spcPts val="600"/>
+              </a:spcAft>
+            </a:pPr>
+            <a:r>
+              <a:rPr sz="1700" b="0">
+                <a:solidFill>
+                  <a:srgbClr val="555555"/>
+                </a:solidFill>
+                <a:latin typeface="Meiryo UI"/>
+              </a:rPr>
+              <a:t>ひかり電話ありだと、電話用の機器にまとめて配る提供形態になっているためです</a:t>
+            </a:r>
+          </a:p>
+          <a:p>
+            <a:pPr lvl="1" algn="l">
+              <a:spcAft>
+                <a:spcPts val="600"/>
+              </a:spcAft>
+            </a:pPr>
+            <a:r>
+              <a:rPr sz="1700" b="0">
+                <a:solidFill>
+                  <a:srgbClr val="555555"/>
+                </a:solidFill>
+                <a:latin typeface="Meiryo UI"/>
+              </a:rPr>
+              <a:t>技術的な必然ではなく NTT の提供のしかたの違い。ここは深入りしません</a:t>
+            </a:r>
+          </a:p>
+          <a:p>
+            <a:pPr algn="l">
+              <a:spcAft>
+                <a:spcPts val="1000"/>
+              </a:spcAft>
+            </a:pPr>
+            <a:r>
+              <a:rPr sz="2000" b="1">
+                <a:solidFill>
                   <a:srgbClr val="1F3355"/>
                 </a:solidFill>
                 <a:latin typeface="Meiryo UI"/>
               </a:rPr>
-              <a:t>IPv4 の DHCP と何が違うのか</a:t>
-            </a:r>
-          </a:p>
-          <a:p>
-            <a:pPr lvl="1" algn="l">
-              <a:spcAft>
-                <a:spcPts val="600"/>
-              </a:spcAft>
-            </a:pPr>
-            <a:r>
-              <a:rPr sz="1700" b="0">
-                <a:solidFill>
-                  <a:srgbClr val="555555"/>
-                </a:solidFill>
-                <a:latin typeface="Meiryo UI"/>
-              </a:rPr>
-              <a:t>IPv4 … 端末が聞きに行って、サーバが住所をまるごと渡す</a:t>
-            </a:r>
-          </a:p>
-          <a:p>
-            <a:pPr lvl="1" algn="l">
-              <a:spcAft>
-                <a:spcPts val="600"/>
-              </a:spcAft>
-            </a:pPr>
-            <a:r>
-              <a:rPr sz="1700" b="0">
-                <a:solidFill>
-                  <a:srgbClr val="555555"/>
-                </a:solidFill>
-                <a:latin typeface="Meiryo UI"/>
-              </a:rPr>
-              <a:t>IPv6 … ルータが前半だけ配って、後半は端末が自分で決める</a:t>
-            </a:r>
-          </a:p>
-          <a:p>
-            <a:pPr algn="l">
-              <a:spcAft>
-                <a:spcPts val="1000"/>
-              </a:spcAft>
-            </a:pPr>
-            <a:r>
-              <a:rPr sz="2000" b="1">
-                <a:solidFill>
-                  <a:srgbClr val="C0392B"/>
-                </a:solidFill>
-                <a:latin typeface="Meiryo UI"/>
-              </a:rPr>
-              <a:t>よくある誤解: 「アドレスが 2 つ以上付いている」のは正常です</a:t>
-            </a:r>
-          </a:p>
-          <a:p>
-            <a:pPr lvl="1" algn="l">
-              <a:spcAft>
-                <a:spcPts val="600"/>
-              </a:spcAft>
-            </a:pPr>
-            <a:r>
-              <a:rPr sz="1700" b="0">
-                <a:solidFill>
-                  <a:srgbClr val="555555"/>
-                </a:solidFill>
-                <a:latin typeface="Meiryo UI"/>
-              </a:rPr>
-              <a:t>住所を配る係 (DHCPv6) を併用しても、自分で作るのは止まりません。両方動きます</a:t>
-            </a:r>
-          </a:p>
-          <a:p>
-            <a:pPr algn="l">
-              <a:spcAft>
-                <a:spcPts val="1000"/>
-              </a:spcAft>
-            </a:pPr>
-            <a:r>
-              <a:rPr sz="2000" b="1">
-                <a:solidFill>
-                  <a:srgbClr val="1F3355"/>
-                </a:solidFill>
-                <a:latin typeface="Meiryo UI"/>
-              </a:rPr>
-              <a:t>ルータがもらう /56 は別の話。アドレスではなく「住所の前半」をまとめて借りるものです</a:t>
+              <a:t>この違いが効くのは「LAN をいくつに切れるか」。どちらでも MAP-E も DS-Lite も組めます</a:t>
             </a:r>
           </a:p>
         </p:txBody>
@@ -4303,7 +4228,7 @@
                 </a:solidFill>
                 <a:latin typeface="Meiryo UI"/>
               </a:rPr>
-              <a:t>教科書: 第6章 (p.127) / 7.1「SLAAC の流れ」(p.160) / 第8章「DHCPv6」(p.179) / 8.7 (p.201)</a:t>
+              <a:t>教科書: 7.7「グローバルアドレスの生成」(p.172) / 8.7「DHCPv6-PD」(p.201)</a:t>
             </a:r>
           </a:p>
         </p:txBody>
@@ -4317,6 +4242,698 @@
 </file>
 
 <file path=ppt/slides/slide13.xml><?xml version="1.0" encoding="utf-8"?>
+<p:sld xmlns:a="http://schemas.openxmlformats.org/drawingml/2006/main" xmlns:p="http://schemas.openxmlformats.org/presentationml/2006/main" xmlns:r="http://schemas.openxmlformats.org/officeDocument/2006/relationships">
+  <p:cSld>
+    <p:spTree>
+      <p:nvGrpSpPr>
+        <p:cNvPr id="1" name=""/>
+        <p:cNvGrpSpPr/>
+        <p:nvPr/>
+      </p:nvGrpSpPr>
+      <p:grpSpPr/>
+      <p:sp>
+        <p:nvSpPr>
+          <p:cNvPr id="2" name="TextBox 1"/>
+          <p:cNvSpPr txBox="1"/>
+          <p:nvPr/>
+        </p:nvSpPr>
+        <p:spPr>
+          <a:xfrm>
+            <a:off x="502920" y="320040"/>
+            <a:ext cx="11155680" cy="822960"/>
+          </a:xfrm>
+          <a:prstGeom prst="rect">
+            <a:avLst/>
+          </a:prstGeom>
+          <a:noFill/>
+        </p:spPr>
+        <p:txBody>
+          <a:bodyPr wrap="square">
+            <a:spAutoFit/>
+          </a:bodyPr>
+          <a:lstStyle/>
+          <a:p>
+            <a:pPr algn="l"/>
+            <a:r>
+              <a:rPr sz="2800" b="1">
+                <a:solidFill>
+                  <a:srgbClr val="1F3355"/>
+                </a:solidFill>
+                <a:latin typeface="Meiryo UI"/>
+              </a:rPr>
+              <a:t>fe80:: が必ず付いている理由 — IPv4 と一番違うところ</a:t>
+            </a:r>
+          </a:p>
+        </p:txBody>
+      </p:sp>
+      <p:sp>
+        <p:nvSpPr>
+          <p:cNvPr id="3" name="Rectangle 2"/>
+          <p:cNvSpPr/>
+          <p:nvPr/>
+        </p:nvSpPr>
+        <p:spPr>
+          <a:xfrm>
+            <a:off x="502920" y="1115568"/>
+            <a:ext cx="11155680" cy="31750"/>
+          </a:xfrm>
+          <a:prstGeom prst="rect">
+            <a:avLst/>
+          </a:prstGeom>
+          <a:solidFill>
+            <a:srgbClr val="007ACC"/>
+          </a:solidFill>
+          <a:ln>
+            <a:noFill/>
+          </a:ln>
+        </p:spPr>
+        <p:style>
+          <a:lnRef idx="1">
+            <a:schemeClr val="accent1"/>
+          </a:lnRef>
+          <a:fillRef idx="3">
+            <a:schemeClr val="accent1"/>
+          </a:fillRef>
+          <a:effectRef idx="2">
+            <a:schemeClr val="accent1"/>
+          </a:effectRef>
+          <a:fontRef idx="minor">
+            <a:schemeClr val="lt1"/>
+          </a:fontRef>
+        </p:style>
+        <p:txBody>
+          <a:bodyPr rtlCol="0" anchor="ctr"/>
+          <a:lstStyle/>
+          <a:p>
+            <a:pPr algn="ctr"/>
+          </a:p>
+        </p:txBody>
+      </p:sp>
+      <p:sp>
+        <p:nvSpPr>
+          <p:cNvPr id="4" name="TextBox 3"/>
+          <p:cNvSpPr txBox="1"/>
+          <p:nvPr/>
+        </p:nvSpPr>
+        <p:spPr>
+          <a:xfrm>
+            <a:off x="594360" y="1371600"/>
+            <a:ext cx="10972800" cy="4709160"/>
+          </a:xfrm>
+          <a:prstGeom prst="rect">
+            <a:avLst/>
+          </a:prstGeom>
+          <a:noFill/>
+        </p:spPr>
+        <p:txBody>
+          <a:bodyPr wrap="square">
+            <a:spAutoFit/>
+          </a:bodyPr>
+          <a:lstStyle/>
+          <a:p>
+            <a:pPr algn="l">
+              <a:spcAft>
+                <a:spcPts val="800"/>
+              </a:spcAft>
+            </a:pPr>
+            <a:r>
+              <a:rPr sz="1800" b="1">
+                <a:solidFill>
+                  <a:srgbClr val="1F3355"/>
+                </a:solidFill>
+                <a:latin typeface="Meiryo UI"/>
+              </a:rPr>
+              <a:t>アドレスをもらう前に通信する必要があるからです</a:t>
+            </a:r>
+          </a:p>
+          <a:p>
+            <a:pPr lvl="1" algn="l">
+              <a:spcAft>
+                <a:spcPts val="400"/>
+              </a:spcAft>
+            </a:pPr>
+            <a:r>
+              <a:rPr sz="1500" b="0">
+                <a:solidFill>
+                  <a:srgbClr val="555555"/>
+                </a:solidFill>
+                <a:latin typeface="Meiryo UI"/>
+              </a:rPr>
+              <a:t>アドレスをくれるのはルータ。でもルータと話すにはアドレスが要る → 鶏と卵</a:t>
+            </a:r>
+          </a:p>
+          <a:p>
+            <a:pPr lvl="1" algn="l">
+              <a:spcAft>
+                <a:spcPts val="400"/>
+              </a:spcAft>
+            </a:pPr>
+            <a:r>
+              <a:rPr sz="1500" b="0">
+                <a:solidFill>
+                  <a:srgbClr val="555555"/>
+                </a:solidFill>
+                <a:latin typeface="Meiryo UI"/>
+              </a:rPr>
+              <a:t>だから NIC が上がった瞬間に自分だけで作れるアドレスを必ず持つ。それが fe80::</a:t>
+            </a:r>
+          </a:p>
+          <a:p>
+            <a:pPr algn="l">
+              <a:spcAft>
+                <a:spcPts val="800"/>
+              </a:spcAft>
+            </a:pPr>
+            <a:r>
+              <a:rPr sz="1800" b="1">
+                <a:solidFill>
+                  <a:srgbClr val="1F3355"/>
+                </a:solidFill>
+                <a:latin typeface="Meiryo UI"/>
+              </a:rPr>
+              <a:t>その結果こうなります</a:t>
+            </a:r>
+          </a:p>
+          <a:p>
+            <a:pPr lvl="1" algn="l">
+              <a:spcAft>
+                <a:spcPts val="400"/>
+              </a:spcAft>
+            </a:pPr>
+            <a:r>
+              <a:rPr sz="1500" b="0">
+                <a:solidFill>
+                  <a:srgbClr val="555555"/>
+                </a:solidFill>
+                <a:latin typeface="Meiryo UI"/>
+              </a:rPr>
+              <a:t>RA も DHCPv6 も送信元は fe80::。グローバルアドレスは後から付く</a:t>
+            </a:r>
+          </a:p>
+          <a:p>
+            <a:pPr lvl="1" algn="l">
+              <a:spcAft>
+                <a:spcPts val="400"/>
+              </a:spcAft>
+            </a:pPr>
+            <a:r>
+              <a:rPr sz="1500" b="0">
+                <a:solidFill>
+                  <a:srgbClr val="555555"/>
+                </a:solidFill>
+                <a:latin typeface="Meiryo UI"/>
+              </a:rPr>
+              <a:t>既定ゲートウェイも fe80:: で指す。IPv4 のように 192.168.1.1 とは書かない</a:t>
+            </a:r>
+          </a:p>
+          <a:p>
+            <a:pPr lvl="1" algn="l">
+              <a:spcAft>
+                <a:spcPts val="400"/>
+              </a:spcAft>
+            </a:pPr>
+            <a:r>
+              <a:rPr sz="1500" b="0">
+                <a:solidFill>
+                  <a:srgbClr val="555555"/>
+                </a:solidFill>
+                <a:latin typeface="Meiryo UI"/>
+              </a:rPr>
+              <a:t>ルータ同士の経路のやり取りや隣接の会話も fe80:: が普通に使われます</a:t>
+            </a:r>
+          </a:p>
+          <a:p>
+            <a:pPr algn="l">
+              <a:spcAft>
+                <a:spcPts val="800"/>
+              </a:spcAft>
+            </a:pPr>
+            <a:r>
+              <a:rPr sz="1800" b="1">
+                <a:solidFill>
+                  <a:srgbClr val="C0392B"/>
+                </a:solidFill>
+                <a:latin typeface="Meiryo UI"/>
+              </a:rPr>
+              <a:t>だから「グローバル IPv6 が無い = 壊れている」ではありません</a:t>
+            </a:r>
+          </a:p>
+          <a:p>
+            <a:pPr lvl="1" algn="l">
+              <a:spcAft>
+                <a:spcPts val="400"/>
+              </a:spcAft>
+            </a:pPr>
+            <a:r>
+              <a:rPr sz="1500" b="0">
+                <a:solidFill>
+                  <a:srgbClr val="555555"/>
+                </a:solidFill>
+                <a:latin typeface="Meiryo UI"/>
+              </a:rPr>
+              <a:t>うちの検証環境では、VM に管理 IP を振らず fe80:: だけで SSH して構築しました</a:t>
+            </a:r>
+          </a:p>
+          <a:p>
+            <a:pPr algn="l">
+              <a:spcAft>
+                <a:spcPts val="800"/>
+              </a:spcAft>
+            </a:pPr>
+            <a:r>
+              <a:rPr sz="1800" b="1">
+                <a:solidFill>
+                  <a:srgbClr val="C0392B"/>
+                </a:solidFill>
+                <a:latin typeface="Meiryo UI"/>
+              </a:rPr>
+              <a:t>使うときの注意 — ここが最初の関門です</a:t>
+            </a:r>
+          </a:p>
+          <a:p>
+            <a:pPr lvl="1" algn="l">
+              <a:spcAft>
+                <a:spcPts val="400"/>
+              </a:spcAft>
+            </a:pPr>
+            <a:r>
+              <a:rPr sz="1500" b="0">
+                <a:solidFill>
+                  <a:srgbClr val="555555"/>
+                </a:solidFill>
+                <a:latin typeface="Meiryo UI"/>
+              </a:rPr>
+              <a:t>fe80:: は「同じリンクの中だけ」のアドレスなので、同じ番号が別の線にもあります</a:t>
+            </a:r>
+          </a:p>
+          <a:p>
+            <a:pPr lvl="1" algn="l">
+              <a:spcAft>
+                <a:spcPts val="400"/>
+              </a:spcAft>
+            </a:pPr>
+            <a:r>
+              <a:rPr sz="1500" b="0">
+                <a:solidFill>
+                  <a:srgbClr val="555555"/>
+                </a:solidFill>
+                <a:latin typeface="Meiryo UI"/>
+              </a:rPr>
+              <a:t>だから「どの線から出すか」を必ず一緒に書きます。それが % のうしろです</a:t>
+            </a:r>
+          </a:p>
+          <a:p>
+            <a:pPr lvl="1" algn="l">
+              <a:spcAft>
+                <a:spcPts val="400"/>
+              </a:spcAft>
+            </a:pPr>
+            <a:r>
+              <a:rPr sz="1500" b="0">
+                <a:solidFill>
+                  <a:srgbClr val="0B6040"/>
+                </a:solidFill>
+                <a:latin typeface="Consolas"/>
+              </a:rPr>
+              <a:t>ping6 fe80::1%eth0    ← eth0 という線から出す、という意味</a:t>
+            </a:r>
+          </a:p>
+          <a:p>
+            <a:pPr algn="l">
+              <a:spcAft>
+                <a:spcPts val="800"/>
+              </a:spcAft>
+            </a:pPr>
+            <a:r>
+              <a:rPr sz="1800" b="0">
+                <a:solidFill>
+                  <a:srgbClr val="1F3355"/>
+                </a:solidFill>
+                <a:latin typeface="Meiryo UI"/>
+              </a:rPr>
+              <a:t>あわせて: 1 枚の NIC に fe80:: とグローバルが同時に付く。これが「複数が当たり前」の中身です</a:t>
+            </a:r>
+          </a:p>
+        </p:txBody>
+      </p:sp>
+      <p:sp>
+        <p:nvSpPr>
+          <p:cNvPr id="5" name="TextBox 4"/>
+          <p:cNvSpPr txBox="1"/>
+          <p:nvPr/>
+        </p:nvSpPr>
+        <p:spPr>
+          <a:xfrm>
+            <a:off x="594360" y="6217920"/>
+            <a:ext cx="10972800" cy="502920"/>
+          </a:xfrm>
+          <a:prstGeom prst="rect">
+            <a:avLst/>
+          </a:prstGeom>
+          <a:noFill/>
+        </p:spPr>
+        <p:txBody>
+          <a:bodyPr wrap="square">
+            <a:spAutoFit/>
+          </a:bodyPr>
+          <a:lstStyle/>
+          <a:p>
+            <a:pPr algn="l"/>
+            <a:r>
+              <a:rPr sz="1200" b="0">
+                <a:solidFill>
+                  <a:srgbClr val="007ACC"/>
+                </a:solidFill>
+                <a:latin typeface="Meiryo UI"/>
+              </a:rPr>
+              <a:t>教科書: 3.5「リンクローカルユニキャストアドレス」(p.74) / 3.6「スコープのゾーン」(p.76) / 2.9 (p.48)</a:t>
+            </a:r>
+          </a:p>
+        </p:txBody>
+      </p:sp>
+    </p:spTree>
+  </p:cSld>
+  <p:clrMapOvr>
+    <a:masterClrMapping/>
+  </p:clrMapOvr>
+</p:sld>
+</file>
+
+<file path=ppt/slides/slide14.xml><?xml version="1.0" encoding="utf-8"?>
+<p:sld xmlns:a="http://schemas.openxmlformats.org/drawingml/2006/main" xmlns:p="http://schemas.openxmlformats.org/presentationml/2006/main" xmlns:r="http://schemas.openxmlformats.org/officeDocument/2006/relationships">
+  <p:cSld>
+    <p:spTree>
+      <p:nvGrpSpPr>
+        <p:cNvPr id="1" name=""/>
+        <p:cNvGrpSpPr/>
+        <p:nvPr/>
+      </p:nvGrpSpPr>
+      <p:grpSpPr/>
+      <p:sp>
+        <p:nvSpPr>
+          <p:cNvPr id="2" name="TextBox 1"/>
+          <p:cNvSpPr txBox="1"/>
+          <p:nvPr/>
+        </p:nvSpPr>
+        <p:spPr>
+          <a:xfrm>
+            <a:off x="502920" y="320040"/>
+            <a:ext cx="11155680" cy="822960"/>
+          </a:xfrm>
+          <a:prstGeom prst="rect">
+            <a:avLst/>
+          </a:prstGeom>
+          <a:noFill/>
+        </p:spPr>
+        <p:txBody>
+          <a:bodyPr wrap="square">
+            <a:spAutoFit/>
+          </a:bodyPr>
+          <a:lstStyle/>
+          <a:p>
+            <a:pPr algn="l"/>
+            <a:r>
+              <a:rPr sz="2800" b="1">
+                <a:solidFill>
+                  <a:srgbClr val="1F3355"/>
+                </a:solidFill>
+                <a:latin typeface="Meiryo UI"/>
+              </a:rPr>
+              <a:t>アドレスはどうやって決まるのか</a:t>
+            </a:r>
+          </a:p>
+        </p:txBody>
+      </p:sp>
+      <p:sp>
+        <p:nvSpPr>
+          <p:cNvPr id="3" name="Rectangle 2"/>
+          <p:cNvSpPr/>
+          <p:nvPr/>
+        </p:nvSpPr>
+        <p:spPr>
+          <a:xfrm>
+            <a:off x="502920" y="1115568"/>
+            <a:ext cx="11155680" cy="31750"/>
+          </a:xfrm>
+          <a:prstGeom prst="rect">
+            <a:avLst/>
+          </a:prstGeom>
+          <a:solidFill>
+            <a:srgbClr val="007ACC"/>
+          </a:solidFill>
+          <a:ln>
+            <a:noFill/>
+          </a:ln>
+        </p:spPr>
+        <p:style>
+          <a:lnRef idx="1">
+            <a:schemeClr val="accent1"/>
+          </a:lnRef>
+          <a:fillRef idx="3">
+            <a:schemeClr val="accent1"/>
+          </a:fillRef>
+          <a:effectRef idx="2">
+            <a:schemeClr val="accent1"/>
+          </a:effectRef>
+          <a:fontRef idx="minor">
+            <a:schemeClr val="lt1"/>
+          </a:fontRef>
+        </p:style>
+        <p:txBody>
+          <a:bodyPr rtlCol="0" anchor="ctr"/>
+          <a:lstStyle/>
+          <a:p>
+            <a:pPr algn="ctr"/>
+          </a:p>
+        </p:txBody>
+      </p:sp>
+      <p:sp>
+        <p:nvSpPr>
+          <p:cNvPr id="4" name="TextBox 3"/>
+          <p:cNvSpPr txBox="1"/>
+          <p:nvPr/>
+        </p:nvSpPr>
+        <p:spPr>
+          <a:xfrm>
+            <a:off x="594360" y="1371600"/>
+            <a:ext cx="10972800" cy="4709160"/>
+          </a:xfrm>
+          <a:prstGeom prst="rect">
+            <a:avLst/>
+          </a:prstGeom>
+          <a:noFill/>
+        </p:spPr>
+        <p:txBody>
+          <a:bodyPr wrap="square">
+            <a:spAutoFit/>
+          </a:bodyPr>
+          <a:lstStyle/>
+          <a:p>
+            <a:pPr algn="l">
+              <a:spcAft>
+                <a:spcPts val="1000"/>
+              </a:spcAft>
+            </a:pPr>
+            <a:r>
+              <a:rPr sz="2000" b="1">
+                <a:solidFill>
+                  <a:srgbClr val="1F3355"/>
+                </a:solidFill>
+                <a:latin typeface="Meiryo UI"/>
+              </a:rPr>
+              <a:t>ルータが「私がゲートウェイだよ」と自分から言いに来ます</a:t>
+            </a:r>
+          </a:p>
+          <a:p>
+            <a:pPr lvl="1" algn="l">
+              <a:spcAft>
+                <a:spcPts val="600"/>
+              </a:spcAft>
+            </a:pPr>
+            <a:r>
+              <a:rPr sz="1700" b="0">
+                <a:solidFill>
+                  <a:srgbClr val="555555"/>
+                </a:solidFill>
+                <a:latin typeface="Meiryo UI"/>
+              </a:rPr>
+              <a:t>① 端末が「ルータいますか」と聞く</a:t>
+            </a:r>
+          </a:p>
+          <a:p>
+            <a:pPr lvl="1" algn="l">
+              <a:spcAft>
+                <a:spcPts val="600"/>
+              </a:spcAft>
+            </a:pPr>
+            <a:r>
+              <a:rPr sz="1700" b="0">
+                <a:solidFill>
+                  <a:srgbClr val="555555"/>
+                </a:solidFill>
+                <a:latin typeface="Meiryo UI"/>
+              </a:rPr>
+              <a:t>② ルータが「私がいます。住所の前半はこれです」と答える ← これが RA</a:t>
+            </a:r>
+          </a:p>
+          <a:p>
+            <a:pPr lvl="1" algn="l">
+              <a:spcAft>
+                <a:spcPts val="600"/>
+              </a:spcAft>
+            </a:pPr>
+            <a:r>
+              <a:rPr sz="1700" b="0">
+                <a:solidFill>
+                  <a:srgbClr val="555555"/>
+                </a:solidFill>
+                <a:latin typeface="Meiryo UI"/>
+              </a:rPr>
+              <a:t>③ 端末が住所の後半を自分で作ってアドレスを完成させる ← これを自動設定と呼びます</a:t>
+            </a:r>
+          </a:p>
+          <a:p>
+            <a:pPr algn="l">
+              <a:spcAft>
+                <a:spcPts val="1000"/>
+              </a:spcAft>
+            </a:pPr>
+            <a:r>
+              <a:rPr sz="2000" b="1">
+                <a:solidFill>
+                  <a:srgbClr val="1F3355"/>
+                </a:solidFill>
+                <a:latin typeface="Meiryo UI"/>
+              </a:rPr>
+              <a:t>IPv4 の DHCP と何が違うのか</a:t>
+            </a:r>
+          </a:p>
+          <a:p>
+            <a:pPr lvl="1" algn="l">
+              <a:spcAft>
+                <a:spcPts val="600"/>
+              </a:spcAft>
+            </a:pPr>
+            <a:r>
+              <a:rPr sz="1700" b="0">
+                <a:solidFill>
+                  <a:srgbClr val="555555"/>
+                </a:solidFill>
+                <a:latin typeface="Meiryo UI"/>
+              </a:rPr>
+              <a:t>IPv4 … 端末が聞きに行って、サーバが住所をまるごと渡す</a:t>
+            </a:r>
+          </a:p>
+          <a:p>
+            <a:pPr lvl="1" algn="l">
+              <a:spcAft>
+                <a:spcPts val="600"/>
+              </a:spcAft>
+            </a:pPr>
+            <a:r>
+              <a:rPr sz="1700" b="0">
+                <a:solidFill>
+                  <a:srgbClr val="555555"/>
+                </a:solidFill>
+                <a:latin typeface="Meiryo UI"/>
+              </a:rPr>
+              <a:t>IPv6 … ルータが前半だけ配って、後半は端末が自分で決める</a:t>
+            </a:r>
+          </a:p>
+          <a:p>
+            <a:pPr algn="l">
+              <a:spcAft>
+                <a:spcPts val="1000"/>
+              </a:spcAft>
+            </a:pPr>
+            <a:r>
+              <a:rPr sz="2000" b="1">
+                <a:solidFill>
+                  <a:srgbClr val="C0392B"/>
+                </a:solidFill>
+                <a:latin typeface="Meiryo UI"/>
+              </a:rPr>
+              <a:t>よくある誤解: 「アドレスが 2 つ以上付いている」のは正常です</a:t>
+            </a:r>
+          </a:p>
+          <a:p>
+            <a:pPr lvl="1" algn="l">
+              <a:spcAft>
+                <a:spcPts val="600"/>
+              </a:spcAft>
+            </a:pPr>
+            <a:r>
+              <a:rPr sz="1700" b="0">
+                <a:solidFill>
+                  <a:srgbClr val="555555"/>
+                </a:solidFill>
+                <a:latin typeface="Meiryo UI"/>
+              </a:rPr>
+              <a:t>住所を配る係 (DHCPv6) を併用しても、自分で作るのは止まりません。両方動きます</a:t>
+            </a:r>
+          </a:p>
+          <a:p>
+            <a:pPr algn="l">
+              <a:spcAft>
+                <a:spcPts val="1000"/>
+              </a:spcAft>
+            </a:pPr>
+            <a:r>
+              <a:rPr sz="2000" b="1">
+                <a:solidFill>
+                  <a:srgbClr val="1F3355"/>
+                </a:solidFill>
+                <a:latin typeface="Meiryo UI"/>
+              </a:rPr>
+              <a:t>ルータがもらう /56 は別の話。アドレスではなく「住所の前半」をまとめて借りるものです</a:t>
+            </a:r>
+          </a:p>
+        </p:txBody>
+      </p:sp>
+      <p:sp>
+        <p:nvSpPr>
+          <p:cNvPr id="5" name="TextBox 4"/>
+          <p:cNvSpPr txBox="1"/>
+          <p:nvPr/>
+        </p:nvSpPr>
+        <p:spPr>
+          <a:xfrm>
+            <a:off x="594360" y="6217920"/>
+            <a:ext cx="10972800" cy="502920"/>
+          </a:xfrm>
+          <a:prstGeom prst="rect">
+            <a:avLst/>
+          </a:prstGeom>
+          <a:noFill/>
+        </p:spPr>
+        <p:txBody>
+          <a:bodyPr wrap="square">
+            <a:spAutoFit/>
+          </a:bodyPr>
+          <a:lstStyle/>
+          <a:p>
+            <a:pPr algn="l"/>
+            <a:r>
+              <a:rPr sz="1200" b="0">
+                <a:solidFill>
+                  <a:srgbClr val="007ACC"/>
+                </a:solidFill>
+                <a:latin typeface="Meiryo UI"/>
+              </a:rPr>
+              <a:t>教科書: 第6章 (p.127) / 7.1「SLAAC の流れ」(p.160) / 第8章「DHCPv6」(p.179) / 8.7 (p.201)</a:t>
+            </a:r>
+          </a:p>
+        </p:txBody>
+      </p:sp>
+    </p:spTree>
+  </p:cSld>
+  <p:clrMapOvr>
+    <a:masterClrMapping/>
+  </p:clrMapOvr>
+</p:sld>
+</file>
+
+<file path=ppt/slides/slide15.xml><?xml version="1.0" encoding="utf-8"?>
 <p:sld xmlns:a="http://schemas.openxmlformats.org/drawingml/2006/main" xmlns:p="http://schemas.openxmlformats.org/presentationml/2006/main" xmlns:r="http://schemas.openxmlformats.org/officeDocument/2006/relationships">
   <p:cSld>
     <p:spTree>
@@ -4440,7 +5057,7 @@
 </p:sld>
 </file>
 
-<file path=ppt/slides/slide14.xml><?xml version="1.0" encoding="utf-8"?>
+<file path=ppt/slides/slide16.xml><?xml version="1.0" encoding="utf-8"?>
 <p:sld xmlns:a="http://schemas.openxmlformats.org/drawingml/2006/main" xmlns:p="http://schemas.openxmlformats.org/presentationml/2006/main" xmlns:r="http://schemas.openxmlformats.org/officeDocument/2006/relationships">
   <p:cSld>
     <p:spTree>
@@ -4977,7 +5594,7 @@
 </p:sld>
 </file>
 
-<file path=ppt/slides/slide15.xml><?xml version="1.0" encoding="utf-8"?>
+<file path=ppt/slides/slide17.xml><?xml version="1.0" encoding="utf-8"?>
 <p:sld xmlns:a="http://schemas.openxmlformats.org/drawingml/2006/main" xmlns:p="http://schemas.openxmlformats.org/presentationml/2006/main" xmlns:r="http://schemas.openxmlformats.org/officeDocument/2006/relationships">
   <p:cSld>
     <p:spTree>
@@ -5459,7 +6076,7 @@
 </p:sld>
 </file>
 
-<file path=ppt/slides/slide16.xml><?xml version="1.0" encoding="utf-8"?>
+<file path=ppt/slides/slide18.xml><?xml version="1.0" encoding="utf-8"?>
 <p:sld xmlns:a="http://schemas.openxmlformats.org/drawingml/2006/main" xmlns:p="http://schemas.openxmlformats.org/presentationml/2006/main" xmlns:r="http://schemas.openxmlformats.org/officeDocument/2006/relationships">
   <p:cSld>
     <p:spTree>
@@ -6142,7 +6759,7 @@
 </p:sld>
 </file>
 
-<file path=ppt/slides/slide17.xml><?xml version="1.0" encoding="utf-8"?>
+<file path=ppt/slides/slide19.xml><?xml version="1.0" encoding="utf-8"?>
 <p:sld xmlns:a="http://schemas.openxmlformats.org/drawingml/2006/main" xmlns:p="http://schemas.openxmlformats.org/presentationml/2006/main" xmlns:r="http://schemas.openxmlformats.org/officeDocument/2006/relationships">
   <p:cSld>
     <p:spTree>
@@ -7010,7 +7627,7 @@
 </p:sld>
 </file>
 
-<file path=ppt/slides/slide18.xml><?xml version="1.0" encoding="utf-8"?>
+<file path=ppt/slides/slide2.xml><?xml version="1.0" encoding="utf-8"?>
 <p:sld xmlns:a="http://schemas.openxmlformats.org/drawingml/2006/main" xmlns:p="http://schemas.openxmlformats.org/presentationml/2006/main" xmlns:r="http://schemas.openxmlformats.org/officeDocument/2006/relationships">
   <p:cSld>
     <p:spTree>
@@ -7093,7 +7710,7 @@
                 </a:solidFill>
                 <a:latin typeface="Meiryo UI"/>
               </a:rPr>
-              <a:t>第3部</a:t>
+              <a:t>第0部</a:t>
             </a:r>
           </a:p>
           <a:p>
@@ -7105,7 +7722,7 @@
                 </a:solidFill>
                 <a:latin typeface="Meiryo UI"/>
               </a:rPr>
-              <a:t>IPv4 をどうやって運ぶか — 今日の本題</a:t>
+              <a:t>なぜこの話をするのか</a:t>
             </a:r>
           </a:p>
           <a:p>
@@ -7121,7 +7738,7 @@
                 </a:solidFill>
                 <a:latin typeface="Meiryo UI"/>
               </a:rPr>
-              <a:t>ゴール: ここが分かれば「ポート開放できますか?」に即答できます</a:t>
+              <a:t>ゴール: 今日の地図と、出てくる言葉を先に配ります</a:t>
             </a:r>
           </a:p>
         </p:txBody>
@@ -7134,7 +7751,7 @@
 </p:sld>
 </file>
 
-<file path=ppt/slides/slide19.xml><?xml version="1.0" encoding="utf-8"?>
+<file path=ppt/slides/slide20.xml><?xml version="1.0" encoding="utf-8"?>
 <p:sld xmlns:a="http://schemas.openxmlformats.org/drawingml/2006/main" xmlns:p="http://schemas.openxmlformats.org/presentationml/2006/main" xmlns:r="http://schemas.openxmlformats.org/officeDocument/2006/relationships">
   <p:cSld>
     <p:spTree>
@@ -7174,7 +7791,7 @@
                 </a:solidFill>
                 <a:latin typeface="Meiryo UI"/>
               </a:rPr>
-              <a:t>なぜわざわざ IPv4 を IPv6 に載せ替えるのか</a:t>
+              <a:t>この表を使う前に — 2 つ確認してください</a:t>
             </a:r>
           </a:p>
         </p:txBody>
@@ -7231,7 +7848,7 @@
         <p:spPr>
           <a:xfrm>
             <a:off x="594360" y="1371600"/>
-            <a:ext cx="10972800" cy="4709160"/>
+            <a:ext cx="10972800" cy="4983480"/>
           </a:xfrm>
           <a:prstGeom prst="rect">
             <a:avLst/>
@@ -7256,7 +7873,7 @@
                 </a:solidFill>
                 <a:latin typeface="Meiryo UI"/>
               </a:rPr>
-              <a:t>社内が IPv4 のままだからです</a:t>
+              <a:t>① お客様のルータが、その方式に対応しているか</a:t>
             </a:r>
           </a:p>
           <a:p>
@@ -7266,13 +7883,61 @@
               </a:spcAft>
             </a:pPr>
             <a:r>
+              <a:rPr sz="1700" b="1">
+                <a:solidFill>
+                  <a:srgbClr val="C0392B"/>
+                </a:solidFill>
+                <a:latin typeface="Meiryo UI"/>
+              </a:rPr>
+              <a:t>Cisco 892FJ は古い IOS なので MAP-E に対応していません (DS-Lite は可)</a:t>
+            </a:r>
+          </a:p>
+          <a:p>
+            <a:pPr lvl="1" algn="l">
+              <a:spcAft>
+                <a:spcPts val="600"/>
+              </a:spcAft>
+            </a:pPr>
+            <a:r>
+              <a:rPr sz="1700" b="1">
+                <a:solidFill>
+                  <a:srgbClr val="C0392B"/>
+                </a:solidFill>
+                <a:latin typeface="Meiryo UI"/>
+              </a:rPr>
+              <a:t>892FJ の納入拠点で MAP-E 系の VNE だと、機器リプレース前提の見積になります</a:t>
+            </a:r>
+          </a:p>
+          <a:p>
+            <a:pPr lvl="1" algn="l">
+              <a:spcAft>
+                <a:spcPts val="600"/>
+              </a:spcAft>
+            </a:pPr>
+            <a:r>
               <a:rPr sz="1700" b="0">
                 <a:solidFill>
                   <a:srgbClr val="555555"/>
                 </a:solidFill>
                 <a:latin typeface="Meiryo UI"/>
               </a:rPr>
-              <a:t>IPoE で降りてくるのは IPv6 だけ</a:t>
+              <a:t>市販ルータは各社が対応表を出しています。方式が分かってから機種を確認する順番で</a:t>
+            </a:r>
+          </a:p>
+          <a:p>
+            <a:pPr algn="l">
+              <a:spcAft>
+                <a:spcPts val="1000"/>
+              </a:spcAft>
+            </a:pPr>
+            <a:r>
+              <a:rPr sz="2000" b="1">
+                <a:solidFill>
+                  <a:srgbClr val="1F3355"/>
+                </a:solidFill>
+                <a:latin typeface="Meiryo UI"/>
+              </a:rPr>
+              <a:t>② VNE をどうやって特定するか (お客様は「VNE はどこ?」に答えられません)</a:t>
             </a:r>
           </a:p>
           <a:p>
@@ -7288,7 +7953,7 @@
                 </a:solidFill>
                 <a:latin typeface="Meiryo UI"/>
               </a:rPr>
-              <a:t>でも社内の機器も、行き先のサイトも、まだ IPv4 が要る</a:t>
+              <a:t>ひかり電話の請求があるか → /64 か /56 かが分かります</a:t>
             </a:r>
           </a:p>
           <a:p>
@@ -7304,23 +7969,7 @@
                 </a:solidFill>
                 <a:latin typeface="Meiryo UI"/>
               </a:rPr>
-              <a:t>だから IPv4 のパケットを IPv6 のパケットの中に入れて運びます</a:t>
-            </a:r>
-          </a:p>
-          <a:p>
-            <a:pPr algn="l">
-              <a:spcAft>
-                <a:spcPts val="1000"/>
-              </a:spcAft>
-            </a:pPr>
-            <a:r>
-              <a:rPr sz="2000" b="1">
-                <a:solidFill>
-                  <a:srgbClr val="1F3355"/>
-                </a:solidFill>
-                <a:latin typeface="Meiryo UI"/>
-              </a:rPr>
-              <a:t>宅配便でいうと</a:t>
+              <a:t>ISP の契約書かマイページで「IPv6 接続サービス」の名称を見せてもらう</a:t>
             </a:r>
           </a:p>
           <a:p>
@@ -7336,7 +7985,7 @@
                 </a:solidFill>
                 <a:latin typeface="Meiryo UI"/>
               </a:rPr>
-              <a:t>IPv4 の荷物を IPv6 の箱に詰めて送るイメージです</a:t>
+              <a:t>そこに v6プラス / transix / OCN バーチャルコネクト などの名前が出ます</a:t>
             </a:r>
           </a:p>
           <a:p>
@@ -7346,96 +7995,13 @@
               </a:spcAft>
             </a:pPr>
             <a:r>
-              <a:rPr sz="1700" b="0">
-                <a:solidFill>
-                  <a:srgbClr val="555555"/>
-                </a:solidFill>
-                <a:latin typeface="Meiryo UI"/>
-              </a:rPr>
-              <a:t>受け取る側 (網の中の装置) が箱を開けて、中の IPv4 をインターネットに流します</a:t>
-            </a:r>
-          </a:p>
-          <a:p>
-            <a:pPr algn="l">
-              <a:spcAft>
-                <a:spcPts val="1000"/>
-              </a:spcAft>
-            </a:pPr>
-            <a:r>
-              <a:rPr sz="2000" b="1">
-                <a:solidFill>
-                  <a:srgbClr val="1F3355"/>
-                </a:solidFill>
-                <a:latin typeface="Meiryo UI"/>
-              </a:rPr>
-              <a:t>この「箱の詰め方」の流儀が 2 つあります</a:t>
-            </a:r>
-          </a:p>
-          <a:p>
-            <a:pPr lvl="1" algn="l">
-              <a:spcAft>
-                <a:spcPts val="600"/>
-              </a:spcAft>
-            </a:pPr>
-            <a:r>
-              <a:rPr sz="1700" b="0">
-                <a:solidFill>
-                  <a:srgbClr val="555555"/>
-                </a:solidFill>
-                <a:latin typeface="Meiryo UI"/>
-              </a:rPr>
-              <a:t>MAP-E … 箱に詰めるのも NAT も CPE がやる</a:t>
-            </a:r>
-          </a:p>
-          <a:p>
-            <a:pPr lvl="1" algn="l">
-              <a:spcAft>
-                <a:spcPts val="600"/>
-              </a:spcAft>
-            </a:pPr>
-            <a:r>
-              <a:rPr sz="1700" b="0">
-                <a:solidFill>
-                  <a:srgbClr val="555555"/>
-                </a:solidFill>
-                <a:latin typeface="Meiryo UI"/>
-              </a:rPr>
-              <a:t>DS-Lite … 箱に詰めるのは CPE、NAT は網側がやる</a:t>
-            </a:r>
-          </a:p>
-        </p:txBody>
-      </p:sp>
-      <p:sp>
-        <p:nvSpPr>
-          <p:cNvPr id="5" name="TextBox 4"/>
-          <p:cNvSpPr txBox="1"/>
-          <p:nvPr/>
-        </p:nvSpPr>
-        <p:spPr>
-          <a:xfrm>
-            <a:off x="594360" y="6217920"/>
-            <a:ext cx="10972800" cy="502920"/>
-          </a:xfrm>
-          <a:prstGeom prst="rect">
-            <a:avLst/>
-          </a:prstGeom>
-          <a:noFill/>
-        </p:spPr>
-        <p:txBody>
-          <a:bodyPr wrap="square">
-            <a:spAutoFit/>
-          </a:bodyPr>
-          <a:lstStyle/>
-          <a:p>
-            <a:pPr algn="l"/>
-            <a:r>
-              <a:rPr sz="1100" b="0">
-                <a:solidFill>
-                  <a:srgbClr val="007ACC"/>
-                </a:solidFill>
-                <a:latin typeface="Meiryo UI"/>
-              </a:rPr>
-              <a:t>教科書: 第24章「IPv4/IPv6 共存技術の運用形態」24.1〜24.4(p.421〜) / 第21章「IPv4/IPv6 共存技術の分類」21.1(p.381)</a:t>
+              <a:rPr sz="1700" b="1">
+                <a:solidFill>
+                  <a:srgbClr val="C0392B"/>
+                </a:solidFill>
+                <a:latin typeface="Meiryo UI"/>
+              </a:rPr>
+              <a:t>分からなければ開通後に実測。ただし それでは見積が書けないので契約書を先に当たること</a:t>
             </a:r>
           </a:p>
         </p:txBody>
@@ -7448,7 +8014,7 @@
 </p:sld>
 </file>
 
-<file path=ppt/slides/slide2.xml><?xml version="1.0" encoding="utf-8"?>
+<file path=ppt/slides/slide21.xml><?xml version="1.0" encoding="utf-8"?>
 <p:sld xmlns:a="http://schemas.openxmlformats.org/drawingml/2006/main" xmlns:p="http://schemas.openxmlformats.org/presentationml/2006/main" xmlns:r="http://schemas.openxmlformats.org/officeDocument/2006/relationships">
   <p:cSld>
     <p:spTree>
@@ -7531,7 +8097,7 @@
                 </a:solidFill>
                 <a:latin typeface="Meiryo UI"/>
               </a:rPr>
-              <a:t>第0部</a:t>
+              <a:t>第3部</a:t>
             </a:r>
           </a:p>
           <a:p>
@@ -7543,7 +8109,7 @@
                 </a:solidFill>
                 <a:latin typeface="Meiryo UI"/>
               </a:rPr>
-              <a:t>なぜこの話をするのか</a:t>
+              <a:t>IPv4 をどうやって運ぶか — 今日の本題</a:t>
             </a:r>
           </a:p>
           <a:p>
@@ -7559,7 +8125,7 @@
                 </a:solidFill>
                 <a:latin typeface="Meiryo UI"/>
               </a:rPr>
-              <a:t>ゴール: 今日の地図と、出てくる言葉を先に配ります</a:t>
+              <a:t>ゴール: ここが分かれば「ポート開放できますか?」に即答できます</a:t>
             </a:r>
           </a:p>
         </p:txBody>
@@ -7572,7 +8138,7 @@
 </p:sld>
 </file>
 
-<file path=ppt/slides/slide20.xml><?xml version="1.0" encoding="utf-8"?>
+<file path=ppt/slides/slide22.xml><?xml version="1.0" encoding="utf-8"?>
 <p:sld xmlns:a="http://schemas.openxmlformats.org/drawingml/2006/main" xmlns:p="http://schemas.openxmlformats.org/presentationml/2006/main" xmlns:r="http://schemas.openxmlformats.org/officeDocument/2006/relationships">
   <p:cSld>
     <p:spTree>
@@ -7612,7 +8178,7 @@
                 </a:solidFill>
                 <a:latin typeface="Meiryo UI"/>
               </a:rPr>
-              <a:t>DS-Lite — お客様のルータは包むだけ、変換は網がやる</a:t>
+              <a:t>なぜわざわざ IPv4 を IPv6 に載せ替えるのか</a:t>
             </a:r>
           </a:p>
         </p:txBody>
@@ -7684,177 +8250,161 @@
           <a:p>
             <a:pPr algn="l">
               <a:spcAft>
-                <a:spcPts val="900"/>
-              </a:spcAft>
-            </a:pPr>
-            <a:r>
-              <a:rPr sz="1900" b="0">
-                <a:solidFill>
-                  <a:srgbClr val="0B6040"/>
-                </a:solidFill>
-                <a:latin typeface="Consolas"/>
-              </a:rPr>
-              <a:t>PC → お客様のルータで IPv6 の箱に詰める → 網側の装置で箱を開けて変換 → インターネット</a:t>
+                <a:spcPts val="1000"/>
+              </a:spcAft>
+            </a:pPr>
+            <a:r>
+              <a:rPr sz="2000" b="1">
+                <a:solidFill>
+                  <a:srgbClr val="1F3355"/>
+                </a:solidFill>
+                <a:latin typeface="Meiryo UI"/>
+              </a:rPr>
+              <a:t>社内が IPv4 のままだからです</a:t>
+            </a:r>
+          </a:p>
+          <a:p>
+            <a:pPr lvl="1" algn="l">
+              <a:spcAft>
+                <a:spcPts val="600"/>
+              </a:spcAft>
+            </a:pPr>
+            <a:r>
+              <a:rPr sz="1700" b="0">
+                <a:solidFill>
+                  <a:srgbClr val="555555"/>
+                </a:solidFill>
+                <a:latin typeface="Meiryo UI"/>
+              </a:rPr>
+              <a:t>IPoE で降りてくるのは IPv6 だけ</a:t>
+            </a:r>
+          </a:p>
+          <a:p>
+            <a:pPr lvl="1" algn="l">
+              <a:spcAft>
+                <a:spcPts val="600"/>
+              </a:spcAft>
+            </a:pPr>
+            <a:r>
+              <a:rPr sz="1700" b="0">
+                <a:solidFill>
+                  <a:srgbClr val="555555"/>
+                </a:solidFill>
+                <a:latin typeface="Meiryo UI"/>
+              </a:rPr>
+              <a:t>でも社内の機器も、行き先のサイトも、まだ IPv4 が要る</a:t>
+            </a:r>
+          </a:p>
+          <a:p>
+            <a:pPr lvl="1" algn="l">
+              <a:spcAft>
+                <a:spcPts val="600"/>
+              </a:spcAft>
+            </a:pPr>
+            <a:r>
+              <a:rPr sz="1700" b="0">
+                <a:solidFill>
+                  <a:srgbClr val="555555"/>
+                </a:solidFill>
+                <a:latin typeface="Meiryo UI"/>
+              </a:rPr>
+              <a:t>だから IPv4 のパケットを IPv6 のパケットの中に入れて運びます</a:t>
             </a:r>
           </a:p>
           <a:p>
             <a:pPr algn="l">
               <a:spcAft>
-                <a:spcPts val="900"/>
-              </a:spcAft>
-            </a:pPr>
-            <a:r>
-              <a:rPr sz="1900" b="1">
+                <a:spcPts val="1000"/>
+              </a:spcAft>
+            </a:pPr>
+            <a:r>
+              <a:rPr sz="2000" b="1">
                 <a:solidFill>
                   <a:srgbClr val="1F3355"/>
                 </a:solidFill>
                 <a:latin typeface="Meiryo UI"/>
               </a:rPr>
-              <a:t>冒頭の宅配便で「出口の業者が仕分けする」と言ったのが、これです</a:t>
+              <a:t>宅配便でいうと</a:t>
+            </a:r>
+          </a:p>
+          <a:p>
+            <a:pPr lvl="1" algn="l">
+              <a:spcAft>
+                <a:spcPts val="600"/>
+              </a:spcAft>
+            </a:pPr>
+            <a:r>
+              <a:rPr sz="1700" b="0">
+                <a:solidFill>
+                  <a:srgbClr val="555555"/>
+                </a:solidFill>
+                <a:latin typeface="Meiryo UI"/>
+              </a:rPr>
+              <a:t>IPv4 の荷物を IPv6 の箱に詰めて送るイメージです</a:t>
+            </a:r>
+          </a:p>
+          <a:p>
+            <a:pPr lvl="1" algn="l">
+              <a:spcAft>
+                <a:spcPts val="600"/>
+              </a:spcAft>
+            </a:pPr>
+            <a:r>
+              <a:rPr sz="1700" b="0">
+                <a:solidFill>
+                  <a:srgbClr val="555555"/>
+                </a:solidFill>
+                <a:latin typeface="Meiryo UI"/>
+              </a:rPr>
+              <a:t>受け取る側 (網の中の装置) が箱を開けて、中の IPv4 をインターネットに流します</a:t>
             </a:r>
           </a:p>
           <a:p>
             <a:pPr algn="l">
               <a:spcAft>
-                <a:spcPts val="900"/>
-              </a:spcAft>
-            </a:pPr>
-            <a:r>
-              <a:rPr sz="1900" b="1">
+                <a:spcPts val="1000"/>
+              </a:spcAft>
+            </a:pPr>
+            <a:r>
+              <a:rPr sz="2000" b="1">
                 <a:solidFill>
                   <a:srgbClr val="1F3355"/>
                 </a:solidFill>
                 <a:latin typeface="Meiryo UI"/>
               </a:rPr>
-              <a:t>特徴</a:t>
+              <a:t>この「箱の詰め方」の流儀が 2 つあります</a:t>
             </a:r>
           </a:p>
           <a:p>
             <a:pPr lvl="1" algn="l">
               <a:spcAft>
-                <a:spcPts val="500"/>
-              </a:spcAft>
-            </a:pPr>
-            <a:r>
-              <a:rPr sz="1600" b="0">
+                <a:spcPts val="600"/>
+              </a:spcAft>
+            </a:pPr>
+            <a:r>
+              <a:rPr sz="1700" b="0">
                 <a:solidFill>
                   <a:srgbClr val="555555"/>
                 </a:solidFill>
                 <a:latin typeface="Meiryo UI"/>
               </a:rPr>
-              <a:t>お客様のルータは アドレスの書き換え (NAT) をしません。ただの入口になるだけです</a:t>
+              <a:t>MAP-E … 箱に詰めるのも NAT も CPE がやる</a:t>
             </a:r>
           </a:p>
           <a:p>
             <a:pPr lvl="1" algn="l">
               <a:spcAft>
-                <a:spcPts val="500"/>
-              </a:spcAft>
-            </a:pPr>
-            <a:r>
-              <a:rPr sz="1600" b="0">
+                <a:spcPts val="600"/>
+              </a:spcAft>
+            </a:pPr>
+            <a:r>
+              <a:rPr sz="1700" b="0">
                 <a:solidFill>
                   <a:srgbClr val="555555"/>
                 </a:solidFill>
                 <a:latin typeface="Meiryo UI"/>
               </a:rPr>
-              <a:t>変換は網側の装置 (AFTR) がまとめてやります</a:t>
-            </a:r>
-          </a:p>
-          <a:p>
-            <a:pPr lvl="1" algn="l">
-              <a:spcAft>
-                <a:spcPts val="500"/>
-              </a:spcAft>
-            </a:pPr>
-            <a:r>
-              <a:rPr sz="1600" b="0">
-                <a:solidFill>
-                  <a:srgbClr val="555555"/>
-                </a:solidFill>
-                <a:latin typeface="Meiryo UI"/>
-              </a:rPr>
-              <a:t>だから お客様のルータの負荷が軽く、設定も簡単です</a:t>
-            </a:r>
-          </a:p>
-          <a:p>
-            <a:pPr algn="l">
-              <a:spcAft>
-                <a:spcPts val="900"/>
-              </a:spcAft>
-            </a:pPr>
-            <a:r>
-              <a:rPr sz="1900" b="1">
-                <a:solidFill>
-                  <a:srgbClr val="C0392B"/>
-                </a:solidFill>
-                <a:latin typeface="Meiryo UI"/>
-              </a:rPr>
-              <a:t>代わりに、利用者側からはグローバル IPv4 アドレスが一切見えません</a:t>
-            </a:r>
-          </a:p>
-          <a:p>
-            <a:pPr lvl="1" algn="l">
-              <a:spcAft>
-                <a:spcPts val="500"/>
-              </a:spcAft>
-            </a:pPr>
-            <a:r>
-              <a:rPr sz="1600" b="0">
-                <a:solidFill>
-                  <a:srgbClr val="555555"/>
-                </a:solidFill>
-                <a:latin typeface="Meiryo UI"/>
-              </a:rPr>
-              <a:t>だからポート開放する手段がありません。ルータの設定でどうにかできる構造ではないのです</a:t>
-            </a:r>
-          </a:p>
-          <a:p>
-            <a:pPr algn="l">
-              <a:spcAft>
-                <a:spcPts val="900"/>
-              </a:spcAft>
-            </a:pPr>
-            <a:r>
-              <a:rPr sz="1900" b="1">
-                <a:solidFill>
-                  <a:srgbClr val="1F3355"/>
-                </a:solidFill>
-                <a:latin typeface="Meiryo UI"/>
-              </a:rPr>
-              <a:t>お客様への説明のしかた</a:t>
-            </a:r>
-          </a:p>
-          <a:p>
-            <a:pPr lvl="1" algn="l">
-              <a:spcAft>
-                <a:spcPts val="500"/>
-              </a:spcAft>
-            </a:pPr>
-            <a:r>
-              <a:rPr sz="1600" b="0">
-                <a:solidFill>
-                  <a:srgbClr val="555555"/>
-                </a:solidFill>
-                <a:latin typeface="Meiryo UI"/>
-              </a:rPr>
-              <a:t>「お客様のルータには外から見えるアドレスが無く、事業者の設備でまとめて変換されています」</a:t>
-            </a:r>
-          </a:p>
-          <a:p>
-            <a:pPr lvl="1" algn="l">
-              <a:spcAft>
-                <a:spcPts val="500"/>
-              </a:spcAft>
-            </a:pPr>
-            <a:r>
-              <a:rPr sz="1600" b="0">
-                <a:solidFill>
-                  <a:srgbClr val="555555"/>
-                </a:solidFill>
-                <a:latin typeface="Meiryo UI"/>
-              </a:rPr>
-              <a:t>「設定でどうにかできる話ではありません。外から入る通信が必要なら固定 IP のオプション契約が要ります」</a:t>
+              <a:t>DS-Lite … 箱に詰めるのは CPE、NAT は網側がやる</a:t>
             </a:r>
           </a:p>
         </p:txBody>
@@ -7883,13 +8433,13 @@
           <a:p>
             <a:pPr algn="l"/>
             <a:r>
-              <a:rPr sz="1200" b="0">
+              <a:rPr sz="1100" b="0">
                 <a:solidFill>
                   <a:srgbClr val="007ACC"/>
                 </a:solidFill>
                 <a:latin typeface="Meiryo UI"/>
               </a:rPr>
-              <a:t>教科書: 24.1「DS-Lite」(p.421) / 19.4「IPv4 アドレス共有技術の課題」(p.362)</a:t>
+              <a:t>教科書: 第24章「IPv4/IPv6 共存技術の運用形態」24.1〜24.4(p.421〜) / 第21章「IPv4/IPv6 共存技術の分類」21.1(p.381)</a:t>
             </a:r>
           </a:p>
         </p:txBody>
@@ -7902,7 +8452,7 @@
 </p:sld>
 </file>
 
-<file path=ppt/slides/slide21.xml><?xml version="1.0" encoding="utf-8"?>
+<file path=ppt/slides/slide23.xml><?xml version="1.0" encoding="utf-8"?>
 <p:sld xmlns:a="http://schemas.openxmlformats.org/drawingml/2006/main" xmlns:p="http://schemas.openxmlformats.org/presentationml/2006/main" xmlns:r="http://schemas.openxmlformats.org/officeDocument/2006/relationships">
   <p:cSld>
     <p:spTree>
@@ -7942,7 +8492,7 @@
                 </a:solidFill>
                 <a:latin typeface="Meiryo UI"/>
               </a:rPr>
-              <a:t>MAP-E — IPv4 アドレスを他人と分け合う</a:t>
+              <a:t>DS-Lite — お客様のルータは包むだけ、変換は網がやる</a:t>
             </a:r>
           </a:p>
         </p:txBody>
@@ -8014,193 +8564,177 @@
           <a:p>
             <a:pPr algn="l">
               <a:spcAft>
-                <a:spcPts val="1000"/>
-              </a:spcAft>
-            </a:pPr>
-            <a:r>
-              <a:rPr sz="2000" b="1">
+                <a:spcPts val="900"/>
+              </a:spcAft>
+            </a:pPr>
+            <a:r>
+              <a:rPr sz="1900" b="0">
+                <a:solidFill>
+                  <a:srgbClr val="0B6040"/>
+                </a:solidFill>
+                <a:latin typeface="Consolas"/>
+              </a:rPr>
+              <a:t>PC → お客様のルータで IPv6 の箱に詰める → 網側の装置で箱を開けて変換 → インターネット</a:t>
+            </a:r>
+          </a:p>
+          <a:p>
+            <a:pPr algn="l">
+              <a:spcAft>
+                <a:spcPts val="900"/>
+              </a:spcAft>
+            </a:pPr>
+            <a:r>
+              <a:rPr sz="1900" b="1">
                 <a:solidFill>
                   <a:srgbClr val="1F3355"/>
                 </a:solidFill>
                 <a:latin typeface="Meiryo UI"/>
               </a:rPr>
-              <a:t>1 個の IPv4 アドレスを何人かで分け合い、使えるポート番号を分担します</a:t>
+              <a:t>冒頭の宅配便で「出口の業者が仕分けする」と言ったのが、これです</a:t>
+            </a:r>
+          </a:p>
+          <a:p>
+            <a:pPr algn="l">
+              <a:spcAft>
+                <a:spcPts val="900"/>
+              </a:spcAft>
+            </a:pPr>
+            <a:r>
+              <a:rPr sz="1900" b="1">
+                <a:solidFill>
+                  <a:srgbClr val="1F3355"/>
+                </a:solidFill>
+                <a:latin typeface="Meiryo UI"/>
+              </a:rPr>
+              <a:t>特徴</a:t>
             </a:r>
           </a:p>
           <a:p>
             <a:pPr lvl="1" algn="l">
               <a:spcAft>
-                <a:spcPts val="600"/>
-              </a:spcAft>
-            </a:pPr>
-            <a:r>
-              <a:rPr sz="1700" b="0">
+                <a:spcPts val="500"/>
+              </a:spcAft>
+            </a:pPr>
+            <a:r>
+              <a:rPr sz="1600" b="0">
                 <a:solidFill>
                   <a:srgbClr val="555555"/>
                 </a:solidFill>
                 <a:latin typeface="Meiryo UI"/>
               </a:rPr>
-              <a:t>グローバル IPv4 アドレスは他人と共有</a:t>
+              <a:t>お客様のルータは アドレスの書き換え (NAT) をしません。ただの入口になるだけです</a:t>
             </a:r>
           </a:p>
           <a:p>
             <a:pPr lvl="1" algn="l">
               <a:spcAft>
-                <a:spcPts val="600"/>
-              </a:spcAft>
-            </a:pPr>
-            <a:r>
-              <a:rPr sz="1700" b="0">
+                <a:spcPts val="500"/>
+              </a:spcAft>
+            </a:pPr>
+            <a:r>
+              <a:rPr sz="1600" b="0">
                 <a:solidFill>
                   <a:srgbClr val="555555"/>
                 </a:solidFill>
                 <a:latin typeface="Meiryo UI"/>
               </a:rPr>
-              <a:t>代わりに「あなたはこのポート番号を使ってください」と範囲が決められる</a:t>
+              <a:t>変換は網側の装置 (AFTR) がまとめてやります</a:t>
             </a:r>
           </a:p>
           <a:p>
             <a:pPr lvl="1" algn="l">
               <a:spcAft>
-                <a:spcPts val="600"/>
-              </a:spcAft>
-            </a:pPr>
-            <a:r>
-              <a:rPr sz="1700" b="0">
+                <a:spcPts val="500"/>
+              </a:spcAft>
+            </a:pPr>
+            <a:r>
+              <a:rPr sz="1600" b="0">
                 <a:solidFill>
                   <a:srgbClr val="555555"/>
                 </a:solidFill>
                 <a:latin typeface="Meiryo UI"/>
               </a:rPr>
-              <a:t>どれを使うかは、降ってきた IPv6 の「住所の前半」(プレフィックス) から計算で決まります</a:t>
+              <a:t>だから お客様のルータの負荷が軽く、設定も簡単です</a:t>
             </a:r>
           </a:p>
           <a:p>
             <a:pPr algn="l">
               <a:spcAft>
-                <a:spcPts val="1000"/>
-              </a:spcAft>
-            </a:pPr>
-            <a:r>
-              <a:rPr sz="2000" b="1">
+                <a:spcPts val="900"/>
+              </a:spcAft>
+            </a:pPr>
+            <a:r>
+              <a:rPr sz="1900" b="1">
+                <a:solidFill>
+                  <a:srgbClr val="C0392B"/>
+                </a:solidFill>
+                <a:latin typeface="Meiryo UI"/>
+              </a:rPr>
+              <a:t>代わりに、利用者側からはグローバル IPv4 アドレスが一切見えません</a:t>
+            </a:r>
+          </a:p>
+          <a:p>
+            <a:pPr lvl="1" algn="l">
+              <a:spcAft>
+                <a:spcPts val="500"/>
+              </a:spcAft>
+            </a:pPr>
+            <a:r>
+              <a:rPr sz="1600" b="0">
+                <a:solidFill>
+                  <a:srgbClr val="555555"/>
+                </a:solidFill>
+                <a:latin typeface="Meiryo UI"/>
+              </a:rPr>
+              <a:t>だからポート開放する手段がありません。ルータの設定でどうにかできる構造ではないのです</a:t>
+            </a:r>
+          </a:p>
+          <a:p>
+            <a:pPr algn="l">
+              <a:spcAft>
+                <a:spcPts val="900"/>
+              </a:spcAft>
+            </a:pPr>
+            <a:r>
+              <a:rPr sz="1900" b="1">
                 <a:solidFill>
                   <a:srgbClr val="1F3355"/>
                 </a:solidFill>
                 <a:latin typeface="Meiryo UI"/>
               </a:rPr>
-              <a:t>うちの検証環境で実際に計算した例 (CPE の自動計算と完全に一致しました)</a:t>
+              <a:t>お客様への説明のしかた</a:t>
             </a:r>
           </a:p>
           <a:p>
             <a:pPr lvl="1" algn="l">
               <a:spcAft>
-                <a:spcPts val="600"/>
-              </a:spcAft>
-            </a:pPr>
-            <a:r>
-              <a:rPr sz="1700" b="0">
-                <a:solidFill>
-                  <a:srgbClr val="0B6040"/>
-                </a:solidFill>
-                <a:latin typeface="Consolas"/>
-              </a:rPr>
-              <a:t>降ってきた IPv6      2001:db8:100a:500::/56</a:t>
+                <a:spcPts val="500"/>
+              </a:spcAft>
+            </a:pPr>
+            <a:r>
+              <a:rPr sz="1600" b="0">
+                <a:solidFill>
+                  <a:srgbClr val="555555"/>
+                </a:solidFill>
+                <a:latin typeface="Meiryo UI"/>
+              </a:rPr>
+              <a:t>「お客様のルータには外から見えるアドレスが無く、事業者の設備でまとめて変換されています」</a:t>
             </a:r>
           </a:p>
           <a:p>
             <a:pPr lvl="1" algn="l">
               <a:spcAft>
-                <a:spcPts val="600"/>
-              </a:spcAft>
-            </a:pPr>
-            <a:r>
-              <a:rPr sz="1700" b="0">
-                <a:solidFill>
-                  <a:srgbClr val="0B6040"/>
-                </a:solidFill>
-                <a:latin typeface="Consolas"/>
-              </a:rPr>
-              <a:t>計算で出た共有 IPv4  198.51.100.10</a:t>
-            </a:r>
-          </a:p>
-          <a:p>
-            <a:pPr lvl="1" algn="l">
-              <a:spcAft>
-                <a:spcPts val="600"/>
-              </a:spcAft>
-            </a:pPr>
-            <a:r>
-              <a:rPr sz="1700" b="0">
-                <a:solidFill>
-                  <a:srgbClr val="0B6040"/>
-                </a:solidFill>
-                <a:latin typeface="Consolas"/>
-              </a:rPr>
-              <a:t>使えるポート        240 個 (連続ではなく、とびとびの番号。最初は 4176〜4191)</a:t>
-            </a:r>
-          </a:p>
-          <a:p>
-            <a:pPr algn="l">
-              <a:spcAft>
-                <a:spcPts val="1000"/>
-              </a:spcAft>
-            </a:pPr>
-            <a:r>
-              <a:rPr sz="2000" b="1">
-                <a:solidFill>
-                  <a:srgbClr val="C0392B"/>
-                </a:solidFill>
-                <a:latin typeface="Meiryo UI"/>
-              </a:rPr>
-              <a:t>ポートは全部で 65536 個あるのに、使えるのは 240 個です</a:t>
-            </a:r>
-          </a:p>
-          <a:p>
-            <a:pPr lvl="1" algn="l">
-              <a:spcAft>
-                <a:spcPts val="600"/>
-              </a:spcAft>
-            </a:pPr>
-            <a:r>
-              <a:rPr sz="1700" b="0">
+                <a:spcPts val="500"/>
+              </a:spcAft>
+            </a:pPr>
+            <a:r>
+              <a:rPr sz="1600" b="0">
                 <a:solidFill>
                   <a:srgbClr val="555555"/>
                 </a:solidFill>
                 <a:latin typeface="Meiryo UI"/>
               </a:rPr>
-              <a:t>実サービスでは v6プラスが 240 個、OCN バーチャルコネクトが 1008 個と言われています</a:t>
-            </a:r>
-          </a:p>
-          <a:p>
-            <a:pPr lvl="1" algn="l">
-              <a:spcAft>
-                <a:spcPts val="600"/>
-              </a:spcAft>
-            </a:pPr>
-            <a:r>
-              <a:rPr sz="1700" b="0">
-                <a:solidFill>
-                  <a:srgbClr val="555555"/>
-                </a:solidFill>
-                <a:latin typeface="Meiryo UI"/>
-              </a:rPr>
-              <a:t>ブラウザは 1 タブで数十本張ります。台数が多い拠点や監視系があると足りません</a:t>
-            </a:r>
-          </a:p>
-          <a:p>
-            <a:pPr lvl="1" algn="l">
-              <a:spcAft>
-                <a:spcPts val="600"/>
-              </a:spcAft>
-            </a:pPr>
-            <a:r>
-              <a:rPr sz="1700" b="1">
-                <a:solidFill>
-                  <a:srgbClr val="C0392B"/>
-                </a:solidFill>
-                <a:latin typeface="Meiryo UI"/>
-              </a:rPr>
-              <a:t>方式を決める前に、同時接続数を実測してください</a:t>
+              <a:t>「設定でどうにかできる話ではありません。外から入る通信が必要なら固定 IP のオプション契約が要ります」</a:t>
             </a:r>
           </a:p>
         </p:txBody>
@@ -8235,7 +8769,7 @@
                 </a:solidFill>
                 <a:latin typeface="Meiryo UI"/>
               </a:rPr>
-              <a:t>教科書: 24.4「MAP-E、MAP-T、4rd」(p.425) / 24.3「A+P」(p.423)</a:t>
+              <a:t>教科書: 24.1「DS-Lite」(p.421) / 19.4「IPv4 アドレス共有技術の課題」(p.362)</a:t>
             </a:r>
           </a:p>
         </p:txBody>
@@ -8248,7 +8782,683 @@
 </p:sld>
 </file>
 
-<file path=ppt/slides/slide22.xml><?xml version="1.0" encoding="utf-8"?>
+<file path=ppt/slides/slide24.xml><?xml version="1.0" encoding="utf-8"?>
+<p:sld xmlns:a="http://schemas.openxmlformats.org/drawingml/2006/main" xmlns:p="http://schemas.openxmlformats.org/presentationml/2006/main" xmlns:r="http://schemas.openxmlformats.org/officeDocument/2006/relationships">
+  <p:cSld>
+    <p:spTree>
+      <p:nvGrpSpPr>
+        <p:cNvPr id="1" name=""/>
+        <p:cNvGrpSpPr/>
+        <p:nvPr/>
+      </p:nvGrpSpPr>
+      <p:grpSpPr/>
+      <p:sp>
+        <p:nvSpPr>
+          <p:cNvPr id="2" name="TextBox 1"/>
+          <p:cNvSpPr txBox="1"/>
+          <p:nvPr/>
+        </p:nvSpPr>
+        <p:spPr>
+          <a:xfrm>
+            <a:off x="502920" y="320040"/>
+            <a:ext cx="11155680" cy="822960"/>
+          </a:xfrm>
+          <a:prstGeom prst="rect">
+            <a:avLst/>
+          </a:prstGeom>
+          <a:noFill/>
+        </p:spPr>
+        <p:txBody>
+          <a:bodyPr wrap="square">
+            <a:spAutoFit/>
+          </a:bodyPr>
+          <a:lstStyle/>
+          <a:p>
+            <a:pPr algn="l"/>
+            <a:r>
+              <a:rPr sz="2800" b="1">
+                <a:solidFill>
+                  <a:srgbClr val="1F3355"/>
+                </a:solidFill>
+                <a:latin typeface="Meiryo UI"/>
+              </a:rPr>
+              <a:t>「計算で決まる」って、どういうこと?</a:t>
+            </a:r>
+          </a:p>
+        </p:txBody>
+      </p:sp>
+      <p:sp>
+        <p:nvSpPr>
+          <p:cNvPr id="3" name="Rectangle 2"/>
+          <p:cNvSpPr/>
+          <p:nvPr/>
+        </p:nvSpPr>
+        <p:spPr>
+          <a:xfrm>
+            <a:off x="502920" y="1115568"/>
+            <a:ext cx="11155680" cy="31750"/>
+          </a:xfrm>
+          <a:prstGeom prst="rect">
+            <a:avLst/>
+          </a:prstGeom>
+          <a:solidFill>
+            <a:srgbClr val="007ACC"/>
+          </a:solidFill>
+          <a:ln>
+            <a:noFill/>
+          </a:ln>
+        </p:spPr>
+        <p:style>
+          <a:lnRef idx="1">
+            <a:schemeClr val="accent1"/>
+          </a:lnRef>
+          <a:fillRef idx="3">
+            <a:schemeClr val="accent1"/>
+          </a:fillRef>
+          <a:effectRef idx="2">
+            <a:schemeClr val="accent1"/>
+          </a:effectRef>
+          <a:fontRef idx="minor">
+            <a:schemeClr val="lt1"/>
+          </a:fontRef>
+        </p:style>
+        <p:txBody>
+          <a:bodyPr rtlCol="0" anchor="ctr"/>
+          <a:lstStyle/>
+          <a:p>
+            <a:pPr algn="ctr"/>
+          </a:p>
+        </p:txBody>
+      </p:sp>
+      <p:sp>
+        <p:nvSpPr>
+          <p:cNvPr id="4" name="TextBox 3"/>
+          <p:cNvSpPr txBox="1"/>
+          <p:nvPr/>
+        </p:nvSpPr>
+        <p:spPr>
+          <a:xfrm>
+            <a:off x="594360" y="1371600"/>
+            <a:ext cx="10972800" cy="4709160"/>
+          </a:xfrm>
+          <a:prstGeom prst="rect">
+            <a:avLst/>
+          </a:prstGeom>
+          <a:noFill/>
+        </p:spPr>
+        <p:txBody>
+          <a:bodyPr wrap="square">
+            <a:spAutoFit/>
+          </a:bodyPr>
+          <a:lstStyle/>
+          <a:p>
+            <a:pPr algn="l">
+              <a:spcAft>
+                <a:spcPts val="1000"/>
+              </a:spcAft>
+            </a:pPr>
+            <a:r>
+              <a:rPr sz="2000" b="1">
+                <a:solidFill>
+                  <a:srgbClr val="1F3355"/>
+                </a:solidFill>
+                <a:latin typeface="Meiryo UI"/>
+              </a:rPr>
+              <a:t>式は覚えなくていいです。知っておくべきは 3 つだけ</a:t>
+            </a:r>
+          </a:p>
+          <a:p>
+            <a:pPr lvl="1" algn="l">
+              <a:spcAft>
+                <a:spcPts val="600"/>
+              </a:spcAft>
+            </a:pPr>
+            <a:r>
+              <a:rPr sz="1700" b="0">
+                <a:solidFill>
+                  <a:srgbClr val="555555"/>
+                </a:solidFill>
+                <a:latin typeface="Meiryo UI"/>
+              </a:rPr>
+              <a:t>① 降ってきた IPv6 の 決められた位置のビット が、</a:t>
+            </a:r>
+          </a:p>
+          <a:p>
+            <a:pPr lvl="1" algn="l">
+              <a:spcAft>
+                <a:spcPts val="600"/>
+              </a:spcAft>
+            </a:pPr>
+            <a:r>
+              <a:rPr sz="1700" b="0">
+                <a:solidFill>
+                  <a:srgbClr val="555555"/>
+                </a:solidFill>
+                <a:latin typeface="Meiryo UI"/>
+              </a:rPr>
+              <a:t>   共有 IPv4 アドレスの一部 と 自分のポート番号の素 になります</a:t>
+            </a:r>
+          </a:p>
+          <a:p>
+            <a:pPr lvl="1" algn="l">
+              <a:spcAft>
+                <a:spcPts val="600"/>
+              </a:spcAft>
+            </a:pPr>
+            <a:r>
+              <a:rPr sz="1700" b="0">
+                <a:solidFill>
+                  <a:srgbClr val="555555"/>
+                </a:solidFill>
+                <a:latin typeface="Meiryo UI"/>
+              </a:rPr>
+              <a:t>② 計算するのは CPE です。人間が計算する場面はありません</a:t>
+            </a:r>
+          </a:p>
+          <a:p>
+            <a:pPr lvl="1" algn="l">
+              <a:spcAft>
+                <a:spcPts val="600"/>
+              </a:spcAft>
+            </a:pPr>
+            <a:r>
+              <a:rPr sz="1700" b="0">
+                <a:solidFill>
+                  <a:srgbClr val="555555"/>
+                </a:solidFill>
+                <a:latin typeface="Meiryo UI"/>
+              </a:rPr>
+              <a:t>③ だから「計算で一意に決まる = こちらでは選べない」。ここだけ覚えてください</a:t>
+            </a:r>
+          </a:p>
+          <a:p>
+            <a:pPr algn="l">
+              <a:spcAft>
+                <a:spcPts val="1000"/>
+              </a:spcAft>
+            </a:pPr>
+            <a:r>
+              <a:rPr sz="2000" b="1">
+                <a:solidFill>
+                  <a:srgbClr val="C0392B"/>
+                </a:solidFill>
+                <a:latin typeface="Meiryo UI"/>
+              </a:rPr>
+              <a:t>「なんで 80 番が使えないの?」の答えもここです</a:t>
+            </a:r>
+          </a:p>
+          <a:p>
+            <a:pPr lvl="1" algn="l">
+              <a:spcAft>
+                <a:spcPts val="600"/>
+              </a:spcAft>
+            </a:pPr>
+            <a:r>
+              <a:rPr sz="1700" b="0">
+                <a:solidFill>
+                  <a:srgbClr val="555555"/>
+                </a:solidFill>
+                <a:latin typeface="Meiryo UI"/>
+              </a:rPr>
+              <a:t>ポート番号は計算の結果として決まるので、若い番号 (0〜4095) は誰にも配られません</a:t>
+            </a:r>
+          </a:p>
+          <a:p>
+            <a:pPr lvl="1" algn="l">
+              <a:spcAft>
+                <a:spcPts val="600"/>
+              </a:spcAft>
+            </a:pPr>
+            <a:r>
+              <a:rPr sz="1700" b="0">
+                <a:solidFill>
+                  <a:srgbClr val="555555"/>
+                </a:solidFill>
+                <a:latin typeface="Meiryo UI"/>
+              </a:rPr>
+              <a:t>選べないから 80 番が来ない、という順番です</a:t>
+            </a:r>
+          </a:p>
+        </p:txBody>
+      </p:sp>
+      <p:sp>
+        <p:nvSpPr>
+          <p:cNvPr id="5" name="TextBox 4"/>
+          <p:cNvSpPr txBox="1"/>
+          <p:nvPr/>
+        </p:nvSpPr>
+        <p:spPr>
+          <a:xfrm>
+            <a:off x="594360" y="6217920"/>
+            <a:ext cx="10972800" cy="502920"/>
+          </a:xfrm>
+          <a:prstGeom prst="rect">
+            <a:avLst/>
+          </a:prstGeom>
+          <a:noFill/>
+        </p:spPr>
+        <p:txBody>
+          <a:bodyPr wrap="square">
+            <a:spAutoFit/>
+          </a:bodyPr>
+          <a:lstStyle/>
+          <a:p>
+            <a:pPr algn="l"/>
+            <a:r>
+              <a:rPr sz="1200" b="0">
+                <a:solidFill>
+                  <a:srgbClr val="007ACC"/>
+                </a:solidFill>
+                <a:latin typeface="Meiryo UI"/>
+              </a:rPr>
+              <a:t>手計算のやり方を知りたい人へ: study-guide.md §1.5 に例題があります。案件では不要です</a:t>
+            </a:r>
+          </a:p>
+        </p:txBody>
+      </p:sp>
+    </p:spTree>
+  </p:cSld>
+  <p:clrMapOvr>
+    <a:masterClrMapping/>
+  </p:clrMapOvr>
+</p:sld>
+</file>
+
+<file path=ppt/slides/slide25.xml><?xml version="1.0" encoding="utf-8"?>
+<p:sld xmlns:a="http://schemas.openxmlformats.org/drawingml/2006/main" xmlns:p="http://schemas.openxmlformats.org/presentationml/2006/main" xmlns:r="http://schemas.openxmlformats.org/officeDocument/2006/relationships">
+  <p:cSld>
+    <p:spTree>
+      <p:nvGrpSpPr>
+        <p:cNvPr id="1" name=""/>
+        <p:cNvGrpSpPr/>
+        <p:nvPr/>
+      </p:nvGrpSpPr>
+      <p:grpSpPr/>
+      <p:sp>
+        <p:nvSpPr>
+          <p:cNvPr id="2" name="TextBox 1"/>
+          <p:cNvSpPr txBox="1"/>
+          <p:nvPr/>
+        </p:nvSpPr>
+        <p:spPr>
+          <a:xfrm>
+            <a:off x="502920" y="320040"/>
+            <a:ext cx="11155680" cy="822960"/>
+          </a:xfrm>
+          <a:prstGeom prst="rect">
+            <a:avLst/>
+          </a:prstGeom>
+          <a:noFill/>
+        </p:spPr>
+        <p:txBody>
+          <a:bodyPr wrap="square">
+            <a:spAutoFit/>
+          </a:bodyPr>
+          <a:lstStyle/>
+          <a:p>
+            <a:pPr algn="l"/>
+            <a:r>
+              <a:rPr sz="2800" b="1">
+                <a:solidFill>
+                  <a:srgbClr val="1F3355"/>
+                </a:solidFill>
+                <a:latin typeface="Meiryo UI"/>
+              </a:rPr>
+              <a:t>MAP-E — IPv4 アドレスを他人と分け合う</a:t>
+            </a:r>
+          </a:p>
+        </p:txBody>
+      </p:sp>
+      <p:sp>
+        <p:nvSpPr>
+          <p:cNvPr id="3" name="Rectangle 2"/>
+          <p:cNvSpPr/>
+          <p:nvPr/>
+        </p:nvSpPr>
+        <p:spPr>
+          <a:xfrm>
+            <a:off x="502920" y="1115568"/>
+            <a:ext cx="11155680" cy="31750"/>
+          </a:xfrm>
+          <a:prstGeom prst="rect">
+            <a:avLst/>
+          </a:prstGeom>
+          <a:solidFill>
+            <a:srgbClr val="007ACC"/>
+          </a:solidFill>
+          <a:ln>
+            <a:noFill/>
+          </a:ln>
+        </p:spPr>
+        <p:style>
+          <a:lnRef idx="1">
+            <a:schemeClr val="accent1"/>
+          </a:lnRef>
+          <a:fillRef idx="3">
+            <a:schemeClr val="accent1"/>
+          </a:fillRef>
+          <a:effectRef idx="2">
+            <a:schemeClr val="accent1"/>
+          </a:effectRef>
+          <a:fontRef idx="minor">
+            <a:schemeClr val="lt1"/>
+          </a:fontRef>
+        </p:style>
+        <p:txBody>
+          <a:bodyPr rtlCol="0" anchor="ctr"/>
+          <a:lstStyle/>
+          <a:p>
+            <a:pPr algn="ctr"/>
+          </a:p>
+        </p:txBody>
+      </p:sp>
+      <p:sp>
+        <p:nvSpPr>
+          <p:cNvPr id="4" name="TextBox 3"/>
+          <p:cNvSpPr txBox="1"/>
+          <p:nvPr/>
+        </p:nvSpPr>
+        <p:spPr>
+          <a:xfrm>
+            <a:off x="594360" y="1371600"/>
+            <a:ext cx="10972800" cy="4709160"/>
+          </a:xfrm>
+          <a:prstGeom prst="rect">
+            <a:avLst/>
+          </a:prstGeom>
+          <a:noFill/>
+        </p:spPr>
+        <p:txBody>
+          <a:bodyPr wrap="square">
+            <a:spAutoFit/>
+          </a:bodyPr>
+          <a:lstStyle/>
+          <a:p>
+            <a:pPr algn="l">
+              <a:spcAft>
+                <a:spcPts val="700"/>
+              </a:spcAft>
+            </a:pPr>
+            <a:r>
+              <a:rPr sz="1700" b="1">
+                <a:solidFill>
+                  <a:srgbClr val="1F3355"/>
+                </a:solidFill>
+                <a:latin typeface="Meiryo UI"/>
+              </a:rPr>
+              <a:t>1 個の IPv4 アドレスを何人かで分け合い、使えるポート番号を分担します</a:t>
+            </a:r>
+          </a:p>
+          <a:p>
+            <a:pPr lvl="1" algn="l">
+              <a:spcAft>
+                <a:spcPts val="300"/>
+              </a:spcAft>
+            </a:pPr>
+            <a:r>
+              <a:rPr sz="1400" b="0">
+                <a:solidFill>
+                  <a:srgbClr val="555555"/>
+                </a:solidFill>
+                <a:latin typeface="Meiryo UI"/>
+              </a:rPr>
+              <a:t>グローバル IPv4 アドレスは他人と共有</a:t>
+            </a:r>
+          </a:p>
+          <a:p>
+            <a:pPr lvl="1" algn="l">
+              <a:spcAft>
+                <a:spcPts val="300"/>
+              </a:spcAft>
+            </a:pPr>
+            <a:r>
+              <a:rPr sz="1400" b="0">
+                <a:solidFill>
+                  <a:srgbClr val="555555"/>
+                </a:solidFill>
+                <a:latin typeface="Meiryo UI"/>
+              </a:rPr>
+              <a:t>代わりに「あなたはこのポート番号を使ってください」と範囲が決められる</a:t>
+            </a:r>
+          </a:p>
+          <a:p>
+            <a:pPr lvl="1" algn="l">
+              <a:spcAft>
+                <a:spcPts val="300"/>
+              </a:spcAft>
+            </a:pPr>
+            <a:r>
+              <a:rPr sz="1400" b="0">
+                <a:solidFill>
+                  <a:srgbClr val="555555"/>
+                </a:solidFill>
+                <a:latin typeface="Meiryo UI"/>
+              </a:rPr>
+              <a:t>どれを使うかは、降ってきた IPv6 の「住所の前半」(プレフィックス) から計算で決まります</a:t>
+            </a:r>
+          </a:p>
+          <a:p>
+            <a:pPr algn="l">
+              <a:spcAft>
+                <a:spcPts val="700"/>
+              </a:spcAft>
+            </a:pPr>
+            <a:r>
+              <a:rPr sz="1700" b="1">
+                <a:solidFill>
+                  <a:srgbClr val="1F3355"/>
+                </a:solidFill>
+                <a:latin typeface="Meiryo UI"/>
+              </a:rPr>
+              <a:t>うちの検証環境で実際に計算した例 (CPE の自動計算と完全に一致しました)</a:t>
+            </a:r>
+          </a:p>
+          <a:p>
+            <a:pPr lvl="1" algn="l">
+              <a:spcAft>
+                <a:spcPts val="300"/>
+              </a:spcAft>
+            </a:pPr>
+            <a:r>
+              <a:rPr sz="1400" b="0">
+                <a:solidFill>
+                  <a:srgbClr val="0B6040"/>
+                </a:solidFill>
+                <a:latin typeface="Consolas"/>
+              </a:rPr>
+              <a:t>降ってきた IPv6      2001:db8:100a:500::/56</a:t>
+            </a:r>
+          </a:p>
+          <a:p>
+            <a:pPr lvl="1" algn="l">
+              <a:spcAft>
+                <a:spcPts val="300"/>
+              </a:spcAft>
+            </a:pPr>
+            <a:r>
+              <a:rPr sz="1400" b="0">
+                <a:solidFill>
+                  <a:srgbClr val="0B6040"/>
+                </a:solidFill>
+                <a:latin typeface="Consolas"/>
+              </a:rPr>
+              <a:t>計算で出た共有 IPv4  198.51.100.10</a:t>
+            </a:r>
+          </a:p>
+          <a:p>
+            <a:pPr lvl="1" algn="l">
+              <a:spcAft>
+                <a:spcPts val="300"/>
+              </a:spcAft>
+            </a:pPr>
+            <a:r>
+              <a:rPr sz="1400" b="0">
+                <a:solidFill>
+                  <a:srgbClr val="0B6040"/>
+                </a:solidFill>
+                <a:latin typeface="Consolas"/>
+              </a:rPr>
+              <a:t>使えるポート        240 個 (連続ではなく、とびとびの番号。最初は 4176〜4191)</a:t>
+            </a:r>
+          </a:p>
+          <a:p>
+            <a:pPr algn="l">
+              <a:spcAft>
+                <a:spcPts val="700"/>
+              </a:spcAft>
+            </a:pPr>
+            <a:r>
+              <a:rPr sz="1700" b="1">
+                <a:solidFill>
+                  <a:srgbClr val="C0392B"/>
+                </a:solidFill>
+                <a:latin typeface="Meiryo UI"/>
+              </a:rPr>
+              <a:t>ポートは全部で 65536 個あるのに、使えるのは 240 個です</a:t>
+            </a:r>
+          </a:p>
+          <a:p>
+            <a:pPr lvl="1" algn="l">
+              <a:spcAft>
+                <a:spcPts val="300"/>
+              </a:spcAft>
+            </a:pPr>
+            <a:r>
+              <a:rPr sz="1400" b="0">
+                <a:solidFill>
+                  <a:srgbClr val="555555"/>
+                </a:solidFill>
+                <a:latin typeface="Meiryo UI"/>
+              </a:rPr>
+              <a:t>実サービスでは v6プラスが 240 個、OCN バーチャルコネクトが 1008 個と言われています</a:t>
+            </a:r>
+          </a:p>
+          <a:p>
+            <a:pPr lvl="1" algn="l">
+              <a:spcAft>
+                <a:spcPts val="300"/>
+              </a:spcAft>
+            </a:pPr>
+            <a:r>
+              <a:rPr sz="1400" b="0">
+                <a:solidFill>
+                  <a:srgbClr val="555555"/>
+                </a:solidFill>
+                <a:latin typeface="Meiryo UI"/>
+              </a:rPr>
+              <a:t>ブラウザは 1 タブで数十本張ります。台数が多い拠点や監視系があると足りません</a:t>
+            </a:r>
+          </a:p>
+          <a:p>
+            <a:pPr algn="l">
+              <a:spcAft>
+                <a:spcPts val="700"/>
+              </a:spcAft>
+            </a:pPr>
+            <a:r>
+              <a:rPr sz="1700" b="1">
+                <a:solidFill>
+                  <a:srgbClr val="1F3355"/>
+                </a:solidFill>
+                <a:latin typeface="Meiryo UI"/>
+              </a:rPr>
+              <a:t>「同時接続数を実測」って、どうやるのか</a:t>
+            </a:r>
+          </a:p>
+          <a:p>
+            <a:pPr lvl="1" algn="l">
+              <a:spcAft>
+                <a:spcPts val="300"/>
+              </a:spcAft>
+            </a:pPr>
+            <a:r>
+              <a:rPr sz="1400" b="0">
+                <a:solidFill>
+                  <a:srgbClr val="0B6040"/>
+                </a:solidFill>
+                <a:latin typeface="Consolas"/>
+              </a:rPr>
+              <a:t>既設ルータで NAT のテーブル数を数える (Cisco なら show ip nat translations の行数)</a:t>
+            </a:r>
+          </a:p>
+          <a:p>
+            <a:pPr lvl="1" algn="l">
+              <a:spcAft>
+                <a:spcPts val="300"/>
+              </a:spcAft>
+            </a:pPr>
+            <a:r>
+              <a:rPr sz="1400" b="0">
+                <a:solidFill>
+                  <a:srgbClr val="555555"/>
+                </a:solidFill>
+                <a:latin typeface="Meiryo UI"/>
+              </a:rPr>
+              <a:t>業務時間帯に何回か測る。昼休みと夕方でまったく違います</a:t>
+            </a:r>
+          </a:p>
+          <a:p>
+            <a:pPr lvl="1" algn="l">
+              <a:spcAft>
+                <a:spcPts val="300"/>
+              </a:spcAft>
+            </a:pPr>
+            <a:r>
+              <a:rPr sz="1400" b="1">
+                <a:solidFill>
+                  <a:srgbClr val="C0392B"/>
+                </a:solidFill>
+                <a:latin typeface="Meiryo UI"/>
+              </a:rPr>
+              <a:t>目安は出せません。240 で足りるかは環境次第なので、必ず実測してください</a:t>
+            </a:r>
+          </a:p>
+        </p:txBody>
+      </p:sp>
+      <p:sp>
+        <p:nvSpPr>
+          <p:cNvPr id="5" name="TextBox 4"/>
+          <p:cNvSpPr txBox="1"/>
+          <p:nvPr/>
+        </p:nvSpPr>
+        <p:spPr>
+          <a:xfrm>
+            <a:off x="594360" y="6217920"/>
+            <a:ext cx="10972800" cy="502920"/>
+          </a:xfrm>
+          <a:prstGeom prst="rect">
+            <a:avLst/>
+          </a:prstGeom>
+          <a:noFill/>
+        </p:spPr>
+        <p:txBody>
+          <a:bodyPr wrap="square">
+            <a:spAutoFit/>
+          </a:bodyPr>
+          <a:lstStyle/>
+          <a:p>
+            <a:pPr algn="l"/>
+            <a:r>
+              <a:rPr sz="1200" b="0">
+                <a:solidFill>
+                  <a:srgbClr val="007ACC"/>
+                </a:solidFill>
+                <a:latin typeface="Meiryo UI"/>
+              </a:rPr>
+              <a:t>教科書: 24.4「MAP-E、MAP-T、4rd」(p.425) / 24.3「A+P」(p.423)</a:t>
+            </a:r>
+          </a:p>
+        </p:txBody>
+      </p:sp>
+    </p:spTree>
+  </p:cSld>
+  <p:clrMapOvr>
+    <a:masterClrMapping/>
+  </p:clrMapOvr>
+</p:sld>
+</file>
+
+<file path=ppt/slides/slide26.xml><?xml version="1.0" encoding="utf-8"?>
 <p:sld xmlns:a="http://schemas.openxmlformats.org/drawingml/2006/main" xmlns:p="http://schemas.openxmlformats.org/presentationml/2006/main" xmlns:r="http://schemas.openxmlformats.org/officeDocument/2006/relationships">
   <p:cSld>
     <p:spTree>
@@ -8288,7 +9498,7 @@
                 </a:solidFill>
                 <a:latin typeface="Meiryo UI"/>
               </a:rPr>
-              <a:t>ここで話が 2 つに分かれます (混同しやすいので注意)</a:t>
+              <a:t>【注意】この 2 つを混同しないでください</a:t>
             </a:r>
           </a:p>
         </p:txBody>
@@ -8563,7 +9773,7 @@
                 </a:solidFill>
                 <a:latin typeface="Meiryo UI"/>
               </a:rPr>
-              <a:t>「ポート開放できない」と「ポートが 240 個しかない」は別の話です。次のページは「入ってくる通信」の話</a:t>
+              <a:t>「ポート開放できない」と「240 個しかない」は別の問題です。次のページからは右側 (入ってくる通信) の話をします</a:t>
             </a:r>
           </a:p>
         </p:txBody>
@@ -8576,7 +9786,7 @@
 </p:sld>
 </file>
 
-<file path=ppt/slides/slide23.xml><?xml version="1.0" encoding="utf-8"?>
+<file path=ppt/slides/slide27.xml><?xml version="1.0" encoding="utf-8"?>
 <p:sld xmlns:a="http://schemas.openxmlformats.org/drawingml/2006/main" xmlns:p="http://schemas.openxmlformats.org/presentationml/2006/main" xmlns:r="http://schemas.openxmlformats.org/officeDocument/2006/relationships">
   <p:cSld>
     <p:spTree>
@@ -8882,7 +10092,7 @@
 </p:sld>
 </file>
 
-<file path=ppt/slides/slide24.xml><?xml version="1.0" encoding="utf-8"?>
+<file path=ppt/slides/slide28.xml><?xml version="1.0" encoding="utf-8"?>
 <p:sld xmlns:a="http://schemas.openxmlformats.org/drawingml/2006/main" xmlns:p="http://schemas.openxmlformats.org/presentationml/2006/main" xmlns:r="http://schemas.openxmlformats.org/officeDocument/2006/relationships">
   <p:cSld>
     <p:spTree>
@@ -9177,7 +10387,477 @@
 </p:sld>
 </file>
 
-<file path=ppt/slides/slide25.xml><?xml version="1.0" encoding="utf-8"?>
+<file path=ppt/slides/slide29.xml><?xml version="1.0" encoding="utf-8"?>
+<p:sld xmlns:a="http://schemas.openxmlformats.org/drawingml/2006/main" xmlns:p="http://schemas.openxmlformats.org/presentationml/2006/main" xmlns:r="http://schemas.openxmlformats.org/officeDocument/2006/relationships">
+  <p:cSld>
+    <p:spTree>
+      <p:nvGrpSpPr>
+        <p:cNvPr id="1" name=""/>
+        <p:cNvGrpSpPr/>
+        <p:nvPr/>
+      </p:nvGrpSpPr>
+      <p:grpSpPr/>
+      <p:sp>
+        <p:nvSpPr>
+          <p:cNvPr id="2" name="TextBox 1"/>
+          <p:cNvSpPr txBox="1"/>
+          <p:nvPr/>
+        </p:nvSpPr>
+        <p:spPr>
+          <a:xfrm>
+            <a:off x="502920" y="274320"/>
+            <a:ext cx="11155680" cy="731520"/>
+          </a:xfrm>
+          <a:prstGeom prst="rect">
+            <a:avLst/>
+          </a:prstGeom>
+          <a:noFill/>
+        </p:spPr>
+        <p:txBody>
+          <a:bodyPr wrap="square">
+            <a:spAutoFit/>
+          </a:bodyPr>
+          <a:lstStyle/>
+          <a:p>
+            <a:pPr algn="l"/>
+            <a:r>
+              <a:rPr sz="2600" b="1">
+                <a:solidFill>
+                  <a:srgbClr val="1F3355"/>
+                </a:solidFill>
+                <a:latin typeface="Meiryo UI"/>
+              </a:rPr>
+              <a:t>拠点間 VPN はどうなるのか (法人案件で一番聞かれます)</a:t>
+            </a:r>
+          </a:p>
+        </p:txBody>
+      </p:sp>
+      <p:graphicFrame>
+        <p:nvGraphicFramePr>
+          <p:cNvPr id="3" name="Table 2"/>
+          <p:cNvGraphicFramePr>
+            <a:graphicFrameLocks noGrp="1"/>
+          </p:cNvGraphicFramePr>
+          <p:nvPr/>
+        </p:nvGraphicFramePr>
+        <p:xfrm>
+          <a:off x="502920" y="1143000"/>
+          <a:ext cx="10789920" cy="1554480"/>
+        </p:xfrm>
+        <a:graphic>
+          <a:graphicData uri="http://schemas.openxmlformats.org/drawingml/2006/table">
+            <a:tbl>
+              <a:tblPr>
+                <a:tableStyleId>{5C22544A-7EE6-4342-B048-85BDC9FD1C3A}</a:tableStyleId>
+              </a:tblPr>
+              <a:tblGrid>
+                <a:gridCol w="2560320"/>
+                <a:gridCol w="4206240"/>
+                <a:gridCol w="4023360"/>
+              </a:tblGrid>
+              <a:tr h="310896">
+                <a:tc>
+                  <a:txBody>
+                    <a:bodyPr/>
+                    <a:lstStyle/>
+                    <a:p>
+                      <a:pPr algn="l"/>
+                      <a:r>
+                        <a:rPr sz="1400" b="1">
+                          <a:solidFill>
+                            <a:srgbClr val="FFFFFF"/>
+                          </a:solidFill>
+                          <a:latin typeface="Meiryo UI"/>
+                        </a:rPr>
+                        <a:t/>
+                      </a:r>
+                    </a:p>
+                  </a:txBody>
+                  <a:tcPr>
+                    <a:solidFill>
+                      <a:srgbClr val="1F3355"/>
+                    </a:solidFill>
+                  </a:tcPr>
+                </a:tc>
+                <a:tc>
+                  <a:txBody>
+                    <a:bodyPr/>
+                    <a:lstStyle/>
+                    <a:p>
+                      <a:pPr algn="l"/>
+                      <a:r>
+                        <a:rPr sz="1400" b="1">
+                          <a:solidFill>
+                            <a:srgbClr val="FFFFFF"/>
+                          </a:solidFill>
+                          <a:latin typeface="Meiryo UI"/>
+                        </a:rPr>
+                        <a:t>こちらから張りに行く (発信)</a:t>
+                      </a:r>
+                    </a:p>
+                  </a:txBody>
+                  <a:tcPr>
+                    <a:solidFill>
+                      <a:srgbClr val="1F3355"/>
+                    </a:solidFill>
+                  </a:tcPr>
+                </a:tc>
+                <a:tc>
+                  <a:txBody>
+                    <a:bodyPr/>
+                    <a:lstStyle/>
+                    <a:p>
+                      <a:pPr algn="l"/>
+                      <a:r>
+                        <a:rPr sz="1400" b="1">
+                          <a:solidFill>
+                            <a:srgbClr val="FFFFFF"/>
+                          </a:solidFill>
+                          <a:latin typeface="Meiryo UI"/>
+                        </a:rPr>
+                        <a:t>相手から張られる (待ち受け)</a:t>
+                      </a:r>
+                    </a:p>
+                  </a:txBody>
+                  <a:tcPr>
+                    <a:solidFill>
+                      <a:srgbClr val="1F3355"/>
+                    </a:solidFill>
+                  </a:tcPr>
+                </a:tc>
+              </a:tr>
+              <a:tr h="310896">
+                <a:tc>
+                  <a:txBody>
+                    <a:bodyPr/>
+                    <a:lstStyle/>
+                    <a:p>
+                      <a:pPr algn="l"/>
+                      <a:r>
+                        <a:rPr sz="1300" b="0">
+                          <a:solidFill>
+                            <a:srgbClr val="1F3355"/>
+                          </a:solidFill>
+                          <a:latin typeface="Meiryo UI"/>
+                        </a:rPr>
+                        <a:t>PPPoE</a:t>
+                      </a:r>
+                    </a:p>
+                  </a:txBody>
+                  <a:tcPr>
+                    <a:solidFill>
+                      <a:srgbClr val="FFFFFF"/>
+                    </a:solidFill>
+                  </a:tcPr>
+                </a:tc>
+                <a:tc>
+                  <a:txBody>
+                    <a:bodyPr/>
+                    <a:lstStyle/>
+                    <a:p>
+                      <a:pPr algn="l"/>
+                      <a:r>
+                        <a:rPr sz="1300" b="0">
+                          <a:solidFill>
+                            <a:srgbClr val="1F3355"/>
+                          </a:solidFill>
+                          <a:latin typeface="Meiryo UI"/>
+                        </a:rPr>
+                        <a:t>できる</a:t>
+                      </a:r>
+                    </a:p>
+                  </a:txBody>
+                  <a:tcPr>
+                    <a:solidFill>
+                      <a:srgbClr val="FFFFFF"/>
+                    </a:solidFill>
+                  </a:tcPr>
+                </a:tc>
+                <a:tc>
+                  <a:txBody>
+                    <a:bodyPr/>
+                    <a:lstStyle/>
+                    <a:p>
+                      <a:pPr algn="l"/>
+                      <a:r>
+                        <a:rPr sz="1300" b="0">
+                          <a:solidFill>
+                            <a:srgbClr val="1F3355"/>
+                          </a:solidFill>
+                          <a:latin typeface="Meiryo UI"/>
+                        </a:rPr>
+                        <a:t>できる</a:t>
+                      </a:r>
+                    </a:p>
+                  </a:txBody>
+                  <a:tcPr>
+                    <a:solidFill>
+                      <a:srgbClr val="FFFFFF"/>
+                    </a:solidFill>
+                  </a:tcPr>
+                </a:tc>
+              </a:tr>
+              <a:tr h="310896">
+                <a:tc>
+                  <a:txBody>
+                    <a:bodyPr/>
+                    <a:lstStyle/>
+                    <a:p>
+                      <a:pPr algn="l"/>
+                      <a:r>
+                        <a:rPr sz="1300" b="0">
+                          <a:solidFill>
+                            <a:srgbClr val="1F3355"/>
+                          </a:solidFill>
+                          <a:latin typeface="Meiryo UI"/>
+                        </a:rPr>
+                        <a:t>MAP-E</a:t>
+                      </a:r>
+                    </a:p>
+                  </a:txBody>
+                  <a:tcPr>
+                    <a:solidFill>
+                      <a:srgbClr val="F2F6FA"/>
+                    </a:solidFill>
+                  </a:tcPr>
+                </a:tc>
+                <a:tc>
+                  <a:txBody>
+                    <a:bodyPr/>
+                    <a:lstStyle/>
+                    <a:p>
+                      <a:pPr algn="l"/>
+                      <a:r>
+                        <a:rPr sz="1300" b="0">
+                          <a:solidFill>
+                            <a:srgbClr val="1F3355"/>
+                          </a:solidFill>
+                          <a:latin typeface="Meiryo UI"/>
+                        </a:rPr>
+                        <a:t>たいてい張れます (NAT 越えの仕組みを使う)</a:t>
+                      </a:r>
+                    </a:p>
+                  </a:txBody>
+                  <a:tcPr>
+                    <a:solidFill>
+                      <a:srgbClr val="F2F6FA"/>
+                    </a:solidFill>
+                  </a:tcPr>
+                </a:tc>
+                <a:tc>
+                  <a:txBody>
+                    <a:bodyPr/>
+                    <a:lstStyle/>
+                    <a:p>
+                      <a:pPr algn="l"/>
+                      <a:r>
+                        <a:rPr sz="1300" b="0">
+                          <a:solidFill>
+                            <a:srgbClr val="1F3355"/>
+                          </a:solidFill>
+                          <a:latin typeface="Meiryo UI"/>
+                        </a:rPr>
+                        <a:t>不可。待ち受けるポートを選べません</a:t>
+                      </a:r>
+                    </a:p>
+                  </a:txBody>
+                  <a:tcPr>
+                    <a:solidFill>
+                      <a:srgbClr val="F2F6FA"/>
+                    </a:solidFill>
+                  </a:tcPr>
+                </a:tc>
+              </a:tr>
+              <a:tr h="310896">
+                <a:tc>
+                  <a:txBody>
+                    <a:bodyPr/>
+                    <a:lstStyle/>
+                    <a:p>
+                      <a:pPr algn="l"/>
+                      <a:r>
+                        <a:rPr sz="1300" b="0">
+                          <a:solidFill>
+                            <a:srgbClr val="1F3355"/>
+                          </a:solidFill>
+                          <a:latin typeface="Meiryo UI"/>
+                        </a:rPr>
+                        <a:t>DS-Lite</a:t>
+                      </a:r>
+                    </a:p>
+                  </a:txBody>
+                  <a:tcPr>
+                    <a:solidFill>
+                      <a:srgbClr val="FFFFFF"/>
+                    </a:solidFill>
+                  </a:tcPr>
+                </a:tc>
+                <a:tc>
+                  <a:txBody>
+                    <a:bodyPr/>
+                    <a:lstStyle/>
+                    <a:p>
+                      <a:pPr algn="l"/>
+                      <a:r>
+                        <a:rPr sz="1300" b="0">
+                          <a:solidFill>
+                            <a:srgbClr val="1F3355"/>
+                          </a:solidFill>
+                          <a:latin typeface="Meiryo UI"/>
+                        </a:rPr>
+                        <a:t>たいてい張れます (同上)</a:t>
+                      </a:r>
+                    </a:p>
+                  </a:txBody>
+                  <a:tcPr>
+                    <a:solidFill>
+                      <a:srgbClr val="FFFFFF"/>
+                    </a:solidFill>
+                  </a:tcPr>
+                </a:tc>
+                <a:tc>
+                  <a:txBody>
+                    <a:bodyPr/>
+                    <a:lstStyle/>
+                    <a:p>
+                      <a:pPr algn="l"/>
+                      <a:r>
+                        <a:rPr sz="1300" b="0">
+                          <a:solidFill>
+                            <a:srgbClr val="1F3355"/>
+                          </a:solidFill>
+                          <a:latin typeface="Meiryo UI"/>
+                        </a:rPr>
+                        <a:t>不可。そもそも手段がありません</a:t>
+                      </a:r>
+                    </a:p>
+                  </a:txBody>
+                  <a:tcPr>
+                    <a:solidFill>
+                      <a:srgbClr val="FFFFFF"/>
+                    </a:solidFill>
+                  </a:tcPr>
+                </a:tc>
+              </a:tr>
+              <a:tr h="310896">
+                <a:tc>
+                  <a:txBody>
+                    <a:bodyPr/>
+                    <a:lstStyle/>
+                    <a:p>
+                      <a:pPr algn="l"/>
+                      <a:r>
+                        <a:rPr sz="1300" b="0">
+                          <a:solidFill>
+                            <a:srgbClr val="1F3355"/>
+                          </a:solidFill>
+                          <a:latin typeface="Meiryo UI"/>
+                        </a:rPr>
+                        <a:t>固定 IP オプション</a:t>
+                      </a:r>
+                    </a:p>
+                  </a:txBody>
+                  <a:tcPr>
+                    <a:solidFill>
+                      <a:srgbClr val="F2F6FA"/>
+                    </a:solidFill>
+                  </a:tcPr>
+                </a:tc>
+                <a:tc>
+                  <a:txBody>
+                    <a:bodyPr/>
+                    <a:lstStyle/>
+                    <a:p>
+                      <a:pPr algn="l"/>
+                      <a:r>
+                        <a:rPr sz="1300" b="0">
+                          <a:solidFill>
+                            <a:srgbClr val="1F3355"/>
+                          </a:solidFill>
+                          <a:latin typeface="Meiryo UI"/>
+                        </a:rPr>
+                        <a:t>できる</a:t>
+                      </a:r>
+                    </a:p>
+                  </a:txBody>
+                  <a:tcPr>
+                    <a:solidFill>
+                      <a:srgbClr val="F2F6FA"/>
+                    </a:solidFill>
+                  </a:tcPr>
+                </a:tc>
+                <a:tc>
+                  <a:txBody>
+                    <a:bodyPr/>
+                    <a:lstStyle/>
+                    <a:p>
+                      <a:pPr algn="l"/>
+                      <a:r>
+                        <a:rPr sz="1300" b="0">
+                          <a:solidFill>
+                            <a:srgbClr val="1F3355"/>
+                          </a:solidFill>
+                          <a:latin typeface="Meiryo UI"/>
+                        </a:rPr>
+                        <a:t>できる</a:t>
+                      </a:r>
+                    </a:p>
+                  </a:txBody>
+                  <a:tcPr>
+                    <a:solidFill>
+                      <a:srgbClr val="F2F6FA"/>
+                    </a:solidFill>
+                  </a:tcPr>
+                </a:tc>
+              </a:tr>
+            </a:tbl>
+          </a:graphicData>
+        </a:graphic>
+      </p:graphicFrame>
+      <p:sp>
+        <p:nvSpPr>
+          <p:cNvPr id="4" name="TextBox 3"/>
+          <p:cNvSpPr txBox="1"/>
+          <p:nvPr/>
+        </p:nvSpPr>
+        <p:spPr>
+          <a:xfrm>
+            <a:off x="502920" y="2953512"/>
+            <a:ext cx="11155680" cy="548640"/>
+          </a:xfrm>
+          <a:prstGeom prst="rect">
+            <a:avLst/>
+          </a:prstGeom>
+          <a:noFill/>
+        </p:spPr>
+        <p:txBody>
+          <a:bodyPr wrap="square">
+            <a:spAutoFit/>
+          </a:bodyPr>
+          <a:lstStyle/>
+          <a:p>
+            <a:pPr algn="l"/>
+            <a:r>
+              <a:rPr sz="1200" b="0">
+                <a:solidFill>
+                  <a:srgbClr val="007ACC"/>
+                </a:solidFill>
+                <a:latin typeface="Meiryo UI"/>
+              </a:rPr>
+              <a:t>待ち受けに使う UDP 500 / 4500 は若い番号なので MAP-E では配られません。3-4 の「80 番」と同じ理由です</a:t>
+            </a:r>
+          </a:p>
+        </p:txBody>
+      </p:sp>
+    </p:spTree>
+  </p:cSld>
+  <p:clrMapOvr>
+    <a:masterClrMapping/>
+  </p:clrMapOvr>
+</p:sld>
+</file>
+
+<file path=ppt/slides/slide3.xml><?xml version="1.0" encoding="utf-8"?>
 <p:sld xmlns:a="http://schemas.openxmlformats.org/drawingml/2006/main" xmlns:p="http://schemas.openxmlformats.org/presentationml/2006/main" xmlns:r="http://schemas.openxmlformats.org/officeDocument/2006/relationships">
   <p:cSld>
     <p:spTree>
@@ -9217,7 +10897,7 @@
                 </a:solidFill>
                 <a:latin typeface="Meiryo UI"/>
               </a:rPr>
-              <a:t>MTU 1460 — 「Web は見えるのにファイルが落ちない」の正体</a:t>
+              <a:t>今日 持ち帰ってほしいこと</a:t>
             </a:r>
           </a:p>
         </p:txBody>
@@ -9274,6 +10954,596 @@
         <p:spPr>
           <a:xfrm>
             <a:off x="594360" y="1371600"/>
+            <a:ext cx="10972800" cy="4983480"/>
+          </a:xfrm>
+          <a:prstGeom prst="rect">
+            <a:avLst/>
+          </a:prstGeom>
+          <a:noFill/>
+        </p:spPr>
+        <p:txBody>
+          <a:bodyPr wrap="square">
+            <a:spAutoFit/>
+          </a:bodyPr>
+          <a:lstStyle/>
+          <a:p>
+            <a:pPr algn="l">
+              <a:spcAft>
+                <a:spcPts val="1000"/>
+              </a:spcAft>
+            </a:pPr>
+            <a:r>
+              <a:rPr sz="2000" b="1">
+                <a:solidFill>
+                  <a:srgbClr val="1F3355"/>
+                </a:solidFill>
+                <a:latin typeface="Meiryo UI"/>
+              </a:rPr>
+              <a:t>3 つだけです</a:t>
+            </a:r>
+          </a:p>
+          <a:p>
+            <a:pPr lvl="1" algn="l">
+              <a:spcAft>
+                <a:spcPts val="600"/>
+              </a:spcAft>
+            </a:pPr>
+            <a:r>
+              <a:rPr sz="1700" b="0">
+                <a:solidFill>
+                  <a:srgbClr val="555555"/>
+                </a:solidFill>
+                <a:latin typeface="Meiryo UI"/>
+              </a:rPr>
+              <a:t>① なぜ IPv6 に変えるのか — 「アドレスが枯渇したから」ではありません</a:t>
+            </a:r>
+          </a:p>
+          <a:p>
+            <a:pPr lvl="1" algn="l">
+              <a:spcAft>
+                <a:spcPts val="600"/>
+              </a:spcAft>
+            </a:pPr>
+            <a:r>
+              <a:rPr sz="1700" b="0">
+                <a:solidFill>
+                  <a:srgbClr val="555555"/>
+                </a:solidFill>
+                <a:latin typeface="Meiryo UI"/>
+              </a:rPr>
+              <a:t>② お客様の回線がどの方式か、商品名から言えるようになる (v6プラス、transix など)</a:t>
+            </a:r>
+          </a:p>
+          <a:p>
+            <a:pPr lvl="1" algn="l">
+              <a:spcAft>
+                <a:spcPts val="600"/>
+              </a:spcAft>
+            </a:pPr>
+            <a:r>
+              <a:rPr sz="1700" b="0">
+                <a:solidFill>
+                  <a:srgbClr val="555555"/>
+                </a:solidFill>
+                <a:latin typeface="Meiryo UI"/>
+              </a:rPr>
+              <a:t>③ 「ポート開放できますか?」に即答できるようになる</a:t>
+            </a:r>
+          </a:p>
+          <a:p>
+            <a:pPr algn="l">
+              <a:spcAft>
+                <a:spcPts val="1000"/>
+              </a:spcAft>
+            </a:pPr>
+            <a:r>
+              <a:rPr sz="2000" b="1">
+                <a:solidFill>
+                  <a:srgbClr val="1F3355"/>
+                </a:solidFill>
+                <a:latin typeface="Meiryo UI"/>
+              </a:rPr>
+              <a:t>話す順番 — 大きい話から細かい話へ降ります</a:t>
+            </a:r>
+          </a:p>
+          <a:p>
+            <a:pPr lvl="1" algn="l">
+              <a:spcAft>
+                <a:spcPts val="600"/>
+              </a:spcAft>
+            </a:pPr>
+            <a:r>
+              <a:rPr sz="1700" b="0">
+                <a:solidFill>
+                  <a:srgbClr val="555555"/>
+                </a:solidFill>
+                <a:latin typeface="Meiryo UI"/>
+              </a:rPr>
+              <a:t>第0部  なぜこの話をするのか</a:t>
+            </a:r>
+          </a:p>
+          <a:p>
+            <a:pPr lvl="1" algn="l">
+              <a:spcAft>
+                <a:spcPts val="600"/>
+              </a:spcAft>
+            </a:pPr>
+            <a:r>
+              <a:rPr sz="1700" b="0">
+                <a:solidFill>
+                  <a:srgbClr val="555555"/>
+                </a:solidFill>
+                <a:latin typeface="Meiryo UI"/>
+              </a:rPr>
+              <a:t>第1部  IPv6 そのもの — どこの国でも同じ話</a:t>
+            </a:r>
+          </a:p>
+          <a:p>
+            <a:pPr lvl="1" algn="l">
+              <a:spcAft>
+                <a:spcPts val="600"/>
+              </a:spcAft>
+            </a:pPr>
+            <a:r>
+              <a:rPr sz="1700" b="0">
+                <a:solidFill>
+                  <a:srgbClr val="555555"/>
+                </a:solidFill>
+                <a:latin typeface="Meiryo UI"/>
+              </a:rPr>
+              <a:t>第2部  日本の回線 — ここからは日本だけの話</a:t>
+            </a:r>
+          </a:p>
+          <a:p>
+            <a:pPr lvl="1" algn="l">
+              <a:spcAft>
+                <a:spcPts val="600"/>
+              </a:spcAft>
+            </a:pPr>
+            <a:r>
+              <a:rPr sz="1700" b="0">
+                <a:solidFill>
+                  <a:srgbClr val="555555"/>
+                </a:solidFill>
+                <a:latin typeface="Meiryo UI"/>
+              </a:rPr>
+              <a:t>第3部  IPv4 をどうやって運ぶか — 今日の本題</a:t>
+            </a:r>
+          </a:p>
+          <a:p>
+            <a:pPr lvl="1" algn="l">
+              <a:spcAft>
+                <a:spcPts val="600"/>
+              </a:spcAft>
+            </a:pPr>
+            <a:r>
+              <a:rPr sz="1700" b="0">
+                <a:solidFill>
+                  <a:srgbClr val="555555"/>
+                </a:solidFill>
+                <a:latin typeface="Meiryo UI"/>
+              </a:rPr>
+              <a:t>第4部  検証環境で実際に見たもの</a:t>
+            </a:r>
+          </a:p>
+          <a:p>
+            <a:pPr algn="l">
+              <a:spcAft>
+                <a:spcPts val="1000"/>
+              </a:spcAft>
+            </a:pPr>
+            <a:r>
+              <a:rPr sz="2000" b="1">
+                <a:solidFill>
+                  <a:srgbClr val="C0392B"/>
+                </a:solidFill>
+                <a:latin typeface="Meiryo UI"/>
+              </a:rPr>
+              <a:t>迷ったらこのページに戻ってください。どこの話か分かれば必ずついてこられます</a:t>
+            </a:r>
+          </a:p>
+        </p:txBody>
+      </p:sp>
+    </p:spTree>
+  </p:cSld>
+  <p:clrMapOvr>
+    <a:masterClrMapping/>
+  </p:clrMapOvr>
+</p:sld>
+</file>
+
+<file path=ppt/slides/slide30.xml><?xml version="1.0" encoding="utf-8"?>
+<p:sld xmlns:a="http://schemas.openxmlformats.org/drawingml/2006/main" xmlns:p="http://schemas.openxmlformats.org/presentationml/2006/main" xmlns:r="http://schemas.openxmlformats.org/officeDocument/2006/relationships">
+  <p:cSld>
+    <p:spTree>
+      <p:nvGrpSpPr>
+        <p:cNvPr id="1" name=""/>
+        <p:cNvGrpSpPr/>
+        <p:nvPr/>
+      </p:nvGrpSpPr>
+      <p:grpSpPr/>
+      <p:sp>
+        <p:nvSpPr>
+          <p:cNvPr id="2" name="TextBox 1"/>
+          <p:cNvSpPr txBox="1"/>
+          <p:nvPr/>
+        </p:nvSpPr>
+        <p:spPr>
+          <a:xfrm>
+            <a:off x="502920" y="320040"/>
+            <a:ext cx="11155680" cy="822960"/>
+          </a:xfrm>
+          <a:prstGeom prst="rect">
+            <a:avLst/>
+          </a:prstGeom>
+          <a:noFill/>
+        </p:spPr>
+        <p:txBody>
+          <a:bodyPr wrap="square">
+            <a:spAutoFit/>
+          </a:bodyPr>
+          <a:lstStyle/>
+          <a:p>
+            <a:pPr algn="l"/>
+            <a:r>
+              <a:rPr sz="2800" b="1">
+                <a:solidFill>
+                  <a:srgbClr val="1F3355"/>
+                </a:solidFill>
+                <a:latin typeface="Meiryo UI"/>
+              </a:rPr>
+              <a:t>だから VPN はこう提案します</a:t>
+            </a:r>
+          </a:p>
+        </p:txBody>
+      </p:sp>
+      <p:sp>
+        <p:nvSpPr>
+          <p:cNvPr id="3" name="Rectangle 2"/>
+          <p:cNvSpPr/>
+          <p:nvPr/>
+        </p:nvSpPr>
+        <p:spPr>
+          <a:xfrm>
+            <a:off x="502920" y="1115568"/>
+            <a:ext cx="11155680" cy="31750"/>
+          </a:xfrm>
+          <a:prstGeom prst="rect">
+            <a:avLst/>
+          </a:prstGeom>
+          <a:solidFill>
+            <a:srgbClr val="007ACC"/>
+          </a:solidFill>
+          <a:ln>
+            <a:noFill/>
+          </a:ln>
+        </p:spPr>
+        <p:style>
+          <a:lnRef idx="1">
+            <a:schemeClr val="accent1"/>
+          </a:lnRef>
+          <a:fillRef idx="3">
+            <a:schemeClr val="accent1"/>
+          </a:fillRef>
+          <a:effectRef idx="2">
+            <a:schemeClr val="accent1"/>
+          </a:effectRef>
+          <a:fontRef idx="minor">
+            <a:schemeClr val="lt1"/>
+          </a:fontRef>
+        </p:style>
+        <p:txBody>
+          <a:bodyPr rtlCol="0" anchor="ctr"/>
+          <a:lstStyle/>
+          <a:p>
+            <a:pPr algn="ctr"/>
+          </a:p>
+        </p:txBody>
+      </p:sp>
+      <p:sp>
+        <p:nvSpPr>
+          <p:cNvPr id="4" name="TextBox 3"/>
+          <p:cNvSpPr txBox="1"/>
+          <p:nvPr/>
+        </p:nvSpPr>
+        <p:spPr>
+          <a:xfrm>
+            <a:off x="594360" y="1371600"/>
+            <a:ext cx="10972800" cy="4983480"/>
+          </a:xfrm>
+          <a:prstGeom prst="rect">
+            <a:avLst/>
+          </a:prstGeom>
+          <a:noFill/>
+        </p:spPr>
+        <p:txBody>
+          <a:bodyPr wrap="square">
+            <a:spAutoFit/>
+          </a:bodyPr>
+          <a:lstStyle/>
+          <a:p>
+            <a:pPr algn="l">
+              <a:spcAft>
+                <a:spcPts val="1000"/>
+              </a:spcAft>
+            </a:pPr>
+            <a:r>
+              <a:rPr sz="2000" b="1">
+                <a:solidFill>
+                  <a:srgbClr val="1F3355"/>
+                </a:solidFill>
+                <a:latin typeface="Meiryo UI"/>
+              </a:rPr>
+              <a:t>結論: 少なくとも片端に固定 IP が要ります</a:t>
+            </a:r>
+          </a:p>
+          <a:p>
+            <a:pPr algn="l">
+              <a:spcAft>
+                <a:spcPts val="1000"/>
+              </a:spcAft>
+            </a:pPr>
+            <a:r>
+              <a:rPr sz="2000" b="1">
+                <a:solidFill>
+                  <a:srgbClr val="1F3355"/>
+                </a:solidFill>
+                <a:latin typeface="Meiryo UI"/>
+              </a:rPr>
+              <a:t>拠点 ←→ データセンタ / クラウド の形</a:t>
+            </a:r>
+          </a:p>
+          <a:p>
+            <a:pPr lvl="1" algn="l">
+              <a:spcAft>
+                <a:spcPts val="600"/>
+              </a:spcAft>
+            </a:pPr>
+            <a:r>
+              <a:rPr sz="1700" b="0">
+                <a:solidFill>
+                  <a:srgbClr val="555555"/>
+                </a:solidFill>
+                <a:latin typeface="Meiryo UI"/>
+              </a:rPr>
+              <a:t>センタ側を固定 IP にして、拠点からは発信のみ。これが一番よくある形です</a:t>
+            </a:r>
+          </a:p>
+          <a:p>
+            <a:pPr algn="l">
+              <a:spcAft>
+                <a:spcPts val="1000"/>
+              </a:spcAft>
+            </a:pPr>
+            <a:r>
+              <a:rPr sz="2000" b="1">
+                <a:solidFill>
+                  <a:srgbClr val="1F3355"/>
+                </a:solidFill>
+                <a:latin typeface="Meiryo UI"/>
+              </a:rPr>
+              <a:t>拠点 ←→ 拠点 を直接張る形</a:t>
+            </a:r>
+          </a:p>
+          <a:p>
+            <a:pPr lvl="1" algn="l">
+              <a:spcAft>
+                <a:spcPts val="600"/>
+              </a:spcAft>
+            </a:pPr>
+            <a:r>
+              <a:rPr sz="1700" b="0">
+                <a:solidFill>
+                  <a:srgbClr val="555555"/>
+                </a:solidFill>
+                <a:latin typeface="Meiryo UI"/>
+              </a:rPr>
+              <a:t>どちらか片方は固定 IP が要ります</a:t>
+            </a:r>
+          </a:p>
+          <a:p>
+            <a:pPr lvl="1" algn="l">
+              <a:spcAft>
+                <a:spcPts val="600"/>
+              </a:spcAft>
+            </a:pPr>
+            <a:r>
+              <a:rPr sz="1700" b="1">
+                <a:solidFill>
+                  <a:srgbClr val="C0392B"/>
+                </a:solidFill>
+                <a:latin typeface="Meiryo UI"/>
+              </a:rPr>
+              <a:t>両端とも MAP-E / DS-Lite だと、どちらも待ち受けできないので張れません</a:t>
+            </a:r>
+          </a:p>
+          <a:p>
+            <a:pPr algn="l">
+              <a:spcAft>
+                <a:spcPts val="1000"/>
+              </a:spcAft>
+            </a:pPr>
+            <a:r>
+              <a:rPr sz="2000" b="1">
+                <a:solidFill>
+                  <a:srgbClr val="1F3355"/>
+                </a:solidFill>
+                <a:latin typeface="Meiryo UI"/>
+              </a:rPr>
+              <a:t>ヒアリングで必ず聞くこと</a:t>
+            </a:r>
+          </a:p>
+          <a:p>
+            <a:pPr lvl="1" algn="l">
+              <a:spcAft>
+                <a:spcPts val="600"/>
+              </a:spcAft>
+            </a:pPr>
+            <a:r>
+              <a:rPr sz="1700" b="0">
+                <a:solidFill>
+                  <a:srgbClr val="555555"/>
+                </a:solidFill>
+                <a:latin typeface="Meiryo UI"/>
+              </a:rPr>
+              <a:t>「VPN はどちらから張っていますか」</a:t>
+            </a:r>
+          </a:p>
+          <a:p>
+            <a:pPr lvl="1" algn="l">
+              <a:spcAft>
+                <a:spcPts val="600"/>
+              </a:spcAft>
+            </a:pPr>
+            <a:r>
+              <a:rPr sz="1700" b="0">
+                <a:solidFill>
+                  <a:srgbClr val="555555"/>
+                </a:solidFill>
+                <a:latin typeface="Meiryo UI"/>
+              </a:rPr>
+              <a:t>「どちらでもいい」と言われたら、発信の向きを固定できるかを確認してください</a:t>
+            </a:r>
+          </a:p>
+          <a:p>
+            <a:pPr algn="l">
+              <a:spcAft>
+                <a:spcPts val="1000"/>
+              </a:spcAft>
+            </a:pPr>
+            <a:r>
+              <a:rPr sz="2000" b="1">
+                <a:solidFill>
+                  <a:srgbClr val="C0392B"/>
+                </a:solidFill>
+                <a:latin typeface="Meiryo UI"/>
+              </a:rPr>
+              <a:t>※ ここは机上の整理です。うちの検証環境ではまだ VPN を張って測っていません</a:t>
+            </a:r>
+          </a:p>
+          <a:p>
+            <a:pPr lvl="1" algn="l">
+              <a:spcAft>
+                <a:spcPts val="600"/>
+              </a:spcAft>
+            </a:pPr>
+            <a:r>
+              <a:rPr sz="1700" b="0">
+                <a:solidFill>
+                  <a:srgbClr val="555555"/>
+                </a:solidFill>
+                <a:latin typeface="Meiryo UI"/>
+              </a:rPr>
+              <a:t>案件で使う前に必ず実機で確かめてください (検証項目として積んであります)</a:t>
+            </a:r>
+          </a:p>
+        </p:txBody>
+      </p:sp>
+    </p:spTree>
+  </p:cSld>
+  <p:clrMapOvr>
+    <a:masterClrMapping/>
+  </p:clrMapOvr>
+</p:sld>
+</file>
+
+<file path=ppt/slides/slide31.xml><?xml version="1.0" encoding="utf-8"?>
+<p:sld xmlns:a="http://schemas.openxmlformats.org/drawingml/2006/main" xmlns:p="http://schemas.openxmlformats.org/presentationml/2006/main" xmlns:r="http://schemas.openxmlformats.org/officeDocument/2006/relationships">
+  <p:cSld>
+    <p:spTree>
+      <p:nvGrpSpPr>
+        <p:cNvPr id="1" name=""/>
+        <p:cNvGrpSpPr/>
+        <p:nvPr/>
+      </p:nvGrpSpPr>
+      <p:grpSpPr/>
+      <p:sp>
+        <p:nvSpPr>
+          <p:cNvPr id="2" name="TextBox 1"/>
+          <p:cNvSpPr txBox="1"/>
+          <p:nvPr/>
+        </p:nvSpPr>
+        <p:spPr>
+          <a:xfrm>
+            <a:off x="502920" y="320040"/>
+            <a:ext cx="11155680" cy="822960"/>
+          </a:xfrm>
+          <a:prstGeom prst="rect">
+            <a:avLst/>
+          </a:prstGeom>
+          <a:noFill/>
+        </p:spPr>
+        <p:txBody>
+          <a:bodyPr wrap="square">
+            <a:spAutoFit/>
+          </a:bodyPr>
+          <a:lstStyle/>
+          <a:p>
+            <a:pPr algn="l"/>
+            <a:r>
+              <a:rPr sz="2800" b="1">
+                <a:solidFill>
+                  <a:srgbClr val="1F3355"/>
+                </a:solidFill>
+                <a:latin typeface="Meiryo UI"/>
+              </a:rPr>
+              <a:t>MTU 1460 — 「Web は見えるのにファイルが落ちない」の正体</a:t>
+            </a:r>
+          </a:p>
+        </p:txBody>
+      </p:sp>
+      <p:sp>
+        <p:nvSpPr>
+          <p:cNvPr id="3" name="Rectangle 2"/>
+          <p:cNvSpPr/>
+          <p:nvPr/>
+        </p:nvSpPr>
+        <p:spPr>
+          <a:xfrm>
+            <a:off x="502920" y="1115568"/>
+            <a:ext cx="11155680" cy="31750"/>
+          </a:xfrm>
+          <a:prstGeom prst="rect">
+            <a:avLst/>
+          </a:prstGeom>
+          <a:solidFill>
+            <a:srgbClr val="007ACC"/>
+          </a:solidFill>
+          <a:ln>
+            <a:noFill/>
+          </a:ln>
+        </p:spPr>
+        <p:style>
+          <a:lnRef idx="1">
+            <a:schemeClr val="accent1"/>
+          </a:lnRef>
+          <a:fillRef idx="3">
+            <a:schemeClr val="accent1"/>
+          </a:fillRef>
+          <a:effectRef idx="2">
+            <a:schemeClr val="accent1"/>
+          </a:effectRef>
+          <a:fontRef idx="minor">
+            <a:schemeClr val="lt1"/>
+          </a:fontRef>
+        </p:style>
+        <p:txBody>
+          <a:bodyPr rtlCol="0" anchor="ctr"/>
+          <a:lstStyle/>
+          <a:p>
+            <a:pPr algn="ctr"/>
+          </a:p>
+        </p:txBody>
+      </p:sp>
+      <p:sp>
+        <p:nvSpPr>
+          <p:cNvPr id="4" name="TextBox 3"/>
+          <p:cNvSpPr txBox="1"/>
+          <p:nvPr/>
+        </p:nvSpPr>
+        <p:spPr>
+          <a:xfrm>
+            <a:off x="594360" y="1371600"/>
             <a:ext cx="10972800" cy="4709160"/>
           </a:xfrm>
           <a:prstGeom prst="rect">
@@ -9396,6 +11666,22 @@
                 <a:latin typeface="Meiryo UI"/>
               </a:rPr>
               <a:t>「1 回に運ぶ荷物をこれ以上大きくするな」と、あらかじめ上限を教えてやります</a:t>
+            </a:r>
+          </a:p>
+          <a:p>
+            <a:pPr lvl="1" algn="l">
+              <a:spcAft>
+                <a:spcPts val="600"/>
+              </a:spcAft>
+            </a:pPr>
+            <a:r>
+              <a:rPr sz="1700" b="0">
+                <a:solidFill>
+                  <a:srgbClr val="555555"/>
+                </a:solidFill>
+                <a:latin typeface="Meiryo UI"/>
+              </a:rPr>
+              <a:t>1460 (箱に入る大きさ) から TCP と IP のヘッダ 40 を引いて 1420。この数字を教えます</a:t>
             </a:r>
           </a:p>
           <a:p>
@@ -9491,7 +11777,7 @@
 </p:sld>
 </file>
 
-<file path=ppt/slides/slide26.xml><?xml version="1.0" encoding="utf-8"?>
+<file path=ppt/slides/slide32.xml><?xml version="1.0" encoding="utf-8"?>
 <p:sld xmlns:a="http://schemas.openxmlformats.org/drawingml/2006/main" xmlns:p="http://schemas.openxmlformats.org/presentationml/2006/main" xmlns:r="http://schemas.openxmlformats.org/officeDocument/2006/relationships">
   <p:cSld>
     <p:spTree>
@@ -9615,7 +11901,7 @@
 </p:sld>
 </file>
 
-<file path=ppt/slides/slide27.xml><?xml version="1.0" encoding="utf-8"?>
+<file path=ppt/slides/slide33.xml><?xml version="1.0" encoding="utf-8"?>
 <p:sld xmlns:a="http://schemas.openxmlformats.org/drawingml/2006/main" xmlns:p="http://schemas.openxmlformats.org/presentationml/2006/main" xmlns:r="http://schemas.openxmlformats.org/officeDocument/2006/relationships">
   <p:cSld>
     <p:spTree>
@@ -10101,6 +12387,22 @@
               </a:spcAft>
             </a:pPr>
             <a:r>
+              <a:rPr sz="1400" b="1">
+                <a:solidFill>
+                  <a:srgbClr val="C0392B"/>
+                </a:solidFill>
+                <a:latin typeface="Meiryo UI"/>
+              </a:rPr>
+              <a:t>※ 同じものを会社の VMware に再現する手順書一式があります。詰まった箇所も全部載せてあるので、案件前の事前検証に使えます。</a:t>
+            </a:r>
+          </a:p>
+          <a:p>
+            <a:pPr algn="l">
+              <a:spcAft>
+                <a:spcPts val="600"/>
+              </a:spcAft>
+            </a:pPr>
+            <a:r>
               <a:rPr sz="1400" b="0">
                 <a:solidFill>
                   <a:srgbClr val="555555"/>
@@ -10152,7 +12454,7 @@
 </p:sld>
 </file>
 
-<file path=ppt/slides/slide28.xml><?xml version="1.0" encoding="utf-8"?>
+<file path=ppt/slides/slide34.xml><?xml version="1.0" encoding="utf-8"?>
 <p:sld xmlns:a="http://schemas.openxmlformats.org/drawingml/2006/main" xmlns:p="http://schemas.openxmlformats.org/presentationml/2006/main" xmlns:r="http://schemas.openxmlformats.org/officeDocument/2006/relationships">
   <p:cSld>
     <p:spTree>
@@ -10554,7 +12856,7 @@
 </p:sld>
 </file>
 
-<file path=ppt/slides/slide29.xml><?xml version="1.0" encoding="utf-8"?>
+<file path=ppt/slides/slide35.xml><?xml version="1.0" encoding="utf-8"?>
 <p:sld xmlns:a="http://schemas.openxmlformats.org/drawingml/2006/main" xmlns:p="http://schemas.openxmlformats.org/presentationml/2006/main" xmlns:r="http://schemas.openxmlformats.org/officeDocument/2006/relationships">
   <p:cSld>
     <p:spTree>
@@ -11095,7 +13397,7 @@
 </p:sld>
 </file>
 
-<file path=ppt/slides/slide3.xml><?xml version="1.0" encoding="utf-8"?>
+<file path=ppt/slides/slide36.xml><?xml version="1.0" encoding="utf-8"?>
 <p:sld xmlns:a="http://schemas.openxmlformats.org/drawingml/2006/main" xmlns:p="http://schemas.openxmlformats.org/presentationml/2006/main" xmlns:r="http://schemas.openxmlformats.org/officeDocument/2006/relationships">
   <p:cSld>
     <p:spTree>
@@ -11135,7 +13437,7 @@
                 </a:solidFill>
                 <a:latin typeface="Meiryo UI"/>
               </a:rPr>
-              <a:t>今日 持ち帰ってほしいこと</a:t>
+              <a:t>やってみて分かった「効かない直感」3 つ</a:t>
             </a:r>
           </a:p>
         </p:txBody>
@@ -11207,177 +13509,241 @@
           <a:p>
             <a:pPr algn="l">
               <a:spcAft>
-                <a:spcPts val="1000"/>
-              </a:spcAft>
-            </a:pPr>
-            <a:r>
-              <a:rPr sz="2000" b="1">
+                <a:spcPts val="800"/>
+              </a:spcAft>
+            </a:pPr>
+            <a:r>
+              <a:rPr sz="1800" b="1">
                 <a:solidFill>
                   <a:srgbClr val="1F3355"/>
                 </a:solidFill>
                 <a:latin typeface="Meiryo UI"/>
               </a:rPr>
-              <a:t>3 つだけです</a:t>
+              <a:t>この 3 つは、教科書を読んだだけでは絶対に気づけませんでした</a:t>
+            </a:r>
+          </a:p>
+          <a:p>
+            <a:pPr algn="l">
+              <a:spcAft>
+                <a:spcPts val="800"/>
+              </a:spcAft>
+            </a:pPr>
+            <a:r>
+              <a:rPr sz="1800" b="1">
+                <a:solidFill>
+                  <a:srgbClr val="1F3355"/>
+                </a:solidFill>
+                <a:latin typeface="Meiryo UI"/>
+              </a:rPr>
+              <a:t>① 「疎通した」は「正しい経路を通った」ではない</a:t>
             </a:r>
           </a:p>
           <a:p>
             <a:pPr lvl="1" algn="l">
               <a:spcAft>
-                <a:spcPts val="600"/>
-              </a:spcAft>
-            </a:pPr>
-            <a:r>
-              <a:rPr sz="1700" b="0">
+                <a:spcPts val="400"/>
+              </a:spcAft>
+            </a:pPr>
+            <a:r>
+              <a:rPr sz="1500" b="0">
                 <a:solidFill>
                   <a:srgbClr val="555555"/>
                 </a:solidFill>
                 <a:latin typeface="Meiryo UI"/>
               </a:rPr>
-              <a:t>① なぜ IPv6 に変えるのか — 「アドレスが枯渇したから」ではありません</a:t>
+              <a:t>検証スクリプトが全項目 PASS したのに、経路が間違っていたことがありました</a:t>
             </a:r>
           </a:p>
           <a:p>
             <a:pPr lvl="1" algn="l">
               <a:spcAft>
-                <a:spcPts val="600"/>
-              </a:spcAft>
-            </a:pPr>
-            <a:r>
-              <a:rPr sz="1700" b="0">
+                <a:spcPts val="400"/>
+              </a:spcAft>
+            </a:pPr>
+            <a:r>
+              <a:rPr sz="1500" b="0">
                 <a:solidFill>
                   <a:srgbClr val="555555"/>
                 </a:solidFill>
                 <a:latin typeface="Meiryo UI"/>
               </a:rPr>
-              <a:t>② お客様の回線がどの方式か、商品名から言えるようになる (v6プラス、transix など)</a:t>
+              <a:t>構成を誤った DS-Lite で PASS=10。出口を見たらクライアントの私設アドレスのままだった</a:t>
             </a:r>
           </a:p>
           <a:p>
             <a:pPr lvl="1" algn="l">
               <a:spcAft>
-                <a:spcPts val="600"/>
-              </a:spcAft>
-            </a:pPr>
-            <a:r>
-              <a:rPr sz="1700" b="0">
+                <a:spcPts val="400"/>
+              </a:spcAft>
+            </a:pPr>
+            <a:r>
+              <a:rPr sz="1500" b="0">
                 <a:solidFill>
                   <a:srgbClr val="555555"/>
                 </a:solidFill>
                 <a:latin typeface="Meiryo UI"/>
               </a:rPr>
-              <a:t>③ 「ポート開放できますか?」に即答できるようになる</a:t>
+              <a:t>ping も curl も成功するので、見た目では絶対に分かりません</a:t>
+            </a:r>
+          </a:p>
+          <a:p>
+            <a:pPr lvl="1" algn="l">
+              <a:spcAft>
+                <a:spcPts val="400"/>
+              </a:spcAft>
+            </a:pPr>
+            <a:r>
+              <a:rPr sz="1500" b="1">
+                <a:solidFill>
+                  <a:srgbClr val="C0392B"/>
+                </a:solidFill>
+                <a:latin typeface="Meiryo UI"/>
+              </a:rPr>
+              <a:t>→ 必ず「出口のアドレス」を確認する。これだけが唯一の証拠です</a:t>
             </a:r>
           </a:p>
           <a:p>
             <a:pPr algn="l">
               <a:spcAft>
-                <a:spcPts val="1000"/>
-              </a:spcAft>
-            </a:pPr>
-            <a:r>
-              <a:rPr sz="2000" b="1">
+                <a:spcPts val="800"/>
+              </a:spcAft>
+            </a:pPr>
+            <a:r>
+              <a:rPr sz="1800" b="1">
                 <a:solidFill>
                   <a:srgbClr val="1F3355"/>
                 </a:solidFill>
                 <a:latin typeface="Meiryo UI"/>
               </a:rPr>
-              <a:t>話す順番 — 大きい話から細かい話へ降ります</a:t>
+              <a:t>② 設定が入ることと、動くことは別物</a:t>
             </a:r>
           </a:p>
           <a:p>
             <a:pPr lvl="1" algn="l">
               <a:spcAft>
-                <a:spcPts val="600"/>
-              </a:spcAft>
-            </a:pPr>
-            <a:r>
-              <a:rPr sz="1700" b="0">
+                <a:spcPts val="400"/>
+              </a:spcAft>
+            </a:pPr>
+            <a:r>
+              <a:rPr sz="1500" b="0">
                 <a:solidFill>
                   <a:srgbClr val="555555"/>
                 </a:solidFill>
                 <a:latin typeface="Meiryo UI"/>
               </a:rPr>
-              <a:t>第0部  なぜこの話をするのか</a:t>
+              <a:t>Cisco の仮想ルータで MAP-E を試したら、設定は通り確認コマンドも正しい値を返した</a:t>
             </a:r>
           </a:p>
           <a:p>
             <a:pPr lvl="1" algn="l">
               <a:spcAft>
-                <a:spcPts val="600"/>
-              </a:spcAft>
-            </a:pPr>
-            <a:r>
-              <a:rPr sz="1700" b="0">
+                <a:spcPts val="400"/>
+              </a:spcAft>
+            </a:pPr>
+            <a:r>
+              <a:rPr sz="1500" b="0">
                 <a:solidFill>
                   <a:srgbClr val="555555"/>
                 </a:solidFill>
                 <a:latin typeface="Meiryo UI"/>
               </a:rPr>
-              <a:t>第1部  IPv6 そのもの — どこの国でも同じ話</a:t>
+              <a:t>それなのにパケットが 1 つも流れなかった。実際にパケットを運ぶ部分が落ちていました</a:t>
             </a:r>
           </a:p>
           <a:p>
             <a:pPr lvl="1" algn="l">
               <a:spcAft>
-                <a:spcPts val="600"/>
-              </a:spcAft>
-            </a:pPr>
-            <a:r>
-              <a:rPr sz="1700" b="0">
+                <a:spcPts val="400"/>
+              </a:spcAft>
+            </a:pPr>
+            <a:r>
+              <a:rPr sz="1500" b="0">
                 <a:solidFill>
                   <a:srgbClr val="555555"/>
                 </a:solidFill>
                 <a:latin typeface="Meiryo UI"/>
               </a:rPr>
-              <a:t>第2部  日本の回線 — ここからは日本だけの話</a:t>
+              <a:t>※ 実機の Cisco で同じことが起きるかは確かめていません。仮想ルータでの話です</a:t>
             </a:r>
           </a:p>
           <a:p>
             <a:pPr lvl="1" algn="l">
               <a:spcAft>
-                <a:spcPts val="600"/>
-              </a:spcAft>
-            </a:pPr>
-            <a:r>
-              <a:rPr sz="1700" b="0">
+                <a:spcPts val="400"/>
+              </a:spcAft>
+            </a:pPr>
+            <a:r>
+              <a:rPr sz="1500" b="1">
+                <a:solidFill>
+                  <a:srgbClr val="C0392B"/>
+                </a:solidFill>
+                <a:latin typeface="Meiryo UI"/>
+              </a:rPr>
+              <a:t>→ 確認コマンドで終わらせず、パケットを流して測るところまでやる</a:t>
+            </a:r>
+          </a:p>
+          <a:p>
+            <a:pPr algn="l">
+              <a:spcAft>
+                <a:spcPts val="800"/>
+              </a:spcAft>
+            </a:pPr>
+            <a:r>
+              <a:rPr sz="1800" b="1">
+                <a:solidFill>
+                  <a:srgbClr val="1F3355"/>
+                </a:solidFill>
+                <a:latin typeface="Meiryo UI"/>
+              </a:rPr>
+              <a:t>③ 症状が 1 つでも、原因は 1 つとは限らない</a:t>
+            </a:r>
+          </a:p>
+          <a:p>
+            <a:pPr lvl="1" algn="l">
+              <a:spcAft>
+                <a:spcPts val="400"/>
+              </a:spcAft>
+            </a:pPr>
+            <a:r>
+              <a:rPr sz="1500" b="0">
                 <a:solidFill>
                   <a:srgbClr val="555555"/>
                 </a:solidFill>
                 <a:latin typeface="Meiryo UI"/>
               </a:rPr>
-              <a:t>第3部  IPv4 をどうやって運ぶか — 今日の本題</a:t>
+              <a:t>「ping は通るのに名前解決だけ死ぬ」を追ったら、独立した原因が 3 つ重なっていました</a:t>
             </a:r>
           </a:p>
           <a:p>
             <a:pPr lvl="1" algn="l">
               <a:spcAft>
-                <a:spcPts val="600"/>
-              </a:spcAft>
-            </a:pPr>
-            <a:r>
-              <a:rPr sz="1700" b="0">
+                <a:spcPts val="400"/>
+              </a:spcAft>
+            </a:pPr>
+            <a:r>
+              <a:rPr sz="1500" b="0">
                 <a:solidFill>
                   <a:srgbClr val="555555"/>
                 </a:solidFill>
                 <a:latin typeface="Meiryo UI"/>
               </a:rPr>
-              <a:t>第4部  検証環境で実際に見たもの</a:t>
-            </a:r>
-          </a:p>
-          <a:p>
-            <a:pPr algn="l">
-              <a:spcAft>
-                <a:spcPts val="1000"/>
-              </a:spcAft>
-            </a:pPr>
-            <a:r>
-              <a:rPr sz="2000" b="1">
+              <a:t>1 つ直しても直らないので「直したのに変わらない = 見当違い」と判断すると迷子になります</a:t>
+            </a:r>
+          </a:p>
+          <a:p>
+            <a:pPr lvl="1" algn="l">
+              <a:spcAft>
+                <a:spcPts val="400"/>
+              </a:spcAft>
+            </a:pPr>
+            <a:r>
+              <a:rPr sz="1500" b="1">
                 <a:solidFill>
                   <a:srgbClr val="C0392B"/>
                 </a:solidFill>
                 <a:latin typeface="Meiryo UI"/>
               </a:rPr>
-              <a:t>迷ったらこのページに戻ってください。どこの話か分かれば必ずついてこられます</a:t>
+              <a:t>→ 1 つ直したら 1 つ確かめる。まとめて直さない</a:t>
             </a:r>
           </a:p>
         </p:txBody>
@@ -11390,7 +13756,7 @@
 </p:sld>
 </file>
 
-<file path=ppt/slides/slide30.xml><?xml version="1.0" encoding="utf-8"?>
+<file path=ppt/slides/slide37.xml><?xml version="1.0" encoding="utf-8"?>
 <p:sld xmlns:a="http://schemas.openxmlformats.org/drawingml/2006/main" xmlns:p="http://schemas.openxmlformats.org/presentationml/2006/main" xmlns:r="http://schemas.openxmlformats.org/officeDocument/2006/relationships">
   <p:cSld>
     <p:spTree>
@@ -11430,7 +13796,7 @@
                 </a:solidFill>
                 <a:latin typeface="Meiryo UI"/>
               </a:rPr>
-              <a:t>やってみて分かった「効かない直感」3 つ</a:t>
+              <a:t>まとめ — 3 行と、明日から使うチェックリスト</a:t>
             </a:r>
           </a:p>
         </p:txBody>
@@ -11502,241 +13868,193 @@
           <a:p>
             <a:pPr algn="l">
               <a:spcAft>
-                <a:spcPts val="800"/>
-              </a:spcAft>
-            </a:pPr>
-            <a:r>
-              <a:rPr sz="1800" b="1">
+                <a:spcPts val="1000"/>
+              </a:spcAft>
+            </a:pPr>
+            <a:r>
+              <a:rPr sz="2000" b="1">
                 <a:solidFill>
                   <a:srgbClr val="1F3355"/>
                 </a:solidFill>
                 <a:latin typeface="Meiryo UI"/>
               </a:rPr>
-              <a:t>この 3 つは、教科書を読んだだけでは絶対に気づけませんでした</a:t>
+              <a:t>今日の話を 3 行にすると</a:t>
+            </a:r>
+          </a:p>
+          <a:p>
+            <a:pPr lvl="1" algn="l">
+              <a:spcAft>
+                <a:spcPts val="600"/>
+              </a:spcAft>
+            </a:pPr>
+            <a:r>
+              <a:rPr sz="1700" b="0">
+                <a:solidFill>
+                  <a:srgbClr val="555555"/>
+                </a:solidFill>
+                <a:latin typeface="Meiryo UI"/>
+              </a:rPr>
+              <a:t>① PPPoE が遅いから IPoE に変える。アドレス枯渇の話ではありません</a:t>
+            </a:r>
+          </a:p>
+          <a:p>
+            <a:pPr lvl="1" algn="l">
+              <a:spcAft>
+                <a:spcPts val="600"/>
+              </a:spcAft>
+            </a:pPr>
+            <a:r>
+              <a:rPr sz="1700" b="0">
+                <a:solidFill>
+                  <a:srgbClr val="555555"/>
+                </a:solidFill>
+                <a:latin typeface="Meiryo UI"/>
+              </a:rPr>
+              <a:t>② 社内は IPv4 のまま。だから IPv4 を IPv6 に載せて運ぶ。それが MAP-E と DS-Lite</a:t>
+            </a:r>
+          </a:p>
+          <a:p>
+            <a:pPr lvl="1" algn="l">
+              <a:spcAft>
+                <a:spcPts val="600"/>
+              </a:spcAft>
+            </a:pPr>
+            <a:r>
+              <a:rPr sz="1700" b="0">
+                <a:solidFill>
+                  <a:srgbClr val="555555"/>
+                </a:solidFill>
+                <a:latin typeface="Meiryo UI"/>
+              </a:rPr>
+              <a:t>③ どちらになるかは選べない。VNE が決めています</a:t>
             </a:r>
           </a:p>
           <a:p>
             <a:pPr algn="l">
               <a:spcAft>
-                <a:spcPts val="800"/>
-              </a:spcAft>
-            </a:pPr>
-            <a:r>
-              <a:rPr sz="1800" b="1">
+                <a:spcPts val="1000"/>
+              </a:spcAft>
+            </a:pPr>
+            <a:r>
+              <a:rPr sz="2000" b="1">
                 <a:solidFill>
                   <a:srgbClr val="1F3355"/>
                 </a:solidFill>
                 <a:latin typeface="Meiryo UI"/>
               </a:rPr>
-              <a:t>① 「疎通した」は「正しい経路を通った」ではない</a:t>
+              <a:t>案件で最初に確認する 5 つ</a:t>
             </a:r>
           </a:p>
           <a:p>
             <a:pPr lvl="1" algn="l">
               <a:spcAft>
-                <a:spcPts val="400"/>
-              </a:spcAft>
-            </a:pPr>
-            <a:r>
-              <a:rPr sz="1500" b="0">
+                <a:spcPts val="600"/>
+              </a:spcAft>
+            </a:pPr>
+            <a:r>
+              <a:rPr sz="1700" b="0">
                 <a:solidFill>
                   <a:srgbClr val="555555"/>
                 </a:solidFill>
                 <a:latin typeface="Meiryo UI"/>
               </a:rPr>
-              <a:t>検証スクリプトが全項目 PASS したのに、経路が間違っていたことがありました</a:t>
+              <a:t>□ ひかり電話はありますか → /64 か /56 かが決まる</a:t>
             </a:r>
           </a:p>
           <a:p>
             <a:pPr lvl="1" algn="l">
               <a:spcAft>
-                <a:spcPts val="400"/>
-              </a:spcAft>
-            </a:pPr>
-            <a:r>
-              <a:rPr sz="1500" b="0">
+                <a:spcPts val="600"/>
+              </a:spcAft>
+            </a:pPr>
+            <a:r>
+              <a:rPr sz="1700" b="0">
                 <a:solidFill>
                   <a:srgbClr val="555555"/>
                 </a:solidFill>
                 <a:latin typeface="Meiryo UI"/>
               </a:rPr>
-              <a:t>構成を誤った DS-Lite で PASS=10。出口を見たらクライアントの私設アドレスのままだった</a:t>
+              <a:t>□ VNE はどこですか → 方式が決まる (ISP 名だけでは分かりません)</a:t>
             </a:r>
           </a:p>
           <a:p>
             <a:pPr lvl="1" algn="l">
               <a:spcAft>
-                <a:spcPts val="400"/>
-              </a:spcAft>
-            </a:pPr>
-            <a:r>
-              <a:rPr sz="1500" b="0">
+                <a:spcPts val="600"/>
+              </a:spcAft>
+            </a:pPr>
+            <a:r>
+              <a:rPr sz="1700" b="0">
                 <a:solidFill>
                   <a:srgbClr val="555555"/>
                 </a:solidFill>
                 <a:latin typeface="Meiryo UI"/>
               </a:rPr>
-              <a:t>ping も curl も成功するので、見た目では絶対に分かりません</a:t>
+              <a:t>□ 外から入ってくる通信はありますか → VPN / 拠点間 / 監視 / カメラ</a:t>
             </a:r>
           </a:p>
           <a:p>
             <a:pPr lvl="1" algn="l">
               <a:spcAft>
-                <a:spcPts val="400"/>
-              </a:spcAft>
-            </a:pPr>
-            <a:r>
-              <a:rPr sz="1500" b="1">
+                <a:spcPts val="600"/>
+              </a:spcAft>
+            </a:pPr>
+            <a:r>
+              <a:rPr sz="1700" b="0">
+                <a:solidFill>
+                  <a:srgbClr val="555555"/>
+                </a:solidFill>
+                <a:latin typeface="Meiryo UI"/>
+              </a:rPr>
+              <a:t>□ ある場合、ポート番号は何番ですか → MAP-E でも開けられるかが決まる</a:t>
+            </a:r>
+          </a:p>
+          <a:p>
+            <a:pPr lvl="1" algn="l">
+              <a:spcAft>
+                <a:spcPts val="600"/>
+              </a:spcAft>
+            </a:pPr>
+            <a:r>
+              <a:rPr sz="1700" b="0">
+                <a:solidFill>
+                  <a:srgbClr val="555555"/>
+                </a:solidFill>
+                <a:latin typeface="Meiryo UI"/>
+              </a:rPr>
+              <a:t>□ 同時接続数はどれくらいですか → MAP-E のポート数 (240 など) で足りるか</a:t>
+            </a:r>
+          </a:p>
+          <a:p>
+            <a:pPr algn="l">
+              <a:spcAft>
+                <a:spcPts val="1000"/>
+              </a:spcAft>
+            </a:pPr>
+            <a:r>
+              <a:rPr sz="2000" b="1">
+                <a:solidFill>
+                  <a:srgbClr val="1F3355"/>
+                </a:solidFill>
+                <a:latin typeface="Meiryo UI"/>
+              </a:rPr>
+              <a:t>切替後に必ず確認する 1 つ</a:t>
+            </a:r>
+          </a:p>
+          <a:p>
+            <a:pPr lvl="1" algn="l">
+              <a:spcAft>
+                <a:spcPts val="600"/>
+              </a:spcAft>
+            </a:pPr>
+            <a:r>
+              <a:rPr sz="1700" b="1">
                 <a:solidFill>
                   <a:srgbClr val="C0392B"/>
                 </a:solidFill>
                 <a:latin typeface="Meiryo UI"/>
               </a:rPr>
-              <a:t>→ 必ず「出口のアドレス」を確認する。これだけが唯一の証拠です</a:t>
-            </a:r>
-          </a:p>
-          <a:p>
-            <a:pPr algn="l">
-              <a:spcAft>
-                <a:spcPts val="800"/>
-              </a:spcAft>
-            </a:pPr>
-            <a:r>
-              <a:rPr sz="1800" b="1">
-                <a:solidFill>
-                  <a:srgbClr val="1F3355"/>
-                </a:solidFill>
-                <a:latin typeface="Meiryo UI"/>
-              </a:rPr>
-              <a:t>② 設定が入ることと、動くことは別物</a:t>
-            </a:r>
-          </a:p>
-          <a:p>
-            <a:pPr lvl="1" algn="l">
-              <a:spcAft>
-                <a:spcPts val="400"/>
-              </a:spcAft>
-            </a:pPr>
-            <a:r>
-              <a:rPr sz="1500" b="0">
-                <a:solidFill>
-                  <a:srgbClr val="555555"/>
-                </a:solidFill>
-                <a:latin typeface="Meiryo UI"/>
-              </a:rPr>
-              <a:t>Cisco の仮想ルータで MAP-E を試したら、設定は通り確認コマンドも正しい値を返した</a:t>
-            </a:r>
-          </a:p>
-          <a:p>
-            <a:pPr lvl="1" algn="l">
-              <a:spcAft>
-                <a:spcPts val="400"/>
-              </a:spcAft>
-            </a:pPr>
-            <a:r>
-              <a:rPr sz="1500" b="0">
-                <a:solidFill>
-                  <a:srgbClr val="555555"/>
-                </a:solidFill>
-                <a:latin typeface="Meiryo UI"/>
-              </a:rPr>
-              <a:t>それなのにパケットが 1 つも流れなかった。実際にパケットを運ぶ部分が落ちていました</a:t>
-            </a:r>
-          </a:p>
-          <a:p>
-            <a:pPr lvl="1" algn="l">
-              <a:spcAft>
-                <a:spcPts val="400"/>
-              </a:spcAft>
-            </a:pPr>
-            <a:r>
-              <a:rPr sz="1500" b="0">
-                <a:solidFill>
-                  <a:srgbClr val="555555"/>
-                </a:solidFill>
-                <a:latin typeface="Meiryo UI"/>
-              </a:rPr>
-              <a:t>※ 実機の Cisco で同じことが起きるかは確かめていません。仮想ルータでの話です</a:t>
-            </a:r>
-          </a:p>
-          <a:p>
-            <a:pPr lvl="1" algn="l">
-              <a:spcAft>
-                <a:spcPts val="400"/>
-              </a:spcAft>
-            </a:pPr>
-            <a:r>
-              <a:rPr sz="1500" b="1">
-                <a:solidFill>
-                  <a:srgbClr val="C0392B"/>
-                </a:solidFill>
-                <a:latin typeface="Meiryo UI"/>
-              </a:rPr>
-              <a:t>→ 確認コマンドで終わらせず、パケットを流して測るところまでやる</a:t>
-            </a:r>
-          </a:p>
-          <a:p>
-            <a:pPr algn="l">
-              <a:spcAft>
-                <a:spcPts val="800"/>
-              </a:spcAft>
-            </a:pPr>
-            <a:r>
-              <a:rPr sz="1800" b="1">
-                <a:solidFill>
-                  <a:srgbClr val="1F3355"/>
-                </a:solidFill>
-                <a:latin typeface="Meiryo UI"/>
-              </a:rPr>
-              <a:t>③ 症状が 1 つでも、原因は 1 つとは限らない</a:t>
-            </a:r>
-          </a:p>
-          <a:p>
-            <a:pPr lvl="1" algn="l">
-              <a:spcAft>
-                <a:spcPts val="400"/>
-              </a:spcAft>
-            </a:pPr>
-            <a:r>
-              <a:rPr sz="1500" b="0">
-                <a:solidFill>
-                  <a:srgbClr val="555555"/>
-                </a:solidFill>
-                <a:latin typeface="Meiryo UI"/>
-              </a:rPr>
-              <a:t>「ping は通るのに名前解決だけ死ぬ」を追ったら、独立した原因が 3 つ重なっていました</a:t>
-            </a:r>
-          </a:p>
-          <a:p>
-            <a:pPr lvl="1" algn="l">
-              <a:spcAft>
-                <a:spcPts val="400"/>
-              </a:spcAft>
-            </a:pPr>
-            <a:r>
-              <a:rPr sz="1500" b="0">
-                <a:solidFill>
-                  <a:srgbClr val="555555"/>
-                </a:solidFill>
-                <a:latin typeface="Meiryo UI"/>
-              </a:rPr>
-              <a:t>1 つ直しても直らないので「直したのに変わらない = 見当違い」と判断すると迷子になります</a:t>
-            </a:r>
-          </a:p>
-          <a:p>
-            <a:pPr lvl="1" algn="l">
-              <a:spcAft>
-                <a:spcPts val="400"/>
-              </a:spcAft>
-            </a:pPr>
-            <a:r>
-              <a:rPr sz="1500" b="1">
-                <a:solidFill>
-                  <a:srgbClr val="C0392B"/>
-                </a:solidFill>
-                <a:latin typeface="Meiryo UI"/>
-              </a:rPr>
-              <a:t>→ 1 つ直したら 1 つ確かめる。まとめて直さない</a:t>
+              <a:t>□ どのアドレスで外に出たか。疎通確認だけでは経路が正しいことを示せません</a:t>
             </a:r>
           </a:p>
         </p:txBody>
@@ -11749,629 +14067,7 @@
 </p:sld>
 </file>
 
-<file path=ppt/slides/slide31.xml><?xml version="1.0" encoding="utf-8"?>
-<p:sld xmlns:a="http://schemas.openxmlformats.org/drawingml/2006/main" xmlns:p="http://schemas.openxmlformats.org/presentationml/2006/main" xmlns:r="http://schemas.openxmlformats.org/officeDocument/2006/relationships">
-  <p:cSld>
-    <p:spTree>
-      <p:nvGrpSpPr>
-        <p:cNvPr id="1" name=""/>
-        <p:cNvGrpSpPr/>
-        <p:nvPr/>
-      </p:nvGrpSpPr>
-      <p:grpSpPr/>
-      <p:sp>
-        <p:nvSpPr>
-          <p:cNvPr id="2" name="TextBox 1"/>
-          <p:cNvSpPr txBox="1"/>
-          <p:nvPr/>
-        </p:nvSpPr>
-        <p:spPr>
-          <a:xfrm>
-            <a:off x="502920" y="320040"/>
-            <a:ext cx="11155680" cy="822960"/>
-          </a:xfrm>
-          <a:prstGeom prst="rect">
-            <a:avLst/>
-          </a:prstGeom>
-          <a:noFill/>
-        </p:spPr>
-        <p:txBody>
-          <a:bodyPr wrap="square">
-            <a:spAutoFit/>
-          </a:bodyPr>
-          <a:lstStyle/>
-          <a:p>
-            <a:pPr algn="l"/>
-            <a:r>
-              <a:rPr sz="2800" b="1">
-                <a:solidFill>
-                  <a:srgbClr val="1F3355"/>
-                </a:solidFill>
-                <a:latin typeface="Meiryo UI"/>
-              </a:rPr>
-              <a:t>会社でどう使うか</a:t>
-            </a:r>
-          </a:p>
-        </p:txBody>
-      </p:sp>
-      <p:sp>
-        <p:nvSpPr>
-          <p:cNvPr id="3" name="Rectangle 2"/>
-          <p:cNvSpPr/>
-          <p:nvPr/>
-        </p:nvSpPr>
-        <p:spPr>
-          <a:xfrm>
-            <a:off x="502920" y="1115568"/>
-            <a:ext cx="11155680" cy="31750"/>
-          </a:xfrm>
-          <a:prstGeom prst="rect">
-            <a:avLst/>
-          </a:prstGeom>
-          <a:solidFill>
-            <a:srgbClr val="007ACC"/>
-          </a:solidFill>
-          <a:ln>
-            <a:noFill/>
-          </a:ln>
-        </p:spPr>
-        <p:style>
-          <a:lnRef idx="1">
-            <a:schemeClr val="accent1"/>
-          </a:lnRef>
-          <a:fillRef idx="3">
-            <a:schemeClr val="accent1"/>
-          </a:fillRef>
-          <a:effectRef idx="2">
-            <a:schemeClr val="accent1"/>
-          </a:effectRef>
-          <a:fontRef idx="minor">
-            <a:schemeClr val="lt1"/>
-          </a:fontRef>
-        </p:style>
-        <p:txBody>
-          <a:bodyPr rtlCol="0" anchor="ctr"/>
-          <a:lstStyle/>
-          <a:p>
-            <a:pPr algn="ctr"/>
-          </a:p>
-        </p:txBody>
-      </p:sp>
-      <p:sp>
-        <p:nvSpPr>
-          <p:cNvPr id="4" name="TextBox 3"/>
-          <p:cNvSpPr txBox="1"/>
-          <p:nvPr/>
-        </p:nvSpPr>
-        <p:spPr>
-          <a:xfrm>
-            <a:off x="594360" y="1371600"/>
-            <a:ext cx="10972800" cy="4983480"/>
-          </a:xfrm>
-          <a:prstGeom prst="rect">
-            <a:avLst/>
-          </a:prstGeom>
-          <a:noFill/>
-        </p:spPr>
-        <p:txBody>
-          <a:bodyPr wrap="square">
-            <a:spAutoFit/>
-          </a:bodyPr>
-          <a:lstStyle/>
-          <a:p>
-            <a:pPr algn="l">
-              <a:spcAft>
-                <a:spcPts val="1000"/>
-              </a:spcAft>
-            </a:pPr>
-            <a:r>
-              <a:rPr sz="2000" b="1">
-                <a:solidFill>
-                  <a:srgbClr val="1F3355"/>
-                </a:solidFill>
-                <a:latin typeface="Meiryo UI"/>
-              </a:rPr>
-              <a:t>同じものを会社の VMware に再現できるよう、一式を用意してあります</a:t>
-            </a:r>
-          </a:p>
-          <a:p>
-            <a:pPr lvl="1" algn="l">
-              <a:spcAft>
-                <a:spcPts val="600"/>
-              </a:spcAft>
-            </a:pPr>
-            <a:r>
-              <a:rPr sz="1700" b="0">
-                <a:solidFill>
-                  <a:srgbClr val="555555"/>
-                </a:solidFill>
-                <a:latin typeface="Meiryo UI"/>
-              </a:rPr>
-              <a:t>構築ランブック … 上から順に実行すれば完成する手順書。詰まった箇所も全部載せてあります</a:t>
-            </a:r>
-          </a:p>
-          <a:p>
-            <a:pPr lvl="1" algn="l">
-              <a:spcAft>
-                <a:spcPts val="600"/>
-              </a:spcAft>
-            </a:pPr>
-            <a:r>
-              <a:rPr sz="1700" b="0">
-                <a:solidFill>
-                  <a:srgbClr val="555555"/>
-                </a:solidFill>
-                <a:latin typeface="Meiryo UI"/>
-              </a:rPr>
-              <a:t>セットアップスクリプト … 各サーバの設定を自動でやるもの</a:t>
-            </a:r>
-          </a:p>
-          <a:p>
-            <a:pPr lvl="1" algn="l">
-              <a:spcAft>
-                <a:spcPts val="600"/>
-              </a:spcAft>
-            </a:pPr>
-            <a:r>
-              <a:rPr sz="1700" b="0">
-                <a:solidFill>
-                  <a:srgbClr val="555555"/>
-                </a:solidFill>
-                <a:latin typeface="Meiryo UI"/>
-              </a:rPr>
-              <a:t>チェックスクリプト … 切替の前後で流して証跡ログを残すもの (Windows 版もあります)</a:t>
-            </a:r>
-          </a:p>
-          <a:p>
-            <a:pPr lvl="1" algn="l">
-              <a:spcAft>
-                <a:spcPts val="600"/>
-              </a:spcAft>
-            </a:pPr>
-            <a:r>
-              <a:rPr sz="1700" b="0">
-                <a:solidFill>
-                  <a:srgbClr val="555555"/>
-                </a:solidFill>
-                <a:latin typeface="Meiryo UI"/>
-              </a:rPr>
-              <a:t>障害再現レシピ … わざと壊すための手順</a:t>
-            </a:r>
-          </a:p>
-          <a:p>
-            <a:pPr lvl="1" algn="l">
-              <a:spcAft>
-                <a:spcPts val="600"/>
-              </a:spcAft>
-            </a:pPr>
-            <a:r>
-              <a:rPr sz="1700" b="0">
-                <a:solidFill>
-                  <a:srgbClr val="555555"/>
-                </a:solidFill>
-                <a:latin typeface="Meiryo UI"/>
-              </a:rPr>
-              <a:t>実走の記録 … 何をやって何にハマったかの一次記録</a:t>
-            </a:r>
-          </a:p>
-          <a:p>
-            <a:pPr algn="l">
-              <a:spcAft>
-                <a:spcPts val="1000"/>
-              </a:spcAft>
-            </a:pPr>
-            <a:r>
-              <a:rPr sz="2000" b="1">
-                <a:solidFill>
-                  <a:srgbClr val="C0392B"/>
-                </a:solidFill>
-                <a:latin typeface="Meiryo UI"/>
-              </a:rPr>
-              <a:t>会社は AI も GitHub も使えない前提で作ってあります</a:t>
-            </a:r>
-          </a:p>
-          <a:p>
-            <a:pPr lvl="1" algn="l">
-              <a:spcAft>
-                <a:spcPts val="600"/>
-              </a:spcAft>
-            </a:pPr>
-            <a:r>
-              <a:rPr sz="1700" b="0">
-                <a:solidFill>
-                  <a:srgbClr val="555555"/>
-                </a:solidFill>
-                <a:latin typeface="Meiryo UI"/>
-              </a:rPr>
-              <a:t>このバンドルだけ持ち込めば構築できます</a:t>
-            </a:r>
-          </a:p>
-          <a:p>
-            <a:pPr algn="l">
-              <a:spcAft>
-                <a:spcPts val="1000"/>
-              </a:spcAft>
-            </a:pPr>
-            <a:r>
-              <a:rPr sz="2000" b="1">
-                <a:solidFill>
-                  <a:srgbClr val="1F3355"/>
-                </a:solidFill>
-                <a:latin typeface="Meiryo UI"/>
-              </a:rPr>
-              <a:t>想定している使い道</a:t>
-            </a:r>
-          </a:p>
-          <a:p>
-            <a:pPr lvl="1" algn="l">
-              <a:spcAft>
-                <a:spcPts val="600"/>
-              </a:spcAft>
-            </a:pPr>
-            <a:r>
-              <a:rPr sz="1700" b="0">
-                <a:solidFill>
-                  <a:srgbClr val="555555"/>
-                </a:solidFill>
-                <a:latin typeface="Meiryo UI"/>
-              </a:rPr>
-              <a:t>① 勉強会 (若手にパケットを見せる)</a:t>
-            </a:r>
-          </a:p>
-          <a:p>
-            <a:pPr lvl="1" algn="l">
-              <a:spcAft>
-                <a:spcPts val="600"/>
-              </a:spcAft>
-            </a:pPr>
-            <a:r>
-              <a:rPr sz="1700" b="0">
-                <a:solidFill>
-                  <a:srgbClr val="555555"/>
-                </a:solidFill>
-                <a:latin typeface="Meiryo UI"/>
-              </a:rPr>
-              <a:t>② 案件前の事前検証 (この構成で本当に動くかを先に確かめる)</a:t>
-            </a:r>
-          </a:p>
-          <a:p>
-            <a:pPr lvl="1" algn="l">
-              <a:spcAft>
-                <a:spcPts val="600"/>
-              </a:spcAft>
-            </a:pPr>
-            <a:r>
-              <a:rPr sz="1700" b="0">
-                <a:solidFill>
-                  <a:srgbClr val="555555"/>
-                </a:solidFill>
-                <a:latin typeface="Meiryo UI"/>
-              </a:rPr>
-              <a:t>③ 切替当日の判断材料 (同じ症状を先に見ておく)</a:t>
-            </a:r>
-          </a:p>
-        </p:txBody>
-      </p:sp>
-    </p:spTree>
-  </p:cSld>
-  <p:clrMapOvr>
-    <a:masterClrMapping/>
-  </p:clrMapOvr>
-</p:sld>
-</file>
-
-<file path=ppt/slides/slide32.xml><?xml version="1.0" encoding="utf-8"?>
-<p:sld xmlns:a="http://schemas.openxmlformats.org/drawingml/2006/main" xmlns:p="http://schemas.openxmlformats.org/presentationml/2006/main" xmlns:r="http://schemas.openxmlformats.org/officeDocument/2006/relationships">
-  <p:cSld>
-    <p:spTree>
-      <p:nvGrpSpPr>
-        <p:cNvPr id="1" name=""/>
-        <p:cNvGrpSpPr/>
-        <p:nvPr/>
-      </p:nvGrpSpPr>
-      <p:grpSpPr/>
-      <p:sp>
-        <p:nvSpPr>
-          <p:cNvPr id="2" name="TextBox 1"/>
-          <p:cNvSpPr txBox="1"/>
-          <p:nvPr/>
-        </p:nvSpPr>
-        <p:spPr>
-          <a:xfrm>
-            <a:off x="502920" y="320040"/>
-            <a:ext cx="11155680" cy="822960"/>
-          </a:xfrm>
-          <a:prstGeom prst="rect">
-            <a:avLst/>
-          </a:prstGeom>
-          <a:noFill/>
-        </p:spPr>
-        <p:txBody>
-          <a:bodyPr wrap="square">
-            <a:spAutoFit/>
-          </a:bodyPr>
-          <a:lstStyle/>
-          <a:p>
-            <a:pPr algn="l"/>
-            <a:r>
-              <a:rPr sz="2800" b="1">
-                <a:solidFill>
-                  <a:srgbClr val="1F3355"/>
-                </a:solidFill>
-                <a:latin typeface="Meiryo UI"/>
-              </a:rPr>
-              <a:t>まとめ — 3 行と、明日から使うチェックリスト</a:t>
-            </a:r>
-          </a:p>
-        </p:txBody>
-      </p:sp>
-      <p:sp>
-        <p:nvSpPr>
-          <p:cNvPr id="3" name="Rectangle 2"/>
-          <p:cNvSpPr/>
-          <p:nvPr/>
-        </p:nvSpPr>
-        <p:spPr>
-          <a:xfrm>
-            <a:off x="502920" y="1115568"/>
-            <a:ext cx="11155680" cy="31750"/>
-          </a:xfrm>
-          <a:prstGeom prst="rect">
-            <a:avLst/>
-          </a:prstGeom>
-          <a:solidFill>
-            <a:srgbClr val="007ACC"/>
-          </a:solidFill>
-          <a:ln>
-            <a:noFill/>
-          </a:ln>
-        </p:spPr>
-        <p:style>
-          <a:lnRef idx="1">
-            <a:schemeClr val="accent1"/>
-          </a:lnRef>
-          <a:fillRef idx="3">
-            <a:schemeClr val="accent1"/>
-          </a:fillRef>
-          <a:effectRef idx="2">
-            <a:schemeClr val="accent1"/>
-          </a:effectRef>
-          <a:fontRef idx="minor">
-            <a:schemeClr val="lt1"/>
-          </a:fontRef>
-        </p:style>
-        <p:txBody>
-          <a:bodyPr rtlCol="0" anchor="ctr"/>
-          <a:lstStyle/>
-          <a:p>
-            <a:pPr algn="ctr"/>
-          </a:p>
-        </p:txBody>
-      </p:sp>
-      <p:sp>
-        <p:nvSpPr>
-          <p:cNvPr id="4" name="TextBox 3"/>
-          <p:cNvSpPr txBox="1"/>
-          <p:nvPr/>
-        </p:nvSpPr>
-        <p:spPr>
-          <a:xfrm>
-            <a:off x="594360" y="1371600"/>
-            <a:ext cx="10972800" cy="4983480"/>
-          </a:xfrm>
-          <a:prstGeom prst="rect">
-            <a:avLst/>
-          </a:prstGeom>
-          <a:noFill/>
-        </p:spPr>
-        <p:txBody>
-          <a:bodyPr wrap="square">
-            <a:spAutoFit/>
-          </a:bodyPr>
-          <a:lstStyle/>
-          <a:p>
-            <a:pPr algn="l">
-              <a:spcAft>
-                <a:spcPts val="1000"/>
-              </a:spcAft>
-            </a:pPr>
-            <a:r>
-              <a:rPr sz="2000" b="1">
-                <a:solidFill>
-                  <a:srgbClr val="1F3355"/>
-                </a:solidFill>
-                <a:latin typeface="Meiryo UI"/>
-              </a:rPr>
-              <a:t>今日の話を 3 行にすると</a:t>
-            </a:r>
-          </a:p>
-          <a:p>
-            <a:pPr lvl="1" algn="l">
-              <a:spcAft>
-                <a:spcPts val="600"/>
-              </a:spcAft>
-            </a:pPr>
-            <a:r>
-              <a:rPr sz="1700" b="0">
-                <a:solidFill>
-                  <a:srgbClr val="555555"/>
-                </a:solidFill>
-                <a:latin typeface="Meiryo UI"/>
-              </a:rPr>
-              <a:t>① PPPoE が遅いから IPoE に変える。アドレス枯渇の話ではありません</a:t>
-            </a:r>
-          </a:p>
-          <a:p>
-            <a:pPr lvl="1" algn="l">
-              <a:spcAft>
-                <a:spcPts val="600"/>
-              </a:spcAft>
-            </a:pPr>
-            <a:r>
-              <a:rPr sz="1700" b="0">
-                <a:solidFill>
-                  <a:srgbClr val="555555"/>
-                </a:solidFill>
-                <a:latin typeface="Meiryo UI"/>
-              </a:rPr>
-              <a:t>② 社内は IPv4 のまま。だから IPv4 を IPv6 に載せて運ぶ。それが MAP-E と DS-Lite</a:t>
-            </a:r>
-          </a:p>
-          <a:p>
-            <a:pPr lvl="1" algn="l">
-              <a:spcAft>
-                <a:spcPts val="600"/>
-              </a:spcAft>
-            </a:pPr>
-            <a:r>
-              <a:rPr sz="1700" b="0">
-                <a:solidFill>
-                  <a:srgbClr val="555555"/>
-                </a:solidFill>
-                <a:latin typeface="Meiryo UI"/>
-              </a:rPr>
-              <a:t>③ どちらになるかは選べない。VNE が決めています</a:t>
-            </a:r>
-          </a:p>
-          <a:p>
-            <a:pPr algn="l">
-              <a:spcAft>
-                <a:spcPts val="1000"/>
-              </a:spcAft>
-            </a:pPr>
-            <a:r>
-              <a:rPr sz="2000" b="1">
-                <a:solidFill>
-                  <a:srgbClr val="1F3355"/>
-                </a:solidFill>
-                <a:latin typeface="Meiryo UI"/>
-              </a:rPr>
-              <a:t>案件で最初に確認する 5 つ</a:t>
-            </a:r>
-          </a:p>
-          <a:p>
-            <a:pPr lvl="1" algn="l">
-              <a:spcAft>
-                <a:spcPts val="600"/>
-              </a:spcAft>
-            </a:pPr>
-            <a:r>
-              <a:rPr sz="1700" b="0">
-                <a:solidFill>
-                  <a:srgbClr val="555555"/>
-                </a:solidFill>
-                <a:latin typeface="Meiryo UI"/>
-              </a:rPr>
-              <a:t>□ ひかり電話はありますか → /64 か /56 かが決まる</a:t>
-            </a:r>
-          </a:p>
-          <a:p>
-            <a:pPr lvl="1" algn="l">
-              <a:spcAft>
-                <a:spcPts val="600"/>
-              </a:spcAft>
-            </a:pPr>
-            <a:r>
-              <a:rPr sz="1700" b="0">
-                <a:solidFill>
-                  <a:srgbClr val="555555"/>
-                </a:solidFill>
-                <a:latin typeface="Meiryo UI"/>
-              </a:rPr>
-              <a:t>□ VNE はどこですか → 方式が決まる (ISP 名だけでは分かりません)</a:t>
-            </a:r>
-          </a:p>
-          <a:p>
-            <a:pPr lvl="1" algn="l">
-              <a:spcAft>
-                <a:spcPts val="600"/>
-              </a:spcAft>
-            </a:pPr>
-            <a:r>
-              <a:rPr sz="1700" b="0">
-                <a:solidFill>
-                  <a:srgbClr val="555555"/>
-                </a:solidFill>
-                <a:latin typeface="Meiryo UI"/>
-              </a:rPr>
-              <a:t>□ 外から入ってくる通信はありますか → VPN / 拠点間 / 監視 / カメラ</a:t>
-            </a:r>
-          </a:p>
-          <a:p>
-            <a:pPr lvl="1" algn="l">
-              <a:spcAft>
-                <a:spcPts val="600"/>
-              </a:spcAft>
-            </a:pPr>
-            <a:r>
-              <a:rPr sz="1700" b="0">
-                <a:solidFill>
-                  <a:srgbClr val="555555"/>
-                </a:solidFill>
-                <a:latin typeface="Meiryo UI"/>
-              </a:rPr>
-              <a:t>□ ある場合、ポート番号は何番ですか → MAP-E でも開けられるかが決まる</a:t>
-            </a:r>
-          </a:p>
-          <a:p>
-            <a:pPr lvl="1" algn="l">
-              <a:spcAft>
-                <a:spcPts val="600"/>
-              </a:spcAft>
-            </a:pPr>
-            <a:r>
-              <a:rPr sz="1700" b="0">
-                <a:solidFill>
-                  <a:srgbClr val="555555"/>
-                </a:solidFill>
-                <a:latin typeface="Meiryo UI"/>
-              </a:rPr>
-              <a:t>□ 同時接続数はどれくらいですか → MAP-E のポート数 (240 など) で足りるか</a:t>
-            </a:r>
-          </a:p>
-          <a:p>
-            <a:pPr algn="l">
-              <a:spcAft>
-                <a:spcPts val="1000"/>
-              </a:spcAft>
-            </a:pPr>
-            <a:r>
-              <a:rPr sz="2000" b="1">
-                <a:solidFill>
-                  <a:srgbClr val="1F3355"/>
-                </a:solidFill>
-                <a:latin typeface="Meiryo UI"/>
-              </a:rPr>
-              <a:t>切替後に必ず確認する 1 つ</a:t>
-            </a:r>
-          </a:p>
-          <a:p>
-            <a:pPr lvl="1" algn="l">
-              <a:spcAft>
-                <a:spcPts val="600"/>
-              </a:spcAft>
-            </a:pPr>
-            <a:r>
-              <a:rPr sz="1700" b="1">
-                <a:solidFill>
-                  <a:srgbClr val="C0392B"/>
-                </a:solidFill>
-                <a:latin typeface="Meiryo UI"/>
-              </a:rPr>
-              <a:t>□ どのアドレスで外に出たか。疎通確認だけでは経路が正しいことを示せません</a:t>
-            </a:r>
-          </a:p>
-        </p:txBody>
-      </p:sp>
-    </p:spTree>
-  </p:cSld>
-  <p:clrMapOvr>
-    <a:masterClrMapping/>
-  </p:clrMapOvr>
-</p:sld>
-</file>
-
-<file path=ppt/slides/slide33.xml><?xml version="1.0" encoding="utf-8"?>
+<file path=ppt/slides/slide38.xml><?xml version="1.0" encoding="utf-8"?>
 <p:sld xmlns:a="http://schemas.openxmlformats.org/drawingml/2006/main" xmlns:p="http://schemas.openxmlformats.org/presentationml/2006/main" xmlns:r="http://schemas.openxmlformats.org/officeDocument/2006/relationships">
   <p:cSld>
     <p:spTree>
@@ -15199,7 +16895,7 @@
                 </a:solidFill>
                 <a:latin typeface="Meiryo UI"/>
               </a:rPr>
-              <a:t>一番大事なのは 4 つめ。「ICMP は ping だから止めていい」は IPv4 の感覚です</a:t>
+              <a:t>一番大事なのは 4 つめ。「ICMP は ping だから止めていい」は IPv4 の感覚です (通す種類は次ページ)</a:t>
             </a:r>
           </a:p>
         </p:txBody>

--- a/docs/ipoe-lab/slides/setsumeikai.pptx
+++ b/docs/ipoe-lab/slides/setsumeikai.pptx
@@ -8590,7 +8590,7 @@
                 </a:solidFill>
                 <a:latin typeface="Meiryo UI"/>
               </a:rPr>
-              <a:t>冒頭の宅配便で「出口の業者が仕分けする」と言ったのが、これです</a:t>
+              <a:t>2-3 の宅配便のたとえで「出口の業者が仕分けする」と言ったのが、これです</a:t>
             </a:r>
           </a:p>
           <a:p>
@@ -10079,7 +10079,7 @@
                 </a:solidFill>
                 <a:latin typeface="Meiryo UI"/>
               </a:rPr>
-              <a:t>そもそもポート開放 = 「外から来た通信を、社内のこの機械に通してください」というルータへの指示です</a:t>
+              <a:t>そもそもポート開放 = 「外から来た通信を、社内のこの機械に通してください」というルータへの指示。2-3 の「伝票番号」の話です</a:t>
             </a:r>
           </a:p>
         </p:txBody>

--- a/docs/ipoe-lab/slides/setsumeikai.pptx
+++ b/docs/ipoe-lab/slides/setsumeikai.pptx
@@ -43,6 +43,7 @@
     <p:sldId id="291" r:id="rId42"/>
     <p:sldId id="292" r:id="rId43"/>
     <p:sldId id="293" r:id="rId44"/>
+    <p:sldId id="294" r:id="rId45"/>
   </p:sldIdLst>
   <p:sldSz cx="12191695" cy="6858000" type="screen4x3"/>
   <p:notesSz cx="6858000" cy="9144000"/>
@@ -3501,7 +3502,7 @@
                 </a:solidFill>
                 <a:latin typeface="Meiryo UI"/>
               </a:rPr>
-              <a:t>エラー通知 4 種 (宛先到達不能 / パケット過大 / 時間超過 / パラメータ異常)</a:t>
+              <a:t>エラー通知 4 種  宛先到達不能(1) / パケット過大(2) / 時間超過(3) / パラメータ異常(4)</a:t>
             </a:r>
           </a:p>
           <a:p>
@@ -3533,7 +3534,7 @@
                 </a:solidFill>
                 <a:latin typeface="Meiryo UI"/>
               </a:rPr>
-              <a:t>近隣探索 (相手を探す・アドレス重複を確かめる・ルータを探す)</a:t>
+              <a:t>近隣探索 (133〜137)  相手を探す・アドレス重複を確かめる・ルータを探す</a:t>
             </a:r>
           </a:p>
           <a:p>
@@ -3549,7 +3550,23 @@
                 </a:solidFill>
                 <a:latin typeface="Meiryo UI"/>
               </a:rPr>
-              <a:t>エコー要求 / 応答 (ping。運用で要るので普通は通します)</a:t>
+              <a:t>エコー要求 / 応答 (128 / 129)  ping。運用で要るので普通は通します</a:t>
+            </a:r>
+          </a:p>
+          <a:p>
+            <a:pPr lvl="1" algn="l">
+              <a:spcAft>
+                <a:spcPts val="600"/>
+              </a:spcAft>
+            </a:pPr>
+            <a:r>
+              <a:rPr sz="1700" b="0">
+                <a:solidFill>
+                  <a:srgbClr val="0B6040"/>
+                </a:solidFill>
+                <a:latin typeface="Consolas"/>
+              </a:rPr>
+              <a:t>permit icmp any any packet-too-big  ← Cisco ならこの形で 1 種類ずつ許可します</a:t>
             </a:r>
           </a:p>
           <a:p>
@@ -4427,7 +4444,7 @@
                 </a:solidFill>
                 <a:latin typeface="Meiryo UI"/>
               </a:rPr>
-              <a:t>RA も DHCPv6 も送信元は fe80::。グローバルアドレスは後から付く</a:t>
+              <a:t>RA も DHCPv6 も送信元は fe80::。既定ゲートウェイも fe80:: で指します</a:t>
             </a:r>
           </a:p>
           <a:p>
@@ -4443,23 +4460,7 @@
                 </a:solidFill>
                 <a:latin typeface="Meiryo UI"/>
               </a:rPr>
-              <a:t>既定ゲートウェイも fe80:: で指す。IPv4 のように 192.168.1.1 とは書かない</a:t>
-            </a:r>
-          </a:p>
-          <a:p>
-            <a:pPr lvl="1" algn="l">
-              <a:spcAft>
-                <a:spcPts val="400"/>
-              </a:spcAft>
-            </a:pPr>
-            <a:r>
-              <a:rPr sz="1500" b="0">
-                <a:solidFill>
-                  <a:srgbClr val="555555"/>
-                </a:solidFill>
-                <a:latin typeface="Meiryo UI"/>
-              </a:rPr>
-              <a:t>ルータ同士の経路のやり取りや隣接の会話も fe80:: が普通に使われます</a:t>
+              <a:t>IPv4 のように 192.168.1.1 とは書きません</a:t>
             </a:r>
           </a:p>
           <a:p>
@@ -4476,22 +4477,6 @@
                 <a:latin typeface="Meiryo UI"/>
               </a:rPr>
               <a:t>だから「グローバル IPv6 が無い = 壊れている」ではありません</a:t>
-            </a:r>
-          </a:p>
-          <a:p>
-            <a:pPr lvl="1" algn="l">
-              <a:spcAft>
-                <a:spcPts val="400"/>
-              </a:spcAft>
-            </a:pPr>
-            <a:r>
-              <a:rPr sz="1500" b="0">
-                <a:solidFill>
-                  <a:srgbClr val="555555"/>
-                </a:solidFill>
-                <a:latin typeface="Meiryo UI"/>
-              </a:rPr>
-              <a:t>うちの検証環境では、VM に管理 IP を振らず fe80:: だけで SSH して構築しました</a:t>
             </a:r>
           </a:p>
           <a:p>
@@ -9176,11 +9161,11 @@
           <a:p>
             <a:pPr algn="l">
               <a:spcAft>
-                <a:spcPts val="700"/>
-              </a:spcAft>
-            </a:pPr>
-            <a:r>
-              <a:rPr sz="1700" b="1">
+                <a:spcPts val="1000"/>
+              </a:spcAft>
+            </a:pPr>
+            <a:r>
+              <a:rPr sz="2000" b="1">
                 <a:solidFill>
                   <a:srgbClr val="1F3355"/>
                 </a:solidFill>
@@ -9192,11 +9177,11 @@
           <a:p>
             <a:pPr lvl="1" algn="l">
               <a:spcAft>
-                <a:spcPts val="300"/>
-              </a:spcAft>
-            </a:pPr>
-            <a:r>
-              <a:rPr sz="1400" b="0">
+                <a:spcPts val="600"/>
+              </a:spcAft>
+            </a:pPr>
+            <a:r>
+              <a:rPr sz="1700" b="0">
                 <a:solidFill>
                   <a:srgbClr val="555555"/>
                 </a:solidFill>
@@ -9208,11 +9193,11 @@
           <a:p>
             <a:pPr lvl="1" algn="l">
               <a:spcAft>
-                <a:spcPts val="300"/>
-              </a:spcAft>
-            </a:pPr>
-            <a:r>
-              <a:rPr sz="1400" b="0">
+                <a:spcPts val="600"/>
+              </a:spcAft>
+            </a:pPr>
+            <a:r>
+              <a:rPr sz="1700" b="0">
                 <a:solidFill>
                   <a:srgbClr val="555555"/>
                 </a:solidFill>
@@ -9224,11 +9209,11 @@
           <a:p>
             <a:pPr lvl="1" algn="l">
               <a:spcAft>
-                <a:spcPts val="300"/>
-              </a:spcAft>
-            </a:pPr>
-            <a:r>
-              <a:rPr sz="1400" b="0">
+                <a:spcPts val="600"/>
+              </a:spcAft>
+            </a:pPr>
+            <a:r>
+              <a:rPr sz="1700" b="0">
                 <a:solidFill>
                   <a:srgbClr val="555555"/>
                 </a:solidFill>
@@ -9240,11 +9225,11 @@
           <a:p>
             <a:pPr algn="l">
               <a:spcAft>
-                <a:spcPts val="700"/>
-              </a:spcAft>
-            </a:pPr>
-            <a:r>
-              <a:rPr sz="1700" b="1">
+                <a:spcPts val="1000"/>
+              </a:spcAft>
+            </a:pPr>
+            <a:r>
+              <a:rPr sz="2000" b="1">
                 <a:solidFill>
                   <a:srgbClr val="1F3355"/>
                 </a:solidFill>
@@ -9256,11 +9241,11 @@
           <a:p>
             <a:pPr lvl="1" algn="l">
               <a:spcAft>
-                <a:spcPts val="300"/>
-              </a:spcAft>
-            </a:pPr>
-            <a:r>
-              <a:rPr sz="1400" b="0">
+                <a:spcPts val="600"/>
+              </a:spcAft>
+            </a:pPr>
+            <a:r>
+              <a:rPr sz="1700" b="0">
                 <a:solidFill>
                   <a:srgbClr val="0B6040"/>
                 </a:solidFill>
@@ -9272,11 +9257,11 @@
           <a:p>
             <a:pPr lvl="1" algn="l">
               <a:spcAft>
-                <a:spcPts val="300"/>
-              </a:spcAft>
-            </a:pPr>
-            <a:r>
-              <a:rPr sz="1400" b="0">
+                <a:spcPts val="600"/>
+              </a:spcAft>
+            </a:pPr>
+            <a:r>
+              <a:rPr sz="1700" b="0">
                 <a:solidFill>
                   <a:srgbClr val="0B6040"/>
                 </a:solidFill>
@@ -9288,11 +9273,11 @@
           <a:p>
             <a:pPr lvl="1" algn="l">
               <a:spcAft>
-                <a:spcPts val="300"/>
-              </a:spcAft>
-            </a:pPr>
-            <a:r>
-              <a:rPr sz="1400" b="0">
+                <a:spcPts val="600"/>
+              </a:spcAft>
+            </a:pPr>
+            <a:r>
+              <a:rPr sz="1700" b="0">
                 <a:solidFill>
                   <a:srgbClr val="0B6040"/>
                 </a:solidFill>
@@ -9304,11 +9289,11 @@
           <a:p>
             <a:pPr algn="l">
               <a:spcAft>
-                <a:spcPts val="700"/>
-              </a:spcAft>
-            </a:pPr>
-            <a:r>
-              <a:rPr sz="1700" b="1">
+                <a:spcPts val="1000"/>
+              </a:spcAft>
+            </a:pPr>
+            <a:r>
+              <a:rPr sz="2000" b="1">
                 <a:solidFill>
                   <a:srgbClr val="C0392B"/>
                 </a:solidFill>
@@ -9320,11 +9305,11 @@
           <a:p>
             <a:pPr lvl="1" algn="l">
               <a:spcAft>
-                <a:spcPts val="300"/>
-              </a:spcAft>
-            </a:pPr>
-            <a:r>
-              <a:rPr sz="1400" b="0">
+                <a:spcPts val="600"/>
+              </a:spcAft>
+            </a:pPr>
+            <a:r>
+              <a:rPr sz="1700" b="0">
                 <a:solidFill>
                   <a:srgbClr val="555555"/>
                 </a:solidFill>
@@ -9336,81 +9321,17 @@
           <a:p>
             <a:pPr lvl="1" algn="l">
               <a:spcAft>
-                <a:spcPts val="300"/>
-              </a:spcAft>
-            </a:pPr>
-            <a:r>
-              <a:rPr sz="1400" b="0">
+                <a:spcPts val="600"/>
+              </a:spcAft>
+            </a:pPr>
+            <a:r>
+              <a:rPr sz="1700" b="0">
                 <a:solidFill>
                   <a:srgbClr val="555555"/>
                 </a:solidFill>
                 <a:latin typeface="Meiryo UI"/>
               </a:rPr>
               <a:t>ブラウザは 1 タブで数十本張ります。台数が多い拠点や監視系があると足りません</a:t>
-            </a:r>
-          </a:p>
-          <a:p>
-            <a:pPr algn="l">
-              <a:spcAft>
-                <a:spcPts val="700"/>
-              </a:spcAft>
-            </a:pPr>
-            <a:r>
-              <a:rPr sz="1700" b="1">
-                <a:solidFill>
-                  <a:srgbClr val="1F3355"/>
-                </a:solidFill>
-                <a:latin typeface="Meiryo UI"/>
-              </a:rPr>
-              <a:t>「同時接続数を実測」って、どうやるのか</a:t>
-            </a:r>
-          </a:p>
-          <a:p>
-            <a:pPr lvl="1" algn="l">
-              <a:spcAft>
-                <a:spcPts val="300"/>
-              </a:spcAft>
-            </a:pPr>
-            <a:r>
-              <a:rPr sz="1400" b="0">
-                <a:solidFill>
-                  <a:srgbClr val="0B6040"/>
-                </a:solidFill>
-                <a:latin typeface="Consolas"/>
-              </a:rPr>
-              <a:t>既設ルータで NAT のテーブル数を数える (Cisco なら show ip nat translations の行数)</a:t>
-            </a:r>
-          </a:p>
-          <a:p>
-            <a:pPr lvl="1" algn="l">
-              <a:spcAft>
-                <a:spcPts val="300"/>
-              </a:spcAft>
-            </a:pPr>
-            <a:r>
-              <a:rPr sz="1400" b="0">
-                <a:solidFill>
-                  <a:srgbClr val="555555"/>
-                </a:solidFill>
-                <a:latin typeface="Meiryo UI"/>
-              </a:rPr>
-              <a:t>業務時間帯に何回か測る。昼休みと夕方でまったく違います</a:t>
-            </a:r>
-          </a:p>
-          <a:p>
-            <a:pPr lvl="1" algn="l">
-              <a:spcAft>
-                <a:spcPts val="300"/>
-              </a:spcAft>
-            </a:pPr>
-            <a:r>
-              <a:rPr sz="1400" b="1">
-                <a:solidFill>
-                  <a:srgbClr val="C0392B"/>
-                </a:solidFill>
-                <a:latin typeface="Meiryo UI"/>
-              </a:rPr>
-              <a:t>目安は出せません。240 で足りるかは環境次第なので、必ず実測してください</a:t>
             </a:r>
           </a:p>
         </p:txBody>
@@ -9459,6 +9380,349 @@
 </file>
 
 <file path=ppt/slides/slide26.xml><?xml version="1.0" encoding="utf-8"?>
+<p:sld xmlns:a="http://schemas.openxmlformats.org/drawingml/2006/main" xmlns:p="http://schemas.openxmlformats.org/presentationml/2006/main" xmlns:r="http://schemas.openxmlformats.org/officeDocument/2006/relationships">
+  <p:cSld>
+    <p:spTree>
+      <p:nvGrpSpPr>
+        <p:cNvPr id="1" name=""/>
+        <p:cNvGrpSpPr/>
+        <p:nvPr/>
+      </p:nvGrpSpPr>
+      <p:grpSpPr/>
+      <p:sp>
+        <p:nvSpPr>
+          <p:cNvPr id="2" name="TextBox 1"/>
+          <p:cNvSpPr txBox="1"/>
+          <p:nvPr/>
+        </p:nvSpPr>
+        <p:spPr>
+          <a:xfrm>
+            <a:off x="502920" y="320040"/>
+            <a:ext cx="11155680" cy="822960"/>
+          </a:xfrm>
+          <a:prstGeom prst="rect">
+            <a:avLst/>
+          </a:prstGeom>
+          <a:noFill/>
+        </p:spPr>
+        <p:txBody>
+          <a:bodyPr wrap="square">
+            <a:spAutoFit/>
+          </a:bodyPr>
+          <a:lstStyle/>
+          <a:p>
+            <a:pPr algn="l"/>
+            <a:r>
+              <a:rPr sz="2800" b="1">
+                <a:solidFill>
+                  <a:srgbClr val="1F3355"/>
+                </a:solidFill>
+                <a:latin typeface="Meiryo UI"/>
+              </a:rPr>
+              <a:t>「同時接続数を実測」って、どうやるのか</a:t>
+            </a:r>
+          </a:p>
+        </p:txBody>
+      </p:sp>
+      <p:sp>
+        <p:nvSpPr>
+          <p:cNvPr id="3" name="Rectangle 2"/>
+          <p:cNvSpPr/>
+          <p:nvPr/>
+        </p:nvSpPr>
+        <p:spPr>
+          <a:xfrm>
+            <a:off x="502920" y="1115568"/>
+            <a:ext cx="11155680" cy="31750"/>
+          </a:xfrm>
+          <a:prstGeom prst="rect">
+            <a:avLst/>
+          </a:prstGeom>
+          <a:solidFill>
+            <a:srgbClr val="007ACC"/>
+          </a:solidFill>
+          <a:ln>
+            <a:noFill/>
+          </a:ln>
+        </p:spPr>
+        <p:style>
+          <a:lnRef idx="1">
+            <a:schemeClr val="accent1"/>
+          </a:lnRef>
+          <a:fillRef idx="3">
+            <a:schemeClr val="accent1"/>
+          </a:fillRef>
+          <a:effectRef idx="2">
+            <a:schemeClr val="accent1"/>
+          </a:effectRef>
+          <a:fontRef idx="minor">
+            <a:schemeClr val="lt1"/>
+          </a:fontRef>
+        </p:style>
+        <p:txBody>
+          <a:bodyPr rtlCol="0" anchor="ctr"/>
+          <a:lstStyle/>
+          <a:p>
+            <a:pPr algn="ctr"/>
+          </a:p>
+        </p:txBody>
+      </p:sp>
+      <p:sp>
+        <p:nvSpPr>
+          <p:cNvPr id="4" name="TextBox 3"/>
+          <p:cNvSpPr txBox="1"/>
+          <p:nvPr/>
+        </p:nvSpPr>
+        <p:spPr>
+          <a:xfrm>
+            <a:off x="594360" y="1371600"/>
+            <a:ext cx="10972800" cy="4983480"/>
+          </a:xfrm>
+          <a:prstGeom prst="rect">
+            <a:avLst/>
+          </a:prstGeom>
+          <a:noFill/>
+        </p:spPr>
+        <p:txBody>
+          <a:bodyPr wrap="square">
+            <a:spAutoFit/>
+          </a:bodyPr>
+          <a:lstStyle/>
+          <a:p>
+            <a:pPr algn="l">
+              <a:spcAft>
+                <a:spcPts val="800"/>
+              </a:spcAft>
+            </a:pPr>
+            <a:r>
+              <a:rPr sz="1800" b="1">
+                <a:solidFill>
+                  <a:srgbClr val="1F3355"/>
+                </a:solidFill>
+                <a:latin typeface="Meiryo UI"/>
+              </a:rPr>
+              <a:t>240 個で足りるかどうかは、測らないと分かりません</a:t>
+            </a:r>
+          </a:p>
+          <a:p>
+            <a:pPr lvl="1" algn="l">
+              <a:spcAft>
+                <a:spcPts val="400"/>
+              </a:spcAft>
+            </a:pPr>
+            <a:r>
+              <a:rPr sz="1500" b="0">
+                <a:solidFill>
+                  <a:srgbClr val="555555"/>
+                </a:solidFill>
+                <a:latin typeface="Meiryo UI"/>
+              </a:rPr>
+              <a:t>既設ルータで NAT のテーブル数を数えます</a:t>
+            </a:r>
+          </a:p>
+          <a:p>
+            <a:pPr lvl="1" algn="l">
+              <a:spcAft>
+                <a:spcPts val="400"/>
+              </a:spcAft>
+            </a:pPr>
+            <a:r>
+              <a:rPr sz="1500" b="0">
+                <a:solidFill>
+                  <a:srgbClr val="0B6040"/>
+                </a:solidFill>
+                <a:latin typeface="Consolas"/>
+              </a:rPr>
+              <a:t>Cisco なら show ip nat translations の行数</a:t>
+            </a:r>
+          </a:p>
+          <a:p>
+            <a:pPr lvl="1" algn="l">
+              <a:spcAft>
+                <a:spcPts val="400"/>
+              </a:spcAft>
+            </a:pPr>
+            <a:r>
+              <a:rPr sz="1500" b="0">
+                <a:solidFill>
+                  <a:srgbClr val="555555"/>
+                </a:solidFill>
+                <a:latin typeface="Meiryo UI"/>
+              </a:rPr>
+              <a:t>業務時間帯に何回か測ってください。昼休みと夕方でまったく違います</a:t>
+            </a:r>
+          </a:p>
+          <a:p>
+            <a:pPr algn="l">
+              <a:spcAft>
+                <a:spcPts val="800"/>
+              </a:spcAft>
+            </a:pPr>
+            <a:r>
+              <a:rPr sz="1800" b="1">
+                <a:solidFill>
+                  <a:srgbClr val="C0392B"/>
+                </a:solidFill>
+                <a:latin typeface="Meiryo UI"/>
+              </a:rPr>
+              <a:t>目安は出せません</a:t>
+            </a:r>
+          </a:p>
+          <a:p>
+            <a:pPr lvl="1" algn="l">
+              <a:spcAft>
+                <a:spcPts val="400"/>
+              </a:spcAft>
+            </a:pPr>
+            <a:r>
+              <a:rPr sz="1500" b="0">
+                <a:solidFill>
+                  <a:srgbClr val="555555"/>
+                </a:solidFill>
+                <a:latin typeface="Meiryo UI"/>
+              </a:rPr>
+              <a:t>台数、業務アプリ、監視の有無で変わるので、他社の数字は当てになりません</a:t>
+            </a:r>
+          </a:p>
+          <a:p>
+            <a:pPr lvl="1" algn="l">
+              <a:spcAft>
+                <a:spcPts val="400"/>
+              </a:spcAft>
+            </a:pPr>
+            <a:r>
+              <a:rPr sz="1500" b="1">
+                <a:solidFill>
+                  <a:srgbClr val="C0392B"/>
+                </a:solidFill>
+                <a:latin typeface="Meiryo UI"/>
+              </a:rPr>
+              <a:t>「PC 30 台だから大丈夫」のような机上判断はしないでください</a:t>
+            </a:r>
+          </a:p>
+          <a:p>
+            <a:pPr algn="l">
+              <a:spcAft>
+                <a:spcPts val="800"/>
+              </a:spcAft>
+            </a:pPr>
+            <a:r>
+              <a:rPr sz="1800" b="1">
+                <a:solidFill>
+                  <a:srgbClr val="1F3355"/>
+                </a:solidFill>
+                <a:latin typeface="Meiryo UI"/>
+              </a:rPr>
+              <a:t>測ったあと、どう判断するか — 型を決めておきます</a:t>
+            </a:r>
+          </a:p>
+          <a:p>
+            <a:pPr lvl="1" algn="l">
+              <a:spcAft>
+                <a:spcPts val="400"/>
+              </a:spcAft>
+            </a:pPr>
+            <a:r>
+              <a:rPr sz="1500" b="1">
+                <a:solidFill>
+                  <a:srgbClr val="C0392B"/>
+                </a:solidFill>
+                <a:latin typeface="Meiryo UI"/>
+              </a:rPr>
+              <a:t>ピークの実測値 × 安全率 2 倍 が 割当ポート数を超えたら、MAP-E 単独は避ける</a:t>
+            </a:r>
+          </a:p>
+          <a:p>
+            <a:pPr lvl="1" algn="l">
+              <a:spcAft>
+                <a:spcPts val="400"/>
+              </a:spcAft>
+            </a:pPr>
+            <a:r>
+              <a:rPr sz="1500" b="0">
+                <a:solidFill>
+                  <a:srgbClr val="0B6040"/>
+                </a:solidFill>
+                <a:latin typeface="Consolas"/>
+              </a:rPr>
+              <a:t>例: ピーク 180 本 × 2 = 360 &gt; 240 → 固定 IP か PPPoE 併用に倒す</a:t>
+            </a:r>
+          </a:p>
+          <a:p>
+            <a:pPr lvl="1" algn="l">
+              <a:spcAft>
+                <a:spcPts val="400"/>
+              </a:spcAft>
+            </a:pPr>
+            <a:r>
+              <a:rPr sz="1500" b="0">
+                <a:solidFill>
+                  <a:srgbClr val="555555"/>
+                </a:solidFill>
+                <a:latin typeface="Meiryo UI"/>
+              </a:rPr>
+              <a:t>※ 安全率 2 倍は「この資料での仮置き」です。実績が貯まるまで社内で決め直してください</a:t>
+            </a:r>
+          </a:p>
+          <a:p>
+            <a:pPr algn="l">
+              <a:spcAft>
+                <a:spcPts val="800"/>
+              </a:spcAft>
+            </a:pPr>
+            <a:r>
+              <a:rPr sz="1800" b="1">
+                <a:solidFill>
+                  <a:srgbClr val="1F3355"/>
+                </a:solidFill>
+                <a:latin typeface="Meiryo UI"/>
+              </a:rPr>
+              <a:t>足りないと分かったら</a:t>
+            </a:r>
+          </a:p>
+          <a:p>
+            <a:pPr lvl="1" algn="l">
+              <a:spcAft>
+                <a:spcPts val="400"/>
+              </a:spcAft>
+            </a:pPr>
+            <a:r>
+              <a:rPr sz="1500" b="0">
+                <a:solidFill>
+                  <a:srgbClr val="555555"/>
+                </a:solidFill>
+                <a:latin typeface="Meiryo UI"/>
+              </a:rPr>
+              <a:t>MAP-E でもポート数の多い VNE を選べることがあります (OCN VC は 1008)</a:t>
+            </a:r>
+          </a:p>
+          <a:p>
+            <a:pPr lvl="1" algn="l">
+              <a:spcAft>
+                <a:spcPts val="400"/>
+              </a:spcAft>
+            </a:pPr>
+            <a:r>
+              <a:rPr sz="1500" b="0">
+                <a:solidFill>
+                  <a:srgbClr val="555555"/>
+                </a:solidFill>
+                <a:latin typeface="Meiryo UI"/>
+              </a:rPr>
+              <a:t>ただし VNE は選べないことが多いので、固定 IP か PPPoE 併用の検討になります</a:t>
+            </a:r>
+          </a:p>
+        </p:txBody>
+      </p:sp>
+    </p:spTree>
+  </p:cSld>
+  <p:clrMapOvr>
+    <a:masterClrMapping/>
+  </p:clrMapOvr>
+</p:sld>
+</file>
+
+<file path=ppt/slides/slide27.xml><?xml version="1.0" encoding="utf-8"?>
 <p:sld xmlns:a="http://schemas.openxmlformats.org/drawingml/2006/main" xmlns:p="http://schemas.openxmlformats.org/presentationml/2006/main" xmlns:r="http://schemas.openxmlformats.org/officeDocument/2006/relationships">
   <p:cSld>
     <p:spTree>
@@ -9786,7 +10050,7 @@
 </p:sld>
 </file>
 
-<file path=ppt/slides/slide27.xml><?xml version="1.0" encoding="utf-8"?>
+<file path=ppt/slides/slide28.xml><?xml version="1.0" encoding="utf-8"?>
 <p:sld xmlns:a="http://schemas.openxmlformats.org/drawingml/2006/main" xmlns:p="http://schemas.openxmlformats.org/presentationml/2006/main" xmlns:r="http://schemas.openxmlformats.org/officeDocument/2006/relationships">
   <p:cSld>
     <p:spTree>
@@ -10092,7 +10356,7 @@
 </p:sld>
 </file>
 
-<file path=ppt/slides/slide28.xml><?xml version="1.0" encoding="utf-8"?>
+<file path=ppt/slides/slide29.xml><?xml version="1.0" encoding="utf-8"?>
 <p:sld xmlns:a="http://schemas.openxmlformats.org/drawingml/2006/main" xmlns:p="http://schemas.openxmlformats.org/presentationml/2006/main" xmlns:r="http://schemas.openxmlformats.org/officeDocument/2006/relationships">
   <p:cSld>
     <p:spTree>
@@ -10387,7 +10651,318 @@
 </p:sld>
 </file>
 
-<file path=ppt/slides/slide29.xml><?xml version="1.0" encoding="utf-8"?>
+<file path=ppt/slides/slide3.xml><?xml version="1.0" encoding="utf-8"?>
+<p:sld xmlns:a="http://schemas.openxmlformats.org/drawingml/2006/main" xmlns:p="http://schemas.openxmlformats.org/presentationml/2006/main" xmlns:r="http://schemas.openxmlformats.org/officeDocument/2006/relationships">
+  <p:cSld>
+    <p:spTree>
+      <p:nvGrpSpPr>
+        <p:cNvPr id="1" name=""/>
+        <p:cNvGrpSpPr/>
+        <p:nvPr/>
+      </p:nvGrpSpPr>
+      <p:grpSpPr/>
+      <p:sp>
+        <p:nvSpPr>
+          <p:cNvPr id="2" name="TextBox 1"/>
+          <p:cNvSpPr txBox="1"/>
+          <p:nvPr/>
+        </p:nvSpPr>
+        <p:spPr>
+          <a:xfrm>
+            <a:off x="502920" y="320040"/>
+            <a:ext cx="11155680" cy="822960"/>
+          </a:xfrm>
+          <a:prstGeom prst="rect">
+            <a:avLst/>
+          </a:prstGeom>
+          <a:noFill/>
+        </p:spPr>
+        <p:txBody>
+          <a:bodyPr wrap="square">
+            <a:spAutoFit/>
+          </a:bodyPr>
+          <a:lstStyle/>
+          <a:p>
+            <a:pPr algn="l"/>
+            <a:r>
+              <a:rPr sz="2800" b="1">
+                <a:solidFill>
+                  <a:srgbClr val="1F3355"/>
+                </a:solidFill>
+                <a:latin typeface="Meiryo UI"/>
+              </a:rPr>
+              <a:t>今日 持ち帰ってほしいこと</a:t>
+            </a:r>
+          </a:p>
+        </p:txBody>
+      </p:sp>
+      <p:sp>
+        <p:nvSpPr>
+          <p:cNvPr id="3" name="Rectangle 2"/>
+          <p:cNvSpPr/>
+          <p:nvPr/>
+        </p:nvSpPr>
+        <p:spPr>
+          <a:xfrm>
+            <a:off x="502920" y="1115568"/>
+            <a:ext cx="11155680" cy="31750"/>
+          </a:xfrm>
+          <a:prstGeom prst="rect">
+            <a:avLst/>
+          </a:prstGeom>
+          <a:solidFill>
+            <a:srgbClr val="007ACC"/>
+          </a:solidFill>
+          <a:ln>
+            <a:noFill/>
+          </a:ln>
+        </p:spPr>
+        <p:style>
+          <a:lnRef idx="1">
+            <a:schemeClr val="accent1"/>
+          </a:lnRef>
+          <a:fillRef idx="3">
+            <a:schemeClr val="accent1"/>
+          </a:fillRef>
+          <a:effectRef idx="2">
+            <a:schemeClr val="accent1"/>
+          </a:effectRef>
+          <a:fontRef idx="minor">
+            <a:schemeClr val="lt1"/>
+          </a:fontRef>
+        </p:style>
+        <p:txBody>
+          <a:bodyPr rtlCol="0" anchor="ctr"/>
+          <a:lstStyle/>
+          <a:p>
+            <a:pPr algn="ctr"/>
+          </a:p>
+        </p:txBody>
+      </p:sp>
+      <p:sp>
+        <p:nvSpPr>
+          <p:cNvPr id="4" name="TextBox 3"/>
+          <p:cNvSpPr txBox="1"/>
+          <p:nvPr/>
+        </p:nvSpPr>
+        <p:spPr>
+          <a:xfrm>
+            <a:off x="594360" y="1371600"/>
+            <a:ext cx="10972800" cy="4983480"/>
+          </a:xfrm>
+          <a:prstGeom prst="rect">
+            <a:avLst/>
+          </a:prstGeom>
+          <a:noFill/>
+        </p:spPr>
+        <p:txBody>
+          <a:bodyPr wrap="square">
+            <a:spAutoFit/>
+          </a:bodyPr>
+          <a:lstStyle/>
+          <a:p>
+            <a:pPr algn="l">
+              <a:spcAft>
+                <a:spcPts val="1000"/>
+              </a:spcAft>
+            </a:pPr>
+            <a:r>
+              <a:rPr sz="2000" b="1">
+                <a:solidFill>
+                  <a:srgbClr val="1F3355"/>
+                </a:solidFill>
+                <a:latin typeface="Meiryo UI"/>
+              </a:rPr>
+              <a:t>3 つだけです</a:t>
+            </a:r>
+          </a:p>
+          <a:p>
+            <a:pPr lvl="1" algn="l">
+              <a:spcAft>
+                <a:spcPts val="600"/>
+              </a:spcAft>
+            </a:pPr>
+            <a:r>
+              <a:rPr sz="1700" b="0">
+                <a:solidFill>
+                  <a:srgbClr val="555555"/>
+                </a:solidFill>
+                <a:latin typeface="Meiryo UI"/>
+              </a:rPr>
+              <a:t>① なぜ IPv6 に変えるのか — 「アドレスが枯渇したから」ではありません</a:t>
+            </a:r>
+          </a:p>
+          <a:p>
+            <a:pPr lvl="1" algn="l">
+              <a:spcAft>
+                <a:spcPts val="600"/>
+              </a:spcAft>
+            </a:pPr>
+            <a:r>
+              <a:rPr sz="1700" b="0">
+                <a:solidFill>
+                  <a:srgbClr val="555555"/>
+                </a:solidFill>
+                <a:latin typeface="Meiryo UI"/>
+              </a:rPr>
+              <a:t>② お客様の回線がどの方式か、商品名から言えるようになる (v6プラス、transix など)</a:t>
+            </a:r>
+          </a:p>
+          <a:p>
+            <a:pPr lvl="1" algn="l">
+              <a:spcAft>
+                <a:spcPts val="600"/>
+              </a:spcAft>
+            </a:pPr>
+            <a:r>
+              <a:rPr sz="1700" b="0">
+                <a:solidFill>
+                  <a:srgbClr val="555555"/>
+                </a:solidFill>
+                <a:latin typeface="Meiryo UI"/>
+              </a:rPr>
+              <a:t>③ 「ポート開放できますか?」に即答できるようになる</a:t>
+            </a:r>
+          </a:p>
+          <a:p>
+            <a:pPr algn="l">
+              <a:spcAft>
+                <a:spcPts val="1000"/>
+              </a:spcAft>
+            </a:pPr>
+            <a:r>
+              <a:rPr sz="2000" b="1">
+                <a:solidFill>
+                  <a:srgbClr val="1F3355"/>
+                </a:solidFill>
+                <a:latin typeface="Meiryo UI"/>
+              </a:rPr>
+              <a:t>話す順番 — 大きい話から細かい話へ降ります</a:t>
+            </a:r>
+          </a:p>
+          <a:p>
+            <a:pPr lvl="1" algn="l">
+              <a:spcAft>
+                <a:spcPts val="600"/>
+              </a:spcAft>
+            </a:pPr>
+            <a:r>
+              <a:rPr sz="1700" b="0">
+                <a:solidFill>
+                  <a:srgbClr val="555555"/>
+                </a:solidFill>
+                <a:latin typeface="Meiryo UI"/>
+              </a:rPr>
+              <a:t>第0部  なぜこの話をするのか</a:t>
+            </a:r>
+          </a:p>
+          <a:p>
+            <a:pPr lvl="1" algn="l">
+              <a:spcAft>
+                <a:spcPts val="600"/>
+              </a:spcAft>
+            </a:pPr>
+            <a:r>
+              <a:rPr sz="1700" b="0">
+                <a:solidFill>
+                  <a:srgbClr val="555555"/>
+                </a:solidFill>
+                <a:latin typeface="Meiryo UI"/>
+              </a:rPr>
+              <a:t>第1部  IPv6 そのもの — どこの国でも同じ話</a:t>
+            </a:r>
+          </a:p>
+          <a:p>
+            <a:pPr lvl="1" algn="l">
+              <a:spcAft>
+                <a:spcPts val="600"/>
+              </a:spcAft>
+            </a:pPr>
+            <a:r>
+              <a:rPr sz="1700" b="0">
+                <a:solidFill>
+                  <a:srgbClr val="555555"/>
+                </a:solidFill>
+                <a:latin typeface="Meiryo UI"/>
+              </a:rPr>
+              <a:t>第2部  日本の回線 — ここからは日本だけの話</a:t>
+            </a:r>
+          </a:p>
+          <a:p>
+            <a:pPr lvl="1" algn="l">
+              <a:spcAft>
+                <a:spcPts val="600"/>
+              </a:spcAft>
+            </a:pPr>
+            <a:r>
+              <a:rPr sz="1700" b="0">
+                <a:solidFill>
+                  <a:srgbClr val="555555"/>
+                </a:solidFill>
+                <a:latin typeface="Meiryo UI"/>
+              </a:rPr>
+              <a:t>第3部  IPv4 をどうやって運ぶか — 今日の本題</a:t>
+            </a:r>
+          </a:p>
+          <a:p>
+            <a:pPr lvl="1" algn="l">
+              <a:spcAft>
+                <a:spcPts val="600"/>
+              </a:spcAft>
+            </a:pPr>
+            <a:r>
+              <a:rPr sz="1700" b="0">
+                <a:solidFill>
+                  <a:srgbClr val="555555"/>
+                </a:solidFill>
+                <a:latin typeface="Meiryo UI"/>
+              </a:rPr>
+              <a:t>第4部  検証環境で実際に見たもの</a:t>
+            </a:r>
+          </a:p>
+          <a:p>
+            <a:pPr algn="l">
+              <a:spcAft>
+                <a:spcPts val="1000"/>
+              </a:spcAft>
+            </a:pPr>
+            <a:r>
+              <a:rPr sz="2000" b="1">
+                <a:solidFill>
+                  <a:srgbClr val="C0392B"/>
+                </a:solidFill>
+                <a:latin typeface="Meiryo UI"/>
+              </a:rPr>
+              <a:t>迷ったらこのページに戻ってください。どこの話か分かれば必ずついてこられます</a:t>
+            </a:r>
+          </a:p>
+          <a:p>
+            <a:pPr algn="l">
+              <a:spcAft>
+                <a:spcPts val="1000"/>
+              </a:spcAft>
+            </a:pPr>
+            <a:r>
+              <a:rPr sz="2000" b="0">
+                <a:solidFill>
+                  <a:srgbClr val="1F3355"/>
+                </a:solidFill>
+                <a:latin typeface="Meiryo UI"/>
+              </a:rPr>
+              <a:t>※ 配布資料の巻末に「想定問答」6 問があります。あとで読んでください</a:t>
+            </a:r>
+          </a:p>
+        </p:txBody>
+      </p:sp>
+    </p:spTree>
+  </p:cSld>
+  <p:clrMapOvr>
+    <a:masterClrMapping/>
+  </p:clrMapOvr>
+</p:sld>
+</file>
+
+<file path=ppt/slides/slide30.xml><?xml version="1.0" encoding="utf-8"?>
 <p:sld xmlns:a="http://schemas.openxmlformats.org/drawingml/2006/main" xmlns:p="http://schemas.openxmlformats.org/presentationml/2006/main" xmlns:r="http://schemas.openxmlformats.org/officeDocument/2006/relationships">
   <p:cSld>
     <p:spTree>
@@ -10442,7 +11017,7 @@
         </p:nvGraphicFramePr>
         <p:xfrm>
           <a:off x="502920" y="1143000"/>
-          <a:ext cx="10789920" cy="1554480"/>
+          <a:ext cx="10789920" cy="1722374"/>
         </p:xfrm>
         <a:graphic>
           <a:graphicData uri="http://schemas.openxmlformats.org/drawingml/2006/table">
@@ -10455,7 +11030,7 @@
                 <a:gridCol w="4206240"/>
                 <a:gridCol w="4023360"/>
               </a:tblGrid>
-              <a:tr h="310896">
+              <a:tr h="344474">
                 <a:tc>
                   <a:txBody>
                     <a:bodyPr/>
@@ -10526,7 +11101,7 @@
                   </a:tcPr>
                 </a:tc>
               </a:tr>
-              <a:tr h="310896">
+              <a:tr h="344474">
                 <a:tc>
                   <a:txBody>
                     <a:bodyPr/>
@@ -10597,7 +11172,7 @@
                   </a:tcPr>
                 </a:tc>
               </a:tr>
-              <a:tr h="310896">
+              <a:tr h="344474">
                 <a:tc>
                   <a:txBody>
                     <a:bodyPr/>
@@ -10634,7 +11209,7 @@
                           </a:solidFill>
                           <a:latin typeface="Meiryo UI"/>
                         </a:rPr>
-                        <a:t>たいてい張れます (NAT 越えの仕組みを使う)</a:t>
+                        <a:t>張れます (両端が NAT 越え = NAT-T に対応していれば)</a:t>
                       </a:r>
                     </a:p>
                   </a:txBody>
@@ -10668,7 +11243,7 @@
                   </a:tcPr>
                 </a:tc>
               </a:tr>
-              <a:tr h="310896">
+              <a:tr h="344474">
                 <a:tc>
                   <a:txBody>
                     <a:bodyPr/>
@@ -10705,7 +11280,7 @@
                           </a:solidFill>
                           <a:latin typeface="Meiryo UI"/>
                         </a:rPr>
-                        <a:t>たいてい張れます (同上)</a:t>
+                        <a:t>張れます (同上)</a:t>
                       </a:r>
                     </a:p>
                   </a:txBody>
@@ -10739,7 +11314,7 @@
                   </a:tcPr>
                 </a:tc>
               </a:tr>
-              <a:tr h="310896">
+              <a:tr h="344478">
                 <a:tc>
                   <a:txBody>
                     <a:bodyPr/>
@@ -10822,7 +11397,7 @@
         </p:nvSpPr>
         <p:spPr>
           <a:xfrm>
-            <a:off x="502920" y="2953512"/>
+            <a:off x="502920" y="3121406"/>
             <a:ext cx="11155680" cy="548640"/>
           </a:xfrm>
           <a:prstGeom prst="rect">
@@ -10857,7 +11432,7 @@
 </p:sld>
 </file>
 
-<file path=ppt/slides/slide3.xml><?xml version="1.0" encoding="utf-8"?>
+<file path=ppt/slides/slide31.xml><?xml version="1.0" encoding="utf-8"?>
 <p:sld xmlns:a="http://schemas.openxmlformats.org/drawingml/2006/main" xmlns:p="http://schemas.openxmlformats.org/presentationml/2006/main" xmlns:r="http://schemas.openxmlformats.org/officeDocument/2006/relationships">
   <p:cSld>
     <p:spTree>
@@ -10897,7 +11472,7 @@
                 </a:solidFill>
                 <a:latin typeface="Meiryo UI"/>
               </a:rPr>
-              <a:t>今日 持ち帰ってほしいこと</a:t>
+              <a:t>だから VPN はこう提案します</a:t>
             </a:r>
           </a:p>
         </p:txBody>
@@ -10969,177 +11544,289 @@
           <a:p>
             <a:pPr algn="l">
               <a:spcAft>
-                <a:spcPts val="1000"/>
-              </a:spcAft>
-            </a:pPr>
-            <a:r>
-              <a:rPr sz="2000" b="1">
+                <a:spcPts val="500"/>
+              </a:spcAft>
+            </a:pPr>
+            <a:r>
+              <a:rPr sz="1500" b="1">
                 <a:solidFill>
                   <a:srgbClr val="1F3355"/>
                 </a:solidFill>
                 <a:latin typeface="Meiryo UI"/>
               </a:rPr>
-              <a:t>3 つだけです</a:t>
+              <a:t>そもそも UDP 500 / 4500 とは</a:t>
             </a:r>
           </a:p>
           <a:p>
             <a:pPr lvl="1" algn="l">
               <a:spcAft>
-                <a:spcPts val="600"/>
-              </a:spcAft>
-            </a:pPr>
-            <a:r>
-              <a:rPr sz="1700" b="0">
+                <a:spcPts val="300"/>
+              </a:spcAft>
+            </a:pPr>
+            <a:r>
+              <a:rPr sz="1200" b="0">
                 <a:solidFill>
                   <a:srgbClr val="555555"/>
                 </a:solidFill>
                 <a:latin typeface="Meiryo UI"/>
               </a:rPr>
-              <a:t>① なぜ IPv6 に変えるのか — 「アドレスが枯渇したから」ではありません</a:t>
+              <a:t>VPN が最初の握手に使うと決まっている番号。電話でいう代表番号のようなものです</a:t>
             </a:r>
           </a:p>
           <a:p>
             <a:pPr lvl="1" algn="l">
               <a:spcAft>
-                <a:spcPts val="600"/>
-              </a:spcAft>
-            </a:pPr>
-            <a:r>
-              <a:rPr sz="1700" b="0">
+                <a:spcPts val="300"/>
+              </a:spcAft>
+            </a:pPr>
+            <a:r>
+              <a:rPr sz="1200" b="0">
                 <a:solidFill>
                   <a:srgbClr val="555555"/>
                 </a:solidFill>
                 <a:latin typeface="Meiryo UI"/>
               </a:rPr>
-              <a:t>② お客様の回線がどの方式か、商品名から言えるようになる (v6プラス、transix など)</a:t>
+              <a:t>この番号で待っていないと、相手からの呼び出しを受けられません</a:t>
+            </a:r>
+          </a:p>
+          <a:p>
+            <a:pPr algn="l">
+              <a:spcAft>
+                <a:spcPts val="500"/>
+              </a:spcAft>
+            </a:pPr>
+            <a:r>
+              <a:rPr sz="1500" b="1">
+                <a:solidFill>
+                  <a:srgbClr val="C0392B"/>
+                </a:solidFill>
+                <a:latin typeface="Meiryo UI"/>
+              </a:rPr>
+              <a:t>「張れます」の条件 — お客様には「たいてい」と言わないこと</a:t>
             </a:r>
           </a:p>
           <a:p>
             <a:pPr lvl="1" algn="l">
               <a:spcAft>
-                <a:spcPts val="600"/>
-              </a:spcAft>
-            </a:pPr>
-            <a:r>
-              <a:rPr sz="1700" b="0">
+                <a:spcPts val="300"/>
+              </a:spcAft>
+            </a:pPr>
+            <a:r>
+              <a:rPr sz="1200" b="0">
                 <a:solidFill>
                   <a:srgbClr val="555555"/>
                 </a:solidFill>
                 <a:latin typeface="Meiryo UI"/>
               </a:rPr>
-              <a:t>③ 「ポート開放できますか?」に即答できるようになる</a:t>
+              <a:t>両端が NAT 越え (NAT-T) に対応していること。これが条件です</a:t>
+            </a:r>
+          </a:p>
+          <a:p>
+            <a:pPr lvl="1" algn="l">
+              <a:spcAft>
+                <a:spcPts val="300"/>
+              </a:spcAft>
+            </a:pPr>
+            <a:r>
+              <a:rPr sz="1200" b="0">
+                <a:solidFill>
+                  <a:srgbClr val="555555"/>
+                </a:solidFill>
+                <a:latin typeface="Meiryo UI"/>
+              </a:rPr>
+              <a:t>MAP-E も DS-Lite も途中でアドレスとポートを書き換えるので、</a:t>
+            </a:r>
+          </a:p>
+          <a:p>
+            <a:pPr lvl="1" algn="l">
+              <a:spcAft>
+                <a:spcPts val="300"/>
+              </a:spcAft>
+            </a:pPr>
+            <a:r>
+              <a:rPr sz="1200" b="0">
+                <a:solidFill>
+                  <a:srgbClr val="555555"/>
+                </a:solidFill>
+                <a:latin typeface="Meiryo UI"/>
+              </a:rPr>
+              <a:t>NAT-T を使わない設定 (ESP をそのまま流す) だと張れません。古い機器は要注意</a:t>
             </a:r>
           </a:p>
           <a:p>
             <a:pPr algn="l">
               <a:spcAft>
-                <a:spcPts val="1000"/>
-              </a:spcAft>
-            </a:pPr>
-            <a:r>
-              <a:rPr sz="2000" b="1">
+                <a:spcPts val="500"/>
+              </a:spcAft>
+            </a:pPr>
+            <a:r>
+              <a:rPr sz="1500" b="1">
                 <a:solidFill>
                   <a:srgbClr val="1F3355"/>
                 </a:solidFill>
                 <a:latin typeface="Meiryo UI"/>
               </a:rPr>
-              <a:t>話す順番 — 大きい話から細かい話へ降ります</a:t>
+              <a:t>結論: 少なくとも片端に固定 IP が要ります</a:t>
+            </a:r>
+          </a:p>
+          <a:p>
+            <a:pPr algn="l">
+              <a:spcAft>
+                <a:spcPts val="500"/>
+              </a:spcAft>
+            </a:pPr>
+            <a:r>
+              <a:rPr sz="1500" b="1">
+                <a:solidFill>
+                  <a:srgbClr val="1F3355"/>
+                </a:solidFill>
+                <a:latin typeface="Meiryo UI"/>
+              </a:rPr>
+              <a:t>拠点 ←→ データセンタ / クラウド の形</a:t>
             </a:r>
           </a:p>
           <a:p>
             <a:pPr lvl="1" algn="l">
               <a:spcAft>
-                <a:spcPts val="600"/>
-              </a:spcAft>
-            </a:pPr>
-            <a:r>
-              <a:rPr sz="1700" b="0">
+                <a:spcPts val="300"/>
+              </a:spcAft>
+            </a:pPr>
+            <a:r>
+              <a:rPr sz="1200" b="0">
                 <a:solidFill>
                   <a:srgbClr val="555555"/>
                 </a:solidFill>
                 <a:latin typeface="Meiryo UI"/>
               </a:rPr>
-              <a:t>第0部  なぜこの話をするのか</a:t>
+              <a:t>センタ側を固定 IP にして、拠点からは発信のみ。これが一番よくある形です</a:t>
+            </a:r>
+          </a:p>
+          <a:p>
+            <a:pPr algn="l">
+              <a:spcAft>
+                <a:spcPts val="500"/>
+              </a:spcAft>
+            </a:pPr>
+            <a:r>
+              <a:rPr sz="1500" b="1">
+                <a:solidFill>
+                  <a:srgbClr val="1F3355"/>
+                </a:solidFill>
+                <a:latin typeface="Meiryo UI"/>
+              </a:rPr>
+              <a:t>拠点 ←→ 拠点 を直接張る形</a:t>
             </a:r>
           </a:p>
           <a:p>
             <a:pPr lvl="1" algn="l">
               <a:spcAft>
-                <a:spcPts val="600"/>
-              </a:spcAft>
-            </a:pPr>
-            <a:r>
-              <a:rPr sz="1700" b="0">
+                <a:spcPts val="300"/>
+              </a:spcAft>
+            </a:pPr>
+            <a:r>
+              <a:rPr sz="1200" b="0">
                 <a:solidFill>
                   <a:srgbClr val="555555"/>
                 </a:solidFill>
                 <a:latin typeface="Meiryo UI"/>
               </a:rPr>
-              <a:t>第1部  IPv6 そのもの — どこの国でも同じ話</a:t>
+              <a:t>どちらか片方は固定 IP が要ります</a:t>
             </a:r>
           </a:p>
           <a:p>
             <a:pPr lvl="1" algn="l">
               <a:spcAft>
-                <a:spcPts val="600"/>
-              </a:spcAft>
-            </a:pPr>
-            <a:r>
-              <a:rPr sz="1700" b="0">
+                <a:spcPts val="300"/>
+              </a:spcAft>
+            </a:pPr>
+            <a:r>
+              <a:rPr sz="1200" b="1">
+                <a:solidFill>
+                  <a:srgbClr val="C0392B"/>
+                </a:solidFill>
+                <a:latin typeface="Meiryo UI"/>
+              </a:rPr>
+              <a:t>両端とも MAP-E / DS-Lite だと、どちらも待ち受けできないので張れません</a:t>
+            </a:r>
+          </a:p>
+          <a:p>
+            <a:pPr algn="l">
+              <a:spcAft>
+                <a:spcPts val="500"/>
+              </a:spcAft>
+            </a:pPr>
+            <a:r>
+              <a:rPr sz="1500" b="1">
+                <a:solidFill>
+                  <a:srgbClr val="1F3355"/>
+                </a:solidFill>
+                <a:latin typeface="Meiryo UI"/>
+              </a:rPr>
+              <a:t>ヒアリングで必ず聞くこと</a:t>
+            </a:r>
+          </a:p>
+          <a:p>
+            <a:pPr lvl="1" algn="l">
+              <a:spcAft>
+                <a:spcPts val="300"/>
+              </a:spcAft>
+            </a:pPr>
+            <a:r>
+              <a:rPr sz="1200" b="0">
                 <a:solidFill>
                   <a:srgbClr val="555555"/>
                 </a:solidFill>
                 <a:latin typeface="Meiryo UI"/>
               </a:rPr>
-              <a:t>第2部  日本の回線 — ここからは日本だけの話</a:t>
+              <a:t>「VPN はどちらから張っていますか」</a:t>
             </a:r>
           </a:p>
           <a:p>
             <a:pPr lvl="1" algn="l">
               <a:spcAft>
-                <a:spcPts val="600"/>
-              </a:spcAft>
-            </a:pPr>
-            <a:r>
-              <a:rPr sz="1700" b="0">
+                <a:spcPts val="300"/>
+              </a:spcAft>
+            </a:pPr>
+            <a:r>
+              <a:rPr sz="1200" b="0">
                 <a:solidFill>
                   <a:srgbClr val="555555"/>
                 </a:solidFill>
                 <a:latin typeface="Meiryo UI"/>
               </a:rPr>
-              <a:t>第3部  IPv4 をどうやって運ぶか — 今日の本題</a:t>
+              <a:t>「どちらでもいい」と言われたら、発信の向きを固定できるかを確認してください</a:t>
+            </a:r>
+          </a:p>
+          <a:p>
+            <a:pPr algn="l">
+              <a:spcAft>
+                <a:spcPts val="500"/>
+              </a:spcAft>
+            </a:pPr>
+            <a:r>
+              <a:rPr sz="1500" b="1">
+                <a:solidFill>
+                  <a:srgbClr val="C0392B"/>
+                </a:solidFill>
+                <a:latin typeface="Meiryo UI"/>
+              </a:rPr>
+              <a:t>※ ここは机上の整理です。うちの検証環境ではまだ VPN を張って測っていません</a:t>
             </a:r>
           </a:p>
           <a:p>
             <a:pPr lvl="1" algn="l">
               <a:spcAft>
-                <a:spcPts val="600"/>
-              </a:spcAft>
-            </a:pPr>
-            <a:r>
-              <a:rPr sz="1700" b="0">
+                <a:spcPts val="300"/>
+              </a:spcAft>
+            </a:pPr>
+            <a:r>
+              <a:rPr sz="1200" b="0">
                 <a:solidFill>
                   <a:srgbClr val="555555"/>
                 </a:solidFill>
                 <a:latin typeface="Meiryo UI"/>
               </a:rPr>
-              <a:t>第4部  検証環境で実際に見たもの</a:t>
-            </a:r>
-          </a:p>
-          <a:p>
-            <a:pPr algn="l">
-              <a:spcAft>
-                <a:spcPts val="1000"/>
-              </a:spcAft>
-            </a:pPr>
-            <a:r>
-              <a:rPr sz="2000" b="1">
-                <a:solidFill>
-                  <a:srgbClr val="C0392B"/>
-                </a:solidFill>
-                <a:latin typeface="Meiryo UI"/>
-              </a:rPr>
-              <a:t>迷ったらこのページに戻ってください。どこの話か分かれば必ずついてこられます</a:t>
+              <a:t>案件で使う前に必ず実機で確かめてください (検証項目として積んであります)</a:t>
             </a:r>
           </a:p>
         </p:txBody>
@@ -11152,7 +11839,7 @@
 </p:sld>
 </file>
 
-<file path=ppt/slides/slide30.xml><?xml version="1.0" encoding="utf-8"?>
+<file path=ppt/slides/slide32.xml><?xml version="1.0" encoding="utf-8"?>
 <p:sld xmlns:a="http://schemas.openxmlformats.org/drawingml/2006/main" xmlns:p="http://schemas.openxmlformats.org/presentationml/2006/main" xmlns:r="http://schemas.openxmlformats.org/officeDocument/2006/relationships">
   <p:cSld>
     <p:spTree>
@@ -11192,7 +11879,7 @@
                 </a:solidFill>
                 <a:latin typeface="Meiryo UI"/>
               </a:rPr>
-              <a:t>だから VPN はこう提案します</a:t>
+              <a:t>MTU 1460 — 「Web は見えるのにファイルが落ちない」の正体</a:t>
             </a:r>
           </a:p>
         </p:txBody>
@@ -11249,301 +11936,6 @@
         <p:spPr>
           <a:xfrm>
             <a:off x="594360" y="1371600"/>
-            <a:ext cx="10972800" cy="4983480"/>
-          </a:xfrm>
-          <a:prstGeom prst="rect">
-            <a:avLst/>
-          </a:prstGeom>
-          <a:noFill/>
-        </p:spPr>
-        <p:txBody>
-          <a:bodyPr wrap="square">
-            <a:spAutoFit/>
-          </a:bodyPr>
-          <a:lstStyle/>
-          <a:p>
-            <a:pPr algn="l">
-              <a:spcAft>
-                <a:spcPts val="1000"/>
-              </a:spcAft>
-            </a:pPr>
-            <a:r>
-              <a:rPr sz="2000" b="1">
-                <a:solidFill>
-                  <a:srgbClr val="1F3355"/>
-                </a:solidFill>
-                <a:latin typeface="Meiryo UI"/>
-              </a:rPr>
-              <a:t>結論: 少なくとも片端に固定 IP が要ります</a:t>
-            </a:r>
-          </a:p>
-          <a:p>
-            <a:pPr algn="l">
-              <a:spcAft>
-                <a:spcPts val="1000"/>
-              </a:spcAft>
-            </a:pPr>
-            <a:r>
-              <a:rPr sz="2000" b="1">
-                <a:solidFill>
-                  <a:srgbClr val="1F3355"/>
-                </a:solidFill>
-                <a:latin typeface="Meiryo UI"/>
-              </a:rPr>
-              <a:t>拠点 ←→ データセンタ / クラウド の形</a:t>
-            </a:r>
-          </a:p>
-          <a:p>
-            <a:pPr lvl="1" algn="l">
-              <a:spcAft>
-                <a:spcPts val="600"/>
-              </a:spcAft>
-            </a:pPr>
-            <a:r>
-              <a:rPr sz="1700" b="0">
-                <a:solidFill>
-                  <a:srgbClr val="555555"/>
-                </a:solidFill>
-                <a:latin typeface="Meiryo UI"/>
-              </a:rPr>
-              <a:t>センタ側を固定 IP にして、拠点からは発信のみ。これが一番よくある形です</a:t>
-            </a:r>
-          </a:p>
-          <a:p>
-            <a:pPr algn="l">
-              <a:spcAft>
-                <a:spcPts val="1000"/>
-              </a:spcAft>
-            </a:pPr>
-            <a:r>
-              <a:rPr sz="2000" b="1">
-                <a:solidFill>
-                  <a:srgbClr val="1F3355"/>
-                </a:solidFill>
-                <a:latin typeface="Meiryo UI"/>
-              </a:rPr>
-              <a:t>拠点 ←→ 拠点 を直接張る形</a:t>
-            </a:r>
-          </a:p>
-          <a:p>
-            <a:pPr lvl="1" algn="l">
-              <a:spcAft>
-                <a:spcPts val="600"/>
-              </a:spcAft>
-            </a:pPr>
-            <a:r>
-              <a:rPr sz="1700" b="0">
-                <a:solidFill>
-                  <a:srgbClr val="555555"/>
-                </a:solidFill>
-                <a:latin typeface="Meiryo UI"/>
-              </a:rPr>
-              <a:t>どちらか片方は固定 IP が要ります</a:t>
-            </a:r>
-          </a:p>
-          <a:p>
-            <a:pPr lvl="1" algn="l">
-              <a:spcAft>
-                <a:spcPts val="600"/>
-              </a:spcAft>
-            </a:pPr>
-            <a:r>
-              <a:rPr sz="1700" b="1">
-                <a:solidFill>
-                  <a:srgbClr val="C0392B"/>
-                </a:solidFill>
-                <a:latin typeface="Meiryo UI"/>
-              </a:rPr>
-              <a:t>両端とも MAP-E / DS-Lite だと、どちらも待ち受けできないので張れません</a:t>
-            </a:r>
-          </a:p>
-          <a:p>
-            <a:pPr algn="l">
-              <a:spcAft>
-                <a:spcPts val="1000"/>
-              </a:spcAft>
-            </a:pPr>
-            <a:r>
-              <a:rPr sz="2000" b="1">
-                <a:solidFill>
-                  <a:srgbClr val="1F3355"/>
-                </a:solidFill>
-                <a:latin typeface="Meiryo UI"/>
-              </a:rPr>
-              <a:t>ヒアリングで必ず聞くこと</a:t>
-            </a:r>
-          </a:p>
-          <a:p>
-            <a:pPr lvl="1" algn="l">
-              <a:spcAft>
-                <a:spcPts val="600"/>
-              </a:spcAft>
-            </a:pPr>
-            <a:r>
-              <a:rPr sz="1700" b="0">
-                <a:solidFill>
-                  <a:srgbClr val="555555"/>
-                </a:solidFill>
-                <a:latin typeface="Meiryo UI"/>
-              </a:rPr>
-              <a:t>「VPN はどちらから張っていますか」</a:t>
-            </a:r>
-          </a:p>
-          <a:p>
-            <a:pPr lvl="1" algn="l">
-              <a:spcAft>
-                <a:spcPts val="600"/>
-              </a:spcAft>
-            </a:pPr>
-            <a:r>
-              <a:rPr sz="1700" b="0">
-                <a:solidFill>
-                  <a:srgbClr val="555555"/>
-                </a:solidFill>
-                <a:latin typeface="Meiryo UI"/>
-              </a:rPr>
-              <a:t>「どちらでもいい」と言われたら、発信の向きを固定できるかを確認してください</a:t>
-            </a:r>
-          </a:p>
-          <a:p>
-            <a:pPr algn="l">
-              <a:spcAft>
-                <a:spcPts val="1000"/>
-              </a:spcAft>
-            </a:pPr>
-            <a:r>
-              <a:rPr sz="2000" b="1">
-                <a:solidFill>
-                  <a:srgbClr val="C0392B"/>
-                </a:solidFill>
-                <a:latin typeface="Meiryo UI"/>
-              </a:rPr>
-              <a:t>※ ここは机上の整理です。うちの検証環境ではまだ VPN を張って測っていません</a:t>
-            </a:r>
-          </a:p>
-          <a:p>
-            <a:pPr lvl="1" algn="l">
-              <a:spcAft>
-                <a:spcPts val="600"/>
-              </a:spcAft>
-            </a:pPr>
-            <a:r>
-              <a:rPr sz="1700" b="0">
-                <a:solidFill>
-                  <a:srgbClr val="555555"/>
-                </a:solidFill>
-                <a:latin typeface="Meiryo UI"/>
-              </a:rPr>
-              <a:t>案件で使う前に必ず実機で確かめてください (検証項目として積んであります)</a:t>
-            </a:r>
-          </a:p>
-        </p:txBody>
-      </p:sp>
-    </p:spTree>
-  </p:cSld>
-  <p:clrMapOvr>
-    <a:masterClrMapping/>
-  </p:clrMapOvr>
-</p:sld>
-</file>
-
-<file path=ppt/slides/slide31.xml><?xml version="1.0" encoding="utf-8"?>
-<p:sld xmlns:a="http://schemas.openxmlformats.org/drawingml/2006/main" xmlns:p="http://schemas.openxmlformats.org/presentationml/2006/main" xmlns:r="http://schemas.openxmlformats.org/officeDocument/2006/relationships">
-  <p:cSld>
-    <p:spTree>
-      <p:nvGrpSpPr>
-        <p:cNvPr id="1" name=""/>
-        <p:cNvGrpSpPr/>
-        <p:nvPr/>
-      </p:nvGrpSpPr>
-      <p:grpSpPr/>
-      <p:sp>
-        <p:nvSpPr>
-          <p:cNvPr id="2" name="TextBox 1"/>
-          <p:cNvSpPr txBox="1"/>
-          <p:nvPr/>
-        </p:nvSpPr>
-        <p:spPr>
-          <a:xfrm>
-            <a:off x="502920" y="320040"/>
-            <a:ext cx="11155680" cy="822960"/>
-          </a:xfrm>
-          <a:prstGeom prst="rect">
-            <a:avLst/>
-          </a:prstGeom>
-          <a:noFill/>
-        </p:spPr>
-        <p:txBody>
-          <a:bodyPr wrap="square">
-            <a:spAutoFit/>
-          </a:bodyPr>
-          <a:lstStyle/>
-          <a:p>
-            <a:pPr algn="l"/>
-            <a:r>
-              <a:rPr sz="2800" b="1">
-                <a:solidFill>
-                  <a:srgbClr val="1F3355"/>
-                </a:solidFill>
-                <a:latin typeface="Meiryo UI"/>
-              </a:rPr>
-              <a:t>MTU 1460 — 「Web は見えるのにファイルが落ちない」の正体</a:t>
-            </a:r>
-          </a:p>
-        </p:txBody>
-      </p:sp>
-      <p:sp>
-        <p:nvSpPr>
-          <p:cNvPr id="3" name="Rectangle 2"/>
-          <p:cNvSpPr/>
-          <p:nvPr/>
-        </p:nvSpPr>
-        <p:spPr>
-          <a:xfrm>
-            <a:off x="502920" y="1115568"/>
-            <a:ext cx="11155680" cy="31750"/>
-          </a:xfrm>
-          <a:prstGeom prst="rect">
-            <a:avLst/>
-          </a:prstGeom>
-          <a:solidFill>
-            <a:srgbClr val="007ACC"/>
-          </a:solidFill>
-          <a:ln>
-            <a:noFill/>
-          </a:ln>
-        </p:spPr>
-        <p:style>
-          <a:lnRef idx="1">
-            <a:schemeClr val="accent1"/>
-          </a:lnRef>
-          <a:fillRef idx="3">
-            <a:schemeClr val="accent1"/>
-          </a:fillRef>
-          <a:effectRef idx="2">
-            <a:schemeClr val="accent1"/>
-          </a:effectRef>
-          <a:fontRef idx="minor">
-            <a:schemeClr val="lt1"/>
-          </a:fontRef>
-        </p:style>
-        <p:txBody>
-          <a:bodyPr rtlCol="0" anchor="ctr"/>
-          <a:lstStyle/>
-          <a:p>
-            <a:pPr algn="ctr"/>
-          </a:p>
-        </p:txBody>
-      </p:sp>
-      <p:sp>
-        <p:nvSpPr>
-          <p:cNvPr id="4" name="TextBox 3"/>
-          <p:cNvSpPr txBox="1"/>
-          <p:nvPr/>
-        </p:nvSpPr>
-        <p:spPr>
-          <a:xfrm>
-            <a:off x="594360" y="1371600"/>
             <a:ext cx="10972800" cy="4709160"/>
           </a:xfrm>
           <a:prstGeom prst="rect">
@@ -11559,11 +11951,11 @@
           <a:p>
             <a:pPr algn="l">
               <a:spcAft>
-                <a:spcPts val="1000"/>
-              </a:spcAft>
-            </a:pPr>
-            <a:r>
-              <a:rPr sz="2000" b="1">
+                <a:spcPts val="900"/>
+              </a:spcAft>
+            </a:pPr>
+            <a:r>
+              <a:rPr sz="1900" b="1">
                 <a:solidFill>
                   <a:srgbClr val="1F3355"/>
                 </a:solidFill>
@@ -11575,11 +11967,11 @@
           <a:p>
             <a:pPr lvl="1" algn="l">
               <a:spcAft>
-                <a:spcPts val="600"/>
-              </a:spcAft>
-            </a:pPr>
-            <a:r>
-              <a:rPr sz="1700" b="0">
+                <a:spcPts val="500"/>
+              </a:spcAft>
+            </a:pPr>
+            <a:r>
+              <a:rPr sz="1600" b="0">
                 <a:solidFill>
                   <a:srgbClr val="555555"/>
                 </a:solidFill>
@@ -11591,11 +11983,11 @@
           <a:p>
             <a:pPr lvl="1" algn="l">
               <a:spcAft>
-                <a:spcPts val="600"/>
-              </a:spcAft>
-            </a:pPr>
-            <a:r>
-              <a:rPr sz="1700" b="0">
+                <a:spcPts val="500"/>
+              </a:spcAft>
+            </a:pPr>
+            <a:r>
+              <a:rPr sz="1600" b="0">
                 <a:solidFill>
                   <a:srgbClr val="555555"/>
                 </a:solidFill>
@@ -11607,11 +11999,11 @@
           <a:p>
             <a:pPr lvl="1" algn="l">
               <a:spcAft>
-                <a:spcPts val="600"/>
-              </a:spcAft>
-            </a:pPr>
-            <a:r>
-              <a:rPr sz="1700" b="1">
+                <a:spcPts val="500"/>
+              </a:spcAft>
+            </a:pPr>
+            <a:r>
+              <a:rPr sz="1600" b="1">
                 <a:solidFill>
                   <a:srgbClr val="C0392B"/>
                 </a:solidFill>
@@ -11623,11 +12015,11 @@
           <a:p>
             <a:pPr lvl="1" algn="l">
               <a:spcAft>
-                <a:spcPts val="600"/>
-              </a:spcAft>
-            </a:pPr>
-            <a:r>
-              <a:rPr sz="1700" b="1">
+                <a:spcPts val="500"/>
+              </a:spcAft>
+            </a:pPr>
+            <a:r>
+              <a:rPr sz="1600" b="1">
                 <a:solidFill>
                   <a:srgbClr val="C0392B"/>
                 </a:solidFill>
@@ -11639,11 +12031,11 @@
           <a:p>
             <a:pPr algn="l">
               <a:spcAft>
-                <a:spcPts val="1000"/>
-              </a:spcAft>
-            </a:pPr>
-            <a:r>
-              <a:rPr sz="2000" b="1">
+                <a:spcPts val="900"/>
+              </a:spcAft>
+            </a:pPr>
+            <a:r>
+              <a:rPr sz="1900" b="1">
                 <a:solidFill>
                   <a:srgbClr val="1F3355"/>
                 </a:solidFill>
@@ -11655,11 +12047,11 @@
           <a:p>
             <a:pPr lvl="1" algn="l">
               <a:spcAft>
-                <a:spcPts val="600"/>
-              </a:spcAft>
-            </a:pPr>
-            <a:r>
-              <a:rPr sz="1700" b="0">
+                <a:spcPts val="500"/>
+              </a:spcAft>
+            </a:pPr>
+            <a:r>
+              <a:rPr sz="1600" b="0">
                 <a:solidFill>
                   <a:srgbClr val="555555"/>
                 </a:solidFill>
@@ -11671,11 +12063,11 @@
           <a:p>
             <a:pPr lvl="1" algn="l">
               <a:spcAft>
-                <a:spcPts val="600"/>
-              </a:spcAft>
-            </a:pPr>
-            <a:r>
-              <a:rPr sz="1700" b="0">
+                <a:spcPts val="500"/>
+              </a:spcAft>
+            </a:pPr>
+            <a:r>
+              <a:rPr sz="1600" b="0">
                 <a:solidFill>
                   <a:srgbClr val="555555"/>
                 </a:solidFill>
@@ -11687,11 +12079,27 @@
           <a:p>
             <a:pPr lvl="1" algn="l">
               <a:spcAft>
-                <a:spcPts val="600"/>
-              </a:spcAft>
-            </a:pPr>
-            <a:r>
-              <a:rPr sz="1700" b="0">
+                <a:spcPts val="500"/>
+              </a:spcAft>
+            </a:pPr>
+            <a:r>
+              <a:rPr sz="1600" b="1">
+                <a:solidFill>
+                  <a:srgbClr val="C0392B"/>
+                </a:solidFill>
+                <a:latin typeface="Meiryo UI"/>
+              </a:rPr>
+              <a:t>※ 40 を 2 回引きますが、中身は別物です (1 回目は IPv6 ヘッダ、2 回目は TCP+IP)。偶然同じ数字です</a:t>
+            </a:r>
+          </a:p>
+          <a:p>
+            <a:pPr lvl="1" algn="l">
+              <a:spcAft>
+                <a:spcPts val="500"/>
+              </a:spcAft>
+            </a:pPr>
+            <a:r>
+              <a:rPr sz="1600" b="0">
                 <a:solidFill>
                   <a:srgbClr val="0B6040"/>
                 </a:solidFill>
@@ -11703,11 +12111,11 @@
           <a:p>
             <a:pPr lvl="1" algn="l">
               <a:spcAft>
-                <a:spcPts val="600"/>
-              </a:spcAft>
-            </a:pPr>
-            <a:r>
-              <a:rPr sz="1700" b="0">
+                <a:spcPts val="500"/>
+              </a:spcAft>
+            </a:pPr>
+            <a:r>
+              <a:rPr sz="1600" b="0">
                 <a:solidFill>
                   <a:srgbClr val="555555"/>
                 </a:solidFill>
@@ -11719,11 +12127,11 @@
           <a:p>
             <a:pPr lvl="1" algn="l">
               <a:spcAft>
-                <a:spcPts val="600"/>
-              </a:spcAft>
-            </a:pPr>
-            <a:r>
-              <a:rPr sz="1700" b="0">
+                <a:spcPts val="500"/>
+              </a:spcAft>
+            </a:pPr>
+            <a:r>
+              <a:rPr sz="1600" b="0">
                 <a:solidFill>
                   <a:srgbClr val="555555"/>
                 </a:solidFill>
@@ -11777,7 +12185,7 @@
 </p:sld>
 </file>
 
-<file path=ppt/slides/slide32.xml><?xml version="1.0" encoding="utf-8"?>
+<file path=ppt/slides/slide33.xml><?xml version="1.0" encoding="utf-8"?>
 <p:sld xmlns:a="http://schemas.openxmlformats.org/drawingml/2006/main" xmlns:p="http://schemas.openxmlformats.org/presentationml/2006/main" xmlns:r="http://schemas.openxmlformats.org/officeDocument/2006/relationships">
   <p:cSld>
     <p:spTree>
@@ -11901,7 +12309,7 @@
 </p:sld>
 </file>
 
-<file path=ppt/slides/slide33.xml><?xml version="1.0" encoding="utf-8"?>
+<file path=ppt/slides/slide34.xml><?xml version="1.0" encoding="utf-8"?>
 <p:sld xmlns:a="http://schemas.openxmlformats.org/drawingml/2006/main" xmlns:p="http://schemas.openxmlformats.org/presentationml/2006/main" xmlns:r="http://schemas.openxmlformats.org/officeDocument/2006/relationships">
   <p:cSld>
     <p:spTree>
@@ -12454,7 +12862,7 @@
 </p:sld>
 </file>
 
-<file path=ppt/slides/slide34.xml><?xml version="1.0" encoding="utf-8"?>
+<file path=ppt/slides/slide35.xml><?xml version="1.0" encoding="utf-8"?>
 <p:sld xmlns:a="http://schemas.openxmlformats.org/drawingml/2006/main" xmlns:p="http://schemas.openxmlformats.org/presentationml/2006/main" xmlns:r="http://schemas.openxmlformats.org/officeDocument/2006/relationships">
   <p:cSld>
     <p:spTree>
@@ -12856,7 +13264,7 @@
 </p:sld>
 </file>
 
-<file path=ppt/slides/slide35.xml><?xml version="1.0" encoding="utf-8"?>
+<file path=ppt/slides/slide36.xml><?xml version="1.0" encoding="utf-8"?>
 <p:sld xmlns:a="http://schemas.openxmlformats.org/drawingml/2006/main" xmlns:p="http://schemas.openxmlformats.org/presentationml/2006/main" xmlns:r="http://schemas.openxmlformats.org/officeDocument/2006/relationships">
   <p:cSld>
     <p:spTree>
@@ -13397,7 +13805,7 @@
 </p:sld>
 </file>
 
-<file path=ppt/slides/slide36.xml><?xml version="1.0" encoding="utf-8"?>
+<file path=ppt/slides/slide37.xml><?xml version="1.0" encoding="utf-8"?>
 <p:sld xmlns:a="http://schemas.openxmlformats.org/drawingml/2006/main" xmlns:p="http://schemas.openxmlformats.org/presentationml/2006/main" xmlns:r="http://schemas.openxmlformats.org/officeDocument/2006/relationships">
   <p:cSld>
     <p:spTree>
@@ -13756,7 +14164,7 @@
 </p:sld>
 </file>
 
-<file path=ppt/slides/slide37.xml><?xml version="1.0" encoding="utf-8"?>
+<file path=ppt/slides/slide38.xml><?xml version="1.0" encoding="utf-8"?>
 <p:sld xmlns:a="http://schemas.openxmlformats.org/drawingml/2006/main" xmlns:p="http://schemas.openxmlformats.org/presentationml/2006/main" xmlns:r="http://schemas.openxmlformats.org/officeDocument/2006/relationships">
   <p:cSld>
     <p:spTree>
@@ -14067,7 +14475,7 @@
 </p:sld>
 </file>
 
-<file path=ppt/slides/slide38.xml><?xml version="1.0" encoding="utf-8"?>
+<file path=ppt/slides/slide39.xml><?xml version="1.0" encoding="utf-8"?>
 <p:sld xmlns:a="http://schemas.openxmlformats.org/drawingml/2006/main" xmlns:p="http://schemas.openxmlformats.org/presentationml/2006/main" xmlns:r="http://schemas.openxmlformats.org/officeDocument/2006/relationships">
   <p:cSld>
     <p:spTree>

--- a/docs/ipoe-lab/slides/setsumeikai.pptx
+++ b/docs/ipoe-lab/slides/setsumeikai.pptx
@@ -44,6 +44,8 @@
     <p:sldId id="292" r:id="rId43"/>
     <p:sldId id="293" r:id="rId44"/>
     <p:sldId id="294" r:id="rId45"/>
+    <p:sldId id="295" r:id="rId46"/>
+    <p:sldId id="296" r:id="rId47"/>
   </p:sldIdLst>
   <p:sldSz cx="12191695" cy="6858000" type="screen4x3"/>
   <p:notesSz cx="6858000" cy="9144000"/>
@@ -8011,6 +8013,699 @@
       <p:grpSpPr/>
       <p:sp>
         <p:nvSpPr>
+          <p:cNvPr id="2" name="TextBox 1"/>
+          <p:cNvSpPr txBox="1"/>
+          <p:nvPr/>
+        </p:nvSpPr>
+        <p:spPr>
+          <a:xfrm>
+            <a:off x="502920" y="274320"/>
+            <a:ext cx="11155680" cy="731520"/>
+          </a:xfrm>
+          <a:prstGeom prst="rect">
+            <a:avLst/>
+          </a:prstGeom>
+          <a:noFill/>
+        </p:spPr>
+        <p:txBody>
+          <a:bodyPr wrap="square">
+            <a:spAutoFit/>
+          </a:bodyPr>
+          <a:lstStyle/>
+          <a:p>
+            <a:pPr algn="l"/>
+            <a:r>
+              <a:rPr sz="2600" b="1">
+                <a:solidFill>
+                  <a:srgbClr val="1F3355"/>
+                </a:solidFill>
+                <a:latin typeface="Meiryo UI"/>
+              </a:rPr>
+              <a:t>⚠ 自社で 2 回続けて開通に失敗した事例 — 契約書だけでは足りません</a:t>
+            </a:r>
+          </a:p>
+        </p:txBody>
+      </p:sp>
+      <p:graphicFrame>
+        <p:nvGraphicFramePr>
+          <p:cNvPr id="3" name="Table 2"/>
+          <p:cNvGraphicFramePr>
+            <a:graphicFrameLocks noGrp="1"/>
+          </p:cNvGraphicFramePr>
+          <p:nvPr/>
+        </p:nvGraphicFramePr>
+        <p:xfrm>
+          <a:off x="502920" y="1143000"/>
+          <a:ext cx="10789920" cy="932688"/>
+        </p:xfrm>
+        <a:graphic>
+          <a:graphicData uri="http://schemas.openxmlformats.org/drawingml/2006/table">
+            <a:tbl>
+              <a:tblPr>
+                <a:tableStyleId>{5C22544A-7EE6-4342-B048-85BDC9FD1C3A}</a:tableStyleId>
+              </a:tblPr>
+              <a:tblGrid>
+                <a:gridCol w="1463040"/>
+                <a:gridCol w="4206240"/>
+                <a:gridCol w="3108960"/>
+                <a:gridCol w="2011680"/>
+              </a:tblGrid>
+              <a:tr h="310896">
+                <a:tc>
+                  <a:txBody>
+                    <a:bodyPr/>
+                    <a:lstStyle/>
+                    <a:p>
+                      <a:pPr algn="l"/>
+                      <a:r>
+                        <a:rPr sz="1500" b="1">
+                          <a:solidFill>
+                            <a:srgbClr val="FFFFFF"/>
+                          </a:solidFill>
+                          <a:latin typeface="Meiryo UI"/>
+                        </a:rPr>
+                        <a:t/>
+                      </a:r>
+                    </a:p>
+                  </a:txBody>
+                  <a:tcPr>
+                    <a:solidFill>
+                      <a:srgbClr val="1F3355"/>
+                    </a:solidFill>
+                  </a:tcPr>
+                </a:tc>
+                <a:tc>
+                  <a:txBody>
+                    <a:bodyPr/>
+                    <a:lstStyle/>
+                    <a:p>
+                      <a:pPr algn="l"/>
+                      <a:r>
+                        <a:rPr sz="1500" b="1">
+                          <a:solidFill>
+                            <a:srgbClr val="FFFFFF"/>
+                          </a:solidFill>
+                          <a:latin typeface="Meiryo UI"/>
+                        </a:rPr>
+                        <a:t>想定</a:t>
+                      </a:r>
+                    </a:p>
+                  </a:txBody>
+                  <a:tcPr>
+                    <a:solidFill>
+                      <a:srgbClr val="1F3355"/>
+                    </a:solidFill>
+                  </a:tcPr>
+                </a:tc>
+                <a:tc>
+                  <a:txBody>
+                    <a:bodyPr/>
+                    <a:lstStyle/>
+                    <a:p>
+                      <a:pPr algn="l"/>
+                      <a:r>
+                        <a:rPr sz="1500" b="1">
+                          <a:solidFill>
+                            <a:srgbClr val="FFFFFF"/>
+                          </a:solidFill>
+                          <a:latin typeface="Meiryo UI"/>
+                        </a:rPr>
+                        <a:t>実際</a:t>
+                      </a:r>
+                    </a:p>
+                  </a:txBody>
+                  <a:tcPr>
+                    <a:solidFill>
+                      <a:srgbClr val="1F3355"/>
+                    </a:solidFill>
+                  </a:tcPr>
+                </a:tc>
+                <a:tc>
+                  <a:txBody>
+                    <a:bodyPr/>
+                    <a:lstStyle/>
+                    <a:p>
+                      <a:pPr algn="l"/>
+                      <a:r>
+                        <a:rPr sz="1500" b="1">
+                          <a:solidFill>
+                            <a:srgbClr val="FFFFFF"/>
+                          </a:solidFill>
+                          <a:latin typeface="Meiryo UI"/>
+                        </a:rPr>
+                        <a:t>結果</a:t>
+                      </a:r>
+                    </a:p>
+                  </a:txBody>
+                  <a:tcPr>
+                    <a:solidFill>
+                      <a:srgbClr val="1F3355"/>
+                    </a:solidFill>
+                  </a:tcPr>
+                </a:tc>
+              </a:tr>
+              <a:tr h="310896">
+                <a:tc>
+                  <a:txBody>
+                    <a:bodyPr/>
+                    <a:lstStyle/>
+                    <a:p>
+                      <a:pPr algn="l"/>
+                      <a:r>
+                        <a:rPr sz="1400" b="0">
+                          <a:solidFill>
+                            <a:srgbClr val="1F3355"/>
+                          </a:solidFill>
+                          <a:latin typeface="Meiryo UI"/>
+                        </a:rPr>
+                        <a:t>1 回目</a:t>
+                      </a:r>
+                    </a:p>
+                  </a:txBody>
+                  <a:tcPr>
+                    <a:solidFill>
+                      <a:srgbClr val="FFFFFF"/>
+                    </a:solidFill>
+                  </a:tcPr>
+                </a:tc>
+                <a:tc>
+                  <a:txBody>
+                    <a:bodyPr/>
+                    <a:lstStyle/>
+                    <a:p>
+                      <a:pPr algn="l"/>
+                      <a:r>
+                        <a:rPr sz="1400" b="0">
+                          <a:solidFill>
+                            <a:srgbClr val="1F3355"/>
+                          </a:solidFill>
+                          <a:latin typeface="Meiryo UI"/>
+                        </a:rPr>
+                        <a:t>動的 IP コースだと思って設定</a:t>
+                      </a:r>
+                    </a:p>
+                  </a:txBody>
+                  <a:tcPr>
+                    <a:solidFill>
+                      <a:srgbClr val="FFFFFF"/>
+                    </a:solidFill>
+                  </a:tcPr>
+                </a:tc>
+                <a:tc>
+                  <a:txBody>
+                    <a:bodyPr/>
+                    <a:lstStyle/>
+                    <a:p>
+                      <a:pPr algn="l"/>
+                      <a:r>
+                        <a:rPr sz="1400" b="0">
+                          <a:solidFill>
+                            <a:srgbClr val="1F3355"/>
+                          </a:solidFill>
+                          <a:latin typeface="Meiryo UI"/>
+                        </a:rPr>
+                        <a:t>固定 IP コースだった</a:t>
+                      </a:r>
+                    </a:p>
+                  </a:txBody>
+                  <a:tcPr>
+                    <a:solidFill>
+                      <a:srgbClr val="FFFFFF"/>
+                    </a:solidFill>
+                  </a:tcPr>
+                </a:tc>
+                <a:tc>
+                  <a:txBody>
+                    <a:bodyPr/>
+                    <a:lstStyle/>
+                    <a:p>
+                      <a:pPr algn="l"/>
+                      <a:r>
+                        <a:rPr sz="1400" b="0">
+                          <a:solidFill>
+                            <a:srgbClr val="1F3355"/>
+                          </a:solidFill>
+                          <a:latin typeface="Meiryo UI"/>
+                        </a:rPr>
+                        <a:t>失敗</a:t>
+                      </a:r>
+                    </a:p>
+                  </a:txBody>
+                  <a:tcPr>
+                    <a:solidFill>
+                      <a:srgbClr val="FFFFFF"/>
+                    </a:solidFill>
+                  </a:tcPr>
+                </a:tc>
+              </a:tr>
+              <a:tr h="310896">
+                <a:tc>
+                  <a:txBody>
+                    <a:bodyPr/>
+                    <a:lstStyle/>
+                    <a:p>
+                      <a:pPr algn="l"/>
+                      <a:r>
+                        <a:rPr sz="1400" b="0">
+                          <a:solidFill>
+                            <a:srgbClr val="1F3355"/>
+                          </a:solidFill>
+                          <a:latin typeface="Meiryo UI"/>
+                        </a:rPr>
+                        <a:t>2 回目</a:t>
+                      </a:r>
+                    </a:p>
+                  </a:txBody>
+                  <a:tcPr>
+                    <a:solidFill>
+                      <a:srgbClr val="F2F6FA"/>
+                    </a:solidFill>
+                  </a:tcPr>
+                </a:tc>
+                <a:tc>
+                  <a:txBody>
+                    <a:bodyPr/>
+                    <a:lstStyle/>
+                    <a:p>
+                      <a:pPr algn="l"/>
+                      <a:r>
+                        <a:rPr sz="1400" b="0">
+                          <a:solidFill>
+                            <a:srgbClr val="1F3355"/>
+                          </a:solidFill>
+                          <a:latin typeface="Meiryo UI"/>
+                        </a:rPr>
+                        <a:t>固定 IP と気づき PD 方式だと思って設定</a:t>
+                      </a:r>
+                    </a:p>
+                  </a:txBody>
+                  <a:tcPr>
+                    <a:solidFill>
+                      <a:srgbClr val="F2F6FA"/>
+                    </a:solidFill>
+                  </a:tcPr>
+                </a:tc>
+                <a:tc>
+                  <a:txBody>
+                    <a:bodyPr/>
+                    <a:lstStyle/>
+                    <a:p>
+                      <a:pPr algn="l"/>
+                      <a:r>
+                        <a:rPr sz="1400" b="0">
+                          <a:solidFill>
+                            <a:srgbClr val="1F3355"/>
+                          </a:solidFill>
+                          <a:latin typeface="Meiryo UI"/>
+                        </a:rPr>
+                        <a:t>RA 方式だった</a:t>
+                      </a:r>
+                    </a:p>
+                  </a:txBody>
+                  <a:tcPr>
+                    <a:solidFill>
+                      <a:srgbClr val="F2F6FA"/>
+                    </a:solidFill>
+                  </a:tcPr>
+                </a:tc>
+                <a:tc>
+                  <a:txBody>
+                    <a:bodyPr/>
+                    <a:lstStyle/>
+                    <a:p>
+                      <a:pPr algn="l"/>
+                      <a:r>
+                        <a:rPr sz="1400" b="0">
+                          <a:solidFill>
+                            <a:srgbClr val="1F3355"/>
+                          </a:solidFill>
+                          <a:latin typeface="Meiryo UI"/>
+                        </a:rPr>
+                        <a:t>失敗</a:t>
+                      </a:r>
+                    </a:p>
+                  </a:txBody>
+                  <a:tcPr>
+                    <a:solidFill>
+                      <a:srgbClr val="F2F6FA"/>
+                    </a:solidFill>
+                  </a:tcPr>
+                </a:tc>
+              </a:tr>
+            </a:tbl>
+          </a:graphicData>
+        </a:graphic>
+      </p:graphicFrame>
+      <p:sp>
+        <p:nvSpPr>
+          <p:cNvPr id="4" name="TextBox 3"/>
+          <p:cNvSpPr txBox="1"/>
+          <p:nvPr/>
+        </p:nvSpPr>
+        <p:spPr>
+          <a:xfrm>
+            <a:off x="502920" y="2331720"/>
+            <a:ext cx="11155680" cy="548640"/>
+          </a:xfrm>
+          <a:prstGeom prst="rect">
+            <a:avLst/>
+          </a:prstGeom>
+          <a:noFill/>
+        </p:spPr>
+        <p:txBody>
+          <a:bodyPr wrap="square">
+            <a:spAutoFit/>
+          </a:bodyPr>
+          <a:lstStyle/>
+          <a:p>
+            <a:pPr algn="l"/>
+            <a:r>
+              <a:rPr sz="1200" b="0">
+                <a:solidFill>
+                  <a:srgbClr val="007ACC"/>
+                </a:solidFill>
+                <a:latin typeface="Meiryo UI"/>
+              </a:rPr>
+              <a:t>その回線の公式ページには IPv4 の運び方は書いてあるのに、IPv6 の払い出し方式 (RA か PD か) の記載がありません</a:t>
+            </a:r>
+          </a:p>
+        </p:txBody>
+      </p:sp>
+    </p:spTree>
+  </p:cSld>
+  <p:clrMapOvr>
+    <a:masterClrMapping/>
+  </p:clrMapOvr>
+</p:sld>
+</file>
+
+<file path=ppt/slides/slide22.xml><?xml version="1.0" encoding="utf-8"?>
+<p:sld xmlns:a="http://schemas.openxmlformats.org/drawingml/2006/main" xmlns:p="http://schemas.openxmlformats.org/presentationml/2006/main" xmlns:r="http://schemas.openxmlformats.org/officeDocument/2006/relationships">
+  <p:cSld>
+    <p:spTree>
+      <p:nvGrpSpPr>
+        <p:cNvPr id="1" name=""/>
+        <p:cNvGrpSpPr/>
+        <p:nvPr/>
+      </p:nvGrpSpPr>
+      <p:grpSpPr/>
+      <p:sp>
+        <p:nvSpPr>
+          <p:cNvPr id="2" name="TextBox 1"/>
+          <p:cNvSpPr txBox="1"/>
+          <p:nvPr/>
+        </p:nvSpPr>
+        <p:spPr>
+          <a:xfrm>
+            <a:off x="502920" y="320040"/>
+            <a:ext cx="11155680" cy="822960"/>
+          </a:xfrm>
+          <a:prstGeom prst="rect">
+            <a:avLst/>
+          </a:prstGeom>
+          <a:noFill/>
+        </p:spPr>
+        <p:txBody>
+          <a:bodyPr wrap="square">
+            <a:spAutoFit/>
+          </a:bodyPr>
+          <a:lstStyle/>
+          <a:p>
+            <a:pPr algn="l"/>
+            <a:r>
+              <a:rPr sz="2800" b="1">
+                <a:solidFill>
+                  <a:srgbClr val="1F3355"/>
+                </a:solidFill>
+                <a:latin typeface="Meiryo UI"/>
+              </a:rPr>
+              <a:t>この事例の教訓 3 つ</a:t>
+            </a:r>
+          </a:p>
+        </p:txBody>
+      </p:sp>
+      <p:sp>
+        <p:nvSpPr>
+          <p:cNvPr id="3" name="Rectangle 2"/>
+          <p:cNvSpPr/>
+          <p:nvPr/>
+        </p:nvSpPr>
+        <p:spPr>
+          <a:xfrm>
+            <a:off x="502920" y="1115568"/>
+            <a:ext cx="11155680" cy="31750"/>
+          </a:xfrm>
+          <a:prstGeom prst="rect">
+            <a:avLst/>
+          </a:prstGeom>
+          <a:solidFill>
+            <a:srgbClr val="007ACC"/>
+          </a:solidFill>
+          <a:ln>
+            <a:noFill/>
+          </a:ln>
+        </p:spPr>
+        <p:style>
+          <a:lnRef idx="1">
+            <a:schemeClr val="accent1"/>
+          </a:lnRef>
+          <a:fillRef idx="3">
+            <a:schemeClr val="accent1"/>
+          </a:fillRef>
+          <a:effectRef idx="2">
+            <a:schemeClr val="accent1"/>
+          </a:effectRef>
+          <a:fontRef idx="minor">
+            <a:schemeClr val="lt1"/>
+          </a:fontRef>
+        </p:style>
+        <p:txBody>
+          <a:bodyPr rtlCol="0" anchor="ctr"/>
+          <a:lstStyle/>
+          <a:p>
+            <a:pPr algn="ctr"/>
+          </a:p>
+        </p:txBody>
+      </p:sp>
+      <p:sp>
+        <p:nvSpPr>
+          <p:cNvPr id="4" name="TextBox 3"/>
+          <p:cNvSpPr txBox="1"/>
+          <p:nvPr/>
+        </p:nvSpPr>
+        <p:spPr>
+          <a:xfrm>
+            <a:off x="594360" y="1371600"/>
+            <a:ext cx="10972800" cy="4983480"/>
+          </a:xfrm>
+          <a:prstGeom prst="rect">
+            <a:avLst/>
+          </a:prstGeom>
+          <a:noFill/>
+        </p:spPr>
+        <p:txBody>
+          <a:bodyPr wrap="square">
+            <a:spAutoFit/>
+          </a:bodyPr>
+          <a:lstStyle/>
+          <a:p>
+            <a:pPr algn="l">
+              <a:spcAft>
+                <a:spcPts val="1000"/>
+              </a:spcAft>
+            </a:pPr>
+            <a:r>
+              <a:rPr sz="2000" b="1">
+                <a:solidFill>
+                  <a:srgbClr val="1F3355"/>
+                </a:solidFill>
+                <a:latin typeface="Meiryo UI"/>
+              </a:rPr>
+              <a:t>① 「方式」は 1 つではなく 2 段ある</a:t>
+            </a:r>
+          </a:p>
+          <a:p>
+            <a:pPr lvl="1" algn="l">
+              <a:spcAft>
+                <a:spcPts val="600"/>
+              </a:spcAft>
+            </a:pPr>
+            <a:r>
+              <a:rPr sz="1700" b="0">
+                <a:solidFill>
+                  <a:srgbClr val="555555"/>
+                </a:solidFill>
+                <a:latin typeface="Meiryo UI"/>
+              </a:rPr>
+              <a:t>IPv6 の払い出し (RA / PD) と IPv4 の運び方 (DS-Lite / 固定IP / MAP-E) は独立です</a:t>
+            </a:r>
+          </a:p>
+          <a:p>
+            <a:pPr lvl="1" algn="l">
+              <a:spcAft>
+                <a:spcPts val="600"/>
+              </a:spcAft>
+            </a:pPr>
+            <a:r>
+              <a:rPr sz="1700" b="0">
+                <a:solidFill>
+                  <a:srgbClr val="555555"/>
+                </a:solidFill>
+                <a:latin typeface="Meiryo UI"/>
+              </a:rPr>
+              <a:t>「transix だから DS-Lite」まで分かっても、RA か PD かは別に確かめる必要があります</a:t>
+            </a:r>
+          </a:p>
+          <a:p>
+            <a:pPr algn="l">
+              <a:spcAft>
+                <a:spcPts val="1000"/>
+              </a:spcAft>
+            </a:pPr>
+            <a:r>
+              <a:rPr sz="2000" b="1">
+                <a:solidFill>
+                  <a:srgbClr val="1F3355"/>
+                </a:solidFill>
+                <a:latin typeface="Meiryo UI"/>
+              </a:rPr>
+              <a:t>② コース名で IPv4 の方式が変わる</a:t>
+            </a:r>
+          </a:p>
+          <a:p>
+            <a:pPr lvl="1" algn="l">
+              <a:spcAft>
+                <a:spcPts val="600"/>
+              </a:spcAft>
+            </a:pPr>
+            <a:r>
+              <a:rPr sz="1700" b="0">
+                <a:solidFill>
+                  <a:srgbClr val="555555"/>
+                </a:solidFill>
+                <a:latin typeface="Meiryo UI"/>
+              </a:rPr>
+              <a:t>同じ transix でも 動的 IP コースは DS-Lite、固定 IP コースは固定 IP 方式</a:t>
+            </a:r>
+          </a:p>
+          <a:p>
+            <a:pPr lvl="1" algn="l">
+              <a:spcAft>
+                <a:spcPts val="600"/>
+              </a:spcAft>
+            </a:pPr>
+            <a:r>
+              <a:rPr sz="1700" b="0">
+                <a:solidFill>
+                  <a:srgbClr val="555555"/>
+                </a:solidFill>
+                <a:latin typeface="Meiryo UI"/>
+              </a:rPr>
+              <a:t>契約したコースまで確認しないと、CPE のテンプレートを間違えます</a:t>
+            </a:r>
+          </a:p>
+          <a:p>
+            <a:pPr algn="l">
+              <a:spcAft>
+                <a:spcPts val="1000"/>
+              </a:spcAft>
+            </a:pPr>
+            <a:r>
+              <a:rPr sz="2000" b="1">
+                <a:solidFill>
+                  <a:srgbClr val="1F3355"/>
+                </a:solidFill>
+                <a:latin typeface="Meiryo UI"/>
+              </a:rPr>
+              <a:t>③ 「ひかり電話ありなら PD」は事業者向けでは通用しない</a:t>
+            </a:r>
+          </a:p>
+          <a:p>
+            <a:pPr lvl="1" algn="l">
+              <a:spcAft>
+                <a:spcPts val="600"/>
+              </a:spcAft>
+            </a:pPr>
+            <a:r>
+              <a:rPr sz="1700" b="0">
+                <a:solidFill>
+                  <a:srgbClr val="555555"/>
+                </a:solidFill>
+                <a:latin typeface="Meiryo UI"/>
+              </a:rPr>
+              <a:t>家庭向けの経験則をそのまま当てはめると外します</a:t>
+            </a:r>
+          </a:p>
+          <a:p>
+            <a:pPr lvl="1" algn="l">
+              <a:spcAft>
+                <a:spcPts val="600"/>
+              </a:spcAft>
+            </a:pPr>
+            <a:r>
+              <a:rPr sz="1700" b="1">
+                <a:solidFill>
+                  <a:srgbClr val="C0392B"/>
+                </a:solidFill>
+                <a:latin typeface="Meiryo UI"/>
+              </a:rPr>
+              <a:t>この案件は固定 IP なのに RA 方式でした</a:t>
+            </a:r>
+          </a:p>
+          <a:p>
+            <a:pPr algn="l">
+              <a:spcAft>
+                <a:spcPts val="1000"/>
+              </a:spcAft>
+            </a:pPr>
+            <a:r>
+              <a:rPr sz="2000" b="1">
+                <a:solidFill>
+                  <a:srgbClr val="C0392B"/>
+                </a:solidFill>
+                <a:latin typeface="Meiryo UI"/>
+              </a:rPr>
+              <a:t>だから RA か PD かは開通後に実測するしかありません</a:t>
+            </a:r>
+          </a:p>
+          <a:p>
+            <a:pPr lvl="1" algn="l">
+              <a:spcAft>
+                <a:spcPts val="600"/>
+              </a:spcAft>
+            </a:pPr>
+            <a:r>
+              <a:rPr sz="1700" b="0">
+                <a:solidFill>
+                  <a:srgbClr val="555555"/>
+                </a:solidFill>
+                <a:latin typeface="Meiryo UI"/>
+              </a:rPr>
+              <a:t>ハンズオンの演習 2 で、この症状を実際に見てもらいます</a:t>
+            </a:r>
+          </a:p>
+        </p:txBody>
+      </p:sp>
+    </p:spTree>
+  </p:cSld>
+  <p:clrMapOvr>
+    <a:masterClrMapping/>
+  </p:clrMapOvr>
+</p:sld>
+</file>
+
+<file path=ppt/slides/slide23.xml><?xml version="1.0" encoding="utf-8"?>
+<p:sld xmlns:a="http://schemas.openxmlformats.org/drawingml/2006/main" xmlns:p="http://schemas.openxmlformats.org/presentationml/2006/main" xmlns:r="http://schemas.openxmlformats.org/officeDocument/2006/relationships">
+  <p:cSld>
+    <p:spTree>
+      <p:nvGrpSpPr>
+        <p:cNvPr id="1" name=""/>
+        <p:cNvGrpSpPr/>
+        <p:nvPr/>
+      </p:nvGrpSpPr>
+      <p:grpSpPr/>
+      <p:sp>
+        <p:nvSpPr>
           <p:cNvPr id="2" name="Rectangle 1"/>
           <p:cNvSpPr/>
           <p:nvPr/>
@@ -8123,7 +8818,7 @@
 </p:sld>
 </file>
 
-<file path=ppt/slides/slide22.xml><?xml version="1.0" encoding="utf-8"?>
+<file path=ppt/slides/slide24.xml><?xml version="1.0" encoding="utf-8"?>
 <p:sld xmlns:a="http://schemas.openxmlformats.org/drawingml/2006/main" xmlns:p="http://schemas.openxmlformats.org/presentationml/2006/main" xmlns:r="http://schemas.openxmlformats.org/officeDocument/2006/relationships">
   <p:cSld>
     <p:spTree>
@@ -8437,7 +9132,7 @@
 </p:sld>
 </file>
 
-<file path=ppt/slides/slide23.xml><?xml version="1.0" encoding="utf-8"?>
+<file path=ppt/slides/slide25.xml><?xml version="1.0" encoding="utf-8"?>
 <p:sld xmlns:a="http://schemas.openxmlformats.org/drawingml/2006/main" xmlns:p="http://schemas.openxmlformats.org/presentationml/2006/main" xmlns:r="http://schemas.openxmlformats.org/officeDocument/2006/relationships">
   <p:cSld>
     <p:spTree>
@@ -8767,7 +9462,7 @@
 </p:sld>
 </file>
 
-<file path=ppt/slides/slide24.xml><?xml version="1.0" encoding="utf-8"?>
+<file path=ppt/slides/slide26.xml><?xml version="1.0" encoding="utf-8"?>
 <p:sld xmlns:a="http://schemas.openxmlformats.org/drawingml/2006/main" xmlns:p="http://schemas.openxmlformats.org/presentationml/2006/main" xmlns:r="http://schemas.openxmlformats.org/officeDocument/2006/relationships">
   <p:cSld>
     <p:spTree>
@@ -9049,7 +9744,7 @@
 </p:sld>
 </file>
 
-<file path=ppt/slides/slide25.xml><?xml version="1.0" encoding="utf-8"?>
+<file path=ppt/slides/slide27.xml><?xml version="1.0" encoding="utf-8"?>
 <p:sld xmlns:a="http://schemas.openxmlformats.org/drawingml/2006/main" xmlns:p="http://schemas.openxmlformats.org/presentationml/2006/main" xmlns:r="http://schemas.openxmlformats.org/officeDocument/2006/relationships">
   <p:cSld>
     <p:spTree>
@@ -9379,7 +10074,7 @@
 </p:sld>
 </file>
 
-<file path=ppt/slides/slide26.xml><?xml version="1.0" encoding="utf-8"?>
+<file path=ppt/slides/slide28.xml><?xml version="1.0" encoding="utf-8"?>
 <p:sld xmlns:a="http://schemas.openxmlformats.org/drawingml/2006/main" xmlns:p="http://schemas.openxmlformats.org/presentationml/2006/main" xmlns:r="http://schemas.openxmlformats.org/officeDocument/2006/relationships">
   <p:cSld>
     <p:spTree>
@@ -9722,7 +10417,7 @@
 </p:sld>
 </file>
 
-<file path=ppt/slides/slide27.xml><?xml version="1.0" encoding="utf-8"?>
+<file path=ppt/slides/slide29.xml><?xml version="1.0" encoding="utf-8"?>
 <p:sld xmlns:a="http://schemas.openxmlformats.org/drawingml/2006/main" xmlns:p="http://schemas.openxmlformats.org/presentationml/2006/main" xmlns:r="http://schemas.openxmlformats.org/officeDocument/2006/relationships">
   <p:cSld>
     <p:spTree>
@@ -10050,7 +10745,318 @@
 </p:sld>
 </file>
 
-<file path=ppt/slides/slide28.xml><?xml version="1.0" encoding="utf-8"?>
+<file path=ppt/slides/slide3.xml><?xml version="1.0" encoding="utf-8"?>
+<p:sld xmlns:a="http://schemas.openxmlformats.org/drawingml/2006/main" xmlns:p="http://schemas.openxmlformats.org/presentationml/2006/main" xmlns:r="http://schemas.openxmlformats.org/officeDocument/2006/relationships">
+  <p:cSld>
+    <p:spTree>
+      <p:nvGrpSpPr>
+        <p:cNvPr id="1" name=""/>
+        <p:cNvGrpSpPr/>
+        <p:nvPr/>
+      </p:nvGrpSpPr>
+      <p:grpSpPr/>
+      <p:sp>
+        <p:nvSpPr>
+          <p:cNvPr id="2" name="TextBox 1"/>
+          <p:cNvSpPr txBox="1"/>
+          <p:nvPr/>
+        </p:nvSpPr>
+        <p:spPr>
+          <a:xfrm>
+            <a:off x="502920" y="320040"/>
+            <a:ext cx="11155680" cy="822960"/>
+          </a:xfrm>
+          <a:prstGeom prst="rect">
+            <a:avLst/>
+          </a:prstGeom>
+          <a:noFill/>
+        </p:spPr>
+        <p:txBody>
+          <a:bodyPr wrap="square">
+            <a:spAutoFit/>
+          </a:bodyPr>
+          <a:lstStyle/>
+          <a:p>
+            <a:pPr algn="l"/>
+            <a:r>
+              <a:rPr sz="2800" b="1">
+                <a:solidFill>
+                  <a:srgbClr val="1F3355"/>
+                </a:solidFill>
+                <a:latin typeface="Meiryo UI"/>
+              </a:rPr>
+              <a:t>今日 持ち帰ってほしいこと</a:t>
+            </a:r>
+          </a:p>
+        </p:txBody>
+      </p:sp>
+      <p:sp>
+        <p:nvSpPr>
+          <p:cNvPr id="3" name="Rectangle 2"/>
+          <p:cNvSpPr/>
+          <p:nvPr/>
+        </p:nvSpPr>
+        <p:spPr>
+          <a:xfrm>
+            <a:off x="502920" y="1115568"/>
+            <a:ext cx="11155680" cy="31750"/>
+          </a:xfrm>
+          <a:prstGeom prst="rect">
+            <a:avLst/>
+          </a:prstGeom>
+          <a:solidFill>
+            <a:srgbClr val="007ACC"/>
+          </a:solidFill>
+          <a:ln>
+            <a:noFill/>
+          </a:ln>
+        </p:spPr>
+        <p:style>
+          <a:lnRef idx="1">
+            <a:schemeClr val="accent1"/>
+          </a:lnRef>
+          <a:fillRef idx="3">
+            <a:schemeClr val="accent1"/>
+          </a:fillRef>
+          <a:effectRef idx="2">
+            <a:schemeClr val="accent1"/>
+          </a:effectRef>
+          <a:fontRef idx="minor">
+            <a:schemeClr val="lt1"/>
+          </a:fontRef>
+        </p:style>
+        <p:txBody>
+          <a:bodyPr rtlCol="0" anchor="ctr"/>
+          <a:lstStyle/>
+          <a:p>
+            <a:pPr algn="ctr"/>
+          </a:p>
+        </p:txBody>
+      </p:sp>
+      <p:sp>
+        <p:nvSpPr>
+          <p:cNvPr id="4" name="TextBox 3"/>
+          <p:cNvSpPr txBox="1"/>
+          <p:nvPr/>
+        </p:nvSpPr>
+        <p:spPr>
+          <a:xfrm>
+            <a:off x="594360" y="1371600"/>
+            <a:ext cx="10972800" cy="4983480"/>
+          </a:xfrm>
+          <a:prstGeom prst="rect">
+            <a:avLst/>
+          </a:prstGeom>
+          <a:noFill/>
+        </p:spPr>
+        <p:txBody>
+          <a:bodyPr wrap="square">
+            <a:spAutoFit/>
+          </a:bodyPr>
+          <a:lstStyle/>
+          <a:p>
+            <a:pPr algn="l">
+              <a:spcAft>
+                <a:spcPts val="1000"/>
+              </a:spcAft>
+            </a:pPr>
+            <a:r>
+              <a:rPr sz="2000" b="1">
+                <a:solidFill>
+                  <a:srgbClr val="1F3355"/>
+                </a:solidFill>
+                <a:latin typeface="Meiryo UI"/>
+              </a:rPr>
+              <a:t>3 つだけです</a:t>
+            </a:r>
+          </a:p>
+          <a:p>
+            <a:pPr lvl="1" algn="l">
+              <a:spcAft>
+                <a:spcPts val="600"/>
+              </a:spcAft>
+            </a:pPr>
+            <a:r>
+              <a:rPr sz="1700" b="0">
+                <a:solidFill>
+                  <a:srgbClr val="555555"/>
+                </a:solidFill>
+                <a:latin typeface="Meiryo UI"/>
+              </a:rPr>
+              <a:t>① なぜ IPv6 に変えるのか — 「アドレスが枯渇したから」ではありません</a:t>
+            </a:r>
+          </a:p>
+          <a:p>
+            <a:pPr lvl="1" algn="l">
+              <a:spcAft>
+                <a:spcPts val="600"/>
+              </a:spcAft>
+            </a:pPr>
+            <a:r>
+              <a:rPr sz="1700" b="0">
+                <a:solidFill>
+                  <a:srgbClr val="555555"/>
+                </a:solidFill>
+                <a:latin typeface="Meiryo UI"/>
+              </a:rPr>
+              <a:t>② お客様の回線がどの方式か、商品名から言えるようになる (v6プラス、transix など)</a:t>
+            </a:r>
+          </a:p>
+          <a:p>
+            <a:pPr lvl="1" algn="l">
+              <a:spcAft>
+                <a:spcPts val="600"/>
+              </a:spcAft>
+            </a:pPr>
+            <a:r>
+              <a:rPr sz="1700" b="0">
+                <a:solidFill>
+                  <a:srgbClr val="555555"/>
+                </a:solidFill>
+                <a:latin typeface="Meiryo UI"/>
+              </a:rPr>
+              <a:t>③ 「ポート開放できますか?」に即答できるようになる</a:t>
+            </a:r>
+          </a:p>
+          <a:p>
+            <a:pPr algn="l">
+              <a:spcAft>
+                <a:spcPts val="1000"/>
+              </a:spcAft>
+            </a:pPr>
+            <a:r>
+              <a:rPr sz="2000" b="1">
+                <a:solidFill>
+                  <a:srgbClr val="1F3355"/>
+                </a:solidFill>
+                <a:latin typeface="Meiryo UI"/>
+              </a:rPr>
+              <a:t>話す順番 — 大きい話から細かい話へ降ります</a:t>
+            </a:r>
+          </a:p>
+          <a:p>
+            <a:pPr lvl="1" algn="l">
+              <a:spcAft>
+                <a:spcPts val="600"/>
+              </a:spcAft>
+            </a:pPr>
+            <a:r>
+              <a:rPr sz="1700" b="0">
+                <a:solidFill>
+                  <a:srgbClr val="555555"/>
+                </a:solidFill>
+                <a:latin typeface="Meiryo UI"/>
+              </a:rPr>
+              <a:t>第0部  なぜこの話をするのか</a:t>
+            </a:r>
+          </a:p>
+          <a:p>
+            <a:pPr lvl="1" algn="l">
+              <a:spcAft>
+                <a:spcPts val="600"/>
+              </a:spcAft>
+            </a:pPr>
+            <a:r>
+              <a:rPr sz="1700" b="0">
+                <a:solidFill>
+                  <a:srgbClr val="555555"/>
+                </a:solidFill>
+                <a:latin typeface="Meiryo UI"/>
+              </a:rPr>
+              <a:t>第1部  IPv6 そのもの — どこの国でも同じ話</a:t>
+            </a:r>
+          </a:p>
+          <a:p>
+            <a:pPr lvl="1" algn="l">
+              <a:spcAft>
+                <a:spcPts val="600"/>
+              </a:spcAft>
+            </a:pPr>
+            <a:r>
+              <a:rPr sz="1700" b="0">
+                <a:solidFill>
+                  <a:srgbClr val="555555"/>
+                </a:solidFill>
+                <a:latin typeface="Meiryo UI"/>
+              </a:rPr>
+              <a:t>第2部  日本の回線 — ここからは日本だけの話</a:t>
+            </a:r>
+          </a:p>
+          <a:p>
+            <a:pPr lvl="1" algn="l">
+              <a:spcAft>
+                <a:spcPts val="600"/>
+              </a:spcAft>
+            </a:pPr>
+            <a:r>
+              <a:rPr sz="1700" b="0">
+                <a:solidFill>
+                  <a:srgbClr val="555555"/>
+                </a:solidFill>
+                <a:latin typeface="Meiryo UI"/>
+              </a:rPr>
+              <a:t>第3部  IPv4 をどうやって運ぶか — 今日の本題</a:t>
+            </a:r>
+          </a:p>
+          <a:p>
+            <a:pPr lvl="1" algn="l">
+              <a:spcAft>
+                <a:spcPts val="600"/>
+              </a:spcAft>
+            </a:pPr>
+            <a:r>
+              <a:rPr sz="1700" b="0">
+                <a:solidFill>
+                  <a:srgbClr val="555555"/>
+                </a:solidFill>
+                <a:latin typeface="Meiryo UI"/>
+              </a:rPr>
+              <a:t>第4部  検証環境で実際に見たもの</a:t>
+            </a:r>
+          </a:p>
+          <a:p>
+            <a:pPr algn="l">
+              <a:spcAft>
+                <a:spcPts val="1000"/>
+              </a:spcAft>
+            </a:pPr>
+            <a:r>
+              <a:rPr sz="2000" b="1">
+                <a:solidFill>
+                  <a:srgbClr val="C0392B"/>
+                </a:solidFill>
+                <a:latin typeface="Meiryo UI"/>
+              </a:rPr>
+              <a:t>迷ったらこのページに戻ってください。どこの話か分かれば必ずついてこられます</a:t>
+            </a:r>
+          </a:p>
+          <a:p>
+            <a:pPr algn="l">
+              <a:spcAft>
+                <a:spcPts val="1000"/>
+              </a:spcAft>
+            </a:pPr>
+            <a:r>
+              <a:rPr sz="2000" b="0">
+                <a:solidFill>
+                  <a:srgbClr val="1F3355"/>
+                </a:solidFill>
+                <a:latin typeface="Meiryo UI"/>
+              </a:rPr>
+              <a:t>※ 配布資料の巻末に「想定問答」6 問があります。あとで読んでください</a:t>
+            </a:r>
+          </a:p>
+        </p:txBody>
+      </p:sp>
+    </p:spTree>
+  </p:cSld>
+  <p:clrMapOvr>
+    <a:masterClrMapping/>
+  </p:clrMapOvr>
+</p:sld>
+</file>
+
+<file path=ppt/slides/slide30.xml><?xml version="1.0" encoding="utf-8"?>
 <p:sld xmlns:a="http://schemas.openxmlformats.org/drawingml/2006/main" xmlns:p="http://schemas.openxmlformats.org/presentationml/2006/main" xmlns:r="http://schemas.openxmlformats.org/officeDocument/2006/relationships">
   <p:cSld>
     <p:spTree>
@@ -10356,7 +11362,7 @@
 </p:sld>
 </file>
 
-<file path=ppt/slides/slide29.xml><?xml version="1.0" encoding="utf-8"?>
+<file path=ppt/slides/slide31.xml><?xml version="1.0" encoding="utf-8"?>
 <p:sld xmlns:a="http://schemas.openxmlformats.org/drawingml/2006/main" xmlns:p="http://schemas.openxmlformats.org/presentationml/2006/main" xmlns:r="http://schemas.openxmlformats.org/officeDocument/2006/relationships">
   <p:cSld>
     <p:spTree>
@@ -10651,318 +11657,7 @@
 </p:sld>
 </file>
 
-<file path=ppt/slides/slide3.xml><?xml version="1.0" encoding="utf-8"?>
-<p:sld xmlns:a="http://schemas.openxmlformats.org/drawingml/2006/main" xmlns:p="http://schemas.openxmlformats.org/presentationml/2006/main" xmlns:r="http://schemas.openxmlformats.org/officeDocument/2006/relationships">
-  <p:cSld>
-    <p:spTree>
-      <p:nvGrpSpPr>
-        <p:cNvPr id="1" name=""/>
-        <p:cNvGrpSpPr/>
-        <p:nvPr/>
-      </p:nvGrpSpPr>
-      <p:grpSpPr/>
-      <p:sp>
-        <p:nvSpPr>
-          <p:cNvPr id="2" name="TextBox 1"/>
-          <p:cNvSpPr txBox="1"/>
-          <p:nvPr/>
-        </p:nvSpPr>
-        <p:spPr>
-          <a:xfrm>
-            <a:off x="502920" y="320040"/>
-            <a:ext cx="11155680" cy="822960"/>
-          </a:xfrm>
-          <a:prstGeom prst="rect">
-            <a:avLst/>
-          </a:prstGeom>
-          <a:noFill/>
-        </p:spPr>
-        <p:txBody>
-          <a:bodyPr wrap="square">
-            <a:spAutoFit/>
-          </a:bodyPr>
-          <a:lstStyle/>
-          <a:p>
-            <a:pPr algn="l"/>
-            <a:r>
-              <a:rPr sz="2800" b="1">
-                <a:solidFill>
-                  <a:srgbClr val="1F3355"/>
-                </a:solidFill>
-                <a:latin typeface="Meiryo UI"/>
-              </a:rPr>
-              <a:t>今日 持ち帰ってほしいこと</a:t>
-            </a:r>
-          </a:p>
-        </p:txBody>
-      </p:sp>
-      <p:sp>
-        <p:nvSpPr>
-          <p:cNvPr id="3" name="Rectangle 2"/>
-          <p:cNvSpPr/>
-          <p:nvPr/>
-        </p:nvSpPr>
-        <p:spPr>
-          <a:xfrm>
-            <a:off x="502920" y="1115568"/>
-            <a:ext cx="11155680" cy="31750"/>
-          </a:xfrm>
-          <a:prstGeom prst="rect">
-            <a:avLst/>
-          </a:prstGeom>
-          <a:solidFill>
-            <a:srgbClr val="007ACC"/>
-          </a:solidFill>
-          <a:ln>
-            <a:noFill/>
-          </a:ln>
-        </p:spPr>
-        <p:style>
-          <a:lnRef idx="1">
-            <a:schemeClr val="accent1"/>
-          </a:lnRef>
-          <a:fillRef idx="3">
-            <a:schemeClr val="accent1"/>
-          </a:fillRef>
-          <a:effectRef idx="2">
-            <a:schemeClr val="accent1"/>
-          </a:effectRef>
-          <a:fontRef idx="minor">
-            <a:schemeClr val="lt1"/>
-          </a:fontRef>
-        </p:style>
-        <p:txBody>
-          <a:bodyPr rtlCol="0" anchor="ctr"/>
-          <a:lstStyle/>
-          <a:p>
-            <a:pPr algn="ctr"/>
-          </a:p>
-        </p:txBody>
-      </p:sp>
-      <p:sp>
-        <p:nvSpPr>
-          <p:cNvPr id="4" name="TextBox 3"/>
-          <p:cNvSpPr txBox="1"/>
-          <p:nvPr/>
-        </p:nvSpPr>
-        <p:spPr>
-          <a:xfrm>
-            <a:off x="594360" y="1371600"/>
-            <a:ext cx="10972800" cy="4983480"/>
-          </a:xfrm>
-          <a:prstGeom prst="rect">
-            <a:avLst/>
-          </a:prstGeom>
-          <a:noFill/>
-        </p:spPr>
-        <p:txBody>
-          <a:bodyPr wrap="square">
-            <a:spAutoFit/>
-          </a:bodyPr>
-          <a:lstStyle/>
-          <a:p>
-            <a:pPr algn="l">
-              <a:spcAft>
-                <a:spcPts val="1000"/>
-              </a:spcAft>
-            </a:pPr>
-            <a:r>
-              <a:rPr sz="2000" b="1">
-                <a:solidFill>
-                  <a:srgbClr val="1F3355"/>
-                </a:solidFill>
-                <a:latin typeface="Meiryo UI"/>
-              </a:rPr>
-              <a:t>3 つだけです</a:t>
-            </a:r>
-          </a:p>
-          <a:p>
-            <a:pPr lvl="1" algn="l">
-              <a:spcAft>
-                <a:spcPts val="600"/>
-              </a:spcAft>
-            </a:pPr>
-            <a:r>
-              <a:rPr sz="1700" b="0">
-                <a:solidFill>
-                  <a:srgbClr val="555555"/>
-                </a:solidFill>
-                <a:latin typeface="Meiryo UI"/>
-              </a:rPr>
-              <a:t>① なぜ IPv6 に変えるのか — 「アドレスが枯渇したから」ではありません</a:t>
-            </a:r>
-          </a:p>
-          <a:p>
-            <a:pPr lvl="1" algn="l">
-              <a:spcAft>
-                <a:spcPts val="600"/>
-              </a:spcAft>
-            </a:pPr>
-            <a:r>
-              <a:rPr sz="1700" b="0">
-                <a:solidFill>
-                  <a:srgbClr val="555555"/>
-                </a:solidFill>
-                <a:latin typeface="Meiryo UI"/>
-              </a:rPr>
-              <a:t>② お客様の回線がどの方式か、商品名から言えるようになる (v6プラス、transix など)</a:t>
-            </a:r>
-          </a:p>
-          <a:p>
-            <a:pPr lvl="1" algn="l">
-              <a:spcAft>
-                <a:spcPts val="600"/>
-              </a:spcAft>
-            </a:pPr>
-            <a:r>
-              <a:rPr sz="1700" b="0">
-                <a:solidFill>
-                  <a:srgbClr val="555555"/>
-                </a:solidFill>
-                <a:latin typeface="Meiryo UI"/>
-              </a:rPr>
-              <a:t>③ 「ポート開放できますか?」に即答できるようになる</a:t>
-            </a:r>
-          </a:p>
-          <a:p>
-            <a:pPr algn="l">
-              <a:spcAft>
-                <a:spcPts val="1000"/>
-              </a:spcAft>
-            </a:pPr>
-            <a:r>
-              <a:rPr sz="2000" b="1">
-                <a:solidFill>
-                  <a:srgbClr val="1F3355"/>
-                </a:solidFill>
-                <a:latin typeface="Meiryo UI"/>
-              </a:rPr>
-              <a:t>話す順番 — 大きい話から細かい話へ降ります</a:t>
-            </a:r>
-          </a:p>
-          <a:p>
-            <a:pPr lvl="1" algn="l">
-              <a:spcAft>
-                <a:spcPts val="600"/>
-              </a:spcAft>
-            </a:pPr>
-            <a:r>
-              <a:rPr sz="1700" b="0">
-                <a:solidFill>
-                  <a:srgbClr val="555555"/>
-                </a:solidFill>
-                <a:latin typeface="Meiryo UI"/>
-              </a:rPr>
-              <a:t>第0部  なぜこの話をするのか</a:t>
-            </a:r>
-          </a:p>
-          <a:p>
-            <a:pPr lvl="1" algn="l">
-              <a:spcAft>
-                <a:spcPts val="600"/>
-              </a:spcAft>
-            </a:pPr>
-            <a:r>
-              <a:rPr sz="1700" b="0">
-                <a:solidFill>
-                  <a:srgbClr val="555555"/>
-                </a:solidFill>
-                <a:latin typeface="Meiryo UI"/>
-              </a:rPr>
-              <a:t>第1部  IPv6 そのもの — どこの国でも同じ話</a:t>
-            </a:r>
-          </a:p>
-          <a:p>
-            <a:pPr lvl="1" algn="l">
-              <a:spcAft>
-                <a:spcPts val="600"/>
-              </a:spcAft>
-            </a:pPr>
-            <a:r>
-              <a:rPr sz="1700" b="0">
-                <a:solidFill>
-                  <a:srgbClr val="555555"/>
-                </a:solidFill>
-                <a:latin typeface="Meiryo UI"/>
-              </a:rPr>
-              <a:t>第2部  日本の回線 — ここからは日本だけの話</a:t>
-            </a:r>
-          </a:p>
-          <a:p>
-            <a:pPr lvl="1" algn="l">
-              <a:spcAft>
-                <a:spcPts val="600"/>
-              </a:spcAft>
-            </a:pPr>
-            <a:r>
-              <a:rPr sz="1700" b="0">
-                <a:solidFill>
-                  <a:srgbClr val="555555"/>
-                </a:solidFill>
-                <a:latin typeface="Meiryo UI"/>
-              </a:rPr>
-              <a:t>第3部  IPv4 をどうやって運ぶか — 今日の本題</a:t>
-            </a:r>
-          </a:p>
-          <a:p>
-            <a:pPr lvl="1" algn="l">
-              <a:spcAft>
-                <a:spcPts val="600"/>
-              </a:spcAft>
-            </a:pPr>
-            <a:r>
-              <a:rPr sz="1700" b="0">
-                <a:solidFill>
-                  <a:srgbClr val="555555"/>
-                </a:solidFill>
-                <a:latin typeface="Meiryo UI"/>
-              </a:rPr>
-              <a:t>第4部  検証環境で実際に見たもの</a:t>
-            </a:r>
-          </a:p>
-          <a:p>
-            <a:pPr algn="l">
-              <a:spcAft>
-                <a:spcPts val="1000"/>
-              </a:spcAft>
-            </a:pPr>
-            <a:r>
-              <a:rPr sz="2000" b="1">
-                <a:solidFill>
-                  <a:srgbClr val="C0392B"/>
-                </a:solidFill>
-                <a:latin typeface="Meiryo UI"/>
-              </a:rPr>
-              <a:t>迷ったらこのページに戻ってください。どこの話か分かれば必ずついてこられます</a:t>
-            </a:r>
-          </a:p>
-          <a:p>
-            <a:pPr algn="l">
-              <a:spcAft>
-                <a:spcPts val="1000"/>
-              </a:spcAft>
-            </a:pPr>
-            <a:r>
-              <a:rPr sz="2000" b="0">
-                <a:solidFill>
-                  <a:srgbClr val="1F3355"/>
-                </a:solidFill>
-                <a:latin typeface="Meiryo UI"/>
-              </a:rPr>
-              <a:t>※ 配布資料の巻末に「想定問答」6 問があります。あとで読んでください</a:t>
-            </a:r>
-          </a:p>
-        </p:txBody>
-      </p:sp>
-    </p:spTree>
-  </p:cSld>
-  <p:clrMapOvr>
-    <a:masterClrMapping/>
-  </p:clrMapOvr>
-</p:sld>
-</file>
-
-<file path=ppt/slides/slide30.xml><?xml version="1.0" encoding="utf-8"?>
+<file path=ppt/slides/slide32.xml><?xml version="1.0" encoding="utf-8"?>
 <p:sld xmlns:a="http://schemas.openxmlformats.org/drawingml/2006/main" xmlns:p="http://schemas.openxmlformats.org/presentationml/2006/main" xmlns:r="http://schemas.openxmlformats.org/officeDocument/2006/relationships">
   <p:cSld>
     <p:spTree>
@@ -11432,7 +12127,7 @@
 </p:sld>
 </file>
 
-<file path=ppt/slides/slide31.xml><?xml version="1.0" encoding="utf-8"?>
+<file path=ppt/slides/slide33.xml><?xml version="1.0" encoding="utf-8"?>
 <p:sld xmlns:a="http://schemas.openxmlformats.org/drawingml/2006/main" xmlns:p="http://schemas.openxmlformats.org/presentationml/2006/main" xmlns:r="http://schemas.openxmlformats.org/officeDocument/2006/relationships">
   <p:cSld>
     <p:spTree>
@@ -11839,7 +12534,7 @@
 </p:sld>
 </file>
 
-<file path=ppt/slides/slide32.xml><?xml version="1.0" encoding="utf-8"?>
+<file path=ppt/slides/slide34.xml><?xml version="1.0" encoding="utf-8"?>
 <p:sld xmlns:a="http://schemas.openxmlformats.org/drawingml/2006/main" xmlns:p="http://schemas.openxmlformats.org/presentationml/2006/main" xmlns:r="http://schemas.openxmlformats.org/officeDocument/2006/relationships">
   <p:cSld>
     <p:spTree>
@@ -12185,7 +12880,7 @@
 </p:sld>
 </file>
 
-<file path=ppt/slides/slide33.xml><?xml version="1.0" encoding="utf-8"?>
+<file path=ppt/slides/slide35.xml><?xml version="1.0" encoding="utf-8"?>
 <p:sld xmlns:a="http://schemas.openxmlformats.org/drawingml/2006/main" xmlns:p="http://schemas.openxmlformats.org/presentationml/2006/main" xmlns:r="http://schemas.openxmlformats.org/officeDocument/2006/relationships">
   <p:cSld>
     <p:spTree>
@@ -12309,7 +13004,7 @@
 </p:sld>
 </file>
 
-<file path=ppt/slides/slide34.xml><?xml version="1.0" encoding="utf-8"?>
+<file path=ppt/slides/slide36.xml><?xml version="1.0" encoding="utf-8"?>
 <p:sld xmlns:a="http://schemas.openxmlformats.org/drawingml/2006/main" xmlns:p="http://schemas.openxmlformats.org/presentationml/2006/main" xmlns:r="http://schemas.openxmlformats.org/officeDocument/2006/relationships">
   <p:cSld>
     <p:spTree>
@@ -12862,7 +13557,7 @@
 </p:sld>
 </file>
 
-<file path=ppt/slides/slide35.xml><?xml version="1.0" encoding="utf-8"?>
+<file path=ppt/slides/slide37.xml><?xml version="1.0" encoding="utf-8"?>
 <p:sld xmlns:a="http://schemas.openxmlformats.org/drawingml/2006/main" xmlns:p="http://schemas.openxmlformats.org/presentationml/2006/main" xmlns:r="http://schemas.openxmlformats.org/officeDocument/2006/relationships">
   <p:cSld>
     <p:spTree>
@@ -13264,7 +13959,7 @@
 </p:sld>
 </file>
 
-<file path=ppt/slides/slide36.xml><?xml version="1.0" encoding="utf-8"?>
+<file path=ppt/slides/slide38.xml><?xml version="1.0" encoding="utf-8"?>
 <p:sld xmlns:a="http://schemas.openxmlformats.org/drawingml/2006/main" xmlns:p="http://schemas.openxmlformats.org/presentationml/2006/main" xmlns:r="http://schemas.openxmlformats.org/officeDocument/2006/relationships">
   <p:cSld>
     <p:spTree>
@@ -13805,7 +14500,7 @@
 </p:sld>
 </file>
 
-<file path=ppt/slides/slide37.xml><?xml version="1.0" encoding="utf-8"?>
+<file path=ppt/slides/slide39.xml><?xml version="1.0" encoding="utf-8"?>
 <p:sld xmlns:a="http://schemas.openxmlformats.org/drawingml/2006/main" xmlns:p="http://schemas.openxmlformats.org/presentationml/2006/main" xmlns:r="http://schemas.openxmlformats.org/officeDocument/2006/relationships">
   <p:cSld>
     <p:spTree>
@@ -14152,708 +14847,6 @@
                 <a:latin typeface="Meiryo UI"/>
               </a:rPr>
               <a:t>→ 1 つ直したら 1 つ確かめる。まとめて直さない</a:t>
-            </a:r>
-          </a:p>
-        </p:txBody>
-      </p:sp>
-    </p:spTree>
-  </p:cSld>
-  <p:clrMapOvr>
-    <a:masterClrMapping/>
-  </p:clrMapOvr>
-</p:sld>
-</file>
-
-<file path=ppt/slides/slide38.xml><?xml version="1.0" encoding="utf-8"?>
-<p:sld xmlns:a="http://schemas.openxmlformats.org/drawingml/2006/main" xmlns:p="http://schemas.openxmlformats.org/presentationml/2006/main" xmlns:r="http://schemas.openxmlformats.org/officeDocument/2006/relationships">
-  <p:cSld>
-    <p:spTree>
-      <p:nvGrpSpPr>
-        <p:cNvPr id="1" name=""/>
-        <p:cNvGrpSpPr/>
-        <p:nvPr/>
-      </p:nvGrpSpPr>
-      <p:grpSpPr/>
-      <p:sp>
-        <p:nvSpPr>
-          <p:cNvPr id="2" name="TextBox 1"/>
-          <p:cNvSpPr txBox="1"/>
-          <p:nvPr/>
-        </p:nvSpPr>
-        <p:spPr>
-          <a:xfrm>
-            <a:off x="502920" y="320040"/>
-            <a:ext cx="11155680" cy="822960"/>
-          </a:xfrm>
-          <a:prstGeom prst="rect">
-            <a:avLst/>
-          </a:prstGeom>
-          <a:noFill/>
-        </p:spPr>
-        <p:txBody>
-          <a:bodyPr wrap="square">
-            <a:spAutoFit/>
-          </a:bodyPr>
-          <a:lstStyle/>
-          <a:p>
-            <a:pPr algn="l"/>
-            <a:r>
-              <a:rPr sz="2800" b="1">
-                <a:solidFill>
-                  <a:srgbClr val="1F3355"/>
-                </a:solidFill>
-                <a:latin typeface="Meiryo UI"/>
-              </a:rPr>
-              <a:t>まとめ — 3 行と、明日から使うチェックリスト</a:t>
-            </a:r>
-          </a:p>
-        </p:txBody>
-      </p:sp>
-      <p:sp>
-        <p:nvSpPr>
-          <p:cNvPr id="3" name="Rectangle 2"/>
-          <p:cNvSpPr/>
-          <p:nvPr/>
-        </p:nvSpPr>
-        <p:spPr>
-          <a:xfrm>
-            <a:off x="502920" y="1115568"/>
-            <a:ext cx="11155680" cy="31750"/>
-          </a:xfrm>
-          <a:prstGeom prst="rect">
-            <a:avLst/>
-          </a:prstGeom>
-          <a:solidFill>
-            <a:srgbClr val="007ACC"/>
-          </a:solidFill>
-          <a:ln>
-            <a:noFill/>
-          </a:ln>
-        </p:spPr>
-        <p:style>
-          <a:lnRef idx="1">
-            <a:schemeClr val="accent1"/>
-          </a:lnRef>
-          <a:fillRef idx="3">
-            <a:schemeClr val="accent1"/>
-          </a:fillRef>
-          <a:effectRef idx="2">
-            <a:schemeClr val="accent1"/>
-          </a:effectRef>
-          <a:fontRef idx="minor">
-            <a:schemeClr val="lt1"/>
-          </a:fontRef>
-        </p:style>
-        <p:txBody>
-          <a:bodyPr rtlCol="0" anchor="ctr"/>
-          <a:lstStyle/>
-          <a:p>
-            <a:pPr algn="ctr"/>
-          </a:p>
-        </p:txBody>
-      </p:sp>
-      <p:sp>
-        <p:nvSpPr>
-          <p:cNvPr id="4" name="TextBox 3"/>
-          <p:cNvSpPr txBox="1"/>
-          <p:nvPr/>
-        </p:nvSpPr>
-        <p:spPr>
-          <a:xfrm>
-            <a:off x="594360" y="1371600"/>
-            <a:ext cx="10972800" cy="4983480"/>
-          </a:xfrm>
-          <a:prstGeom prst="rect">
-            <a:avLst/>
-          </a:prstGeom>
-          <a:noFill/>
-        </p:spPr>
-        <p:txBody>
-          <a:bodyPr wrap="square">
-            <a:spAutoFit/>
-          </a:bodyPr>
-          <a:lstStyle/>
-          <a:p>
-            <a:pPr algn="l">
-              <a:spcAft>
-                <a:spcPts val="1000"/>
-              </a:spcAft>
-            </a:pPr>
-            <a:r>
-              <a:rPr sz="2000" b="1">
-                <a:solidFill>
-                  <a:srgbClr val="1F3355"/>
-                </a:solidFill>
-                <a:latin typeface="Meiryo UI"/>
-              </a:rPr>
-              <a:t>今日の話を 3 行にすると</a:t>
-            </a:r>
-          </a:p>
-          <a:p>
-            <a:pPr lvl="1" algn="l">
-              <a:spcAft>
-                <a:spcPts val="600"/>
-              </a:spcAft>
-            </a:pPr>
-            <a:r>
-              <a:rPr sz="1700" b="0">
-                <a:solidFill>
-                  <a:srgbClr val="555555"/>
-                </a:solidFill>
-                <a:latin typeface="Meiryo UI"/>
-              </a:rPr>
-              <a:t>① PPPoE が遅いから IPoE に変える。アドレス枯渇の話ではありません</a:t>
-            </a:r>
-          </a:p>
-          <a:p>
-            <a:pPr lvl="1" algn="l">
-              <a:spcAft>
-                <a:spcPts val="600"/>
-              </a:spcAft>
-            </a:pPr>
-            <a:r>
-              <a:rPr sz="1700" b="0">
-                <a:solidFill>
-                  <a:srgbClr val="555555"/>
-                </a:solidFill>
-                <a:latin typeface="Meiryo UI"/>
-              </a:rPr>
-              <a:t>② 社内は IPv4 のまま。だから IPv4 を IPv6 に載せて運ぶ。それが MAP-E と DS-Lite</a:t>
-            </a:r>
-          </a:p>
-          <a:p>
-            <a:pPr lvl="1" algn="l">
-              <a:spcAft>
-                <a:spcPts val="600"/>
-              </a:spcAft>
-            </a:pPr>
-            <a:r>
-              <a:rPr sz="1700" b="0">
-                <a:solidFill>
-                  <a:srgbClr val="555555"/>
-                </a:solidFill>
-                <a:latin typeface="Meiryo UI"/>
-              </a:rPr>
-              <a:t>③ どちらになるかは選べない。VNE が決めています</a:t>
-            </a:r>
-          </a:p>
-          <a:p>
-            <a:pPr algn="l">
-              <a:spcAft>
-                <a:spcPts val="1000"/>
-              </a:spcAft>
-            </a:pPr>
-            <a:r>
-              <a:rPr sz="2000" b="1">
-                <a:solidFill>
-                  <a:srgbClr val="1F3355"/>
-                </a:solidFill>
-                <a:latin typeface="Meiryo UI"/>
-              </a:rPr>
-              <a:t>案件で最初に確認する 5 つ</a:t>
-            </a:r>
-          </a:p>
-          <a:p>
-            <a:pPr lvl="1" algn="l">
-              <a:spcAft>
-                <a:spcPts val="600"/>
-              </a:spcAft>
-            </a:pPr>
-            <a:r>
-              <a:rPr sz="1700" b="0">
-                <a:solidFill>
-                  <a:srgbClr val="555555"/>
-                </a:solidFill>
-                <a:latin typeface="Meiryo UI"/>
-              </a:rPr>
-              <a:t>□ ひかり電話はありますか → /64 か /56 かが決まる</a:t>
-            </a:r>
-          </a:p>
-          <a:p>
-            <a:pPr lvl="1" algn="l">
-              <a:spcAft>
-                <a:spcPts val="600"/>
-              </a:spcAft>
-            </a:pPr>
-            <a:r>
-              <a:rPr sz="1700" b="0">
-                <a:solidFill>
-                  <a:srgbClr val="555555"/>
-                </a:solidFill>
-                <a:latin typeface="Meiryo UI"/>
-              </a:rPr>
-              <a:t>□ VNE はどこですか → 方式が決まる (ISP 名だけでは分かりません)</a:t>
-            </a:r>
-          </a:p>
-          <a:p>
-            <a:pPr lvl="1" algn="l">
-              <a:spcAft>
-                <a:spcPts val="600"/>
-              </a:spcAft>
-            </a:pPr>
-            <a:r>
-              <a:rPr sz="1700" b="0">
-                <a:solidFill>
-                  <a:srgbClr val="555555"/>
-                </a:solidFill>
-                <a:latin typeface="Meiryo UI"/>
-              </a:rPr>
-              <a:t>□ 外から入ってくる通信はありますか → VPN / 拠点間 / 監視 / カメラ</a:t>
-            </a:r>
-          </a:p>
-          <a:p>
-            <a:pPr lvl="1" algn="l">
-              <a:spcAft>
-                <a:spcPts val="600"/>
-              </a:spcAft>
-            </a:pPr>
-            <a:r>
-              <a:rPr sz="1700" b="0">
-                <a:solidFill>
-                  <a:srgbClr val="555555"/>
-                </a:solidFill>
-                <a:latin typeface="Meiryo UI"/>
-              </a:rPr>
-              <a:t>□ ある場合、ポート番号は何番ですか → MAP-E でも開けられるかが決まる</a:t>
-            </a:r>
-          </a:p>
-          <a:p>
-            <a:pPr lvl="1" algn="l">
-              <a:spcAft>
-                <a:spcPts val="600"/>
-              </a:spcAft>
-            </a:pPr>
-            <a:r>
-              <a:rPr sz="1700" b="0">
-                <a:solidFill>
-                  <a:srgbClr val="555555"/>
-                </a:solidFill>
-                <a:latin typeface="Meiryo UI"/>
-              </a:rPr>
-              <a:t>□ 同時接続数はどれくらいですか → MAP-E のポート数 (240 など) で足りるか</a:t>
-            </a:r>
-          </a:p>
-          <a:p>
-            <a:pPr algn="l">
-              <a:spcAft>
-                <a:spcPts val="1000"/>
-              </a:spcAft>
-            </a:pPr>
-            <a:r>
-              <a:rPr sz="2000" b="1">
-                <a:solidFill>
-                  <a:srgbClr val="1F3355"/>
-                </a:solidFill>
-                <a:latin typeface="Meiryo UI"/>
-              </a:rPr>
-              <a:t>切替後に必ず確認する 1 つ</a:t>
-            </a:r>
-          </a:p>
-          <a:p>
-            <a:pPr lvl="1" algn="l">
-              <a:spcAft>
-                <a:spcPts val="600"/>
-              </a:spcAft>
-            </a:pPr>
-            <a:r>
-              <a:rPr sz="1700" b="1">
-                <a:solidFill>
-                  <a:srgbClr val="C0392B"/>
-                </a:solidFill>
-                <a:latin typeface="Meiryo UI"/>
-              </a:rPr>
-              <a:t>□ どのアドレスで外に出たか。疎通確認だけでは経路が正しいことを示せません</a:t>
-            </a:r>
-          </a:p>
-        </p:txBody>
-      </p:sp>
-    </p:spTree>
-  </p:cSld>
-  <p:clrMapOvr>
-    <a:masterClrMapping/>
-  </p:clrMapOvr>
-</p:sld>
-</file>
-
-<file path=ppt/slides/slide39.xml><?xml version="1.0" encoding="utf-8"?>
-<p:sld xmlns:a="http://schemas.openxmlformats.org/drawingml/2006/main" xmlns:p="http://schemas.openxmlformats.org/presentationml/2006/main" xmlns:r="http://schemas.openxmlformats.org/officeDocument/2006/relationships">
-  <p:cSld>
-    <p:spTree>
-      <p:nvGrpSpPr>
-        <p:cNvPr id="1" name=""/>
-        <p:cNvGrpSpPr/>
-        <p:nvPr/>
-      </p:nvGrpSpPr>
-      <p:grpSpPr/>
-      <p:sp>
-        <p:nvSpPr>
-          <p:cNvPr id="2" name="TextBox 1"/>
-          <p:cNvSpPr txBox="1"/>
-          <p:nvPr/>
-        </p:nvSpPr>
-        <p:spPr>
-          <a:xfrm>
-            <a:off x="502920" y="320040"/>
-            <a:ext cx="11155680" cy="822960"/>
-          </a:xfrm>
-          <a:prstGeom prst="rect">
-            <a:avLst/>
-          </a:prstGeom>
-          <a:noFill/>
-        </p:spPr>
-        <p:txBody>
-          <a:bodyPr wrap="square">
-            <a:spAutoFit/>
-          </a:bodyPr>
-          <a:lstStyle/>
-          <a:p>
-            <a:pPr algn="l"/>
-            <a:r>
-              <a:rPr sz="2800" b="1">
-                <a:solidFill>
-                  <a:srgbClr val="1F3355"/>
-                </a:solidFill>
-                <a:latin typeface="Meiryo UI"/>
-              </a:rPr>
-              <a:t>参考文献</a:t>
-            </a:r>
-          </a:p>
-        </p:txBody>
-      </p:sp>
-      <p:sp>
-        <p:nvSpPr>
-          <p:cNvPr id="3" name="Rectangle 2"/>
-          <p:cNvSpPr/>
-          <p:nvPr/>
-        </p:nvSpPr>
-        <p:spPr>
-          <a:xfrm>
-            <a:off x="502920" y="1115568"/>
-            <a:ext cx="11155680" cy="31750"/>
-          </a:xfrm>
-          <a:prstGeom prst="rect">
-            <a:avLst/>
-          </a:prstGeom>
-          <a:solidFill>
-            <a:srgbClr val="007ACC"/>
-          </a:solidFill>
-          <a:ln>
-            <a:noFill/>
-          </a:ln>
-        </p:spPr>
-        <p:style>
-          <a:lnRef idx="1">
-            <a:schemeClr val="accent1"/>
-          </a:lnRef>
-          <a:fillRef idx="3">
-            <a:schemeClr val="accent1"/>
-          </a:fillRef>
-          <a:effectRef idx="2">
-            <a:schemeClr val="accent1"/>
-          </a:effectRef>
-          <a:fontRef idx="minor">
-            <a:schemeClr val="lt1"/>
-          </a:fontRef>
-        </p:style>
-        <p:txBody>
-          <a:bodyPr rtlCol="0" anchor="ctr"/>
-          <a:lstStyle/>
-          <a:p>
-            <a:pPr algn="ctr"/>
-          </a:p>
-        </p:txBody>
-      </p:sp>
-      <p:sp>
-        <p:nvSpPr>
-          <p:cNvPr id="4" name="TextBox 3"/>
-          <p:cNvSpPr txBox="1"/>
-          <p:nvPr/>
-        </p:nvSpPr>
-        <p:spPr>
-          <a:xfrm>
-            <a:off x="594360" y="1371600"/>
-            <a:ext cx="10972800" cy="4983480"/>
-          </a:xfrm>
-          <a:prstGeom prst="rect">
-            <a:avLst/>
-          </a:prstGeom>
-          <a:noFill/>
-        </p:spPr>
-        <p:txBody>
-          <a:bodyPr wrap="square">
-            <a:spAutoFit/>
-          </a:bodyPr>
-          <a:lstStyle/>
-          <a:p>
-            <a:pPr algn="l">
-              <a:spcAft>
-                <a:spcPts val="600"/>
-              </a:spcAft>
-            </a:pPr>
-            <a:r>
-              <a:rPr sz="1600" b="1">
-                <a:solidFill>
-                  <a:srgbClr val="1F3355"/>
-                </a:solidFill>
-                <a:latin typeface="Meiryo UI"/>
-              </a:rPr>
-              <a:t>書籍</a:t>
-            </a:r>
-          </a:p>
-          <a:p>
-            <a:pPr lvl="1" algn="l">
-              <a:spcAft>
-                <a:spcPts val="300"/>
-              </a:spcAft>
-            </a:pPr>
-            <a:r>
-              <a:rPr sz="1300" b="0">
-                <a:solidFill>
-                  <a:srgbClr val="555555"/>
-                </a:solidFill>
-                <a:latin typeface="Meiryo UI"/>
-              </a:rPr>
-              <a:t>小川晃通『プロフェッショナル IPv6 第2版』ラムダノート株式会社</a:t>
-            </a:r>
-          </a:p>
-          <a:p>
-            <a:pPr lvl="1" algn="l">
-              <a:spcAft>
-                <a:spcPts val="300"/>
-              </a:spcAft>
-            </a:pPr>
-            <a:r>
-              <a:rPr sz="1300" b="0">
-                <a:solidFill>
-                  <a:srgbClr val="555555"/>
-                </a:solidFill>
-                <a:latin typeface="Meiryo UI"/>
-              </a:rPr>
-              <a:t>2021年12月20日 第2版第1刷 (参照した PDF は 2023年3月1日 第2版第2刷)</a:t>
-            </a:r>
-          </a:p>
-          <a:p>
-            <a:pPr lvl="1" algn="l">
-              <a:spcAft>
-                <a:spcPts val="300"/>
-              </a:spcAft>
-            </a:pPr>
-            <a:r>
-              <a:rPr sz="1300" b="0">
-                <a:solidFill>
-                  <a:srgbClr val="555555"/>
-                </a:solidFill>
-                <a:latin typeface="Meiryo UI"/>
-              </a:rPr>
-              <a:t>ISBN 978-4-908686-11-5 / 本書は CC BY-NC-SA ライセンスで公開されています</a:t>
-            </a:r>
-          </a:p>
-          <a:p>
-            <a:pPr lvl="1" algn="l">
-              <a:spcAft>
-                <a:spcPts val="300"/>
-              </a:spcAft>
-            </a:pPr>
-            <a:r>
-              <a:rPr sz="1300" b="0">
-                <a:solidFill>
-                  <a:srgbClr val="555555"/>
-                </a:solidFill>
-                <a:latin typeface="Meiryo UI"/>
-              </a:rPr>
-              <a:t>参照した節: 2.10 (p.51) / 3章 (p.67) / 3.5 (p.74) / 5章 (p.115) / 6章 (p.127)</a:t>
-            </a:r>
-          </a:p>
-          <a:p>
-            <a:pPr lvl="1" algn="l">
-              <a:spcAft>
-                <a:spcPts val="300"/>
-              </a:spcAft>
-            </a:pPr>
-            <a:r>
-              <a:rPr sz="1300" b="0">
-                <a:solidFill>
-                  <a:srgbClr val="555555"/>
-                </a:solidFill>
-                <a:latin typeface="Meiryo UI"/>
-              </a:rPr>
-              <a:t>  7.1 (p.160) / 7.7 (p.172) / 8章 (p.179) / 8.7 (p.201) / 9章 (p.205) / 10章 (p.215)</a:t>
-            </a:r>
-          </a:p>
-          <a:p>
-            <a:pPr lvl="1" algn="l">
-              <a:spcAft>
-                <a:spcPts val="300"/>
-              </a:spcAft>
-            </a:pPr>
-            <a:r>
-              <a:rPr sz="1300" b="0">
-                <a:solidFill>
-                  <a:srgbClr val="555555"/>
-                </a:solidFill>
-                <a:latin typeface="Meiryo UI"/>
-              </a:rPr>
-              <a:t>  18章 (p.335) / 19.4 (p.362) / 24.1 (p.421) / 24.3 (p.423) / 24.4 (p.425) / 付録A.3 (p.443)</a:t>
-            </a:r>
-          </a:p>
-          <a:p>
-            <a:pPr algn="l">
-              <a:spcAft>
-                <a:spcPts val="600"/>
-              </a:spcAft>
-            </a:pPr>
-            <a:r>
-              <a:rPr sz="1600" b="1">
-                <a:solidFill>
-                  <a:srgbClr val="C0392B"/>
-                </a:solidFill>
-                <a:latin typeface="Meiryo UI"/>
-              </a:rPr>
-              <a:t>※ この資料には本書の本文と図を一切転載していません。該当節を示すだけにしてあります</a:t>
-            </a:r>
-          </a:p>
-          <a:p>
-            <a:pPr algn="l">
-              <a:spcAft>
-                <a:spcPts val="600"/>
-              </a:spcAft>
-            </a:pPr>
-            <a:r>
-              <a:rPr sz="1600" b="1">
-                <a:solidFill>
-                  <a:srgbClr val="1F3355"/>
-                </a:solidFill>
-                <a:latin typeface="Meiryo UI"/>
-              </a:rPr>
-              <a:t>RFC</a:t>
-            </a:r>
-          </a:p>
-          <a:p>
-            <a:pPr lvl="1" algn="l">
-              <a:spcAft>
-                <a:spcPts val="300"/>
-              </a:spcAft>
-            </a:pPr>
-            <a:r>
-              <a:rPr sz="1300" b="0">
-                <a:solidFill>
-                  <a:srgbClr val="555555"/>
-                </a:solidFill>
-                <a:latin typeface="Meiryo UI"/>
-              </a:rPr>
-              <a:t>RFC 6333 (DS-Lite) / RFC 7597 (MAP-E) / RFC 4861 (NDP) / RFC 4862 (SLAAC)</a:t>
-            </a:r>
-          </a:p>
-          <a:p>
-            <a:pPr lvl="1" algn="l">
-              <a:spcAft>
-                <a:spcPts val="300"/>
-              </a:spcAft>
-            </a:pPr>
-            <a:r>
-              <a:rPr sz="1300" b="0">
-                <a:solidFill>
-                  <a:srgbClr val="555555"/>
-                </a:solidFill>
-                <a:latin typeface="Meiryo UI"/>
-              </a:rPr>
-              <a:t>RFC 8415 (DHCPv6)</a:t>
-            </a:r>
-          </a:p>
-          <a:p>
-            <a:pPr lvl="1" algn="l">
-              <a:spcAft>
-                <a:spcPts val="300"/>
-              </a:spcAft>
-            </a:pPr>
-            <a:r>
-              <a:rPr sz="1300" b="0">
-                <a:solidFill>
-                  <a:srgbClr val="555555"/>
-                </a:solidFill>
-                <a:latin typeface="Meiryo UI"/>
-              </a:rPr>
-              <a:t>発展学習 (本編では扱いません): RFC 6724 (アドレス選択) / RFC 8305 (Happy Eyeballs v2)</a:t>
-            </a:r>
-          </a:p>
-          <a:p>
-            <a:pPr algn="l">
-              <a:spcAft>
-                <a:spcPts val="600"/>
-              </a:spcAft>
-            </a:pPr>
-            <a:r>
-              <a:rPr sz="1600" b="1">
-                <a:solidFill>
-                  <a:srgbClr val="1F3355"/>
-                </a:solidFill>
-                <a:latin typeface="Meiryo UI"/>
-              </a:rPr>
-              <a:t>サービス分類の出典</a:t>
-            </a:r>
-          </a:p>
-          <a:p>
-            <a:pPr lvl="1" algn="l">
-              <a:spcAft>
-                <a:spcPts val="300"/>
-              </a:spcAft>
-            </a:pPr>
-            <a:r>
-              <a:rPr sz="1300" b="0">
-                <a:solidFill>
-                  <a:srgbClr val="555555"/>
-                </a:solidFill>
-                <a:latin typeface="Meiryo UI"/>
-              </a:rPr>
-              <a:t>ヤマハ「動作確認済み IPv6 IPoE + IPv4 over IPv6 接続サービス」RTpro</a:t>
-            </a:r>
-          </a:p>
-          <a:p>
-            <a:pPr lvl="1" algn="l">
-              <a:spcAft>
-                <a:spcPts val="300"/>
-              </a:spcAft>
-            </a:pPr>
-            <a:r>
-              <a:rPr sz="1300" b="0">
-                <a:solidFill>
-                  <a:srgbClr val="0B6040"/>
-                </a:solidFill>
-                <a:latin typeface="Consolas"/>
-              </a:rPr>
-              <a:t>https://www.rtpro.yamaha.co.jp/RT/docs/ipoe_46/available_ipoe_46.html</a:t>
-            </a:r>
-          </a:p>
-          <a:p>
-            <a:pPr algn="l">
-              <a:spcAft>
-                <a:spcPts val="600"/>
-              </a:spcAft>
-            </a:pPr>
-            <a:r>
-              <a:rPr sz="1600" b="1">
-                <a:solidFill>
-                  <a:srgbClr val="1F3355"/>
-                </a:solidFill>
-                <a:latin typeface="Meiryo UI"/>
-              </a:rPr>
-              <a:t>社内資料</a:t>
-            </a:r>
-          </a:p>
-          <a:p>
-            <a:pPr lvl="1" algn="l">
-              <a:spcAft>
-                <a:spcPts val="300"/>
-              </a:spcAft>
-            </a:pPr>
-            <a:r>
-              <a:rPr sz="1300" b="0">
-                <a:solidFill>
-                  <a:srgbClr val="555555"/>
-                </a:solidFill>
-                <a:latin typeface="Meiryo UI"/>
-              </a:rPr>
-              <a:t>docs/ipoe-lab/ — README / runbook-vmware / build-log (第4部の実測値の出どころ) / study-guide</a:t>
             </a:r>
           </a:p>
         </p:txBody>
@@ -15496,6 +15489,708 @@
                 <a:latin typeface="Meiryo UI"/>
               </a:rPr>
               <a:t>話す人へ: このページは読み上げないこと。「分からなくなったらここに戻ります」とだけ言って 30 秒で次へ</a:t>
+            </a:r>
+          </a:p>
+        </p:txBody>
+      </p:sp>
+    </p:spTree>
+  </p:cSld>
+  <p:clrMapOvr>
+    <a:masterClrMapping/>
+  </p:clrMapOvr>
+</p:sld>
+</file>
+
+<file path=ppt/slides/slide40.xml><?xml version="1.0" encoding="utf-8"?>
+<p:sld xmlns:a="http://schemas.openxmlformats.org/drawingml/2006/main" xmlns:p="http://schemas.openxmlformats.org/presentationml/2006/main" xmlns:r="http://schemas.openxmlformats.org/officeDocument/2006/relationships">
+  <p:cSld>
+    <p:spTree>
+      <p:nvGrpSpPr>
+        <p:cNvPr id="1" name=""/>
+        <p:cNvGrpSpPr/>
+        <p:nvPr/>
+      </p:nvGrpSpPr>
+      <p:grpSpPr/>
+      <p:sp>
+        <p:nvSpPr>
+          <p:cNvPr id="2" name="TextBox 1"/>
+          <p:cNvSpPr txBox="1"/>
+          <p:nvPr/>
+        </p:nvSpPr>
+        <p:spPr>
+          <a:xfrm>
+            <a:off x="502920" y="320040"/>
+            <a:ext cx="11155680" cy="822960"/>
+          </a:xfrm>
+          <a:prstGeom prst="rect">
+            <a:avLst/>
+          </a:prstGeom>
+          <a:noFill/>
+        </p:spPr>
+        <p:txBody>
+          <a:bodyPr wrap="square">
+            <a:spAutoFit/>
+          </a:bodyPr>
+          <a:lstStyle/>
+          <a:p>
+            <a:pPr algn="l"/>
+            <a:r>
+              <a:rPr sz="2800" b="1">
+                <a:solidFill>
+                  <a:srgbClr val="1F3355"/>
+                </a:solidFill>
+                <a:latin typeface="Meiryo UI"/>
+              </a:rPr>
+              <a:t>まとめ — 3 行と、明日から使うチェックリスト</a:t>
+            </a:r>
+          </a:p>
+        </p:txBody>
+      </p:sp>
+      <p:sp>
+        <p:nvSpPr>
+          <p:cNvPr id="3" name="Rectangle 2"/>
+          <p:cNvSpPr/>
+          <p:nvPr/>
+        </p:nvSpPr>
+        <p:spPr>
+          <a:xfrm>
+            <a:off x="502920" y="1115568"/>
+            <a:ext cx="11155680" cy="31750"/>
+          </a:xfrm>
+          <a:prstGeom prst="rect">
+            <a:avLst/>
+          </a:prstGeom>
+          <a:solidFill>
+            <a:srgbClr val="007ACC"/>
+          </a:solidFill>
+          <a:ln>
+            <a:noFill/>
+          </a:ln>
+        </p:spPr>
+        <p:style>
+          <a:lnRef idx="1">
+            <a:schemeClr val="accent1"/>
+          </a:lnRef>
+          <a:fillRef idx="3">
+            <a:schemeClr val="accent1"/>
+          </a:fillRef>
+          <a:effectRef idx="2">
+            <a:schemeClr val="accent1"/>
+          </a:effectRef>
+          <a:fontRef idx="minor">
+            <a:schemeClr val="lt1"/>
+          </a:fontRef>
+        </p:style>
+        <p:txBody>
+          <a:bodyPr rtlCol="0" anchor="ctr"/>
+          <a:lstStyle/>
+          <a:p>
+            <a:pPr algn="ctr"/>
+          </a:p>
+        </p:txBody>
+      </p:sp>
+      <p:sp>
+        <p:nvSpPr>
+          <p:cNvPr id="4" name="TextBox 3"/>
+          <p:cNvSpPr txBox="1"/>
+          <p:nvPr/>
+        </p:nvSpPr>
+        <p:spPr>
+          <a:xfrm>
+            <a:off x="594360" y="1371600"/>
+            <a:ext cx="10972800" cy="4983480"/>
+          </a:xfrm>
+          <a:prstGeom prst="rect">
+            <a:avLst/>
+          </a:prstGeom>
+          <a:noFill/>
+        </p:spPr>
+        <p:txBody>
+          <a:bodyPr wrap="square">
+            <a:spAutoFit/>
+          </a:bodyPr>
+          <a:lstStyle/>
+          <a:p>
+            <a:pPr algn="l">
+              <a:spcAft>
+                <a:spcPts val="1000"/>
+              </a:spcAft>
+            </a:pPr>
+            <a:r>
+              <a:rPr sz="2000" b="1">
+                <a:solidFill>
+                  <a:srgbClr val="1F3355"/>
+                </a:solidFill>
+                <a:latin typeface="Meiryo UI"/>
+              </a:rPr>
+              <a:t>今日の話を 3 行にすると</a:t>
+            </a:r>
+          </a:p>
+          <a:p>
+            <a:pPr lvl="1" algn="l">
+              <a:spcAft>
+                <a:spcPts val="600"/>
+              </a:spcAft>
+            </a:pPr>
+            <a:r>
+              <a:rPr sz="1700" b="0">
+                <a:solidFill>
+                  <a:srgbClr val="555555"/>
+                </a:solidFill>
+                <a:latin typeface="Meiryo UI"/>
+              </a:rPr>
+              <a:t>① PPPoE が遅いから IPoE に変える。アドレス枯渇の話ではありません</a:t>
+            </a:r>
+          </a:p>
+          <a:p>
+            <a:pPr lvl="1" algn="l">
+              <a:spcAft>
+                <a:spcPts val="600"/>
+              </a:spcAft>
+            </a:pPr>
+            <a:r>
+              <a:rPr sz="1700" b="0">
+                <a:solidFill>
+                  <a:srgbClr val="555555"/>
+                </a:solidFill>
+                <a:latin typeface="Meiryo UI"/>
+              </a:rPr>
+              <a:t>② 社内は IPv4 のまま。だから IPv4 を IPv6 に載せて運ぶ。それが MAP-E と DS-Lite</a:t>
+            </a:r>
+          </a:p>
+          <a:p>
+            <a:pPr lvl="1" algn="l">
+              <a:spcAft>
+                <a:spcPts val="600"/>
+              </a:spcAft>
+            </a:pPr>
+            <a:r>
+              <a:rPr sz="1700" b="0">
+                <a:solidFill>
+                  <a:srgbClr val="555555"/>
+                </a:solidFill>
+                <a:latin typeface="Meiryo UI"/>
+              </a:rPr>
+              <a:t>③ どちらになるかは選べない。VNE が決めています</a:t>
+            </a:r>
+          </a:p>
+          <a:p>
+            <a:pPr algn="l">
+              <a:spcAft>
+                <a:spcPts val="1000"/>
+              </a:spcAft>
+            </a:pPr>
+            <a:r>
+              <a:rPr sz="2000" b="1">
+                <a:solidFill>
+                  <a:srgbClr val="1F3355"/>
+                </a:solidFill>
+                <a:latin typeface="Meiryo UI"/>
+              </a:rPr>
+              <a:t>案件で最初に確認する 5 つ</a:t>
+            </a:r>
+          </a:p>
+          <a:p>
+            <a:pPr lvl="1" algn="l">
+              <a:spcAft>
+                <a:spcPts val="600"/>
+              </a:spcAft>
+            </a:pPr>
+            <a:r>
+              <a:rPr sz="1700" b="0">
+                <a:solidFill>
+                  <a:srgbClr val="555555"/>
+                </a:solidFill>
+                <a:latin typeface="Meiryo UI"/>
+              </a:rPr>
+              <a:t>□ ひかり電話はありますか → /64 か /56 かが決まる</a:t>
+            </a:r>
+          </a:p>
+          <a:p>
+            <a:pPr lvl="1" algn="l">
+              <a:spcAft>
+                <a:spcPts val="600"/>
+              </a:spcAft>
+            </a:pPr>
+            <a:r>
+              <a:rPr sz="1700" b="0">
+                <a:solidFill>
+                  <a:srgbClr val="555555"/>
+                </a:solidFill>
+                <a:latin typeface="Meiryo UI"/>
+              </a:rPr>
+              <a:t>□ VNE はどこですか → 方式が決まる (ISP 名だけでは分かりません)</a:t>
+            </a:r>
+          </a:p>
+          <a:p>
+            <a:pPr lvl="1" algn="l">
+              <a:spcAft>
+                <a:spcPts val="600"/>
+              </a:spcAft>
+            </a:pPr>
+            <a:r>
+              <a:rPr sz="1700" b="0">
+                <a:solidFill>
+                  <a:srgbClr val="555555"/>
+                </a:solidFill>
+                <a:latin typeface="Meiryo UI"/>
+              </a:rPr>
+              <a:t>□ 外から入ってくる通信はありますか → VPN / 拠点間 / 監視 / カメラ</a:t>
+            </a:r>
+          </a:p>
+          <a:p>
+            <a:pPr lvl="1" algn="l">
+              <a:spcAft>
+                <a:spcPts val="600"/>
+              </a:spcAft>
+            </a:pPr>
+            <a:r>
+              <a:rPr sz="1700" b="0">
+                <a:solidFill>
+                  <a:srgbClr val="555555"/>
+                </a:solidFill>
+                <a:latin typeface="Meiryo UI"/>
+              </a:rPr>
+              <a:t>□ ある場合、ポート番号は何番ですか → MAP-E でも開けられるかが決まる</a:t>
+            </a:r>
+          </a:p>
+          <a:p>
+            <a:pPr lvl="1" algn="l">
+              <a:spcAft>
+                <a:spcPts val="600"/>
+              </a:spcAft>
+            </a:pPr>
+            <a:r>
+              <a:rPr sz="1700" b="0">
+                <a:solidFill>
+                  <a:srgbClr val="555555"/>
+                </a:solidFill>
+                <a:latin typeface="Meiryo UI"/>
+              </a:rPr>
+              <a:t>□ 同時接続数はどれくらいですか → MAP-E のポート数 (240 など) で足りるか</a:t>
+            </a:r>
+          </a:p>
+          <a:p>
+            <a:pPr algn="l">
+              <a:spcAft>
+                <a:spcPts val="1000"/>
+              </a:spcAft>
+            </a:pPr>
+            <a:r>
+              <a:rPr sz="2000" b="1">
+                <a:solidFill>
+                  <a:srgbClr val="1F3355"/>
+                </a:solidFill>
+                <a:latin typeface="Meiryo UI"/>
+              </a:rPr>
+              <a:t>切替後に必ず確認する 1 つ</a:t>
+            </a:r>
+          </a:p>
+          <a:p>
+            <a:pPr lvl="1" algn="l">
+              <a:spcAft>
+                <a:spcPts val="600"/>
+              </a:spcAft>
+            </a:pPr>
+            <a:r>
+              <a:rPr sz="1700" b="1">
+                <a:solidFill>
+                  <a:srgbClr val="C0392B"/>
+                </a:solidFill>
+                <a:latin typeface="Meiryo UI"/>
+              </a:rPr>
+              <a:t>□ どのアドレスで外に出たか。疎通確認だけでは経路が正しいことを示せません</a:t>
+            </a:r>
+          </a:p>
+        </p:txBody>
+      </p:sp>
+    </p:spTree>
+  </p:cSld>
+  <p:clrMapOvr>
+    <a:masterClrMapping/>
+  </p:clrMapOvr>
+</p:sld>
+</file>
+
+<file path=ppt/slides/slide41.xml><?xml version="1.0" encoding="utf-8"?>
+<p:sld xmlns:a="http://schemas.openxmlformats.org/drawingml/2006/main" xmlns:p="http://schemas.openxmlformats.org/presentationml/2006/main" xmlns:r="http://schemas.openxmlformats.org/officeDocument/2006/relationships">
+  <p:cSld>
+    <p:spTree>
+      <p:nvGrpSpPr>
+        <p:cNvPr id="1" name=""/>
+        <p:cNvGrpSpPr/>
+        <p:nvPr/>
+      </p:nvGrpSpPr>
+      <p:grpSpPr/>
+      <p:sp>
+        <p:nvSpPr>
+          <p:cNvPr id="2" name="TextBox 1"/>
+          <p:cNvSpPr txBox="1"/>
+          <p:nvPr/>
+        </p:nvSpPr>
+        <p:spPr>
+          <a:xfrm>
+            <a:off x="502920" y="320040"/>
+            <a:ext cx="11155680" cy="822960"/>
+          </a:xfrm>
+          <a:prstGeom prst="rect">
+            <a:avLst/>
+          </a:prstGeom>
+          <a:noFill/>
+        </p:spPr>
+        <p:txBody>
+          <a:bodyPr wrap="square">
+            <a:spAutoFit/>
+          </a:bodyPr>
+          <a:lstStyle/>
+          <a:p>
+            <a:pPr algn="l"/>
+            <a:r>
+              <a:rPr sz="2800" b="1">
+                <a:solidFill>
+                  <a:srgbClr val="1F3355"/>
+                </a:solidFill>
+                <a:latin typeface="Meiryo UI"/>
+              </a:rPr>
+              <a:t>参考文献</a:t>
+            </a:r>
+          </a:p>
+        </p:txBody>
+      </p:sp>
+      <p:sp>
+        <p:nvSpPr>
+          <p:cNvPr id="3" name="Rectangle 2"/>
+          <p:cNvSpPr/>
+          <p:nvPr/>
+        </p:nvSpPr>
+        <p:spPr>
+          <a:xfrm>
+            <a:off x="502920" y="1115568"/>
+            <a:ext cx="11155680" cy="31750"/>
+          </a:xfrm>
+          <a:prstGeom prst="rect">
+            <a:avLst/>
+          </a:prstGeom>
+          <a:solidFill>
+            <a:srgbClr val="007ACC"/>
+          </a:solidFill>
+          <a:ln>
+            <a:noFill/>
+          </a:ln>
+        </p:spPr>
+        <p:style>
+          <a:lnRef idx="1">
+            <a:schemeClr val="accent1"/>
+          </a:lnRef>
+          <a:fillRef idx="3">
+            <a:schemeClr val="accent1"/>
+          </a:fillRef>
+          <a:effectRef idx="2">
+            <a:schemeClr val="accent1"/>
+          </a:effectRef>
+          <a:fontRef idx="minor">
+            <a:schemeClr val="lt1"/>
+          </a:fontRef>
+        </p:style>
+        <p:txBody>
+          <a:bodyPr rtlCol="0" anchor="ctr"/>
+          <a:lstStyle/>
+          <a:p>
+            <a:pPr algn="ctr"/>
+          </a:p>
+        </p:txBody>
+      </p:sp>
+      <p:sp>
+        <p:nvSpPr>
+          <p:cNvPr id="4" name="TextBox 3"/>
+          <p:cNvSpPr txBox="1"/>
+          <p:nvPr/>
+        </p:nvSpPr>
+        <p:spPr>
+          <a:xfrm>
+            <a:off x="594360" y="1371600"/>
+            <a:ext cx="10972800" cy="4983480"/>
+          </a:xfrm>
+          <a:prstGeom prst="rect">
+            <a:avLst/>
+          </a:prstGeom>
+          <a:noFill/>
+        </p:spPr>
+        <p:txBody>
+          <a:bodyPr wrap="square">
+            <a:spAutoFit/>
+          </a:bodyPr>
+          <a:lstStyle/>
+          <a:p>
+            <a:pPr algn="l">
+              <a:spcAft>
+                <a:spcPts val="600"/>
+              </a:spcAft>
+            </a:pPr>
+            <a:r>
+              <a:rPr sz="1600" b="1">
+                <a:solidFill>
+                  <a:srgbClr val="1F3355"/>
+                </a:solidFill>
+                <a:latin typeface="Meiryo UI"/>
+              </a:rPr>
+              <a:t>書籍</a:t>
+            </a:r>
+          </a:p>
+          <a:p>
+            <a:pPr lvl="1" algn="l">
+              <a:spcAft>
+                <a:spcPts val="300"/>
+              </a:spcAft>
+            </a:pPr>
+            <a:r>
+              <a:rPr sz="1300" b="0">
+                <a:solidFill>
+                  <a:srgbClr val="555555"/>
+                </a:solidFill>
+                <a:latin typeface="Meiryo UI"/>
+              </a:rPr>
+              <a:t>小川晃通『プロフェッショナル IPv6 第2版』ラムダノート株式会社</a:t>
+            </a:r>
+          </a:p>
+          <a:p>
+            <a:pPr lvl="1" algn="l">
+              <a:spcAft>
+                <a:spcPts val="300"/>
+              </a:spcAft>
+            </a:pPr>
+            <a:r>
+              <a:rPr sz="1300" b="0">
+                <a:solidFill>
+                  <a:srgbClr val="555555"/>
+                </a:solidFill>
+                <a:latin typeface="Meiryo UI"/>
+              </a:rPr>
+              <a:t>2021年12月20日 第2版第1刷 (参照した PDF は 2023年3月1日 第2版第2刷)</a:t>
+            </a:r>
+          </a:p>
+          <a:p>
+            <a:pPr lvl="1" algn="l">
+              <a:spcAft>
+                <a:spcPts val="300"/>
+              </a:spcAft>
+            </a:pPr>
+            <a:r>
+              <a:rPr sz="1300" b="0">
+                <a:solidFill>
+                  <a:srgbClr val="555555"/>
+                </a:solidFill>
+                <a:latin typeface="Meiryo UI"/>
+              </a:rPr>
+              <a:t>ISBN 978-4-908686-11-5 / 本書は CC BY-NC-SA ライセンスで公開されています</a:t>
+            </a:r>
+          </a:p>
+          <a:p>
+            <a:pPr lvl="1" algn="l">
+              <a:spcAft>
+                <a:spcPts val="300"/>
+              </a:spcAft>
+            </a:pPr>
+            <a:r>
+              <a:rPr sz="1300" b="0">
+                <a:solidFill>
+                  <a:srgbClr val="555555"/>
+                </a:solidFill>
+                <a:latin typeface="Meiryo UI"/>
+              </a:rPr>
+              <a:t>参照した節: 2.10 (p.51) / 3章 (p.67) / 3.5 (p.74) / 5章 (p.115) / 6章 (p.127)</a:t>
+            </a:r>
+          </a:p>
+          <a:p>
+            <a:pPr lvl="1" algn="l">
+              <a:spcAft>
+                <a:spcPts val="300"/>
+              </a:spcAft>
+            </a:pPr>
+            <a:r>
+              <a:rPr sz="1300" b="0">
+                <a:solidFill>
+                  <a:srgbClr val="555555"/>
+                </a:solidFill>
+                <a:latin typeface="Meiryo UI"/>
+              </a:rPr>
+              <a:t>  7.1 (p.160) / 7.7 (p.172) / 8章 (p.179) / 8.7 (p.201) / 9章 (p.205) / 10章 (p.215)</a:t>
+            </a:r>
+          </a:p>
+          <a:p>
+            <a:pPr lvl="1" algn="l">
+              <a:spcAft>
+                <a:spcPts val="300"/>
+              </a:spcAft>
+            </a:pPr>
+            <a:r>
+              <a:rPr sz="1300" b="0">
+                <a:solidFill>
+                  <a:srgbClr val="555555"/>
+                </a:solidFill>
+                <a:latin typeface="Meiryo UI"/>
+              </a:rPr>
+              <a:t>  18章 (p.335) / 19.4 (p.362) / 24.1 (p.421) / 24.3 (p.423) / 24.4 (p.425) / 付録A.3 (p.443)</a:t>
+            </a:r>
+          </a:p>
+          <a:p>
+            <a:pPr algn="l">
+              <a:spcAft>
+                <a:spcPts val="600"/>
+              </a:spcAft>
+            </a:pPr>
+            <a:r>
+              <a:rPr sz="1600" b="1">
+                <a:solidFill>
+                  <a:srgbClr val="C0392B"/>
+                </a:solidFill>
+                <a:latin typeface="Meiryo UI"/>
+              </a:rPr>
+              <a:t>※ この資料には本書の本文と図を一切転載していません。該当節を示すだけにしてあります</a:t>
+            </a:r>
+          </a:p>
+          <a:p>
+            <a:pPr algn="l">
+              <a:spcAft>
+                <a:spcPts val="600"/>
+              </a:spcAft>
+            </a:pPr>
+            <a:r>
+              <a:rPr sz="1600" b="1">
+                <a:solidFill>
+                  <a:srgbClr val="1F3355"/>
+                </a:solidFill>
+                <a:latin typeface="Meiryo UI"/>
+              </a:rPr>
+              <a:t>RFC</a:t>
+            </a:r>
+          </a:p>
+          <a:p>
+            <a:pPr lvl="1" algn="l">
+              <a:spcAft>
+                <a:spcPts val="300"/>
+              </a:spcAft>
+            </a:pPr>
+            <a:r>
+              <a:rPr sz="1300" b="0">
+                <a:solidFill>
+                  <a:srgbClr val="555555"/>
+                </a:solidFill>
+                <a:latin typeface="Meiryo UI"/>
+              </a:rPr>
+              <a:t>RFC 6333 (DS-Lite) / RFC 7597 (MAP-E) / RFC 4861 (NDP) / RFC 4862 (SLAAC)</a:t>
+            </a:r>
+          </a:p>
+          <a:p>
+            <a:pPr lvl="1" algn="l">
+              <a:spcAft>
+                <a:spcPts val="300"/>
+              </a:spcAft>
+            </a:pPr>
+            <a:r>
+              <a:rPr sz="1300" b="0">
+                <a:solidFill>
+                  <a:srgbClr val="555555"/>
+                </a:solidFill>
+                <a:latin typeface="Meiryo UI"/>
+              </a:rPr>
+              <a:t>RFC 8415 (DHCPv6)</a:t>
+            </a:r>
+          </a:p>
+          <a:p>
+            <a:pPr lvl="1" algn="l">
+              <a:spcAft>
+                <a:spcPts val="300"/>
+              </a:spcAft>
+            </a:pPr>
+            <a:r>
+              <a:rPr sz="1300" b="0">
+                <a:solidFill>
+                  <a:srgbClr val="555555"/>
+                </a:solidFill>
+                <a:latin typeface="Meiryo UI"/>
+              </a:rPr>
+              <a:t>発展学習 (本編では扱いません): RFC 6724 (アドレス選択) / RFC 8305 (Happy Eyeballs v2)</a:t>
+            </a:r>
+          </a:p>
+          <a:p>
+            <a:pPr algn="l">
+              <a:spcAft>
+                <a:spcPts val="600"/>
+              </a:spcAft>
+            </a:pPr>
+            <a:r>
+              <a:rPr sz="1600" b="1">
+                <a:solidFill>
+                  <a:srgbClr val="1F3355"/>
+                </a:solidFill>
+                <a:latin typeface="Meiryo UI"/>
+              </a:rPr>
+              <a:t>サービス分類の出典</a:t>
+            </a:r>
+          </a:p>
+          <a:p>
+            <a:pPr lvl="1" algn="l">
+              <a:spcAft>
+                <a:spcPts val="300"/>
+              </a:spcAft>
+            </a:pPr>
+            <a:r>
+              <a:rPr sz="1300" b="0">
+                <a:solidFill>
+                  <a:srgbClr val="555555"/>
+                </a:solidFill>
+                <a:latin typeface="Meiryo UI"/>
+              </a:rPr>
+              <a:t>ヤマハ「動作確認済み IPv6 IPoE + IPv4 over IPv6 接続サービス」RTpro</a:t>
+            </a:r>
+          </a:p>
+          <a:p>
+            <a:pPr lvl="1" algn="l">
+              <a:spcAft>
+                <a:spcPts val="300"/>
+              </a:spcAft>
+            </a:pPr>
+            <a:r>
+              <a:rPr sz="1300" b="0">
+                <a:solidFill>
+                  <a:srgbClr val="0B6040"/>
+                </a:solidFill>
+                <a:latin typeface="Consolas"/>
+              </a:rPr>
+              <a:t>https://www.rtpro.yamaha.co.jp/RT/docs/ipoe_46/available_ipoe_46.html</a:t>
+            </a:r>
+          </a:p>
+          <a:p>
+            <a:pPr algn="l">
+              <a:spcAft>
+                <a:spcPts val="600"/>
+              </a:spcAft>
+            </a:pPr>
+            <a:r>
+              <a:rPr sz="1600" b="1">
+                <a:solidFill>
+                  <a:srgbClr val="1F3355"/>
+                </a:solidFill>
+                <a:latin typeface="Meiryo UI"/>
+              </a:rPr>
+              <a:t>社内資料</a:t>
+            </a:r>
+          </a:p>
+          <a:p>
+            <a:pPr lvl="1" algn="l">
+              <a:spcAft>
+                <a:spcPts val="300"/>
+              </a:spcAft>
+            </a:pPr>
+            <a:r>
+              <a:rPr sz="1300" b="0">
+                <a:solidFill>
+                  <a:srgbClr val="555555"/>
+                </a:solidFill>
+                <a:latin typeface="Meiryo UI"/>
+              </a:rPr>
+              <a:t>docs/ipoe-lab/ — README / runbook-vmware / build-log (第4部の実測値の出どころ) / study-guide</a:t>
             </a:r>
           </a:p>
         </p:txBody>

--- a/docs/ipoe-lab/slides/setsumeikai.pptx
+++ b/docs/ipoe-lab/slides/setsumeikai.pptx
@@ -8,44 +8,44 @@
     <p:sldId id="256" r:id="rId7"/>
     <p:sldId id="257" r:id="rId8"/>
     <p:sldId id="258" r:id="rId9"/>
-    <p:sldId id="259" r:id="rId10"/>
-    <p:sldId id="260" r:id="rId11"/>
-    <p:sldId id="261" r:id="rId12"/>
-    <p:sldId id="262" r:id="rId13"/>
-    <p:sldId id="263" r:id="rId14"/>
-    <p:sldId id="264" r:id="rId15"/>
-    <p:sldId id="265" r:id="rId16"/>
-    <p:sldId id="266" r:id="rId17"/>
-    <p:sldId id="267" r:id="rId18"/>
-    <p:sldId id="268" r:id="rId19"/>
-    <p:sldId id="269" r:id="rId20"/>
-    <p:sldId id="270" r:id="rId21"/>
-    <p:sldId id="271" r:id="rId22"/>
-    <p:sldId id="272" r:id="rId23"/>
-    <p:sldId id="273" r:id="rId24"/>
-    <p:sldId id="274" r:id="rId25"/>
-    <p:sldId id="275" r:id="rId26"/>
-    <p:sldId id="276" r:id="rId27"/>
-    <p:sldId id="277" r:id="rId28"/>
-    <p:sldId id="278" r:id="rId29"/>
-    <p:sldId id="279" r:id="rId30"/>
-    <p:sldId id="280" r:id="rId31"/>
-    <p:sldId id="281" r:id="rId32"/>
-    <p:sldId id="282" r:id="rId33"/>
-    <p:sldId id="283" r:id="rId34"/>
-    <p:sldId id="284" r:id="rId35"/>
-    <p:sldId id="285" r:id="rId36"/>
-    <p:sldId id="286" r:id="rId37"/>
-    <p:sldId id="287" r:id="rId38"/>
-    <p:sldId id="288" r:id="rId39"/>
-    <p:sldId id="289" r:id="rId40"/>
-    <p:sldId id="290" r:id="rId41"/>
-    <p:sldId id="291" r:id="rId42"/>
-    <p:sldId id="292" r:id="rId43"/>
-    <p:sldId id="293" r:id="rId44"/>
-    <p:sldId id="294" r:id="rId45"/>
-    <p:sldId id="295" r:id="rId46"/>
-    <p:sldId id="296" r:id="rId47"/>
+    <p:sldId id="259" r:id="rId11"/>
+    <p:sldId id="260" r:id="rId12"/>
+    <p:sldId id="261" r:id="rId13"/>
+    <p:sldId id="262" r:id="rId14"/>
+    <p:sldId id="263" r:id="rId15"/>
+    <p:sldId id="264" r:id="rId16"/>
+    <p:sldId id="265" r:id="rId17"/>
+    <p:sldId id="266" r:id="rId18"/>
+    <p:sldId id="267" r:id="rId19"/>
+    <p:sldId id="268" r:id="rId20"/>
+    <p:sldId id="269" r:id="rId21"/>
+    <p:sldId id="270" r:id="rId22"/>
+    <p:sldId id="271" r:id="rId23"/>
+    <p:sldId id="272" r:id="rId24"/>
+    <p:sldId id="273" r:id="rId25"/>
+    <p:sldId id="274" r:id="rId26"/>
+    <p:sldId id="275" r:id="rId27"/>
+    <p:sldId id="276" r:id="rId28"/>
+    <p:sldId id="277" r:id="rId29"/>
+    <p:sldId id="278" r:id="rId30"/>
+    <p:sldId id="279" r:id="rId31"/>
+    <p:sldId id="280" r:id="rId32"/>
+    <p:sldId id="281" r:id="rId33"/>
+    <p:sldId id="282" r:id="rId34"/>
+    <p:sldId id="283" r:id="rId35"/>
+    <p:sldId id="284" r:id="rId36"/>
+    <p:sldId id="285" r:id="rId37"/>
+    <p:sldId id="286" r:id="rId38"/>
+    <p:sldId id="287" r:id="rId39"/>
+    <p:sldId id="288" r:id="rId40"/>
+    <p:sldId id="289" r:id="rId41"/>
+    <p:sldId id="290" r:id="rId42"/>
+    <p:sldId id="291" r:id="rId43"/>
+    <p:sldId id="292" r:id="rId44"/>
+    <p:sldId id="293" r:id="rId45"/>
+    <p:sldId id="294" r:id="rId46"/>
+    <p:sldId id="295" r:id="rId47"/>
+    <p:sldId id="296" r:id="rId48"/>
   </p:sldIdLst>
   <p:sldSz cx="12191695" cy="6858000" type="screen4x3"/>
   <p:notesSz cx="6858000" cy="9144000"/>
@@ -145,6 +145,806 @@
     </a:lvl9pPr>
   </p:defaultTextStyle>
 </p:presentation>
+</file>
+
+<file path=ppt/notesMasters/notesMaster1.xml><?xml version="1.0" encoding="utf-8"?>
+<p:notesMaster xmlns:a="http://schemas.openxmlformats.org/drawingml/2006/main" xmlns:p="http://schemas.openxmlformats.org/presentationml/2006/main" xmlns:r="http://schemas.openxmlformats.org/officeDocument/2006/relationships">
+  <p:cSld>
+    <p:bg>
+      <p:bgRef idx="1001">
+        <a:schemeClr val="bg1"/>
+      </p:bgRef>
+    </p:bg>
+    <p:spTree>
+      <p:nvGrpSpPr>
+        <p:cNvPr id="1" name=""/>
+        <p:cNvGrpSpPr/>
+        <p:nvPr/>
+      </p:nvGrpSpPr>
+      <p:grpSpPr>
+        <a:xfrm>
+          <a:off x="0" y="0"/>
+          <a:ext cx="0" cy="0"/>
+          <a:chOff x="0" y="0"/>
+          <a:chExt cx="0" cy="0"/>
+        </a:xfrm>
+      </p:grpSpPr>
+      <p:sp>
+        <p:nvSpPr>
+          <p:cNvPr id="2" name="Header Placeholder 1"/>
+          <p:cNvSpPr>
+            <a:spLocks noGrp="1"/>
+          </p:cNvSpPr>
+          <p:nvPr>
+            <p:ph type="hdr" sz="quarter"/>
+          </p:nvPr>
+        </p:nvSpPr>
+        <p:spPr>
+          <a:xfrm>
+            <a:off x="0" y="0"/>
+            <a:ext cx="2971800" cy="457200"/>
+          </a:xfrm>
+          <a:prstGeom prst="rect">
+            <a:avLst/>
+          </a:prstGeom>
+        </p:spPr>
+        <p:txBody>
+          <a:bodyPr vert="horz" lIns="91440" tIns="45720" rIns="91440" bIns="45720" rtlCol="0"/>
+          <a:lstStyle>
+            <a:lvl1pPr algn="l">
+              <a:defRPr sz="1200"/>
+            </a:lvl1pPr>
+          </a:lstStyle>
+          <a:p>
+            <a:endParaRPr lang="en-US"/>
+          </a:p>
+        </p:txBody>
+      </p:sp>
+      <p:sp>
+        <p:nvSpPr>
+          <p:cNvPr id="3" name="Date Placeholder 2"/>
+          <p:cNvSpPr>
+            <a:spLocks noGrp="1"/>
+          </p:cNvSpPr>
+          <p:nvPr>
+            <p:ph type="dt" idx="1"/>
+          </p:nvPr>
+        </p:nvSpPr>
+        <p:spPr>
+          <a:xfrm>
+            <a:off x="3884613" y="0"/>
+            <a:ext cx="2971800" cy="457200"/>
+          </a:xfrm>
+          <a:prstGeom prst="rect">
+            <a:avLst/>
+          </a:prstGeom>
+        </p:spPr>
+        <p:txBody>
+          <a:bodyPr vert="horz" lIns="91440" tIns="45720" rIns="91440" bIns="45720" rtlCol="0"/>
+          <a:lstStyle>
+            <a:lvl1pPr algn="r">
+              <a:defRPr sz="1200"/>
+            </a:lvl1pPr>
+          </a:lstStyle>
+          <a:p>
+            <a:fld id="{0F89C1C7-3DCD-1040-A9CF-14679D8B5DDD}" type="datetimeFigureOut">
+              <a:rPr lang="en-US" smtClean="0"/>
+              <a:t>10/17/16</a:t>
+            </a:fld>
+            <a:endParaRPr lang="en-US"/>
+          </a:p>
+        </p:txBody>
+      </p:sp>
+      <p:sp>
+        <p:nvSpPr>
+          <p:cNvPr id="4" name="Slide Image Placeholder 3"/>
+          <p:cNvSpPr>
+            <a:spLocks noGrp="1" noRot="1" noChangeAspect="1"/>
+          </p:cNvSpPr>
+          <p:nvPr>
+            <p:ph type="sldImg" idx="2"/>
+          </p:nvPr>
+        </p:nvSpPr>
+        <p:spPr>
+          <a:xfrm>
+            <a:off x="1143000" y="685800"/>
+            <a:ext cx="4572000" cy="3429000"/>
+          </a:xfrm>
+          <a:prstGeom prst="rect">
+            <a:avLst/>
+          </a:prstGeom>
+          <a:noFill/>
+          <a:ln w="12700">
+            <a:solidFill>
+              <a:prstClr val="black"/>
+            </a:solidFill>
+          </a:ln>
+        </p:spPr>
+        <p:txBody>
+          <a:bodyPr vert="horz" lIns="91440" tIns="45720" rIns="91440" bIns="45720" rtlCol="0" anchor="ctr"/>
+          <a:lstStyle/>
+          <a:p>
+            <a:endParaRPr lang="en-US"/>
+          </a:p>
+        </p:txBody>
+      </p:sp>
+      <p:sp>
+        <p:nvSpPr>
+          <p:cNvPr id="5" name="Notes Placeholder 4"/>
+          <p:cNvSpPr>
+            <a:spLocks noGrp="1"/>
+          </p:cNvSpPr>
+          <p:nvPr>
+            <p:ph type="body" sz="quarter" idx="3"/>
+          </p:nvPr>
+        </p:nvSpPr>
+        <p:spPr>
+          <a:xfrm>
+            <a:off x="685800" y="4343400"/>
+            <a:ext cx="5486400" cy="4114800"/>
+          </a:xfrm>
+          <a:prstGeom prst="rect">
+            <a:avLst/>
+          </a:prstGeom>
+        </p:spPr>
+        <p:txBody>
+          <a:bodyPr vert="horz" lIns="91440" tIns="45720" rIns="91440" bIns="45720" rtlCol="0"/>
+          <a:lstStyle/>
+          <a:p>
+            <a:pPr lvl="0"/>
+            <a:r>
+              <a:rPr lang="en-US" smtClean="0"/>
+              <a:t>Click to edit Master text styles</a:t>
+            </a:r>
+          </a:p>
+          <a:p>
+            <a:pPr lvl="1"/>
+            <a:r>
+              <a:rPr lang="en-US" smtClean="0"/>
+              <a:t>Second level</a:t>
+            </a:r>
+          </a:p>
+          <a:p>
+            <a:pPr lvl="2"/>
+            <a:r>
+              <a:rPr lang="en-US" smtClean="0"/>
+              <a:t>Third level</a:t>
+            </a:r>
+          </a:p>
+          <a:p>
+            <a:pPr lvl="3"/>
+            <a:r>
+              <a:rPr lang="en-US" smtClean="0"/>
+              <a:t>Fourth level</a:t>
+            </a:r>
+          </a:p>
+          <a:p>
+            <a:pPr lvl="4"/>
+            <a:r>
+              <a:rPr lang="en-US" smtClean="0"/>
+              <a:t>Fifth level</a:t>
+            </a:r>
+            <a:endParaRPr lang="en-US"/>
+          </a:p>
+        </p:txBody>
+      </p:sp>
+      <p:sp>
+        <p:nvSpPr>
+          <p:cNvPr id="6" name="Footer Placeholder 5"/>
+          <p:cNvSpPr>
+            <a:spLocks noGrp="1"/>
+          </p:cNvSpPr>
+          <p:nvPr>
+            <p:ph type="ftr" sz="quarter" idx="4"/>
+          </p:nvPr>
+        </p:nvSpPr>
+        <p:spPr>
+          <a:xfrm>
+            <a:off x="0" y="8685213"/>
+            <a:ext cx="2971800" cy="457200"/>
+          </a:xfrm>
+          <a:prstGeom prst="rect">
+            <a:avLst/>
+          </a:prstGeom>
+        </p:spPr>
+        <p:txBody>
+          <a:bodyPr vert="horz" lIns="91440" tIns="45720" rIns="91440" bIns="45720" rtlCol="0" anchor="b"/>
+          <a:lstStyle>
+            <a:lvl1pPr algn="l">
+              <a:defRPr sz="1200"/>
+            </a:lvl1pPr>
+          </a:lstStyle>
+          <a:p>
+            <a:endParaRPr lang="en-US"/>
+          </a:p>
+        </p:txBody>
+      </p:sp>
+      <p:sp>
+        <p:nvSpPr>
+          <p:cNvPr id="7" name="Slide Number Placeholder 6"/>
+          <p:cNvSpPr>
+            <a:spLocks noGrp="1"/>
+          </p:cNvSpPr>
+          <p:nvPr>
+            <p:ph type="sldNum" sz="quarter" idx="5"/>
+          </p:nvPr>
+        </p:nvSpPr>
+        <p:spPr>
+          <a:xfrm>
+            <a:off x="3884613" y="8685213"/>
+            <a:ext cx="2971800" cy="457200"/>
+          </a:xfrm>
+          <a:prstGeom prst="rect">
+            <a:avLst/>
+          </a:prstGeom>
+        </p:spPr>
+        <p:txBody>
+          <a:bodyPr vert="horz" lIns="91440" tIns="45720" rIns="91440" bIns="45720" rtlCol="0" anchor="b"/>
+          <a:lstStyle>
+            <a:lvl1pPr algn="r">
+              <a:defRPr sz="1200"/>
+            </a:lvl1pPr>
+          </a:lstStyle>
+          <a:p>
+            <a:fld id="{BB5E49A5-4136-284D-997B-48E1D791AD67}" type="slidenum">
+              <a:rPr lang="en-US" smtClean="0"/>
+              <a:t>‹#›</a:t>
+            </a:fld>
+            <a:endParaRPr lang="en-US"/>
+          </a:p>
+        </p:txBody>
+      </p:sp>
+    </p:spTree>
+    <p:extLst>
+      <p:ext uri="{BB962C8B-B14F-4D97-AF65-F5344CB8AC3E}">
+        <p14:creationId xmlns:p14="http://schemas.microsoft.com/office/powerpoint/2010/main" val="2623252185"/>
+      </p:ext>
+    </p:extLst>
+  </p:cSld>
+  <p:clrMap bg1="lt1" tx1="dk1" bg2="lt2" tx2="dk2" accent1="accent1" accent2="accent2" accent3="accent3" accent4="accent4" accent5="accent5" accent6="accent6" hlink="hlink" folHlink="folHlink"/>
+  <p:notesStyle>
+    <a:lvl1pPr marL="0" algn="l" defTabSz="457200" rtl="0" eaLnBrk="1" latinLnBrk="0" hangingPunct="1">
+      <a:defRPr sz="1200" kern="1200">
+        <a:solidFill>
+          <a:schemeClr val="tx1"/>
+        </a:solidFill>
+        <a:latin typeface="+mn-lt"/>
+        <a:ea typeface="+mn-ea"/>
+        <a:cs typeface="+mn-cs"/>
+      </a:defRPr>
+    </a:lvl1pPr>
+    <a:lvl2pPr marL="457200" algn="l" defTabSz="457200" rtl="0" eaLnBrk="1" latinLnBrk="0" hangingPunct="1">
+      <a:defRPr sz="1200" kern="1200">
+        <a:solidFill>
+          <a:schemeClr val="tx1"/>
+        </a:solidFill>
+        <a:latin typeface="+mn-lt"/>
+        <a:ea typeface="+mn-ea"/>
+        <a:cs typeface="+mn-cs"/>
+      </a:defRPr>
+    </a:lvl2pPr>
+    <a:lvl3pPr marL="914400" algn="l" defTabSz="457200" rtl="0" eaLnBrk="1" latinLnBrk="0" hangingPunct="1">
+      <a:defRPr sz="1200" kern="1200">
+        <a:solidFill>
+          <a:schemeClr val="tx1"/>
+        </a:solidFill>
+        <a:latin typeface="+mn-lt"/>
+        <a:ea typeface="+mn-ea"/>
+        <a:cs typeface="+mn-cs"/>
+      </a:defRPr>
+    </a:lvl3pPr>
+    <a:lvl4pPr marL="1371600" algn="l" defTabSz="457200" rtl="0" eaLnBrk="1" latinLnBrk="0" hangingPunct="1">
+      <a:defRPr sz="1200" kern="1200">
+        <a:solidFill>
+          <a:schemeClr val="tx1"/>
+        </a:solidFill>
+        <a:latin typeface="+mn-lt"/>
+        <a:ea typeface="+mn-ea"/>
+        <a:cs typeface="+mn-cs"/>
+      </a:defRPr>
+    </a:lvl4pPr>
+    <a:lvl5pPr marL="1828800" algn="l" defTabSz="457200" rtl="0" eaLnBrk="1" latinLnBrk="0" hangingPunct="1">
+      <a:defRPr sz="1200" kern="1200">
+        <a:solidFill>
+          <a:schemeClr val="tx1"/>
+        </a:solidFill>
+        <a:latin typeface="+mn-lt"/>
+        <a:ea typeface="+mn-ea"/>
+        <a:cs typeface="+mn-cs"/>
+      </a:defRPr>
+    </a:lvl5pPr>
+    <a:lvl6pPr marL="2286000" algn="l" defTabSz="457200" rtl="0" eaLnBrk="1" latinLnBrk="0" hangingPunct="1">
+      <a:defRPr sz="1200" kern="1200">
+        <a:solidFill>
+          <a:schemeClr val="tx1"/>
+        </a:solidFill>
+        <a:latin typeface="+mn-lt"/>
+        <a:ea typeface="+mn-ea"/>
+        <a:cs typeface="+mn-cs"/>
+      </a:defRPr>
+    </a:lvl6pPr>
+    <a:lvl7pPr marL="2743200" algn="l" defTabSz="457200" rtl="0" eaLnBrk="1" latinLnBrk="0" hangingPunct="1">
+      <a:defRPr sz="1200" kern="1200">
+        <a:solidFill>
+          <a:schemeClr val="tx1"/>
+        </a:solidFill>
+        <a:latin typeface="+mn-lt"/>
+        <a:ea typeface="+mn-ea"/>
+        <a:cs typeface="+mn-cs"/>
+      </a:defRPr>
+    </a:lvl7pPr>
+    <a:lvl8pPr marL="3200400" algn="l" defTabSz="457200" rtl="0" eaLnBrk="1" latinLnBrk="0" hangingPunct="1">
+      <a:defRPr sz="1200" kern="1200">
+        <a:solidFill>
+          <a:schemeClr val="tx1"/>
+        </a:solidFill>
+        <a:latin typeface="+mn-lt"/>
+        <a:ea typeface="+mn-ea"/>
+        <a:cs typeface="+mn-cs"/>
+      </a:defRPr>
+    </a:lvl8pPr>
+    <a:lvl9pPr marL="3657600" algn="l" defTabSz="457200" rtl="0" eaLnBrk="1" latinLnBrk="0" hangingPunct="1">
+      <a:defRPr sz="1200" kern="1200">
+        <a:solidFill>
+          <a:schemeClr val="tx1"/>
+        </a:solidFill>
+        <a:latin typeface="+mn-lt"/>
+        <a:ea typeface="+mn-ea"/>
+        <a:cs typeface="+mn-cs"/>
+      </a:defRPr>
+    </a:lvl9pPr>
+  </p:notesStyle>
+</p:notesMaster>
+</file>
+
+<file path=ppt/notesSlides/notesSlide1.xml><?xml version="1.0" encoding="utf-8"?>
+<p:notes xmlns:a="http://schemas.openxmlformats.org/drawingml/2006/main" xmlns:p="http://schemas.openxmlformats.org/presentationml/2006/main" xmlns:r="http://schemas.openxmlformats.org/officeDocument/2006/relationships">
+  <p:cSld>
+    <p:spTree>
+      <p:nvGrpSpPr>
+        <p:cNvPr id="1" name=""/>
+        <p:cNvGrpSpPr/>
+        <p:nvPr/>
+      </p:nvGrpSpPr>
+      <p:grpSpPr>
+        <a:xfrm>
+          <a:off x="0" y="0"/>
+          <a:ext cx="0" cy="0"/>
+          <a:chOff x="0" y="0"/>
+          <a:chExt cx="0" cy="0"/>
+        </a:xfrm>
+      </p:grpSpPr>
+      <p:sp>
+        <p:nvSpPr>
+          <p:cNvPr id="2" name="Slide Image Placeholder 1"/>
+          <p:cNvSpPr>
+            <a:spLocks noGrp="1"/>
+          </p:cNvSpPr>
+          <p:nvPr>
+            <p:ph type="sldImg" idx="2"/>
+          </p:nvPr>
+        </p:nvSpPr>
+        <p:spPr/>
+      </p:sp>
+      <p:sp>
+        <p:nvSpPr>
+          <p:cNvPr id="3" name="Notes Placeholder 2"/>
+          <p:cNvSpPr>
+            <a:spLocks noGrp="1"/>
+          </p:cNvSpPr>
+          <p:nvPr>
+            <p:ph type="body" idx="3" sz="quarter"/>
+          </p:nvPr>
+        </p:nvSpPr>
+        <p:spPr/>
+        <p:txBody>
+          <a:bodyPr/>
+          <a:lstStyle/>
+          <a:p>
+            <a:r>
+              <a:t>【話す人へ】</a:t>
+            </a:r>
+          </a:p>
+          <a:p>
+            <a:r>
+              <a:t>・冒頭で「配布資料の巻末に想定問答があります」と必ず案内すること。</a:t>
+            </a:r>
+          </a:p>
+          <a:p>
+            <a:r>
+              <a:t>  前回の模擬では、受講者が家に帰ってから気づいていた。</a:t>
+            </a:r>
+          </a:p>
+          <a:p>
+            <a:r>
+              <a:t>・持ち帰り 3 つのうち ③ (ポート開放に即答) が一番刺さる。ここで期待値を上げてよい。</a:t>
+            </a:r>
+          </a:p>
+          <a:p>
+            <a:r>
+              <a:t>・全体で 55 分 + 質疑 5 分。第3部 (19 分) が本体なので、前半は巻き気味で。</a:t>
+            </a:r>
+          </a:p>
+        </p:txBody>
+      </p:sp>
+      <p:sp>
+        <p:nvSpPr>
+          <p:cNvPr id="4" name="Slide Number Placeholder 3"/>
+          <p:cNvSpPr>
+            <a:spLocks noGrp="1"/>
+          </p:cNvSpPr>
+          <p:nvPr>
+            <p:ph type="sldNum" idx="5" sz="quarter"/>
+          </p:nvPr>
+        </p:nvSpPr>
+        <p:spPr/>
+      </p:sp>
+    </p:spTree>
+  </p:cSld>
+  <p:clrMapOvr>
+    <a:masterClrMapping/>
+  </p:clrMapOvr>
+</p:notes>
+</file>
+
+<file path=ppt/notesSlides/notesSlide2.xml><?xml version="1.0" encoding="utf-8"?>
+<p:notes xmlns:a="http://schemas.openxmlformats.org/drawingml/2006/main" xmlns:p="http://schemas.openxmlformats.org/presentationml/2006/main" xmlns:r="http://schemas.openxmlformats.org/officeDocument/2006/relationships">
+  <p:cSld>
+    <p:spTree>
+      <p:nvGrpSpPr>
+        <p:cNvPr id="1" name=""/>
+        <p:cNvGrpSpPr/>
+        <p:nvPr/>
+      </p:nvGrpSpPr>
+      <p:grpSpPr>
+        <a:xfrm>
+          <a:off x="0" y="0"/>
+          <a:ext cx="0" cy="0"/>
+          <a:chOff x="0" y="0"/>
+          <a:chExt cx="0" cy="0"/>
+        </a:xfrm>
+      </p:grpSpPr>
+      <p:sp>
+        <p:nvSpPr>
+          <p:cNvPr id="2" name="Slide Image Placeholder 1"/>
+          <p:cNvSpPr>
+            <a:spLocks noGrp="1"/>
+          </p:cNvSpPr>
+          <p:nvPr>
+            <p:ph type="sldImg" idx="2"/>
+          </p:nvPr>
+        </p:nvSpPr>
+        <p:spPr/>
+      </p:sp>
+      <p:sp>
+        <p:nvSpPr>
+          <p:cNvPr id="3" name="Notes Placeholder 2"/>
+          <p:cNvSpPr>
+            <a:spLocks noGrp="1"/>
+          </p:cNvSpPr>
+          <p:nvPr>
+            <p:ph type="body" idx="3" sz="quarter"/>
+          </p:nvPr>
+        </p:nvSpPr>
+        <p:spPr/>
+        <p:txBody>
+          <a:bodyPr/>
+          <a:lstStyle/>
+          <a:p>
+            <a:r>
+              <a:t>【話す人へ】</a:t>
+            </a:r>
+          </a:p>
+          <a:p>
+            <a:r>
+              <a:t>・**このページは読み上げないこと。**10 個を読むと 3 分溶ける。</a:t>
+            </a:r>
+          </a:p>
+          <a:p>
+            <a:r>
+              <a:t>・「分からなくなったらここに戻ります」とだけ言って 30 秒で次へ。</a:t>
+            </a:r>
+          </a:p>
+          <a:p>
+            <a:r>
+              <a:t>・戻る場所として記憶に残ればよく、ここで覚えさせる必要はない。</a:t>
+            </a:r>
+          </a:p>
+          <a:p>
+            <a:r>
+              <a:t>・他の略語 (AFTR / BRAS / プレフィックス) が出たら、そのつど</a:t>
+            </a:r>
+          </a:p>
+          <a:p>
+            <a:r>
+              <a:t>  「要するに〇〇」と言い直すこと。ここに追加はしない。</a:t>
+            </a:r>
+          </a:p>
+        </p:txBody>
+      </p:sp>
+      <p:sp>
+        <p:nvSpPr>
+          <p:cNvPr id="4" name="Slide Number Placeholder 3"/>
+          <p:cNvSpPr>
+            <a:spLocks noGrp="1"/>
+          </p:cNvSpPr>
+          <p:nvPr>
+            <p:ph type="sldNum" idx="5" sz="quarter"/>
+          </p:nvPr>
+        </p:nvSpPr>
+        <p:spPr/>
+      </p:sp>
+    </p:spTree>
+  </p:cSld>
+  <p:clrMapOvr>
+    <a:masterClrMapping/>
+  </p:clrMapOvr>
+</p:notes>
+</file>
+
+<file path=ppt/notesSlides/notesSlide3.xml><?xml version="1.0" encoding="utf-8"?>
+<p:notes xmlns:a="http://schemas.openxmlformats.org/drawingml/2006/main" xmlns:p="http://schemas.openxmlformats.org/presentationml/2006/main" xmlns:r="http://schemas.openxmlformats.org/officeDocument/2006/relationships">
+  <p:cSld>
+    <p:spTree>
+      <p:nvGrpSpPr>
+        <p:cNvPr id="1" name=""/>
+        <p:cNvGrpSpPr/>
+        <p:nvPr/>
+      </p:nvGrpSpPr>
+      <p:grpSpPr>
+        <a:xfrm>
+          <a:off x="0" y="0"/>
+          <a:ext cx="0" cy="0"/>
+          <a:chOff x="0" y="0"/>
+          <a:chExt cx="0" cy="0"/>
+        </a:xfrm>
+      </p:grpSpPr>
+      <p:sp>
+        <p:nvSpPr>
+          <p:cNvPr id="2" name="Slide Image Placeholder 1"/>
+          <p:cNvSpPr>
+            <a:spLocks noGrp="1"/>
+          </p:cNvSpPr>
+          <p:nvPr>
+            <p:ph type="sldImg" idx="2"/>
+          </p:nvPr>
+        </p:nvSpPr>
+        <p:spPr/>
+      </p:sp>
+      <p:sp>
+        <p:nvSpPr>
+          <p:cNvPr id="3" name="Notes Placeholder 2"/>
+          <p:cNvSpPr>
+            <a:spLocks noGrp="1"/>
+          </p:cNvSpPr>
+          <p:nvPr>
+            <p:ph type="body" idx="3" sz="quarter"/>
+          </p:nvPr>
+        </p:nvSpPr>
+        <p:spPr/>
+        <p:txBody>
+          <a:bodyPr/>
+          <a:lstStyle/>
+          <a:p>
+            <a:r>
+              <a:t>【話す人へ】</a:t>
+            </a:r>
+          </a:p>
+          <a:p>
+            <a:r>
+              <a:t>・ここで一度、聴衆に挙手させると空気が変わる:</a:t>
+            </a:r>
+          </a:p>
+          <a:p>
+            <a:r>
+              <a:t>  「『夜になると遅い』という相談、受けたことある人?」</a:t>
+            </a:r>
+          </a:p>
+          <a:p>
+            <a:r>
+              <a:t>・「社内も IPv6 にするんですか?」は必ず聞かれる。**先に自分から言っておくこと。**</a:t>
+            </a:r>
+          </a:p>
+          <a:p>
+            <a:r>
+              <a:t>・「将来も IPv6 化しない」とは言わない。今回の案件でやらないだけ、と締める。</a:t>
+            </a:r>
+          </a:p>
+        </p:txBody>
+      </p:sp>
+      <p:sp>
+        <p:nvSpPr>
+          <p:cNvPr id="4" name="Slide Number Placeholder 3"/>
+          <p:cNvSpPr>
+            <a:spLocks noGrp="1"/>
+          </p:cNvSpPr>
+          <p:nvPr>
+            <p:ph type="sldNum" idx="5" sz="quarter"/>
+          </p:nvPr>
+        </p:nvSpPr>
+        <p:spPr/>
+      </p:sp>
+    </p:spTree>
+  </p:cSld>
+  <p:clrMapOvr>
+    <a:masterClrMapping/>
+  </p:clrMapOvr>
+</p:notes>
+</file>
+
+<file path=ppt/notesSlides/notesSlide4.xml><?xml version="1.0" encoding="utf-8"?>
+<p:notes xmlns:a="http://schemas.openxmlformats.org/drawingml/2006/main" xmlns:p="http://schemas.openxmlformats.org/presentationml/2006/main" xmlns:r="http://schemas.openxmlformats.org/officeDocument/2006/relationships">
+  <p:cSld>
+    <p:spTree>
+      <p:nvGrpSpPr>
+        <p:cNvPr id="1" name=""/>
+        <p:cNvGrpSpPr/>
+        <p:nvPr/>
+      </p:nvGrpSpPr>
+      <p:grpSpPr>
+        <a:xfrm>
+          <a:off x="0" y="0"/>
+          <a:ext cx="0" cy="0"/>
+          <a:chOff x="0" y="0"/>
+          <a:chExt cx="0" cy="0"/>
+        </a:xfrm>
+      </p:grpSpPr>
+      <p:sp>
+        <p:nvSpPr>
+          <p:cNvPr id="2" name="Slide Image Placeholder 1"/>
+          <p:cNvSpPr>
+            <a:spLocks noGrp="1"/>
+          </p:cNvSpPr>
+          <p:nvPr>
+            <p:ph type="sldImg" idx="2"/>
+          </p:nvPr>
+        </p:nvSpPr>
+        <p:spPr/>
+      </p:sp>
+      <p:sp>
+        <p:nvSpPr>
+          <p:cNvPr id="3" name="Notes Placeholder 2"/>
+          <p:cNvSpPr>
+            <a:spLocks noGrp="1"/>
+          </p:cNvSpPr>
+          <p:nvPr>
+            <p:ph type="body" idx="3" sz="quarter"/>
+          </p:nvPr>
+        </p:nvSpPr>
+        <p:spPr/>
+        <p:txBody>
+          <a:bodyPr/>
+          <a:lstStyle/>
+          <a:p>
+            <a:r>
+              <a:t>【話す人へ】</a:t>
+            </a:r>
+          </a:p>
+          <a:p>
+            <a:r>
+              <a:t>・**この表は覚えさせない。**「引く表です」と言い切って、印刷して持ち歩くよう勧める。</a:t>
+            </a:r>
+          </a:p>
+          <a:p>
+            <a:r>
+              <a:t>・1 問だけ指名なしで投げると定着する:「では OCN バーチャルコネクト、ポート開放は?」</a:t>
+            </a:r>
+          </a:p>
+          <a:p>
+            <a:r>
+              <a:t>・次ページで自社の事故 (2 回失敗) を出すので、ここでは深追いしない。</a:t>
+            </a:r>
+          </a:p>
+        </p:txBody>
+      </p:sp>
+      <p:sp>
+        <p:nvSpPr>
+          <p:cNvPr id="4" name="Slide Number Placeholder 3"/>
+          <p:cNvSpPr>
+            <a:spLocks noGrp="1"/>
+          </p:cNvSpPr>
+          <p:nvPr>
+            <p:ph type="sldNum" idx="5" sz="quarter"/>
+          </p:nvPr>
+        </p:nvSpPr>
+        <p:spPr/>
+      </p:sp>
+    </p:spTree>
+  </p:cSld>
+  <p:clrMapOvr>
+    <a:masterClrMapping/>
+  </p:clrMapOvr>
+</p:notes>
+</file>
+
+<file path=ppt/notesSlides/notesSlide5.xml><?xml version="1.0" encoding="utf-8"?>
+<p:notes xmlns:a="http://schemas.openxmlformats.org/drawingml/2006/main" xmlns:p="http://schemas.openxmlformats.org/presentationml/2006/main" xmlns:r="http://schemas.openxmlformats.org/officeDocument/2006/relationships">
+  <p:cSld>
+    <p:spTree>
+      <p:nvGrpSpPr>
+        <p:cNvPr id="1" name=""/>
+        <p:cNvGrpSpPr/>
+        <p:nvPr/>
+      </p:nvGrpSpPr>
+      <p:grpSpPr>
+        <a:xfrm>
+          <a:off x="0" y="0"/>
+          <a:ext cx="0" cy="0"/>
+          <a:chOff x="0" y="0"/>
+          <a:chExt cx="0" cy="0"/>
+        </a:xfrm>
+      </p:grpSpPr>
+      <p:sp>
+        <p:nvSpPr>
+          <p:cNvPr id="2" name="Slide Image Placeholder 1"/>
+          <p:cNvSpPr>
+            <a:spLocks noGrp="1"/>
+          </p:cNvSpPr>
+          <p:nvPr>
+            <p:ph type="sldImg" idx="2"/>
+          </p:nvPr>
+        </p:nvSpPr>
+        <p:spPr/>
+      </p:sp>
+      <p:sp>
+        <p:nvSpPr>
+          <p:cNvPr id="3" name="Notes Placeholder 2"/>
+          <p:cNvSpPr>
+            <a:spLocks noGrp="1"/>
+          </p:cNvSpPr>
+          <p:nvPr>
+            <p:ph type="body" idx="3" sz="quarter"/>
+          </p:nvPr>
+        </p:nvSpPr>
+        <p:spPr/>
+        <p:txBody>
+          <a:bodyPr/>
+          <a:lstStyle/>
+          <a:p>
+            <a:r>
+              <a:t>【話す人へ】</a:t>
+            </a:r>
+          </a:p>
+          <a:p>
+            <a:r>
+              <a:t>・**表を出す前に 30 秒だけ問いかけると定着が変わる。**</a:t>
+            </a:r>
+          </a:p>
+          <a:p>
+            <a:r>
+              <a:t>  「transix のお客様から『事務所のカメラを外から見たい』と言われました。できますか?」</a:t>
+            </a:r>
+          </a:p>
+          <a:p>
+            <a:r>
+              <a:t>  「隣と 10 秒相談してください」→ そのあと答え合わせとして表を出す。</a:t>
+            </a:r>
+          </a:p>
+          <a:p>
+            <a:r>
+              <a:t>・ここが今日の到達目標。**このページだけは絶対に巻かないこと。**</a:t>
+            </a:r>
+          </a:p>
+        </p:txBody>
+      </p:sp>
+      <p:sp>
+        <p:nvSpPr>
+          <p:cNvPr id="4" name="Slide Number Placeholder 3"/>
+          <p:cNvSpPr>
+            <a:spLocks noGrp="1"/>
+          </p:cNvSpPr>
+          <p:nvPr>
+            <p:ph type="sldNum" idx="5" sz="quarter"/>
+          </p:nvPr>
+        </p:nvSpPr>
+        <p:spPr/>
+      </p:sp>
+    </p:spTree>
+  </p:cSld>
+  <p:clrMapOvr>
+    <a:masterClrMapping/>
+  </p:clrMapOvr>
+</p:notes>
 </file>
 
 <file path=ppt/slideLayouts/slideLayout1.xml><?xml version="1.0" encoding="utf-8"?>
@@ -11349,7 +12149,7 @@
                 </a:solidFill>
                 <a:latin typeface="Meiryo UI"/>
               </a:rPr>
-              <a:t>そもそもポート開放 = 「外から来た通信を、社内のこの機械に通してください」というルータへの指示。2-3 の「伝票番号」の話です</a:t>
+              <a:t>そもそもポート開放 = 「外から来た通信を、社内のこの機械に通してください」というルータへの指示</a:t>
             </a:r>
           </a:p>
         </p:txBody>
@@ -15488,7 +16288,7 @@
                 </a:solidFill>
                 <a:latin typeface="Meiryo UI"/>
               </a:rPr>
-              <a:t>話す人へ: このページは読み上げないこと。「分からなくなったらここに戻ります」とだけ言って 30 秒で次へ</a:t>
+              <a:t>分からなくなったら、このページに戻ってきてください</a:t>
             </a:r>
           </a:p>
         </p:txBody>
@@ -18329,4 +19129,324 @@
   </a:objectDefaults>
   <a:extraClrSchemeLst/>
 </a:theme>
+</file>
+
+<file path=ppt/theme/theme2.xml><?xml version="1.0" encoding="utf-8"?>
+<a:theme xmlns:a="http://schemas.openxmlformats.org/drawingml/2006/main" name="Office Theme">
+  <a:themeElements>
+    <a:clrScheme name="Office">
+      <a:dk1>
+        <a:sysClr val="windowText" lastClr="000000"/>
+      </a:dk1>
+      <a:lt1>
+        <a:sysClr val="window" lastClr="FFFFFF"/>
+      </a:lt1>
+      <a:dk2>
+        <a:srgbClr val="1F497D"/>
+      </a:dk2>
+      <a:lt2>
+        <a:srgbClr val="EEECE1"/>
+      </a:lt2>
+      <a:accent1>
+        <a:srgbClr val="4F81BD"/>
+      </a:accent1>
+      <a:accent2>
+        <a:srgbClr val="C0504D"/>
+      </a:accent2>
+      <a:accent3>
+        <a:srgbClr val="9BBB59"/>
+      </a:accent3>
+      <a:accent4>
+        <a:srgbClr val="8064A2"/>
+      </a:accent4>
+      <a:accent5>
+        <a:srgbClr val="4BACC6"/>
+      </a:accent5>
+      <a:accent6>
+        <a:srgbClr val="F79646"/>
+      </a:accent6>
+      <a:hlink>
+        <a:srgbClr val="0000FF"/>
+      </a:hlink>
+      <a:folHlink>
+        <a:srgbClr val="800080"/>
+      </a:folHlink>
+    </a:clrScheme>
+    <a:fontScheme name="Office">
+      <a:majorFont>
+        <a:latin typeface="Calibri"/>
+        <a:ea typeface=""/>
+        <a:cs typeface=""/>
+        <a:font script="Jpan" typeface="ＭＳ Ｐゴシック"/>
+        <a:font script="Hang" typeface="맑은 고딕"/>
+        <a:font script="Hans" typeface="宋体"/>
+        <a:font script="Hant" typeface="新細明體"/>
+        <a:font script="Arab" typeface="Times New Roman"/>
+        <a:font script="Hebr" typeface="Times New Roman"/>
+        <a:font script="Thai" typeface="Angsana New"/>
+        <a:font script="Ethi" typeface="Nyala"/>
+        <a:font script="Beng" typeface="Vrinda"/>
+        <a:font script="Gujr" typeface="Shruti"/>
+        <a:font script="Khmr" typeface="MoolBoran"/>
+        <a:font script="Knda" typeface="Tunga"/>
+        <a:font script="Guru" typeface="Raavi"/>
+        <a:font script="Cans" typeface="Euphemia"/>
+        <a:font script="Cher" typeface="Plantagenet Cherokee"/>
+        <a:font script="Yiii" typeface="Microsoft Yi Baiti"/>
+        <a:font script="Tibt" typeface="Microsoft Himalaya"/>
+        <a:font script="Thaa" typeface="MV Boli"/>
+        <a:font script="Deva" typeface="Mangal"/>
+        <a:font script="Telu" typeface="Gautami"/>
+        <a:font script="Taml" typeface="Latha"/>
+        <a:font script="Syrc" typeface="Estrangelo Edessa"/>
+        <a:font script="Orya" typeface="Kalinga"/>
+        <a:font script="Mlym" typeface="Kartika"/>
+        <a:font script="Laoo" typeface="DokChampa"/>
+        <a:font script="Sinh" typeface="Iskoola Pota"/>
+        <a:font script="Mong" typeface="Mongolian Baiti"/>
+        <a:font script="Viet" typeface="Times New Roman"/>
+        <a:font script="Uigh" typeface="Microsoft Uighur"/>
+        <a:font script="Geor" typeface="Sylfaen"/>
+      </a:majorFont>
+      <a:minorFont>
+        <a:latin typeface="Calibri"/>
+        <a:ea typeface=""/>
+        <a:cs typeface=""/>
+        <a:font script="Jpan" typeface="ＭＳ Ｐゴシック"/>
+        <a:font script="Hang" typeface="맑은 고딕"/>
+        <a:font script="Hans" typeface="宋体"/>
+        <a:font script="Hant" typeface="新細明體"/>
+        <a:font script="Arab" typeface="Arial"/>
+        <a:font script="Hebr" typeface="Arial"/>
+        <a:font script="Thai" typeface="Cordia New"/>
+        <a:font script="Ethi" typeface="Nyala"/>
+        <a:font script="Beng" typeface="Vrinda"/>
+        <a:font script="Gujr" typeface="Shruti"/>
+        <a:font script="Khmr" typeface="DaunPenh"/>
+        <a:font script="Knda" typeface="Tunga"/>
+        <a:font script="Guru" typeface="Raavi"/>
+        <a:font script="Cans" typeface="Euphemia"/>
+        <a:font script="Cher" typeface="Plantagenet Cherokee"/>
+        <a:font script="Yiii" typeface="Microsoft Yi Baiti"/>
+        <a:font script="Tibt" typeface="Microsoft Himalaya"/>
+        <a:font script="Thaa" typeface="MV Boli"/>
+        <a:font script="Deva" typeface="Mangal"/>
+        <a:font script="Telu" typeface="Gautami"/>
+        <a:font script="Taml" typeface="Latha"/>
+        <a:font script="Syrc" typeface="Estrangelo Edessa"/>
+        <a:font script="Orya" typeface="Kalinga"/>
+        <a:font script="Mlym" typeface="Kartika"/>
+        <a:font script="Laoo" typeface="DokChampa"/>
+        <a:font script="Sinh" typeface="Iskoola Pota"/>
+        <a:font script="Mong" typeface="Mongolian Baiti"/>
+        <a:font script="Viet" typeface="Arial"/>
+        <a:font script="Uigh" typeface="Microsoft Uighur"/>
+        <a:font script="Geor" typeface="Sylfaen"/>
+      </a:minorFont>
+    </a:fontScheme>
+    <a:fmtScheme name="Office">
+      <a:fillStyleLst>
+        <a:solidFill>
+          <a:schemeClr val="phClr"/>
+        </a:solidFill>
+        <a:gradFill rotWithShape="1">
+          <a:gsLst>
+            <a:gs pos="0">
+              <a:schemeClr val="phClr">
+                <a:tint val="50000"/>
+                <a:satMod val="300000"/>
+              </a:schemeClr>
+            </a:gs>
+            <a:gs pos="35000">
+              <a:schemeClr val="phClr">
+                <a:tint val="37000"/>
+                <a:satMod val="300000"/>
+              </a:schemeClr>
+            </a:gs>
+            <a:gs pos="100000">
+              <a:schemeClr val="phClr">
+                <a:tint val="15000"/>
+                <a:satMod val="350000"/>
+              </a:schemeClr>
+            </a:gs>
+          </a:gsLst>
+          <a:lin ang="16200000" scaled="1"/>
+        </a:gradFill>
+        <a:gradFill rotWithShape="1">
+          <a:gsLst>
+            <a:gs pos="0">
+              <a:schemeClr val="phClr">
+                <a:tint val="100000"/>
+                <a:shade val="100000"/>
+                <a:satMod val="130000"/>
+              </a:schemeClr>
+            </a:gs>
+            <a:gs pos="100000">
+              <a:schemeClr val="phClr">
+                <a:tint val="50000"/>
+                <a:shade val="100000"/>
+                <a:satMod val="350000"/>
+              </a:schemeClr>
+            </a:gs>
+          </a:gsLst>
+          <a:lin ang="16200000" scaled="0"/>
+        </a:gradFill>
+      </a:fillStyleLst>
+      <a:lnStyleLst>
+        <a:ln w="9525" cap="flat" cmpd="sng" algn="ctr">
+          <a:solidFill>
+            <a:schemeClr val="phClr">
+              <a:shade val="95000"/>
+              <a:satMod val="105000"/>
+            </a:schemeClr>
+          </a:solidFill>
+          <a:prstDash val="solid"/>
+        </a:ln>
+        <a:ln w="25400" cap="flat" cmpd="sng" algn="ctr">
+          <a:solidFill>
+            <a:schemeClr val="phClr"/>
+          </a:solidFill>
+          <a:prstDash val="solid"/>
+        </a:ln>
+        <a:ln w="38100" cap="flat" cmpd="sng" algn="ctr">
+          <a:solidFill>
+            <a:schemeClr val="phClr"/>
+          </a:solidFill>
+          <a:prstDash val="solid"/>
+        </a:ln>
+      </a:lnStyleLst>
+      <a:effectStyleLst>
+        <a:effectStyle>
+          <a:effectLst>
+            <a:outerShdw blurRad="40000" dist="20000" dir="5400000" rotWithShape="0">
+              <a:srgbClr val="000000">
+                <a:alpha val="38000"/>
+              </a:srgbClr>
+            </a:outerShdw>
+          </a:effectLst>
+        </a:effectStyle>
+        <a:effectStyle>
+          <a:effectLst>
+            <a:outerShdw blurRad="40000" dist="23000" dir="5400000" rotWithShape="0">
+              <a:srgbClr val="000000">
+                <a:alpha val="35000"/>
+              </a:srgbClr>
+            </a:outerShdw>
+          </a:effectLst>
+        </a:effectStyle>
+        <a:effectStyle>
+          <a:effectLst>
+            <a:outerShdw blurRad="40000" dist="23000" dir="5400000" rotWithShape="0">
+              <a:srgbClr val="000000">
+                <a:alpha val="35000"/>
+              </a:srgbClr>
+            </a:outerShdw>
+          </a:effectLst>
+          <a:scene3d>
+            <a:camera prst="orthographicFront">
+              <a:rot lat="0" lon="0" rev="0"/>
+            </a:camera>
+            <a:lightRig rig="threePt" dir="t">
+              <a:rot lat="0" lon="0" rev="1200000"/>
+            </a:lightRig>
+          </a:scene3d>
+          <a:sp3d>
+            <a:bevelT w="63500" h="25400"/>
+          </a:sp3d>
+        </a:effectStyle>
+      </a:effectStyleLst>
+      <a:bgFillStyleLst>
+        <a:solidFill>
+          <a:schemeClr val="phClr"/>
+        </a:solidFill>
+        <a:gradFill rotWithShape="1">
+          <a:gsLst>
+            <a:gs pos="0">
+              <a:schemeClr val="phClr">
+                <a:tint val="40000"/>
+                <a:satMod val="350000"/>
+              </a:schemeClr>
+            </a:gs>
+            <a:gs pos="40000">
+              <a:schemeClr val="phClr">
+                <a:tint val="45000"/>
+                <a:shade val="99000"/>
+                <a:satMod val="350000"/>
+              </a:schemeClr>
+            </a:gs>
+            <a:gs pos="100000">
+              <a:schemeClr val="phClr">
+                <a:shade val="20000"/>
+                <a:satMod val="255000"/>
+              </a:schemeClr>
+            </a:gs>
+          </a:gsLst>
+          <a:path path="circle">
+            <a:fillToRect l="50000" t="-80000" r="50000" b="180000"/>
+          </a:path>
+        </a:gradFill>
+        <a:gradFill rotWithShape="1">
+          <a:gsLst>
+            <a:gs pos="0">
+              <a:schemeClr val="phClr">
+                <a:tint val="80000"/>
+                <a:satMod val="300000"/>
+              </a:schemeClr>
+            </a:gs>
+            <a:gs pos="100000">
+              <a:schemeClr val="phClr">
+                <a:shade val="30000"/>
+                <a:satMod val="200000"/>
+              </a:schemeClr>
+            </a:gs>
+          </a:gsLst>
+          <a:path path="circle">
+            <a:fillToRect l="50000" t="50000" r="50000" b="50000"/>
+          </a:path>
+        </a:gradFill>
+      </a:bgFillStyleLst>
+    </a:fmtScheme>
+  </a:themeElements>
+  <a:objectDefaults>
+    <a:spDef>
+      <a:spPr/>
+      <a:bodyPr/>
+      <a:lstStyle/>
+      <a:style>
+        <a:lnRef idx="1">
+          <a:schemeClr val="accent1"/>
+        </a:lnRef>
+        <a:fillRef idx="3">
+          <a:schemeClr val="accent1"/>
+        </a:fillRef>
+        <a:effectRef idx="2">
+          <a:schemeClr val="accent1"/>
+        </a:effectRef>
+        <a:fontRef idx="minor">
+          <a:schemeClr val="lt1"/>
+        </a:fontRef>
+      </a:style>
+    </a:spDef>
+    <a:lnDef>
+      <a:spPr/>
+      <a:bodyPr/>
+      <a:lstStyle/>
+      <a:style>
+        <a:lnRef idx="2">
+          <a:schemeClr val="accent1"/>
+        </a:lnRef>
+        <a:fillRef idx="0">
+          <a:schemeClr val="accent1"/>
+        </a:fillRef>
+        <a:effectRef idx="1">
+          <a:schemeClr val="accent1"/>
+        </a:effectRef>
+        <a:fontRef idx="minor">
+          <a:schemeClr val="tx1"/>
+        </a:fontRef>
+      </a:style>
+    </a:lnDef>
+  </a:objectDefaults>
+  <a:extraClrSchemeLst/>
+</a:theme>
 </file>
--- a/docs/ipoe-lab/slides/setsumeikai.pptx
+++ b/docs/ipoe-lab/slides/setsumeikai.pptx
@@ -46,6 +46,7 @@
     <p:sldId id="294" r:id="rId46"/>
     <p:sldId id="295" r:id="rId47"/>
     <p:sldId id="296" r:id="rId48"/>
+    <p:sldId id="297" r:id="rId49"/>
   </p:sldIdLst>
   <p:sldSz cx="12191695" cy="6858000" type="screen4x3"/>
   <p:notesSz cx="6858000" cy="9144000"/>
@@ -923,6 +924,86 @@
           <a:p>
             <a:r>
               <a:t>・ここが今日の到達目標。**このページだけは絶対に巻かないこと。**</a:t>
+            </a:r>
+          </a:p>
+        </p:txBody>
+      </p:sp>
+      <p:sp>
+        <p:nvSpPr>
+          <p:cNvPr id="4" name="Slide Number Placeholder 3"/>
+          <p:cNvSpPr>
+            <a:spLocks noGrp="1"/>
+          </p:cNvSpPr>
+          <p:nvPr>
+            <p:ph type="sldNum" idx="5" sz="quarter"/>
+          </p:nvPr>
+        </p:nvSpPr>
+        <p:spPr/>
+      </p:sp>
+    </p:spTree>
+  </p:cSld>
+  <p:clrMapOvr>
+    <a:masterClrMapping/>
+  </p:clrMapOvr>
+</p:notes>
+</file>
+
+<file path=ppt/notesSlides/notesSlide6.xml><?xml version="1.0" encoding="utf-8"?>
+<p:notes xmlns:a="http://schemas.openxmlformats.org/drawingml/2006/main" xmlns:p="http://schemas.openxmlformats.org/presentationml/2006/main" xmlns:r="http://schemas.openxmlformats.org/officeDocument/2006/relationships">
+  <p:cSld>
+    <p:spTree>
+      <p:nvGrpSpPr>
+        <p:cNvPr id="1" name=""/>
+        <p:cNvGrpSpPr/>
+        <p:nvPr/>
+      </p:nvGrpSpPr>
+      <p:grpSpPr>
+        <a:xfrm>
+          <a:off x="0" y="0"/>
+          <a:ext cx="0" cy="0"/>
+          <a:chOff x="0" y="0"/>
+          <a:chExt cx="0" cy="0"/>
+        </a:xfrm>
+      </p:grpSpPr>
+      <p:sp>
+        <p:nvSpPr>
+          <p:cNvPr id="2" name="Slide Image Placeholder 1"/>
+          <p:cNvSpPr>
+            <a:spLocks noGrp="1"/>
+          </p:cNvSpPr>
+          <p:nvPr>
+            <p:ph type="sldImg" idx="2"/>
+          </p:nvPr>
+        </p:nvSpPr>
+        <p:spPr/>
+      </p:sp>
+      <p:sp>
+        <p:nvSpPr>
+          <p:cNvPr id="3" name="Notes Placeholder 2"/>
+          <p:cNvSpPr>
+            <a:spLocks noGrp="1"/>
+          </p:cNvSpPr>
+          <p:nvPr>
+            <p:ph type="body" idx="3" sz="quarter"/>
+          </p:nvPr>
+        </p:nvSpPr>
+        <p:spPr/>
+        <p:txBody>
+          <a:bodyPr/>
+          <a:lstStyle/>
+          <a:p>
+            <a:r>
+              <a:t>【話す人へ】</a:t>
+            </a:r>
+          </a:p>
+          <a:p>
+            <a:r>
+              <a:t>・全部を説明しないこと。**「箱がたくさんあるが、要は網と VNE を自分で作った」**で十分。</a:t>
+            </a:r>
+          </a:p>
+          <a:p>
+            <a:r>
+              <a:t>・図の一番下 (方式ごとの経路と出口アドレス) だけは指差して読むこと。第3部の伏線になる。</a:t>
             </a:r>
           </a:p>
         </p:txBody>
@@ -13814,6 +13895,215 @@
         <p:nvPr/>
       </p:nvGrpSpPr>
       <p:grpSpPr/>
+      <p:pic>
+        <p:nvPicPr>
+          <p:cNvPr id="2" name="Picture 1" descr="topology.png"/>
+          <p:cNvPicPr>
+            <a:picLocks noChangeAspect="1"/>
+          </p:cNvPicPr>
+          <p:nvPr/>
+        </p:nvPicPr>
+        <p:blipFill>
+          <a:blip r:embed="rId2"/>
+          <a:stretch>
+            <a:fillRect/>
+          </a:stretch>
+        </p:blipFill>
+        <p:spPr>
+          <a:xfrm>
+            <a:off x="274320" y="228600"/>
+            <a:ext cx="7214461" cy="6400800"/>
+          </a:xfrm>
+          <a:prstGeom prst="rect">
+            <a:avLst/>
+          </a:prstGeom>
+        </p:spPr>
+      </p:pic>
+      <p:sp>
+        <p:nvSpPr>
+          <p:cNvPr id="3" name="TextBox 2"/>
+          <p:cNvSpPr txBox="1"/>
+          <p:nvPr/>
+        </p:nvSpPr>
+        <p:spPr>
+          <a:xfrm>
+            <a:off x="7763101" y="548640"/>
+            <a:ext cx="4124098" cy="5760720"/>
+          </a:xfrm>
+          <a:prstGeom prst="rect">
+            <a:avLst/>
+          </a:prstGeom>
+          <a:noFill/>
+        </p:spPr>
+        <p:txBody>
+          <a:bodyPr wrap="square">
+            <a:spAutoFit/>
+          </a:bodyPr>
+          <a:lstStyle/>
+          <a:p>
+            <a:pPr algn="l">
+              <a:spcAft>
+                <a:spcPts val="800"/>
+              </a:spcAft>
+            </a:pPr>
+            <a:r>
+              <a:rPr sz="1500" b="1">
+                <a:solidFill>
+                  <a:srgbClr val="1F3355"/>
+                </a:solidFill>
+                <a:latin typeface="Meiryo UI"/>
+              </a:rPr>
+              <a:t>何を再現しているのか</a:t>
+            </a:r>
+          </a:p>
+          <a:p>
+            <a:pPr lvl="1" algn="l">
+              <a:spcAft>
+                <a:spcPts val="500"/>
+              </a:spcAft>
+            </a:pPr>
+            <a:r>
+              <a:rPr sz="1300" b="0">
+                <a:solidFill>
+                  <a:srgbClr val="555555"/>
+                </a:solidFill>
+                <a:latin typeface="Meiryo UI"/>
+              </a:rPr>
+              <a:t>NTT の網 (NGN)、ISP の PPPoE 終端、VNE、インターネット</a:t>
+            </a:r>
+          </a:p>
+          <a:p>
+            <a:pPr lvl="1" algn="l">
+              <a:spcAft>
+                <a:spcPts val="500"/>
+              </a:spcAft>
+            </a:pPr>
+            <a:r>
+              <a:rPr sz="1300" b="0">
+                <a:solidFill>
+                  <a:srgbClr val="555555"/>
+                </a:solidFill>
+                <a:latin typeface="Meiryo UI"/>
+              </a:rPr>
+              <a:t>全部 Linux VM です。実機の CPE も物理 NIC で繋げます</a:t>
+            </a:r>
+          </a:p>
+          <a:p>
+            <a:pPr algn="l">
+              <a:spcAft>
+                <a:spcPts val="800"/>
+              </a:spcAft>
+            </a:pPr>
+            <a:r>
+              <a:rPr sz="1500" b="1">
+                <a:solidFill>
+                  <a:srgbClr val="1F3355"/>
+                </a:solidFill>
+                <a:latin typeface="Meiryo UI"/>
+              </a:rPr>
+              <a:t>アドレスは全部ドキュメント用です</a:t>
+            </a:r>
+          </a:p>
+          <a:p>
+            <a:pPr lvl="1" algn="l">
+              <a:spcAft>
+                <a:spcPts val="500"/>
+              </a:spcAft>
+            </a:pPr>
+            <a:r>
+              <a:rPr sz="1300" b="0">
+                <a:solidFill>
+                  <a:srgbClr val="555555"/>
+                </a:solidFill>
+                <a:latin typeface="Meiryo UI"/>
+              </a:rPr>
+              <a:t>2001:db8::/32 / 198.51.100.0/24 / 203.0.113.0/24</a:t>
+            </a:r>
+          </a:p>
+          <a:p>
+            <a:pPr lvl="1" algn="l">
+              <a:spcAft>
+                <a:spcPts val="500"/>
+              </a:spcAft>
+            </a:pPr>
+            <a:r>
+              <a:rPr sz="1300" b="0">
+                <a:solidFill>
+                  <a:srgbClr val="555555"/>
+                </a:solidFill>
+                <a:latin typeface="Meiryo UI"/>
+              </a:rPr>
+              <a:t>本物の誰かに迷惑をかけない設計にしてあります</a:t>
+            </a:r>
+          </a:p>
+          <a:p>
+            <a:pPr algn="l">
+              <a:spcAft>
+                <a:spcPts val="800"/>
+              </a:spcAft>
+            </a:pPr>
+            <a:r>
+              <a:rPr sz="1500" b="1">
+                <a:solidFill>
+                  <a:srgbClr val="C0392B"/>
+                </a:solidFill>
+                <a:latin typeface="Meiryo UI"/>
+              </a:rPr>
+              <a:t>図の一番下が今日の要点です</a:t>
+            </a:r>
+          </a:p>
+          <a:p>
+            <a:pPr lvl="1" algn="l">
+              <a:spcAft>
+                <a:spcPts val="500"/>
+              </a:spcAft>
+            </a:pPr>
+            <a:r>
+              <a:rPr sz="1300" b="0">
+                <a:solidFill>
+                  <a:srgbClr val="555555"/>
+                </a:solidFill>
+                <a:latin typeface="Meiryo UI"/>
+              </a:rPr>
+              <a:t>方式ごとに通る場所が違い、出口アドレスも違います</a:t>
+            </a:r>
+          </a:p>
+          <a:p>
+            <a:pPr lvl="1" algn="l">
+              <a:spcAft>
+                <a:spcPts val="500"/>
+              </a:spcAft>
+            </a:pPr>
+            <a:r>
+              <a:rPr sz="1300" b="0">
+                <a:solidFill>
+                  <a:srgbClr val="555555"/>
+                </a:solidFill>
+                <a:latin typeface="Meiryo UI"/>
+              </a:rPr>
+              <a:t>だから 出口アドレスを見れば経路が分かる のです</a:t>
+            </a:r>
+          </a:p>
+        </p:txBody>
+      </p:sp>
+    </p:spTree>
+  </p:cSld>
+  <p:clrMapOvr>
+    <a:masterClrMapping/>
+  </p:clrMapOvr>
+</p:sld>
+</file>
+
+<file path=ppt/slides/slide37.xml><?xml version="1.0" encoding="utf-8"?>
+<p:sld xmlns:a="http://schemas.openxmlformats.org/drawingml/2006/main" xmlns:p="http://schemas.openxmlformats.org/presentationml/2006/main" xmlns:r="http://schemas.openxmlformats.org/officeDocument/2006/relationships">
+  <p:cSld>
+    <p:spTree>
+      <p:nvGrpSpPr>
+        <p:cNvPr id="1" name=""/>
+        <p:cNvGrpSpPr/>
+        <p:nvPr/>
+      </p:nvGrpSpPr>
+      <p:grpSpPr/>
       <p:sp>
         <p:nvSpPr>
           <p:cNvPr id="2" name="TextBox 1"/>
@@ -14357,7 +14647,7 @@
 </p:sld>
 </file>
 
-<file path=ppt/slides/slide37.xml><?xml version="1.0" encoding="utf-8"?>
+<file path=ppt/slides/slide38.xml><?xml version="1.0" encoding="utf-8"?>
 <p:sld xmlns:a="http://schemas.openxmlformats.org/drawingml/2006/main" xmlns:p="http://schemas.openxmlformats.org/presentationml/2006/main" xmlns:r="http://schemas.openxmlformats.org/officeDocument/2006/relationships">
   <p:cSld>
     <p:spTree>
@@ -14759,7 +15049,7 @@
 </p:sld>
 </file>
 
-<file path=ppt/slides/slide38.xml><?xml version="1.0" encoding="utf-8"?>
+<file path=ppt/slides/slide39.xml><?xml version="1.0" encoding="utf-8"?>
 <p:sld xmlns:a="http://schemas.openxmlformats.org/drawingml/2006/main" xmlns:p="http://schemas.openxmlformats.org/presentationml/2006/main" xmlns:r="http://schemas.openxmlformats.org/officeDocument/2006/relationships">
   <p:cSld>
     <p:spTree>
@@ -15288,365 +15578,6 @@
                 <a:latin typeface="Meiryo UI"/>
               </a:rPr>
               <a:t>一番大事なのは 1 行目。ping が通っただけでは「たまたま届いた」かもしれません</a:t>
-            </a:r>
-          </a:p>
-        </p:txBody>
-      </p:sp>
-    </p:spTree>
-  </p:cSld>
-  <p:clrMapOvr>
-    <a:masterClrMapping/>
-  </p:clrMapOvr>
-</p:sld>
-</file>
-
-<file path=ppt/slides/slide39.xml><?xml version="1.0" encoding="utf-8"?>
-<p:sld xmlns:a="http://schemas.openxmlformats.org/drawingml/2006/main" xmlns:p="http://schemas.openxmlformats.org/presentationml/2006/main" xmlns:r="http://schemas.openxmlformats.org/officeDocument/2006/relationships">
-  <p:cSld>
-    <p:spTree>
-      <p:nvGrpSpPr>
-        <p:cNvPr id="1" name=""/>
-        <p:cNvGrpSpPr/>
-        <p:nvPr/>
-      </p:nvGrpSpPr>
-      <p:grpSpPr/>
-      <p:sp>
-        <p:nvSpPr>
-          <p:cNvPr id="2" name="TextBox 1"/>
-          <p:cNvSpPr txBox="1"/>
-          <p:nvPr/>
-        </p:nvSpPr>
-        <p:spPr>
-          <a:xfrm>
-            <a:off x="502920" y="320040"/>
-            <a:ext cx="11155680" cy="822960"/>
-          </a:xfrm>
-          <a:prstGeom prst="rect">
-            <a:avLst/>
-          </a:prstGeom>
-          <a:noFill/>
-        </p:spPr>
-        <p:txBody>
-          <a:bodyPr wrap="square">
-            <a:spAutoFit/>
-          </a:bodyPr>
-          <a:lstStyle/>
-          <a:p>
-            <a:pPr algn="l"/>
-            <a:r>
-              <a:rPr sz="2800" b="1">
-                <a:solidFill>
-                  <a:srgbClr val="1F3355"/>
-                </a:solidFill>
-                <a:latin typeface="Meiryo UI"/>
-              </a:rPr>
-              <a:t>やってみて分かった「効かない直感」3 つ</a:t>
-            </a:r>
-          </a:p>
-        </p:txBody>
-      </p:sp>
-      <p:sp>
-        <p:nvSpPr>
-          <p:cNvPr id="3" name="Rectangle 2"/>
-          <p:cNvSpPr/>
-          <p:nvPr/>
-        </p:nvSpPr>
-        <p:spPr>
-          <a:xfrm>
-            <a:off x="502920" y="1115568"/>
-            <a:ext cx="11155680" cy="31750"/>
-          </a:xfrm>
-          <a:prstGeom prst="rect">
-            <a:avLst/>
-          </a:prstGeom>
-          <a:solidFill>
-            <a:srgbClr val="007ACC"/>
-          </a:solidFill>
-          <a:ln>
-            <a:noFill/>
-          </a:ln>
-        </p:spPr>
-        <p:style>
-          <a:lnRef idx="1">
-            <a:schemeClr val="accent1"/>
-          </a:lnRef>
-          <a:fillRef idx="3">
-            <a:schemeClr val="accent1"/>
-          </a:fillRef>
-          <a:effectRef idx="2">
-            <a:schemeClr val="accent1"/>
-          </a:effectRef>
-          <a:fontRef idx="minor">
-            <a:schemeClr val="lt1"/>
-          </a:fontRef>
-        </p:style>
-        <p:txBody>
-          <a:bodyPr rtlCol="0" anchor="ctr"/>
-          <a:lstStyle/>
-          <a:p>
-            <a:pPr algn="ctr"/>
-          </a:p>
-        </p:txBody>
-      </p:sp>
-      <p:sp>
-        <p:nvSpPr>
-          <p:cNvPr id="4" name="TextBox 3"/>
-          <p:cNvSpPr txBox="1"/>
-          <p:nvPr/>
-        </p:nvSpPr>
-        <p:spPr>
-          <a:xfrm>
-            <a:off x="594360" y="1371600"/>
-            <a:ext cx="10972800" cy="4983480"/>
-          </a:xfrm>
-          <a:prstGeom prst="rect">
-            <a:avLst/>
-          </a:prstGeom>
-          <a:noFill/>
-        </p:spPr>
-        <p:txBody>
-          <a:bodyPr wrap="square">
-            <a:spAutoFit/>
-          </a:bodyPr>
-          <a:lstStyle/>
-          <a:p>
-            <a:pPr algn="l">
-              <a:spcAft>
-                <a:spcPts val="800"/>
-              </a:spcAft>
-            </a:pPr>
-            <a:r>
-              <a:rPr sz="1800" b="1">
-                <a:solidFill>
-                  <a:srgbClr val="1F3355"/>
-                </a:solidFill>
-                <a:latin typeface="Meiryo UI"/>
-              </a:rPr>
-              <a:t>この 3 つは、教科書を読んだだけでは絶対に気づけませんでした</a:t>
-            </a:r>
-          </a:p>
-          <a:p>
-            <a:pPr algn="l">
-              <a:spcAft>
-                <a:spcPts val="800"/>
-              </a:spcAft>
-            </a:pPr>
-            <a:r>
-              <a:rPr sz="1800" b="1">
-                <a:solidFill>
-                  <a:srgbClr val="1F3355"/>
-                </a:solidFill>
-                <a:latin typeface="Meiryo UI"/>
-              </a:rPr>
-              <a:t>① 「疎通した」は「正しい経路を通った」ではない</a:t>
-            </a:r>
-          </a:p>
-          <a:p>
-            <a:pPr lvl="1" algn="l">
-              <a:spcAft>
-                <a:spcPts val="400"/>
-              </a:spcAft>
-            </a:pPr>
-            <a:r>
-              <a:rPr sz="1500" b="0">
-                <a:solidFill>
-                  <a:srgbClr val="555555"/>
-                </a:solidFill>
-                <a:latin typeface="Meiryo UI"/>
-              </a:rPr>
-              <a:t>検証スクリプトが全項目 PASS したのに、経路が間違っていたことがありました</a:t>
-            </a:r>
-          </a:p>
-          <a:p>
-            <a:pPr lvl="1" algn="l">
-              <a:spcAft>
-                <a:spcPts val="400"/>
-              </a:spcAft>
-            </a:pPr>
-            <a:r>
-              <a:rPr sz="1500" b="0">
-                <a:solidFill>
-                  <a:srgbClr val="555555"/>
-                </a:solidFill>
-                <a:latin typeface="Meiryo UI"/>
-              </a:rPr>
-              <a:t>構成を誤った DS-Lite で PASS=10。出口を見たらクライアントの私設アドレスのままだった</a:t>
-            </a:r>
-          </a:p>
-          <a:p>
-            <a:pPr lvl="1" algn="l">
-              <a:spcAft>
-                <a:spcPts val="400"/>
-              </a:spcAft>
-            </a:pPr>
-            <a:r>
-              <a:rPr sz="1500" b="0">
-                <a:solidFill>
-                  <a:srgbClr val="555555"/>
-                </a:solidFill>
-                <a:latin typeface="Meiryo UI"/>
-              </a:rPr>
-              <a:t>ping も curl も成功するので、見た目では絶対に分かりません</a:t>
-            </a:r>
-          </a:p>
-          <a:p>
-            <a:pPr lvl="1" algn="l">
-              <a:spcAft>
-                <a:spcPts val="400"/>
-              </a:spcAft>
-            </a:pPr>
-            <a:r>
-              <a:rPr sz="1500" b="1">
-                <a:solidFill>
-                  <a:srgbClr val="C0392B"/>
-                </a:solidFill>
-                <a:latin typeface="Meiryo UI"/>
-              </a:rPr>
-              <a:t>→ 必ず「出口のアドレス」を確認する。これだけが唯一の証拠です</a:t>
-            </a:r>
-          </a:p>
-          <a:p>
-            <a:pPr algn="l">
-              <a:spcAft>
-                <a:spcPts val="800"/>
-              </a:spcAft>
-            </a:pPr>
-            <a:r>
-              <a:rPr sz="1800" b="1">
-                <a:solidFill>
-                  <a:srgbClr val="1F3355"/>
-                </a:solidFill>
-                <a:latin typeface="Meiryo UI"/>
-              </a:rPr>
-              <a:t>② 設定が入ることと、動くことは別物</a:t>
-            </a:r>
-          </a:p>
-          <a:p>
-            <a:pPr lvl="1" algn="l">
-              <a:spcAft>
-                <a:spcPts val="400"/>
-              </a:spcAft>
-            </a:pPr>
-            <a:r>
-              <a:rPr sz="1500" b="0">
-                <a:solidFill>
-                  <a:srgbClr val="555555"/>
-                </a:solidFill>
-                <a:latin typeface="Meiryo UI"/>
-              </a:rPr>
-              <a:t>Cisco の仮想ルータで MAP-E を試したら、設定は通り確認コマンドも正しい値を返した</a:t>
-            </a:r>
-          </a:p>
-          <a:p>
-            <a:pPr lvl="1" algn="l">
-              <a:spcAft>
-                <a:spcPts val="400"/>
-              </a:spcAft>
-            </a:pPr>
-            <a:r>
-              <a:rPr sz="1500" b="0">
-                <a:solidFill>
-                  <a:srgbClr val="555555"/>
-                </a:solidFill>
-                <a:latin typeface="Meiryo UI"/>
-              </a:rPr>
-              <a:t>それなのにパケットが 1 つも流れなかった。実際にパケットを運ぶ部分が落ちていました</a:t>
-            </a:r>
-          </a:p>
-          <a:p>
-            <a:pPr lvl="1" algn="l">
-              <a:spcAft>
-                <a:spcPts val="400"/>
-              </a:spcAft>
-            </a:pPr>
-            <a:r>
-              <a:rPr sz="1500" b="0">
-                <a:solidFill>
-                  <a:srgbClr val="555555"/>
-                </a:solidFill>
-                <a:latin typeface="Meiryo UI"/>
-              </a:rPr>
-              <a:t>※ 実機の Cisco で同じことが起きるかは確かめていません。仮想ルータでの話です</a:t>
-            </a:r>
-          </a:p>
-          <a:p>
-            <a:pPr lvl="1" algn="l">
-              <a:spcAft>
-                <a:spcPts val="400"/>
-              </a:spcAft>
-            </a:pPr>
-            <a:r>
-              <a:rPr sz="1500" b="1">
-                <a:solidFill>
-                  <a:srgbClr val="C0392B"/>
-                </a:solidFill>
-                <a:latin typeface="Meiryo UI"/>
-              </a:rPr>
-              <a:t>→ 確認コマンドで終わらせず、パケットを流して測るところまでやる</a:t>
-            </a:r>
-          </a:p>
-          <a:p>
-            <a:pPr algn="l">
-              <a:spcAft>
-                <a:spcPts val="800"/>
-              </a:spcAft>
-            </a:pPr>
-            <a:r>
-              <a:rPr sz="1800" b="1">
-                <a:solidFill>
-                  <a:srgbClr val="1F3355"/>
-                </a:solidFill>
-                <a:latin typeface="Meiryo UI"/>
-              </a:rPr>
-              <a:t>③ 症状が 1 つでも、原因は 1 つとは限らない</a:t>
-            </a:r>
-          </a:p>
-          <a:p>
-            <a:pPr lvl="1" algn="l">
-              <a:spcAft>
-                <a:spcPts val="400"/>
-              </a:spcAft>
-            </a:pPr>
-            <a:r>
-              <a:rPr sz="1500" b="0">
-                <a:solidFill>
-                  <a:srgbClr val="555555"/>
-                </a:solidFill>
-                <a:latin typeface="Meiryo UI"/>
-              </a:rPr>
-              <a:t>「ping は通るのに名前解決だけ死ぬ」を追ったら、独立した原因が 3 つ重なっていました</a:t>
-            </a:r>
-          </a:p>
-          <a:p>
-            <a:pPr lvl="1" algn="l">
-              <a:spcAft>
-                <a:spcPts val="400"/>
-              </a:spcAft>
-            </a:pPr>
-            <a:r>
-              <a:rPr sz="1500" b="0">
-                <a:solidFill>
-                  <a:srgbClr val="555555"/>
-                </a:solidFill>
-                <a:latin typeface="Meiryo UI"/>
-              </a:rPr>
-              <a:t>1 つ直しても直らないので「直したのに変わらない = 見当違い」と判断すると迷子になります</a:t>
-            </a:r>
-          </a:p>
-          <a:p>
-            <a:pPr lvl="1" algn="l">
-              <a:spcAft>
-                <a:spcPts val="400"/>
-              </a:spcAft>
-            </a:pPr>
-            <a:r>
-              <a:rPr sz="1500" b="1">
-                <a:solidFill>
-                  <a:srgbClr val="C0392B"/>
-                </a:solidFill>
-                <a:latin typeface="Meiryo UI"/>
-              </a:rPr>
-              <a:t>→ 1 つ直したら 1 つ確かめる。まとめて直さない</a:t>
             </a:r>
           </a:p>
         </p:txBody>
@@ -16341,7 +16272,7 @@
                 </a:solidFill>
                 <a:latin typeface="Meiryo UI"/>
               </a:rPr>
-              <a:t>まとめ — 3 行と、明日から使うチェックリスト</a:t>
+              <a:t>やってみて分かった「効かない直感」3 つ</a:t>
             </a:r>
           </a:p>
         </p:txBody>
@@ -16413,193 +16344,241 @@
           <a:p>
             <a:pPr algn="l">
               <a:spcAft>
-                <a:spcPts val="1000"/>
-              </a:spcAft>
-            </a:pPr>
-            <a:r>
-              <a:rPr sz="2000" b="1">
+                <a:spcPts val="800"/>
+              </a:spcAft>
+            </a:pPr>
+            <a:r>
+              <a:rPr sz="1800" b="1">
                 <a:solidFill>
                   <a:srgbClr val="1F3355"/>
                 </a:solidFill>
                 <a:latin typeface="Meiryo UI"/>
               </a:rPr>
-              <a:t>今日の話を 3 行にすると</a:t>
+              <a:t>この 3 つは、教科書を読んだだけでは絶対に気づけませんでした</a:t>
+            </a:r>
+          </a:p>
+          <a:p>
+            <a:pPr algn="l">
+              <a:spcAft>
+                <a:spcPts val="800"/>
+              </a:spcAft>
+            </a:pPr>
+            <a:r>
+              <a:rPr sz="1800" b="1">
+                <a:solidFill>
+                  <a:srgbClr val="1F3355"/>
+                </a:solidFill>
+                <a:latin typeface="Meiryo UI"/>
+              </a:rPr>
+              <a:t>① 「疎通した」は「正しい経路を通った」ではない</a:t>
             </a:r>
           </a:p>
           <a:p>
             <a:pPr lvl="1" algn="l">
               <a:spcAft>
-                <a:spcPts val="600"/>
-              </a:spcAft>
-            </a:pPr>
-            <a:r>
-              <a:rPr sz="1700" b="0">
+                <a:spcPts val="400"/>
+              </a:spcAft>
+            </a:pPr>
+            <a:r>
+              <a:rPr sz="1500" b="0">
                 <a:solidFill>
                   <a:srgbClr val="555555"/>
                 </a:solidFill>
                 <a:latin typeface="Meiryo UI"/>
               </a:rPr>
-              <a:t>① PPPoE が遅いから IPoE に変える。アドレス枯渇の話ではありません</a:t>
+              <a:t>検証スクリプトが全項目 PASS したのに、経路が間違っていたことがありました</a:t>
             </a:r>
           </a:p>
           <a:p>
             <a:pPr lvl="1" algn="l">
               <a:spcAft>
-                <a:spcPts val="600"/>
-              </a:spcAft>
-            </a:pPr>
-            <a:r>
-              <a:rPr sz="1700" b="0">
+                <a:spcPts val="400"/>
+              </a:spcAft>
+            </a:pPr>
+            <a:r>
+              <a:rPr sz="1500" b="0">
                 <a:solidFill>
                   <a:srgbClr val="555555"/>
                 </a:solidFill>
                 <a:latin typeface="Meiryo UI"/>
               </a:rPr>
-              <a:t>② 社内は IPv4 のまま。だから IPv4 を IPv6 に載せて運ぶ。それが MAP-E と DS-Lite</a:t>
+              <a:t>構成を誤った DS-Lite で PASS=10。出口を見たらクライアントの私設アドレスのままだった</a:t>
             </a:r>
           </a:p>
           <a:p>
             <a:pPr lvl="1" algn="l">
               <a:spcAft>
-                <a:spcPts val="600"/>
-              </a:spcAft>
-            </a:pPr>
-            <a:r>
-              <a:rPr sz="1700" b="0">
+                <a:spcPts val="400"/>
+              </a:spcAft>
+            </a:pPr>
+            <a:r>
+              <a:rPr sz="1500" b="0">
                 <a:solidFill>
                   <a:srgbClr val="555555"/>
                 </a:solidFill>
                 <a:latin typeface="Meiryo UI"/>
               </a:rPr>
-              <a:t>③ どちらになるかは選べない。VNE が決めています</a:t>
+              <a:t>ping も curl も成功するので、見た目では絶対に分かりません</a:t>
+            </a:r>
+          </a:p>
+          <a:p>
+            <a:pPr lvl="1" algn="l">
+              <a:spcAft>
+                <a:spcPts val="400"/>
+              </a:spcAft>
+            </a:pPr>
+            <a:r>
+              <a:rPr sz="1500" b="1">
+                <a:solidFill>
+                  <a:srgbClr val="C0392B"/>
+                </a:solidFill>
+                <a:latin typeface="Meiryo UI"/>
+              </a:rPr>
+              <a:t>→ 必ず「出口のアドレス」を確認する。これだけが唯一の証拠です</a:t>
             </a:r>
           </a:p>
           <a:p>
             <a:pPr algn="l">
               <a:spcAft>
-                <a:spcPts val="1000"/>
-              </a:spcAft>
-            </a:pPr>
-            <a:r>
-              <a:rPr sz="2000" b="1">
+                <a:spcPts val="800"/>
+              </a:spcAft>
+            </a:pPr>
+            <a:r>
+              <a:rPr sz="1800" b="1">
                 <a:solidFill>
                   <a:srgbClr val="1F3355"/>
                 </a:solidFill>
                 <a:latin typeface="Meiryo UI"/>
               </a:rPr>
-              <a:t>案件で最初に確認する 5 つ</a:t>
+              <a:t>② 設定が入ることと、動くことは別物</a:t>
             </a:r>
           </a:p>
           <a:p>
             <a:pPr lvl="1" algn="l">
               <a:spcAft>
-                <a:spcPts val="600"/>
-              </a:spcAft>
-            </a:pPr>
-            <a:r>
-              <a:rPr sz="1700" b="0">
+                <a:spcPts val="400"/>
+              </a:spcAft>
+            </a:pPr>
+            <a:r>
+              <a:rPr sz="1500" b="0">
                 <a:solidFill>
                   <a:srgbClr val="555555"/>
                 </a:solidFill>
                 <a:latin typeface="Meiryo UI"/>
               </a:rPr>
-              <a:t>□ ひかり電話はありますか → /64 か /56 かが決まる</a:t>
+              <a:t>Cisco の仮想ルータで MAP-E を試したら、設定は通り確認コマンドも正しい値を返した</a:t>
             </a:r>
           </a:p>
           <a:p>
             <a:pPr lvl="1" algn="l">
               <a:spcAft>
-                <a:spcPts val="600"/>
-              </a:spcAft>
-            </a:pPr>
-            <a:r>
-              <a:rPr sz="1700" b="0">
+                <a:spcPts val="400"/>
+              </a:spcAft>
+            </a:pPr>
+            <a:r>
+              <a:rPr sz="1500" b="0">
                 <a:solidFill>
                   <a:srgbClr val="555555"/>
                 </a:solidFill>
                 <a:latin typeface="Meiryo UI"/>
               </a:rPr>
-              <a:t>□ VNE はどこですか → 方式が決まる (ISP 名だけでは分かりません)</a:t>
+              <a:t>それなのにパケットが 1 つも流れなかった。実際にパケットを運ぶ部分が落ちていました</a:t>
             </a:r>
           </a:p>
           <a:p>
             <a:pPr lvl="1" algn="l">
               <a:spcAft>
-                <a:spcPts val="600"/>
-              </a:spcAft>
-            </a:pPr>
-            <a:r>
-              <a:rPr sz="1700" b="0">
+                <a:spcPts val="400"/>
+              </a:spcAft>
+            </a:pPr>
+            <a:r>
+              <a:rPr sz="1500" b="0">
                 <a:solidFill>
                   <a:srgbClr val="555555"/>
                 </a:solidFill>
                 <a:latin typeface="Meiryo UI"/>
               </a:rPr>
-              <a:t>□ 外から入ってくる通信はありますか → VPN / 拠点間 / 監視 / カメラ</a:t>
+              <a:t>※ 実機の Cisco で同じことが起きるかは確かめていません。仮想ルータでの話です</a:t>
             </a:r>
           </a:p>
           <a:p>
             <a:pPr lvl="1" algn="l">
               <a:spcAft>
-                <a:spcPts val="600"/>
-              </a:spcAft>
-            </a:pPr>
-            <a:r>
-              <a:rPr sz="1700" b="0">
+                <a:spcPts val="400"/>
+              </a:spcAft>
+            </a:pPr>
+            <a:r>
+              <a:rPr sz="1500" b="1">
+                <a:solidFill>
+                  <a:srgbClr val="C0392B"/>
+                </a:solidFill>
+                <a:latin typeface="Meiryo UI"/>
+              </a:rPr>
+              <a:t>→ 確認コマンドで終わらせず、パケットを流して測るところまでやる</a:t>
+            </a:r>
+          </a:p>
+          <a:p>
+            <a:pPr algn="l">
+              <a:spcAft>
+                <a:spcPts val="800"/>
+              </a:spcAft>
+            </a:pPr>
+            <a:r>
+              <a:rPr sz="1800" b="1">
+                <a:solidFill>
+                  <a:srgbClr val="1F3355"/>
+                </a:solidFill>
+                <a:latin typeface="Meiryo UI"/>
+              </a:rPr>
+              <a:t>③ 症状が 1 つでも、原因は 1 つとは限らない</a:t>
+            </a:r>
+          </a:p>
+          <a:p>
+            <a:pPr lvl="1" algn="l">
+              <a:spcAft>
+                <a:spcPts val="400"/>
+              </a:spcAft>
+            </a:pPr>
+            <a:r>
+              <a:rPr sz="1500" b="0">
                 <a:solidFill>
                   <a:srgbClr val="555555"/>
                 </a:solidFill>
                 <a:latin typeface="Meiryo UI"/>
               </a:rPr>
-              <a:t>□ ある場合、ポート番号は何番ですか → MAP-E でも開けられるかが決まる</a:t>
+              <a:t>「ping は通るのに名前解決だけ死ぬ」を追ったら、独立した原因が 3 つ重なっていました</a:t>
             </a:r>
           </a:p>
           <a:p>
             <a:pPr lvl="1" algn="l">
               <a:spcAft>
-                <a:spcPts val="600"/>
-              </a:spcAft>
-            </a:pPr>
-            <a:r>
-              <a:rPr sz="1700" b="0">
+                <a:spcPts val="400"/>
+              </a:spcAft>
+            </a:pPr>
+            <a:r>
+              <a:rPr sz="1500" b="0">
                 <a:solidFill>
                   <a:srgbClr val="555555"/>
                 </a:solidFill>
                 <a:latin typeface="Meiryo UI"/>
               </a:rPr>
-              <a:t>□ 同時接続数はどれくらいですか → MAP-E のポート数 (240 など) で足りるか</a:t>
-            </a:r>
-          </a:p>
-          <a:p>
-            <a:pPr algn="l">
-              <a:spcAft>
-                <a:spcPts val="1000"/>
-              </a:spcAft>
-            </a:pPr>
-            <a:r>
-              <a:rPr sz="2000" b="1">
-                <a:solidFill>
-                  <a:srgbClr val="1F3355"/>
-                </a:solidFill>
-                <a:latin typeface="Meiryo UI"/>
-              </a:rPr>
-              <a:t>切替後に必ず確認する 1 つ</a:t>
+              <a:t>1 つ直しても直らないので「直したのに変わらない = 見当違い」と判断すると迷子になります</a:t>
             </a:r>
           </a:p>
           <a:p>
             <a:pPr lvl="1" algn="l">
               <a:spcAft>
-                <a:spcPts val="600"/>
-              </a:spcAft>
-            </a:pPr>
-            <a:r>
-              <a:rPr sz="1700" b="1">
+                <a:spcPts val="400"/>
+              </a:spcAft>
+            </a:pPr>
+            <a:r>
+              <a:rPr sz="1500" b="1">
                 <a:solidFill>
                   <a:srgbClr val="C0392B"/>
                 </a:solidFill>
                 <a:latin typeface="Meiryo UI"/>
               </a:rPr>
-              <a:t>□ どのアドレスで外に出たか。疎通確認だけでは経路が正しいことを示せません</a:t>
+              <a:t>→ 1 つ直したら 1 つ確かめる。まとめて直さない</a:t>
             </a:r>
           </a:p>
         </p:txBody>
@@ -16613,6 +16592,317 @@
 </file>
 
 <file path=ppt/slides/slide41.xml><?xml version="1.0" encoding="utf-8"?>
+<p:sld xmlns:a="http://schemas.openxmlformats.org/drawingml/2006/main" xmlns:p="http://schemas.openxmlformats.org/presentationml/2006/main" xmlns:r="http://schemas.openxmlformats.org/officeDocument/2006/relationships">
+  <p:cSld>
+    <p:spTree>
+      <p:nvGrpSpPr>
+        <p:cNvPr id="1" name=""/>
+        <p:cNvGrpSpPr/>
+        <p:nvPr/>
+      </p:nvGrpSpPr>
+      <p:grpSpPr/>
+      <p:sp>
+        <p:nvSpPr>
+          <p:cNvPr id="2" name="TextBox 1"/>
+          <p:cNvSpPr txBox="1"/>
+          <p:nvPr/>
+        </p:nvSpPr>
+        <p:spPr>
+          <a:xfrm>
+            <a:off x="502920" y="320040"/>
+            <a:ext cx="11155680" cy="822960"/>
+          </a:xfrm>
+          <a:prstGeom prst="rect">
+            <a:avLst/>
+          </a:prstGeom>
+          <a:noFill/>
+        </p:spPr>
+        <p:txBody>
+          <a:bodyPr wrap="square">
+            <a:spAutoFit/>
+          </a:bodyPr>
+          <a:lstStyle/>
+          <a:p>
+            <a:pPr algn="l"/>
+            <a:r>
+              <a:rPr sz="2800" b="1">
+                <a:solidFill>
+                  <a:srgbClr val="1F3355"/>
+                </a:solidFill>
+                <a:latin typeface="Meiryo UI"/>
+              </a:rPr>
+              <a:t>まとめ — 3 行と、明日から使うチェックリスト</a:t>
+            </a:r>
+          </a:p>
+        </p:txBody>
+      </p:sp>
+      <p:sp>
+        <p:nvSpPr>
+          <p:cNvPr id="3" name="Rectangle 2"/>
+          <p:cNvSpPr/>
+          <p:nvPr/>
+        </p:nvSpPr>
+        <p:spPr>
+          <a:xfrm>
+            <a:off x="502920" y="1115568"/>
+            <a:ext cx="11155680" cy="31750"/>
+          </a:xfrm>
+          <a:prstGeom prst="rect">
+            <a:avLst/>
+          </a:prstGeom>
+          <a:solidFill>
+            <a:srgbClr val="007ACC"/>
+          </a:solidFill>
+          <a:ln>
+            <a:noFill/>
+          </a:ln>
+        </p:spPr>
+        <p:style>
+          <a:lnRef idx="1">
+            <a:schemeClr val="accent1"/>
+          </a:lnRef>
+          <a:fillRef idx="3">
+            <a:schemeClr val="accent1"/>
+          </a:fillRef>
+          <a:effectRef idx="2">
+            <a:schemeClr val="accent1"/>
+          </a:effectRef>
+          <a:fontRef idx="minor">
+            <a:schemeClr val="lt1"/>
+          </a:fontRef>
+        </p:style>
+        <p:txBody>
+          <a:bodyPr rtlCol="0" anchor="ctr"/>
+          <a:lstStyle/>
+          <a:p>
+            <a:pPr algn="ctr"/>
+          </a:p>
+        </p:txBody>
+      </p:sp>
+      <p:sp>
+        <p:nvSpPr>
+          <p:cNvPr id="4" name="TextBox 3"/>
+          <p:cNvSpPr txBox="1"/>
+          <p:nvPr/>
+        </p:nvSpPr>
+        <p:spPr>
+          <a:xfrm>
+            <a:off x="594360" y="1371600"/>
+            <a:ext cx="10972800" cy="4983480"/>
+          </a:xfrm>
+          <a:prstGeom prst="rect">
+            <a:avLst/>
+          </a:prstGeom>
+          <a:noFill/>
+        </p:spPr>
+        <p:txBody>
+          <a:bodyPr wrap="square">
+            <a:spAutoFit/>
+          </a:bodyPr>
+          <a:lstStyle/>
+          <a:p>
+            <a:pPr algn="l">
+              <a:spcAft>
+                <a:spcPts val="1000"/>
+              </a:spcAft>
+            </a:pPr>
+            <a:r>
+              <a:rPr sz="2000" b="1">
+                <a:solidFill>
+                  <a:srgbClr val="1F3355"/>
+                </a:solidFill>
+                <a:latin typeface="Meiryo UI"/>
+              </a:rPr>
+              <a:t>今日の話を 3 行にすると</a:t>
+            </a:r>
+          </a:p>
+          <a:p>
+            <a:pPr lvl="1" algn="l">
+              <a:spcAft>
+                <a:spcPts val="600"/>
+              </a:spcAft>
+            </a:pPr>
+            <a:r>
+              <a:rPr sz="1700" b="0">
+                <a:solidFill>
+                  <a:srgbClr val="555555"/>
+                </a:solidFill>
+                <a:latin typeface="Meiryo UI"/>
+              </a:rPr>
+              <a:t>① PPPoE が遅いから IPoE に変える。アドレス枯渇の話ではありません</a:t>
+            </a:r>
+          </a:p>
+          <a:p>
+            <a:pPr lvl="1" algn="l">
+              <a:spcAft>
+                <a:spcPts val="600"/>
+              </a:spcAft>
+            </a:pPr>
+            <a:r>
+              <a:rPr sz="1700" b="0">
+                <a:solidFill>
+                  <a:srgbClr val="555555"/>
+                </a:solidFill>
+                <a:latin typeface="Meiryo UI"/>
+              </a:rPr>
+              <a:t>② 社内は IPv4 のまま。だから IPv4 を IPv6 に載せて運ぶ。それが MAP-E と DS-Lite</a:t>
+            </a:r>
+          </a:p>
+          <a:p>
+            <a:pPr lvl="1" algn="l">
+              <a:spcAft>
+                <a:spcPts val="600"/>
+              </a:spcAft>
+            </a:pPr>
+            <a:r>
+              <a:rPr sz="1700" b="0">
+                <a:solidFill>
+                  <a:srgbClr val="555555"/>
+                </a:solidFill>
+                <a:latin typeface="Meiryo UI"/>
+              </a:rPr>
+              <a:t>③ どちらになるかは選べない。VNE が決めています</a:t>
+            </a:r>
+          </a:p>
+          <a:p>
+            <a:pPr algn="l">
+              <a:spcAft>
+                <a:spcPts val="1000"/>
+              </a:spcAft>
+            </a:pPr>
+            <a:r>
+              <a:rPr sz="2000" b="1">
+                <a:solidFill>
+                  <a:srgbClr val="1F3355"/>
+                </a:solidFill>
+                <a:latin typeface="Meiryo UI"/>
+              </a:rPr>
+              <a:t>案件で最初に確認する 5 つ</a:t>
+            </a:r>
+          </a:p>
+          <a:p>
+            <a:pPr lvl="1" algn="l">
+              <a:spcAft>
+                <a:spcPts val="600"/>
+              </a:spcAft>
+            </a:pPr>
+            <a:r>
+              <a:rPr sz="1700" b="0">
+                <a:solidFill>
+                  <a:srgbClr val="555555"/>
+                </a:solidFill>
+                <a:latin typeface="Meiryo UI"/>
+              </a:rPr>
+              <a:t>□ ひかり電話はありますか → /64 か /56 かが決まる</a:t>
+            </a:r>
+          </a:p>
+          <a:p>
+            <a:pPr lvl="1" algn="l">
+              <a:spcAft>
+                <a:spcPts val="600"/>
+              </a:spcAft>
+            </a:pPr>
+            <a:r>
+              <a:rPr sz="1700" b="0">
+                <a:solidFill>
+                  <a:srgbClr val="555555"/>
+                </a:solidFill>
+                <a:latin typeface="Meiryo UI"/>
+              </a:rPr>
+              <a:t>□ VNE はどこですか → 方式が決まる (ISP 名だけでは分かりません)</a:t>
+            </a:r>
+          </a:p>
+          <a:p>
+            <a:pPr lvl="1" algn="l">
+              <a:spcAft>
+                <a:spcPts val="600"/>
+              </a:spcAft>
+            </a:pPr>
+            <a:r>
+              <a:rPr sz="1700" b="0">
+                <a:solidFill>
+                  <a:srgbClr val="555555"/>
+                </a:solidFill>
+                <a:latin typeface="Meiryo UI"/>
+              </a:rPr>
+              <a:t>□ 外から入ってくる通信はありますか → VPN / 拠点間 / 監視 / カメラ</a:t>
+            </a:r>
+          </a:p>
+          <a:p>
+            <a:pPr lvl="1" algn="l">
+              <a:spcAft>
+                <a:spcPts val="600"/>
+              </a:spcAft>
+            </a:pPr>
+            <a:r>
+              <a:rPr sz="1700" b="0">
+                <a:solidFill>
+                  <a:srgbClr val="555555"/>
+                </a:solidFill>
+                <a:latin typeface="Meiryo UI"/>
+              </a:rPr>
+              <a:t>□ ある場合、ポート番号は何番ですか → MAP-E でも開けられるかが決まる</a:t>
+            </a:r>
+          </a:p>
+          <a:p>
+            <a:pPr lvl="1" algn="l">
+              <a:spcAft>
+                <a:spcPts val="600"/>
+              </a:spcAft>
+            </a:pPr>
+            <a:r>
+              <a:rPr sz="1700" b="0">
+                <a:solidFill>
+                  <a:srgbClr val="555555"/>
+                </a:solidFill>
+                <a:latin typeface="Meiryo UI"/>
+              </a:rPr>
+              <a:t>□ 同時接続数はどれくらいですか → MAP-E のポート数 (240 など) で足りるか</a:t>
+            </a:r>
+          </a:p>
+          <a:p>
+            <a:pPr algn="l">
+              <a:spcAft>
+                <a:spcPts val="1000"/>
+              </a:spcAft>
+            </a:pPr>
+            <a:r>
+              <a:rPr sz="2000" b="1">
+                <a:solidFill>
+                  <a:srgbClr val="1F3355"/>
+                </a:solidFill>
+                <a:latin typeface="Meiryo UI"/>
+              </a:rPr>
+              <a:t>切替後に必ず確認する 1 つ</a:t>
+            </a:r>
+          </a:p>
+          <a:p>
+            <a:pPr lvl="1" algn="l">
+              <a:spcAft>
+                <a:spcPts val="600"/>
+              </a:spcAft>
+            </a:pPr>
+            <a:r>
+              <a:rPr sz="1700" b="1">
+                <a:solidFill>
+                  <a:srgbClr val="C0392B"/>
+                </a:solidFill>
+                <a:latin typeface="Meiryo UI"/>
+              </a:rPr>
+              <a:t>□ どのアドレスで外に出たか。疎通確認だけでは経路が正しいことを示せません</a:t>
+            </a:r>
+          </a:p>
+        </p:txBody>
+      </p:sp>
+    </p:spTree>
+  </p:cSld>
+  <p:clrMapOvr>
+    <a:masterClrMapping/>
+  </p:clrMapOvr>
+</p:sld>
+</file>
+
+<file path=ppt/slides/slide42.xml><?xml version="1.0" encoding="utf-8"?>
 <p:sld xmlns:a="http://schemas.openxmlformats.org/drawingml/2006/main" xmlns:p="http://schemas.openxmlformats.org/presentationml/2006/main" xmlns:r="http://schemas.openxmlformats.org/officeDocument/2006/relationships">
   <p:cSld>
     <p:spTree>

--- a/docs/ipoe-lab/slides/setsumeikai.pptx
+++ b/docs/ipoe-lab/slides/setsumeikai.pptx
@@ -733,22 +733,12 @@
           </a:p>
           <a:p>
             <a:r>
-              <a:t>・ここで一度、聴衆に挙手させると空気が変わる:</a:t>
-            </a:r>
-          </a:p>
-          <a:p>
-            <a:r>
-              <a:t>  「『夜になると遅い』という相談、受けたことある人?」</a:t>
-            </a:r>
-          </a:p>
-          <a:p>
-            <a:r>
-              <a:t>・「社内も IPv6 にするんですか?」は必ず聞かれる。**先に自分から言っておくこと。**</a:t>
-            </a:r>
-          </a:p>
-          <a:p>
-            <a:r>
-              <a:t>・「将来も IPv6 化しない」とは言わない。今回の案件でやらないだけ、と締める。</a:t>
+              <a:t>・**最後の「言い直し」を必ず言うこと。**「IPv6 = 速い」で持ち帰られると、</a:t>
+            </a:r>
+          </a:p>
+          <a:p>
+            <a:r>
+              <a:t>  お客様に間違った説明をすることになる。速いのは IPoE という通り方。</a:t>
             </a:r>
           </a:p>
         </p:txBody>
@@ -823,17 +813,22 @@
           </a:p>
           <a:p>
             <a:r>
-              <a:t>・**この表は覚えさせない。**「引く表です」と言い切って、印刷して持ち歩くよう勧める。</a:t>
-            </a:r>
-          </a:p>
-          <a:p>
-            <a:r>
-              <a:t>・1 問だけ指名なしで投げると定着する:「では OCN バーチャルコネクト、ポート開放は?」</a:t>
-            </a:r>
-          </a:p>
-          <a:p>
-            <a:r>
-              <a:t>・次ページで自社の事故 (2 回失敗) を出すので、ここでは深追いしない。</a:t>
+              <a:t>・ここで一度、聴衆に挙手させると空気が変わる:</a:t>
+            </a:r>
+          </a:p>
+          <a:p>
+            <a:r>
+              <a:t>  「『夜になると遅い』という相談、受けたことある人?」</a:t>
+            </a:r>
+          </a:p>
+          <a:p>
+            <a:r>
+              <a:t>・「社内も IPv6 にするんですか?」は必ず聞かれる。**先に自分から言っておくこと。**</a:t>
+            </a:r>
+          </a:p>
+          <a:p>
+            <a:r>
+              <a:t>・「将来も IPv6 化しない」とは言わない。今回の案件でやらないだけ、と締める。</a:t>
             </a:r>
           </a:p>
         </p:txBody>
@@ -908,22 +903,17 @@
           </a:p>
           <a:p>
             <a:r>
-              <a:t>・**表を出す前に 30 秒だけ問いかけると定着が変わる。**</a:t>
-            </a:r>
-          </a:p>
-          <a:p>
-            <a:r>
-              <a:t>  「transix のお客様から『事務所のカメラを外から見たい』と言われました。できますか?」</a:t>
-            </a:r>
-          </a:p>
-          <a:p>
-            <a:r>
-              <a:t>  「隣と 10 秒相談してください」→ そのあと答え合わせとして表を出す。</a:t>
-            </a:r>
-          </a:p>
-          <a:p>
-            <a:r>
-              <a:t>・ここが今日の到達目標。**このページだけは絶対に巻かないこと。**</a:t>
+              <a:t>・**この表は覚えさせない。**「引く表です」と言い切って、印刷して持ち歩くよう勧める。</a:t>
+            </a:r>
+          </a:p>
+          <a:p>
+            <a:r>
+              <a:t>・1 問だけ指名なしで投げると定着する:「では OCN バーチャルコネクト、ポート開放は?」</a:t>
+            </a:r>
+          </a:p>
+          <a:p>
+            <a:r>
+              <a:t>・次ページで自社の事故 (2 回失敗) を出すので、ここでは深追いしない。</a:t>
             </a:r>
           </a:p>
         </p:txBody>
@@ -949,6 +939,181 @@
 </file>
 
 <file path=ppt/notesSlides/notesSlide6.xml><?xml version="1.0" encoding="utf-8"?>
+<p:notes xmlns:a="http://schemas.openxmlformats.org/drawingml/2006/main" xmlns:p="http://schemas.openxmlformats.org/presentationml/2006/main" xmlns:r="http://schemas.openxmlformats.org/officeDocument/2006/relationships">
+  <p:cSld>
+    <p:spTree>
+      <p:nvGrpSpPr>
+        <p:cNvPr id="1" name=""/>
+        <p:cNvGrpSpPr/>
+        <p:nvPr/>
+      </p:nvGrpSpPr>
+      <p:grpSpPr>
+        <a:xfrm>
+          <a:off x="0" y="0"/>
+          <a:ext cx="0" cy="0"/>
+          <a:chOff x="0" y="0"/>
+          <a:chExt cx="0" cy="0"/>
+        </a:xfrm>
+      </p:grpSpPr>
+      <p:sp>
+        <p:nvSpPr>
+          <p:cNvPr id="2" name="Slide Image Placeholder 1"/>
+          <p:cNvSpPr>
+            <a:spLocks noGrp="1"/>
+          </p:cNvSpPr>
+          <p:nvPr>
+            <p:ph type="sldImg" idx="2"/>
+          </p:nvPr>
+        </p:nvSpPr>
+        <p:spPr/>
+      </p:sp>
+      <p:sp>
+        <p:nvSpPr>
+          <p:cNvPr id="3" name="Notes Placeholder 2"/>
+          <p:cNvSpPr>
+            <a:spLocks noGrp="1"/>
+          </p:cNvSpPr>
+          <p:nvPr>
+            <p:ph type="body" idx="3" sz="quarter"/>
+          </p:nvPr>
+        </p:nvSpPr>
+        <p:spPr/>
+        <p:txBody>
+          <a:bodyPr/>
+          <a:lstStyle/>
+          <a:p>
+            <a:r>
+              <a:t>【話す人へ】</a:t>
+            </a:r>
+          </a:p>
+          <a:p>
+            <a:r>
+              <a:t>・**最初の 3 行を飛ばさないこと。**「なぜポートを分ければアドレスを共有できるのか」が</a:t>
+            </a:r>
+          </a:p>
+          <a:p>
+            <a:r>
+              <a:t>  入っていないと、この先の 240 個の話が全部 呪文になる。</a:t>
+            </a:r>
+          </a:p>
+          <a:p>
+            <a:r>
+              <a:t>・240 は **割当の構造値**。「実測で 240 使えた」とは言わないこと (次ページの注記)。</a:t>
+            </a:r>
+          </a:p>
+        </p:txBody>
+      </p:sp>
+      <p:sp>
+        <p:nvSpPr>
+          <p:cNvPr id="4" name="Slide Number Placeholder 3"/>
+          <p:cNvSpPr>
+            <a:spLocks noGrp="1"/>
+          </p:cNvSpPr>
+          <p:nvPr>
+            <p:ph type="sldNum" idx="5" sz="quarter"/>
+          </p:nvPr>
+        </p:nvSpPr>
+        <p:spPr/>
+      </p:sp>
+    </p:spTree>
+  </p:cSld>
+  <p:clrMapOvr>
+    <a:masterClrMapping/>
+  </p:clrMapOvr>
+</p:notes>
+</file>
+
+<file path=ppt/notesSlides/notesSlide7.xml><?xml version="1.0" encoding="utf-8"?>
+<p:notes xmlns:a="http://schemas.openxmlformats.org/drawingml/2006/main" xmlns:p="http://schemas.openxmlformats.org/presentationml/2006/main" xmlns:r="http://schemas.openxmlformats.org/officeDocument/2006/relationships">
+  <p:cSld>
+    <p:spTree>
+      <p:nvGrpSpPr>
+        <p:cNvPr id="1" name=""/>
+        <p:cNvGrpSpPr/>
+        <p:nvPr/>
+      </p:nvGrpSpPr>
+      <p:grpSpPr>
+        <a:xfrm>
+          <a:off x="0" y="0"/>
+          <a:ext cx="0" cy="0"/>
+          <a:chOff x="0" y="0"/>
+          <a:chExt cx="0" cy="0"/>
+        </a:xfrm>
+      </p:grpSpPr>
+      <p:sp>
+        <p:nvSpPr>
+          <p:cNvPr id="2" name="Slide Image Placeholder 1"/>
+          <p:cNvSpPr>
+            <a:spLocks noGrp="1"/>
+          </p:cNvSpPr>
+          <p:nvPr>
+            <p:ph type="sldImg" idx="2"/>
+          </p:nvPr>
+        </p:nvSpPr>
+        <p:spPr/>
+      </p:sp>
+      <p:sp>
+        <p:nvSpPr>
+          <p:cNvPr id="3" name="Notes Placeholder 2"/>
+          <p:cNvSpPr>
+            <a:spLocks noGrp="1"/>
+          </p:cNvSpPr>
+          <p:nvPr>
+            <p:ph type="body" idx="3" sz="quarter"/>
+          </p:nvPr>
+        </p:nvSpPr>
+        <p:spPr/>
+        <p:txBody>
+          <a:bodyPr/>
+          <a:lstStyle/>
+          <a:p>
+            <a:r>
+              <a:t>【話す人へ】</a:t>
+            </a:r>
+          </a:p>
+          <a:p>
+            <a:r>
+              <a:t>・**表を出す前に 30 秒だけ問いかけると定着が変わる。**</a:t>
+            </a:r>
+          </a:p>
+          <a:p>
+            <a:r>
+              <a:t>  「transix のお客様から『事務所のカメラを外から見たい』と言われました。できますか?」</a:t>
+            </a:r>
+          </a:p>
+          <a:p>
+            <a:r>
+              <a:t>  「隣と 10 秒相談してください」→ そのあと答え合わせとして表を出す。</a:t>
+            </a:r>
+          </a:p>
+          <a:p>
+            <a:r>
+              <a:t>・ここが今日の到達目標。**このページだけは絶対に巻かないこと。**</a:t>
+            </a:r>
+          </a:p>
+        </p:txBody>
+      </p:sp>
+      <p:sp>
+        <p:nvSpPr>
+          <p:cNvPr id="4" name="Slide Number Placeholder 3"/>
+          <p:cNvSpPr>
+            <a:spLocks noGrp="1"/>
+          </p:cNvSpPr>
+          <p:nvPr>
+            <p:ph type="sldNum" idx="5" sz="quarter"/>
+          </p:nvPr>
+        </p:nvSpPr>
+        <p:spPr/>
+      </p:sp>
+    </p:spTree>
+  </p:cSld>
+  <p:clrMapOvr>
+    <a:masterClrMapping/>
+  </p:clrMapOvr>
+</p:notes>
+</file>
+
+<file path=ppt/notesSlides/notesSlide8.xml><?xml version="1.0" encoding="utf-8"?>
 <p:notes xmlns:a="http://schemas.openxmlformats.org/drawingml/2006/main" xmlns:p="http://schemas.openxmlformats.org/presentationml/2006/main" xmlns:r="http://schemas.openxmlformats.org/officeDocument/2006/relationships">
   <p:cSld>
     <p:spTree>
@@ -4923,11 +5088,11 @@
           <a:p>
             <a:pPr algn="l">
               <a:spcAft>
-                <a:spcPts val="1000"/>
-              </a:spcAft>
-            </a:pPr>
-            <a:r>
-              <a:rPr sz="2000" b="1">
+                <a:spcPts val="900"/>
+              </a:spcAft>
+            </a:pPr>
+            <a:r>
+              <a:rPr sz="1900" b="1">
                 <a:solidFill>
                   <a:srgbClr val="1F3355"/>
                 </a:solidFill>
@@ -4939,11 +5104,11 @@
           <a:p>
             <a:pPr lvl="1" algn="l">
               <a:spcAft>
-                <a:spcPts val="600"/>
-              </a:spcAft>
-            </a:pPr>
-            <a:r>
-              <a:rPr sz="1700" b="0">
+                <a:spcPts val="500"/>
+              </a:spcAft>
+            </a:pPr>
+            <a:r>
+              <a:rPr sz="1600" b="0">
                 <a:solidFill>
                   <a:srgbClr val="555555"/>
                 </a:solidFill>
@@ -4955,11 +5120,11 @@
           <a:p>
             <a:pPr lvl="1" algn="l">
               <a:spcAft>
-                <a:spcPts val="600"/>
-              </a:spcAft>
-            </a:pPr>
-            <a:r>
-              <a:rPr sz="1700" b="0">
+                <a:spcPts val="500"/>
+              </a:spcAft>
+            </a:pPr>
+            <a:r>
+              <a:rPr sz="1600" b="0">
                 <a:solidFill>
                   <a:srgbClr val="555555"/>
                 </a:solidFill>
@@ -4971,11 +5136,11 @@
           <a:p>
             <a:pPr lvl="1" algn="l">
               <a:spcAft>
-                <a:spcPts val="600"/>
-              </a:spcAft>
-            </a:pPr>
-            <a:r>
-              <a:rPr sz="1700" b="1">
+                <a:spcPts val="500"/>
+              </a:spcAft>
+            </a:pPr>
+            <a:r>
+              <a:rPr sz="1600" b="1">
                 <a:solidFill>
                   <a:srgbClr val="C0392B"/>
                 </a:solidFill>
@@ -4987,11 +5152,11 @@
           <a:p>
             <a:pPr algn="l">
               <a:spcAft>
-                <a:spcPts val="1000"/>
-              </a:spcAft>
-            </a:pPr>
-            <a:r>
-              <a:rPr sz="2000" b="1">
+                <a:spcPts val="900"/>
+              </a:spcAft>
+            </a:pPr>
+            <a:r>
+              <a:rPr sz="1900" b="1">
                 <a:solidFill>
                   <a:srgbClr val="1F3355"/>
                 </a:solidFill>
@@ -5003,11 +5168,11 @@
           <a:p>
             <a:pPr lvl="1" algn="l">
               <a:spcAft>
-                <a:spcPts val="600"/>
-              </a:spcAft>
-            </a:pPr>
-            <a:r>
-              <a:rPr sz="1700" b="0">
+                <a:spcPts val="500"/>
+              </a:spcAft>
+            </a:pPr>
+            <a:r>
+              <a:rPr sz="1600" b="0">
                 <a:solidFill>
                   <a:srgbClr val="555555"/>
                 </a:solidFill>
@@ -5019,27 +5184,43 @@
           <a:p>
             <a:pPr lvl="1" algn="l">
               <a:spcAft>
-                <a:spcPts val="600"/>
-              </a:spcAft>
-            </a:pPr>
-            <a:r>
-              <a:rPr sz="1700" b="0">
+                <a:spcPts val="500"/>
+              </a:spcAft>
+            </a:pPr>
+            <a:r>
+              <a:rPr sz="1600" b="0">
                 <a:solidFill>
                   <a:srgbClr val="555555"/>
                 </a:solidFill>
                 <a:latin typeface="Meiryo UI"/>
               </a:rPr>
-              <a:t>あり → /56 がまとめて貸し出される = /64 が 256 本 (PD 方式 = まとめ借り)</a:t>
+              <a:t>あり → /56 がまとめて貸し出される = /64 が 256 本</a:t>
+            </a:r>
+          </a:p>
+          <a:p>
+            <a:pPr lvl="1" algn="l">
+              <a:spcAft>
+                <a:spcPts val="500"/>
+              </a:spcAft>
+            </a:pPr>
+            <a:r>
+              <a:rPr sz="1600" b="0">
+                <a:solidFill>
+                  <a:srgbClr val="555555"/>
+                </a:solidFill>
+                <a:latin typeface="Meiryo UI"/>
+              </a:rPr>
+              <a:t>     (PD 方式 = まとめ借り方式。DHCPv6 の「プレフィックス委任」という機能です)</a:t>
             </a:r>
           </a:p>
           <a:p>
             <a:pPr algn="l">
               <a:spcAft>
-                <a:spcPts val="1000"/>
-              </a:spcAft>
-            </a:pPr>
-            <a:r>
-              <a:rPr sz="2000" b="1">
+                <a:spcPts val="900"/>
+              </a:spcAft>
+            </a:pPr>
+            <a:r>
+              <a:rPr sz="1900" b="1">
                 <a:solidFill>
                   <a:srgbClr val="C0392B"/>
                 </a:solidFill>
@@ -5051,11 +5232,11 @@
           <a:p>
             <a:pPr lvl="1" algn="l">
               <a:spcAft>
-                <a:spcPts val="600"/>
-              </a:spcAft>
-            </a:pPr>
-            <a:r>
-              <a:rPr sz="1700" b="0">
+                <a:spcPts val="500"/>
+              </a:spcAft>
+            </a:pPr>
+            <a:r>
+              <a:rPr sz="1600" b="0">
                 <a:solidFill>
                   <a:srgbClr val="555555"/>
                 </a:solidFill>
@@ -5067,11 +5248,11 @@
           <a:p>
             <a:pPr lvl="1" algn="l">
               <a:spcAft>
-                <a:spcPts val="600"/>
-              </a:spcAft>
-            </a:pPr>
-            <a:r>
-              <a:rPr sz="1700" b="0">
+                <a:spcPts val="500"/>
+              </a:spcAft>
+            </a:pPr>
+            <a:r>
+              <a:rPr sz="1600" b="0">
                 <a:solidFill>
                   <a:srgbClr val="555555"/>
                 </a:solidFill>
@@ -5083,11 +5264,11 @@
           <a:p>
             <a:pPr algn="l">
               <a:spcAft>
-                <a:spcPts val="1000"/>
-              </a:spcAft>
-            </a:pPr>
-            <a:r>
-              <a:rPr sz="2000" b="1">
+                <a:spcPts val="900"/>
+              </a:spcAft>
+            </a:pPr>
+            <a:r>
+              <a:rPr sz="1900" b="1">
                 <a:solidFill>
                   <a:srgbClr val="1F3355"/>
                 </a:solidFill>
@@ -5527,7 +5708,7 @@
                 </a:solidFill>
                 <a:latin typeface="Meiryo UI"/>
               </a:rPr>
-              <a:t>アドレスはどうやって決まるのか</a:t>
+              <a:t>RA と DHCPv6 — アドレスを配るのはどっち? (役割が違います)</a:t>
             </a:r>
           </a:p>
         </p:txBody>
@@ -5721,7 +5902,7 @@
                 </a:solidFill>
                 <a:latin typeface="Meiryo UI"/>
               </a:rPr>
-              <a:t>よくある誤解: 「アドレスが 2 つ以上付いている」のは正常です</a:t>
+              <a:t>よくある誤解 ① 「DHCPv6 を使うと、自分で作るほうは止まる」→ 止まりません</a:t>
             </a:r>
           </a:p>
           <a:p>
@@ -5737,7 +5918,23 @@
                 </a:solidFill>
                 <a:latin typeface="Meiryo UI"/>
               </a:rPr>
-              <a:t>住所を配る係 (DHCPv6) を併用しても、自分で作るのは止まりません。両方動きます</a:t>
+              <a:t>両方が同時に動きます。止める / 止めないを決めるのは、別のフラグです</a:t>
+            </a:r>
+          </a:p>
+          <a:p>
+            <a:pPr lvl="1" algn="l">
+              <a:spcAft>
+                <a:spcPts val="600"/>
+              </a:spcAft>
+            </a:pPr>
+            <a:r>
+              <a:rPr sz="1700" b="0">
+                <a:solidFill>
+                  <a:srgbClr val="555555"/>
+                </a:solidFill>
+                <a:latin typeface="Meiryo UI"/>
+              </a:rPr>
+              <a:t>だから アドレスが 2 つ以上付いているのは正常 です</a:t>
             </a:r>
           </a:p>
           <a:p>
@@ -6893,13 +7090,45 @@
               </a:spcAft>
             </a:pPr>
             <a:r>
+              <a:rPr sz="1400" b="0">
+                <a:solidFill>
+                  <a:srgbClr val="555555"/>
+                </a:solidFill>
+                <a:latin typeface="Meiryo UI"/>
+              </a:rPr>
+              <a:t>  1 本の回線に 2 つの接続が同居し、どちらを通すかは CPE の経路設定で振り分けます (設計が要ります)。</a:t>
+            </a:r>
+          </a:p>
+          <a:p>
+            <a:pPr algn="l">
+              <a:spcAft>
+                <a:spcPts val="600"/>
+              </a:spcAft>
+            </a:pPr>
+            <a:r>
               <a:rPr sz="1400" b="1">
                 <a:solidFill>
                   <a:srgbClr val="C0392B"/>
                 </a:solidFill>
                 <a:latin typeface="Meiryo UI"/>
               </a:rPr>
-              <a:t>※ PPPoE を電源断などで乱暴に切ると、網側にセッションが 1 分ほど残り、その間は再接続できません。</a:t>
+              <a:t>※ PPPoE を電源断などで乱暴に切ると、網側にセッションが残り、その間は再接続できません。</a:t>
+            </a:r>
+          </a:p>
+          <a:p>
+            <a:pPr algn="l">
+              <a:spcAft>
+                <a:spcPts val="600"/>
+              </a:spcAft>
+            </a:pPr>
+            <a:r>
+              <a:rPr sz="1400" b="0">
+                <a:solidFill>
+                  <a:srgbClr val="555555"/>
+                </a:solidFill>
+                <a:latin typeface="Meiryo UI"/>
+              </a:rPr>
+              <a:t>  うちのラボでは 1 分でした。実網の事業者はもっと長いことがあります。</a:t>
             </a:r>
           </a:p>
           <a:p>
@@ -6999,7 +7228,7 @@
         </p:nvGraphicFramePr>
         <p:xfrm>
           <a:off x="502920" y="1143000"/>
-          <a:ext cx="10881360" cy="2618232"/>
+          <a:ext cx="10881360" cy="2929128"/>
         </p:xfrm>
         <a:graphic>
           <a:graphicData uri="http://schemas.openxmlformats.org/drawingml/2006/table">
@@ -7012,7 +7241,7 @@
                 <a:gridCol w="4480560"/>
                 <a:gridCol w="4023360"/>
               </a:tblGrid>
-              <a:tr h="327279">
+              <a:tr h="325458">
                 <a:tc>
                   <a:txBody>
                     <a:bodyPr/>
@@ -7083,7 +7312,7 @@
                   </a:tcPr>
                 </a:tc>
               </a:tr>
-              <a:tr h="327279">
+              <a:tr h="325458">
                 <a:tc>
                   <a:txBody>
                     <a:bodyPr/>
@@ -7154,7 +7383,7 @@
                   </a:tcPr>
                 </a:tc>
               </a:tr>
-              <a:tr h="327279">
+              <a:tr h="325458">
                 <a:tc>
                   <a:txBody>
                     <a:bodyPr/>
@@ -7225,7 +7454,7 @@
                   </a:tcPr>
                 </a:tc>
               </a:tr>
-              <a:tr h="327279">
+              <a:tr h="325458">
                 <a:tc>
                   <a:txBody>
                     <a:bodyPr/>
@@ -7296,7 +7525,7 @@
                   </a:tcPr>
                 </a:tc>
               </a:tr>
-              <a:tr h="327279">
+              <a:tr h="325458">
                 <a:tc>
                   <a:txBody>
                     <a:bodyPr/>
@@ -7367,7 +7596,7 @@
                   </a:tcPr>
                 </a:tc>
               </a:tr>
-              <a:tr h="327279">
+              <a:tr h="325458">
                 <a:tc>
                   <a:txBody>
                     <a:bodyPr/>
@@ -7438,7 +7667,7 @@
                   </a:tcPr>
                 </a:tc>
               </a:tr>
-              <a:tr h="327279">
+              <a:tr h="325458">
                 <a:tc>
                   <a:txBody>
                     <a:bodyPr/>
@@ -7509,7 +7738,7 @@
                   </a:tcPr>
                 </a:tc>
               </a:tr>
-              <a:tr h="327279">
+              <a:tr h="325458">
                 <a:tc>
                   <a:txBody>
                     <a:bodyPr/>
@@ -7523,7 +7752,7 @@
                           </a:solidFill>
                           <a:latin typeface="Meiryo UI"/>
                         </a:rPr>
-                        <a:t>CPE の負荷</a:t>
+                        <a:t>同時に張れる通信の数</a:t>
                       </a:r>
                     </a:p>
                   </a:txBody>
@@ -7546,7 +7775,7 @@
                           </a:solidFill>
                           <a:latin typeface="Meiryo UI"/>
                         </a:rPr>
-                        <a:t>重い (計算と NAT をする)</a:t>
+                        <a:t>決まっている (割り当てポート数まで)</a:t>
                       </a:r>
                     </a:p>
                   </a:txBody>
@@ -7569,7 +7798,7 @@
                           </a:solidFill>
                           <a:latin typeface="Meiryo UI"/>
                         </a:rPr>
-                        <a:t>軽い</a:t>
+                        <a:t>網側の上限まで。無制限ではありません</a:t>
                       </a:r>
                     </a:p>
                   </a:txBody>
@@ -7580,6 +7809,77 @@
                   </a:tcPr>
                 </a:tc>
               </a:tr>
+              <a:tr h="325464">
+                <a:tc>
+                  <a:txBody>
+                    <a:bodyPr/>
+                    <a:lstStyle/>
+                    <a:p>
+                      <a:pPr algn="l"/>
+                      <a:r>
+                        <a:rPr sz="1200" b="0">
+                          <a:solidFill>
+                            <a:srgbClr val="1F3355"/>
+                          </a:solidFill>
+                          <a:latin typeface="Meiryo UI"/>
+                        </a:rPr>
+                        <a:t>CPE の負荷</a:t>
+                      </a:r>
+                    </a:p>
+                  </a:txBody>
+                  <a:tcPr>
+                    <a:solidFill>
+                      <a:srgbClr val="F2F6FA"/>
+                    </a:solidFill>
+                  </a:tcPr>
+                </a:tc>
+                <a:tc>
+                  <a:txBody>
+                    <a:bodyPr/>
+                    <a:lstStyle/>
+                    <a:p>
+                      <a:pPr algn="l"/>
+                      <a:r>
+                        <a:rPr sz="1200" b="0">
+                          <a:solidFill>
+                            <a:srgbClr val="1F3355"/>
+                          </a:solidFill>
+                          <a:latin typeface="Meiryo UI"/>
+                        </a:rPr>
+                        <a:t>重い (計算と NAT をする)</a:t>
+                      </a:r>
+                    </a:p>
+                  </a:txBody>
+                  <a:tcPr>
+                    <a:solidFill>
+                      <a:srgbClr val="F2F6FA"/>
+                    </a:solidFill>
+                  </a:tcPr>
+                </a:tc>
+                <a:tc>
+                  <a:txBody>
+                    <a:bodyPr/>
+                    <a:lstStyle/>
+                    <a:p>
+                      <a:pPr algn="l"/>
+                      <a:r>
+                        <a:rPr sz="1200" b="0">
+                          <a:solidFill>
+                            <a:srgbClr val="1F3355"/>
+                          </a:solidFill>
+                          <a:latin typeface="Meiryo UI"/>
+                        </a:rPr>
+                        <a:t>軽い</a:t>
+                      </a:r>
+                    </a:p>
+                  </a:txBody>
+                  <a:tcPr>
+                    <a:solidFill>
+                      <a:srgbClr val="F2F6FA"/>
+                    </a:solidFill>
+                  </a:tcPr>
+                </a:tc>
+              </a:tr>
             </a:tbl>
           </a:graphicData>
         </a:graphic>
@@ -7592,7 +7892,7 @@
         </p:nvSpPr>
         <p:spPr>
           <a:xfrm>
-            <a:off x="502920" y="4017264"/>
+            <a:off x="502920" y="4328160"/>
             <a:ext cx="11155680" cy="548640"/>
           </a:xfrm>
           <a:prstGeom prst="rect">
@@ -7614,7 +7914,7 @@
                 </a:solidFill>
                 <a:latin typeface="Meiryo UI"/>
               </a:rPr>
-              <a:t>どちらになるかは VNE が決めています。お客様も我々も選べません</a:t>
+              <a:t>違いは NAT がどこにあるか。それだけです。どちらになるかは VNE が決めていて、お客様も我々も選べません</a:t>
             </a:r>
           </a:p>
         </p:txBody>
@@ -8482,7 +8782,7 @@
                 </a:solidFill>
                 <a:latin typeface="Meiryo UI"/>
               </a:rPr>
-              <a:t>注意: 同じ ISP 名でもプランで VNE が違うことがあります。開通後に実測で確かめてください</a:t>
+              <a:t>※ このほかに「固定 IP のオプション契約」という第 3 の形があります (次ページの事故がまさにこれ)。同じ ISP 名でもプランで VNE が違うことがあるので、開通後に実測で確かめてください</a:t>
             </a:r>
           </a:p>
         </p:txBody>
@@ -10125,11 +10425,11 @@
           <a:p>
             <a:pPr algn="l">
               <a:spcAft>
-                <a:spcPts val="900"/>
-              </a:spcAft>
-            </a:pPr>
-            <a:r>
-              <a:rPr sz="1900" b="0">
+                <a:spcPts val="700"/>
+              </a:spcAft>
+            </a:pPr>
+            <a:r>
+              <a:rPr sz="1700" b="0">
                 <a:solidFill>
                   <a:srgbClr val="0B6040"/>
                 </a:solidFill>
@@ -10141,27 +10441,27 @@
           <a:p>
             <a:pPr algn="l">
               <a:spcAft>
-                <a:spcPts val="900"/>
-              </a:spcAft>
-            </a:pPr>
-            <a:r>
-              <a:rPr sz="1900" b="1">
+                <a:spcPts val="700"/>
+              </a:spcAft>
+            </a:pPr>
+            <a:r>
+              <a:rPr sz="1700" b="1">
                 <a:solidFill>
                   <a:srgbClr val="1F3355"/>
                 </a:solidFill>
                 <a:latin typeface="Meiryo UI"/>
               </a:rPr>
-              <a:t>2-3 の宅配便のたとえで「出口の業者が仕分けする」と言ったのが、これです</a:t>
+              <a:t>宅配便のたとえで「出口の業者が仕分けする」と言ったのが、これです</a:t>
             </a:r>
           </a:p>
           <a:p>
             <a:pPr algn="l">
               <a:spcAft>
-                <a:spcPts val="900"/>
-              </a:spcAft>
-            </a:pPr>
-            <a:r>
-              <a:rPr sz="1900" b="1">
+                <a:spcPts val="700"/>
+              </a:spcAft>
+            </a:pPr>
+            <a:r>
+              <a:rPr sz="1700" b="1">
                 <a:solidFill>
                   <a:srgbClr val="1F3355"/>
                 </a:solidFill>
@@ -10173,11 +10473,11 @@
           <a:p>
             <a:pPr lvl="1" algn="l">
               <a:spcAft>
-                <a:spcPts val="500"/>
-              </a:spcAft>
-            </a:pPr>
-            <a:r>
-              <a:rPr sz="1600" b="0">
+                <a:spcPts val="300"/>
+              </a:spcAft>
+            </a:pPr>
+            <a:r>
+              <a:rPr sz="1400" b="0">
                 <a:solidFill>
                   <a:srgbClr val="555555"/>
                 </a:solidFill>
@@ -10189,11 +10489,11 @@
           <a:p>
             <a:pPr lvl="1" algn="l">
               <a:spcAft>
-                <a:spcPts val="500"/>
-              </a:spcAft>
-            </a:pPr>
-            <a:r>
-              <a:rPr sz="1600" b="0">
+                <a:spcPts val="300"/>
+              </a:spcAft>
+            </a:pPr>
+            <a:r>
+              <a:rPr sz="1400" b="0">
                 <a:solidFill>
                   <a:srgbClr val="555555"/>
                 </a:solidFill>
@@ -10205,11 +10505,11 @@
           <a:p>
             <a:pPr lvl="1" algn="l">
               <a:spcAft>
-                <a:spcPts val="500"/>
-              </a:spcAft>
-            </a:pPr>
-            <a:r>
-              <a:rPr sz="1600" b="0">
+                <a:spcPts val="300"/>
+              </a:spcAft>
+            </a:pPr>
+            <a:r>
+              <a:rPr sz="1400" b="0">
                 <a:solidFill>
                   <a:srgbClr val="555555"/>
                 </a:solidFill>
@@ -10221,11 +10521,11 @@
           <a:p>
             <a:pPr algn="l">
               <a:spcAft>
-                <a:spcPts val="900"/>
-              </a:spcAft>
-            </a:pPr>
-            <a:r>
-              <a:rPr sz="1900" b="1">
+                <a:spcPts val="700"/>
+              </a:spcAft>
+            </a:pPr>
+            <a:r>
+              <a:rPr sz="1700" b="1">
                 <a:solidFill>
                   <a:srgbClr val="C0392B"/>
                 </a:solidFill>
@@ -10237,11 +10537,11 @@
           <a:p>
             <a:pPr lvl="1" algn="l">
               <a:spcAft>
-                <a:spcPts val="500"/>
-              </a:spcAft>
-            </a:pPr>
-            <a:r>
-              <a:rPr sz="1600" b="0">
+                <a:spcPts val="300"/>
+              </a:spcAft>
+            </a:pPr>
+            <a:r>
+              <a:rPr sz="1400" b="0">
                 <a:solidFill>
                   <a:srgbClr val="555555"/>
                 </a:solidFill>
@@ -10253,11 +10553,59 @@
           <a:p>
             <a:pPr algn="l">
               <a:spcAft>
-                <a:spcPts val="900"/>
-              </a:spcAft>
-            </a:pPr>
-            <a:r>
-              <a:rPr sz="1900" b="1">
+                <a:spcPts val="700"/>
+              </a:spcAft>
+            </a:pPr>
+            <a:r>
+              <a:rPr sz="1700" b="1">
+                <a:solidFill>
+                  <a:srgbClr val="C0392B"/>
+                </a:solidFill>
+                <a:latin typeface="Meiryo UI"/>
+              </a:rPr>
+              <a:t>※ 「DS-Lite なら接続数は無制限」ではありません</a:t>
+            </a:r>
+          </a:p>
+          <a:p>
+            <a:pPr lvl="1" algn="l">
+              <a:spcAft>
+                <a:spcPts val="300"/>
+              </a:spcAft>
+            </a:pPr>
+            <a:r>
+              <a:rPr sz="1400" b="0">
+                <a:solidFill>
+                  <a:srgbClr val="555555"/>
+                </a:solidFill>
+                <a:latin typeface="Meiryo UI"/>
+              </a:rPr>
+              <a:t>網側の装置にも 1 契約あたりの上限があります。MAP-E ほど はっきり見えないだけです</a:t>
+            </a:r>
+          </a:p>
+          <a:p>
+            <a:pPr lvl="1" algn="l">
+              <a:spcAft>
+                <a:spcPts val="300"/>
+              </a:spcAft>
+            </a:pPr>
+            <a:r>
+              <a:rPr sz="1400" b="0">
+                <a:solidFill>
+                  <a:srgbClr val="555555"/>
+                </a:solidFill>
+                <a:latin typeface="Meiryo UI"/>
+              </a:rPr>
+              <a:t>同時接続の多い拠点では、DS-Lite でも事前に事業者に確認してください</a:t>
+            </a:r>
+          </a:p>
+          <a:p>
+            <a:pPr algn="l">
+              <a:spcAft>
+                <a:spcPts val="700"/>
+              </a:spcAft>
+            </a:pPr>
+            <a:r>
+              <a:rPr sz="1700" b="1">
                 <a:solidFill>
                   <a:srgbClr val="1F3355"/>
                 </a:solidFill>
@@ -10269,11 +10617,11 @@
           <a:p>
             <a:pPr lvl="1" algn="l">
               <a:spcAft>
-                <a:spcPts val="500"/>
-              </a:spcAft>
-            </a:pPr>
-            <a:r>
-              <a:rPr sz="1600" b="0">
+                <a:spcPts val="300"/>
+              </a:spcAft>
+            </a:pPr>
+            <a:r>
+              <a:rPr sz="1400" b="0">
                 <a:solidFill>
                   <a:srgbClr val="555555"/>
                 </a:solidFill>
@@ -10285,11 +10633,11 @@
           <a:p>
             <a:pPr lvl="1" algn="l">
               <a:spcAft>
-                <a:spcPts val="500"/>
-              </a:spcAft>
-            </a:pPr>
-            <a:r>
-              <a:rPr sz="1600" b="0">
+                <a:spcPts val="300"/>
+              </a:spcAft>
+            </a:pPr>
+            <a:r>
+              <a:rPr sz="1400" b="0">
                 <a:solidFill>
                   <a:srgbClr val="555555"/>
                 </a:solidFill>
@@ -10383,7 +10731,7 @@
                 </a:solidFill>
                 <a:latin typeface="Meiryo UI"/>
               </a:rPr>
-              <a:t>「計算で決まる」って、どういうこと?</a:t>
+              <a:t>MAP-E — IPv4 アドレスを他人と分け合う</a:t>
             </a:r>
           </a:p>
         </p:txBody>
@@ -10455,129 +10803,225 @@
           <a:p>
             <a:pPr algn="l">
               <a:spcAft>
-                <a:spcPts val="1000"/>
-              </a:spcAft>
-            </a:pPr>
-            <a:r>
-              <a:rPr sz="2000" b="1">
+                <a:spcPts val="800"/>
+              </a:spcAft>
+            </a:pPr>
+            <a:r>
+              <a:rPr sz="1800" b="1">
                 <a:solidFill>
                   <a:srgbClr val="1F3355"/>
                 </a:solidFill>
                 <a:latin typeface="Meiryo UI"/>
               </a:rPr>
-              <a:t>式は覚えなくていいです。知っておくべきは 3 つだけ</a:t>
+              <a:t>その前に: NAT は「アドレス + ポート番号」の組で通信を見分けています</a:t>
             </a:r>
           </a:p>
           <a:p>
             <a:pPr lvl="1" algn="l">
               <a:spcAft>
-                <a:spcPts val="600"/>
-              </a:spcAft>
-            </a:pPr>
-            <a:r>
-              <a:rPr sz="1700" b="0">
+                <a:spcPts val="400"/>
+              </a:spcAft>
+            </a:pPr>
+            <a:r>
+              <a:rPr sz="1500" b="0">
                 <a:solidFill>
                   <a:srgbClr val="555555"/>
                 </a:solidFill>
                 <a:latin typeface="Meiryo UI"/>
               </a:rPr>
-              <a:t>① 降ってきた IPv6 の 決められた位置のビット が、</a:t>
+              <a:t>だから ポート番号を分担すれば、1 個のアドレスを何人かで共有できます</a:t>
             </a:r>
           </a:p>
           <a:p>
             <a:pPr lvl="1" algn="l">
               <a:spcAft>
-                <a:spcPts val="600"/>
-              </a:spcAft>
-            </a:pPr>
-            <a:r>
-              <a:rPr sz="1700" b="0">
+                <a:spcPts val="400"/>
+              </a:spcAft>
+            </a:pPr>
+            <a:r>
+              <a:rPr sz="1500" b="0">
                 <a:solidFill>
                   <a:srgbClr val="555555"/>
                 </a:solidFill>
                 <a:latin typeface="Meiryo UI"/>
               </a:rPr>
-              <a:t>   共有 IPv4 アドレスの一部 と 自分のポート番号の素 になります</a:t>
+              <a:t>MAP-E はこれを「事業者と利用者の間」でやる仕組みです</a:t>
+            </a:r>
+          </a:p>
+          <a:p>
+            <a:pPr algn="l">
+              <a:spcAft>
+                <a:spcPts val="800"/>
+              </a:spcAft>
+            </a:pPr>
+            <a:r>
+              <a:rPr sz="1800" b="1">
+                <a:solidFill>
+                  <a:srgbClr val="1F3355"/>
+                </a:solidFill>
+                <a:latin typeface="Meiryo UI"/>
+              </a:rPr>
+              <a:t>1 個の IPv4 アドレスを何人かで分け合い、使えるポート番号を分担します</a:t>
             </a:r>
           </a:p>
           <a:p>
             <a:pPr lvl="1" algn="l">
               <a:spcAft>
-                <a:spcPts val="600"/>
-              </a:spcAft>
-            </a:pPr>
-            <a:r>
-              <a:rPr sz="1700" b="0">
+                <a:spcPts val="400"/>
+              </a:spcAft>
+            </a:pPr>
+            <a:r>
+              <a:rPr sz="1500" b="0">
                 <a:solidFill>
                   <a:srgbClr val="555555"/>
                 </a:solidFill>
                 <a:latin typeface="Meiryo UI"/>
               </a:rPr>
-              <a:t>② 計算するのは CPE です。人間が計算する場面はありません</a:t>
+              <a:t>グローバル IPv4 アドレスは他人と共有</a:t>
             </a:r>
           </a:p>
           <a:p>
             <a:pPr lvl="1" algn="l">
               <a:spcAft>
-                <a:spcPts val="600"/>
-              </a:spcAft>
-            </a:pPr>
-            <a:r>
-              <a:rPr sz="1700" b="0">
+                <a:spcPts val="400"/>
+              </a:spcAft>
+            </a:pPr>
+            <a:r>
+              <a:rPr sz="1500" b="0">
                 <a:solidFill>
                   <a:srgbClr val="555555"/>
                 </a:solidFill>
                 <a:latin typeface="Meiryo UI"/>
               </a:rPr>
-              <a:t>③ だから「計算で一意に決まる = こちらでは選べない」。ここだけ覚えてください</a:t>
+              <a:t>代わりに「あなたはこのポート番号を使ってください」と範囲が決められる</a:t>
+            </a:r>
+          </a:p>
+          <a:p>
+            <a:pPr lvl="1" algn="l">
+              <a:spcAft>
+                <a:spcPts val="400"/>
+              </a:spcAft>
+            </a:pPr>
+            <a:r>
+              <a:rPr sz="1500" b="0">
+                <a:solidFill>
+                  <a:srgbClr val="555555"/>
+                </a:solidFill>
+                <a:latin typeface="Meiryo UI"/>
+              </a:rPr>
+              <a:t>どれを使うかは、降ってきた IPv6 の「住所の前半」(プレフィックス) から計算で決まります</a:t>
             </a:r>
           </a:p>
           <a:p>
             <a:pPr algn="l">
               <a:spcAft>
-                <a:spcPts val="1000"/>
-              </a:spcAft>
-            </a:pPr>
-            <a:r>
-              <a:rPr sz="2000" b="1">
+                <a:spcPts val="800"/>
+              </a:spcAft>
+            </a:pPr>
+            <a:r>
+              <a:rPr sz="1800" b="1">
+                <a:solidFill>
+                  <a:srgbClr val="1F3355"/>
+                </a:solidFill>
+                <a:latin typeface="Meiryo UI"/>
+              </a:rPr>
+              <a:t>うちの検証環境で実際に計算した例 (CPE の自動計算と完全に一致しました)</a:t>
+            </a:r>
+          </a:p>
+          <a:p>
+            <a:pPr lvl="1" algn="l">
+              <a:spcAft>
+                <a:spcPts val="400"/>
+              </a:spcAft>
+            </a:pPr>
+            <a:r>
+              <a:rPr sz="1500" b="0">
+                <a:solidFill>
+                  <a:srgbClr val="0B6040"/>
+                </a:solidFill>
+                <a:latin typeface="Consolas"/>
+              </a:rPr>
+              <a:t>降ってきた IPv6      2001:db8:100a:500::/56</a:t>
+            </a:r>
+          </a:p>
+          <a:p>
+            <a:pPr lvl="1" algn="l">
+              <a:spcAft>
+                <a:spcPts val="400"/>
+              </a:spcAft>
+            </a:pPr>
+            <a:r>
+              <a:rPr sz="1500" b="0">
+                <a:solidFill>
+                  <a:srgbClr val="0B6040"/>
+                </a:solidFill>
+                <a:latin typeface="Consolas"/>
+              </a:rPr>
+              <a:t>計算で出た共有 IPv4  198.51.100.10</a:t>
+            </a:r>
+          </a:p>
+          <a:p>
+            <a:pPr lvl="1" algn="l">
+              <a:spcAft>
+                <a:spcPts val="400"/>
+              </a:spcAft>
+            </a:pPr>
+            <a:r>
+              <a:rPr sz="1500" b="0">
+                <a:solidFill>
+                  <a:srgbClr val="0B6040"/>
+                </a:solidFill>
+                <a:latin typeface="Consolas"/>
+              </a:rPr>
+              <a:t>使えるポート        240 個 (連続ではなく、とびとびの番号。最初は 4176〜4191)</a:t>
+            </a:r>
+          </a:p>
+          <a:p>
+            <a:pPr algn="l">
+              <a:spcAft>
+                <a:spcPts val="800"/>
+              </a:spcAft>
+            </a:pPr>
+            <a:r>
+              <a:rPr sz="1800" b="1">
                 <a:solidFill>
                   <a:srgbClr val="C0392B"/>
                 </a:solidFill>
                 <a:latin typeface="Meiryo UI"/>
               </a:rPr>
-              <a:t>「なんで 80 番が使えないの?」の答えもここです</a:t>
+              <a:t>ポートは全部で 65536 個あるのに、使えるのは 240 個です</a:t>
             </a:r>
           </a:p>
           <a:p>
             <a:pPr lvl="1" algn="l">
               <a:spcAft>
-                <a:spcPts val="600"/>
-              </a:spcAft>
-            </a:pPr>
-            <a:r>
-              <a:rPr sz="1700" b="0">
+                <a:spcPts val="400"/>
+              </a:spcAft>
+            </a:pPr>
+            <a:r>
+              <a:rPr sz="1500" b="0">
                 <a:solidFill>
                   <a:srgbClr val="555555"/>
                 </a:solidFill>
                 <a:latin typeface="Meiryo UI"/>
               </a:rPr>
-              <a:t>ポート番号は計算の結果として決まるので、若い番号 (0〜4095) は誰にも配られません</a:t>
+              <a:t>実サービスでは v6プラスが 240 個、OCN バーチャルコネクトが 1008 個と言われています</a:t>
             </a:r>
           </a:p>
           <a:p>
             <a:pPr lvl="1" algn="l">
               <a:spcAft>
-                <a:spcPts val="600"/>
-              </a:spcAft>
-            </a:pPr>
-            <a:r>
-              <a:rPr sz="1700" b="0">
+                <a:spcPts val="400"/>
+              </a:spcAft>
+            </a:pPr>
+            <a:r>
+              <a:rPr sz="1500" b="0">
                 <a:solidFill>
                   <a:srgbClr val="555555"/>
                 </a:solidFill>
                 <a:latin typeface="Meiryo UI"/>
               </a:rPr>
-              <a:t>選べないから 80 番が来ない、という順番です</a:t>
+              <a:t>ブラウザは 1 タブで数十本張ります。台数が多い拠点や監視系があると足りません</a:t>
             </a:r>
           </a:p>
         </p:txBody>
@@ -10612,7 +11056,7 @@
                 </a:solidFill>
                 <a:latin typeface="Meiryo UI"/>
               </a:rPr>
-              <a:t>手計算のやり方を知りたい人へ: study-guide.md §1.5 に例題があります。案件では不要です</a:t>
+              <a:t>教科書: 24.4「MAP-E、MAP-T、4rd」(p.425) / 24.3「A+P」(p.423)</a:t>
             </a:r>
           </a:p>
         </p:txBody>
@@ -10665,7 +11109,7 @@
                 </a:solidFill>
                 <a:latin typeface="Meiryo UI"/>
               </a:rPr>
-              <a:t>MAP-E — IPv4 アドレスを他人と分け合う</a:t>
+              <a:t>「計算で決まる」って、どういうこと?</a:t>
             </a:r>
           </a:p>
         </p:txBody>
@@ -10747,7 +11191,7 @@
                 </a:solidFill>
                 <a:latin typeface="Meiryo UI"/>
               </a:rPr>
-              <a:t>1 個の IPv4 アドレスを何人かで分け合い、使えるポート番号を分担します</a:t>
+              <a:t>式は覚えなくていいです。知っておくべきは 3 つだけ</a:t>
             </a:r>
           </a:p>
           <a:p>
@@ -10763,7 +11207,7 @@
                 </a:solidFill>
                 <a:latin typeface="Meiryo UI"/>
               </a:rPr>
-              <a:t>グローバル IPv4 アドレスは他人と共有</a:t>
+              <a:t>① 降ってきた IPv6 の 決められた位置のビット が、</a:t>
             </a:r>
           </a:p>
           <a:p>
@@ -10779,7 +11223,7 @@
                 </a:solidFill>
                 <a:latin typeface="Meiryo UI"/>
               </a:rPr>
-              <a:t>代わりに「あなたはこのポート番号を使ってください」と範囲が決められる</a:t>
+              <a:t>   共有 IPv4 アドレスの一部 と 自分のポート番号の素 になります</a:t>
             </a:r>
           </a:p>
           <a:p>
@@ -10795,7 +11239,23 @@
                 </a:solidFill>
                 <a:latin typeface="Meiryo UI"/>
               </a:rPr>
-              <a:t>どれを使うかは、降ってきた IPv6 の「住所の前半」(プレフィックス) から計算で決まります</a:t>
+              <a:t>② 計算するのは CPE です。人間が計算する場面はありません</a:t>
+            </a:r>
+          </a:p>
+          <a:p>
+            <a:pPr lvl="1" algn="l">
+              <a:spcAft>
+                <a:spcPts val="600"/>
+              </a:spcAft>
+            </a:pPr>
+            <a:r>
+              <a:rPr sz="1700" b="0">
+                <a:solidFill>
+                  <a:srgbClr val="555555"/>
+                </a:solidFill>
+                <a:latin typeface="Meiryo UI"/>
+              </a:rPr>
+              <a:t>③ だから「計算で一意に決まる = こちらでは選べない」。ここだけ覚えてください</a:t>
             </a:r>
           </a:p>
           <a:p>
@@ -10807,11 +11267,11 @@
             <a:r>
               <a:rPr sz="2000" b="1">
                 <a:solidFill>
-                  <a:srgbClr val="1F3355"/>
-                </a:solidFill>
-                <a:latin typeface="Meiryo UI"/>
-              </a:rPr>
-              <a:t>うちの検証環境で実際に計算した例 (CPE の自動計算と完全に一致しました)</a:t>
+                  <a:srgbClr val="C0392B"/>
+                </a:solidFill>
+                <a:latin typeface="Meiryo UI"/>
+              </a:rPr>
+              <a:t>「なんで 80 番が使えないの?」の答えもここです</a:t>
             </a:r>
           </a:p>
           <a:p>
@@ -10823,11 +11283,11 @@
             <a:r>
               <a:rPr sz="1700" b="0">
                 <a:solidFill>
-                  <a:srgbClr val="0B6040"/>
-                </a:solidFill>
-                <a:latin typeface="Consolas"/>
-              </a:rPr>
-              <a:t>降ってきた IPv6      2001:db8:100a:500::/56</a:t>
+                  <a:srgbClr val="555555"/>
+                </a:solidFill>
+                <a:latin typeface="Meiryo UI"/>
+              </a:rPr>
+              <a:t>ウェルノウンポート (0〜1023) は、どのサービスでも誰にも配られません</a:t>
             </a:r>
           </a:p>
           <a:p>
@@ -10839,11 +11299,11 @@
             <a:r>
               <a:rPr sz="1700" b="0">
                 <a:solidFill>
-                  <a:srgbClr val="0B6040"/>
-                </a:solidFill>
-                <a:latin typeface="Consolas"/>
-              </a:rPr>
-              <a:t>計算で出た共有 IPv4  198.51.100.10</a:t>
+                  <a:srgbClr val="555555"/>
+                </a:solidFill>
+                <a:latin typeface="Meiryo UI"/>
+              </a:rPr>
+              <a:t>v6プラスのように、さらに広く (0〜4095) 除外するサービスもあります</a:t>
             </a:r>
           </a:p>
           <a:p>
@@ -10855,11 +11315,11 @@
             <a:r>
               <a:rPr sz="1700" b="0">
                 <a:solidFill>
-                  <a:srgbClr val="0B6040"/>
-                </a:solidFill>
-                <a:latin typeface="Consolas"/>
-              </a:rPr>
-              <a:t>使えるポート        240 個 (連続ではなく、とびとびの番号。最初は 4176〜4191)</a:t>
+                  <a:srgbClr val="555555"/>
+                </a:solidFill>
+                <a:latin typeface="Meiryo UI"/>
+              </a:rPr>
+              <a:t>選べないから 80 番が来ない、という順番です</a:t>
             </a:r>
           </a:p>
           <a:p>
@@ -10875,7 +11335,7 @@
                 </a:solidFill>
                 <a:latin typeface="Meiryo UI"/>
               </a:rPr>
-              <a:t>ポートは全部で 65536 個あるのに、使えるのは 240 個です</a:t>
+              <a:t>※ 240 は「割当の構造値」です</a:t>
             </a:r>
           </a:p>
           <a:p>
@@ -10891,7 +11351,7 @@
                 </a:solidFill>
                 <a:latin typeface="Meiryo UI"/>
               </a:rPr>
-              <a:t>実サービスでは v6プラスが 240 個、OCN バーチャルコネクトが 1008 個と言われています</a:t>
+              <a:t>うちの検証では、参照 CPE (OpenWrt) が実際に使えたのは 16 個でした</a:t>
             </a:r>
           </a:p>
           <a:p>
@@ -10907,7 +11367,7 @@
                 </a:solidFill>
                 <a:latin typeface="Meiryo UI"/>
               </a:rPr>
-              <a:t>ブラウザは 1 タブで数十本張ります。台数が多い拠点や監視系があると足りません</a:t>
+              <a:t>実機で何個使えるかは、案件ごとに数え直してください</a:t>
             </a:r>
           </a:p>
         </p:txBody>
@@ -10942,7 +11402,7 @@
                 </a:solidFill>
                 <a:latin typeface="Meiryo UI"/>
               </a:rPr>
-              <a:t>教科書: 24.4「MAP-E、MAP-T、4rd」(p.425) / 24.3「A+P」(p.423)</a:t>
+              <a:t>手計算のやり方を知りたい人へ: study-guide.md に例題があります。案件では不要です</a:t>
             </a:r>
           </a:p>
         </p:txBody>
@@ -11924,7 +12384,7 @@
                 </a:solidFill>
                 <a:latin typeface="Meiryo UI"/>
               </a:rPr>
-              <a:t>※ 配布資料の巻末に「想定問答」6 問があります。あとで読んでください</a:t>
+              <a:t>※ 配布資料の巻末に「想定問答」8 問があります。あとで読んでください</a:t>
             </a:r>
           </a:p>
         </p:txBody>
@@ -12445,7 +12905,7 @@
                 </a:solidFill>
                 <a:latin typeface="Meiryo UI"/>
               </a:rPr>
-              <a:t>80 番や 443 番のような若い番号は、仕組みの上でそもそも配られません</a:t>
+              <a:t>80 番や 443 番のようなウェルノウンポート (0〜1023) は、仕組みの上でそもそも配られません</a:t>
             </a:r>
           </a:p>
           <a:p>
@@ -12808,7 +13268,7 @@
                           </a:solidFill>
                           <a:latin typeface="Meiryo UI"/>
                         </a:rPr>
-                        <a:t>不可。待ち受けるポートを選べません</a:t>
+                        <a:t>不可。決まった番号 (500) で待てません</a:t>
                       </a:r>
                     </a:p>
                   </a:txBody>
@@ -12995,7 +13455,7 @@
                 </a:solidFill>
                 <a:latin typeface="Meiryo UI"/>
               </a:rPr>
-              <a:t>待ち受けに使う UDP 500 / 4500 は若い番号なので MAP-E では配られません。3-4 の「80 番」と同じ理由です</a:t>
+              <a:t>待ち受けに使う UDP 500 はウェルノウンポートなので MAP-E では誰にも配られません。「80 番」と同じ理由です</a:t>
             </a:r>
           </a:p>
         </p:txBody>
@@ -13120,11 +13580,11 @@
           <a:p>
             <a:pPr algn="l">
               <a:spcAft>
-                <a:spcPts val="500"/>
-              </a:spcAft>
-            </a:pPr>
-            <a:r>
-              <a:rPr sz="1500" b="1">
+                <a:spcPts val="400"/>
+              </a:spcAft>
+            </a:pPr>
+            <a:r>
+              <a:rPr sz="1400" b="1">
                 <a:solidFill>
                   <a:srgbClr val="1F3355"/>
                 </a:solidFill>
@@ -13166,13 +13626,29 @@
             </a:r>
           </a:p>
           <a:p>
+            <a:pPr lvl="1" algn="l">
+              <a:spcAft>
+                <a:spcPts val="300"/>
+              </a:spcAft>
+            </a:pPr>
+            <a:r>
+              <a:rPr sz="1200" b="0">
+                <a:solidFill>
+                  <a:srgbClr val="555555"/>
+                </a:solidFill>
+                <a:latin typeface="Meiryo UI"/>
+              </a:rPr>
+              <a:t>500 はウェルノウンポート。MAP-E では誰にも配られないので、そこでは待てません</a:t>
+            </a:r>
+          </a:p>
+          <a:p>
             <a:pPr algn="l">
               <a:spcAft>
-                <a:spcPts val="500"/>
-              </a:spcAft>
-            </a:pPr>
-            <a:r>
-              <a:rPr sz="1500" b="1">
+                <a:spcPts val="400"/>
+              </a:spcAft>
+            </a:pPr>
+            <a:r>
+              <a:rPr sz="1400" b="1">
                 <a:solidFill>
                   <a:srgbClr val="C0392B"/>
                 </a:solidFill>
@@ -13232,11 +13708,11 @@
           <a:p>
             <a:pPr algn="l">
               <a:spcAft>
-                <a:spcPts val="500"/>
-              </a:spcAft>
-            </a:pPr>
-            <a:r>
-              <a:rPr sz="1500" b="1">
+                <a:spcPts val="400"/>
+              </a:spcAft>
+            </a:pPr>
+            <a:r>
+              <a:rPr sz="1400" b="1">
                 <a:solidFill>
                   <a:srgbClr val="1F3355"/>
                 </a:solidFill>
@@ -13248,11 +13724,11 @@
           <a:p>
             <a:pPr algn="l">
               <a:spcAft>
-                <a:spcPts val="500"/>
-              </a:spcAft>
-            </a:pPr>
-            <a:r>
-              <a:rPr sz="1500" b="1">
+                <a:spcPts val="400"/>
+              </a:spcAft>
+            </a:pPr>
+            <a:r>
+              <a:rPr sz="1400" b="1">
                 <a:solidFill>
                   <a:srgbClr val="1F3355"/>
                 </a:solidFill>
@@ -13280,11 +13756,11 @@
           <a:p>
             <a:pPr algn="l">
               <a:spcAft>
-                <a:spcPts val="500"/>
-              </a:spcAft>
-            </a:pPr>
-            <a:r>
-              <a:rPr sz="1500" b="1">
+                <a:spcPts val="400"/>
+              </a:spcAft>
+            </a:pPr>
+            <a:r>
+              <a:rPr sz="1400" b="1">
                 <a:solidFill>
                   <a:srgbClr val="1F3355"/>
                 </a:solidFill>
@@ -13328,11 +13804,11 @@
           <a:p>
             <a:pPr algn="l">
               <a:spcAft>
-                <a:spcPts val="500"/>
-              </a:spcAft>
-            </a:pPr>
-            <a:r>
-              <a:rPr sz="1500" b="1">
+                <a:spcPts val="400"/>
+              </a:spcAft>
+            </a:pPr>
+            <a:r>
+              <a:rPr sz="1400" b="1">
                 <a:solidFill>
                   <a:srgbClr val="1F3355"/>
                 </a:solidFill>
@@ -13376,11 +13852,11 @@
           <a:p>
             <a:pPr algn="l">
               <a:spcAft>
-                <a:spcPts val="500"/>
-              </a:spcAft>
-            </a:pPr>
-            <a:r>
-              <a:rPr sz="1500" b="1">
+                <a:spcPts val="400"/>
+              </a:spcAft>
+            </a:pPr>
+            <a:r>
+              <a:rPr sz="1400" b="1">
                 <a:solidFill>
                   <a:srgbClr val="C0392B"/>
                 </a:solidFill>
@@ -13953,7 +14429,7 @@
                 </a:solidFill>
                 <a:latin typeface="Meiryo UI"/>
               </a:rPr>
-              <a:t>何を再現しているのか</a:t>
+              <a:t>検証ラボの全体像</a:t>
             </a:r>
           </a:p>
           <a:p>
@@ -15532,7 +16008,7 @@
                           </a:solidFill>
                           <a:latin typeface="Meiryo UI"/>
                         </a:rPr>
-                        <a:t>3-5 で入れた「あの 1 行」が効いている</a:t>
+                        <a:t>MTU のページで入れた「あの 1 行」が効いている</a:t>
                       </a:r>
                     </a:p>
                   </a:txBody>
@@ -15790,7 +16266,7 @@
                           </a:solidFill>
                           <a:latin typeface="Meiryo UI"/>
                         </a:rPr>
-                        <a:t>新しい繋ぎ方。認証なしで、回線に直接つながる</a:t>
+                        <a:t>新しい繋ぎ方。認証なしで回線に直接つながる。利用者は回線契約で識別される</a:t>
                       </a:r>
                     </a:p>
                   </a:txBody>
@@ -16344,11 +16820,11 @@
           <a:p>
             <a:pPr algn="l">
               <a:spcAft>
-                <a:spcPts val="800"/>
-              </a:spcAft>
-            </a:pPr>
-            <a:r>
-              <a:rPr sz="1800" b="1">
+                <a:spcPts val="700"/>
+              </a:spcAft>
+            </a:pPr>
+            <a:r>
+              <a:rPr sz="1700" b="1">
                 <a:solidFill>
                   <a:srgbClr val="1F3355"/>
                 </a:solidFill>
@@ -16360,11 +16836,11 @@
           <a:p>
             <a:pPr algn="l">
               <a:spcAft>
-                <a:spcPts val="800"/>
-              </a:spcAft>
-            </a:pPr>
-            <a:r>
-              <a:rPr sz="1800" b="1">
+                <a:spcPts val="700"/>
+              </a:spcAft>
+            </a:pPr>
+            <a:r>
+              <a:rPr sz="1700" b="1">
                 <a:solidFill>
                   <a:srgbClr val="1F3355"/>
                 </a:solidFill>
@@ -16376,43 +16852,59 @@
           <a:p>
             <a:pPr lvl="1" algn="l">
               <a:spcAft>
-                <a:spcPts val="400"/>
-              </a:spcAft>
-            </a:pPr>
-            <a:r>
-              <a:rPr sz="1500" b="0">
+                <a:spcPts val="300"/>
+              </a:spcAft>
+            </a:pPr>
+            <a:r>
+              <a:rPr sz="1400" b="0">
                 <a:solidFill>
                   <a:srgbClr val="555555"/>
                 </a:solidFill>
                 <a:latin typeface="Meiryo UI"/>
               </a:rPr>
-              <a:t>検証スクリプトが全項目 PASS したのに、経路が間違っていたことがありました</a:t>
+              <a:t>検証スクリプトが全項目 PASS したのに、網側 NAT が効いていなかったことがありました</a:t>
             </a:r>
           </a:p>
           <a:p>
             <a:pPr lvl="1" algn="l">
               <a:spcAft>
-                <a:spcPts val="400"/>
-              </a:spcAft>
-            </a:pPr>
-            <a:r>
-              <a:rPr sz="1500" b="0">
+                <a:spcPts val="300"/>
+              </a:spcAft>
+            </a:pPr>
+            <a:r>
+              <a:rPr sz="1400" b="0">
                 <a:solidFill>
                   <a:srgbClr val="555555"/>
                 </a:solidFill>
                 <a:latin typeface="Meiryo UI"/>
               </a:rPr>
+              <a:t>トンネルは設計どおり通っていました。その先で変換が当たっていなかっただけです</a:t>
+            </a:r>
+          </a:p>
+          <a:p>
+            <a:pPr lvl="1" algn="l">
+              <a:spcAft>
+                <a:spcPts val="300"/>
+              </a:spcAft>
+            </a:pPr>
+            <a:r>
+              <a:rPr sz="1400" b="0">
+                <a:solidFill>
+                  <a:srgbClr val="555555"/>
+                </a:solidFill>
+                <a:latin typeface="Meiryo UI"/>
+              </a:rPr>
               <a:t>構成を誤った DS-Lite で PASS=10。出口を見たらクライアントの私設アドレスのままだった</a:t>
             </a:r>
           </a:p>
           <a:p>
             <a:pPr lvl="1" algn="l">
               <a:spcAft>
-                <a:spcPts val="400"/>
-              </a:spcAft>
-            </a:pPr>
-            <a:r>
-              <a:rPr sz="1500" b="0">
+                <a:spcPts val="300"/>
+              </a:spcAft>
+            </a:pPr>
+            <a:r>
+              <a:rPr sz="1400" b="0">
                 <a:solidFill>
                   <a:srgbClr val="555555"/>
                 </a:solidFill>
@@ -16424,11 +16916,11 @@
           <a:p>
             <a:pPr lvl="1" algn="l">
               <a:spcAft>
-                <a:spcPts val="400"/>
-              </a:spcAft>
-            </a:pPr>
-            <a:r>
-              <a:rPr sz="1500" b="1">
+                <a:spcPts val="300"/>
+              </a:spcAft>
+            </a:pPr>
+            <a:r>
+              <a:rPr sz="1400" b="1">
                 <a:solidFill>
                   <a:srgbClr val="C0392B"/>
                 </a:solidFill>
@@ -16440,11 +16932,11 @@
           <a:p>
             <a:pPr algn="l">
               <a:spcAft>
-                <a:spcPts val="800"/>
-              </a:spcAft>
-            </a:pPr>
-            <a:r>
-              <a:rPr sz="1800" b="1">
+                <a:spcPts val="700"/>
+              </a:spcAft>
+            </a:pPr>
+            <a:r>
+              <a:rPr sz="1700" b="1">
                 <a:solidFill>
                   <a:srgbClr val="1F3355"/>
                 </a:solidFill>
@@ -16456,11 +16948,11 @@
           <a:p>
             <a:pPr lvl="1" algn="l">
               <a:spcAft>
-                <a:spcPts val="400"/>
-              </a:spcAft>
-            </a:pPr>
-            <a:r>
-              <a:rPr sz="1500" b="0">
+                <a:spcPts val="300"/>
+              </a:spcAft>
+            </a:pPr>
+            <a:r>
+              <a:rPr sz="1400" b="0">
                 <a:solidFill>
                   <a:srgbClr val="555555"/>
                 </a:solidFill>
@@ -16472,11 +16964,11 @@
           <a:p>
             <a:pPr lvl="1" algn="l">
               <a:spcAft>
-                <a:spcPts val="400"/>
-              </a:spcAft>
-            </a:pPr>
-            <a:r>
-              <a:rPr sz="1500" b="0">
+                <a:spcPts val="300"/>
+              </a:spcAft>
+            </a:pPr>
+            <a:r>
+              <a:rPr sz="1400" b="0">
                 <a:solidFill>
                   <a:srgbClr val="555555"/>
                 </a:solidFill>
@@ -16488,11 +16980,11 @@
           <a:p>
             <a:pPr lvl="1" algn="l">
               <a:spcAft>
-                <a:spcPts val="400"/>
-              </a:spcAft>
-            </a:pPr>
-            <a:r>
-              <a:rPr sz="1500" b="0">
+                <a:spcPts val="300"/>
+              </a:spcAft>
+            </a:pPr>
+            <a:r>
+              <a:rPr sz="1400" b="0">
                 <a:solidFill>
                   <a:srgbClr val="555555"/>
                 </a:solidFill>
@@ -16504,11 +16996,11 @@
           <a:p>
             <a:pPr lvl="1" algn="l">
               <a:spcAft>
-                <a:spcPts val="400"/>
-              </a:spcAft>
-            </a:pPr>
-            <a:r>
-              <a:rPr sz="1500" b="1">
+                <a:spcPts val="300"/>
+              </a:spcAft>
+            </a:pPr>
+            <a:r>
+              <a:rPr sz="1400" b="1">
                 <a:solidFill>
                   <a:srgbClr val="C0392B"/>
                 </a:solidFill>
@@ -16520,11 +17012,11 @@
           <a:p>
             <a:pPr algn="l">
               <a:spcAft>
-                <a:spcPts val="800"/>
-              </a:spcAft>
-            </a:pPr>
-            <a:r>
-              <a:rPr sz="1800" b="1">
+                <a:spcPts val="700"/>
+              </a:spcAft>
+            </a:pPr>
+            <a:r>
+              <a:rPr sz="1700" b="1">
                 <a:solidFill>
                   <a:srgbClr val="1F3355"/>
                 </a:solidFill>
@@ -16536,11 +17028,11 @@
           <a:p>
             <a:pPr lvl="1" algn="l">
               <a:spcAft>
-                <a:spcPts val="400"/>
-              </a:spcAft>
-            </a:pPr>
-            <a:r>
-              <a:rPr sz="1500" b="0">
+                <a:spcPts val="300"/>
+              </a:spcAft>
+            </a:pPr>
+            <a:r>
+              <a:rPr sz="1400" b="0">
                 <a:solidFill>
                   <a:srgbClr val="555555"/>
                 </a:solidFill>
@@ -16552,11 +17044,11 @@
           <a:p>
             <a:pPr lvl="1" algn="l">
               <a:spcAft>
-                <a:spcPts val="400"/>
-              </a:spcAft>
-            </a:pPr>
-            <a:r>
-              <a:rPr sz="1500" b="0">
+                <a:spcPts val="300"/>
+              </a:spcAft>
+            </a:pPr>
+            <a:r>
+              <a:rPr sz="1400" b="0">
                 <a:solidFill>
                   <a:srgbClr val="555555"/>
                 </a:solidFill>
@@ -16568,11 +17060,11 @@
           <a:p>
             <a:pPr lvl="1" algn="l">
               <a:spcAft>
-                <a:spcPts val="400"/>
-              </a:spcAft>
-            </a:pPr>
-            <a:r>
-              <a:rPr sz="1500" b="1">
+                <a:spcPts val="300"/>
+              </a:spcAft>
+            </a:pPr>
+            <a:r>
+              <a:rPr sz="1400" b="1">
                 <a:solidFill>
                   <a:srgbClr val="C0392B"/>
                 </a:solidFill>
@@ -17435,6 +17927,22 @@
             </a:r>
           </a:p>
           <a:p>
+            <a:pPr lvl="1" algn="l">
+              <a:spcAft>
+                <a:spcPts val="600"/>
+              </a:spcAft>
+            </a:pPr>
+            <a:r>
+              <a:rPr sz="1700" b="0">
+                <a:solidFill>
+                  <a:srgbClr val="555555"/>
+                </a:solidFill>
+                <a:latin typeface="Meiryo UI"/>
+              </a:rPr>
+              <a:t>IPv4 と IPv6 には互換性がなく、そのままでは直接やり取りできないからです</a:t>
+            </a:r>
+          </a:p>
+          <a:p>
             <a:pPr algn="l">
               <a:spcAft>
                 <a:spcPts val="1000"/>
@@ -17512,6 +18020,54 @@
                 <a:latin typeface="Meiryo UI"/>
               </a:rPr>
               <a:t>いまは「2 通りあるんだな」だけで大丈夫です</a:t>
+            </a:r>
+          </a:p>
+          <a:p>
+            <a:pPr algn="l">
+              <a:spcAft>
+                <a:spcPts val="1000"/>
+              </a:spcAft>
+            </a:pPr>
+            <a:r>
+              <a:rPr sz="2000" b="1">
+                <a:solidFill>
+                  <a:srgbClr val="C0392B"/>
+                </a:solidFill>
+                <a:latin typeface="Meiryo UI"/>
+              </a:rPr>
+              <a:t>※ 1 つだけ言い直させてください</a:t>
+            </a:r>
+          </a:p>
+          <a:p>
+            <a:pPr lvl="1" algn="l">
+              <a:spcAft>
+                <a:spcPts val="600"/>
+              </a:spcAft>
+            </a:pPr>
+            <a:r>
+              <a:rPr sz="1700" b="0">
+                <a:solidFill>
+                  <a:srgbClr val="555555"/>
+                </a:solidFill>
+                <a:latin typeface="Meiryo UI"/>
+              </a:rPr>
+              <a:t>速いのは IPv6 そのものではなく、IPoE という「通り方」です</a:t>
+            </a:r>
+          </a:p>
+          <a:p>
+            <a:pPr lvl="1" algn="l">
+              <a:spcAft>
+                <a:spcPts val="600"/>
+              </a:spcAft>
+            </a:pPr>
+            <a:r>
+              <a:rPr sz="1700" b="0">
+                <a:solidFill>
+                  <a:srgbClr val="555555"/>
+                </a:solidFill>
+                <a:latin typeface="Meiryo UI"/>
+              </a:rPr>
+              <a:t>混んでいる装置を通らなくなるから速い。この区別が後で効いてきます</a:t>
             </a:r>
           </a:p>
         </p:txBody>

--- a/docs/ipoe-lab/slides/setsumeikai.pptx
+++ b/docs/ipoe-lab/slides/setsumeikai.pptx
@@ -47,6 +47,9 @@
     <p:sldId id="295" r:id="rId47"/>
     <p:sldId id="296" r:id="rId48"/>
     <p:sldId id="297" r:id="rId49"/>
+    <p:sldId id="298" r:id="rId50"/>
+    <p:sldId id="299" r:id="rId51"/>
+    <p:sldId id="300" r:id="rId52"/>
   </p:sldIdLst>
   <p:sldSz cx="12191695" cy="6858000" type="screen4x3"/>
   <p:notesSz cx="6858000" cy="9144000"/>
@@ -588,6 +591,101 @@
 </p:notes>
 </file>
 
+<file path=ppt/notesSlides/notesSlide10.xml><?xml version="1.0" encoding="utf-8"?>
+<p:notes xmlns:a="http://schemas.openxmlformats.org/drawingml/2006/main" xmlns:p="http://schemas.openxmlformats.org/presentationml/2006/main" xmlns:r="http://schemas.openxmlformats.org/officeDocument/2006/relationships">
+  <p:cSld>
+    <p:spTree>
+      <p:nvGrpSpPr>
+        <p:cNvPr id="1" name=""/>
+        <p:cNvGrpSpPr/>
+        <p:nvPr/>
+      </p:nvGrpSpPr>
+      <p:grpSpPr>
+        <a:xfrm>
+          <a:off x="0" y="0"/>
+          <a:ext cx="0" cy="0"/>
+          <a:chOff x="0" y="0"/>
+          <a:chExt cx="0" cy="0"/>
+        </a:xfrm>
+      </p:grpSpPr>
+      <p:sp>
+        <p:nvSpPr>
+          <p:cNvPr id="2" name="Slide Image Placeholder 1"/>
+          <p:cNvSpPr>
+            <a:spLocks noGrp="1"/>
+          </p:cNvSpPr>
+          <p:nvPr>
+            <p:ph type="sldImg" idx="2"/>
+          </p:nvPr>
+        </p:nvSpPr>
+        <p:spPr/>
+      </p:sp>
+      <p:sp>
+        <p:nvSpPr>
+          <p:cNvPr id="3" name="Notes Placeholder 2"/>
+          <p:cNvSpPr>
+            <a:spLocks noGrp="1"/>
+          </p:cNvSpPr>
+          <p:nvPr>
+            <p:ph type="body" idx="3" sz="quarter"/>
+          </p:nvPr>
+        </p:nvSpPr>
+        <p:spPr/>
+        <p:txBody>
+          <a:bodyPr/>
+          <a:lstStyle/>
+          <a:p>
+            <a:r>
+              <a:t>【話す人へ】</a:t>
+            </a:r>
+          </a:p>
+          <a:p>
+            <a:r>
+              <a:t>・**ここは IPv6 の知識の話ではない。**検証の姿勢の話なので、</a:t>
+            </a:r>
+          </a:p>
+          <a:p>
+            <a:r>
+              <a:t>  中堅・ベテランにも刺さる。時間が押していてもここは削らないこと。</a:t>
+            </a:r>
+          </a:p>
+          <a:p>
+            <a:r>
+              <a:t>・自分の失敗として話すこと。**「気をつけましょう」では伝わらない。**</a:t>
+            </a:r>
+          </a:p>
+          <a:p>
+            <a:r>
+              <a:t>・第3部の「計算のルールはどこから来るのか」の 1 枚が、</a:t>
+            </a:r>
+          </a:p>
+          <a:p>
+            <a:r>
+              <a:t>  **長らく資料から抜けていたこと自体**がこの症状だった、と繋げると効く。</a:t>
+            </a:r>
+          </a:p>
+        </p:txBody>
+      </p:sp>
+      <p:sp>
+        <p:nvSpPr>
+          <p:cNvPr id="4" name="Slide Number Placeholder 3"/>
+          <p:cNvSpPr>
+            <a:spLocks noGrp="1"/>
+          </p:cNvSpPr>
+          <p:nvPr>
+            <p:ph type="sldNum" idx="5" sz="quarter"/>
+          </p:nvPr>
+        </p:nvSpPr>
+        <p:spPr/>
+      </p:sp>
+    </p:spTree>
+  </p:cSld>
+  <p:clrMapOvr>
+    <a:masterClrMapping/>
+  </p:clrMapOvr>
+</p:notes>
+</file>
+
 <file path=ppt/notesSlides/notesSlide2.xml><?xml version="1.0" encoding="utf-8"?>
 <p:notes xmlns:a="http://schemas.openxmlformats.org/drawingml/2006/main" xmlns:p="http://schemas.openxmlformats.org/presentationml/2006/main" xmlns:r="http://schemas.openxmlformats.org/officeDocument/2006/relationships">
   <p:cSld>
@@ -1073,22 +1171,27 @@
           </a:p>
           <a:p>
             <a:r>
-              <a:t>・**表を出す前に 30 秒だけ問いかけると定着が変わる。**</a:t>
-            </a:r>
-          </a:p>
-          <a:p>
-            <a:r>
-              <a:t>  「transix のお客様から『事務所のカメラを外から見たい』と言われました。できますか?」</a:t>
-            </a:r>
-          </a:p>
-          <a:p>
-            <a:r>
-              <a:t>  「隣と 10 秒相談してください」→ そのあと答え合わせとして表を出す。</a:t>
-            </a:r>
-          </a:p>
-          <a:p>
-            <a:r>
-              <a:t>・ここが今日の到達目標。**このページだけは絶対に巻かないこと。**</a:t>
+              <a:t>・**ここが「自動設定」の中身。**お客様が「ルータを繋いだら勝手に繋がった」と</a:t>
+            </a:r>
+          </a:p>
+          <a:p>
+            <a:r>
+              <a:t>  言うときに起きているのがこれ。</a:t>
+            </a:r>
+          </a:p>
+          <a:p>
+            <a:r>
+              <a:t>・**手動設定の機種が噛み合わない理由**もここ。対応表の意味が腑に落ちる。</a:t>
+            </a:r>
+          </a:p>
+          <a:p>
+            <a:r>
+              <a:t>・第4部 ④ の伏線。**この 1 枚が資料から抜けていたこと自体**が、</a:t>
+            </a:r>
+          </a:p>
+          <a:p>
+            <a:r>
+              <a:t>  検証環境にサーバが無かったことの裏返しだった、という話につなげる。</a:t>
             </a:r>
           </a:p>
         </p:txBody>
@@ -1114,6 +1217,96 @@
 </file>
 
 <file path=ppt/notesSlides/notesSlide8.xml><?xml version="1.0" encoding="utf-8"?>
+<p:notes xmlns:a="http://schemas.openxmlformats.org/drawingml/2006/main" xmlns:p="http://schemas.openxmlformats.org/presentationml/2006/main" xmlns:r="http://schemas.openxmlformats.org/officeDocument/2006/relationships">
+  <p:cSld>
+    <p:spTree>
+      <p:nvGrpSpPr>
+        <p:cNvPr id="1" name=""/>
+        <p:cNvGrpSpPr/>
+        <p:nvPr/>
+      </p:nvGrpSpPr>
+      <p:grpSpPr>
+        <a:xfrm>
+          <a:off x="0" y="0"/>
+          <a:ext cx="0" cy="0"/>
+          <a:chOff x="0" y="0"/>
+          <a:chExt cx="0" cy="0"/>
+        </a:xfrm>
+      </p:grpSpPr>
+      <p:sp>
+        <p:nvSpPr>
+          <p:cNvPr id="2" name="Slide Image Placeholder 1"/>
+          <p:cNvSpPr>
+            <a:spLocks noGrp="1"/>
+          </p:cNvSpPr>
+          <p:nvPr>
+            <p:ph type="sldImg" idx="2"/>
+          </p:nvPr>
+        </p:nvSpPr>
+        <p:spPr/>
+      </p:sp>
+      <p:sp>
+        <p:nvSpPr>
+          <p:cNvPr id="3" name="Notes Placeholder 2"/>
+          <p:cNvSpPr>
+            <a:spLocks noGrp="1"/>
+          </p:cNvSpPr>
+          <p:nvPr>
+            <p:ph type="body" idx="3" sz="quarter"/>
+          </p:nvPr>
+        </p:nvSpPr>
+        <p:spPr/>
+        <p:txBody>
+          <a:bodyPr/>
+          <a:lstStyle/>
+          <a:p>
+            <a:r>
+              <a:t>【話す人へ】</a:t>
+            </a:r>
+          </a:p>
+          <a:p>
+            <a:r>
+              <a:t>・**表を出す前に 30 秒だけ問いかけると定着が変わる。**</a:t>
+            </a:r>
+          </a:p>
+          <a:p>
+            <a:r>
+              <a:t>  「transix のお客様から『事務所のカメラを外から見たい』と言われました。できますか?」</a:t>
+            </a:r>
+          </a:p>
+          <a:p>
+            <a:r>
+              <a:t>  「隣と 10 秒相談してください」→ そのあと答え合わせとして表を出す。</a:t>
+            </a:r>
+          </a:p>
+          <a:p>
+            <a:r>
+              <a:t>・ここが今日の到達目標。**このページだけは絶対に巻かないこと。**</a:t>
+            </a:r>
+          </a:p>
+        </p:txBody>
+      </p:sp>
+      <p:sp>
+        <p:nvSpPr>
+          <p:cNvPr id="4" name="Slide Number Placeholder 3"/>
+          <p:cNvSpPr>
+            <a:spLocks noGrp="1"/>
+          </p:cNvSpPr>
+          <p:nvPr>
+            <p:ph type="sldNum" idx="5" sz="quarter"/>
+          </p:nvPr>
+        </p:nvSpPr>
+        <p:spPr/>
+      </p:sp>
+    </p:spTree>
+  </p:cSld>
+  <p:clrMapOvr>
+    <a:masterClrMapping/>
+  </p:clrMapOvr>
+</p:notes>
+</file>
+
+<file path=ppt/notesSlides/notesSlide9.xml><?xml version="1.0" encoding="utf-8"?>
 <p:notes xmlns:a="http://schemas.openxmlformats.org/drawingml/2006/main" xmlns:p="http://schemas.openxmlformats.org/presentationml/2006/main" xmlns:r="http://schemas.openxmlformats.org/officeDocument/2006/relationships">
   <p:cSld>
     <p:spTree>
@@ -9077,6 +9270,70 @@
             </a:r>
           </a:p>
           <a:p>
+            <a:pPr algn="l">
+              <a:spcAft>
+                <a:spcPts val="1000"/>
+              </a:spcAft>
+            </a:pPr>
+            <a:r>
+              <a:rPr sz="2000" b="1">
+                <a:solidFill>
+                  <a:srgbClr val="1F3355"/>
+                </a:solidFill>
+                <a:latin typeface="Meiryo UI"/>
+              </a:rPr>
+              <a:t>買い替え先は うちで実機検証しました</a:t>
+            </a:r>
+          </a:p>
+          <a:p>
+            <a:pPr lvl="1" algn="l">
+              <a:spcAft>
+                <a:spcPts val="600"/>
+              </a:spcAft>
+            </a:pPr>
+            <a:r>
+              <a:rPr sz="1700" b="0">
+                <a:solidFill>
+                  <a:srgbClr val="555555"/>
+                </a:solidFill>
+                <a:latin typeface="Meiryo UI"/>
+              </a:rPr>
+              <a:t>Cisco C1111-8P (IOS XE 17.09.05f) は MAP-E で通ります (第4部 4-4b)</a:t>
+            </a:r>
+          </a:p>
+          <a:p>
+            <a:pPr lvl="1" algn="l">
+              <a:spcAft>
+                <a:spcPts val="600"/>
+              </a:spcAft>
+            </a:pPr>
+            <a:r>
+              <a:rPr sz="1700" b="0">
+                <a:solidFill>
+                  <a:srgbClr val="555555"/>
+                </a:solidFill>
+                <a:latin typeface="Meiryo UI"/>
+              </a:rPr>
+              <a:t>本番と同じ ルール配布サーバ を建てて、CPE に自動取得させて確認しました</a:t>
+            </a:r>
+          </a:p>
+          <a:p>
+            <a:pPr lvl="1" algn="l">
+              <a:spcAft>
+                <a:spcPts val="600"/>
+              </a:spcAft>
+            </a:pPr>
+            <a:r>
+              <a:rPr sz="1700" b="1">
+                <a:solidFill>
+                  <a:srgbClr val="C0392B"/>
+                </a:solidFill>
+                <a:latin typeface="Meiryo UI"/>
+              </a:rPr>
+              <a:t>⚠ ただし 一度「この機種は使えない」と誤判断しかけました。理由は第4部で</a:t>
+            </a:r>
+          </a:p>
+          <a:p>
             <a:pPr lvl="1" algn="l">
               <a:spcAft>
                 <a:spcPts val="600"/>
@@ -11181,11 +11438,11 @@
           <a:p>
             <a:pPr algn="l">
               <a:spcAft>
-                <a:spcPts val="1000"/>
-              </a:spcAft>
-            </a:pPr>
-            <a:r>
-              <a:rPr sz="2000" b="1">
+                <a:spcPts val="900"/>
+              </a:spcAft>
+            </a:pPr>
+            <a:r>
+              <a:rPr sz="1900" b="1">
                 <a:solidFill>
                   <a:srgbClr val="1F3355"/>
                 </a:solidFill>
@@ -11197,11 +11454,11 @@
           <a:p>
             <a:pPr lvl="1" algn="l">
               <a:spcAft>
-                <a:spcPts val="600"/>
-              </a:spcAft>
-            </a:pPr>
-            <a:r>
-              <a:rPr sz="1700" b="0">
+                <a:spcPts val="500"/>
+              </a:spcAft>
+            </a:pPr>
+            <a:r>
+              <a:rPr sz="1600" b="0">
                 <a:solidFill>
                   <a:srgbClr val="555555"/>
                 </a:solidFill>
@@ -11213,11 +11470,11 @@
           <a:p>
             <a:pPr lvl="1" algn="l">
               <a:spcAft>
-                <a:spcPts val="600"/>
-              </a:spcAft>
-            </a:pPr>
-            <a:r>
-              <a:rPr sz="1700" b="0">
+                <a:spcPts val="500"/>
+              </a:spcAft>
+            </a:pPr>
+            <a:r>
+              <a:rPr sz="1600" b="0">
                 <a:solidFill>
                   <a:srgbClr val="555555"/>
                 </a:solidFill>
@@ -11229,11 +11486,11 @@
           <a:p>
             <a:pPr lvl="1" algn="l">
               <a:spcAft>
-                <a:spcPts val="600"/>
-              </a:spcAft>
-            </a:pPr>
-            <a:r>
-              <a:rPr sz="1700" b="0">
+                <a:spcPts val="500"/>
+              </a:spcAft>
+            </a:pPr>
+            <a:r>
+              <a:rPr sz="1600" b="0">
                 <a:solidFill>
                   <a:srgbClr val="555555"/>
                 </a:solidFill>
@@ -11245,11 +11502,11 @@
           <a:p>
             <a:pPr lvl="1" algn="l">
               <a:spcAft>
-                <a:spcPts val="600"/>
-              </a:spcAft>
-            </a:pPr>
-            <a:r>
-              <a:rPr sz="1700" b="0">
+                <a:spcPts val="500"/>
+              </a:spcAft>
+            </a:pPr>
+            <a:r>
+              <a:rPr sz="1600" b="0">
                 <a:solidFill>
                   <a:srgbClr val="555555"/>
                 </a:solidFill>
@@ -11261,11 +11518,11 @@
           <a:p>
             <a:pPr algn="l">
               <a:spcAft>
-                <a:spcPts val="1000"/>
-              </a:spcAft>
-            </a:pPr>
-            <a:r>
-              <a:rPr sz="2000" b="1">
+                <a:spcPts val="900"/>
+              </a:spcAft>
+            </a:pPr>
+            <a:r>
+              <a:rPr sz="1900" b="1">
                 <a:solidFill>
                   <a:srgbClr val="C0392B"/>
                 </a:solidFill>
@@ -11277,11 +11534,11 @@
           <a:p>
             <a:pPr lvl="1" algn="l">
               <a:spcAft>
-                <a:spcPts val="600"/>
-              </a:spcAft>
-            </a:pPr>
-            <a:r>
-              <a:rPr sz="1700" b="0">
+                <a:spcPts val="500"/>
+              </a:spcAft>
+            </a:pPr>
+            <a:r>
+              <a:rPr sz="1600" b="0">
                 <a:solidFill>
                   <a:srgbClr val="555555"/>
                 </a:solidFill>
@@ -11293,11 +11550,11 @@
           <a:p>
             <a:pPr lvl="1" algn="l">
               <a:spcAft>
-                <a:spcPts val="600"/>
-              </a:spcAft>
-            </a:pPr>
-            <a:r>
-              <a:rPr sz="1700" b="0">
+                <a:spcPts val="500"/>
+              </a:spcAft>
+            </a:pPr>
+            <a:r>
+              <a:rPr sz="1600" b="0">
                 <a:solidFill>
                   <a:srgbClr val="555555"/>
                 </a:solidFill>
@@ -11309,11 +11566,11 @@
           <a:p>
             <a:pPr lvl="1" algn="l">
               <a:spcAft>
-                <a:spcPts val="600"/>
-              </a:spcAft>
-            </a:pPr>
-            <a:r>
-              <a:rPr sz="1700" b="0">
+                <a:spcPts val="500"/>
+              </a:spcAft>
+            </a:pPr>
+            <a:r>
+              <a:rPr sz="1600" b="0">
                 <a:solidFill>
                   <a:srgbClr val="555555"/>
                 </a:solidFill>
@@ -11325,11 +11582,11 @@
           <a:p>
             <a:pPr algn="l">
               <a:spcAft>
-                <a:spcPts val="1000"/>
-              </a:spcAft>
-            </a:pPr>
-            <a:r>
-              <a:rPr sz="2000" b="1">
+                <a:spcPts val="900"/>
+              </a:spcAft>
+            </a:pPr>
+            <a:r>
+              <a:rPr sz="1900" b="1">
                 <a:solidFill>
                   <a:srgbClr val="C0392B"/>
                 </a:solidFill>
@@ -11341,11 +11598,11 @@
           <a:p>
             <a:pPr lvl="1" algn="l">
               <a:spcAft>
-                <a:spcPts val="600"/>
-              </a:spcAft>
-            </a:pPr>
-            <a:r>
-              <a:rPr sz="1700" b="0">
+                <a:spcPts val="500"/>
+              </a:spcAft>
+            </a:pPr>
+            <a:r>
+              <a:rPr sz="1600" b="0">
                 <a:solidFill>
                   <a:srgbClr val="555555"/>
                 </a:solidFill>
@@ -11357,17 +11614,33 @@
           <a:p>
             <a:pPr lvl="1" algn="l">
               <a:spcAft>
-                <a:spcPts val="600"/>
-              </a:spcAft>
-            </a:pPr>
-            <a:r>
-              <a:rPr sz="1700" b="0">
+                <a:spcPts val="500"/>
+              </a:spcAft>
+            </a:pPr>
+            <a:r>
+              <a:rPr sz="1600" b="0">
                 <a:solidFill>
                   <a:srgbClr val="555555"/>
                 </a:solidFill>
                 <a:latin typeface="Meiryo UI"/>
               </a:rPr>
-              <a:t>実機で何個使えるかは、案件ごとに数え直してください</a:t>
+              <a:t>実機 C1111-8P は 割当範囲内のポート (4145) を使うことを確認済み</a:t>
+            </a:r>
+          </a:p>
+          <a:p>
+            <a:pPr lvl="1" algn="l">
+              <a:spcAft>
+                <a:spcPts val="500"/>
+              </a:spcAft>
+            </a:pPr>
+            <a:r>
+              <a:rPr sz="1600" b="0">
+                <a:solidFill>
+                  <a:srgbClr val="555555"/>
+                </a:solidFill>
+                <a:latin typeface="Meiryo UI"/>
+              </a:rPr>
+              <a:t>ただし 240 個を使い切れるかは未測定。案件ごとに数え直してください</a:t>
             </a:r>
           </a:p>
         </p:txBody>
@@ -11455,7 +11728,7 @@
                 </a:solidFill>
                 <a:latin typeface="Meiryo UI"/>
               </a:rPr>
-              <a:t>「同時接続数を実測」って、どうやるのか</a:t>
+              <a:t>では、その「計算のルール」はどこから来るのか — これが「自動設定」の正体</a:t>
             </a:r>
           </a:p>
         </p:txBody>
@@ -11537,7 +11810,7 @@
                 </a:solidFill>
                 <a:latin typeface="Meiryo UI"/>
               </a:rPr>
-              <a:t>240 個で足りるかどうかは、測らないと分かりません</a:t>
+              <a:t>計算するには、IPv6 の住所のほかに ルール が要ります</a:t>
             </a:r>
           </a:p>
           <a:p>
@@ -11553,7 +11826,7 @@
                 </a:solidFill>
                 <a:latin typeface="Meiryo UI"/>
               </a:rPr>
-              <a:t>既設ルータで NAT のテーブル数を数えます</a:t>
+              <a:t>「どのビットを使うのか」「どの IPv4 の帯を分け合うのか」</a:t>
             </a:r>
           </a:p>
           <a:p>
@@ -11565,11 +11838,43 @@
             <a:r>
               <a:rPr sz="1500" b="0">
                 <a:solidFill>
+                  <a:srgbClr val="555555"/>
+                </a:solidFill>
+                <a:latin typeface="Meiryo UI"/>
+              </a:rPr>
+              <a:t>このルールは CPE が事業者のサーバから自動で取ってきます</a:t>
+            </a:r>
+          </a:p>
+          <a:p>
+            <a:pPr algn="l">
+              <a:spcAft>
+                <a:spcPts val="800"/>
+              </a:spcAft>
+            </a:pPr>
+            <a:r>
+              <a:rPr sz="1800" b="1">
+                <a:solidFill>
+                  <a:srgbClr val="1F3355"/>
+                </a:solidFill>
+                <a:latin typeface="Meiryo UI"/>
+              </a:rPr>
+              <a:t>起動してから通信できるまで</a:t>
+            </a:r>
+          </a:p>
+          <a:p>
+            <a:pPr lvl="1" algn="l">
+              <a:spcAft>
+                <a:spcPts val="400"/>
+              </a:spcAft>
+            </a:pPr>
+            <a:r>
+              <a:rPr sz="1500" b="0">
+                <a:solidFill>
                   <a:srgbClr val="0B6040"/>
                 </a:solidFill>
                 <a:latin typeface="Consolas"/>
               </a:rPr>
-              <a:t>Cisco なら show ip nat translations の行数</a:t>
+              <a:t>① CPE が起動する</a:t>
             </a:r>
           </a:p>
           <a:p>
@@ -11581,11 +11886,107 @@
             <a:r>
               <a:rPr sz="1500" b="0">
                 <a:solidFill>
+                  <a:srgbClr val="0B6040"/>
+                </a:solidFill>
+                <a:latin typeface="Consolas"/>
+              </a:rPr>
+              <a:t>② 事業者のルール配布サーバに HTTPS で問い合わせる</a:t>
+            </a:r>
+          </a:p>
+          <a:p>
+            <a:pPr lvl="1" algn="l">
+              <a:spcAft>
+                <a:spcPts val="400"/>
+              </a:spcAft>
+            </a:pPr>
+            <a:r>
+              <a:rPr sz="1500" b="0">
+                <a:solidFill>
+                  <a:srgbClr val="0B6040"/>
+                </a:solidFill>
+                <a:latin typeface="Consolas"/>
+              </a:rPr>
+              <a:t>     「私の IPv6 は 2001:db8:1014:300:: です。ルールをください」</a:t>
+            </a:r>
+          </a:p>
+          <a:p>
+            <a:pPr lvl="1" algn="l">
+              <a:spcAft>
+                <a:spcPts val="400"/>
+              </a:spcAft>
+            </a:pPr>
+            <a:r>
+              <a:rPr sz="1500" b="0">
+                <a:solidFill>
+                  <a:srgbClr val="0B6040"/>
+                </a:solidFill>
+                <a:latin typeface="Consolas"/>
+              </a:rPr>
+              <a:t>③ サーバがルールを返す 「この帯を、この分け方で使ってください」</a:t>
+            </a:r>
+          </a:p>
+          <a:p>
+            <a:pPr lvl="1" algn="l">
+              <a:spcAft>
+                <a:spcPts val="400"/>
+              </a:spcAft>
+            </a:pPr>
+            <a:r>
+              <a:rPr sz="1500" b="0">
+                <a:solidFill>
+                  <a:srgbClr val="0B6040"/>
+                </a:solidFill>
+                <a:latin typeface="Consolas"/>
+              </a:rPr>
+              <a:t>④ CPE が 自分の IPv6 と ルール から IPv4 とポート範囲を計算する</a:t>
+            </a:r>
+          </a:p>
+          <a:p>
+            <a:pPr algn="l">
+              <a:spcAft>
+                <a:spcPts val="800"/>
+              </a:spcAft>
+            </a:pPr>
+            <a:r>
+              <a:rPr sz="1800" b="1">
+                <a:solidFill>
+                  <a:srgbClr val="C0392B"/>
+                </a:solidFill>
+                <a:latin typeface="Meiryo UI"/>
+              </a:rPr>
+              <a:t>人が設定する場面はどこにもありません</a:t>
+            </a:r>
+          </a:p>
+          <a:p>
+            <a:pPr lvl="1" algn="l">
+              <a:spcAft>
+                <a:spcPts val="400"/>
+              </a:spcAft>
+            </a:pPr>
+            <a:r>
+              <a:rPr sz="1500" b="0">
+                <a:solidFill>
                   <a:srgbClr val="555555"/>
                 </a:solidFill>
                 <a:latin typeface="Meiryo UI"/>
               </a:rPr>
-              <a:t>業務時間帯に何回か測ってください。昼休みと夕方でまったく違います</a:t>
+              <a:t>「MAP-E に対応している」= この一連を自動でやれる、という意味です</a:t>
+            </a:r>
+          </a:p>
+          <a:p>
+            <a:pPr lvl="1" algn="l">
+              <a:spcAft>
+                <a:spcPts val="400"/>
+              </a:spcAft>
+            </a:pPr>
+            <a:r>
+              <a:rPr sz="1500" b="0">
+                <a:solidFill>
+                  <a:srgbClr val="555555"/>
+                </a:solidFill>
+                <a:latin typeface="Meiryo UI"/>
+              </a:rPr>
+              <a:t>対応表に無い機種で手動設定しても、この仕組みの外側なので噛み合いません</a:t>
             </a:r>
           </a:p>
           <a:p>
@@ -11601,7 +12002,7 @@
                 </a:solidFill>
                 <a:latin typeface="Meiryo UI"/>
               </a:rPr>
-              <a:t>目安は出せません</a:t>
+              <a:t>うちの検証環境にも、このサーバがありませんでした</a:t>
             </a:r>
           </a:p>
           <a:p>
@@ -11617,135 +12018,7 @@
                 </a:solidFill>
                 <a:latin typeface="Meiryo UI"/>
               </a:rPr>
-              <a:t>台数、業務アプリ、監視の有無で変わるので、他社の数字は当てになりません</a:t>
-            </a:r>
-          </a:p>
-          <a:p>
-            <a:pPr lvl="1" algn="l">
-              <a:spcAft>
-                <a:spcPts val="400"/>
-              </a:spcAft>
-            </a:pPr>
-            <a:r>
-              <a:rPr sz="1500" b="1">
-                <a:solidFill>
-                  <a:srgbClr val="C0392B"/>
-                </a:solidFill>
-                <a:latin typeface="Meiryo UI"/>
-              </a:rPr>
-              <a:t>「PC 30 台だから大丈夫」のような机上判断はしないでください</a:t>
-            </a:r>
-          </a:p>
-          <a:p>
-            <a:pPr algn="l">
-              <a:spcAft>
-                <a:spcPts val="800"/>
-              </a:spcAft>
-            </a:pPr>
-            <a:r>
-              <a:rPr sz="1800" b="1">
-                <a:solidFill>
-                  <a:srgbClr val="1F3355"/>
-                </a:solidFill>
-                <a:latin typeface="Meiryo UI"/>
-              </a:rPr>
-              <a:t>測ったあと、どう判断するか — 型を決めておきます</a:t>
-            </a:r>
-          </a:p>
-          <a:p>
-            <a:pPr lvl="1" algn="l">
-              <a:spcAft>
-                <a:spcPts val="400"/>
-              </a:spcAft>
-            </a:pPr>
-            <a:r>
-              <a:rPr sz="1500" b="1">
-                <a:solidFill>
-                  <a:srgbClr val="C0392B"/>
-                </a:solidFill>
-                <a:latin typeface="Meiryo UI"/>
-              </a:rPr>
-              <a:t>ピークの実測値 × 安全率 2 倍 が 割当ポート数を超えたら、MAP-E 単独は避ける</a:t>
-            </a:r>
-          </a:p>
-          <a:p>
-            <a:pPr lvl="1" algn="l">
-              <a:spcAft>
-                <a:spcPts val="400"/>
-              </a:spcAft>
-            </a:pPr>
-            <a:r>
-              <a:rPr sz="1500" b="0">
-                <a:solidFill>
-                  <a:srgbClr val="0B6040"/>
-                </a:solidFill>
-                <a:latin typeface="Consolas"/>
-              </a:rPr>
-              <a:t>例: ピーク 180 本 × 2 = 360 &gt; 240 → 固定 IP か PPPoE 併用に倒す</a:t>
-            </a:r>
-          </a:p>
-          <a:p>
-            <a:pPr lvl="1" algn="l">
-              <a:spcAft>
-                <a:spcPts val="400"/>
-              </a:spcAft>
-            </a:pPr>
-            <a:r>
-              <a:rPr sz="1500" b="0">
-                <a:solidFill>
-                  <a:srgbClr val="555555"/>
-                </a:solidFill>
-                <a:latin typeface="Meiryo UI"/>
-              </a:rPr>
-              <a:t>※ 安全率 2 倍は「この資料での仮置き」です。実績が貯まるまで社内で決め直してください</a:t>
-            </a:r>
-          </a:p>
-          <a:p>
-            <a:pPr algn="l">
-              <a:spcAft>
-                <a:spcPts val="800"/>
-              </a:spcAft>
-            </a:pPr>
-            <a:r>
-              <a:rPr sz="1800" b="1">
-                <a:solidFill>
-                  <a:srgbClr val="1F3355"/>
-                </a:solidFill>
-                <a:latin typeface="Meiryo UI"/>
-              </a:rPr>
-              <a:t>足りないと分かったら</a:t>
-            </a:r>
-          </a:p>
-          <a:p>
-            <a:pPr lvl="1" algn="l">
-              <a:spcAft>
-                <a:spcPts val="400"/>
-              </a:spcAft>
-            </a:pPr>
-            <a:r>
-              <a:rPr sz="1500" b="0">
-                <a:solidFill>
-                  <a:srgbClr val="555555"/>
-                </a:solidFill>
-                <a:latin typeface="Meiryo UI"/>
-              </a:rPr>
-              <a:t>MAP-E でもポート数の多い VNE を選べることがあります (OCN VC は 1008)</a:t>
-            </a:r>
-          </a:p>
-          <a:p>
-            <a:pPr lvl="1" algn="l">
-              <a:spcAft>
-                <a:spcPts val="400"/>
-              </a:spcAft>
-            </a:pPr>
-            <a:r>
-              <a:rPr sz="1500" b="0">
-                <a:solidFill>
-                  <a:srgbClr val="555555"/>
-                </a:solidFill>
-                <a:latin typeface="Meiryo UI"/>
-              </a:rPr>
-              <a:t>ただし VNE は選べないことが多いので、固定 IP か PPPoE 併用の検討になります</a:t>
+              <a:t>だから長いあいだ 本番には存在しないやり方 で検証していました (第4部 ④)</a:t>
             </a:r>
           </a:p>
         </p:txBody>
@@ -11759,6 +12032,660 @@
 </file>
 
 <file path=ppt/slides/slide29.xml><?xml version="1.0" encoding="utf-8"?>
+<p:sld xmlns:a="http://schemas.openxmlformats.org/drawingml/2006/main" xmlns:p="http://schemas.openxmlformats.org/presentationml/2006/main" xmlns:r="http://schemas.openxmlformats.org/officeDocument/2006/relationships">
+  <p:cSld>
+    <p:spTree>
+      <p:nvGrpSpPr>
+        <p:cNvPr id="1" name=""/>
+        <p:cNvGrpSpPr/>
+        <p:nvPr/>
+      </p:nvGrpSpPr>
+      <p:grpSpPr/>
+      <p:sp>
+        <p:nvSpPr>
+          <p:cNvPr id="2" name="TextBox 1"/>
+          <p:cNvSpPr txBox="1"/>
+          <p:nvPr/>
+        </p:nvSpPr>
+        <p:spPr>
+          <a:xfrm>
+            <a:off x="502920" y="320040"/>
+            <a:ext cx="11155680" cy="822960"/>
+          </a:xfrm>
+          <a:prstGeom prst="rect">
+            <a:avLst/>
+          </a:prstGeom>
+          <a:noFill/>
+        </p:spPr>
+        <p:txBody>
+          <a:bodyPr wrap="square">
+            <a:spAutoFit/>
+          </a:bodyPr>
+          <a:lstStyle/>
+          <a:p>
+            <a:pPr algn="l"/>
+            <a:r>
+              <a:rPr sz="2800" b="1">
+                <a:solidFill>
+                  <a:srgbClr val="1F3355"/>
+                </a:solidFill>
+                <a:latin typeface="Meiryo UI"/>
+              </a:rPr>
+              <a:t>「同時接続数を実測」って、どうやるのか</a:t>
+            </a:r>
+          </a:p>
+        </p:txBody>
+      </p:sp>
+      <p:sp>
+        <p:nvSpPr>
+          <p:cNvPr id="3" name="Rectangle 2"/>
+          <p:cNvSpPr/>
+          <p:nvPr/>
+        </p:nvSpPr>
+        <p:spPr>
+          <a:xfrm>
+            <a:off x="502920" y="1115568"/>
+            <a:ext cx="11155680" cy="31750"/>
+          </a:xfrm>
+          <a:prstGeom prst="rect">
+            <a:avLst/>
+          </a:prstGeom>
+          <a:solidFill>
+            <a:srgbClr val="007ACC"/>
+          </a:solidFill>
+          <a:ln>
+            <a:noFill/>
+          </a:ln>
+        </p:spPr>
+        <p:style>
+          <a:lnRef idx="1">
+            <a:schemeClr val="accent1"/>
+          </a:lnRef>
+          <a:fillRef idx="3">
+            <a:schemeClr val="accent1"/>
+          </a:fillRef>
+          <a:effectRef idx="2">
+            <a:schemeClr val="accent1"/>
+          </a:effectRef>
+          <a:fontRef idx="minor">
+            <a:schemeClr val="lt1"/>
+          </a:fontRef>
+        </p:style>
+        <p:txBody>
+          <a:bodyPr rtlCol="0" anchor="ctr"/>
+          <a:lstStyle/>
+          <a:p>
+            <a:pPr algn="ctr"/>
+          </a:p>
+        </p:txBody>
+      </p:sp>
+      <p:sp>
+        <p:nvSpPr>
+          <p:cNvPr id="4" name="TextBox 3"/>
+          <p:cNvSpPr txBox="1"/>
+          <p:nvPr/>
+        </p:nvSpPr>
+        <p:spPr>
+          <a:xfrm>
+            <a:off x="594360" y="1371600"/>
+            <a:ext cx="10972800" cy="4983480"/>
+          </a:xfrm>
+          <a:prstGeom prst="rect">
+            <a:avLst/>
+          </a:prstGeom>
+          <a:noFill/>
+        </p:spPr>
+        <p:txBody>
+          <a:bodyPr wrap="square">
+            <a:spAutoFit/>
+          </a:bodyPr>
+          <a:lstStyle/>
+          <a:p>
+            <a:pPr algn="l">
+              <a:spcAft>
+                <a:spcPts val="800"/>
+              </a:spcAft>
+            </a:pPr>
+            <a:r>
+              <a:rPr sz="1800" b="1">
+                <a:solidFill>
+                  <a:srgbClr val="1F3355"/>
+                </a:solidFill>
+                <a:latin typeface="Meiryo UI"/>
+              </a:rPr>
+              <a:t>240 個で足りるかどうかは、測らないと分かりません</a:t>
+            </a:r>
+          </a:p>
+          <a:p>
+            <a:pPr lvl="1" algn="l">
+              <a:spcAft>
+                <a:spcPts val="400"/>
+              </a:spcAft>
+            </a:pPr>
+            <a:r>
+              <a:rPr sz="1500" b="0">
+                <a:solidFill>
+                  <a:srgbClr val="555555"/>
+                </a:solidFill>
+                <a:latin typeface="Meiryo UI"/>
+              </a:rPr>
+              <a:t>既設ルータで NAT のテーブル数を数えます</a:t>
+            </a:r>
+          </a:p>
+          <a:p>
+            <a:pPr lvl="1" algn="l">
+              <a:spcAft>
+                <a:spcPts val="400"/>
+              </a:spcAft>
+            </a:pPr>
+            <a:r>
+              <a:rPr sz="1500" b="0">
+                <a:solidFill>
+                  <a:srgbClr val="0B6040"/>
+                </a:solidFill>
+                <a:latin typeface="Consolas"/>
+              </a:rPr>
+              <a:t>Cisco なら show ip nat translations の行数</a:t>
+            </a:r>
+          </a:p>
+          <a:p>
+            <a:pPr lvl="1" algn="l">
+              <a:spcAft>
+                <a:spcPts val="400"/>
+              </a:spcAft>
+            </a:pPr>
+            <a:r>
+              <a:rPr sz="1500" b="0">
+                <a:solidFill>
+                  <a:srgbClr val="555555"/>
+                </a:solidFill>
+                <a:latin typeface="Meiryo UI"/>
+              </a:rPr>
+              <a:t>業務時間帯に何回か測ってください。昼休みと夕方でまったく違います</a:t>
+            </a:r>
+          </a:p>
+          <a:p>
+            <a:pPr algn="l">
+              <a:spcAft>
+                <a:spcPts val="800"/>
+              </a:spcAft>
+            </a:pPr>
+            <a:r>
+              <a:rPr sz="1800" b="1">
+                <a:solidFill>
+                  <a:srgbClr val="C0392B"/>
+                </a:solidFill>
+                <a:latin typeface="Meiryo UI"/>
+              </a:rPr>
+              <a:t>目安は出せません</a:t>
+            </a:r>
+          </a:p>
+          <a:p>
+            <a:pPr lvl="1" algn="l">
+              <a:spcAft>
+                <a:spcPts val="400"/>
+              </a:spcAft>
+            </a:pPr>
+            <a:r>
+              <a:rPr sz="1500" b="0">
+                <a:solidFill>
+                  <a:srgbClr val="555555"/>
+                </a:solidFill>
+                <a:latin typeface="Meiryo UI"/>
+              </a:rPr>
+              <a:t>台数、業務アプリ、監視の有無で変わるので、他社の数字は当てになりません</a:t>
+            </a:r>
+          </a:p>
+          <a:p>
+            <a:pPr lvl="1" algn="l">
+              <a:spcAft>
+                <a:spcPts val="400"/>
+              </a:spcAft>
+            </a:pPr>
+            <a:r>
+              <a:rPr sz="1500" b="1">
+                <a:solidFill>
+                  <a:srgbClr val="C0392B"/>
+                </a:solidFill>
+                <a:latin typeface="Meiryo UI"/>
+              </a:rPr>
+              <a:t>「PC 30 台だから大丈夫」のような机上判断はしないでください</a:t>
+            </a:r>
+          </a:p>
+          <a:p>
+            <a:pPr algn="l">
+              <a:spcAft>
+                <a:spcPts val="800"/>
+              </a:spcAft>
+            </a:pPr>
+            <a:r>
+              <a:rPr sz="1800" b="1">
+                <a:solidFill>
+                  <a:srgbClr val="1F3355"/>
+                </a:solidFill>
+                <a:latin typeface="Meiryo UI"/>
+              </a:rPr>
+              <a:t>測ったあと、どう判断するか — 型を決めておきます</a:t>
+            </a:r>
+          </a:p>
+          <a:p>
+            <a:pPr lvl="1" algn="l">
+              <a:spcAft>
+                <a:spcPts val="400"/>
+              </a:spcAft>
+            </a:pPr>
+            <a:r>
+              <a:rPr sz="1500" b="1">
+                <a:solidFill>
+                  <a:srgbClr val="C0392B"/>
+                </a:solidFill>
+                <a:latin typeface="Meiryo UI"/>
+              </a:rPr>
+              <a:t>ピークの実測値 × 安全率 2 倍 が 割当ポート数を超えたら、MAP-E 単独は避ける</a:t>
+            </a:r>
+          </a:p>
+          <a:p>
+            <a:pPr lvl="1" algn="l">
+              <a:spcAft>
+                <a:spcPts val="400"/>
+              </a:spcAft>
+            </a:pPr>
+            <a:r>
+              <a:rPr sz="1500" b="0">
+                <a:solidFill>
+                  <a:srgbClr val="0B6040"/>
+                </a:solidFill>
+                <a:latin typeface="Consolas"/>
+              </a:rPr>
+              <a:t>例: ピーク 180 本 × 2 = 360 &gt; 240 → 固定 IP か PPPoE 併用に倒す</a:t>
+            </a:r>
+          </a:p>
+          <a:p>
+            <a:pPr lvl="1" algn="l">
+              <a:spcAft>
+                <a:spcPts val="400"/>
+              </a:spcAft>
+            </a:pPr>
+            <a:r>
+              <a:rPr sz="1500" b="0">
+                <a:solidFill>
+                  <a:srgbClr val="555555"/>
+                </a:solidFill>
+                <a:latin typeface="Meiryo UI"/>
+              </a:rPr>
+              <a:t>※ 安全率 2 倍は「この資料での仮置き」です。実績が貯まるまで社内で決め直してください</a:t>
+            </a:r>
+          </a:p>
+          <a:p>
+            <a:pPr algn="l">
+              <a:spcAft>
+                <a:spcPts val="800"/>
+              </a:spcAft>
+            </a:pPr>
+            <a:r>
+              <a:rPr sz="1800" b="1">
+                <a:solidFill>
+                  <a:srgbClr val="1F3355"/>
+                </a:solidFill>
+                <a:latin typeface="Meiryo UI"/>
+              </a:rPr>
+              <a:t>足りないと分かったら</a:t>
+            </a:r>
+          </a:p>
+          <a:p>
+            <a:pPr lvl="1" algn="l">
+              <a:spcAft>
+                <a:spcPts val="400"/>
+              </a:spcAft>
+            </a:pPr>
+            <a:r>
+              <a:rPr sz="1500" b="0">
+                <a:solidFill>
+                  <a:srgbClr val="555555"/>
+                </a:solidFill>
+                <a:latin typeface="Meiryo UI"/>
+              </a:rPr>
+              <a:t>MAP-E でもポート数の多い VNE を選べることがあります (OCN VC は 1008)</a:t>
+            </a:r>
+          </a:p>
+          <a:p>
+            <a:pPr lvl="1" algn="l">
+              <a:spcAft>
+                <a:spcPts val="400"/>
+              </a:spcAft>
+            </a:pPr>
+            <a:r>
+              <a:rPr sz="1500" b="0">
+                <a:solidFill>
+                  <a:srgbClr val="555555"/>
+                </a:solidFill>
+                <a:latin typeface="Meiryo UI"/>
+              </a:rPr>
+              <a:t>ただし VNE は選べないことが多いので、固定 IP か PPPoE 併用の検討になります</a:t>
+            </a:r>
+          </a:p>
+        </p:txBody>
+      </p:sp>
+    </p:spTree>
+  </p:cSld>
+  <p:clrMapOvr>
+    <a:masterClrMapping/>
+  </p:clrMapOvr>
+</p:sld>
+</file>
+
+<file path=ppt/slides/slide3.xml><?xml version="1.0" encoding="utf-8"?>
+<p:sld xmlns:a="http://schemas.openxmlformats.org/drawingml/2006/main" xmlns:p="http://schemas.openxmlformats.org/presentationml/2006/main" xmlns:r="http://schemas.openxmlformats.org/officeDocument/2006/relationships">
+  <p:cSld>
+    <p:spTree>
+      <p:nvGrpSpPr>
+        <p:cNvPr id="1" name=""/>
+        <p:cNvGrpSpPr/>
+        <p:nvPr/>
+      </p:nvGrpSpPr>
+      <p:grpSpPr/>
+      <p:sp>
+        <p:nvSpPr>
+          <p:cNvPr id="2" name="TextBox 1"/>
+          <p:cNvSpPr txBox="1"/>
+          <p:nvPr/>
+        </p:nvSpPr>
+        <p:spPr>
+          <a:xfrm>
+            <a:off x="502920" y="320040"/>
+            <a:ext cx="11155680" cy="822960"/>
+          </a:xfrm>
+          <a:prstGeom prst="rect">
+            <a:avLst/>
+          </a:prstGeom>
+          <a:noFill/>
+        </p:spPr>
+        <p:txBody>
+          <a:bodyPr wrap="square">
+            <a:spAutoFit/>
+          </a:bodyPr>
+          <a:lstStyle/>
+          <a:p>
+            <a:pPr algn="l"/>
+            <a:r>
+              <a:rPr sz="2800" b="1">
+                <a:solidFill>
+                  <a:srgbClr val="1F3355"/>
+                </a:solidFill>
+                <a:latin typeface="Meiryo UI"/>
+              </a:rPr>
+              <a:t>今日 持ち帰ってほしいこと</a:t>
+            </a:r>
+          </a:p>
+        </p:txBody>
+      </p:sp>
+      <p:sp>
+        <p:nvSpPr>
+          <p:cNvPr id="3" name="Rectangle 2"/>
+          <p:cNvSpPr/>
+          <p:nvPr/>
+        </p:nvSpPr>
+        <p:spPr>
+          <a:xfrm>
+            <a:off x="502920" y="1115568"/>
+            <a:ext cx="11155680" cy="31750"/>
+          </a:xfrm>
+          <a:prstGeom prst="rect">
+            <a:avLst/>
+          </a:prstGeom>
+          <a:solidFill>
+            <a:srgbClr val="007ACC"/>
+          </a:solidFill>
+          <a:ln>
+            <a:noFill/>
+          </a:ln>
+        </p:spPr>
+        <p:style>
+          <a:lnRef idx="1">
+            <a:schemeClr val="accent1"/>
+          </a:lnRef>
+          <a:fillRef idx="3">
+            <a:schemeClr val="accent1"/>
+          </a:fillRef>
+          <a:effectRef idx="2">
+            <a:schemeClr val="accent1"/>
+          </a:effectRef>
+          <a:fontRef idx="minor">
+            <a:schemeClr val="lt1"/>
+          </a:fontRef>
+        </p:style>
+        <p:txBody>
+          <a:bodyPr rtlCol="0" anchor="ctr"/>
+          <a:lstStyle/>
+          <a:p>
+            <a:pPr algn="ctr"/>
+          </a:p>
+        </p:txBody>
+      </p:sp>
+      <p:sp>
+        <p:nvSpPr>
+          <p:cNvPr id="4" name="TextBox 3"/>
+          <p:cNvSpPr txBox="1"/>
+          <p:nvPr/>
+        </p:nvSpPr>
+        <p:spPr>
+          <a:xfrm>
+            <a:off x="594360" y="1371600"/>
+            <a:ext cx="10972800" cy="4983480"/>
+          </a:xfrm>
+          <a:prstGeom prst="rect">
+            <a:avLst/>
+          </a:prstGeom>
+          <a:noFill/>
+        </p:spPr>
+        <p:txBody>
+          <a:bodyPr wrap="square">
+            <a:spAutoFit/>
+          </a:bodyPr>
+          <a:lstStyle/>
+          <a:p>
+            <a:pPr algn="l">
+              <a:spcAft>
+                <a:spcPts val="1000"/>
+              </a:spcAft>
+            </a:pPr>
+            <a:r>
+              <a:rPr sz="2000" b="1">
+                <a:solidFill>
+                  <a:srgbClr val="1F3355"/>
+                </a:solidFill>
+                <a:latin typeface="Meiryo UI"/>
+              </a:rPr>
+              <a:t>3 つだけです</a:t>
+            </a:r>
+          </a:p>
+          <a:p>
+            <a:pPr lvl="1" algn="l">
+              <a:spcAft>
+                <a:spcPts val="600"/>
+              </a:spcAft>
+            </a:pPr>
+            <a:r>
+              <a:rPr sz="1700" b="0">
+                <a:solidFill>
+                  <a:srgbClr val="555555"/>
+                </a:solidFill>
+                <a:latin typeface="Meiryo UI"/>
+              </a:rPr>
+              <a:t>① なぜ IPv6 に変えるのか — 「アドレスが枯渇したから」ではありません</a:t>
+            </a:r>
+          </a:p>
+          <a:p>
+            <a:pPr lvl="1" algn="l">
+              <a:spcAft>
+                <a:spcPts val="600"/>
+              </a:spcAft>
+            </a:pPr>
+            <a:r>
+              <a:rPr sz="1700" b="0">
+                <a:solidFill>
+                  <a:srgbClr val="555555"/>
+                </a:solidFill>
+                <a:latin typeface="Meiryo UI"/>
+              </a:rPr>
+              <a:t>② お客様の回線がどの方式か、商品名から言えるようになる (v6プラス、transix など)</a:t>
+            </a:r>
+          </a:p>
+          <a:p>
+            <a:pPr lvl="1" algn="l">
+              <a:spcAft>
+                <a:spcPts val="600"/>
+              </a:spcAft>
+            </a:pPr>
+            <a:r>
+              <a:rPr sz="1700" b="0">
+                <a:solidFill>
+                  <a:srgbClr val="555555"/>
+                </a:solidFill>
+                <a:latin typeface="Meiryo UI"/>
+              </a:rPr>
+              <a:t>③ 「ポート開放できますか?」に即答できるようになる</a:t>
+            </a:r>
+          </a:p>
+          <a:p>
+            <a:pPr algn="l">
+              <a:spcAft>
+                <a:spcPts val="1000"/>
+              </a:spcAft>
+            </a:pPr>
+            <a:r>
+              <a:rPr sz="2000" b="1">
+                <a:solidFill>
+                  <a:srgbClr val="1F3355"/>
+                </a:solidFill>
+                <a:latin typeface="Meiryo UI"/>
+              </a:rPr>
+              <a:t>話す順番 — 大きい話から細かい話へ降ります</a:t>
+            </a:r>
+          </a:p>
+          <a:p>
+            <a:pPr lvl="1" algn="l">
+              <a:spcAft>
+                <a:spcPts val="600"/>
+              </a:spcAft>
+            </a:pPr>
+            <a:r>
+              <a:rPr sz="1700" b="0">
+                <a:solidFill>
+                  <a:srgbClr val="555555"/>
+                </a:solidFill>
+                <a:latin typeface="Meiryo UI"/>
+              </a:rPr>
+              <a:t>第0部  なぜこの話をするのか</a:t>
+            </a:r>
+          </a:p>
+          <a:p>
+            <a:pPr lvl="1" algn="l">
+              <a:spcAft>
+                <a:spcPts val="600"/>
+              </a:spcAft>
+            </a:pPr>
+            <a:r>
+              <a:rPr sz="1700" b="0">
+                <a:solidFill>
+                  <a:srgbClr val="555555"/>
+                </a:solidFill>
+                <a:latin typeface="Meiryo UI"/>
+              </a:rPr>
+              <a:t>第1部  IPv6 そのもの — どこの国でも同じ話</a:t>
+            </a:r>
+          </a:p>
+          <a:p>
+            <a:pPr lvl="1" algn="l">
+              <a:spcAft>
+                <a:spcPts val="600"/>
+              </a:spcAft>
+            </a:pPr>
+            <a:r>
+              <a:rPr sz="1700" b="0">
+                <a:solidFill>
+                  <a:srgbClr val="555555"/>
+                </a:solidFill>
+                <a:latin typeface="Meiryo UI"/>
+              </a:rPr>
+              <a:t>第2部  日本の回線 — ここからは日本だけの話</a:t>
+            </a:r>
+          </a:p>
+          <a:p>
+            <a:pPr lvl="1" algn="l">
+              <a:spcAft>
+                <a:spcPts val="600"/>
+              </a:spcAft>
+            </a:pPr>
+            <a:r>
+              <a:rPr sz="1700" b="0">
+                <a:solidFill>
+                  <a:srgbClr val="555555"/>
+                </a:solidFill>
+                <a:latin typeface="Meiryo UI"/>
+              </a:rPr>
+              <a:t>第3部  IPv4 をどうやって運ぶか — 今日の本題</a:t>
+            </a:r>
+          </a:p>
+          <a:p>
+            <a:pPr lvl="1" algn="l">
+              <a:spcAft>
+                <a:spcPts val="600"/>
+              </a:spcAft>
+            </a:pPr>
+            <a:r>
+              <a:rPr sz="1700" b="0">
+                <a:solidFill>
+                  <a:srgbClr val="555555"/>
+                </a:solidFill>
+                <a:latin typeface="Meiryo UI"/>
+              </a:rPr>
+              <a:t>第4部  検証環境で実際に見たもの</a:t>
+            </a:r>
+          </a:p>
+          <a:p>
+            <a:pPr algn="l">
+              <a:spcAft>
+                <a:spcPts val="1000"/>
+              </a:spcAft>
+            </a:pPr>
+            <a:r>
+              <a:rPr sz="2000" b="1">
+                <a:solidFill>
+                  <a:srgbClr val="C0392B"/>
+                </a:solidFill>
+                <a:latin typeface="Meiryo UI"/>
+              </a:rPr>
+              <a:t>迷ったらこのページに戻ってください。どこの話か分かれば必ずついてこられます</a:t>
+            </a:r>
+          </a:p>
+          <a:p>
+            <a:pPr algn="l">
+              <a:spcAft>
+                <a:spcPts val="1000"/>
+              </a:spcAft>
+            </a:pPr>
+            <a:r>
+              <a:rPr sz="2000" b="0">
+                <a:solidFill>
+                  <a:srgbClr val="1F3355"/>
+                </a:solidFill>
+                <a:latin typeface="Meiryo UI"/>
+              </a:rPr>
+              <a:t>※ 配布資料の巻末に「想定問答」8 問があります。あとで読んでください</a:t>
+            </a:r>
+          </a:p>
+        </p:txBody>
+      </p:sp>
+    </p:spTree>
+  </p:cSld>
+  <p:clrMapOvr>
+    <a:masterClrMapping/>
+  </p:clrMapOvr>
+</p:sld>
+</file>
+
+<file path=ppt/slides/slide30.xml><?xml version="1.0" encoding="utf-8"?>
 <p:sld xmlns:a="http://schemas.openxmlformats.org/drawingml/2006/main" xmlns:p="http://schemas.openxmlformats.org/presentationml/2006/main" xmlns:r="http://schemas.openxmlformats.org/officeDocument/2006/relationships">
   <p:cSld>
     <p:spTree>
@@ -12086,318 +13013,7 @@
 </p:sld>
 </file>
 
-<file path=ppt/slides/slide3.xml><?xml version="1.0" encoding="utf-8"?>
-<p:sld xmlns:a="http://schemas.openxmlformats.org/drawingml/2006/main" xmlns:p="http://schemas.openxmlformats.org/presentationml/2006/main" xmlns:r="http://schemas.openxmlformats.org/officeDocument/2006/relationships">
-  <p:cSld>
-    <p:spTree>
-      <p:nvGrpSpPr>
-        <p:cNvPr id="1" name=""/>
-        <p:cNvGrpSpPr/>
-        <p:nvPr/>
-      </p:nvGrpSpPr>
-      <p:grpSpPr/>
-      <p:sp>
-        <p:nvSpPr>
-          <p:cNvPr id="2" name="TextBox 1"/>
-          <p:cNvSpPr txBox="1"/>
-          <p:nvPr/>
-        </p:nvSpPr>
-        <p:spPr>
-          <a:xfrm>
-            <a:off x="502920" y="320040"/>
-            <a:ext cx="11155680" cy="822960"/>
-          </a:xfrm>
-          <a:prstGeom prst="rect">
-            <a:avLst/>
-          </a:prstGeom>
-          <a:noFill/>
-        </p:spPr>
-        <p:txBody>
-          <a:bodyPr wrap="square">
-            <a:spAutoFit/>
-          </a:bodyPr>
-          <a:lstStyle/>
-          <a:p>
-            <a:pPr algn="l"/>
-            <a:r>
-              <a:rPr sz="2800" b="1">
-                <a:solidFill>
-                  <a:srgbClr val="1F3355"/>
-                </a:solidFill>
-                <a:latin typeface="Meiryo UI"/>
-              </a:rPr>
-              <a:t>今日 持ち帰ってほしいこと</a:t>
-            </a:r>
-          </a:p>
-        </p:txBody>
-      </p:sp>
-      <p:sp>
-        <p:nvSpPr>
-          <p:cNvPr id="3" name="Rectangle 2"/>
-          <p:cNvSpPr/>
-          <p:nvPr/>
-        </p:nvSpPr>
-        <p:spPr>
-          <a:xfrm>
-            <a:off x="502920" y="1115568"/>
-            <a:ext cx="11155680" cy="31750"/>
-          </a:xfrm>
-          <a:prstGeom prst="rect">
-            <a:avLst/>
-          </a:prstGeom>
-          <a:solidFill>
-            <a:srgbClr val="007ACC"/>
-          </a:solidFill>
-          <a:ln>
-            <a:noFill/>
-          </a:ln>
-        </p:spPr>
-        <p:style>
-          <a:lnRef idx="1">
-            <a:schemeClr val="accent1"/>
-          </a:lnRef>
-          <a:fillRef idx="3">
-            <a:schemeClr val="accent1"/>
-          </a:fillRef>
-          <a:effectRef idx="2">
-            <a:schemeClr val="accent1"/>
-          </a:effectRef>
-          <a:fontRef idx="minor">
-            <a:schemeClr val="lt1"/>
-          </a:fontRef>
-        </p:style>
-        <p:txBody>
-          <a:bodyPr rtlCol="0" anchor="ctr"/>
-          <a:lstStyle/>
-          <a:p>
-            <a:pPr algn="ctr"/>
-          </a:p>
-        </p:txBody>
-      </p:sp>
-      <p:sp>
-        <p:nvSpPr>
-          <p:cNvPr id="4" name="TextBox 3"/>
-          <p:cNvSpPr txBox="1"/>
-          <p:nvPr/>
-        </p:nvSpPr>
-        <p:spPr>
-          <a:xfrm>
-            <a:off x="594360" y="1371600"/>
-            <a:ext cx="10972800" cy="4983480"/>
-          </a:xfrm>
-          <a:prstGeom prst="rect">
-            <a:avLst/>
-          </a:prstGeom>
-          <a:noFill/>
-        </p:spPr>
-        <p:txBody>
-          <a:bodyPr wrap="square">
-            <a:spAutoFit/>
-          </a:bodyPr>
-          <a:lstStyle/>
-          <a:p>
-            <a:pPr algn="l">
-              <a:spcAft>
-                <a:spcPts val="1000"/>
-              </a:spcAft>
-            </a:pPr>
-            <a:r>
-              <a:rPr sz="2000" b="1">
-                <a:solidFill>
-                  <a:srgbClr val="1F3355"/>
-                </a:solidFill>
-                <a:latin typeface="Meiryo UI"/>
-              </a:rPr>
-              <a:t>3 つだけです</a:t>
-            </a:r>
-          </a:p>
-          <a:p>
-            <a:pPr lvl="1" algn="l">
-              <a:spcAft>
-                <a:spcPts val="600"/>
-              </a:spcAft>
-            </a:pPr>
-            <a:r>
-              <a:rPr sz="1700" b="0">
-                <a:solidFill>
-                  <a:srgbClr val="555555"/>
-                </a:solidFill>
-                <a:latin typeface="Meiryo UI"/>
-              </a:rPr>
-              <a:t>① なぜ IPv6 に変えるのか — 「アドレスが枯渇したから」ではありません</a:t>
-            </a:r>
-          </a:p>
-          <a:p>
-            <a:pPr lvl="1" algn="l">
-              <a:spcAft>
-                <a:spcPts val="600"/>
-              </a:spcAft>
-            </a:pPr>
-            <a:r>
-              <a:rPr sz="1700" b="0">
-                <a:solidFill>
-                  <a:srgbClr val="555555"/>
-                </a:solidFill>
-                <a:latin typeface="Meiryo UI"/>
-              </a:rPr>
-              <a:t>② お客様の回線がどの方式か、商品名から言えるようになる (v6プラス、transix など)</a:t>
-            </a:r>
-          </a:p>
-          <a:p>
-            <a:pPr lvl="1" algn="l">
-              <a:spcAft>
-                <a:spcPts val="600"/>
-              </a:spcAft>
-            </a:pPr>
-            <a:r>
-              <a:rPr sz="1700" b="0">
-                <a:solidFill>
-                  <a:srgbClr val="555555"/>
-                </a:solidFill>
-                <a:latin typeface="Meiryo UI"/>
-              </a:rPr>
-              <a:t>③ 「ポート開放できますか?」に即答できるようになる</a:t>
-            </a:r>
-          </a:p>
-          <a:p>
-            <a:pPr algn="l">
-              <a:spcAft>
-                <a:spcPts val="1000"/>
-              </a:spcAft>
-            </a:pPr>
-            <a:r>
-              <a:rPr sz="2000" b="1">
-                <a:solidFill>
-                  <a:srgbClr val="1F3355"/>
-                </a:solidFill>
-                <a:latin typeface="Meiryo UI"/>
-              </a:rPr>
-              <a:t>話す順番 — 大きい話から細かい話へ降ります</a:t>
-            </a:r>
-          </a:p>
-          <a:p>
-            <a:pPr lvl="1" algn="l">
-              <a:spcAft>
-                <a:spcPts val="600"/>
-              </a:spcAft>
-            </a:pPr>
-            <a:r>
-              <a:rPr sz="1700" b="0">
-                <a:solidFill>
-                  <a:srgbClr val="555555"/>
-                </a:solidFill>
-                <a:latin typeface="Meiryo UI"/>
-              </a:rPr>
-              <a:t>第0部  なぜこの話をするのか</a:t>
-            </a:r>
-          </a:p>
-          <a:p>
-            <a:pPr lvl="1" algn="l">
-              <a:spcAft>
-                <a:spcPts val="600"/>
-              </a:spcAft>
-            </a:pPr>
-            <a:r>
-              <a:rPr sz="1700" b="0">
-                <a:solidFill>
-                  <a:srgbClr val="555555"/>
-                </a:solidFill>
-                <a:latin typeface="Meiryo UI"/>
-              </a:rPr>
-              <a:t>第1部  IPv6 そのもの — どこの国でも同じ話</a:t>
-            </a:r>
-          </a:p>
-          <a:p>
-            <a:pPr lvl="1" algn="l">
-              <a:spcAft>
-                <a:spcPts val="600"/>
-              </a:spcAft>
-            </a:pPr>
-            <a:r>
-              <a:rPr sz="1700" b="0">
-                <a:solidFill>
-                  <a:srgbClr val="555555"/>
-                </a:solidFill>
-                <a:latin typeface="Meiryo UI"/>
-              </a:rPr>
-              <a:t>第2部  日本の回線 — ここからは日本だけの話</a:t>
-            </a:r>
-          </a:p>
-          <a:p>
-            <a:pPr lvl="1" algn="l">
-              <a:spcAft>
-                <a:spcPts val="600"/>
-              </a:spcAft>
-            </a:pPr>
-            <a:r>
-              <a:rPr sz="1700" b="0">
-                <a:solidFill>
-                  <a:srgbClr val="555555"/>
-                </a:solidFill>
-                <a:latin typeface="Meiryo UI"/>
-              </a:rPr>
-              <a:t>第3部  IPv4 をどうやって運ぶか — 今日の本題</a:t>
-            </a:r>
-          </a:p>
-          <a:p>
-            <a:pPr lvl="1" algn="l">
-              <a:spcAft>
-                <a:spcPts val="600"/>
-              </a:spcAft>
-            </a:pPr>
-            <a:r>
-              <a:rPr sz="1700" b="0">
-                <a:solidFill>
-                  <a:srgbClr val="555555"/>
-                </a:solidFill>
-                <a:latin typeface="Meiryo UI"/>
-              </a:rPr>
-              <a:t>第4部  検証環境で実際に見たもの</a:t>
-            </a:r>
-          </a:p>
-          <a:p>
-            <a:pPr algn="l">
-              <a:spcAft>
-                <a:spcPts val="1000"/>
-              </a:spcAft>
-            </a:pPr>
-            <a:r>
-              <a:rPr sz="2000" b="1">
-                <a:solidFill>
-                  <a:srgbClr val="C0392B"/>
-                </a:solidFill>
-                <a:latin typeface="Meiryo UI"/>
-              </a:rPr>
-              <a:t>迷ったらこのページに戻ってください。どこの話か分かれば必ずついてこられます</a:t>
-            </a:r>
-          </a:p>
-          <a:p>
-            <a:pPr algn="l">
-              <a:spcAft>
-                <a:spcPts val="1000"/>
-              </a:spcAft>
-            </a:pPr>
-            <a:r>
-              <a:rPr sz="2000" b="0">
-                <a:solidFill>
-                  <a:srgbClr val="1F3355"/>
-                </a:solidFill>
-                <a:latin typeface="Meiryo UI"/>
-              </a:rPr>
-              <a:t>※ 配布資料の巻末に「想定問答」8 問があります。あとで読んでください</a:t>
-            </a:r>
-          </a:p>
-        </p:txBody>
-      </p:sp>
-    </p:spTree>
-  </p:cSld>
-  <p:clrMapOvr>
-    <a:masterClrMapping/>
-  </p:clrMapOvr>
-</p:sld>
-</file>
-
-<file path=ppt/slides/slide30.xml><?xml version="1.0" encoding="utf-8"?>
+<file path=ppt/slides/slide31.xml><?xml version="1.0" encoding="utf-8"?>
 <p:sld xmlns:a="http://schemas.openxmlformats.org/drawingml/2006/main" xmlns:p="http://schemas.openxmlformats.org/presentationml/2006/main" xmlns:r="http://schemas.openxmlformats.org/officeDocument/2006/relationships">
   <p:cSld>
     <p:spTree>
@@ -12703,7 +13319,7 @@
 </p:sld>
 </file>
 
-<file path=ppt/slides/slide31.xml><?xml version="1.0" encoding="utf-8"?>
+<file path=ppt/slides/slide32.xml><?xml version="1.0" encoding="utf-8"?>
 <p:sld xmlns:a="http://schemas.openxmlformats.org/drawingml/2006/main" xmlns:p="http://schemas.openxmlformats.org/presentationml/2006/main" xmlns:r="http://schemas.openxmlformats.org/officeDocument/2006/relationships">
   <p:cSld>
     <p:spTree>
@@ -12998,7 +13614,7 @@
 </p:sld>
 </file>
 
-<file path=ppt/slides/slide32.xml><?xml version="1.0" encoding="utf-8"?>
+<file path=ppt/slides/slide33.xml><?xml version="1.0" encoding="utf-8"?>
 <p:sld xmlns:a="http://schemas.openxmlformats.org/drawingml/2006/main" xmlns:p="http://schemas.openxmlformats.org/presentationml/2006/main" xmlns:r="http://schemas.openxmlformats.org/officeDocument/2006/relationships">
   <p:cSld>
     <p:spTree>
@@ -13468,7 +14084,7 @@
 </p:sld>
 </file>
 
-<file path=ppt/slides/slide33.xml><?xml version="1.0" encoding="utf-8"?>
+<file path=ppt/slides/slide34.xml><?xml version="1.0" encoding="utf-8"?>
 <p:sld xmlns:a="http://schemas.openxmlformats.org/drawingml/2006/main" xmlns:p="http://schemas.openxmlformats.org/presentationml/2006/main" xmlns:r="http://schemas.openxmlformats.org/officeDocument/2006/relationships">
   <p:cSld>
     <p:spTree>
@@ -13580,11 +14196,11 @@
           <a:p>
             <a:pPr algn="l">
               <a:spcAft>
-                <a:spcPts val="400"/>
-              </a:spcAft>
-            </a:pPr>
-            <a:r>
-              <a:rPr sz="1400" b="1">
+                <a:spcPts val="300"/>
+              </a:spcAft>
+            </a:pPr>
+            <a:r>
+              <a:rPr sz="1300" b="1">
                 <a:solidFill>
                   <a:srgbClr val="1F3355"/>
                 </a:solidFill>
@@ -13644,11 +14260,11 @@
           <a:p>
             <a:pPr algn="l">
               <a:spcAft>
-                <a:spcPts val="400"/>
-              </a:spcAft>
-            </a:pPr>
-            <a:r>
-              <a:rPr sz="1400" b="1">
+                <a:spcPts val="300"/>
+              </a:spcAft>
+            </a:pPr>
+            <a:r>
+              <a:rPr sz="1300" b="1">
                 <a:solidFill>
                   <a:srgbClr val="C0392B"/>
                 </a:solidFill>
@@ -13708,11 +14324,11 @@
           <a:p>
             <a:pPr algn="l">
               <a:spcAft>
-                <a:spcPts val="400"/>
-              </a:spcAft>
-            </a:pPr>
-            <a:r>
-              <a:rPr sz="1400" b="1">
+                <a:spcPts val="300"/>
+              </a:spcAft>
+            </a:pPr>
+            <a:r>
+              <a:rPr sz="1300" b="1">
                 <a:solidFill>
                   <a:srgbClr val="1F3355"/>
                 </a:solidFill>
@@ -13724,11 +14340,11 @@
           <a:p>
             <a:pPr algn="l">
               <a:spcAft>
-                <a:spcPts val="400"/>
-              </a:spcAft>
-            </a:pPr>
-            <a:r>
-              <a:rPr sz="1400" b="1">
+                <a:spcPts val="300"/>
+              </a:spcAft>
+            </a:pPr>
+            <a:r>
+              <a:rPr sz="1300" b="1">
                 <a:solidFill>
                   <a:srgbClr val="1F3355"/>
                 </a:solidFill>
@@ -13756,11 +14372,11 @@
           <a:p>
             <a:pPr algn="l">
               <a:spcAft>
-                <a:spcPts val="400"/>
-              </a:spcAft>
-            </a:pPr>
-            <a:r>
-              <a:rPr sz="1400" b="1">
+                <a:spcPts val="300"/>
+              </a:spcAft>
+            </a:pPr>
+            <a:r>
+              <a:rPr sz="1300" b="1">
                 <a:solidFill>
                   <a:srgbClr val="1F3355"/>
                 </a:solidFill>
@@ -13804,11 +14420,11 @@
           <a:p>
             <a:pPr algn="l">
               <a:spcAft>
-                <a:spcPts val="400"/>
-              </a:spcAft>
-            </a:pPr>
-            <a:r>
-              <a:rPr sz="1400" b="1">
+                <a:spcPts val="300"/>
+              </a:spcAft>
+            </a:pPr>
+            <a:r>
+              <a:rPr sz="1300" b="1">
                 <a:solidFill>
                   <a:srgbClr val="1F3355"/>
                 </a:solidFill>
@@ -13852,33 +14468,49 @@
           <a:p>
             <a:pPr algn="l">
               <a:spcAft>
-                <a:spcPts val="400"/>
-              </a:spcAft>
-            </a:pPr>
-            <a:r>
-              <a:rPr sz="1400" b="1">
+                <a:spcPts val="300"/>
+              </a:spcAft>
+            </a:pPr>
+            <a:r>
+              <a:rPr sz="1300" b="1">
+                <a:solidFill>
+                  <a:srgbClr val="1F3355"/>
+                </a:solidFill>
+                <a:latin typeface="Meiryo UI"/>
+              </a:rPr>
+              <a:t>この結論の確かさ</a:t>
+            </a:r>
+          </a:p>
+          <a:p>
+            <a:pPr lvl="1" algn="l">
+              <a:spcAft>
+                <a:spcPts val="300"/>
+              </a:spcAft>
+            </a:pPr>
+            <a:r>
+              <a:rPr sz="1200" b="0">
+                <a:solidFill>
+                  <a:srgbClr val="555555"/>
+                </a:solidFill>
+                <a:latin typeface="Meiryo UI"/>
+              </a:rPr>
+              <a:t>待ち受け不可 と 生 ESP 不可 は確実。発信は設計上そうなり、UDP の往復は実測済み</a:t>
+            </a:r>
+          </a:p>
+          <a:p>
+            <a:pPr lvl="1" algn="l">
+              <a:spcAft>
+                <a:spcPts val="300"/>
+              </a:spcAft>
+            </a:pPr>
+            <a:r>
+              <a:rPr sz="1200" b="1">
                 <a:solidFill>
                   <a:srgbClr val="C0392B"/>
                 </a:solidFill>
                 <a:latin typeface="Meiryo UI"/>
               </a:rPr>
-              <a:t>※ ここは机上の整理です。うちの検証環境ではまだ VPN を張って測っていません</a:t>
-            </a:r>
-          </a:p>
-          <a:p>
-            <a:pPr lvl="1" algn="l">
-              <a:spcAft>
-                <a:spcPts val="300"/>
-              </a:spcAft>
-            </a:pPr>
-            <a:r>
-              <a:rPr sz="1200" b="0">
-                <a:solidFill>
-                  <a:srgbClr val="555555"/>
-                </a:solidFill>
-                <a:latin typeface="Meiryo UI"/>
-              </a:rPr>
-              <a:t>案件で使う前に必ず実機で確かめてください (検証項目として積んであります)</a:t>
+              <a:t>※ VPN そのものは張っていません。対向機器を含む確認は案件時に実施します</a:t>
             </a:r>
           </a:p>
         </p:txBody>
@@ -13891,7 +14523,7 @@
 </p:sld>
 </file>
 
-<file path=ppt/slides/slide34.xml><?xml version="1.0" encoding="utf-8"?>
+<file path=ppt/slides/slide35.xml><?xml version="1.0" encoding="utf-8"?>
 <p:sld xmlns:a="http://schemas.openxmlformats.org/drawingml/2006/main" xmlns:p="http://schemas.openxmlformats.org/presentationml/2006/main" xmlns:r="http://schemas.openxmlformats.org/officeDocument/2006/relationships">
   <p:cSld>
     <p:spTree>
@@ -14237,7 +14869,7 @@
 </p:sld>
 </file>
 
-<file path=ppt/slides/slide35.xml><?xml version="1.0" encoding="utf-8"?>
+<file path=ppt/slides/slide36.xml><?xml version="1.0" encoding="utf-8"?>
 <p:sld xmlns:a="http://schemas.openxmlformats.org/drawingml/2006/main" xmlns:p="http://schemas.openxmlformats.org/presentationml/2006/main" xmlns:r="http://schemas.openxmlformats.org/officeDocument/2006/relationships">
   <p:cSld>
     <p:spTree>
@@ -14361,7 +14993,7 @@
 </p:sld>
 </file>
 
-<file path=ppt/slides/slide36.xml><?xml version="1.0" encoding="utf-8"?>
+<file path=ppt/slides/slide37.xml><?xml version="1.0" encoding="utf-8"?>
 <p:sld xmlns:a="http://schemas.openxmlformats.org/drawingml/2006/main" xmlns:p="http://schemas.openxmlformats.org/presentationml/2006/main" xmlns:r="http://schemas.openxmlformats.org/officeDocument/2006/relationships">
   <p:cSld>
     <p:spTree>
@@ -14570,7 +15202,7 @@
 </p:sld>
 </file>
 
-<file path=ppt/slides/slide37.xml><?xml version="1.0" encoding="utf-8"?>
+<file path=ppt/slides/slide38.xml><?xml version="1.0" encoding="utf-8"?>
 <p:sld xmlns:a="http://schemas.openxmlformats.org/drawingml/2006/main" xmlns:p="http://schemas.openxmlformats.org/presentationml/2006/main" xmlns:r="http://schemas.openxmlformats.org/officeDocument/2006/relationships">
   <p:cSld>
     <p:spTree>
@@ -14676,8 +15308,8 @@
                 </a:solidFill>
                 <a:latin typeface="Meiryo UI"/>
               </a:rPr>
-              <a:t>OpenWrt または
-実機 892FJ</a:t>
+              <a:t>OpenWrt / 892FJ
+/ C1111-8P</a:t>
             </a:r>
           </a:p>
         </p:txBody>
@@ -15007,7 +15639,7 @@
                 <a:latin typeface="Meiryo UI"/>
               </a:rPr>
               <a:t>Web と DNS
-アクセス元を表示する</a:t>
++ ルール配布サーバ</a:t>
             </a:r>
           </a:p>
         </p:txBody>
@@ -15062,6 +15694,22 @@
                 </a:solidFill>
                 <a:latin typeface="Meiryo UI"/>
               </a:rPr>
+              <a:t>※ 右端に MAP-E の「自動設定」の相手方 (ルール配布サーバ) もあります。本番と同じ形で試せます。</a:t>
+            </a:r>
+          </a:p>
+          <a:p>
+            <a:pPr algn="l">
+              <a:spcAft>
+                <a:spcPts val="600"/>
+              </a:spcAft>
+            </a:pPr>
+            <a:r>
+              <a:rPr sz="1400" b="1">
+                <a:solidFill>
+                  <a:srgbClr val="C0392B"/>
+                </a:solidFill>
+                <a:latin typeface="Meiryo UI"/>
+              </a:rPr>
               <a:t>※ 同じものを会社の VMware に再現する手順書一式があります。詰まった箇所も全部載せてあるので、案件前の事前検証に使えます。</a:t>
             </a:r>
           </a:p>
@@ -15123,7 +15771,7 @@
 </p:sld>
 </file>
 
-<file path=ppt/slides/slide38.xml><?xml version="1.0" encoding="utf-8"?>
+<file path=ppt/slides/slide39.xml><?xml version="1.0" encoding="utf-8"?>
 <p:sld xmlns:a="http://schemas.openxmlformats.org/drawingml/2006/main" xmlns:p="http://schemas.openxmlformats.org/presentationml/2006/main" xmlns:r="http://schemas.openxmlformats.org/officeDocument/2006/relationships">
   <p:cSld>
     <p:spTree>
@@ -15178,7 +15826,7 @@
         </p:nvGraphicFramePr>
         <p:xfrm>
           <a:off x="502920" y="1143000"/>
-          <a:ext cx="10789920" cy="1865376"/>
+          <a:ext cx="10789920" cy="2176272"/>
         </p:xfrm>
         <a:graphic>
           <a:graphicData uri="http://schemas.openxmlformats.org/drawingml/2006/table">
@@ -15467,7 +16115,7 @@
                           </a:solidFill>
                           <a:latin typeface="Meiryo UI"/>
                         </a:rPr>
-                        <a:t>物理の Cisco 892FJ を繋ぎ込んで、本物の設定を投入できる</a:t>
+                        <a:t>物理の Cisco 892FJ / C1111-8P を繋ぎ込んで、本物の設定を投入できる</a:t>
                       </a:r>
                     </a:p>
                   </a:txBody>
@@ -15478,122 +16126,7 @@
                   </a:tcPr>
                 </a:tc>
               </a:tr>
-            </a:tbl>
-          </a:graphicData>
-        </a:graphic>
-      </p:graphicFrame>
-      <p:sp>
-        <p:nvSpPr>
-          <p:cNvPr id="4" name="TextBox 3"/>
-          <p:cNvSpPr txBox="1"/>
-          <p:nvPr/>
-        </p:nvSpPr>
-        <p:spPr>
-          <a:xfrm>
-            <a:off x="502920" y="3264408"/>
-            <a:ext cx="11155680" cy="548640"/>
-          </a:xfrm>
-          <a:prstGeom prst="rect">
-            <a:avLst/>
-          </a:prstGeom>
-          <a:noFill/>
-        </p:spPr>
-        <p:txBody>
-          <a:bodyPr wrap="square">
-            <a:spAutoFit/>
-          </a:bodyPr>
-          <a:lstStyle/>
-          <a:p>
-            <a:pPr algn="l"/>
-            <a:r>
-              <a:rPr sz="1200" b="0">
-                <a:solidFill>
-                  <a:srgbClr val="007ACC"/>
-                </a:solidFill>
-                <a:latin typeface="Meiryo UI"/>
-              </a:rPr>
-              <a:t>MAP-E の計算も確かめました。手計算した 198.51.100.10 / 4176〜4191 / MTU 1460 が、CPE の自動計算と完全に一致</a:t>
-            </a:r>
-          </a:p>
-        </p:txBody>
-      </p:sp>
-    </p:spTree>
-  </p:cSld>
-  <p:clrMapOvr>
-    <a:masterClrMapping/>
-  </p:clrMapOvr>
-</p:sld>
-</file>
-
-<file path=ppt/slides/slide39.xml><?xml version="1.0" encoding="utf-8"?>
-<p:sld xmlns:a="http://schemas.openxmlformats.org/drawingml/2006/main" xmlns:p="http://schemas.openxmlformats.org/presentationml/2006/main" xmlns:r="http://schemas.openxmlformats.org/officeDocument/2006/relationships">
-  <p:cSld>
-    <p:spTree>
-      <p:nvGrpSpPr>
-        <p:cNvPr id="1" name=""/>
-        <p:cNvGrpSpPr/>
-        <p:nvPr/>
-      </p:nvGrpSpPr>
-      <p:grpSpPr/>
-      <p:sp>
-        <p:nvSpPr>
-          <p:cNvPr id="2" name="TextBox 1"/>
-          <p:cNvSpPr txBox="1"/>
-          <p:nvPr/>
-        </p:nvSpPr>
-        <p:spPr>
-          <a:xfrm>
-            <a:off x="502920" y="274320"/>
-            <a:ext cx="11155680" cy="731520"/>
-          </a:xfrm>
-          <a:prstGeom prst="rect">
-            <a:avLst/>
-          </a:prstGeom>
-          <a:noFill/>
-        </p:spPr>
-        <p:txBody>
-          <a:bodyPr wrap="square">
-            <a:spAutoFit/>
-          </a:bodyPr>
-          <a:lstStyle/>
-          <a:p>
-            <a:pPr algn="l"/>
-            <a:r>
-              <a:rPr sz="2600" b="1">
-                <a:solidFill>
-                  <a:srgbClr val="1F3355"/>
-                </a:solidFill>
-                <a:latin typeface="Meiryo UI"/>
-              </a:rPr>
-              <a:t>実機の Cisco 892FJ で DS-Lite を通した結果</a:t>
-            </a:r>
-          </a:p>
-        </p:txBody>
-      </p:sp>
-      <p:graphicFrame>
-        <p:nvGraphicFramePr>
-          <p:cNvPr id="3" name="Table 2"/>
-          <p:cNvGraphicFramePr>
-            <a:graphicFrameLocks noGrp="1"/>
-          </p:cNvGraphicFramePr>
-          <p:nvPr/>
-        </p:nvGraphicFramePr>
-        <p:xfrm>
-          <a:off x="502920" y="1143000"/>
-          <a:ext cx="10789920" cy="1996440"/>
-        </p:xfrm>
-        <a:graphic>
-          <a:graphicData uri="http://schemas.openxmlformats.org/drawingml/2006/table">
-            <a:tbl>
-              <a:tblPr>
-                <a:tableStyleId>{5C22544A-7EE6-4342-B048-85BDC9FD1C3A}</a:tableStyleId>
-              </a:tblPr>
-              <a:tblGrid>
-                <a:gridCol w="2926080"/>
-                <a:gridCol w="3108960"/>
-                <a:gridCol w="4754880"/>
-              </a:tblGrid>
-              <a:tr h="332740">
+              <a:tr h="310896">
                 <a:tc>
                   <a:txBody>
                     <a:bodyPr/>
@@ -15601,155 +16134,13 @@
                     <a:p>
                       <a:pPr algn="l"/>
                       <a:r>
-                        <a:rPr sz="1300" b="1">
-                          <a:solidFill>
-                            <a:srgbClr val="FFFFFF"/>
-                          </a:solidFill>
-                          <a:latin typeface="Meiryo UI"/>
-                        </a:rPr>
-                        <a:t>確認したこと</a:t>
-                      </a:r>
-                    </a:p>
-                  </a:txBody>
-                  <a:tcPr>
-                    <a:solidFill>
-                      <a:srgbClr val="1F3355"/>
-                    </a:solidFill>
-                  </a:tcPr>
-                </a:tc>
-                <a:tc>
-                  <a:txBody>
-                    <a:bodyPr/>
-                    <a:lstStyle/>
-                    <a:p>
-                      <a:pPr algn="l"/>
-                      <a:r>
-                        <a:rPr sz="1300" b="1">
-                          <a:solidFill>
-                            <a:srgbClr val="FFFFFF"/>
-                          </a:solidFill>
-                          <a:latin typeface="Meiryo UI"/>
-                        </a:rPr>
-                        <a:t>実測値</a:t>
-                      </a:r>
-                    </a:p>
-                  </a:txBody>
-                  <a:tcPr>
-                    <a:solidFill>
-                      <a:srgbClr val="1F3355"/>
-                    </a:solidFill>
-                  </a:tcPr>
-                </a:tc>
-                <a:tc>
-                  <a:txBody>
-                    <a:bodyPr/>
-                    <a:lstStyle/>
-                    <a:p>
-                      <a:pPr algn="l"/>
-                      <a:r>
-                        <a:rPr sz="1300" b="1">
-                          <a:solidFill>
-                            <a:srgbClr val="FFFFFF"/>
-                          </a:solidFill>
-                          <a:latin typeface="Meiryo UI"/>
-                        </a:rPr>
-                        <a:t>何を示しているか</a:t>
-                      </a:r>
-                    </a:p>
-                  </a:txBody>
-                  <a:tcPr>
-                    <a:solidFill>
-                      <a:srgbClr val="1F3355"/>
-                    </a:solidFill>
-                  </a:tcPr>
-                </a:tc>
-              </a:tr>
-              <a:tr h="332740">
-                <a:tc>
-                  <a:txBody>
-                    <a:bodyPr/>
-                    <a:lstStyle/>
-                    <a:p>
-                      <a:pPr algn="l"/>
-                      <a:r>
-                        <a:rPr sz="1200" b="0">
+                        <a:rPr sz="1300" b="0">
                           <a:solidFill>
                             <a:srgbClr val="1F3355"/>
                           </a:solidFill>
                           <a:latin typeface="Meiryo UI"/>
                         </a:rPr>
-                        <a:t>アクセス元のアドレス</a:t>
-                      </a:r>
-                    </a:p>
-                  </a:txBody>
-                  <a:tcPr>
-                    <a:solidFill>
-                      <a:srgbClr val="FFFFFF"/>
-                    </a:solidFill>
-                  </a:tcPr>
-                </a:tc>
-                <a:tc>
-                  <a:txBody>
-                    <a:bodyPr/>
-                    <a:lstStyle/>
-                    <a:p>
-                      <a:pPr algn="l"/>
-                      <a:r>
-                        <a:rPr sz="1200" b="0">
-                          <a:solidFill>
-                            <a:srgbClr val="1F3355"/>
-                          </a:solidFill>
-                          <a:latin typeface="Meiryo UI"/>
-                        </a:rPr>
-                        <a:t>203.0.113.1</a:t>
-                      </a:r>
-                    </a:p>
-                  </a:txBody>
-                  <a:tcPr>
-                    <a:solidFill>
-                      <a:srgbClr val="FFFFFF"/>
-                    </a:solidFill>
-                  </a:tcPr>
-                </a:tc>
-                <a:tc>
-                  <a:txBody>
-                    <a:bodyPr/>
-                    <a:lstStyle/>
-                    <a:p>
-                      <a:pPr algn="l"/>
-                      <a:r>
-                        <a:rPr sz="1200" b="0">
-                          <a:solidFill>
-                            <a:srgbClr val="1F3355"/>
-                          </a:solidFill>
-                          <a:latin typeface="Meiryo UI"/>
-                        </a:rPr>
-                        <a:t>網側で NAT された = DS-Lite が成立している</a:t>
-                      </a:r>
-                    </a:p>
-                  </a:txBody>
-                  <a:tcPr>
-                    <a:solidFill>
-                      <a:srgbClr val="FFFFFF"/>
-                    </a:solidFill>
-                  </a:tcPr>
-                </a:tc>
-              </a:tr>
-              <a:tr h="332740">
-                <a:tc>
-                  <a:txBody>
-                    <a:bodyPr/>
-                    <a:lstStyle/>
-                    <a:p>
-                      <a:pPr algn="l"/>
-                      <a:r>
-                        <a:rPr sz="1200" b="0">
-                          <a:solidFill>
-                            <a:srgbClr val="1F3355"/>
-                          </a:solidFill>
-                          <a:latin typeface="Meiryo UI"/>
-                        </a:rPr>
-                        <a:t>ping</a:t>
+                        <a:t>自動設定を試す</a:t>
                       </a:r>
                     </a:p>
                   </a:txBody>
@@ -15766,36 +16157,13 @@
                     <a:p>
                       <a:pPr algn="l"/>
                       <a:r>
-                        <a:rPr sz="1200" b="0">
+                        <a:rPr sz="1300" b="0">
                           <a:solidFill>
                             <a:srgbClr val="1F3355"/>
                           </a:solidFill>
                           <a:latin typeface="Meiryo UI"/>
                         </a:rPr>
-                        <a:t>0% 損失 / TTL=62</a:t>
-                      </a:r>
-                    </a:p>
-                  </a:txBody>
-                  <a:tcPr>
-                    <a:solidFill>
-                      <a:srgbClr val="F2F6FA"/>
-                    </a:solidFill>
-                  </a:tcPr>
-                </a:tc>
-                <a:tc>
-                  <a:txBody>
-                    <a:bodyPr/>
-                    <a:lstStyle/>
-                    <a:p>
-                      <a:pPr algn="l"/>
-                      <a:r>
-                        <a:rPr sz="1200" b="0">
-                          <a:solidFill>
-                            <a:srgbClr val="1F3355"/>
-                          </a:solidFill>
-                          <a:latin typeface="Meiryo UI"/>
-                        </a:rPr>
-                        <a:t>相手の Linux は 64 で返す。62 で届いた = ルータを 2 つ越えた</a:t>
+                        <a:t>ルール配布サーバがあるので、CPE が自分で取ってくる本番の形で試せる</a:t>
                       </a:r>
                     </a:p>
                   </a:txBody>
@@ -15806,219 +16174,6 @@
                   </a:tcPr>
                 </a:tc>
               </a:tr>
-              <a:tr h="332740">
-                <a:tc>
-                  <a:txBody>
-                    <a:bodyPr/>
-                    <a:lstStyle/>
-                    <a:p>
-                      <a:pPr algn="l"/>
-                      <a:r>
-                        <a:rPr sz="1200" b="0">
-                          <a:solidFill>
-                            <a:srgbClr val="1F3355"/>
-                          </a:solidFill>
-                          <a:latin typeface="Meiryo UI"/>
-                        </a:rPr>
-                        <a:t>MTU 1460 で送る</a:t>
-                      </a:r>
-                    </a:p>
-                  </a:txBody>
-                  <a:tcPr>
-                    <a:solidFill>
-                      <a:srgbClr val="FFFFFF"/>
-                    </a:solidFill>
-                  </a:tcPr>
-                </a:tc>
-                <a:tc>
-                  <a:txBody>
-                    <a:bodyPr/>
-                    <a:lstStyle/>
-                    <a:p>
-                      <a:pPr algn="l"/>
-                      <a:r>
-                        <a:rPr sz="1200" b="0">
-                          <a:solidFill>
-                            <a:srgbClr val="1F3355"/>
-                          </a:solidFill>
-                          <a:latin typeface="Meiryo UI"/>
-                        </a:rPr>
-                        <a:t>通る</a:t>
-                      </a:r>
-                    </a:p>
-                  </a:txBody>
-                  <a:tcPr>
-                    <a:solidFill>
-                      <a:srgbClr val="FFFFFF"/>
-                    </a:solidFill>
-                  </a:tcPr>
-                </a:tc>
-                <a:tc>
-                  <a:txBody>
-                    <a:bodyPr/>
-                    <a:lstStyle/>
-                    <a:p>
-                      <a:pPr algn="l"/>
-                      <a:r>
-                        <a:rPr sz="1200" b="0">
-                          <a:solidFill>
-                            <a:srgbClr val="1F3355"/>
-                          </a:solidFill>
-                          <a:latin typeface="Meiryo UI"/>
-                        </a:rPr>
-                        <a:t>トンネル分を引いた大きさが確保できている</a:t>
-                      </a:r>
-                    </a:p>
-                  </a:txBody>
-                  <a:tcPr>
-                    <a:solidFill>
-                      <a:srgbClr val="FFFFFF"/>
-                    </a:solidFill>
-                  </a:tcPr>
-                </a:tc>
-              </a:tr>
-              <a:tr h="332740">
-                <a:tc>
-                  <a:txBody>
-                    <a:bodyPr/>
-                    <a:lstStyle/>
-                    <a:p>
-                      <a:pPr algn="l"/>
-                      <a:r>
-                        <a:rPr sz="1200" b="0">
-                          <a:solidFill>
-                            <a:srgbClr val="1F3355"/>
-                          </a:solidFill>
-                          <a:latin typeface="Meiryo UI"/>
-                        </a:rPr>
-                        <a:t>MTU 1500 で送る</a:t>
-                      </a:r>
-                    </a:p>
-                  </a:txBody>
-                  <a:tcPr>
-                    <a:solidFill>
-                      <a:srgbClr val="F2F6FA"/>
-                    </a:solidFill>
-                  </a:tcPr>
-                </a:tc>
-                <a:tc>
-                  <a:txBody>
-                    <a:bodyPr/>
-                    <a:lstStyle/>
-                    <a:p>
-                      <a:pPr algn="l"/>
-                      <a:r>
-                        <a:rPr sz="1200" b="0">
-                          <a:solidFill>
-                            <a:srgbClr val="1F3355"/>
-                          </a:solidFill>
-                          <a:latin typeface="Meiryo UI"/>
-                        </a:rPr>
-                        <a:t>CPE が「分割が必要」と返す</a:t>
-                      </a:r>
-                    </a:p>
-                  </a:txBody>
-                  <a:tcPr>
-                    <a:solidFill>
-                      <a:srgbClr val="F2F6FA"/>
-                    </a:solidFill>
-                  </a:tcPr>
-                </a:tc>
-                <a:tc>
-                  <a:txBody>
-                    <a:bodyPr/>
-                    <a:lstStyle/>
-                    <a:p>
-                      <a:pPr algn="l"/>
-                      <a:r>
-                        <a:rPr sz="1200" b="0">
-                          <a:solidFill>
-                            <a:srgbClr val="1F3355"/>
-                          </a:solidFill>
-                          <a:latin typeface="Meiryo UI"/>
-                        </a:rPr>
-                        <a:t>経路 MTU の通知が正常に動いている</a:t>
-                      </a:r>
-                    </a:p>
-                  </a:txBody>
-                  <a:tcPr>
-                    <a:solidFill>
-                      <a:srgbClr val="F2F6FA"/>
-                    </a:solidFill>
-                  </a:tcPr>
-                </a:tc>
-              </a:tr>
-              <a:tr h="332740">
-                <a:tc>
-                  <a:txBody>
-                    <a:bodyPr/>
-                    <a:lstStyle/>
-                    <a:p>
-                      <a:pPr algn="l"/>
-                      <a:r>
-                        <a:rPr sz="1200" b="0">
-                          <a:solidFill>
-                            <a:srgbClr val="1F3355"/>
-                          </a:solidFill>
-                          <a:latin typeface="Meiryo UI"/>
-                        </a:rPr>
-                        <a:t>5MB ダウンロード</a:t>
-                      </a:r>
-                    </a:p>
-                  </a:txBody>
-                  <a:tcPr>
-                    <a:solidFill>
-                      <a:srgbClr val="FFFFFF"/>
-                    </a:solidFill>
-                  </a:tcPr>
-                </a:tc>
-                <a:tc>
-                  <a:txBody>
-                    <a:bodyPr/>
-                    <a:lstStyle/>
-                    <a:p>
-                      <a:pPr algn="l"/>
-                      <a:r>
-                        <a:rPr sz="1200" b="0">
-                          <a:solidFill>
-                            <a:srgbClr val="1F3355"/>
-                          </a:solidFill>
-                          <a:latin typeface="Meiryo UI"/>
-                        </a:rPr>
-                        <a:t>1.15 秒で完走</a:t>
-                      </a:r>
-                    </a:p>
-                  </a:txBody>
-                  <a:tcPr>
-                    <a:solidFill>
-                      <a:srgbClr val="FFFFFF"/>
-                    </a:solidFill>
-                  </a:tcPr>
-                </a:tc>
-                <a:tc>
-                  <a:txBody>
-                    <a:bodyPr/>
-                    <a:lstStyle/>
-                    <a:p>
-                      <a:pPr algn="l"/>
-                      <a:r>
-                        <a:rPr sz="1200" b="0">
-                          <a:solidFill>
-                            <a:srgbClr val="1F3355"/>
-                          </a:solidFill>
-                          <a:latin typeface="Meiryo UI"/>
-                        </a:rPr>
-                        <a:t>MTU のページで入れた「あの 1 行」が効いている</a:t>
-                      </a:r>
-                    </a:p>
-                  </a:txBody>
-                  <a:tcPr>
-                    <a:solidFill>
-                      <a:srgbClr val="FFFFFF"/>
-                    </a:solidFill>
-                  </a:tcPr>
-                </a:tc>
-              </a:tr>
             </a:tbl>
           </a:graphicData>
         </a:graphic>
@@ -16031,7 +16186,7 @@
         </p:nvSpPr>
         <p:spPr>
           <a:xfrm>
-            <a:off x="502920" y="3395472"/>
+            <a:off x="502920" y="3575304"/>
             <a:ext cx="11155680" cy="548640"/>
           </a:xfrm>
           <a:prstGeom prst="rect">
@@ -16053,7 +16208,7 @@
                 </a:solidFill>
                 <a:latin typeface="Meiryo UI"/>
               </a:rPr>
-              <a:t>一番大事なのは 1 行目。ping が通っただけでは「たまたま届いた」かもしれません</a:t>
+              <a:t>MAP-E の計算も確かめました。手計算した 198.51.100.10 / 4176〜4191 / MTU 1460 が、CPE の自動計算と完全に一致</a:t>
             </a:r>
           </a:p>
         </p:txBody>
@@ -16726,6 +16881,1088 @@
         </p:nvSpPr>
         <p:spPr>
           <a:xfrm>
+            <a:off x="502920" y="274320"/>
+            <a:ext cx="11155680" cy="731520"/>
+          </a:xfrm>
+          <a:prstGeom prst="rect">
+            <a:avLst/>
+          </a:prstGeom>
+          <a:noFill/>
+        </p:spPr>
+        <p:txBody>
+          <a:bodyPr wrap="square">
+            <a:spAutoFit/>
+          </a:bodyPr>
+          <a:lstStyle/>
+          <a:p>
+            <a:pPr algn="l"/>
+            <a:r>
+              <a:rPr sz="2600" b="1">
+                <a:solidFill>
+                  <a:srgbClr val="1F3355"/>
+                </a:solidFill>
+                <a:latin typeface="Meiryo UI"/>
+              </a:rPr>
+              <a:t>実機の Cisco 892FJ で DS-Lite を通した結果</a:t>
+            </a:r>
+          </a:p>
+        </p:txBody>
+      </p:sp>
+      <p:graphicFrame>
+        <p:nvGraphicFramePr>
+          <p:cNvPr id="3" name="Table 2"/>
+          <p:cNvGraphicFramePr>
+            <a:graphicFrameLocks noGrp="1"/>
+          </p:cNvGraphicFramePr>
+          <p:nvPr/>
+        </p:nvGraphicFramePr>
+        <p:xfrm>
+          <a:off x="502920" y="1143000"/>
+          <a:ext cx="10789920" cy="1996440"/>
+        </p:xfrm>
+        <a:graphic>
+          <a:graphicData uri="http://schemas.openxmlformats.org/drawingml/2006/table">
+            <a:tbl>
+              <a:tblPr>
+                <a:tableStyleId>{5C22544A-7EE6-4342-B048-85BDC9FD1C3A}</a:tableStyleId>
+              </a:tblPr>
+              <a:tblGrid>
+                <a:gridCol w="2926080"/>
+                <a:gridCol w="3108960"/>
+                <a:gridCol w="4754880"/>
+              </a:tblGrid>
+              <a:tr h="332740">
+                <a:tc>
+                  <a:txBody>
+                    <a:bodyPr/>
+                    <a:lstStyle/>
+                    <a:p>
+                      <a:pPr algn="l"/>
+                      <a:r>
+                        <a:rPr sz="1300" b="1">
+                          <a:solidFill>
+                            <a:srgbClr val="FFFFFF"/>
+                          </a:solidFill>
+                          <a:latin typeface="Meiryo UI"/>
+                        </a:rPr>
+                        <a:t>確認したこと</a:t>
+                      </a:r>
+                    </a:p>
+                  </a:txBody>
+                  <a:tcPr>
+                    <a:solidFill>
+                      <a:srgbClr val="1F3355"/>
+                    </a:solidFill>
+                  </a:tcPr>
+                </a:tc>
+                <a:tc>
+                  <a:txBody>
+                    <a:bodyPr/>
+                    <a:lstStyle/>
+                    <a:p>
+                      <a:pPr algn="l"/>
+                      <a:r>
+                        <a:rPr sz="1300" b="1">
+                          <a:solidFill>
+                            <a:srgbClr val="FFFFFF"/>
+                          </a:solidFill>
+                          <a:latin typeface="Meiryo UI"/>
+                        </a:rPr>
+                        <a:t>実測値</a:t>
+                      </a:r>
+                    </a:p>
+                  </a:txBody>
+                  <a:tcPr>
+                    <a:solidFill>
+                      <a:srgbClr val="1F3355"/>
+                    </a:solidFill>
+                  </a:tcPr>
+                </a:tc>
+                <a:tc>
+                  <a:txBody>
+                    <a:bodyPr/>
+                    <a:lstStyle/>
+                    <a:p>
+                      <a:pPr algn="l"/>
+                      <a:r>
+                        <a:rPr sz="1300" b="1">
+                          <a:solidFill>
+                            <a:srgbClr val="FFFFFF"/>
+                          </a:solidFill>
+                          <a:latin typeface="Meiryo UI"/>
+                        </a:rPr>
+                        <a:t>何を示しているか</a:t>
+                      </a:r>
+                    </a:p>
+                  </a:txBody>
+                  <a:tcPr>
+                    <a:solidFill>
+                      <a:srgbClr val="1F3355"/>
+                    </a:solidFill>
+                  </a:tcPr>
+                </a:tc>
+              </a:tr>
+              <a:tr h="332740">
+                <a:tc>
+                  <a:txBody>
+                    <a:bodyPr/>
+                    <a:lstStyle/>
+                    <a:p>
+                      <a:pPr algn="l"/>
+                      <a:r>
+                        <a:rPr sz="1200" b="0">
+                          <a:solidFill>
+                            <a:srgbClr val="1F3355"/>
+                          </a:solidFill>
+                          <a:latin typeface="Meiryo UI"/>
+                        </a:rPr>
+                        <a:t>アクセス元のアドレス</a:t>
+                      </a:r>
+                    </a:p>
+                  </a:txBody>
+                  <a:tcPr>
+                    <a:solidFill>
+                      <a:srgbClr val="FFFFFF"/>
+                    </a:solidFill>
+                  </a:tcPr>
+                </a:tc>
+                <a:tc>
+                  <a:txBody>
+                    <a:bodyPr/>
+                    <a:lstStyle/>
+                    <a:p>
+                      <a:pPr algn="l"/>
+                      <a:r>
+                        <a:rPr sz="1200" b="0">
+                          <a:solidFill>
+                            <a:srgbClr val="1F3355"/>
+                          </a:solidFill>
+                          <a:latin typeface="Meiryo UI"/>
+                        </a:rPr>
+                        <a:t>203.0.113.1</a:t>
+                      </a:r>
+                    </a:p>
+                  </a:txBody>
+                  <a:tcPr>
+                    <a:solidFill>
+                      <a:srgbClr val="FFFFFF"/>
+                    </a:solidFill>
+                  </a:tcPr>
+                </a:tc>
+                <a:tc>
+                  <a:txBody>
+                    <a:bodyPr/>
+                    <a:lstStyle/>
+                    <a:p>
+                      <a:pPr algn="l"/>
+                      <a:r>
+                        <a:rPr sz="1200" b="0">
+                          <a:solidFill>
+                            <a:srgbClr val="1F3355"/>
+                          </a:solidFill>
+                          <a:latin typeface="Meiryo UI"/>
+                        </a:rPr>
+                        <a:t>網側で NAT された = DS-Lite が成立している</a:t>
+                      </a:r>
+                    </a:p>
+                  </a:txBody>
+                  <a:tcPr>
+                    <a:solidFill>
+                      <a:srgbClr val="FFFFFF"/>
+                    </a:solidFill>
+                  </a:tcPr>
+                </a:tc>
+              </a:tr>
+              <a:tr h="332740">
+                <a:tc>
+                  <a:txBody>
+                    <a:bodyPr/>
+                    <a:lstStyle/>
+                    <a:p>
+                      <a:pPr algn="l"/>
+                      <a:r>
+                        <a:rPr sz="1200" b="0">
+                          <a:solidFill>
+                            <a:srgbClr val="1F3355"/>
+                          </a:solidFill>
+                          <a:latin typeface="Meiryo UI"/>
+                        </a:rPr>
+                        <a:t>ping</a:t>
+                      </a:r>
+                    </a:p>
+                  </a:txBody>
+                  <a:tcPr>
+                    <a:solidFill>
+                      <a:srgbClr val="F2F6FA"/>
+                    </a:solidFill>
+                  </a:tcPr>
+                </a:tc>
+                <a:tc>
+                  <a:txBody>
+                    <a:bodyPr/>
+                    <a:lstStyle/>
+                    <a:p>
+                      <a:pPr algn="l"/>
+                      <a:r>
+                        <a:rPr sz="1200" b="0">
+                          <a:solidFill>
+                            <a:srgbClr val="1F3355"/>
+                          </a:solidFill>
+                          <a:latin typeface="Meiryo UI"/>
+                        </a:rPr>
+                        <a:t>0% 損失 / TTL=62</a:t>
+                      </a:r>
+                    </a:p>
+                  </a:txBody>
+                  <a:tcPr>
+                    <a:solidFill>
+                      <a:srgbClr val="F2F6FA"/>
+                    </a:solidFill>
+                  </a:tcPr>
+                </a:tc>
+                <a:tc>
+                  <a:txBody>
+                    <a:bodyPr/>
+                    <a:lstStyle/>
+                    <a:p>
+                      <a:pPr algn="l"/>
+                      <a:r>
+                        <a:rPr sz="1200" b="0">
+                          <a:solidFill>
+                            <a:srgbClr val="1F3355"/>
+                          </a:solidFill>
+                          <a:latin typeface="Meiryo UI"/>
+                        </a:rPr>
+                        <a:t>相手の Linux は 64 で返す。62 で届いた = ルータを 2 つ越えた</a:t>
+                      </a:r>
+                    </a:p>
+                  </a:txBody>
+                  <a:tcPr>
+                    <a:solidFill>
+                      <a:srgbClr val="F2F6FA"/>
+                    </a:solidFill>
+                  </a:tcPr>
+                </a:tc>
+              </a:tr>
+              <a:tr h="332740">
+                <a:tc>
+                  <a:txBody>
+                    <a:bodyPr/>
+                    <a:lstStyle/>
+                    <a:p>
+                      <a:pPr algn="l"/>
+                      <a:r>
+                        <a:rPr sz="1200" b="0">
+                          <a:solidFill>
+                            <a:srgbClr val="1F3355"/>
+                          </a:solidFill>
+                          <a:latin typeface="Meiryo UI"/>
+                        </a:rPr>
+                        <a:t>MTU 1460 で送る</a:t>
+                      </a:r>
+                    </a:p>
+                  </a:txBody>
+                  <a:tcPr>
+                    <a:solidFill>
+                      <a:srgbClr val="FFFFFF"/>
+                    </a:solidFill>
+                  </a:tcPr>
+                </a:tc>
+                <a:tc>
+                  <a:txBody>
+                    <a:bodyPr/>
+                    <a:lstStyle/>
+                    <a:p>
+                      <a:pPr algn="l"/>
+                      <a:r>
+                        <a:rPr sz="1200" b="0">
+                          <a:solidFill>
+                            <a:srgbClr val="1F3355"/>
+                          </a:solidFill>
+                          <a:latin typeface="Meiryo UI"/>
+                        </a:rPr>
+                        <a:t>通る</a:t>
+                      </a:r>
+                    </a:p>
+                  </a:txBody>
+                  <a:tcPr>
+                    <a:solidFill>
+                      <a:srgbClr val="FFFFFF"/>
+                    </a:solidFill>
+                  </a:tcPr>
+                </a:tc>
+                <a:tc>
+                  <a:txBody>
+                    <a:bodyPr/>
+                    <a:lstStyle/>
+                    <a:p>
+                      <a:pPr algn="l"/>
+                      <a:r>
+                        <a:rPr sz="1200" b="0">
+                          <a:solidFill>
+                            <a:srgbClr val="1F3355"/>
+                          </a:solidFill>
+                          <a:latin typeface="Meiryo UI"/>
+                        </a:rPr>
+                        <a:t>トンネル分を引いた大きさが確保できている</a:t>
+                      </a:r>
+                    </a:p>
+                  </a:txBody>
+                  <a:tcPr>
+                    <a:solidFill>
+                      <a:srgbClr val="FFFFFF"/>
+                    </a:solidFill>
+                  </a:tcPr>
+                </a:tc>
+              </a:tr>
+              <a:tr h="332740">
+                <a:tc>
+                  <a:txBody>
+                    <a:bodyPr/>
+                    <a:lstStyle/>
+                    <a:p>
+                      <a:pPr algn="l"/>
+                      <a:r>
+                        <a:rPr sz="1200" b="0">
+                          <a:solidFill>
+                            <a:srgbClr val="1F3355"/>
+                          </a:solidFill>
+                          <a:latin typeface="Meiryo UI"/>
+                        </a:rPr>
+                        <a:t>MTU 1500 で送る</a:t>
+                      </a:r>
+                    </a:p>
+                  </a:txBody>
+                  <a:tcPr>
+                    <a:solidFill>
+                      <a:srgbClr val="F2F6FA"/>
+                    </a:solidFill>
+                  </a:tcPr>
+                </a:tc>
+                <a:tc>
+                  <a:txBody>
+                    <a:bodyPr/>
+                    <a:lstStyle/>
+                    <a:p>
+                      <a:pPr algn="l"/>
+                      <a:r>
+                        <a:rPr sz="1200" b="0">
+                          <a:solidFill>
+                            <a:srgbClr val="1F3355"/>
+                          </a:solidFill>
+                          <a:latin typeface="Meiryo UI"/>
+                        </a:rPr>
+                        <a:t>CPE が「分割が必要」と返す</a:t>
+                      </a:r>
+                    </a:p>
+                  </a:txBody>
+                  <a:tcPr>
+                    <a:solidFill>
+                      <a:srgbClr val="F2F6FA"/>
+                    </a:solidFill>
+                  </a:tcPr>
+                </a:tc>
+                <a:tc>
+                  <a:txBody>
+                    <a:bodyPr/>
+                    <a:lstStyle/>
+                    <a:p>
+                      <a:pPr algn="l"/>
+                      <a:r>
+                        <a:rPr sz="1200" b="0">
+                          <a:solidFill>
+                            <a:srgbClr val="1F3355"/>
+                          </a:solidFill>
+                          <a:latin typeface="Meiryo UI"/>
+                        </a:rPr>
+                        <a:t>経路 MTU の通知が正常に動いている</a:t>
+                      </a:r>
+                    </a:p>
+                  </a:txBody>
+                  <a:tcPr>
+                    <a:solidFill>
+                      <a:srgbClr val="F2F6FA"/>
+                    </a:solidFill>
+                  </a:tcPr>
+                </a:tc>
+              </a:tr>
+              <a:tr h="332740">
+                <a:tc>
+                  <a:txBody>
+                    <a:bodyPr/>
+                    <a:lstStyle/>
+                    <a:p>
+                      <a:pPr algn="l"/>
+                      <a:r>
+                        <a:rPr sz="1200" b="0">
+                          <a:solidFill>
+                            <a:srgbClr val="1F3355"/>
+                          </a:solidFill>
+                          <a:latin typeface="Meiryo UI"/>
+                        </a:rPr>
+                        <a:t>5MB ダウンロード</a:t>
+                      </a:r>
+                    </a:p>
+                  </a:txBody>
+                  <a:tcPr>
+                    <a:solidFill>
+                      <a:srgbClr val="FFFFFF"/>
+                    </a:solidFill>
+                  </a:tcPr>
+                </a:tc>
+                <a:tc>
+                  <a:txBody>
+                    <a:bodyPr/>
+                    <a:lstStyle/>
+                    <a:p>
+                      <a:pPr algn="l"/>
+                      <a:r>
+                        <a:rPr sz="1200" b="0">
+                          <a:solidFill>
+                            <a:srgbClr val="1F3355"/>
+                          </a:solidFill>
+                          <a:latin typeface="Meiryo UI"/>
+                        </a:rPr>
+                        <a:t>1.15 秒で完走</a:t>
+                      </a:r>
+                    </a:p>
+                  </a:txBody>
+                  <a:tcPr>
+                    <a:solidFill>
+                      <a:srgbClr val="FFFFFF"/>
+                    </a:solidFill>
+                  </a:tcPr>
+                </a:tc>
+                <a:tc>
+                  <a:txBody>
+                    <a:bodyPr/>
+                    <a:lstStyle/>
+                    <a:p>
+                      <a:pPr algn="l"/>
+                      <a:r>
+                        <a:rPr sz="1200" b="0">
+                          <a:solidFill>
+                            <a:srgbClr val="1F3355"/>
+                          </a:solidFill>
+                          <a:latin typeface="Meiryo UI"/>
+                        </a:rPr>
+                        <a:t>MTU のページで入れた「あの 1 行」が効いている</a:t>
+                      </a:r>
+                    </a:p>
+                  </a:txBody>
+                  <a:tcPr>
+                    <a:solidFill>
+                      <a:srgbClr val="FFFFFF"/>
+                    </a:solidFill>
+                  </a:tcPr>
+                </a:tc>
+              </a:tr>
+            </a:tbl>
+          </a:graphicData>
+        </a:graphic>
+      </p:graphicFrame>
+      <p:sp>
+        <p:nvSpPr>
+          <p:cNvPr id="4" name="TextBox 3"/>
+          <p:cNvSpPr txBox="1"/>
+          <p:nvPr/>
+        </p:nvSpPr>
+        <p:spPr>
+          <a:xfrm>
+            <a:off x="502920" y="3395472"/>
+            <a:ext cx="11155680" cy="548640"/>
+          </a:xfrm>
+          <a:prstGeom prst="rect">
+            <a:avLst/>
+          </a:prstGeom>
+          <a:noFill/>
+        </p:spPr>
+        <p:txBody>
+          <a:bodyPr wrap="square">
+            <a:spAutoFit/>
+          </a:bodyPr>
+          <a:lstStyle/>
+          <a:p>
+            <a:pPr algn="l"/>
+            <a:r>
+              <a:rPr sz="1200" b="0">
+                <a:solidFill>
+                  <a:srgbClr val="007ACC"/>
+                </a:solidFill>
+                <a:latin typeface="Meiryo UI"/>
+              </a:rPr>
+              <a:t>一番大事なのは 1 行目。ping が通っただけでは「たまたま届いた」かもしれません</a:t>
+            </a:r>
+          </a:p>
+        </p:txBody>
+      </p:sp>
+    </p:spTree>
+  </p:cSld>
+  <p:clrMapOvr>
+    <a:masterClrMapping/>
+  </p:clrMapOvr>
+</p:sld>
+</file>
+
+<file path=ppt/slides/slide41.xml><?xml version="1.0" encoding="utf-8"?>
+<p:sld xmlns:a="http://schemas.openxmlformats.org/drawingml/2006/main" xmlns:p="http://schemas.openxmlformats.org/presentationml/2006/main" xmlns:r="http://schemas.openxmlformats.org/officeDocument/2006/relationships">
+  <p:cSld>
+    <p:spTree>
+      <p:nvGrpSpPr>
+        <p:cNvPr id="1" name=""/>
+        <p:cNvGrpSpPr/>
+        <p:nvPr/>
+      </p:nvGrpSpPr>
+      <p:grpSpPr/>
+      <p:sp>
+        <p:nvSpPr>
+          <p:cNvPr id="2" name="TextBox 1"/>
+          <p:cNvSpPr txBox="1"/>
+          <p:nvPr/>
+        </p:nvSpPr>
+        <p:spPr>
+          <a:xfrm>
+            <a:off x="502920" y="274320"/>
+            <a:ext cx="11155680" cy="731520"/>
+          </a:xfrm>
+          <a:prstGeom prst="rect">
+            <a:avLst/>
+          </a:prstGeom>
+          <a:noFill/>
+        </p:spPr>
+        <p:txBody>
+          <a:bodyPr wrap="square">
+            <a:spAutoFit/>
+          </a:bodyPr>
+          <a:lstStyle/>
+          <a:p>
+            <a:pPr algn="l"/>
+            <a:r>
+              <a:rPr sz="2600" b="1">
+                <a:solidFill>
+                  <a:srgbClr val="1F3355"/>
+                </a:solidFill>
+                <a:latin typeface="Meiryo UI"/>
+              </a:rPr>
+              <a:t>実機の Cisco C1111-8P で MAP-E を通した結果 — 本番と同じ「自動設定」で</a:t>
+            </a:r>
+          </a:p>
+        </p:txBody>
+      </p:sp>
+      <p:graphicFrame>
+        <p:nvGraphicFramePr>
+          <p:cNvPr id="3" name="Table 2"/>
+          <p:cNvGraphicFramePr>
+            <a:graphicFrameLocks noGrp="1"/>
+          </p:cNvGraphicFramePr>
+          <p:nvPr/>
+        </p:nvGraphicFramePr>
+        <p:xfrm>
+          <a:off x="502920" y="1143000"/>
+          <a:ext cx="10789920" cy="1865376"/>
+        </p:xfrm>
+        <a:graphic>
+          <a:graphicData uri="http://schemas.openxmlformats.org/drawingml/2006/table">
+            <a:tbl>
+              <a:tblPr>
+                <a:tableStyleId>{5C22544A-7EE6-4342-B048-85BDC9FD1C3A}</a:tableStyleId>
+              </a:tblPr>
+              <a:tblGrid>
+                <a:gridCol w="3108960"/>
+                <a:gridCol w="3108960"/>
+                <a:gridCol w="4572000"/>
+              </a:tblGrid>
+              <a:tr h="310896">
+                <a:tc>
+                  <a:txBody>
+                    <a:bodyPr/>
+                    <a:lstStyle/>
+                    <a:p>
+                      <a:pPr algn="l"/>
+                      <a:r>
+                        <a:rPr sz="1300" b="1">
+                          <a:solidFill>
+                            <a:srgbClr val="FFFFFF"/>
+                          </a:solidFill>
+                          <a:latin typeface="Meiryo UI"/>
+                        </a:rPr>
+                        <a:t>確認したこと</a:t>
+                      </a:r>
+                    </a:p>
+                  </a:txBody>
+                  <a:tcPr>
+                    <a:solidFill>
+                      <a:srgbClr val="1F3355"/>
+                    </a:solidFill>
+                  </a:tcPr>
+                </a:tc>
+                <a:tc>
+                  <a:txBody>
+                    <a:bodyPr/>
+                    <a:lstStyle/>
+                    <a:p>
+                      <a:pPr algn="l"/>
+                      <a:r>
+                        <a:rPr sz="1300" b="1">
+                          <a:solidFill>
+                            <a:srgbClr val="FFFFFF"/>
+                          </a:solidFill>
+                          <a:latin typeface="Meiryo UI"/>
+                        </a:rPr>
+                        <a:t>実測値</a:t>
+                      </a:r>
+                    </a:p>
+                  </a:txBody>
+                  <a:tcPr>
+                    <a:solidFill>
+                      <a:srgbClr val="1F3355"/>
+                    </a:solidFill>
+                  </a:tcPr>
+                </a:tc>
+                <a:tc>
+                  <a:txBody>
+                    <a:bodyPr/>
+                    <a:lstStyle/>
+                    <a:p>
+                      <a:pPr algn="l"/>
+                      <a:r>
+                        <a:rPr sz="1300" b="1">
+                          <a:solidFill>
+                            <a:srgbClr val="FFFFFF"/>
+                          </a:solidFill>
+                          <a:latin typeface="Meiryo UI"/>
+                        </a:rPr>
+                        <a:t>何を示しているか</a:t>
+                      </a:r>
+                    </a:p>
+                  </a:txBody>
+                  <a:tcPr>
+                    <a:solidFill>
+                      <a:srgbClr val="1F3355"/>
+                    </a:solidFill>
+                  </a:tcPr>
+                </a:tc>
+              </a:tr>
+              <a:tr h="310896">
+                <a:tc>
+                  <a:txBody>
+                    <a:bodyPr/>
+                    <a:lstStyle/>
+                    <a:p>
+                      <a:pPr algn="l"/>
+                      <a:r>
+                        <a:rPr sz="1200" b="0">
+                          <a:solidFill>
+                            <a:srgbClr val="1F3355"/>
+                          </a:solidFill>
+                          <a:latin typeface="Meiryo UI"/>
+                        </a:rPr>
+                        <a:t>アクセス元のアドレス</a:t>
+                      </a:r>
+                    </a:p>
+                  </a:txBody>
+                  <a:tcPr>
+                    <a:solidFill>
+                      <a:srgbClr val="FFFFFF"/>
+                    </a:solidFill>
+                  </a:tcPr>
+                </a:tc>
+                <a:tc>
+                  <a:txBody>
+                    <a:bodyPr/>
+                    <a:lstStyle/>
+                    <a:p>
+                      <a:pPr algn="l"/>
+                      <a:r>
+                        <a:rPr sz="1200" b="0">
+                          <a:solidFill>
+                            <a:srgbClr val="1F3355"/>
+                          </a:solidFill>
+                          <a:latin typeface="Meiryo UI"/>
+                        </a:rPr>
+                        <a:t>198.51.100.20</a:t>
+                      </a:r>
+                    </a:p>
+                  </a:txBody>
+                  <a:tcPr>
+                    <a:solidFill>
+                      <a:srgbClr val="FFFFFF"/>
+                    </a:solidFill>
+                  </a:tcPr>
+                </a:tc>
+                <a:tc>
+                  <a:txBody>
+                    <a:bodyPr/>
+                    <a:lstStyle/>
+                    <a:p>
+                      <a:pPr algn="l"/>
+                      <a:r>
+                        <a:rPr sz="1200" b="0">
+                          <a:solidFill>
+                            <a:srgbClr val="1F3355"/>
+                          </a:solidFill>
+                          <a:latin typeface="Meiryo UI"/>
+                        </a:rPr>
+                        <a:t>共有 IPv4 で外に出た = MAP-E が成立している</a:t>
+                      </a:r>
+                    </a:p>
+                  </a:txBody>
+                  <a:tcPr>
+                    <a:solidFill>
+                      <a:srgbClr val="FFFFFF"/>
+                    </a:solidFill>
+                  </a:tcPr>
+                </a:tc>
+              </a:tr>
+              <a:tr h="310896">
+                <a:tc>
+                  <a:txBody>
+                    <a:bodyPr/>
+                    <a:lstStyle/>
+                    <a:p>
+                      <a:pPr algn="l"/>
+                      <a:r>
+                        <a:rPr sz="1200" b="0">
+                          <a:solidFill>
+                            <a:srgbClr val="1F3355"/>
+                          </a:solidFill>
+                          <a:latin typeface="Meiryo UI"/>
+                        </a:rPr>
+                        <a:t>CPE が取得したルール</a:t>
+                      </a:r>
+                    </a:p>
+                  </a:txBody>
+                  <a:tcPr>
+                    <a:solidFill>
+                      <a:srgbClr val="F2F6FA"/>
+                    </a:solidFill>
+                  </a:tcPr>
+                </a:tc>
+                <a:tc>
+                  <a:txBody>
+                    <a:bodyPr/>
+                    <a:lstStyle/>
+                    <a:p>
+                      <a:pPr algn="l"/>
+                      <a:r>
+                        <a:rPr sz="1200" b="0">
+                          <a:solidFill>
+                            <a:srgbClr val="1F3355"/>
+                          </a:solidFill>
+                          <a:latin typeface="Meiryo UI"/>
+                        </a:rPr>
+                        <a:t>配布した内容と一致</a:t>
+                      </a:r>
+                    </a:p>
+                  </a:txBody>
+                  <a:tcPr>
+                    <a:solidFill>
+                      <a:srgbClr val="F2F6FA"/>
+                    </a:solidFill>
+                  </a:tcPr>
+                </a:tc>
+                <a:tc>
+                  <a:txBody>
+                    <a:bodyPr/>
+                    <a:lstStyle/>
+                    <a:p>
+                      <a:pPr algn="l"/>
+                      <a:r>
+                        <a:rPr sz="1200" b="0">
+                          <a:solidFill>
+                            <a:srgbClr val="1F3355"/>
+                          </a:solidFill>
+                          <a:latin typeface="Meiryo UI"/>
+                        </a:rPr>
+                        <a:t>自動設定 (サーバからの取得) が成立している</a:t>
+                      </a:r>
+                    </a:p>
+                  </a:txBody>
+                  <a:tcPr>
+                    <a:solidFill>
+                      <a:srgbClr val="F2F6FA"/>
+                    </a:solidFill>
+                  </a:tcPr>
+                </a:tc>
+              </a:tr>
+              <a:tr h="310896">
+                <a:tc>
+                  <a:txBody>
+                    <a:bodyPr/>
+                    <a:lstStyle/>
+                    <a:p>
+                      <a:pPr algn="l"/>
+                      <a:r>
+                        <a:rPr sz="1200" b="0">
+                          <a:solidFill>
+                            <a:srgbClr val="1F3355"/>
+                          </a:solidFill>
+                          <a:latin typeface="Meiryo UI"/>
+                        </a:rPr>
+                        <a:t>CPE が計算した共有 IPv4</a:t>
+                      </a:r>
+                    </a:p>
+                  </a:txBody>
+                  <a:tcPr>
+                    <a:solidFill>
+                      <a:srgbClr val="FFFFFF"/>
+                    </a:solidFill>
+                  </a:tcPr>
+                </a:tc>
+                <a:tc>
+                  <a:txBody>
+                    <a:bodyPr/>
+                    <a:lstStyle/>
+                    <a:p>
+                      <a:pPr algn="l"/>
+                      <a:r>
+                        <a:rPr sz="1200" b="0">
+                          <a:solidFill>
+                            <a:srgbClr val="1F3355"/>
+                          </a:solidFill>
+                          <a:latin typeface="Meiryo UI"/>
+                        </a:rPr>
+                        <a:t>198.51.100.20</a:t>
+                      </a:r>
+                    </a:p>
+                  </a:txBody>
+                  <a:tcPr>
+                    <a:solidFill>
+                      <a:srgbClr val="FFFFFF"/>
+                    </a:solidFill>
+                  </a:tcPr>
+                </a:tc>
+                <a:tc>
+                  <a:txBody>
+                    <a:bodyPr/>
+                    <a:lstStyle/>
+                    <a:p>
+                      <a:pPr algn="l"/>
+                      <a:r>
+                        <a:rPr sz="1200" b="0">
+                          <a:solidFill>
+                            <a:srgbClr val="1F3355"/>
+                          </a:solidFill>
+                          <a:latin typeface="Meiryo UI"/>
+                        </a:rPr>
+                        <a:t>こちらの手計算と一致</a:t>
+                      </a:r>
+                    </a:p>
+                  </a:txBody>
+                  <a:tcPr>
+                    <a:solidFill>
+                      <a:srgbClr val="FFFFFF"/>
+                    </a:solidFill>
+                  </a:tcPr>
+                </a:tc>
+              </a:tr>
+              <a:tr h="310896">
+                <a:tc>
+                  <a:txBody>
+                    <a:bodyPr/>
+                    <a:lstStyle/>
+                    <a:p>
+                      <a:pPr algn="l"/>
+                      <a:r>
+                        <a:rPr sz="1200" b="0">
+                          <a:solidFill>
+                            <a:srgbClr val="1F3355"/>
+                          </a:solidFill>
+                          <a:latin typeface="Meiryo UI"/>
+                        </a:rPr>
+                        <a:t>CPE が計算したポート範囲</a:t>
+                      </a:r>
+                    </a:p>
+                  </a:txBody>
+                  <a:tcPr>
+                    <a:solidFill>
+                      <a:srgbClr val="F2F6FA"/>
+                    </a:solidFill>
+                  </a:tcPr>
+                </a:tc>
+                <a:tc>
+                  <a:txBody>
+                    <a:bodyPr/>
+                    <a:lstStyle/>
+                    <a:p>
+                      <a:pPr algn="l"/>
+                      <a:r>
+                        <a:rPr sz="1200" b="0">
+                          <a:solidFill>
+                            <a:srgbClr val="1F3355"/>
+                          </a:solidFill>
+                          <a:latin typeface="Meiryo UI"/>
+                        </a:rPr>
+                        <a:t>240 個 / 先頭 4144〜4159</a:t>
+                      </a:r>
+                    </a:p>
+                  </a:txBody>
+                  <a:tcPr>
+                    <a:solidFill>
+                      <a:srgbClr val="F2F6FA"/>
+                    </a:solidFill>
+                  </a:tcPr>
+                </a:tc>
+                <a:tc>
+                  <a:txBody>
+                    <a:bodyPr/>
+                    <a:lstStyle/>
+                    <a:p>
+                      <a:pPr algn="l"/>
+                      <a:r>
+                        <a:rPr sz="1200" b="0">
+                          <a:solidFill>
+                            <a:srgbClr val="1F3355"/>
+                          </a:solidFill>
+                          <a:latin typeface="Meiryo UI"/>
+                        </a:rPr>
+                        <a:t>こちらの手計算と一致</a:t>
+                      </a:r>
+                    </a:p>
+                  </a:txBody>
+                  <a:tcPr>
+                    <a:solidFill>
+                      <a:srgbClr val="F2F6FA"/>
+                    </a:solidFill>
+                  </a:tcPr>
+                </a:tc>
+              </a:tr>
+              <a:tr h="310896">
+                <a:tc>
+                  <a:txBody>
+                    <a:bodyPr/>
+                    <a:lstStyle/>
+                    <a:p>
+                      <a:pPr algn="l"/>
+                      <a:r>
+                        <a:rPr sz="1200" b="0">
+                          <a:solidFill>
+                            <a:srgbClr val="1F3355"/>
+                          </a:solidFill>
+                          <a:latin typeface="Meiryo UI"/>
+                        </a:rPr>
+                        <a:t>実際の送信元ポート</a:t>
+                      </a:r>
+                    </a:p>
+                  </a:txBody>
+                  <a:tcPr>
+                    <a:solidFill>
+                      <a:srgbClr val="FFFFFF"/>
+                    </a:solidFill>
+                  </a:tcPr>
+                </a:tc>
+                <a:tc>
+                  <a:txBody>
+                    <a:bodyPr/>
+                    <a:lstStyle/>
+                    <a:p>
+                      <a:pPr algn="l"/>
+                      <a:r>
+                        <a:rPr sz="1200" b="0">
+                          <a:solidFill>
+                            <a:srgbClr val="1F3355"/>
+                          </a:solidFill>
+                          <a:latin typeface="Meiryo UI"/>
+                        </a:rPr>
+                        <a:t>4145</a:t>
+                      </a:r>
+                    </a:p>
+                  </a:txBody>
+                  <a:tcPr>
+                    <a:solidFill>
+                      <a:srgbClr val="FFFFFF"/>
+                    </a:solidFill>
+                  </a:tcPr>
+                </a:tc>
+                <a:tc>
+                  <a:txBody>
+                    <a:bodyPr/>
+                    <a:lstStyle/>
+                    <a:p>
+                      <a:pPr algn="l"/>
+                      <a:r>
+                        <a:rPr sz="1200" b="0">
+                          <a:solidFill>
+                            <a:srgbClr val="1F3355"/>
+                          </a:solidFill>
+                          <a:latin typeface="Meiryo UI"/>
+                        </a:rPr>
+                        <a:t>割り当てられた範囲の中を使っている</a:t>
+                      </a:r>
+                    </a:p>
+                  </a:txBody>
+                  <a:tcPr>
+                    <a:solidFill>
+                      <a:srgbClr val="FFFFFF"/>
+                    </a:solidFill>
+                  </a:tcPr>
+                </a:tc>
+              </a:tr>
+            </a:tbl>
+          </a:graphicData>
+        </a:graphic>
+      </p:graphicFrame>
+      <p:sp>
+        <p:nvSpPr>
+          <p:cNvPr id="4" name="TextBox 3"/>
+          <p:cNvSpPr txBox="1"/>
+          <p:nvPr/>
+        </p:nvSpPr>
+        <p:spPr>
+          <a:xfrm>
+            <a:off x="502920" y="3264408"/>
+            <a:ext cx="11155680" cy="548640"/>
+          </a:xfrm>
+          <a:prstGeom prst="rect">
+            <a:avLst/>
+          </a:prstGeom>
+          <a:noFill/>
+        </p:spPr>
+        <p:txBody>
+          <a:bodyPr wrap="square">
+            <a:spAutoFit/>
+          </a:bodyPr>
+          <a:lstStyle/>
+          <a:p>
+            <a:pPr algn="l"/>
+            <a:r>
+              <a:rPr sz="1200" b="0">
+                <a:solidFill>
+                  <a:srgbClr val="007ACC"/>
+                </a:solidFill>
+                <a:latin typeface="Meiryo UI"/>
+              </a:rPr>
+              <a:t>この機種は一度「使えない」と結論しかけました。間違っていたのは機種ではなく試し方です (次ページ ④)</a:t>
+            </a:r>
+          </a:p>
+        </p:txBody>
+      </p:sp>
+    </p:spTree>
+  </p:cSld>
+  <p:clrMapOvr>
+    <a:masterClrMapping/>
+  </p:clrMapOvr>
+</p:sld>
+</file>
+
+<file path=ppt/slides/slide42.xml><?xml version="1.0" encoding="utf-8"?>
+<p:sld xmlns:a="http://schemas.openxmlformats.org/drawingml/2006/main" xmlns:p="http://schemas.openxmlformats.org/presentationml/2006/main" xmlns:r="http://schemas.openxmlformats.org/officeDocument/2006/relationships">
+  <p:cSld>
+    <p:spTree>
+      <p:nvGrpSpPr>
+        <p:cNvPr id="1" name=""/>
+        <p:cNvGrpSpPr/>
+        <p:nvPr/>
+      </p:nvGrpSpPr>
+      <p:grpSpPr/>
+      <p:sp>
+        <p:nvSpPr>
+          <p:cNvPr id="2" name="TextBox 1"/>
+          <p:cNvSpPr txBox="1"/>
+          <p:nvPr/>
+        </p:nvSpPr>
+        <p:spPr>
+          <a:xfrm>
             <a:off x="502920" y="320040"/>
             <a:ext cx="11155680" cy="822960"/>
           </a:xfrm>
@@ -16748,7 +17985,7 @@
                 </a:solidFill>
                 <a:latin typeface="Meiryo UI"/>
               </a:rPr>
-              <a:t>やってみて分かった「効かない直感」3 つ</a:t>
+              <a:t>やってみて分かった「効かない直感」 ①〜③ (④ は次ページ)</a:t>
             </a:r>
           </a:p>
         </p:txBody>
@@ -16830,7 +18067,7 @@
                 </a:solidFill>
                 <a:latin typeface="Meiryo UI"/>
               </a:rPr>
-              <a:t>この 3 つは、教科書を読んだだけでは絶対に気づけませんでした</a:t>
+              <a:t>この 4 つは、教科書を読んだだけでは絶対に気づけませんでした</a:t>
             </a:r>
           </a:p>
           <a:p>
@@ -16990,7 +18227,7 @@
                 </a:solidFill>
                 <a:latin typeface="Meiryo UI"/>
               </a:rPr>
-              <a:t>※ 実機の Cisco で同じことが起きるかは確かめていません。仮想ルータでの話です</a:t>
+              <a:t>実機 C1111-8P でも同じでした。手でルールを書いたときは 6 回とも落ちました</a:t>
             </a:r>
           </a:p>
           <a:p>
@@ -17083,7 +18320,7 @@
 </p:sld>
 </file>
 
-<file path=ppt/slides/slide41.xml><?xml version="1.0" encoding="utf-8"?>
+<file path=ppt/slides/slide43.xml><?xml version="1.0" encoding="utf-8"?>
 <p:sld xmlns:a="http://schemas.openxmlformats.org/drawingml/2006/main" xmlns:p="http://schemas.openxmlformats.org/presentationml/2006/main" xmlns:r="http://schemas.openxmlformats.org/officeDocument/2006/relationships">
   <p:cSld>
     <p:spTree>
@@ -17123,7 +18360,7 @@
                 </a:solidFill>
                 <a:latin typeface="Meiryo UI"/>
               </a:rPr>
-              <a:t>まとめ — 3 行と、明日から使うチェックリスト</a:t>
+              <a:t>④ 「動いた」は「本番と同じ道で動いた」ではない</a:t>
             </a:r>
           </a:p>
         </p:txBody>
@@ -17195,193 +18432,209 @@
           <a:p>
             <a:pPr algn="l">
               <a:spcAft>
-                <a:spcPts val="1000"/>
-              </a:spcAft>
-            </a:pPr>
-            <a:r>
-              <a:rPr sz="2000" b="1">
+                <a:spcPts val="900"/>
+              </a:spcAft>
+            </a:pPr>
+            <a:r>
+              <a:rPr sz="1900" b="1">
                 <a:solidFill>
                   <a:srgbClr val="1F3355"/>
                 </a:solidFill>
                 <a:latin typeface="Meiryo UI"/>
               </a:rPr>
-              <a:t>今日の話を 3 行にすると</a:t>
+              <a:t>検証環境は 10 回以上サイクルを回して、全部の項目が PASS していました</a:t>
             </a:r>
           </a:p>
           <a:p>
             <a:pPr lvl="1" algn="l">
               <a:spcAft>
-                <a:spcPts val="600"/>
-              </a:spcAft>
-            </a:pPr>
-            <a:r>
-              <a:rPr sz="1700" b="0">
+                <a:spcPts val="500"/>
+              </a:spcAft>
+            </a:pPr>
+            <a:r>
+              <a:rPr sz="1600" b="1">
+                <a:solidFill>
+                  <a:srgbClr val="C0392B"/>
+                </a:solidFill>
+                <a:latin typeface="Meiryo UI"/>
+              </a:rPr>
+              <a:t>それなのに MAP-E だけは、本番には存在しないやり方 を測り続けていました</a:t>
+            </a:r>
+          </a:p>
+          <a:p>
+            <a:pPr algn="l">
+              <a:spcAft>
+                <a:spcPts val="900"/>
+              </a:spcAft>
+            </a:pPr>
+            <a:r>
+              <a:rPr sz="1900" b="1">
+                <a:solidFill>
+                  <a:srgbClr val="1F3355"/>
+                </a:solidFill>
+                <a:latin typeface="Meiryo UI"/>
+              </a:rPr>
+              <a:t>なぜそうなったか</a:t>
+            </a:r>
+          </a:p>
+          <a:p>
+            <a:pPr lvl="1" algn="l">
+              <a:spcAft>
+                <a:spcPts val="500"/>
+              </a:spcAft>
+            </a:pPr>
+            <a:r>
+              <a:rPr sz="1600" b="0">
                 <a:solidFill>
                   <a:srgbClr val="555555"/>
                 </a:solidFill>
                 <a:latin typeface="Meiryo UI"/>
               </a:rPr>
-              <a:t>① PPPoE が遅いから IPoE に変える。アドレス枯渇の話ではありません</a:t>
+              <a:t>ルール配布サーバが検証環境に無かった。無いものは手で代用するしかありません</a:t>
             </a:r>
           </a:p>
           <a:p>
             <a:pPr lvl="1" algn="l">
               <a:spcAft>
-                <a:spcPts val="600"/>
-              </a:spcAft>
-            </a:pPr>
-            <a:r>
-              <a:rPr sz="1700" b="0">
+                <a:spcPts val="500"/>
+              </a:spcAft>
+            </a:pPr>
+            <a:r>
+              <a:rPr sz="1600" b="1">
+                <a:solidFill>
+                  <a:srgbClr val="C0392B"/>
+                </a:solidFill>
+                <a:latin typeface="Meiryo UI"/>
+              </a:rPr>
+              <a:t>CPE に手でルールを書く → それは本番のどの CPE もやらない操作でした</a:t>
+            </a:r>
+          </a:p>
+          <a:p>
+            <a:pPr lvl="1" algn="l">
+              <a:spcAft>
+                <a:spcPts val="500"/>
+              </a:spcAft>
+            </a:pPr>
+            <a:r>
+              <a:rPr sz="1600" b="1">
+                <a:solidFill>
+                  <a:srgbClr val="C0392B"/>
+                </a:solidFill>
+                <a:latin typeface="Meiryo UI"/>
+              </a:rPr>
+              <a:t>そのやり方では 6 回とも落ちたので、「この機種は使えない」と結論しかけました</a:t>
+            </a:r>
+          </a:p>
+          <a:p>
+            <a:pPr lvl="1" algn="l">
+              <a:spcAft>
+                <a:spcPts val="500"/>
+              </a:spcAft>
+            </a:pPr>
+            <a:r>
+              <a:rPr sz="1600" b="0">
                 <a:solidFill>
                   <a:srgbClr val="555555"/>
                 </a:solidFill>
                 <a:latin typeface="Meiryo UI"/>
               </a:rPr>
-              <a:t>② 社内は IPv4 のまま。だから IPv4 を IPv6 に載せて運ぶ。それが MAP-E と DS-Lite</a:t>
+              <a:t>サーバを建てて本番と同じ道で試したら、一度も落ちずに通りました</a:t>
+            </a:r>
+          </a:p>
+          <a:p>
+            <a:pPr algn="l">
+              <a:spcAft>
+                <a:spcPts val="900"/>
+              </a:spcAft>
+            </a:pPr>
+            <a:r>
+              <a:rPr sz="1900" b="1">
+                <a:solidFill>
+                  <a:srgbClr val="1F3355"/>
+                </a:solidFill>
+                <a:latin typeface="Meiryo UI"/>
+              </a:rPr>
+              <a:t>ここが怖いところ</a:t>
             </a:r>
           </a:p>
           <a:p>
             <a:pPr lvl="1" algn="l">
               <a:spcAft>
-                <a:spcPts val="600"/>
-              </a:spcAft>
-            </a:pPr>
-            <a:r>
-              <a:rPr sz="1700" b="0">
+                <a:spcPts val="500"/>
+              </a:spcAft>
+            </a:pPr>
+            <a:r>
+              <a:rPr sz="1600" b="0">
                 <a:solidFill>
                   <a:srgbClr val="555555"/>
                 </a:solidFill>
                 <a:latin typeface="Meiryo UI"/>
               </a:rPr>
-              <a:t>③ どちらになるかは選べない。VNE が決めています</a:t>
+              <a:t>個々の手順をいくら丁寧に検証しても、</a:t>
+            </a:r>
+          </a:p>
+          <a:p>
+            <a:pPr lvl="1" algn="l">
+              <a:spcAft>
+                <a:spcPts val="500"/>
+              </a:spcAft>
+            </a:pPr>
+            <a:r>
+              <a:rPr sz="1600" b="1">
+                <a:solidFill>
+                  <a:srgbClr val="C0392B"/>
+                </a:solidFill>
+                <a:latin typeface="Meiryo UI"/>
+              </a:rPr>
+              <a:t>「構成要素がまるごと欠けていること」は見つかりません</a:t>
+            </a:r>
+          </a:p>
+          <a:p>
+            <a:pPr lvl="1" algn="l">
+              <a:spcAft>
+                <a:spcPts val="500"/>
+              </a:spcAft>
+            </a:pPr>
+            <a:r>
+              <a:rPr sz="1600" b="0">
+                <a:solidFill>
+                  <a:srgbClr val="555555"/>
+                </a:solidFill>
+                <a:latin typeface="Meiryo UI"/>
+              </a:rPr>
+              <a:t>手順は全部正しく、結果も全部 PASS するからです</a:t>
             </a:r>
           </a:p>
           <a:p>
             <a:pPr algn="l">
               <a:spcAft>
-                <a:spcPts val="1000"/>
-              </a:spcAft>
-            </a:pPr>
-            <a:r>
-              <a:rPr sz="2000" b="1">
-                <a:solidFill>
-                  <a:srgbClr val="1F3355"/>
-                </a:solidFill>
-                <a:latin typeface="Meiryo UI"/>
-              </a:rPr>
-              <a:t>案件で最初に確認する 5 つ</a:t>
+                <a:spcPts val="900"/>
+              </a:spcAft>
+            </a:pPr>
+            <a:r>
+              <a:rPr sz="1900" b="1">
+                <a:solidFill>
+                  <a:srgbClr val="C0392B"/>
+                </a:solidFill>
+                <a:latin typeface="Meiryo UI"/>
+              </a:rPr>
+              <a:t>→ ときどき、手順ではなく 構成そのもの を疑ってください</a:t>
             </a:r>
           </a:p>
           <a:p>
             <a:pPr lvl="1" algn="l">
               <a:spcAft>
-                <a:spcPts val="600"/>
-              </a:spcAft>
-            </a:pPr>
-            <a:r>
-              <a:rPr sz="1700" b="0">
-                <a:solidFill>
-                  <a:srgbClr val="555555"/>
-                </a:solidFill>
-                <a:latin typeface="Meiryo UI"/>
-              </a:rPr>
-              <a:t>□ ひかり電話はありますか → /64 か /56 かが決まる</a:t>
-            </a:r>
-          </a:p>
-          <a:p>
-            <a:pPr lvl="1" algn="l">
-              <a:spcAft>
-                <a:spcPts val="600"/>
-              </a:spcAft>
-            </a:pPr>
-            <a:r>
-              <a:rPr sz="1700" b="0">
-                <a:solidFill>
-                  <a:srgbClr val="555555"/>
-                </a:solidFill>
-                <a:latin typeface="Meiryo UI"/>
-              </a:rPr>
-              <a:t>□ VNE はどこですか → 方式が決まる (ISP 名だけでは分かりません)</a:t>
-            </a:r>
-          </a:p>
-          <a:p>
-            <a:pPr lvl="1" algn="l">
-              <a:spcAft>
-                <a:spcPts val="600"/>
-              </a:spcAft>
-            </a:pPr>
-            <a:r>
-              <a:rPr sz="1700" b="0">
-                <a:solidFill>
-                  <a:srgbClr val="555555"/>
-                </a:solidFill>
-                <a:latin typeface="Meiryo UI"/>
-              </a:rPr>
-              <a:t>□ 外から入ってくる通信はありますか → VPN / 拠点間 / 監視 / カメラ</a:t>
-            </a:r>
-          </a:p>
-          <a:p>
-            <a:pPr lvl="1" algn="l">
-              <a:spcAft>
-                <a:spcPts val="600"/>
-              </a:spcAft>
-            </a:pPr>
-            <a:r>
-              <a:rPr sz="1700" b="0">
-                <a:solidFill>
-                  <a:srgbClr val="555555"/>
-                </a:solidFill>
-                <a:latin typeface="Meiryo UI"/>
-              </a:rPr>
-              <a:t>□ ある場合、ポート番号は何番ですか → MAP-E でも開けられるかが決まる</a:t>
-            </a:r>
-          </a:p>
-          <a:p>
-            <a:pPr lvl="1" algn="l">
-              <a:spcAft>
-                <a:spcPts val="600"/>
-              </a:spcAft>
-            </a:pPr>
-            <a:r>
-              <a:rPr sz="1700" b="0">
-                <a:solidFill>
-                  <a:srgbClr val="555555"/>
-                </a:solidFill>
-                <a:latin typeface="Meiryo UI"/>
-              </a:rPr>
-              <a:t>□ 同時接続数はどれくらいですか → MAP-E のポート数 (240 など) で足りるか</a:t>
-            </a:r>
-          </a:p>
-          <a:p>
-            <a:pPr algn="l">
-              <a:spcAft>
-                <a:spcPts val="1000"/>
-              </a:spcAft>
-            </a:pPr>
-            <a:r>
-              <a:rPr sz="2000" b="1">
-                <a:solidFill>
-                  <a:srgbClr val="1F3355"/>
-                </a:solidFill>
-                <a:latin typeface="Meiryo UI"/>
-              </a:rPr>
-              <a:t>切替後に必ず確認する 1 つ</a:t>
-            </a:r>
-          </a:p>
-          <a:p>
-            <a:pPr lvl="1" algn="l">
-              <a:spcAft>
-                <a:spcPts val="600"/>
-              </a:spcAft>
-            </a:pPr>
-            <a:r>
-              <a:rPr sz="1700" b="1">
+                <a:spcPts val="500"/>
+              </a:spcAft>
+            </a:pPr>
+            <a:r>
+              <a:rPr sz="1600" b="1">
                 <a:solidFill>
                   <a:srgbClr val="C0392B"/>
                 </a:solidFill>
                 <a:latin typeface="Meiryo UI"/>
               </a:rPr>
-              <a:t>□ どのアドレスで外に出たか。疎通確認だけでは経路が正しいことを示せません</a:t>
+              <a:t>特に「うちの環境には無いから、ここは手でやっている」という箇所。そこが穴です</a:t>
             </a:r>
           </a:p>
         </p:txBody>
@@ -17394,7 +18647,318 @@
 </p:sld>
 </file>
 
-<file path=ppt/slides/slide42.xml><?xml version="1.0" encoding="utf-8"?>
+<file path=ppt/slides/slide44.xml><?xml version="1.0" encoding="utf-8"?>
+<p:sld xmlns:a="http://schemas.openxmlformats.org/drawingml/2006/main" xmlns:p="http://schemas.openxmlformats.org/presentationml/2006/main" xmlns:r="http://schemas.openxmlformats.org/officeDocument/2006/relationships">
+  <p:cSld>
+    <p:spTree>
+      <p:nvGrpSpPr>
+        <p:cNvPr id="1" name=""/>
+        <p:cNvGrpSpPr/>
+        <p:nvPr/>
+      </p:nvGrpSpPr>
+      <p:grpSpPr/>
+      <p:sp>
+        <p:nvSpPr>
+          <p:cNvPr id="2" name="TextBox 1"/>
+          <p:cNvSpPr txBox="1"/>
+          <p:nvPr/>
+        </p:nvSpPr>
+        <p:spPr>
+          <a:xfrm>
+            <a:off x="502920" y="320040"/>
+            <a:ext cx="11155680" cy="822960"/>
+          </a:xfrm>
+          <a:prstGeom prst="rect">
+            <a:avLst/>
+          </a:prstGeom>
+          <a:noFill/>
+        </p:spPr>
+        <p:txBody>
+          <a:bodyPr wrap="square">
+            <a:spAutoFit/>
+          </a:bodyPr>
+          <a:lstStyle/>
+          <a:p>
+            <a:pPr algn="l"/>
+            <a:r>
+              <a:rPr sz="2800" b="1">
+                <a:solidFill>
+                  <a:srgbClr val="1F3355"/>
+                </a:solidFill>
+                <a:latin typeface="Meiryo UI"/>
+              </a:rPr>
+              <a:t>まとめ — 3 行と、明日から使うチェックリスト</a:t>
+            </a:r>
+          </a:p>
+        </p:txBody>
+      </p:sp>
+      <p:sp>
+        <p:nvSpPr>
+          <p:cNvPr id="3" name="Rectangle 2"/>
+          <p:cNvSpPr/>
+          <p:nvPr/>
+        </p:nvSpPr>
+        <p:spPr>
+          <a:xfrm>
+            <a:off x="502920" y="1115568"/>
+            <a:ext cx="11155680" cy="31750"/>
+          </a:xfrm>
+          <a:prstGeom prst="rect">
+            <a:avLst/>
+          </a:prstGeom>
+          <a:solidFill>
+            <a:srgbClr val="007ACC"/>
+          </a:solidFill>
+          <a:ln>
+            <a:noFill/>
+          </a:ln>
+        </p:spPr>
+        <p:style>
+          <a:lnRef idx="1">
+            <a:schemeClr val="accent1"/>
+          </a:lnRef>
+          <a:fillRef idx="3">
+            <a:schemeClr val="accent1"/>
+          </a:fillRef>
+          <a:effectRef idx="2">
+            <a:schemeClr val="accent1"/>
+          </a:effectRef>
+          <a:fontRef idx="minor">
+            <a:schemeClr val="lt1"/>
+          </a:fontRef>
+        </p:style>
+        <p:txBody>
+          <a:bodyPr rtlCol="0" anchor="ctr"/>
+          <a:lstStyle/>
+          <a:p>
+            <a:pPr algn="ctr"/>
+          </a:p>
+        </p:txBody>
+      </p:sp>
+      <p:sp>
+        <p:nvSpPr>
+          <p:cNvPr id="4" name="TextBox 3"/>
+          <p:cNvSpPr txBox="1"/>
+          <p:nvPr/>
+        </p:nvSpPr>
+        <p:spPr>
+          <a:xfrm>
+            <a:off x="594360" y="1371600"/>
+            <a:ext cx="10972800" cy="4983480"/>
+          </a:xfrm>
+          <a:prstGeom prst="rect">
+            <a:avLst/>
+          </a:prstGeom>
+          <a:noFill/>
+        </p:spPr>
+        <p:txBody>
+          <a:bodyPr wrap="square">
+            <a:spAutoFit/>
+          </a:bodyPr>
+          <a:lstStyle/>
+          <a:p>
+            <a:pPr algn="l">
+              <a:spcAft>
+                <a:spcPts val="1000"/>
+              </a:spcAft>
+            </a:pPr>
+            <a:r>
+              <a:rPr sz="2000" b="1">
+                <a:solidFill>
+                  <a:srgbClr val="1F3355"/>
+                </a:solidFill>
+                <a:latin typeface="Meiryo UI"/>
+              </a:rPr>
+              <a:t>今日の話を 3 行にすると</a:t>
+            </a:r>
+          </a:p>
+          <a:p>
+            <a:pPr lvl="1" algn="l">
+              <a:spcAft>
+                <a:spcPts val="600"/>
+              </a:spcAft>
+            </a:pPr>
+            <a:r>
+              <a:rPr sz="1700" b="0">
+                <a:solidFill>
+                  <a:srgbClr val="555555"/>
+                </a:solidFill>
+                <a:latin typeface="Meiryo UI"/>
+              </a:rPr>
+              <a:t>① PPPoE が遅いから IPoE に変える。アドレス枯渇の話ではありません</a:t>
+            </a:r>
+          </a:p>
+          <a:p>
+            <a:pPr lvl="1" algn="l">
+              <a:spcAft>
+                <a:spcPts val="600"/>
+              </a:spcAft>
+            </a:pPr>
+            <a:r>
+              <a:rPr sz="1700" b="0">
+                <a:solidFill>
+                  <a:srgbClr val="555555"/>
+                </a:solidFill>
+                <a:latin typeface="Meiryo UI"/>
+              </a:rPr>
+              <a:t>② 社内は IPv4 のまま。だから IPv4 を IPv6 に載せて運ぶ。それが MAP-E と DS-Lite</a:t>
+            </a:r>
+          </a:p>
+          <a:p>
+            <a:pPr lvl="1" algn="l">
+              <a:spcAft>
+                <a:spcPts val="600"/>
+              </a:spcAft>
+            </a:pPr>
+            <a:r>
+              <a:rPr sz="1700" b="0">
+                <a:solidFill>
+                  <a:srgbClr val="555555"/>
+                </a:solidFill>
+                <a:latin typeface="Meiryo UI"/>
+              </a:rPr>
+              <a:t>③ どちらになるかは選べない。VNE が決めています</a:t>
+            </a:r>
+          </a:p>
+          <a:p>
+            <a:pPr algn="l">
+              <a:spcAft>
+                <a:spcPts val="1000"/>
+              </a:spcAft>
+            </a:pPr>
+            <a:r>
+              <a:rPr sz="2000" b="1">
+                <a:solidFill>
+                  <a:srgbClr val="1F3355"/>
+                </a:solidFill>
+                <a:latin typeface="Meiryo UI"/>
+              </a:rPr>
+              <a:t>案件で最初に確認する 5 つ</a:t>
+            </a:r>
+          </a:p>
+          <a:p>
+            <a:pPr lvl="1" algn="l">
+              <a:spcAft>
+                <a:spcPts val="600"/>
+              </a:spcAft>
+            </a:pPr>
+            <a:r>
+              <a:rPr sz="1700" b="0">
+                <a:solidFill>
+                  <a:srgbClr val="555555"/>
+                </a:solidFill>
+                <a:latin typeface="Meiryo UI"/>
+              </a:rPr>
+              <a:t>□ ひかり電話はありますか → /64 か /56 かが決まる</a:t>
+            </a:r>
+          </a:p>
+          <a:p>
+            <a:pPr lvl="1" algn="l">
+              <a:spcAft>
+                <a:spcPts val="600"/>
+              </a:spcAft>
+            </a:pPr>
+            <a:r>
+              <a:rPr sz="1700" b="0">
+                <a:solidFill>
+                  <a:srgbClr val="555555"/>
+                </a:solidFill>
+                <a:latin typeface="Meiryo UI"/>
+              </a:rPr>
+              <a:t>□ VNE はどこですか → 方式が決まる (ISP 名だけでは分かりません)</a:t>
+            </a:r>
+          </a:p>
+          <a:p>
+            <a:pPr lvl="1" algn="l">
+              <a:spcAft>
+                <a:spcPts val="600"/>
+              </a:spcAft>
+            </a:pPr>
+            <a:r>
+              <a:rPr sz="1700" b="0">
+                <a:solidFill>
+                  <a:srgbClr val="555555"/>
+                </a:solidFill>
+                <a:latin typeface="Meiryo UI"/>
+              </a:rPr>
+              <a:t>□ 外から入ってくる通信はありますか → VPN / 拠点間 / 監視 / カメラ</a:t>
+            </a:r>
+          </a:p>
+          <a:p>
+            <a:pPr lvl="1" algn="l">
+              <a:spcAft>
+                <a:spcPts val="600"/>
+              </a:spcAft>
+            </a:pPr>
+            <a:r>
+              <a:rPr sz="1700" b="0">
+                <a:solidFill>
+                  <a:srgbClr val="555555"/>
+                </a:solidFill>
+                <a:latin typeface="Meiryo UI"/>
+              </a:rPr>
+              <a:t>□ ある場合、ポート番号は何番ですか → MAP-E でも開けられるかが決まる</a:t>
+            </a:r>
+          </a:p>
+          <a:p>
+            <a:pPr lvl="1" algn="l">
+              <a:spcAft>
+                <a:spcPts val="600"/>
+              </a:spcAft>
+            </a:pPr>
+            <a:r>
+              <a:rPr sz="1700" b="0">
+                <a:solidFill>
+                  <a:srgbClr val="555555"/>
+                </a:solidFill>
+                <a:latin typeface="Meiryo UI"/>
+              </a:rPr>
+              <a:t>□ 同時接続数はどれくらいですか → MAP-E のポート数 (240 など) で足りるか</a:t>
+            </a:r>
+          </a:p>
+          <a:p>
+            <a:pPr algn="l">
+              <a:spcAft>
+                <a:spcPts val="1000"/>
+              </a:spcAft>
+            </a:pPr>
+            <a:r>
+              <a:rPr sz="2000" b="1">
+                <a:solidFill>
+                  <a:srgbClr val="1F3355"/>
+                </a:solidFill>
+                <a:latin typeface="Meiryo UI"/>
+              </a:rPr>
+              <a:t>切替後に必ず確認する 1 つ</a:t>
+            </a:r>
+          </a:p>
+          <a:p>
+            <a:pPr lvl="1" algn="l">
+              <a:spcAft>
+                <a:spcPts val="600"/>
+              </a:spcAft>
+            </a:pPr>
+            <a:r>
+              <a:rPr sz="1700" b="1">
+                <a:solidFill>
+                  <a:srgbClr val="C0392B"/>
+                </a:solidFill>
+                <a:latin typeface="Meiryo UI"/>
+              </a:rPr>
+              <a:t>□ どのアドレスで外に出たか。疎通確認だけでは経路が正しいことを示せません</a:t>
+            </a:r>
+          </a:p>
+        </p:txBody>
+      </p:sp>
+    </p:spTree>
+  </p:cSld>
+  <p:clrMapOvr>
+    <a:masterClrMapping/>
+  </p:clrMapOvr>
+</p:sld>
+</file>
+
+<file path=ppt/slides/slide45.xml><?xml version="1.0" encoding="utf-8"?>
 <p:sld xmlns:a="http://schemas.openxmlformats.org/drawingml/2006/main" xmlns:p="http://schemas.openxmlformats.org/presentationml/2006/main" xmlns:r="http://schemas.openxmlformats.org/officeDocument/2006/relationships">
   <p:cSld>
     <p:spTree>

--- a/docs/ipoe-lab/slides/setsumeikai.pptx
+++ b/docs/ipoe-lab/slides/setsumeikai.pptx
@@ -50,6 +50,7 @@
     <p:sldId id="298" r:id="rId50"/>
     <p:sldId id="299" r:id="rId51"/>
     <p:sldId id="300" r:id="rId52"/>
+    <p:sldId id="301" r:id="rId53"/>
   </p:sldIdLst>
   <p:sldSz cx="12191695" cy="6858000" type="screen4x3"/>
   <p:notesSz cx="6858000" cy="9144000"/>
@@ -592,6 +593,101 @@
 </file>
 
 <file path=ppt/notesSlides/notesSlide10.xml><?xml version="1.0" encoding="utf-8"?>
+<p:notes xmlns:a="http://schemas.openxmlformats.org/drawingml/2006/main" xmlns:p="http://schemas.openxmlformats.org/presentationml/2006/main" xmlns:r="http://schemas.openxmlformats.org/officeDocument/2006/relationships">
+  <p:cSld>
+    <p:spTree>
+      <p:nvGrpSpPr>
+        <p:cNvPr id="1" name=""/>
+        <p:cNvGrpSpPr/>
+        <p:nvPr/>
+      </p:nvGrpSpPr>
+      <p:grpSpPr>
+        <a:xfrm>
+          <a:off x="0" y="0"/>
+          <a:ext cx="0" cy="0"/>
+          <a:chOff x="0" y="0"/>
+          <a:chExt cx="0" cy="0"/>
+        </a:xfrm>
+      </p:grpSpPr>
+      <p:sp>
+        <p:nvSpPr>
+          <p:cNvPr id="2" name="Slide Image Placeholder 1"/>
+          <p:cNvSpPr>
+            <a:spLocks noGrp="1"/>
+          </p:cNvSpPr>
+          <p:nvPr>
+            <p:ph type="sldImg" idx="2"/>
+          </p:nvPr>
+        </p:nvSpPr>
+        <p:spPr/>
+      </p:sp>
+      <p:sp>
+        <p:nvSpPr>
+          <p:cNvPr id="3" name="Notes Placeholder 2"/>
+          <p:cNvSpPr>
+            <a:spLocks noGrp="1"/>
+          </p:cNvSpPr>
+          <p:nvPr>
+            <p:ph type="body" idx="3" sz="quarter"/>
+          </p:nvPr>
+        </p:nvSpPr>
+        <p:spPr/>
+        <p:txBody>
+          <a:bodyPr/>
+          <a:lstStyle/>
+          <a:p>
+            <a:r>
+              <a:t>【話す人へ】</a:t>
+            </a:r>
+          </a:p>
+          <a:p>
+            <a:r>
+              <a:t>・**事業者が返す数字ひとつ**で共有/固定が決まる、というのがここの中身。</a:t>
+            </a:r>
+          </a:p>
+          <a:p>
+            <a:r>
+              <a:t>・**IPv4 アドレスが変わらない**のが意外に効く。「固定 IP = アドレスが変わらないこと」</a:t>
+            </a:r>
+          </a:p>
+          <a:p>
+            <a:r>
+              <a:t>  だと思っている人が多いが、**ポートの持ち分**の話でもある。</a:t>
+            </a:r>
+          </a:p>
+          <a:p>
+            <a:r>
+              <a:t>・同時接続数が足りない案件では、**固定 IP オプションが技術的な解**になる。</a:t>
+            </a:r>
+          </a:p>
+          <a:p>
+            <a:r>
+              <a:t>  見積の根拠として使えるので、営業に同席してもらう回では特に丁寧に。</a:t>
+            </a:r>
+          </a:p>
+        </p:txBody>
+      </p:sp>
+      <p:sp>
+        <p:nvSpPr>
+          <p:cNvPr id="4" name="Slide Number Placeholder 3"/>
+          <p:cNvSpPr>
+            <a:spLocks noGrp="1"/>
+          </p:cNvSpPr>
+          <p:nvPr>
+            <p:ph type="sldNum" idx="5" sz="quarter"/>
+          </p:nvPr>
+        </p:nvSpPr>
+        <p:spPr/>
+      </p:sp>
+    </p:spTree>
+  </p:cSld>
+  <p:clrMapOvr>
+    <a:masterClrMapping/>
+  </p:clrMapOvr>
+</p:notes>
+</file>
+
+<file path=ppt/notesSlides/notesSlide11.xml><?xml version="1.0" encoding="utf-8"?>
 <p:notes xmlns:a="http://schemas.openxmlformats.org/drawingml/2006/main" xmlns:p="http://schemas.openxmlformats.org/presentationml/2006/main" xmlns:r="http://schemas.openxmlformats.org/officeDocument/2006/relationships">
   <p:cSld>
     <p:spTree>
@@ -11060,11 +11156,11 @@
           <a:p>
             <a:pPr algn="l">
               <a:spcAft>
-                <a:spcPts val="800"/>
-              </a:spcAft>
-            </a:pPr>
-            <a:r>
-              <a:rPr sz="1800" b="1">
+                <a:spcPts val="500"/>
+              </a:spcAft>
+            </a:pPr>
+            <a:r>
+              <a:rPr sz="1500" b="1">
                 <a:solidFill>
                   <a:srgbClr val="1F3355"/>
                 </a:solidFill>
@@ -11076,11 +11172,11 @@
           <a:p>
             <a:pPr lvl="1" algn="l">
               <a:spcAft>
-                <a:spcPts val="400"/>
-              </a:spcAft>
-            </a:pPr>
-            <a:r>
-              <a:rPr sz="1500" b="0">
+                <a:spcPts val="300"/>
+              </a:spcAft>
+            </a:pPr>
+            <a:r>
+              <a:rPr sz="1200" b="0">
                 <a:solidFill>
                   <a:srgbClr val="555555"/>
                 </a:solidFill>
@@ -11092,11 +11188,11 @@
           <a:p>
             <a:pPr lvl="1" algn="l">
               <a:spcAft>
-                <a:spcPts val="400"/>
-              </a:spcAft>
-            </a:pPr>
-            <a:r>
-              <a:rPr sz="1500" b="0">
+                <a:spcPts val="300"/>
+              </a:spcAft>
+            </a:pPr>
+            <a:r>
+              <a:rPr sz="1200" b="0">
                 <a:solidFill>
                   <a:srgbClr val="555555"/>
                 </a:solidFill>
@@ -11108,11 +11204,11 @@
           <a:p>
             <a:pPr algn="l">
               <a:spcAft>
-                <a:spcPts val="800"/>
-              </a:spcAft>
-            </a:pPr>
-            <a:r>
-              <a:rPr sz="1800" b="1">
+                <a:spcPts val="500"/>
+              </a:spcAft>
+            </a:pPr>
+            <a:r>
+              <a:rPr sz="1500" b="1">
                 <a:solidFill>
                   <a:srgbClr val="1F3355"/>
                 </a:solidFill>
@@ -11124,11 +11220,11 @@
           <a:p>
             <a:pPr lvl="1" algn="l">
               <a:spcAft>
-                <a:spcPts val="400"/>
-              </a:spcAft>
-            </a:pPr>
-            <a:r>
-              <a:rPr sz="1500" b="0">
+                <a:spcPts val="300"/>
+              </a:spcAft>
+            </a:pPr>
+            <a:r>
+              <a:rPr sz="1200" b="0">
                 <a:solidFill>
                   <a:srgbClr val="555555"/>
                 </a:solidFill>
@@ -11140,11 +11236,11 @@
           <a:p>
             <a:pPr lvl="1" algn="l">
               <a:spcAft>
-                <a:spcPts val="400"/>
-              </a:spcAft>
-            </a:pPr>
-            <a:r>
-              <a:rPr sz="1500" b="0">
+                <a:spcPts val="300"/>
+              </a:spcAft>
+            </a:pPr>
+            <a:r>
+              <a:rPr sz="1200" b="0">
                 <a:solidFill>
                   <a:srgbClr val="555555"/>
                 </a:solidFill>
@@ -11156,11 +11252,11 @@
           <a:p>
             <a:pPr lvl="1" algn="l">
               <a:spcAft>
-                <a:spcPts val="400"/>
-              </a:spcAft>
-            </a:pPr>
-            <a:r>
-              <a:rPr sz="1500" b="0">
+                <a:spcPts val="300"/>
+              </a:spcAft>
+            </a:pPr>
+            <a:r>
+              <a:rPr sz="1200" b="0">
                 <a:solidFill>
                   <a:srgbClr val="555555"/>
                 </a:solidFill>
@@ -11172,11 +11268,11 @@
           <a:p>
             <a:pPr algn="l">
               <a:spcAft>
-                <a:spcPts val="800"/>
-              </a:spcAft>
-            </a:pPr>
-            <a:r>
-              <a:rPr sz="1800" b="1">
+                <a:spcPts val="500"/>
+              </a:spcAft>
+            </a:pPr>
+            <a:r>
+              <a:rPr sz="1500" b="1">
                 <a:solidFill>
                   <a:srgbClr val="1F3355"/>
                 </a:solidFill>
@@ -11188,11 +11284,11 @@
           <a:p>
             <a:pPr lvl="1" algn="l">
               <a:spcAft>
-                <a:spcPts val="400"/>
-              </a:spcAft>
-            </a:pPr>
-            <a:r>
-              <a:rPr sz="1500" b="0">
+                <a:spcPts val="300"/>
+              </a:spcAft>
+            </a:pPr>
+            <a:r>
+              <a:rPr sz="1200" b="0">
                 <a:solidFill>
                   <a:srgbClr val="0B6040"/>
                 </a:solidFill>
@@ -11204,11 +11300,11 @@
           <a:p>
             <a:pPr lvl="1" algn="l">
               <a:spcAft>
-                <a:spcPts val="400"/>
-              </a:spcAft>
-            </a:pPr>
-            <a:r>
-              <a:rPr sz="1500" b="0">
+                <a:spcPts val="300"/>
+              </a:spcAft>
+            </a:pPr>
+            <a:r>
+              <a:rPr sz="1200" b="0">
                 <a:solidFill>
                   <a:srgbClr val="0B6040"/>
                 </a:solidFill>
@@ -11220,11 +11316,11 @@
           <a:p>
             <a:pPr lvl="1" algn="l">
               <a:spcAft>
-                <a:spcPts val="400"/>
-              </a:spcAft>
-            </a:pPr>
-            <a:r>
-              <a:rPr sz="1500" b="0">
+                <a:spcPts val="300"/>
+              </a:spcAft>
+            </a:pPr>
+            <a:r>
+              <a:rPr sz="1200" b="0">
                 <a:solidFill>
                   <a:srgbClr val="0B6040"/>
                 </a:solidFill>
@@ -11236,11 +11332,11 @@
           <a:p>
             <a:pPr algn="l">
               <a:spcAft>
-                <a:spcPts val="800"/>
-              </a:spcAft>
-            </a:pPr>
-            <a:r>
-              <a:rPr sz="1800" b="1">
+                <a:spcPts val="500"/>
+              </a:spcAft>
+            </a:pPr>
+            <a:r>
+              <a:rPr sz="1500" b="1">
                 <a:solidFill>
                   <a:srgbClr val="C0392B"/>
                 </a:solidFill>
@@ -11252,11 +11348,11 @@
           <a:p>
             <a:pPr lvl="1" algn="l">
               <a:spcAft>
-                <a:spcPts val="400"/>
-              </a:spcAft>
-            </a:pPr>
-            <a:r>
-              <a:rPr sz="1500" b="0">
+                <a:spcPts val="300"/>
+              </a:spcAft>
+            </a:pPr>
+            <a:r>
+              <a:rPr sz="1200" b="0">
                 <a:solidFill>
                   <a:srgbClr val="555555"/>
                 </a:solidFill>
@@ -11266,19 +11362,67 @@
             </a:r>
           </a:p>
           <a:p>
+            <a:pPr algn="l">
+              <a:spcAft>
+                <a:spcPts val="500"/>
+              </a:spcAft>
+            </a:pPr>
+            <a:r>
+              <a:rPr sz="1500" b="1">
+                <a:solidFill>
+                  <a:srgbClr val="C0392B"/>
+                </a:solidFill>
+                <a:latin typeface="Meiryo UI"/>
+              </a:rPr>
+              <a:t>どれくらい少ないか — うちで実際に枯れました</a:t>
+            </a:r>
+          </a:p>
+          <a:p>
             <a:pPr lvl="1" algn="l">
               <a:spcAft>
-                <a:spcPts val="400"/>
-              </a:spcAft>
-            </a:pPr>
-            <a:r>
-              <a:rPr sz="1500" b="0">
+                <a:spcPts val="300"/>
+              </a:spcAft>
+            </a:pPr>
+            <a:r>
+              <a:rPr sz="1200" b="0">
                 <a:solidFill>
                   <a:srgbClr val="555555"/>
                 </a:solidFill>
                 <a:latin typeface="Meiryo UI"/>
               </a:rPr>
-              <a:t>ブラウザは 1 タブで数十本張ります。台数が多い拠点や監視系があると足りません</a:t>
+              <a:t>Windows PC を 1 台 繋いで放置しただけで、数十分でこうなりました</a:t>
+            </a:r>
+          </a:p>
+          <a:p>
+            <a:pPr lvl="1" algn="l">
+              <a:spcAft>
+                <a:spcPts val="300"/>
+              </a:spcAft>
+            </a:pPr>
+            <a:r>
+              <a:rPr sz="1200" b="0">
+                <a:solidFill>
+                  <a:srgbClr val="0B6040"/>
+                </a:solidFill>
+                <a:latin typeface="Consolas"/>
+              </a:rPr>
+              <a:t>%NAT-6-ADDR_ALLOC_FAILURE: ... pool 1 may be exhausted</a:t>
+            </a:r>
+          </a:p>
+          <a:p>
+            <a:pPr lvl="1" algn="l">
+              <a:spcAft>
+                <a:spcPts val="300"/>
+              </a:spcAft>
+            </a:pPr>
+            <a:r>
+              <a:rPr sz="1200" b="0">
+                <a:solidFill>
+                  <a:srgbClr val="555555"/>
+                </a:solidFill>
+                <a:latin typeface="Meiryo UI"/>
+              </a:rPr>
+              <a:t>わざと枯らしたのではありません。Update やテレメトリだけで使い切ります</a:t>
             </a:r>
           </a:p>
         </p:txBody>
@@ -17963,6 +18107,547 @@
         </p:nvSpPr>
         <p:spPr>
           <a:xfrm>
+            <a:off x="502920" y="274320"/>
+            <a:ext cx="11155680" cy="731520"/>
+          </a:xfrm>
+          <a:prstGeom prst="rect">
+            <a:avLst/>
+          </a:prstGeom>
+          <a:noFill/>
+        </p:spPr>
+        <p:txBody>
+          <a:bodyPr wrap="square">
+            <a:spAutoFit/>
+          </a:bodyPr>
+          <a:lstStyle/>
+          <a:p>
+            <a:pPr algn="l"/>
+            <a:r>
+              <a:rPr sz="2600" b="1">
+                <a:solidFill>
+                  <a:srgbClr val="1F3355"/>
+                </a:solidFill>
+                <a:latin typeface="Meiryo UI"/>
+              </a:rPr>
+              <a:t>同じ環境で「固定 IP 相当」のルールを配ると — 変わるのはポートだけ</a:t>
+            </a:r>
+          </a:p>
+        </p:txBody>
+      </p:sp>
+      <p:graphicFrame>
+        <p:nvGraphicFramePr>
+          <p:cNvPr id="3" name="Table 2"/>
+          <p:cNvGraphicFramePr>
+            <a:graphicFrameLocks noGrp="1"/>
+          </p:cNvGraphicFramePr>
+          <p:nvPr/>
+        </p:nvGraphicFramePr>
+        <p:xfrm>
+          <a:off x="502920" y="1143000"/>
+          <a:ext cx="10789920" cy="1865376"/>
+        </p:xfrm>
+        <a:graphic>
+          <a:graphicData uri="http://schemas.openxmlformats.org/drawingml/2006/table">
+            <a:tbl>
+              <a:tblPr>
+                <a:tableStyleId>{5C22544A-7EE6-4342-B048-85BDC9FD1C3A}</a:tableStyleId>
+              </a:tblPr>
+              <a:tblGrid>
+                <a:gridCol w="3657600"/>
+                <a:gridCol w="3474720"/>
+                <a:gridCol w="3657600"/>
+              </a:tblGrid>
+              <a:tr h="310896">
+                <a:tc>
+                  <a:txBody>
+                    <a:bodyPr/>
+                    <a:lstStyle/>
+                    <a:p>
+                      <a:pPr algn="l"/>
+                      <a:r>
+                        <a:rPr sz="1300" b="1">
+                          <a:solidFill>
+                            <a:srgbClr val="FFFFFF"/>
+                          </a:solidFill>
+                          <a:latin typeface="Meiryo UI"/>
+                        </a:rPr>
+                        <a:t/>
+                      </a:r>
+                    </a:p>
+                  </a:txBody>
+                  <a:tcPr>
+                    <a:solidFill>
+                      <a:srgbClr val="1F3355"/>
+                    </a:solidFill>
+                  </a:tcPr>
+                </a:tc>
+                <a:tc>
+                  <a:txBody>
+                    <a:bodyPr/>
+                    <a:lstStyle/>
+                    <a:p>
+                      <a:pPr algn="l"/>
+                      <a:r>
+                        <a:rPr sz="1300" b="1">
+                          <a:solidFill>
+                            <a:srgbClr val="FFFFFF"/>
+                          </a:solidFill>
+                          <a:latin typeface="Meiryo UI"/>
+                        </a:rPr>
+                        <a:t>共有 IP (既定)</a:t>
+                      </a:r>
+                    </a:p>
+                  </a:txBody>
+                  <a:tcPr>
+                    <a:solidFill>
+                      <a:srgbClr val="1F3355"/>
+                    </a:solidFill>
+                  </a:tcPr>
+                </a:tc>
+                <a:tc>
+                  <a:txBody>
+                    <a:bodyPr/>
+                    <a:lstStyle/>
+                    <a:p>
+                      <a:pPr algn="l"/>
+                      <a:r>
+                        <a:rPr sz="1300" b="1">
+                          <a:solidFill>
+                            <a:srgbClr val="FFFFFF"/>
+                          </a:solidFill>
+                          <a:latin typeface="Meiryo UI"/>
+                        </a:rPr>
+                        <a:t>固定 IP 相当</a:t>
+                      </a:r>
+                    </a:p>
+                  </a:txBody>
+                  <a:tcPr>
+                    <a:solidFill>
+                      <a:srgbClr val="1F3355"/>
+                    </a:solidFill>
+                  </a:tcPr>
+                </a:tc>
+              </a:tr>
+              <a:tr h="310896">
+                <a:tc>
+                  <a:txBody>
+                    <a:bodyPr/>
+                    <a:lstStyle/>
+                    <a:p>
+                      <a:pPr algn="l"/>
+                      <a:r>
+                        <a:rPr sz="1200" b="0">
+                          <a:solidFill>
+                            <a:srgbClr val="1F3355"/>
+                          </a:solidFill>
+                          <a:latin typeface="Meiryo UI"/>
+                        </a:rPr>
+                        <a:t>事業者が配る値 (eaBitLength)</a:t>
+                      </a:r>
+                    </a:p>
+                  </a:txBody>
+                  <a:tcPr>
+                    <a:solidFill>
+                      <a:srgbClr val="FFFFFF"/>
+                    </a:solidFill>
+                  </a:tcPr>
+                </a:tc>
+                <a:tc>
+                  <a:txBody>
+                    <a:bodyPr/>
+                    <a:lstStyle/>
+                    <a:p>
+                      <a:pPr algn="l"/>
+                      <a:r>
+                        <a:rPr sz="1200" b="0">
+                          <a:solidFill>
+                            <a:srgbClr val="1F3355"/>
+                          </a:solidFill>
+                          <a:latin typeface="Meiryo UI"/>
+                        </a:rPr>
+                        <a:t>16</a:t>
+                      </a:r>
+                    </a:p>
+                  </a:txBody>
+                  <a:tcPr>
+                    <a:solidFill>
+                      <a:srgbClr val="FFFFFF"/>
+                    </a:solidFill>
+                  </a:tcPr>
+                </a:tc>
+                <a:tc>
+                  <a:txBody>
+                    <a:bodyPr/>
+                    <a:lstStyle/>
+                    <a:p>
+                      <a:pPr algn="l"/>
+                      <a:r>
+                        <a:rPr sz="1200" b="0">
+                          <a:solidFill>
+                            <a:srgbClr val="1F3355"/>
+                          </a:solidFill>
+                          <a:latin typeface="Meiryo UI"/>
+                        </a:rPr>
+                        <a:t>8</a:t>
+                      </a:r>
+                    </a:p>
+                  </a:txBody>
+                  <a:tcPr>
+                    <a:solidFill>
+                      <a:srgbClr val="FFFFFF"/>
+                    </a:solidFill>
+                  </a:tcPr>
+                </a:tc>
+              </a:tr>
+              <a:tr h="310896">
+                <a:tc>
+                  <a:txBody>
+                    <a:bodyPr/>
+                    <a:lstStyle/>
+                    <a:p>
+                      <a:pPr algn="l"/>
+                      <a:r>
+                        <a:rPr sz="1200" b="0">
+                          <a:solidFill>
+                            <a:srgbClr val="1F3355"/>
+                          </a:solidFill>
+                          <a:latin typeface="Meiryo UI"/>
+                        </a:rPr>
+                        <a:t>何人で分けるか</a:t>
+                      </a:r>
+                    </a:p>
+                  </a:txBody>
+                  <a:tcPr>
+                    <a:solidFill>
+                      <a:srgbClr val="F2F6FA"/>
+                    </a:solidFill>
+                  </a:tcPr>
+                </a:tc>
+                <a:tc>
+                  <a:txBody>
+                    <a:bodyPr/>
+                    <a:lstStyle/>
+                    <a:p>
+                      <a:pPr algn="l"/>
+                      <a:r>
+                        <a:rPr sz="1200" b="0">
+                          <a:solidFill>
+                            <a:srgbClr val="1F3355"/>
+                          </a:solidFill>
+                          <a:latin typeface="Meiryo UI"/>
+                        </a:rPr>
+                        <a:t>256 人</a:t>
+                      </a:r>
+                    </a:p>
+                  </a:txBody>
+                  <a:tcPr>
+                    <a:solidFill>
+                      <a:srgbClr val="F2F6FA"/>
+                    </a:solidFill>
+                  </a:tcPr>
+                </a:tc>
+                <a:tc>
+                  <a:txBody>
+                    <a:bodyPr/>
+                    <a:lstStyle/>
+                    <a:p>
+                      <a:pPr algn="l"/>
+                      <a:r>
+                        <a:rPr sz="1200" b="0">
+                          <a:solidFill>
+                            <a:srgbClr val="1F3355"/>
+                          </a:solidFill>
+                          <a:latin typeface="Meiryo UI"/>
+                        </a:rPr>
+                        <a:t>分けない</a:t>
+                      </a:r>
+                    </a:p>
+                  </a:txBody>
+                  <a:tcPr>
+                    <a:solidFill>
+                      <a:srgbClr val="F2F6FA"/>
+                    </a:solidFill>
+                  </a:tcPr>
+                </a:tc>
+              </a:tr>
+              <a:tr h="310896">
+                <a:tc>
+                  <a:txBody>
+                    <a:bodyPr/>
+                    <a:lstStyle/>
+                    <a:p>
+                      <a:pPr algn="l"/>
+                      <a:r>
+                        <a:rPr sz="1200" b="0">
+                          <a:solidFill>
+                            <a:srgbClr val="1F3355"/>
+                          </a:solidFill>
+                          <a:latin typeface="Meiryo UI"/>
+                        </a:rPr>
+                        <a:t>使えるポート</a:t>
+                      </a:r>
+                    </a:p>
+                  </a:txBody>
+                  <a:tcPr>
+                    <a:solidFill>
+                      <a:srgbClr val="FFFFFF"/>
+                    </a:solidFill>
+                  </a:tcPr>
+                </a:tc>
+                <a:tc>
+                  <a:txBody>
+                    <a:bodyPr/>
+                    <a:lstStyle/>
+                    <a:p>
+                      <a:pPr algn="l"/>
+                      <a:r>
+                        <a:rPr sz="1200" b="0">
+                          <a:solidFill>
+                            <a:srgbClr val="1F3355"/>
+                          </a:solidFill>
+                          <a:latin typeface="Meiryo UI"/>
+                        </a:rPr>
+                        <a:t>240 個</a:t>
+                      </a:r>
+                    </a:p>
+                  </a:txBody>
+                  <a:tcPr>
+                    <a:solidFill>
+                      <a:srgbClr val="FFFFFF"/>
+                    </a:solidFill>
+                  </a:tcPr>
+                </a:tc>
+                <a:tc>
+                  <a:txBody>
+                    <a:bodyPr/>
+                    <a:lstStyle/>
+                    <a:p>
+                      <a:pPr algn="l"/>
+                      <a:r>
+                        <a:rPr sz="1200" b="0">
+                          <a:solidFill>
+                            <a:srgbClr val="1F3355"/>
+                          </a:solidFill>
+                          <a:latin typeface="Meiryo UI"/>
+                        </a:rPr>
+                        <a:t>64512 個 (1024〜65535)</a:t>
+                      </a:r>
+                    </a:p>
+                  </a:txBody>
+                  <a:tcPr>
+                    <a:solidFill>
+                      <a:srgbClr val="FFFFFF"/>
+                    </a:solidFill>
+                  </a:tcPr>
+                </a:tc>
+              </a:tr>
+              <a:tr h="310896">
+                <a:tc>
+                  <a:txBody>
+                    <a:bodyPr/>
+                    <a:lstStyle/>
+                    <a:p>
+                      <a:pPr algn="l"/>
+                      <a:r>
+                        <a:rPr sz="1200" b="0">
+                          <a:solidFill>
+                            <a:srgbClr val="1F3355"/>
+                          </a:solidFill>
+                          <a:latin typeface="Meiryo UI"/>
+                        </a:rPr>
+                        <a:t>共有 IPv4 アドレス</a:t>
+                      </a:r>
+                    </a:p>
+                  </a:txBody>
+                  <a:tcPr>
+                    <a:solidFill>
+                      <a:srgbClr val="F2F6FA"/>
+                    </a:solidFill>
+                  </a:tcPr>
+                </a:tc>
+                <a:tc>
+                  <a:txBody>
+                    <a:bodyPr/>
+                    <a:lstStyle/>
+                    <a:p>
+                      <a:pPr algn="l"/>
+                      <a:r>
+                        <a:rPr sz="1200" b="0">
+                          <a:solidFill>
+                            <a:srgbClr val="1F3355"/>
+                          </a:solidFill>
+                          <a:latin typeface="Meiryo UI"/>
+                        </a:rPr>
+                        <a:t>198.51.100.20</a:t>
+                      </a:r>
+                    </a:p>
+                  </a:txBody>
+                  <a:tcPr>
+                    <a:solidFill>
+                      <a:srgbClr val="F2F6FA"/>
+                    </a:solidFill>
+                  </a:tcPr>
+                </a:tc>
+                <a:tc>
+                  <a:txBody>
+                    <a:bodyPr/>
+                    <a:lstStyle/>
+                    <a:p>
+                      <a:pPr algn="l"/>
+                      <a:r>
+                        <a:rPr sz="1200" b="0">
+                          <a:solidFill>
+                            <a:srgbClr val="1F3355"/>
+                          </a:solidFill>
+                          <a:latin typeface="Meiryo UI"/>
+                        </a:rPr>
+                        <a:t>198.51.100.20 (同じ)</a:t>
+                      </a:r>
+                    </a:p>
+                  </a:txBody>
+                  <a:tcPr>
+                    <a:solidFill>
+                      <a:srgbClr val="F2F6FA"/>
+                    </a:solidFill>
+                  </a:tcPr>
+                </a:tc>
+              </a:tr>
+              <a:tr h="310896">
+                <a:tc>
+                  <a:txBody>
+                    <a:bodyPr/>
+                    <a:lstStyle/>
+                    <a:p>
+                      <a:pPr algn="l"/>
+                      <a:r>
+                        <a:rPr sz="1200" b="0">
+                          <a:solidFill>
+                            <a:srgbClr val="1F3355"/>
+                          </a:solidFill>
+                          <a:latin typeface="Meiryo UI"/>
+                        </a:rPr>
+                        <a:t>PPPoE と比べると</a:t>
+                      </a:r>
+                    </a:p>
+                  </a:txBody>
+                  <a:tcPr>
+                    <a:solidFill>
+                      <a:srgbClr val="FFFFFF"/>
+                    </a:solidFill>
+                  </a:tcPr>
+                </a:tc>
+                <a:tc>
+                  <a:txBody>
+                    <a:bodyPr/>
+                    <a:lstStyle/>
+                    <a:p>
+                      <a:pPr algn="l"/>
+                      <a:r>
+                        <a:rPr sz="1200" b="0">
+                          <a:solidFill>
+                            <a:srgbClr val="1F3355"/>
+                          </a:solidFill>
+                          <a:latin typeface="Meiryo UI"/>
+                        </a:rPr>
+                        <a:t>約 1/270</a:t>
+                      </a:r>
+                    </a:p>
+                  </a:txBody>
+                  <a:tcPr>
+                    <a:solidFill>
+                      <a:srgbClr val="FFFFFF"/>
+                    </a:solidFill>
+                  </a:tcPr>
+                </a:tc>
+                <a:tc>
+                  <a:txBody>
+                    <a:bodyPr/>
+                    <a:lstStyle/>
+                    <a:p>
+                      <a:pPr algn="l"/>
+                      <a:r>
+                        <a:rPr sz="1200" b="0">
+                          <a:solidFill>
+                            <a:srgbClr val="1F3355"/>
+                          </a:solidFill>
+                          <a:latin typeface="Meiryo UI"/>
+                        </a:rPr>
+                        <a:t>ほぼ同等</a:t>
+                      </a:r>
+                    </a:p>
+                  </a:txBody>
+                  <a:tcPr>
+                    <a:solidFill>
+                      <a:srgbClr val="FFFFFF"/>
+                    </a:solidFill>
+                  </a:tcPr>
+                </a:tc>
+              </a:tr>
+            </a:tbl>
+          </a:graphicData>
+        </a:graphic>
+      </p:graphicFrame>
+      <p:sp>
+        <p:nvSpPr>
+          <p:cNvPr id="4" name="TextBox 3"/>
+          <p:cNvSpPr txBox="1"/>
+          <p:nvPr/>
+        </p:nvSpPr>
+        <p:spPr>
+          <a:xfrm>
+            <a:off x="502920" y="3264408"/>
+            <a:ext cx="11155680" cy="548640"/>
+          </a:xfrm>
+          <a:prstGeom prst="rect">
+            <a:avLst/>
+          </a:prstGeom>
+          <a:noFill/>
+        </p:spPr>
+        <p:txBody>
+          <a:bodyPr wrap="square">
+            <a:spAutoFit/>
+          </a:bodyPr>
+          <a:lstStyle/>
+          <a:p>
+            <a:pPr algn="l"/>
+            <a:r>
+              <a:rPr sz="1200" b="0">
+                <a:solidFill>
+                  <a:srgbClr val="007ACC"/>
+                </a:solidFill>
+                <a:latin typeface="Meiryo UI"/>
+              </a:rPr>
+              <a:t>「固定 IP にすると何が変わるのか」の答え。アドレスが固定になるだけでなく、ポートを独り占めできます</a:t>
+            </a:r>
+          </a:p>
+        </p:txBody>
+      </p:sp>
+    </p:spTree>
+  </p:cSld>
+  <p:clrMapOvr>
+    <a:masterClrMapping/>
+  </p:clrMapOvr>
+</p:sld>
+</file>
+
+<file path=ppt/slides/slide43.xml><?xml version="1.0" encoding="utf-8"?>
+<p:sld xmlns:a="http://schemas.openxmlformats.org/drawingml/2006/main" xmlns:p="http://schemas.openxmlformats.org/presentationml/2006/main" xmlns:r="http://schemas.openxmlformats.org/officeDocument/2006/relationships">
+  <p:cSld>
+    <p:spTree>
+      <p:nvGrpSpPr>
+        <p:cNvPr id="1" name=""/>
+        <p:cNvGrpSpPr/>
+        <p:nvPr/>
+      </p:nvGrpSpPr>
+      <p:grpSpPr/>
+      <p:sp>
+        <p:nvSpPr>
+          <p:cNvPr id="2" name="TextBox 1"/>
+          <p:cNvSpPr txBox="1"/>
+          <p:nvPr/>
+        </p:nvSpPr>
+        <p:spPr>
+          <a:xfrm>
             <a:off x="502920" y="320040"/>
             <a:ext cx="11155680" cy="822960"/>
           </a:xfrm>
@@ -18320,7 +19005,7 @@
 </p:sld>
 </file>
 
-<file path=ppt/slides/slide43.xml><?xml version="1.0" encoding="utf-8"?>
+<file path=ppt/slides/slide44.xml><?xml version="1.0" encoding="utf-8"?>
 <p:sld xmlns:a="http://schemas.openxmlformats.org/drawingml/2006/main" xmlns:p="http://schemas.openxmlformats.org/presentationml/2006/main" xmlns:r="http://schemas.openxmlformats.org/officeDocument/2006/relationships">
   <p:cSld>
     <p:spTree>
@@ -18647,7 +19332,7 @@
 </p:sld>
 </file>
 
-<file path=ppt/slides/slide44.xml><?xml version="1.0" encoding="utf-8"?>
+<file path=ppt/slides/slide45.xml><?xml version="1.0" encoding="utf-8"?>
 <p:sld xmlns:a="http://schemas.openxmlformats.org/drawingml/2006/main" xmlns:p="http://schemas.openxmlformats.org/presentationml/2006/main" xmlns:r="http://schemas.openxmlformats.org/officeDocument/2006/relationships">
   <p:cSld>
     <p:spTree>
@@ -18958,7 +19643,7 @@
 </p:sld>
 </file>
 
-<file path=ppt/slides/slide45.xml><?xml version="1.0" encoding="utf-8"?>
+<file path=ppt/slides/slide46.xml><?xml version="1.0" encoding="utf-8"?>
 <p:sld xmlns:a="http://schemas.openxmlformats.org/drawingml/2006/main" xmlns:p="http://schemas.openxmlformats.org/presentationml/2006/main" xmlns:r="http://schemas.openxmlformats.org/officeDocument/2006/relationships">
   <p:cSld>
     <p:spTree>

--- a/docs/ipoe-lab/slides/setsumeikai.pptx
+++ b/docs/ipoe-lab/slides/setsumeikai.pptx
@@ -18144,7 +18144,7 @@
         </p:nvGraphicFramePr>
         <p:xfrm>
           <a:off x="502920" y="1143000"/>
-          <a:ext cx="10789920" cy="1865376"/>
+          <a:ext cx="10789920" cy="2176272"/>
         </p:xfrm>
         <a:graphic>
           <a:graphicData uri="http://schemas.openxmlformats.org/drawingml/2006/table">
@@ -18242,7 +18242,7 @@
                           </a:solidFill>
                           <a:latin typeface="Meiryo UI"/>
                         </a:rPr>
-                        <a:t>事業者が配る値 (eaBitLength)</a:t>
+                        <a:t>事業者が配るもの</a:t>
                       </a:r>
                     </a:p>
                   </a:txBody>
@@ -18265,7 +18265,7 @@
                           </a:solidFill>
                           <a:latin typeface="Meiryo UI"/>
                         </a:rPr>
-                        <a:t>16</a:t>
+                        <a:t>IPv4 の 帯 (/24)</a:t>
                       </a:r>
                     </a:p>
                   </a:txBody>
@@ -18288,7 +18288,7 @@
                           </a:solidFill>
                           <a:latin typeface="Meiryo UI"/>
                         </a:rPr>
-                        <a:t>8</a:t>
+                        <a:t>その人の IPv4 (/32)</a:t>
                       </a:r>
                     </a:p>
                   </a:txBody>
@@ -18313,7 +18313,7 @@
                           </a:solidFill>
                           <a:latin typeface="Meiryo UI"/>
                         </a:rPr>
-                        <a:t>何人で分けるか</a:t>
+                        <a:t>自分の番号の決め方</a:t>
                       </a:r>
                     </a:p>
                   </a:txBody>
@@ -18336,7 +18336,7 @@
                           </a:solidFill>
                           <a:latin typeface="Meiryo UI"/>
                         </a:rPr>
-                        <a:t>256 人</a:t>
+                        <a:t>CPE が計算して選ぶ</a:t>
                       </a:r>
                     </a:p>
                   </a:txBody>
@@ -18359,7 +18359,7 @@
                           </a:solidFill>
                           <a:latin typeface="Meiryo UI"/>
                         </a:rPr>
-                        <a:t>分けない</a:t>
+                        <a:t>名指しなので計算不要</a:t>
                       </a:r>
                     </a:p>
                   </a:txBody>
@@ -18384,7 +18384,7 @@
                           </a:solidFill>
                           <a:latin typeface="Meiryo UI"/>
                         </a:rPr>
-                        <a:t>使えるポート</a:t>
+                        <a:t>何人で分けるか</a:t>
                       </a:r>
                     </a:p>
                   </a:txBody>
@@ -18407,7 +18407,7 @@
                           </a:solidFill>
                           <a:latin typeface="Meiryo UI"/>
                         </a:rPr>
-                        <a:t>240 個</a:t>
+                        <a:t>256 人</a:t>
                       </a:r>
                     </a:p>
                   </a:txBody>
@@ -18430,7 +18430,7 @@
                           </a:solidFill>
                           <a:latin typeface="Meiryo UI"/>
                         </a:rPr>
-                        <a:t>64512 個 (1024〜65535)</a:t>
+                        <a:t>分けない</a:t>
                       </a:r>
                     </a:p>
                   </a:txBody>
@@ -18455,7 +18455,7 @@
                           </a:solidFill>
                           <a:latin typeface="Meiryo UI"/>
                         </a:rPr>
-                        <a:t>共有 IPv4 アドレス</a:t>
+                        <a:t>使えるポート</a:t>
                       </a:r>
                     </a:p>
                   </a:txBody>
@@ -18478,7 +18478,7 @@
                           </a:solidFill>
                           <a:latin typeface="Meiryo UI"/>
                         </a:rPr>
-                        <a:t>198.51.100.20</a:t>
+                        <a:t>240 個</a:t>
                       </a:r>
                     </a:p>
                   </a:txBody>
@@ -18501,7 +18501,7 @@
                           </a:solidFill>
                           <a:latin typeface="Meiryo UI"/>
                         </a:rPr>
-                        <a:t>198.51.100.20 (同じ)</a:t>
+                        <a:t>64512 個 (1024〜65535)</a:t>
                       </a:r>
                     </a:p>
                   </a:txBody>
@@ -18526,7 +18526,7 @@
                           </a:solidFill>
                           <a:latin typeface="Meiryo UI"/>
                         </a:rPr>
-                        <a:t>PPPoE と比べると</a:t>
+                        <a:t>共有 IPv4 アドレス</a:t>
                       </a:r>
                     </a:p>
                   </a:txBody>
@@ -18549,7 +18549,7 @@
                           </a:solidFill>
                           <a:latin typeface="Meiryo UI"/>
                         </a:rPr>
-                        <a:t>約 1/270</a:t>
+                        <a:t>198.51.100.20</a:t>
                       </a:r>
                     </a:p>
                   </a:txBody>
@@ -18572,7 +18572,7 @@
                           </a:solidFill>
                           <a:latin typeface="Meiryo UI"/>
                         </a:rPr>
-                        <a:t>ほぼ同等</a:t>
+                        <a:t>198.51.100.20 (同じ)</a:t>
                       </a:r>
                     </a:p>
                   </a:txBody>
@@ -18583,6 +18583,77 @@
                   </a:tcPr>
                 </a:tc>
               </a:tr>
+              <a:tr h="310896">
+                <a:tc>
+                  <a:txBody>
+                    <a:bodyPr/>
+                    <a:lstStyle/>
+                    <a:p>
+                      <a:pPr algn="l"/>
+                      <a:r>
+                        <a:rPr sz="1200" b="0">
+                          <a:solidFill>
+                            <a:srgbClr val="1F3355"/>
+                          </a:solidFill>
+                          <a:latin typeface="Meiryo UI"/>
+                        </a:rPr>
+                        <a:t>PPPoE と比べると</a:t>
+                      </a:r>
+                    </a:p>
+                  </a:txBody>
+                  <a:tcPr>
+                    <a:solidFill>
+                      <a:srgbClr val="F2F6FA"/>
+                    </a:solidFill>
+                  </a:tcPr>
+                </a:tc>
+                <a:tc>
+                  <a:txBody>
+                    <a:bodyPr/>
+                    <a:lstStyle/>
+                    <a:p>
+                      <a:pPr algn="l"/>
+                      <a:r>
+                        <a:rPr sz="1200" b="0">
+                          <a:solidFill>
+                            <a:srgbClr val="1F3355"/>
+                          </a:solidFill>
+                          <a:latin typeface="Meiryo UI"/>
+                        </a:rPr>
+                        <a:t>約 1/270</a:t>
+                      </a:r>
+                    </a:p>
+                  </a:txBody>
+                  <a:tcPr>
+                    <a:solidFill>
+                      <a:srgbClr val="F2F6FA"/>
+                    </a:solidFill>
+                  </a:tcPr>
+                </a:tc>
+                <a:tc>
+                  <a:txBody>
+                    <a:bodyPr/>
+                    <a:lstStyle/>
+                    <a:p>
+                      <a:pPr algn="l"/>
+                      <a:r>
+                        <a:rPr sz="1200" b="0">
+                          <a:solidFill>
+                            <a:srgbClr val="1F3355"/>
+                          </a:solidFill>
+                          <a:latin typeface="Meiryo UI"/>
+                        </a:rPr>
+                        <a:t>ほぼ同等</a:t>
+                      </a:r>
+                    </a:p>
+                  </a:txBody>
+                  <a:tcPr>
+                    <a:solidFill>
+                      <a:srgbClr val="F2F6FA"/>
+                    </a:solidFill>
+                  </a:tcPr>
+                </a:tc>
+              </a:tr>
             </a:tbl>
           </a:graphicData>
         </a:graphic>
@@ -18595,7 +18666,7 @@
         </p:nvSpPr>
         <p:spPr>
           <a:xfrm>
-            <a:off x="502920" y="3264408"/>
+            <a:off x="502920" y="3575304"/>
             <a:ext cx="11155680" cy="548640"/>
           </a:xfrm>
           <a:prstGeom prst="rect">

--- a/docs/ipoe-lab/slides/setsumeikai.pptx
+++ b/docs/ipoe-lab/slides/setsumeikai.pptx
@@ -51,6 +51,8 @@
     <p:sldId id="299" r:id="rId51"/>
     <p:sldId id="300" r:id="rId52"/>
     <p:sldId id="301" r:id="rId53"/>
+    <p:sldId id="302" r:id="rId54"/>
+    <p:sldId id="303" r:id="rId55"/>
   </p:sldIdLst>
   <p:sldSz cx="12191695" cy="6858000" type="screen4x3"/>
   <p:notesSz cx="6858000" cy="9144000"/>
@@ -642,27 +644,22 @@
           </a:p>
           <a:p>
             <a:r>
-              <a:t>・**事業者が返す数字ひとつ**で共有/固定が決まる、というのがここの中身。</a:t>
-            </a:r>
-          </a:p>
-          <a:p>
-            <a:r>
-              <a:t>・**IPv4 アドレスが変わらない**のが意外に効く。「固定 IP = アドレスが変わらないこと」</a:t>
-            </a:r>
-          </a:p>
-          <a:p>
-            <a:r>
-              <a:t>  だと思っている人が多いが、**ポートの持ち分**の話でもある。</a:t>
-            </a:r>
-          </a:p>
-          <a:p>
-            <a:r>
-              <a:t>・同時接続数が足りない案件では、**固定 IP オプションが技術的な解**になる。</a:t>
-            </a:r>
-          </a:p>
-          <a:p>
-            <a:r>
-              <a:t>  見積の根拠として使えるので、営業に同席してもらう回では特に丁寧に。</a:t>
+              <a:t>・**表を出す前に 30 秒だけ問いかけると定着が変わる。**</a:t>
+            </a:r>
+          </a:p>
+          <a:p>
+            <a:r>
+              <a:t>  「transix のお客様から『事務所のカメラを外から見たい』と言われました。できますか?」</a:t>
+            </a:r>
+          </a:p>
+          <a:p>
+            <a:r>
+              <a:t>  「隣と 10 秒相談してください」→ そのあと答え合わせとして表を出す。</a:t>
+            </a:r>
+          </a:p>
+          <a:p>
+            <a:r>
+              <a:t>・ここが今日の到達目標。**このページだけは絶対に巻かないこと。**</a:t>
             </a:r>
           </a:p>
         </p:txBody>
@@ -737,6 +734,181 @@
           </a:p>
           <a:p>
             <a:r>
+              <a:t>・全部を説明しないこと。**「箱がたくさんあるが、要は網と VNE を自分で作った」**で十分。</a:t>
+            </a:r>
+          </a:p>
+          <a:p>
+            <a:r>
+              <a:t>・図の一番下 (方式ごとの経路と出口アドレス) だけは指差して読むこと。第3部の伏線になる。</a:t>
+            </a:r>
+          </a:p>
+        </p:txBody>
+      </p:sp>
+      <p:sp>
+        <p:nvSpPr>
+          <p:cNvPr id="4" name="Slide Number Placeholder 3"/>
+          <p:cNvSpPr>
+            <a:spLocks noGrp="1"/>
+          </p:cNvSpPr>
+          <p:nvPr>
+            <p:ph type="sldNum" idx="5" sz="quarter"/>
+          </p:nvPr>
+        </p:nvSpPr>
+        <p:spPr/>
+      </p:sp>
+    </p:spTree>
+  </p:cSld>
+  <p:clrMapOvr>
+    <a:masterClrMapping/>
+  </p:clrMapOvr>
+</p:notes>
+</file>
+
+<file path=ppt/notesSlides/notesSlide12.xml><?xml version="1.0" encoding="utf-8"?>
+<p:notes xmlns:a="http://schemas.openxmlformats.org/drawingml/2006/main" xmlns:p="http://schemas.openxmlformats.org/presentationml/2006/main" xmlns:r="http://schemas.openxmlformats.org/officeDocument/2006/relationships">
+  <p:cSld>
+    <p:spTree>
+      <p:nvGrpSpPr>
+        <p:cNvPr id="1" name=""/>
+        <p:cNvGrpSpPr/>
+        <p:nvPr/>
+      </p:nvGrpSpPr>
+      <p:grpSpPr>
+        <a:xfrm>
+          <a:off x="0" y="0"/>
+          <a:ext cx="0" cy="0"/>
+          <a:chOff x="0" y="0"/>
+          <a:chExt cx="0" cy="0"/>
+        </a:xfrm>
+      </p:grpSpPr>
+      <p:sp>
+        <p:nvSpPr>
+          <p:cNvPr id="2" name="Slide Image Placeholder 1"/>
+          <p:cNvSpPr>
+            <a:spLocks noGrp="1"/>
+          </p:cNvSpPr>
+          <p:nvPr>
+            <p:ph type="sldImg" idx="2"/>
+          </p:nvPr>
+        </p:nvSpPr>
+        <p:spPr/>
+      </p:sp>
+      <p:sp>
+        <p:nvSpPr>
+          <p:cNvPr id="3" name="Notes Placeholder 2"/>
+          <p:cNvSpPr>
+            <a:spLocks noGrp="1"/>
+          </p:cNvSpPr>
+          <p:nvPr>
+            <p:ph type="body" idx="3" sz="quarter"/>
+          </p:nvPr>
+        </p:nvSpPr>
+        <p:spPr/>
+        <p:txBody>
+          <a:bodyPr/>
+          <a:lstStyle/>
+          <a:p>
+            <a:r>
+              <a:t>【話す人へ】</a:t>
+            </a:r>
+          </a:p>
+          <a:p>
+            <a:r>
+              <a:t>・**事業者が返す数字ひとつ**で共有/固定が決まる、というのがここの中身。</a:t>
+            </a:r>
+          </a:p>
+          <a:p>
+            <a:r>
+              <a:t>・**IPv4 アドレスが変わらない**のが意外に効く。「固定 IP = アドレスが変わらないこと」</a:t>
+            </a:r>
+          </a:p>
+          <a:p>
+            <a:r>
+              <a:t>  だと思っている人が多いが、**ポートの持ち分**の話でもある。</a:t>
+            </a:r>
+          </a:p>
+          <a:p>
+            <a:r>
+              <a:t>・同時接続数が足りない案件では、**固定 IP オプションが技術的な解**になる。</a:t>
+            </a:r>
+          </a:p>
+          <a:p>
+            <a:r>
+              <a:t>  見積の根拠として使えるので、営業に同席してもらう回では特に丁寧に。</a:t>
+            </a:r>
+          </a:p>
+        </p:txBody>
+      </p:sp>
+      <p:sp>
+        <p:nvSpPr>
+          <p:cNvPr id="4" name="Slide Number Placeholder 3"/>
+          <p:cNvSpPr>
+            <a:spLocks noGrp="1"/>
+          </p:cNvSpPr>
+          <p:nvPr>
+            <p:ph type="sldNum" idx="5" sz="quarter"/>
+          </p:nvPr>
+        </p:nvSpPr>
+        <p:spPr/>
+      </p:sp>
+    </p:spTree>
+  </p:cSld>
+  <p:clrMapOvr>
+    <a:masterClrMapping/>
+  </p:clrMapOvr>
+</p:notes>
+</file>
+
+<file path=ppt/notesSlides/notesSlide13.xml><?xml version="1.0" encoding="utf-8"?>
+<p:notes xmlns:a="http://schemas.openxmlformats.org/drawingml/2006/main" xmlns:p="http://schemas.openxmlformats.org/presentationml/2006/main" xmlns:r="http://schemas.openxmlformats.org/officeDocument/2006/relationships">
+  <p:cSld>
+    <p:spTree>
+      <p:nvGrpSpPr>
+        <p:cNvPr id="1" name=""/>
+        <p:cNvGrpSpPr/>
+        <p:nvPr/>
+      </p:nvGrpSpPr>
+      <p:grpSpPr>
+        <a:xfrm>
+          <a:off x="0" y="0"/>
+          <a:ext cx="0" cy="0"/>
+          <a:chOff x="0" y="0"/>
+          <a:chExt cx="0" cy="0"/>
+        </a:xfrm>
+      </p:grpSpPr>
+      <p:sp>
+        <p:nvSpPr>
+          <p:cNvPr id="2" name="Slide Image Placeholder 1"/>
+          <p:cNvSpPr>
+            <a:spLocks noGrp="1"/>
+          </p:cNvSpPr>
+          <p:nvPr>
+            <p:ph type="sldImg" idx="2"/>
+          </p:nvPr>
+        </p:nvSpPr>
+        <p:spPr/>
+      </p:sp>
+      <p:sp>
+        <p:nvSpPr>
+          <p:cNvPr id="3" name="Notes Placeholder 2"/>
+          <p:cNvSpPr>
+            <a:spLocks noGrp="1"/>
+          </p:cNvSpPr>
+          <p:nvPr>
+            <p:ph type="body" idx="3" sz="quarter"/>
+          </p:nvPr>
+        </p:nvSpPr>
+        <p:spPr/>
+        <p:txBody>
+          <a:bodyPr/>
+          <a:lstStyle/>
+          <a:p>
+            <a:r>
+              <a:t>【話す人へ】</a:t>
+            </a:r>
+          </a:p>
+          <a:p>
+            <a:r>
               <a:t>・**ここは IPv6 の知識の話ではない。**検証の姿勢の話なので、</a:t>
             </a:r>
           </a:p>
@@ -1097,17 +1269,22 @@
           </a:p>
           <a:p>
             <a:r>
-              <a:t>・**この表は覚えさせない。**「引く表です」と言い切って、印刷して持ち歩くよう勧める。</a:t>
-            </a:r>
-          </a:p>
-          <a:p>
-            <a:r>
-              <a:t>・1 問だけ指名なしで投げると定着する:「では OCN バーチャルコネクト、ポート開放は?」</a:t>
-            </a:r>
-          </a:p>
-          <a:p>
-            <a:r>
-              <a:t>・次ページで自社の事故 (2 回失敗) を出すので、ここでは深追いしない。</a:t>
+              <a:t>・**30 秒で構わないので必ず言うこと。**模擬勉強会で若手がこの 2 つを一体化し、</a:t>
+            </a:r>
+          </a:p>
+          <a:p>
+            <a:r>
+              <a:t>  後輩に「PD って DHCPv6 のこと?」と聞かれ「まあそう」と答える連鎖が観測された。</a:t>
+            </a:r>
+          </a:p>
+          <a:p>
+            <a:r>
+              <a:t>・**黒板があれば 2 段の絵を描く。**上段=網→ルータ、下段=ルータ→端末。</a:t>
+            </a:r>
+          </a:p>
+          <a:p>
+            <a:r>
+              <a:t>  絵にすると一度で入る。言葉だけだと混ざる。</a:t>
             </a:r>
           </a:p>
         </p:txBody>
@@ -1182,17 +1359,17 @@
           </a:p>
           <a:p>
             <a:r>
-              <a:t>・**最初の 3 行を飛ばさないこと。**「なぜポートを分ければアドレスを共有できるのか」が</a:t>
-            </a:r>
-          </a:p>
-          <a:p>
-            <a:r>
-              <a:t>  入っていないと、この先の 240 個の話が全部 呪文になる。</a:t>
-            </a:r>
-          </a:p>
-          <a:p>
-            <a:r>
-              <a:t>・240 は **割当の構造値**。「実測で 240 使えた」とは言わないこと (次ページの注記)。</a:t>
+              <a:t>・**この表は覚えさせない。**「引く表です」と言い切って、印刷して持ち歩くよう勧める。</a:t>
+            </a:r>
+          </a:p>
+          <a:p>
+            <a:r>
+              <a:t>・1 問だけ指名なしで投げると定着する:「では OCN バーチャルコネクト、ポート開放は?」</a:t>
+            </a:r>
+          </a:p>
+          <a:p>
+            <a:r>
+              <a:t>・次ページで自社の事故 (2 回失敗) を出すので、ここでは深追いしない。</a:t>
             </a:r>
           </a:p>
         </p:txBody>
@@ -1267,27 +1444,17 @@
           </a:p>
           <a:p>
             <a:r>
-              <a:t>・**ここが「自動設定」の中身。**お客様が「ルータを繋いだら勝手に繋がった」と</a:t>
-            </a:r>
-          </a:p>
-          <a:p>
-            <a:r>
-              <a:t>  言うときに起きているのがこれ。</a:t>
-            </a:r>
-          </a:p>
-          <a:p>
-            <a:r>
-              <a:t>・**手動設定の機種が噛み合わない理由**もここ。対応表の意味が腑に落ちる。</a:t>
-            </a:r>
-          </a:p>
-          <a:p>
-            <a:r>
-              <a:t>・第4部 ④ の伏線。**この 1 枚が資料から抜けていたこと自体**が、</a:t>
-            </a:r>
-          </a:p>
-          <a:p>
-            <a:r>
-              <a:t>  検証環境にサーバが無かったことの裏返しだった、という話につなげる。</a:t>
+              <a:t>・**最初の 3 行を飛ばさないこと。**「なぜポートを分ければアドレスを共有できるのか」が</a:t>
+            </a:r>
+          </a:p>
+          <a:p>
+            <a:r>
+              <a:t>  入っていないと、この先の 240 個の話が全部 呪文になる。</a:t>
+            </a:r>
+          </a:p>
+          <a:p>
+            <a:r>
+              <a:t>・240 が少ないことの実感は次ページで作る。ここでは数字だけ置いて先へ。</a:t>
             </a:r>
           </a:p>
         </p:txBody>
@@ -1362,22 +1529,17 @@
           </a:p>
           <a:p>
             <a:r>
-              <a:t>・**表を出す前に 30 秒だけ問いかけると定着が変わる。**</a:t>
-            </a:r>
-          </a:p>
-          <a:p>
-            <a:r>
-              <a:t>  「transix のお客様から『事務所のカメラを外から見たい』と言われました。できますか?」</a:t>
-            </a:r>
-          </a:p>
-          <a:p>
-            <a:r>
-              <a:t>  「隣と 10 秒相談してください」→ そのあと答え合わせとして表を出す。</a:t>
-            </a:r>
-          </a:p>
-          <a:p>
-            <a:r>
-              <a:t>・ここが今日の到達目標。**このページだけは絶対に巻かないこと。**</a:t>
+              <a:t>・**この 1 枚が、第3部でいちばん効く。**「240 は少ない」を言葉で言うより、</a:t>
+            </a:r>
+          </a:p>
+          <a:p>
+            <a:r>
+              <a:t>  「PC 1 台放置で枯れた」の方が桁違いに入る。ゆっくり読ませること。</a:t>
+            </a:r>
+          </a:p>
+          <a:p>
+            <a:r>
+              <a:t>・**わざと壊した再現ではない**ことを強調する。仕込みなしで起きた記録。</a:t>
             </a:r>
           </a:p>
         </p:txBody>
@@ -1452,12 +1614,27 @@
           </a:p>
           <a:p>
             <a:r>
-              <a:t>・全部を説明しないこと。**「箱がたくさんあるが、要は網と VNE を自分で作った」**で十分。</a:t>
-            </a:r>
-          </a:p>
-          <a:p>
-            <a:r>
-              <a:t>・図の一番下 (方式ごとの経路と出口アドレス) だけは指差して読むこと。第3部の伏線になる。</a:t>
+              <a:t>・**ここが「自動設定」の中身。**お客様が「ルータを繋いだら勝手に繋がった」と</a:t>
+            </a:r>
+          </a:p>
+          <a:p>
+            <a:r>
+              <a:t>  言うときに起きているのがこれ。</a:t>
+            </a:r>
+          </a:p>
+          <a:p>
+            <a:r>
+              <a:t>・**手動設定の機種が噛み合わない理由**もここ。対応表の意味が腑に落ちる。</a:t>
+            </a:r>
+          </a:p>
+          <a:p>
+            <a:r>
+              <a:t>・第4部 ④ の伏線。**この 1 枚が資料から抜けていたこと自体**が、</a:t>
+            </a:r>
+          </a:p>
+          <a:p>
+            <a:r>
+              <a:t>  検証環境にサーバが無かったことの裏返しだった、という話につなげる。</a:t>
             </a:r>
           </a:p>
         </p:txBody>
@@ -5651,7 +5828,7 @@
                 </a:solidFill>
                 <a:latin typeface="Meiryo UI"/>
               </a:rPr>
-              <a:t>fe80:: が必ず付いている理由 — IPv4 と一番違うところ</a:t>
+              <a:t>⚠ 似ている言葉を 2 つに分けます — ここだけ先に整理させてください</a:t>
             </a:r>
           </a:p>
         </p:txBody>
@@ -5723,193 +5900,129 @@
           <a:p>
             <a:pPr algn="l">
               <a:spcAft>
-                <a:spcPts val="800"/>
-              </a:spcAft>
-            </a:pPr>
-            <a:r>
-              <a:rPr sz="1800" b="1">
+                <a:spcPts val="1000"/>
+              </a:spcAft>
+            </a:pPr>
+            <a:r>
+              <a:rPr sz="2000" b="1">
                 <a:solidFill>
                   <a:srgbClr val="1F3355"/>
                 </a:solidFill>
                 <a:latin typeface="Meiryo UI"/>
               </a:rPr>
-              <a:t>アドレスをもらう前に通信する必要があるからです</a:t>
+              <a:t>「RA 方式 / PD 方式」と「RA / DHCPv6」は 別の階の話です</a:t>
+            </a:r>
+          </a:p>
+          <a:p>
+            <a:pPr algn="l">
+              <a:spcAft>
+                <a:spcPts val="1000"/>
+              </a:spcAft>
+            </a:pPr>
+            <a:r>
+              <a:rPr sz="2000" b="1">
+                <a:solidFill>
+                  <a:srgbClr val="1F3355"/>
+                </a:solidFill>
+                <a:latin typeface="Meiryo UI"/>
+              </a:rPr>
+              <a:t>① RA 方式 / PD 方式  … 網 → お客様のルータ</a:t>
             </a:r>
           </a:p>
           <a:p>
             <a:pPr lvl="1" algn="l">
               <a:spcAft>
-                <a:spcPts val="400"/>
-              </a:spcAft>
-            </a:pPr>
-            <a:r>
-              <a:rPr sz="1500" b="0">
+                <a:spcPts val="600"/>
+              </a:spcAft>
+            </a:pPr>
+            <a:r>
+              <a:rPr sz="1700" b="0">
                 <a:solidFill>
                   <a:srgbClr val="555555"/>
                 </a:solidFill>
                 <a:latin typeface="Meiryo UI"/>
               </a:rPr>
-              <a:t>アドレスをくれるのはルータ。でもルータと話すにはアドレスが要る → 鶏と卵</a:t>
+              <a:t>プレフィックス (住所の前半) が どう届くか の話</a:t>
             </a:r>
           </a:p>
           <a:p>
             <a:pPr lvl="1" algn="l">
               <a:spcAft>
-                <a:spcPts val="400"/>
-              </a:spcAft>
-            </a:pPr>
-            <a:r>
-              <a:rPr sz="1500" b="0">
+                <a:spcPts val="600"/>
+              </a:spcAft>
+            </a:pPr>
+            <a:r>
+              <a:rPr sz="1700" b="0">
                 <a:solidFill>
                   <a:srgbClr val="555555"/>
                 </a:solidFill>
                 <a:latin typeface="Meiryo UI"/>
               </a:rPr>
-              <a:t>だから NIC が上がった瞬間に自分だけで作れるアドレスを必ず持つ。それが fe80::</a:t>
+              <a:t>ひかり電話なし = RA 方式 / あり = PD 方式</a:t>
             </a:r>
           </a:p>
           <a:p>
             <a:pPr algn="l">
               <a:spcAft>
-                <a:spcPts val="800"/>
-              </a:spcAft>
-            </a:pPr>
-            <a:r>
-              <a:rPr sz="1800" b="1">
+                <a:spcPts val="1000"/>
+              </a:spcAft>
+            </a:pPr>
+            <a:r>
+              <a:rPr sz="2000" b="1">
                 <a:solidFill>
                   <a:srgbClr val="1F3355"/>
                 </a:solidFill>
                 <a:latin typeface="Meiryo UI"/>
               </a:rPr>
-              <a:t>その結果こうなります</a:t>
+              <a:t>② RA / DHCPv6      … お客様のルータ → 配下の端末</a:t>
             </a:r>
           </a:p>
           <a:p>
             <a:pPr lvl="1" algn="l">
               <a:spcAft>
-                <a:spcPts val="400"/>
-              </a:spcAft>
-            </a:pPr>
-            <a:r>
-              <a:rPr sz="1500" b="0">
+                <a:spcPts val="600"/>
+              </a:spcAft>
+            </a:pPr>
+            <a:r>
+              <a:rPr sz="1700" b="0">
                 <a:solidFill>
                   <a:srgbClr val="555555"/>
                 </a:solidFill>
                 <a:latin typeface="Meiryo UI"/>
               </a:rPr>
-              <a:t>RA も DHCPv6 も送信元は fe80::。既定ゲートウェイも fe80:: で指します</a:t>
+              <a:t>端末のアドレスが どう付くか の話 (第1部でやったもの)</a:t>
+            </a:r>
+          </a:p>
+          <a:p>
+            <a:pPr algn="l">
+              <a:spcAft>
+                <a:spcPts val="1000"/>
+              </a:spcAft>
+            </a:pPr>
+            <a:r>
+              <a:rPr sz="2000" b="1">
+                <a:solidFill>
+                  <a:srgbClr val="C0392B"/>
+                </a:solidFill>
+                <a:latin typeface="Meiryo UI"/>
+              </a:rPr>
+              <a:t>だから「RA 方式 = DHCPv6 を使わない」ではありません</a:t>
             </a:r>
           </a:p>
           <a:p>
             <a:pPr lvl="1" algn="l">
               <a:spcAft>
-                <a:spcPts val="400"/>
-              </a:spcAft>
-            </a:pPr>
-            <a:r>
-              <a:rPr sz="1500" b="0">
+                <a:spcPts val="600"/>
+              </a:spcAft>
+            </a:pPr>
+            <a:r>
+              <a:rPr sz="1700" b="0">
                 <a:solidFill>
                   <a:srgbClr val="555555"/>
                 </a:solidFill>
                 <a:latin typeface="Meiryo UI"/>
               </a:rPr>
-              <a:t>IPv4 のように 192.168.1.1 とは書きません</a:t>
-            </a:r>
-          </a:p>
-          <a:p>
-            <a:pPr algn="l">
-              <a:spcAft>
-                <a:spcPts val="800"/>
-              </a:spcAft>
-            </a:pPr>
-            <a:r>
-              <a:rPr sz="1800" b="1">
-                <a:solidFill>
-                  <a:srgbClr val="C0392B"/>
-                </a:solidFill>
-                <a:latin typeface="Meiryo UI"/>
-              </a:rPr>
-              <a:t>だから「グローバル IPv6 が無い = 壊れている」ではありません</a:t>
-            </a:r>
-          </a:p>
-          <a:p>
-            <a:pPr algn="l">
-              <a:spcAft>
-                <a:spcPts val="800"/>
-              </a:spcAft>
-            </a:pPr>
-            <a:r>
-              <a:rPr sz="1800" b="1">
-                <a:solidFill>
-                  <a:srgbClr val="C0392B"/>
-                </a:solidFill>
-                <a:latin typeface="Meiryo UI"/>
-              </a:rPr>
-              <a:t>使うときの注意 — ここが最初の関門です</a:t>
-            </a:r>
-          </a:p>
-          <a:p>
-            <a:pPr lvl="1" algn="l">
-              <a:spcAft>
-                <a:spcPts val="400"/>
-              </a:spcAft>
-            </a:pPr>
-            <a:r>
-              <a:rPr sz="1500" b="0">
-                <a:solidFill>
-                  <a:srgbClr val="555555"/>
-                </a:solidFill>
-                <a:latin typeface="Meiryo UI"/>
-              </a:rPr>
-              <a:t>fe80:: は「同じリンクの中だけ」のアドレスなので、同じ番号が別の線にもあります</a:t>
-            </a:r>
-          </a:p>
-          <a:p>
-            <a:pPr lvl="1" algn="l">
-              <a:spcAft>
-                <a:spcPts val="400"/>
-              </a:spcAft>
-            </a:pPr>
-            <a:r>
-              <a:rPr sz="1500" b="0">
-                <a:solidFill>
-                  <a:srgbClr val="555555"/>
-                </a:solidFill>
-                <a:latin typeface="Meiryo UI"/>
-              </a:rPr>
-              <a:t>だから「どの線から出すか」を必ず一緒に書きます。それが % のうしろです</a:t>
-            </a:r>
-          </a:p>
-          <a:p>
-            <a:pPr lvl="1" algn="l">
-              <a:spcAft>
-                <a:spcPts val="400"/>
-              </a:spcAft>
-            </a:pPr>
-            <a:r>
-              <a:rPr sz="1500" b="0">
-                <a:solidFill>
-                  <a:srgbClr val="0B6040"/>
-                </a:solidFill>
-                <a:latin typeface="Consolas"/>
-              </a:rPr>
-              <a:t>ping6 fe80::1%eth0    ← eth0 という線から出す、という意味</a:t>
-            </a:r>
-          </a:p>
-          <a:p>
-            <a:pPr algn="l">
-              <a:spcAft>
-                <a:spcPts val="800"/>
-              </a:spcAft>
-            </a:pPr>
-            <a:r>
-              <a:rPr sz="1800" b="0">
-                <a:solidFill>
-                  <a:srgbClr val="1F3355"/>
-                </a:solidFill>
-                <a:latin typeface="Meiryo UI"/>
-              </a:rPr>
-              <a:t>あわせて: 1 枚の NIC に fe80:: とグローバルが同時に付く。これが「複数が当たり前」の中身です</a:t>
+              <a:t>RA 方式の回線でも、端末へは DHCPv6 で配ることがあります</a:t>
             </a:r>
           </a:p>
         </p:txBody>
@@ -5944,7 +6057,7 @@
                 </a:solidFill>
                 <a:latin typeface="Meiryo UI"/>
               </a:rPr>
-              <a:t>教科書: 3.5「リンクローカルユニキャストアドレス」(p.74) / 3.6「スコープのゾーン」(p.76) / 2.9 (p.48)</a:t>
+              <a:t>上から降ってくる話 と 自分が下へ配る話。同じ「RA」でも階が違います</a:t>
             </a:r>
           </a:p>
         </p:txBody>
@@ -5997,7 +6110,7 @@
                 </a:solidFill>
                 <a:latin typeface="Meiryo UI"/>
               </a:rPr>
-              <a:t>RA と DHCPv6 — アドレスを配るのはどっち? (役割が違います)</a:t>
+              <a:t>fe80:: が必ず付いている理由 — IPv4 と一番違うところ</a:t>
             </a:r>
           </a:p>
         </p:txBody>
@@ -6069,177 +6182,193 @@
           <a:p>
             <a:pPr algn="l">
               <a:spcAft>
-                <a:spcPts val="1000"/>
-              </a:spcAft>
-            </a:pPr>
-            <a:r>
-              <a:rPr sz="2000" b="1">
+                <a:spcPts val="800"/>
+              </a:spcAft>
+            </a:pPr>
+            <a:r>
+              <a:rPr sz="1800" b="1">
                 <a:solidFill>
                   <a:srgbClr val="1F3355"/>
                 </a:solidFill>
                 <a:latin typeface="Meiryo UI"/>
               </a:rPr>
-              <a:t>ルータが「私がゲートウェイだよ」と自分から言いに来ます</a:t>
+              <a:t>アドレスをもらう前に通信する必要があるからです</a:t>
             </a:r>
           </a:p>
           <a:p>
             <a:pPr lvl="1" algn="l">
               <a:spcAft>
-                <a:spcPts val="600"/>
-              </a:spcAft>
-            </a:pPr>
-            <a:r>
-              <a:rPr sz="1700" b="0">
+                <a:spcPts val="400"/>
+              </a:spcAft>
+            </a:pPr>
+            <a:r>
+              <a:rPr sz="1500" b="0">
                 <a:solidFill>
                   <a:srgbClr val="555555"/>
                 </a:solidFill>
                 <a:latin typeface="Meiryo UI"/>
               </a:rPr>
-              <a:t>① 端末が「ルータいますか」と聞く</a:t>
+              <a:t>アドレスをくれるのはルータ。でもルータと話すにはアドレスが要る → 鶏と卵</a:t>
             </a:r>
           </a:p>
           <a:p>
             <a:pPr lvl="1" algn="l">
               <a:spcAft>
-                <a:spcPts val="600"/>
-              </a:spcAft>
-            </a:pPr>
-            <a:r>
-              <a:rPr sz="1700" b="0">
+                <a:spcPts val="400"/>
+              </a:spcAft>
+            </a:pPr>
+            <a:r>
+              <a:rPr sz="1500" b="0">
                 <a:solidFill>
                   <a:srgbClr val="555555"/>
                 </a:solidFill>
                 <a:latin typeface="Meiryo UI"/>
               </a:rPr>
-              <a:t>② ルータが「私がいます。住所の前半はこれです」と答える ← これが RA</a:t>
+              <a:t>だから NIC が上がった瞬間に自分だけで作れるアドレスを必ず持つ。それが fe80::</a:t>
+            </a:r>
+          </a:p>
+          <a:p>
+            <a:pPr algn="l">
+              <a:spcAft>
+                <a:spcPts val="800"/>
+              </a:spcAft>
+            </a:pPr>
+            <a:r>
+              <a:rPr sz="1800" b="1">
+                <a:solidFill>
+                  <a:srgbClr val="1F3355"/>
+                </a:solidFill>
+                <a:latin typeface="Meiryo UI"/>
+              </a:rPr>
+              <a:t>その結果こうなります</a:t>
             </a:r>
           </a:p>
           <a:p>
             <a:pPr lvl="1" algn="l">
               <a:spcAft>
-                <a:spcPts val="600"/>
-              </a:spcAft>
-            </a:pPr>
-            <a:r>
-              <a:rPr sz="1700" b="0">
+                <a:spcPts val="400"/>
+              </a:spcAft>
+            </a:pPr>
+            <a:r>
+              <a:rPr sz="1500" b="0">
                 <a:solidFill>
                   <a:srgbClr val="555555"/>
                 </a:solidFill>
                 <a:latin typeface="Meiryo UI"/>
               </a:rPr>
-              <a:t>③ 端末が住所の後半を自分で作ってアドレスを完成させる ← これを自動設定と呼びます</a:t>
+              <a:t>RA も DHCPv6 も送信元は fe80::。既定ゲートウェイも fe80:: で指します</a:t>
+            </a:r>
+          </a:p>
+          <a:p>
+            <a:pPr lvl="1" algn="l">
+              <a:spcAft>
+                <a:spcPts val="400"/>
+              </a:spcAft>
+            </a:pPr>
+            <a:r>
+              <a:rPr sz="1500" b="0">
+                <a:solidFill>
+                  <a:srgbClr val="555555"/>
+                </a:solidFill>
+                <a:latin typeface="Meiryo UI"/>
+              </a:rPr>
+              <a:t>IPv4 のように 192.168.1.1 とは書きません</a:t>
             </a:r>
           </a:p>
           <a:p>
             <a:pPr algn="l">
               <a:spcAft>
-                <a:spcPts val="1000"/>
-              </a:spcAft>
-            </a:pPr>
-            <a:r>
-              <a:rPr sz="2000" b="1">
+                <a:spcPts val="800"/>
+              </a:spcAft>
+            </a:pPr>
+            <a:r>
+              <a:rPr sz="1800" b="1">
+                <a:solidFill>
+                  <a:srgbClr val="C0392B"/>
+                </a:solidFill>
+                <a:latin typeface="Meiryo UI"/>
+              </a:rPr>
+              <a:t>だから「グローバル IPv6 が無い = 壊れている」ではありません</a:t>
+            </a:r>
+          </a:p>
+          <a:p>
+            <a:pPr algn="l">
+              <a:spcAft>
+                <a:spcPts val="800"/>
+              </a:spcAft>
+            </a:pPr>
+            <a:r>
+              <a:rPr sz="1800" b="1">
+                <a:solidFill>
+                  <a:srgbClr val="C0392B"/>
+                </a:solidFill>
+                <a:latin typeface="Meiryo UI"/>
+              </a:rPr>
+              <a:t>使うときの注意 — ここが最初の関門です</a:t>
+            </a:r>
+          </a:p>
+          <a:p>
+            <a:pPr lvl="1" algn="l">
+              <a:spcAft>
+                <a:spcPts val="400"/>
+              </a:spcAft>
+            </a:pPr>
+            <a:r>
+              <a:rPr sz="1500" b="0">
+                <a:solidFill>
+                  <a:srgbClr val="555555"/>
+                </a:solidFill>
+                <a:latin typeface="Meiryo UI"/>
+              </a:rPr>
+              <a:t>fe80:: は「同じリンクの中だけ」のアドレスなので、同じ番号が別の線にもあります</a:t>
+            </a:r>
+          </a:p>
+          <a:p>
+            <a:pPr lvl="1" algn="l">
+              <a:spcAft>
+                <a:spcPts val="400"/>
+              </a:spcAft>
+            </a:pPr>
+            <a:r>
+              <a:rPr sz="1500" b="0">
+                <a:solidFill>
+                  <a:srgbClr val="555555"/>
+                </a:solidFill>
+                <a:latin typeface="Meiryo UI"/>
+              </a:rPr>
+              <a:t>だから「どの線から出すか」を必ず一緒に書きます。それが % のうしろです</a:t>
+            </a:r>
+          </a:p>
+          <a:p>
+            <a:pPr lvl="1" algn="l">
+              <a:spcAft>
+                <a:spcPts val="400"/>
+              </a:spcAft>
+            </a:pPr>
+            <a:r>
+              <a:rPr sz="1500" b="0">
+                <a:solidFill>
+                  <a:srgbClr val="0B6040"/>
+                </a:solidFill>
+                <a:latin typeface="Consolas"/>
+              </a:rPr>
+              <a:t>ping6 fe80::1%eth0    ← eth0 という線から出す、という意味</a:t>
+            </a:r>
+          </a:p>
+          <a:p>
+            <a:pPr algn="l">
+              <a:spcAft>
+                <a:spcPts val="800"/>
+              </a:spcAft>
+            </a:pPr>
+            <a:r>
+              <a:rPr sz="1800" b="0">
                 <a:solidFill>
                   <a:srgbClr val="1F3355"/>
                 </a:solidFill>
                 <a:latin typeface="Meiryo UI"/>
               </a:rPr>
-              <a:t>IPv4 の DHCP と何が違うのか</a:t>
-            </a:r>
-          </a:p>
-          <a:p>
-            <a:pPr lvl="1" algn="l">
-              <a:spcAft>
-                <a:spcPts val="600"/>
-              </a:spcAft>
-            </a:pPr>
-            <a:r>
-              <a:rPr sz="1700" b="0">
-                <a:solidFill>
-                  <a:srgbClr val="555555"/>
-                </a:solidFill>
-                <a:latin typeface="Meiryo UI"/>
-              </a:rPr>
-              <a:t>IPv4 … 端末が聞きに行って、サーバが住所をまるごと渡す</a:t>
-            </a:r>
-          </a:p>
-          <a:p>
-            <a:pPr lvl="1" algn="l">
-              <a:spcAft>
-                <a:spcPts val="600"/>
-              </a:spcAft>
-            </a:pPr>
-            <a:r>
-              <a:rPr sz="1700" b="0">
-                <a:solidFill>
-                  <a:srgbClr val="555555"/>
-                </a:solidFill>
-                <a:latin typeface="Meiryo UI"/>
-              </a:rPr>
-              <a:t>IPv6 … ルータが前半だけ配って、後半は端末が自分で決める</a:t>
-            </a:r>
-          </a:p>
-          <a:p>
-            <a:pPr algn="l">
-              <a:spcAft>
-                <a:spcPts val="1000"/>
-              </a:spcAft>
-            </a:pPr>
-            <a:r>
-              <a:rPr sz="2000" b="1">
-                <a:solidFill>
-                  <a:srgbClr val="C0392B"/>
-                </a:solidFill>
-                <a:latin typeface="Meiryo UI"/>
-              </a:rPr>
-              <a:t>よくある誤解 ① 「DHCPv6 を使うと、自分で作るほうは止まる」→ 止まりません</a:t>
-            </a:r>
-          </a:p>
-          <a:p>
-            <a:pPr lvl="1" algn="l">
-              <a:spcAft>
-                <a:spcPts val="600"/>
-              </a:spcAft>
-            </a:pPr>
-            <a:r>
-              <a:rPr sz="1700" b="0">
-                <a:solidFill>
-                  <a:srgbClr val="555555"/>
-                </a:solidFill>
-                <a:latin typeface="Meiryo UI"/>
-              </a:rPr>
-              <a:t>両方が同時に動きます。止める / 止めないを決めるのは、別のフラグです</a:t>
-            </a:r>
-          </a:p>
-          <a:p>
-            <a:pPr lvl="1" algn="l">
-              <a:spcAft>
-                <a:spcPts val="600"/>
-              </a:spcAft>
-            </a:pPr>
-            <a:r>
-              <a:rPr sz="1700" b="0">
-                <a:solidFill>
-                  <a:srgbClr val="555555"/>
-                </a:solidFill>
-                <a:latin typeface="Meiryo UI"/>
-              </a:rPr>
-              <a:t>だから アドレスが 2 つ以上付いているのは正常 です</a:t>
-            </a:r>
-          </a:p>
-          <a:p>
-            <a:pPr algn="l">
-              <a:spcAft>
-                <a:spcPts val="1000"/>
-              </a:spcAft>
-            </a:pPr>
-            <a:r>
-              <a:rPr sz="2000" b="1">
-                <a:solidFill>
-                  <a:srgbClr val="1F3355"/>
-                </a:solidFill>
-                <a:latin typeface="Meiryo UI"/>
-              </a:rPr>
-              <a:t>ルータがもらう /56 は別の話。アドレスではなく「住所の前半」をまとめて借りるものです</a:t>
+              <a:t>あわせて: 1 枚の NIC に fe80:: とグローバルが同時に付く。これが「複数が当たり前」の中身です</a:t>
             </a:r>
           </a:p>
         </p:txBody>
@@ -6274,7 +6403,7 @@
                 </a:solidFill>
                 <a:latin typeface="Meiryo UI"/>
               </a:rPr>
-              <a:t>教科書: 第6章 (p.127) / 7.1「SLAAC の流れ」(p.160) / 第8章「DHCPv6」(p.179) / 8.7 (p.201)</a:t>
+              <a:t>教科書: 3.5「リンクローカルユニキャストアドレス」(p.74) / 3.6「スコープのゾーン」(p.76) / 2.9 (p.48)</a:t>
             </a:r>
           </a:p>
         </p:txBody>
@@ -6288,6 +6417,336 @@
 </file>
 
 <file path=ppt/slides/slide15.xml><?xml version="1.0" encoding="utf-8"?>
+<p:sld xmlns:a="http://schemas.openxmlformats.org/drawingml/2006/main" xmlns:p="http://schemas.openxmlformats.org/presentationml/2006/main" xmlns:r="http://schemas.openxmlformats.org/officeDocument/2006/relationships">
+  <p:cSld>
+    <p:spTree>
+      <p:nvGrpSpPr>
+        <p:cNvPr id="1" name=""/>
+        <p:cNvGrpSpPr/>
+        <p:nvPr/>
+      </p:nvGrpSpPr>
+      <p:grpSpPr/>
+      <p:sp>
+        <p:nvSpPr>
+          <p:cNvPr id="2" name="TextBox 1"/>
+          <p:cNvSpPr txBox="1"/>
+          <p:nvPr/>
+        </p:nvSpPr>
+        <p:spPr>
+          <a:xfrm>
+            <a:off x="502920" y="320040"/>
+            <a:ext cx="11155680" cy="822960"/>
+          </a:xfrm>
+          <a:prstGeom prst="rect">
+            <a:avLst/>
+          </a:prstGeom>
+          <a:noFill/>
+        </p:spPr>
+        <p:txBody>
+          <a:bodyPr wrap="square">
+            <a:spAutoFit/>
+          </a:bodyPr>
+          <a:lstStyle/>
+          <a:p>
+            <a:pPr algn="l"/>
+            <a:r>
+              <a:rPr sz="2800" b="1">
+                <a:solidFill>
+                  <a:srgbClr val="1F3355"/>
+                </a:solidFill>
+                <a:latin typeface="Meiryo UI"/>
+              </a:rPr>
+              <a:t>RA と DHCPv6 — アドレスを配るのはどっち? (役割が違います)</a:t>
+            </a:r>
+          </a:p>
+        </p:txBody>
+      </p:sp>
+      <p:sp>
+        <p:nvSpPr>
+          <p:cNvPr id="3" name="Rectangle 2"/>
+          <p:cNvSpPr/>
+          <p:nvPr/>
+        </p:nvSpPr>
+        <p:spPr>
+          <a:xfrm>
+            <a:off x="502920" y="1115568"/>
+            <a:ext cx="11155680" cy="31750"/>
+          </a:xfrm>
+          <a:prstGeom prst="rect">
+            <a:avLst/>
+          </a:prstGeom>
+          <a:solidFill>
+            <a:srgbClr val="007ACC"/>
+          </a:solidFill>
+          <a:ln>
+            <a:noFill/>
+          </a:ln>
+        </p:spPr>
+        <p:style>
+          <a:lnRef idx="1">
+            <a:schemeClr val="accent1"/>
+          </a:lnRef>
+          <a:fillRef idx="3">
+            <a:schemeClr val="accent1"/>
+          </a:fillRef>
+          <a:effectRef idx="2">
+            <a:schemeClr val="accent1"/>
+          </a:effectRef>
+          <a:fontRef idx="minor">
+            <a:schemeClr val="lt1"/>
+          </a:fontRef>
+        </p:style>
+        <p:txBody>
+          <a:bodyPr rtlCol="0" anchor="ctr"/>
+          <a:lstStyle/>
+          <a:p>
+            <a:pPr algn="ctr"/>
+          </a:p>
+        </p:txBody>
+      </p:sp>
+      <p:sp>
+        <p:nvSpPr>
+          <p:cNvPr id="4" name="TextBox 3"/>
+          <p:cNvSpPr txBox="1"/>
+          <p:nvPr/>
+        </p:nvSpPr>
+        <p:spPr>
+          <a:xfrm>
+            <a:off x="594360" y="1371600"/>
+            <a:ext cx="10972800" cy="4709160"/>
+          </a:xfrm>
+          <a:prstGeom prst="rect">
+            <a:avLst/>
+          </a:prstGeom>
+          <a:noFill/>
+        </p:spPr>
+        <p:txBody>
+          <a:bodyPr wrap="square">
+            <a:spAutoFit/>
+          </a:bodyPr>
+          <a:lstStyle/>
+          <a:p>
+            <a:pPr algn="l">
+              <a:spcAft>
+                <a:spcPts val="1000"/>
+              </a:spcAft>
+            </a:pPr>
+            <a:r>
+              <a:rPr sz="2000" b="1">
+                <a:solidFill>
+                  <a:srgbClr val="1F3355"/>
+                </a:solidFill>
+                <a:latin typeface="Meiryo UI"/>
+              </a:rPr>
+              <a:t>ルータが「私がゲートウェイだよ」と自分から言いに来ます</a:t>
+            </a:r>
+          </a:p>
+          <a:p>
+            <a:pPr lvl="1" algn="l">
+              <a:spcAft>
+                <a:spcPts val="600"/>
+              </a:spcAft>
+            </a:pPr>
+            <a:r>
+              <a:rPr sz="1700" b="0">
+                <a:solidFill>
+                  <a:srgbClr val="555555"/>
+                </a:solidFill>
+                <a:latin typeface="Meiryo UI"/>
+              </a:rPr>
+              <a:t>① 端末が「ルータいますか」と聞く</a:t>
+            </a:r>
+          </a:p>
+          <a:p>
+            <a:pPr lvl="1" algn="l">
+              <a:spcAft>
+                <a:spcPts val="600"/>
+              </a:spcAft>
+            </a:pPr>
+            <a:r>
+              <a:rPr sz="1700" b="0">
+                <a:solidFill>
+                  <a:srgbClr val="555555"/>
+                </a:solidFill>
+                <a:latin typeface="Meiryo UI"/>
+              </a:rPr>
+              <a:t>② ルータが「私がいます。住所の前半はこれです」と答える ← これが RA</a:t>
+            </a:r>
+          </a:p>
+          <a:p>
+            <a:pPr lvl="1" algn="l">
+              <a:spcAft>
+                <a:spcPts val="600"/>
+              </a:spcAft>
+            </a:pPr>
+            <a:r>
+              <a:rPr sz="1700" b="0">
+                <a:solidFill>
+                  <a:srgbClr val="555555"/>
+                </a:solidFill>
+                <a:latin typeface="Meiryo UI"/>
+              </a:rPr>
+              <a:t>③ 端末が住所の後半を自分で作ってアドレスを完成させる ← これを自動設定と呼びます</a:t>
+            </a:r>
+          </a:p>
+          <a:p>
+            <a:pPr algn="l">
+              <a:spcAft>
+                <a:spcPts val="1000"/>
+              </a:spcAft>
+            </a:pPr>
+            <a:r>
+              <a:rPr sz="2000" b="1">
+                <a:solidFill>
+                  <a:srgbClr val="1F3355"/>
+                </a:solidFill>
+                <a:latin typeface="Meiryo UI"/>
+              </a:rPr>
+              <a:t>IPv4 の DHCP と何が違うのか</a:t>
+            </a:r>
+          </a:p>
+          <a:p>
+            <a:pPr lvl="1" algn="l">
+              <a:spcAft>
+                <a:spcPts val="600"/>
+              </a:spcAft>
+            </a:pPr>
+            <a:r>
+              <a:rPr sz="1700" b="0">
+                <a:solidFill>
+                  <a:srgbClr val="555555"/>
+                </a:solidFill>
+                <a:latin typeface="Meiryo UI"/>
+              </a:rPr>
+              <a:t>IPv4 … 端末が聞きに行って、サーバが住所をまるごと渡す</a:t>
+            </a:r>
+          </a:p>
+          <a:p>
+            <a:pPr lvl="1" algn="l">
+              <a:spcAft>
+                <a:spcPts val="600"/>
+              </a:spcAft>
+            </a:pPr>
+            <a:r>
+              <a:rPr sz="1700" b="0">
+                <a:solidFill>
+                  <a:srgbClr val="555555"/>
+                </a:solidFill>
+                <a:latin typeface="Meiryo UI"/>
+              </a:rPr>
+              <a:t>IPv6 … ルータが前半だけ配って、後半は端末が自分で決める</a:t>
+            </a:r>
+          </a:p>
+          <a:p>
+            <a:pPr algn="l">
+              <a:spcAft>
+                <a:spcPts val="1000"/>
+              </a:spcAft>
+            </a:pPr>
+            <a:r>
+              <a:rPr sz="2000" b="1">
+                <a:solidFill>
+                  <a:srgbClr val="C0392B"/>
+                </a:solidFill>
+                <a:latin typeface="Meiryo UI"/>
+              </a:rPr>
+              <a:t>よくある誤解 ① 「DHCPv6 を使うと、自分で作るほうは止まる」→ 止まりません</a:t>
+            </a:r>
+          </a:p>
+          <a:p>
+            <a:pPr lvl="1" algn="l">
+              <a:spcAft>
+                <a:spcPts val="600"/>
+              </a:spcAft>
+            </a:pPr>
+            <a:r>
+              <a:rPr sz="1700" b="0">
+                <a:solidFill>
+                  <a:srgbClr val="555555"/>
+                </a:solidFill>
+                <a:latin typeface="Meiryo UI"/>
+              </a:rPr>
+              <a:t>両方が同時に動きます。止める / 止めないを決めるのは、別のフラグです</a:t>
+            </a:r>
+          </a:p>
+          <a:p>
+            <a:pPr lvl="1" algn="l">
+              <a:spcAft>
+                <a:spcPts val="600"/>
+              </a:spcAft>
+            </a:pPr>
+            <a:r>
+              <a:rPr sz="1700" b="0">
+                <a:solidFill>
+                  <a:srgbClr val="555555"/>
+                </a:solidFill>
+                <a:latin typeface="Meiryo UI"/>
+              </a:rPr>
+              <a:t>だから アドレスが 2 つ以上付いているのは正常 です</a:t>
+            </a:r>
+          </a:p>
+          <a:p>
+            <a:pPr algn="l">
+              <a:spcAft>
+                <a:spcPts val="1000"/>
+              </a:spcAft>
+            </a:pPr>
+            <a:r>
+              <a:rPr sz="2000" b="1">
+                <a:solidFill>
+                  <a:srgbClr val="1F3355"/>
+                </a:solidFill>
+                <a:latin typeface="Meiryo UI"/>
+              </a:rPr>
+              <a:t>ルータがもらう /56 は別の話。アドレスではなく「住所の前半」をまとめて借りるものです</a:t>
+            </a:r>
+          </a:p>
+        </p:txBody>
+      </p:sp>
+      <p:sp>
+        <p:nvSpPr>
+          <p:cNvPr id="5" name="TextBox 4"/>
+          <p:cNvSpPr txBox="1"/>
+          <p:nvPr/>
+        </p:nvSpPr>
+        <p:spPr>
+          <a:xfrm>
+            <a:off x="594360" y="6217920"/>
+            <a:ext cx="10972800" cy="502920"/>
+          </a:xfrm>
+          <a:prstGeom prst="rect">
+            <a:avLst/>
+          </a:prstGeom>
+          <a:noFill/>
+        </p:spPr>
+        <p:txBody>
+          <a:bodyPr wrap="square">
+            <a:spAutoFit/>
+          </a:bodyPr>
+          <a:lstStyle/>
+          <a:p>
+            <a:pPr algn="l"/>
+            <a:r>
+              <a:rPr sz="1200" b="0">
+                <a:solidFill>
+                  <a:srgbClr val="007ACC"/>
+                </a:solidFill>
+                <a:latin typeface="Meiryo UI"/>
+              </a:rPr>
+              <a:t>教科書: 第6章 (p.127) / 7.1「SLAAC の流れ」(p.160) / 第8章「DHCPv6」(p.179) / 8.7 (p.201)</a:t>
+            </a:r>
+          </a:p>
+        </p:txBody>
+      </p:sp>
+    </p:spTree>
+  </p:cSld>
+  <p:clrMapOvr>
+    <a:masterClrMapping/>
+  </p:clrMapOvr>
+</p:sld>
+</file>
+
+<file path=ppt/slides/slide16.xml><?xml version="1.0" encoding="utf-8"?>
 <p:sld xmlns:a="http://schemas.openxmlformats.org/drawingml/2006/main" xmlns:p="http://schemas.openxmlformats.org/presentationml/2006/main" xmlns:r="http://schemas.openxmlformats.org/officeDocument/2006/relationships">
   <p:cSld>
     <p:spTree>
@@ -6411,7 +6870,7 @@
 </p:sld>
 </file>
 
-<file path=ppt/slides/slide16.xml><?xml version="1.0" encoding="utf-8"?>
+<file path=ppt/slides/slide17.xml><?xml version="1.0" encoding="utf-8"?>
 <p:sld xmlns:a="http://schemas.openxmlformats.org/drawingml/2006/main" xmlns:p="http://schemas.openxmlformats.org/presentationml/2006/main" xmlns:r="http://schemas.openxmlformats.org/officeDocument/2006/relationships">
   <p:cSld>
     <p:spTree>
@@ -6948,7 +7407,7 @@
 </p:sld>
 </file>
 
-<file path=ppt/slides/slide17.xml><?xml version="1.0" encoding="utf-8"?>
+<file path=ppt/slides/slide18.xml><?xml version="1.0" encoding="utf-8"?>
 <p:sld xmlns:a="http://schemas.openxmlformats.org/drawingml/2006/main" xmlns:p="http://schemas.openxmlformats.org/presentationml/2006/main" xmlns:r="http://schemas.openxmlformats.org/officeDocument/2006/relationships">
   <p:cSld>
     <p:spTree>
@@ -7462,7 +7921,7 @@
 </p:sld>
 </file>
 
-<file path=ppt/slides/slide18.xml><?xml version="1.0" encoding="utf-8"?>
+<file path=ppt/slides/slide19.xml><?xml version="1.0" encoding="utf-8"?>
 <p:sld xmlns:a="http://schemas.openxmlformats.org/drawingml/2006/main" xmlns:p="http://schemas.openxmlformats.org/presentationml/2006/main" xmlns:r="http://schemas.openxmlformats.org/officeDocument/2006/relationships">
   <p:cSld>
     <p:spTree>
@@ -8216,7 +8675,131 @@
 </p:sld>
 </file>
 
-<file path=ppt/slides/slide19.xml><?xml version="1.0" encoding="utf-8"?>
+<file path=ppt/slides/slide2.xml><?xml version="1.0" encoding="utf-8"?>
+<p:sld xmlns:a="http://schemas.openxmlformats.org/drawingml/2006/main" xmlns:p="http://schemas.openxmlformats.org/presentationml/2006/main" xmlns:r="http://schemas.openxmlformats.org/officeDocument/2006/relationships">
+  <p:cSld>
+    <p:spTree>
+      <p:nvGrpSpPr>
+        <p:cNvPr id="1" name=""/>
+        <p:cNvGrpSpPr/>
+        <p:nvPr/>
+      </p:nvGrpSpPr>
+      <p:grpSpPr/>
+      <p:sp>
+        <p:nvSpPr>
+          <p:cNvPr id="2" name="Rectangle 1"/>
+          <p:cNvSpPr/>
+          <p:nvPr/>
+        </p:nvSpPr>
+        <p:spPr>
+          <a:xfrm>
+            <a:off x="0" y="0"/>
+            <a:ext cx="12191695" cy="6858000"/>
+          </a:xfrm>
+          <a:prstGeom prst="rect">
+            <a:avLst/>
+          </a:prstGeom>
+          <a:solidFill>
+            <a:srgbClr val="1F3355"/>
+          </a:solidFill>
+          <a:ln>
+            <a:noFill/>
+          </a:ln>
+        </p:spPr>
+        <p:style>
+          <a:lnRef idx="1">
+            <a:schemeClr val="accent1"/>
+          </a:lnRef>
+          <a:fillRef idx="3">
+            <a:schemeClr val="accent1"/>
+          </a:fillRef>
+          <a:effectRef idx="2">
+            <a:schemeClr val="accent1"/>
+          </a:effectRef>
+          <a:fontRef idx="minor">
+            <a:schemeClr val="lt1"/>
+          </a:fontRef>
+        </p:style>
+        <p:txBody>
+          <a:bodyPr rtlCol="0" anchor="ctr"/>
+          <a:lstStyle/>
+          <a:p>
+            <a:pPr algn="ctr"/>
+          </a:p>
+        </p:txBody>
+      </p:sp>
+      <p:sp>
+        <p:nvSpPr>
+          <p:cNvPr id="3" name="TextBox 2"/>
+          <p:cNvSpPr txBox="1"/>
+          <p:nvPr/>
+        </p:nvSpPr>
+        <p:spPr>
+          <a:xfrm>
+            <a:off x="914400" y="2194560"/>
+            <a:ext cx="10332720" cy="2377440"/>
+          </a:xfrm>
+          <a:prstGeom prst="rect">
+            <a:avLst/>
+          </a:prstGeom>
+          <a:noFill/>
+        </p:spPr>
+        <p:txBody>
+          <a:bodyPr wrap="square">
+            <a:spAutoFit/>
+          </a:bodyPr>
+          <a:lstStyle/>
+          <a:p>
+            <a:pPr algn="l"/>
+            <a:r>
+              <a:rPr sz="2000" b="1">
+                <a:solidFill>
+                  <a:srgbClr val="7FB8E0"/>
+                </a:solidFill>
+                <a:latin typeface="Meiryo UI"/>
+              </a:rPr>
+              <a:t>第0部</a:t>
+            </a:r>
+          </a:p>
+          <a:p>
+            <a:pPr algn="l"/>
+            <a:r>
+              <a:rPr sz="3600" b="1">
+                <a:solidFill>
+                  <a:srgbClr val="FFFFFF"/>
+                </a:solidFill>
+                <a:latin typeface="Meiryo UI"/>
+              </a:rPr>
+              <a:t>なぜこの話をするのか</a:t>
+            </a:r>
+          </a:p>
+          <a:p>
+            <a:pPr algn="l">
+              <a:spcBef>
+                <a:spcPts val="1600"/>
+              </a:spcBef>
+            </a:pPr>
+            <a:r>
+              <a:rPr sz="1600" b="0">
+                <a:solidFill>
+                  <a:srgbClr val="D5E5F2"/>
+                </a:solidFill>
+                <a:latin typeface="Meiryo UI"/>
+              </a:rPr>
+              <a:t>ゴール: 今日の地図と、出てくる言葉を先に配ります</a:t>
+            </a:r>
+          </a:p>
+        </p:txBody>
+      </p:sp>
+    </p:spTree>
+  </p:cSld>
+  <p:clrMapOvr>
+    <a:masterClrMapping/>
+  </p:clrMapOvr>
+</p:sld>
+</file>
+
+<file path=ppt/slides/slide20.xml><?xml version="1.0" encoding="utf-8"?>
 <p:sld xmlns:a="http://schemas.openxmlformats.org/drawingml/2006/main" xmlns:p="http://schemas.openxmlformats.org/presentationml/2006/main" xmlns:r="http://schemas.openxmlformats.org/officeDocument/2006/relationships">
   <p:cSld>
     <p:spTree>
@@ -8271,7 +8854,7 @@
         </p:nvGraphicFramePr>
         <p:xfrm>
           <a:off x="502920" y="1143000"/>
-          <a:ext cx="10881360" cy="2487168"/>
+          <a:ext cx="10881360" cy="3108960"/>
         </p:xfrm>
         <a:graphic>
           <a:graphicData uri="http://schemas.openxmlformats.org/drawingml/2006/table">
@@ -8675,7 +9258,7 @@
                           </a:solidFill>
                           <a:latin typeface="Meiryo UI"/>
                         </a:rPr>
-                        <a:t>transix</a:t>
+                        <a:t>transix (動的 IP コース)</a:t>
                       </a:r>
                     </a:p>
                   </a:txBody>
@@ -8769,7 +9352,7 @@
                           </a:solidFill>
                           <a:latin typeface="Meiryo UI"/>
                         </a:rPr>
-                        <a:t>クロスパス (Xpass)</a:t>
+                        <a:t>transix (固定 IP コース)</a:t>
                       </a:r>
                     </a:p>
                   </a:txBody>
@@ -8792,7 +9375,195 @@
                           </a:solidFill>
                           <a:latin typeface="Meiryo UI"/>
                         </a:rPr>
+                        <a:t>同上</a:t>
+                      </a:r>
+                    </a:p>
+                  </a:txBody>
+                  <a:tcPr>
+                    <a:solidFill>
+                      <a:srgbClr val="FFFFFF"/>
+                    </a:solidFill>
+                  </a:tcPr>
+                </a:tc>
+                <a:tc>
+                  <a:txBody>
+                    <a:bodyPr/>
+                    <a:lstStyle/>
+                    <a:p>
+                      <a:pPr algn="l"/>
+                      <a:r>
+                        <a:rPr sz="1100" b="0">
+                          <a:solidFill>
+                            <a:srgbClr val="1F3355"/>
+                          </a:solidFill>
+                          <a:latin typeface="Meiryo UI"/>
+                        </a:rPr>
+                        <a:t>固定 IP 方式</a:t>
+                      </a:r>
+                    </a:p>
+                  </a:txBody>
+                  <a:tcPr>
+                    <a:solidFill>
+                      <a:srgbClr val="FFFFFF"/>
+                    </a:solidFill>
+                  </a:tcPr>
+                </a:tc>
+                <a:tc>
+                  <a:txBody>
+                    <a:bodyPr/>
+                    <a:lstStyle/>
+                    <a:p>
+                      <a:pPr algn="l"/>
+                      <a:r>
+                        <a:rPr sz="1100" b="0">
+                          <a:solidFill>
+                            <a:srgbClr val="1F3355"/>
+                          </a:solidFill>
+                          <a:latin typeface="Meiryo UI"/>
+                        </a:rPr>
+                        <a:t>**可能**。方式が別物です</a:t>
+                      </a:r>
+                    </a:p>
+                  </a:txBody>
+                  <a:tcPr>
+                    <a:solidFill>
+                      <a:srgbClr val="FFFFFF"/>
+                    </a:solidFill>
+                  </a:tcPr>
+                </a:tc>
+              </a:tr>
+              <a:tr h="310896">
+                <a:tc>
+                  <a:txBody>
+                    <a:bodyPr/>
+                    <a:lstStyle/>
+                    <a:p>
+                      <a:pPr algn="l"/>
+                      <a:r>
+                        <a:rPr sz="1100" b="0">
+                          <a:solidFill>
+                            <a:srgbClr val="1F3355"/>
+                          </a:solidFill>
+                          <a:latin typeface="Meiryo UI"/>
+                        </a:rPr>
+                        <a:t>クロスパス (Xpass)</a:t>
+                      </a:r>
+                    </a:p>
+                  </a:txBody>
+                  <a:tcPr>
+                    <a:solidFill>
+                      <a:srgbClr val="F2F6FA"/>
+                    </a:solidFill>
+                  </a:tcPr>
+                </a:tc>
+                <a:tc>
+                  <a:txBody>
+                    <a:bodyPr/>
+                    <a:lstStyle/>
+                    <a:p>
+                      <a:pPr algn="l"/>
+                      <a:r>
+                        <a:rPr sz="1100" b="0">
+                          <a:solidFill>
+                            <a:srgbClr val="1F3355"/>
+                          </a:solidFill>
+                          <a:latin typeface="Meiryo UI"/>
+                        </a:rPr>
                         <a:t>アルテリア・ネットワークス</a:t>
+                      </a:r>
+                    </a:p>
+                  </a:txBody>
+                  <a:tcPr>
+                    <a:solidFill>
+                      <a:srgbClr val="F2F6FA"/>
+                    </a:solidFill>
+                  </a:tcPr>
+                </a:tc>
+                <a:tc>
+                  <a:txBody>
+                    <a:bodyPr/>
+                    <a:lstStyle/>
+                    <a:p>
+                      <a:pPr algn="l"/>
+                      <a:r>
+                        <a:rPr sz="1100" b="0">
+                          <a:solidFill>
+                            <a:srgbClr val="1F3355"/>
+                          </a:solidFill>
+                          <a:latin typeface="Meiryo UI"/>
+                        </a:rPr>
+                        <a:t>DS-Lite</a:t>
+                      </a:r>
+                    </a:p>
+                  </a:txBody>
+                  <a:tcPr>
+                    <a:solidFill>
+                      <a:srgbClr val="F2F6FA"/>
+                    </a:solidFill>
+                  </a:tcPr>
+                </a:tc>
+                <a:tc>
+                  <a:txBody>
+                    <a:bodyPr/>
+                    <a:lstStyle/>
+                    <a:p>
+                      <a:pPr algn="l"/>
+                      <a:r>
+                        <a:rPr sz="1100" b="0">
+                          <a:solidFill>
+                            <a:srgbClr val="1F3355"/>
+                          </a:solidFill>
+                          <a:latin typeface="Meiryo UI"/>
+                        </a:rPr>
+                        <a:t>不可 (固定 IP 契約が別途必要)</a:t>
+                      </a:r>
+                    </a:p>
+                  </a:txBody>
+                  <a:tcPr>
+                    <a:solidFill>
+                      <a:srgbClr val="F2F6FA"/>
+                    </a:solidFill>
+                  </a:tcPr>
+                </a:tc>
+              </a:tr>
+              <a:tr h="310896">
+                <a:tc>
+                  <a:txBody>
+                    <a:bodyPr/>
+                    <a:lstStyle/>
+                    <a:p>
+                      <a:pPr algn="l"/>
+                      <a:r>
+                        <a:rPr sz="1100" b="0">
+                          <a:solidFill>
+                            <a:srgbClr val="1F3355"/>
+                          </a:solidFill>
+                          <a:latin typeface="Meiryo UI"/>
+                        </a:rPr>
+                        <a:t>v6 コネクト</a:t>
+                      </a:r>
+                    </a:p>
+                  </a:txBody>
+                  <a:tcPr>
+                    <a:solidFill>
+                      <a:srgbClr val="FFFFFF"/>
+                    </a:solidFill>
+                  </a:tcPr>
+                </a:tc>
+                <a:tc>
+                  <a:txBody>
+                    <a:bodyPr/>
+                    <a:lstStyle/>
+                    <a:p>
+                      <a:pPr algn="l"/>
+                      <a:r>
+                        <a:rPr sz="1100" b="0">
+                          <a:solidFill>
+                            <a:srgbClr val="1F3355"/>
+                          </a:solidFill>
+                          <a:latin typeface="Meiryo UI"/>
+                        </a:rPr>
+                        <a:t>朝日ネット</a:t>
                       </a:r>
                     </a:p>
                   </a:txBody>
@@ -8863,7 +9634,7 @@
                           </a:solidFill>
                           <a:latin typeface="Meiryo UI"/>
                         </a:rPr>
-                        <a:t>v6 コネクト</a:t>
+                        <a:t>ソフトバンク光 IPv6 高速ハイブリッド</a:t>
                       </a:r>
                     </a:p>
                   </a:txBody>
@@ -8886,7 +9657,7 @@
                           </a:solidFill>
                           <a:latin typeface="Meiryo UI"/>
                         </a:rPr>
-                        <a:t>朝日ネット</a:t>
+                        <a:t>BBIX</a:t>
                       </a:r>
                     </a:p>
                   </a:txBody>
@@ -8909,7 +9680,7 @@
                           </a:solidFill>
                           <a:latin typeface="Meiryo UI"/>
                         </a:rPr>
-                        <a:t>DS-Lite</a:t>
+                        <a:t>独自方式</a:t>
                       </a:r>
                     </a:p>
                   </a:txBody>
@@ -8932,7 +9703,7 @@
                           </a:solidFill>
                           <a:latin typeface="Meiryo UI"/>
                         </a:rPr>
-                        <a:t>不可 (固定 IP 契約が別途必要)</a:t>
+                        <a:t>光BBユニット前提。今日の対象外</a:t>
                       </a:r>
                     </a:p>
                   </a:txBody>
@@ -8957,7 +9728,7 @@
                           </a:solidFill>
                           <a:latin typeface="Meiryo UI"/>
                         </a:rPr>
-                        <a:t>ソフトバンク光 IPv6 高速ハイブリッド</a:t>
+                        <a:t>⚠ 同じ ISP 名でもコースで方式が変わる</a:t>
                       </a:r>
                     </a:p>
                   </a:txBody>
@@ -8980,7 +9751,7 @@
                           </a:solidFill>
                           <a:latin typeface="Meiryo UI"/>
                         </a:rPr>
-                        <a:t>BBIX</a:t>
+                        <a:t>契約書のコース名まで見る</a:t>
                       </a:r>
                     </a:p>
                   </a:txBody>
@@ -9003,7 +9774,7 @@
                           </a:solidFill>
                           <a:latin typeface="Meiryo UI"/>
                         </a:rPr>
-                        <a:t>独自方式</a:t>
+                        <a:t>—</a:t>
                       </a:r>
                     </a:p>
                   </a:txBody>
@@ -9026,7 +9797,7 @@
                           </a:solidFill>
                           <a:latin typeface="Meiryo UI"/>
                         </a:rPr>
-                        <a:t>光BBユニット前提。今日の対象外</a:t>
+                        <a:t>次ページの事故がこれ</a:t>
                       </a:r>
                     </a:p>
                   </a:txBody>
@@ -9049,7 +9820,7 @@
         </p:nvSpPr>
         <p:spPr>
           <a:xfrm>
-            <a:off x="502920" y="3886200"/>
+            <a:off x="502920" y="4507992"/>
             <a:ext cx="11155680" cy="548640"/>
           </a:xfrm>
           <a:prstGeom prst="rect">
@@ -9071,7 +9842,7 @@
                 </a:solidFill>
                 <a:latin typeface="Meiryo UI"/>
               </a:rPr>
-              <a:t>※ このほかに「固定 IP のオプション契約」という第 3 の形があります (次ページの事故がまさにこれ)。同じ ISP 名でもプランで VNE が違うことがあるので、開通後に実測で確かめてください</a:t>
+              <a:t>サービス名だけで判断しないこと。**最後の行が、うちが 2 回続けて踏んだ事故そのもの**です</a:t>
             </a:r>
           </a:p>
         </p:txBody>
@@ -9084,131 +9855,7 @@
 </p:sld>
 </file>
 
-<file path=ppt/slides/slide2.xml><?xml version="1.0" encoding="utf-8"?>
-<p:sld xmlns:a="http://schemas.openxmlformats.org/drawingml/2006/main" xmlns:p="http://schemas.openxmlformats.org/presentationml/2006/main" xmlns:r="http://schemas.openxmlformats.org/officeDocument/2006/relationships">
-  <p:cSld>
-    <p:spTree>
-      <p:nvGrpSpPr>
-        <p:cNvPr id="1" name=""/>
-        <p:cNvGrpSpPr/>
-        <p:nvPr/>
-      </p:nvGrpSpPr>
-      <p:grpSpPr/>
-      <p:sp>
-        <p:nvSpPr>
-          <p:cNvPr id="2" name="Rectangle 1"/>
-          <p:cNvSpPr/>
-          <p:nvPr/>
-        </p:nvSpPr>
-        <p:spPr>
-          <a:xfrm>
-            <a:off x="0" y="0"/>
-            <a:ext cx="12191695" cy="6858000"/>
-          </a:xfrm>
-          <a:prstGeom prst="rect">
-            <a:avLst/>
-          </a:prstGeom>
-          <a:solidFill>
-            <a:srgbClr val="1F3355"/>
-          </a:solidFill>
-          <a:ln>
-            <a:noFill/>
-          </a:ln>
-        </p:spPr>
-        <p:style>
-          <a:lnRef idx="1">
-            <a:schemeClr val="accent1"/>
-          </a:lnRef>
-          <a:fillRef idx="3">
-            <a:schemeClr val="accent1"/>
-          </a:fillRef>
-          <a:effectRef idx="2">
-            <a:schemeClr val="accent1"/>
-          </a:effectRef>
-          <a:fontRef idx="minor">
-            <a:schemeClr val="lt1"/>
-          </a:fontRef>
-        </p:style>
-        <p:txBody>
-          <a:bodyPr rtlCol="0" anchor="ctr"/>
-          <a:lstStyle/>
-          <a:p>
-            <a:pPr algn="ctr"/>
-          </a:p>
-        </p:txBody>
-      </p:sp>
-      <p:sp>
-        <p:nvSpPr>
-          <p:cNvPr id="3" name="TextBox 2"/>
-          <p:cNvSpPr txBox="1"/>
-          <p:nvPr/>
-        </p:nvSpPr>
-        <p:spPr>
-          <a:xfrm>
-            <a:off x="914400" y="2194560"/>
-            <a:ext cx="10332720" cy="2377440"/>
-          </a:xfrm>
-          <a:prstGeom prst="rect">
-            <a:avLst/>
-          </a:prstGeom>
-          <a:noFill/>
-        </p:spPr>
-        <p:txBody>
-          <a:bodyPr wrap="square">
-            <a:spAutoFit/>
-          </a:bodyPr>
-          <a:lstStyle/>
-          <a:p>
-            <a:pPr algn="l"/>
-            <a:r>
-              <a:rPr sz="2000" b="1">
-                <a:solidFill>
-                  <a:srgbClr val="7FB8E0"/>
-                </a:solidFill>
-                <a:latin typeface="Meiryo UI"/>
-              </a:rPr>
-              <a:t>第0部</a:t>
-            </a:r>
-          </a:p>
-          <a:p>
-            <a:pPr algn="l"/>
-            <a:r>
-              <a:rPr sz="3600" b="1">
-                <a:solidFill>
-                  <a:srgbClr val="FFFFFF"/>
-                </a:solidFill>
-                <a:latin typeface="Meiryo UI"/>
-              </a:rPr>
-              <a:t>なぜこの話をするのか</a:t>
-            </a:r>
-          </a:p>
-          <a:p>
-            <a:pPr algn="l">
-              <a:spcBef>
-                <a:spcPts val="1600"/>
-              </a:spcBef>
-            </a:pPr>
-            <a:r>
-              <a:rPr sz="1600" b="0">
-                <a:solidFill>
-                  <a:srgbClr val="D5E5F2"/>
-                </a:solidFill>
-                <a:latin typeface="Meiryo UI"/>
-              </a:rPr>
-              <a:t>ゴール: 今日の地図と、出てくる言葉を先に配ります</a:t>
-            </a:r>
-          </a:p>
-        </p:txBody>
-      </p:sp>
-    </p:spTree>
-  </p:cSld>
-  <p:clrMapOvr>
-    <a:masterClrMapping/>
-  </p:clrMapOvr>
-</p:sld>
-</file>
-
-<file path=ppt/slides/slide20.xml><?xml version="1.0" encoding="utf-8"?>
+<file path=ppt/slides/slide21.xml><?xml version="1.0" encoding="utf-8"?>
 <p:sld xmlns:a="http://schemas.openxmlformats.org/drawingml/2006/main" xmlns:p="http://schemas.openxmlformats.org/presentationml/2006/main" xmlns:r="http://schemas.openxmlformats.org/officeDocument/2006/relationships">
   <p:cSld>
     <p:spTree>
@@ -9535,7 +10182,7 @@
 </p:sld>
 </file>
 
-<file path=ppt/slides/slide21.xml><?xml version="1.0" encoding="utf-8"?>
+<file path=ppt/slides/slide22.xml><?xml version="1.0" encoding="utf-8"?>
 <p:sld xmlns:a="http://schemas.openxmlformats.org/drawingml/2006/main" xmlns:p="http://schemas.openxmlformats.org/presentationml/2006/main" xmlns:r="http://schemas.openxmlformats.org/officeDocument/2006/relationships">
   <p:cSld>
     <p:spTree>
@@ -9933,7 +10580,7 @@
 </p:sld>
 </file>
 
-<file path=ppt/slides/slide22.xml><?xml version="1.0" encoding="utf-8"?>
+<file path=ppt/slides/slide23.xml><?xml version="1.0" encoding="utf-8"?>
 <p:sld xmlns:a="http://schemas.openxmlformats.org/drawingml/2006/main" xmlns:p="http://schemas.openxmlformats.org/presentationml/2006/main" xmlns:r="http://schemas.openxmlformats.org/officeDocument/2006/relationships">
   <p:cSld>
     <p:spTree>
@@ -10228,7 +10875,7 @@
 </p:sld>
 </file>
 
-<file path=ppt/slides/slide23.xml><?xml version="1.0" encoding="utf-8"?>
+<file path=ppt/slides/slide24.xml><?xml version="1.0" encoding="utf-8"?>
 <p:sld xmlns:a="http://schemas.openxmlformats.org/drawingml/2006/main" xmlns:p="http://schemas.openxmlformats.org/presentationml/2006/main" xmlns:r="http://schemas.openxmlformats.org/officeDocument/2006/relationships">
   <p:cSld>
     <p:spTree>
@@ -10352,7 +10999,7 @@
 </p:sld>
 </file>
 
-<file path=ppt/slides/slide24.xml><?xml version="1.0" encoding="utf-8"?>
+<file path=ppt/slides/slide25.xml><?xml version="1.0" encoding="utf-8"?>
 <p:sld xmlns:a="http://schemas.openxmlformats.org/drawingml/2006/main" xmlns:p="http://schemas.openxmlformats.org/presentationml/2006/main" xmlns:r="http://schemas.openxmlformats.org/officeDocument/2006/relationships">
   <p:cSld>
     <p:spTree>
@@ -10666,7 +11313,7 @@
 </p:sld>
 </file>
 
-<file path=ppt/slides/slide25.xml><?xml version="1.0" encoding="utf-8"?>
+<file path=ppt/slides/slide26.xml><?xml version="1.0" encoding="utf-8"?>
 <p:sld xmlns:a="http://schemas.openxmlformats.org/drawingml/2006/main" xmlns:p="http://schemas.openxmlformats.org/presentationml/2006/main" xmlns:r="http://schemas.openxmlformats.org/officeDocument/2006/relationships">
   <p:cSld>
     <p:spTree>
@@ -11044,7 +11691,7 @@
 </p:sld>
 </file>
 
-<file path=ppt/slides/slide26.xml><?xml version="1.0" encoding="utf-8"?>
+<file path=ppt/slides/slide27.xml><?xml version="1.0" encoding="utf-8"?>
 <p:sld xmlns:a="http://schemas.openxmlformats.org/drawingml/2006/main" xmlns:p="http://schemas.openxmlformats.org/presentationml/2006/main" xmlns:r="http://schemas.openxmlformats.org/officeDocument/2006/relationships">
   <p:cSld>
     <p:spTree>
@@ -11156,273 +11803,209 @@
           <a:p>
             <a:pPr algn="l">
               <a:spcAft>
+                <a:spcPts val="900"/>
+              </a:spcAft>
+            </a:pPr>
+            <a:r>
+              <a:rPr sz="1900" b="1">
+                <a:solidFill>
+                  <a:srgbClr val="1F3355"/>
+                </a:solidFill>
+                <a:latin typeface="Meiryo UI"/>
+              </a:rPr>
+              <a:t>その前に: NAT は「アドレス + ポート番号」の組で通信を見分けています</a:t>
+            </a:r>
+          </a:p>
+          <a:p>
+            <a:pPr lvl="1" algn="l">
+              <a:spcAft>
                 <a:spcPts val="500"/>
               </a:spcAft>
             </a:pPr>
             <a:r>
-              <a:rPr sz="1500" b="1">
+              <a:rPr sz="1600" b="0">
+                <a:solidFill>
+                  <a:srgbClr val="555555"/>
+                </a:solidFill>
+                <a:latin typeface="Meiryo UI"/>
+              </a:rPr>
+              <a:t>だから ポート番号を分担すれば、1 個のアドレスを何人かで共有できます</a:t>
+            </a:r>
+          </a:p>
+          <a:p>
+            <a:pPr lvl="1" algn="l">
+              <a:spcAft>
+                <a:spcPts val="500"/>
+              </a:spcAft>
+            </a:pPr>
+            <a:r>
+              <a:rPr sz="1600" b="0">
+                <a:solidFill>
+                  <a:srgbClr val="555555"/>
+                </a:solidFill>
+                <a:latin typeface="Meiryo UI"/>
+              </a:rPr>
+              <a:t>MAP-E はこれを「事業者と利用者の間」でやる仕組みです</a:t>
+            </a:r>
+          </a:p>
+          <a:p>
+            <a:pPr algn="l">
+              <a:spcAft>
+                <a:spcPts val="900"/>
+              </a:spcAft>
+            </a:pPr>
+            <a:r>
+              <a:rPr sz="1900" b="1">
                 <a:solidFill>
                   <a:srgbClr val="1F3355"/>
                 </a:solidFill>
                 <a:latin typeface="Meiryo UI"/>
               </a:rPr>
-              <a:t>その前に: NAT は「アドレス + ポート番号」の組で通信を見分けています</a:t>
+              <a:t>1 個の IPv4 アドレスを何人かで分け合い、使えるポート番号を分担します</a:t>
             </a:r>
           </a:p>
           <a:p>
             <a:pPr lvl="1" algn="l">
               <a:spcAft>
-                <a:spcPts val="300"/>
-              </a:spcAft>
-            </a:pPr>
-            <a:r>
-              <a:rPr sz="1200" b="0">
+                <a:spcPts val="500"/>
+              </a:spcAft>
+            </a:pPr>
+            <a:r>
+              <a:rPr sz="1600" b="0">
                 <a:solidFill>
                   <a:srgbClr val="555555"/>
                 </a:solidFill>
                 <a:latin typeface="Meiryo UI"/>
               </a:rPr>
-              <a:t>だから ポート番号を分担すれば、1 個のアドレスを何人かで共有できます</a:t>
+              <a:t>グローバル IPv4 アドレスは他人と共有</a:t>
             </a:r>
           </a:p>
           <a:p>
             <a:pPr lvl="1" algn="l">
               <a:spcAft>
-                <a:spcPts val="300"/>
-              </a:spcAft>
-            </a:pPr>
-            <a:r>
-              <a:rPr sz="1200" b="0">
+                <a:spcPts val="500"/>
+              </a:spcAft>
+            </a:pPr>
+            <a:r>
+              <a:rPr sz="1600" b="0">
                 <a:solidFill>
                   <a:srgbClr val="555555"/>
                 </a:solidFill>
                 <a:latin typeface="Meiryo UI"/>
               </a:rPr>
-              <a:t>MAP-E はこれを「事業者と利用者の間」でやる仕組みです</a:t>
+              <a:t>代わりに「あなたはこのポート番号を使ってください」と範囲が決められる</a:t>
+            </a:r>
+          </a:p>
+          <a:p>
+            <a:pPr lvl="1" algn="l">
+              <a:spcAft>
+                <a:spcPts val="500"/>
+              </a:spcAft>
+            </a:pPr>
+            <a:r>
+              <a:rPr sz="1600" b="0">
+                <a:solidFill>
+                  <a:srgbClr val="555555"/>
+                </a:solidFill>
+                <a:latin typeface="Meiryo UI"/>
+              </a:rPr>
+              <a:t>どれを使うかは、降ってきた IPv6 の「住所の前半」(プレフィックス) から計算で決まります</a:t>
             </a:r>
           </a:p>
           <a:p>
             <a:pPr algn="l">
               <a:spcAft>
+                <a:spcPts val="900"/>
+              </a:spcAft>
+            </a:pPr>
+            <a:r>
+              <a:rPr sz="1900" b="1">
+                <a:solidFill>
+                  <a:srgbClr val="1F3355"/>
+                </a:solidFill>
+                <a:latin typeface="Meiryo UI"/>
+              </a:rPr>
+              <a:t>うちの検証環境で実際に計算した例 (CPE の自動計算と完全に一致しました)</a:t>
+            </a:r>
+          </a:p>
+          <a:p>
+            <a:pPr lvl="1" algn="l">
+              <a:spcAft>
                 <a:spcPts val="500"/>
               </a:spcAft>
             </a:pPr>
             <a:r>
-              <a:rPr sz="1500" b="1">
-                <a:solidFill>
-                  <a:srgbClr val="1F3355"/>
-                </a:solidFill>
-                <a:latin typeface="Meiryo UI"/>
-              </a:rPr>
-              <a:t>1 個の IPv4 アドレスを何人かで分け合い、使えるポート番号を分担します</a:t>
+              <a:rPr sz="1600" b="0">
+                <a:solidFill>
+                  <a:srgbClr val="0B6040"/>
+                </a:solidFill>
+                <a:latin typeface="Consolas"/>
+              </a:rPr>
+              <a:t>降ってきた IPv6      2001:db8:100a:500::/56</a:t>
             </a:r>
           </a:p>
           <a:p>
             <a:pPr lvl="1" algn="l">
               <a:spcAft>
-                <a:spcPts val="300"/>
-              </a:spcAft>
-            </a:pPr>
-            <a:r>
-              <a:rPr sz="1200" b="0">
+                <a:spcPts val="500"/>
+              </a:spcAft>
+            </a:pPr>
+            <a:r>
+              <a:rPr sz="1600" b="0">
+                <a:solidFill>
+                  <a:srgbClr val="0B6040"/>
+                </a:solidFill>
+                <a:latin typeface="Consolas"/>
+              </a:rPr>
+              <a:t>計算で出た共有 IPv4  198.51.100.10</a:t>
+            </a:r>
+          </a:p>
+          <a:p>
+            <a:pPr lvl="1" algn="l">
+              <a:spcAft>
+                <a:spcPts val="500"/>
+              </a:spcAft>
+            </a:pPr>
+            <a:r>
+              <a:rPr sz="1600" b="0">
+                <a:solidFill>
+                  <a:srgbClr val="0B6040"/>
+                </a:solidFill>
+                <a:latin typeface="Consolas"/>
+              </a:rPr>
+              <a:t>使えるポート        240 個 (連続ではなく、とびとびの番号。最初は 4176〜4191)</a:t>
+            </a:r>
+          </a:p>
+          <a:p>
+            <a:pPr algn="l">
+              <a:spcAft>
+                <a:spcPts val="900"/>
+              </a:spcAft>
+            </a:pPr>
+            <a:r>
+              <a:rPr sz="1900" b="1">
+                <a:solidFill>
+                  <a:srgbClr val="C0392B"/>
+                </a:solidFill>
+                <a:latin typeface="Meiryo UI"/>
+              </a:rPr>
+              <a:t>ポートは全部で 65536 個あるのに、使えるのは 240 個です</a:t>
+            </a:r>
+          </a:p>
+          <a:p>
+            <a:pPr lvl="1" algn="l">
+              <a:spcAft>
+                <a:spcPts val="500"/>
+              </a:spcAft>
+            </a:pPr>
+            <a:r>
+              <a:rPr sz="1600" b="0">
                 <a:solidFill>
                   <a:srgbClr val="555555"/>
                 </a:solidFill>
                 <a:latin typeface="Meiryo UI"/>
               </a:rPr>
-              <a:t>グローバル IPv4 アドレスは他人と共有</a:t>
-            </a:r>
-          </a:p>
-          <a:p>
-            <a:pPr lvl="1" algn="l">
-              <a:spcAft>
-                <a:spcPts val="300"/>
-              </a:spcAft>
-            </a:pPr>
-            <a:r>
-              <a:rPr sz="1200" b="0">
-                <a:solidFill>
-                  <a:srgbClr val="555555"/>
-                </a:solidFill>
-                <a:latin typeface="Meiryo UI"/>
-              </a:rPr>
-              <a:t>代わりに「あなたはこのポート番号を使ってください」と範囲が決められる</a:t>
-            </a:r>
-          </a:p>
-          <a:p>
-            <a:pPr lvl="1" algn="l">
-              <a:spcAft>
-                <a:spcPts val="300"/>
-              </a:spcAft>
-            </a:pPr>
-            <a:r>
-              <a:rPr sz="1200" b="0">
-                <a:solidFill>
-                  <a:srgbClr val="555555"/>
-                </a:solidFill>
-                <a:latin typeface="Meiryo UI"/>
-              </a:rPr>
-              <a:t>どれを使うかは、降ってきた IPv6 の「住所の前半」(プレフィックス) から計算で決まります</a:t>
-            </a:r>
-          </a:p>
-          <a:p>
-            <a:pPr algn="l">
-              <a:spcAft>
-                <a:spcPts val="500"/>
-              </a:spcAft>
-            </a:pPr>
-            <a:r>
-              <a:rPr sz="1500" b="1">
-                <a:solidFill>
-                  <a:srgbClr val="1F3355"/>
-                </a:solidFill>
-                <a:latin typeface="Meiryo UI"/>
-              </a:rPr>
-              <a:t>うちの検証環境で実際に計算した例 (CPE の自動計算と完全に一致しました)</a:t>
-            </a:r>
-          </a:p>
-          <a:p>
-            <a:pPr lvl="1" algn="l">
-              <a:spcAft>
-                <a:spcPts val="300"/>
-              </a:spcAft>
-            </a:pPr>
-            <a:r>
-              <a:rPr sz="1200" b="0">
-                <a:solidFill>
-                  <a:srgbClr val="0B6040"/>
-                </a:solidFill>
-                <a:latin typeface="Consolas"/>
-              </a:rPr>
-              <a:t>降ってきた IPv6      2001:db8:100a:500::/56</a:t>
-            </a:r>
-          </a:p>
-          <a:p>
-            <a:pPr lvl="1" algn="l">
-              <a:spcAft>
-                <a:spcPts val="300"/>
-              </a:spcAft>
-            </a:pPr>
-            <a:r>
-              <a:rPr sz="1200" b="0">
-                <a:solidFill>
-                  <a:srgbClr val="0B6040"/>
-                </a:solidFill>
-                <a:latin typeface="Consolas"/>
-              </a:rPr>
-              <a:t>計算で出た共有 IPv4  198.51.100.10</a:t>
-            </a:r>
-          </a:p>
-          <a:p>
-            <a:pPr lvl="1" algn="l">
-              <a:spcAft>
-                <a:spcPts val="300"/>
-              </a:spcAft>
-            </a:pPr>
-            <a:r>
-              <a:rPr sz="1200" b="0">
-                <a:solidFill>
-                  <a:srgbClr val="0B6040"/>
-                </a:solidFill>
-                <a:latin typeface="Consolas"/>
-              </a:rPr>
-              <a:t>使えるポート        240 個 (連続ではなく、とびとびの番号。最初は 4176〜4191)</a:t>
-            </a:r>
-          </a:p>
-          <a:p>
-            <a:pPr algn="l">
-              <a:spcAft>
-                <a:spcPts val="500"/>
-              </a:spcAft>
-            </a:pPr>
-            <a:r>
-              <a:rPr sz="1500" b="1">
-                <a:solidFill>
-                  <a:srgbClr val="C0392B"/>
-                </a:solidFill>
-                <a:latin typeface="Meiryo UI"/>
-              </a:rPr>
-              <a:t>ポートは全部で 65536 個あるのに、使えるのは 240 個です</a:t>
-            </a:r>
-          </a:p>
-          <a:p>
-            <a:pPr lvl="1" algn="l">
-              <a:spcAft>
-                <a:spcPts val="300"/>
-              </a:spcAft>
-            </a:pPr>
-            <a:r>
-              <a:rPr sz="1200" b="0">
-                <a:solidFill>
-                  <a:srgbClr val="555555"/>
-                </a:solidFill>
-                <a:latin typeface="Meiryo UI"/>
-              </a:rPr>
               <a:t>実サービスでは v6プラスが 240 個、OCN バーチャルコネクトが 1008 個と言われています</a:t>
-            </a:r>
-          </a:p>
-          <a:p>
-            <a:pPr algn="l">
-              <a:spcAft>
-                <a:spcPts val="500"/>
-              </a:spcAft>
-            </a:pPr>
-            <a:r>
-              <a:rPr sz="1500" b="1">
-                <a:solidFill>
-                  <a:srgbClr val="C0392B"/>
-                </a:solidFill>
-                <a:latin typeface="Meiryo UI"/>
-              </a:rPr>
-              <a:t>どれくらい少ないか — うちで実際に枯れました</a:t>
-            </a:r>
-          </a:p>
-          <a:p>
-            <a:pPr lvl="1" algn="l">
-              <a:spcAft>
-                <a:spcPts val="300"/>
-              </a:spcAft>
-            </a:pPr>
-            <a:r>
-              <a:rPr sz="1200" b="0">
-                <a:solidFill>
-                  <a:srgbClr val="555555"/>
-                </a:solidFill>
-                <a:latin typeface="Meiryo UI"/>
-              </a:rPr>
-              <a:t>Windows PC を 1 台 繋いで放置しただけで、数十分でこうなりました</a:t>
-            </a:r>
-          </a:p>
-          <a:p>
-            <a:pPr lvl="1" algn="l">
-              <a:spcAft>
-                <a:spcPts val="300"/>
-              </a:spcAft>
-            </a:pPr>
-            <a:r>
-              <a:rPr sz="1200" b="0">
-                <a:solidFill>
-                  <a:srgbClr val="0B6040"/>
-                </a:solidFill>
-                <a:latin typeface="Consolas"/>
-              </a:rPr>
-              <a:t>%NAT-6-ADDR_ALLOC_FAILURE: ... pool 1 may be exhausted</a:t>
-            </a:r>
-          </a:p>
-          <a:p>
-            <a:pPr lvl="1" algn="l">
-              <a:spcAft>
-                <a:spcPts val="300"/>
-              </a:spcAft>
-            </a:pPr>
-            <a:r>
-              <a:rPr sz="1200" b="0">
-                <a:solidFill>
-                  <a:srgbClr val="555555"/>
-                </a:solidFill>
-                <a:latin typeface="Meiryo UI"/>
-              </a:rPr>
-              <a:t>わざと枯らしたのではありません。Update やテレメトリだけで使い切ります</a:t>
             </a:r>
           </a:p>
         </p:txBody>
@@ -11470,7 +12053,7 @@
 </p:sld>
 </file>
 
-<file path=ppt/slides/slide27.xml><?xml version="1.0" encoding="utf-8"?>
+<file path=ppt/slides/slide28.xml><?xml version="1.0" encoding="utf-8"?>
 <p:sld xmlns:a="http://schemas.openxmlformats.org/drawingml/2006/main" xmlns:p="http://schemas.openxmlformats.org/presentationml/2006/main" xmlns:r="http://schemas.openxmlformats.org/officeDocument/2006/relationships">
   <p:cSld>
     <p:spTree>
@@ -11510,7 +12093,7 @@
                 </a:solidFill>
                 <a:latin typeface="Meiryo UI"/>
               </a:rPr>
-              <a:t>「計算で決まる」って、どういうこと?</a:t>
+              <a:t>240 個って、どれくらい少ないのか — うちで実際に枯れました</a:t>
             </a:r>
           </a:p>
         </p:txBody>
@@ -11582,209 +12165,145 @@
           <a:p>
             <a:pPr algn="l">
               <a:spcAft>
-                <a:spcPts val="900"/>
-              </a:spcAft>
-            </a:pPr>
-            <a:r>
-              <a:rPr sz="1900" b="1">
+                <a:spcPts val="1000"/>
+              </a:spcAft>
+            </a:pPr>
+            <a:r>
+              <a:rPr sz="2000" b="1">
                 <a:solidFill>
                   <a:srgbClr val="1F3355"/>
                 </a:solidFill>
                 <a:latin typeface="Meiryo UI"/>
               </a:rPr>
-              <a:t>式は覚えなくていいです。知っておくべきは 3 つだけ</a:t>
+              <a:t>検証機に Windows PC を 1 台 繋いで、放置していただけです</a:t>
             </a:r>
           </a:p>
           <a:p>
             <a:pPr lvl="1" algn="l">
               <a:spcAft>
-                <a:spcPts val="500"/>
-              </a:spcAft>
-            </a:pPr>
-            <a:r>
-              <a:rPr sz="1600" b="0">
+                <a:spcPts val="600"/>
+              </a:spcAft>
+            </a:pPr>
+            <a:r>
+              <a:rPr sz="1700" b="0">
                 <a:solidFill>
                   <a:srgbClr val="555555"/>
                 </a:solidFill>
                 <a:latin typeface="Meiryo UI"/>
               </a:rPr>
-              <a:t>① 降ってきた IPv6 の 決められた位置のビット が、</a:t>
+              <a:t>数十分で、ルータがこう言い出しました</a:t>
             </a:r>
           </a:p>
           <a:p>
             <a:pPr lvl="1" algn="l">
               <a:spcAft>
-                <a:spcPts val="500"/>
-              </a:spcAft>
-            </a:pPr>
-            <a:r>
-              <a:rPr sz="1600" b="0">
+                <a:spcPts val="600"/>
+              </a:spcAft>
+            </a:pPr>
+            <a:r>
+              <a:rPr sz="1700" b="0">
+                <a:solidFill>
+                  <a:srgbClr val="0B6040"/>
+                </a:solidFill>
+                <a:latin typeface="Consolas"/>
+              </a:rPr>
+              <a:t>%NAT-6-ADDR_ALLOC_FAILURE: ... pool 1 may be exhausted</a:t>
+            </a:r>
+          </a:p>
+          <a:p>
+            <a:pPr lvl="1" algn="l">
+              <a:spcAft>
+                <a:spcPts val="600"/>
+              </a:spcAft>
+            </a:pPr>
+            <a:r>
+              <a:rPr sz="1700" b="1">
+                <a:solidFill>
+                  <a:srgbClr val="C0392B"/>
+                </a:solidFill>
+                <a:latin typeface="Meiryo UI"/>
+              </a:rPr>
+              <a:t>= 割り当てられたポートを使い切った</a:t>
+            </a:r>
+          </a:p>
+          <a:p>
+            <a:pPr algn="l">
+              <a:spcAft>
+                <a:spcPts val="1000"/>
+              </a:spcAft>
+            </a:pPr>
+            <a:r>
+              <a:rPr sz="2000" b="1">
+                <a:solidFill>
+                  <a:srgbClr val="1F3355"/>
+                </a:solidFill>
+                <a:latin typeface="Meiryo UI"/>
+              </a:rPr>
+              <a:t>わざと枯らしたのではありません</a:t>
+            </a:r>
+          </a:p>
+          <a:p>
+            <a:pPr lvl="1" algn="l">
+              <a:spcAft>
+                <a:spcPts val="600"/>
+              </a:spcAft>
+            </a:pPr>
+            <a:r>
+              <a:rPr sz="1700" b="0">
                 <a:solidFill>
                   <a:srgbClr val="555555"/>
                 </a:solidFill>
                 <a:latin typeface="Meiryo UI"/>
               </a:rPr>
-              <a:t>   共有 IPv4 アドレスの一部 と 自分のポート番号の素 になります</a:t>
+              <a:t>Windows Update、テレメトリ、OneDrive — 裏で動くものだけで使い切ります</a:t>
             </a:r>
           </a:p>
           <a:p>
             <a:pPr lvl="1" algn="l">
               <a:spcAft>
-                <a:spcPts val="500"/>
-              </a:spcAft>
-            </a:pPr>
-            <a:r>
-              <a:rPr sz="1600" b="0">
+                <a:spcPts val="600"/>
+              </a:spcAft>
+            </a:pPr>
+            <a:r>
+              <a:rPr sz="1700" b="1">
+                <a:solidFill>
+                  <a:srgbClr val="C0392B"/>
+                </a:solidFill>
+                <a:latin typeface="Meiryo UI"/>
+              </a:rPr>
+              <a:t>人が 1 人も操作していない状態で、です</a:t>
+            </a:r>
+          </a:p>
+          <a:p>
+            <a:pPr algn="l">
+              <a:spcAft>
+                <a:spcPts val="1000"/>
+              </a:spcAft>
+            </a:pPr>
+            <a:r>
+              <a:rPr sz="2000" b="1">
+                <a:solidFill>
+                  <a:srgbClr val="1F3355"/>
+                </a:solidFill>
+                <a:latin typeface="Meiryo UI"/>
+              </a:rPr>
+              <a:t>だから拠点に PC が数十台ある環境では</a:t>
+            </a:r>
+          </a:p>
+          <a:p>
+            <a:pPr lvl="1" algn="l">
+              <a:spcAft>
+                <a:spcPts val="600"/>
+              </a:spcAft>
+            </a:pPr>
+            <a:r>
+              <a:rPr sz="1700" b="0">
                 <a:solidFill>
                   <a:srgbClr val="555555"/>
                 </a:solidFill>
                 <a:latin typeface="Meiryo UI"/>
               </a:rPr>
-              <a:t>② 計算するのは CPE です。人間が計算する場面はありません</a:t>
-            </a:r>
-          </a:p>
-          <a:p>
-            <a:pPr lvl="1" algn="l">
-              <a:spcAft>
-                <a:spcPts val="500"/>
-              </a:spcAft>
-            </a:pPr>
-            <a:r>
-              <a:rPr sz="1600" b="0">
-                <a:solidFill>
-                  <a:srgbClr val="555555"/>
-                </a:solidFill>
-                <a:latin typeface="Meiryo UI"/>
-              </a:rPr>
-              <a:t>③ だから「計算で一意に決まる = こちらでは選べない」。ここだけ覚えてください</a:t>
-            </a:r>
-          </a:p>
-          <a:p>
-            <a:pPr algn="l">
-              <a:spcAft>
-                <a:spcPts val="900"/>
-              </a:spcAft>
-            </a:pPr>
-            <a:r>
-              <a:rPr sz="1900" b="1">
-                <a:solidFill>
-                  <a:srgbClr val="C0392B"/>
-                </a:solidFill>
-                <a:latin typeface="Meiryo UI"/>
-              </a:rPr>
-              <a:t>「なんで 80 番が使えないの?」の答えもここです</a:t>
-            </a:r>
-          </a:p>
-          <a:p>
-            <a:pPr lvl="1" algn="l">
-              <a:spcAft>
-                <a:spcPts val="500"/>
-              </a:spcAft>
-            </a:pPr>
-            <a:r>
-              <a:rPr sz="1600" b="0">
-                <a:solidFill>
-                  <a:srgbClr val="555555"/>
-                </a:solidFill>
-                <a:latin typeface="Meiryo UI"/>
-              </a:rPr>
-              <a:t>ウェルノウンポート (0〜1023) は、どのサービスでも誰にも配られません</a:t>
-            </a:r>
-          </a:p>
-          <a:p>
-            <a:pPr lvl="1" algn="l">
-              <a:spcAft>
-                <a:spcPts val="500"/>
-              </a:spcAft>
-            </a:pPr>
-            <a:r>
-              <a:rPr sz="1600" b="0">
-                <a:solidFill>
-                  <a:srgbClr val="555555"/>
-                </a:solidFill>
-                <a:latin typeface="Meiryo UI"/>
-              </a:rPr>
-              <a:t>v6プラスのように、さらに広く (0〜4095) 除外するサービスもあります</a:t>
-            </a:r>
-          </a:p>
-          <a:p>
-            <a:pPr lvl="1" algn="l">
-              <a:spcAft>
-                <a:spcPts val="500"/>
-              </a:spcAft>
-            </a:pPr>
-            <a:r>
-              <a:rPr sz="1600" b="0">
-                <a:solidFill>
-                  <a:srgbClr val="555555"/>
-                </a:solidFill>
-                <a:latin typeface="Meiryo UI"/>
-              </a:rPr>
-              <a:t>選べないから 80 番が来ない、という順番です</a:t>
-            </a:r>
-          </a:p>
-          <a:p>
-            <a:pPr algn="l">
-              <a:spcAft>
-                <a:spcPts val="900"/>
-              </a:spcAft>
-            </a:pPr>
-            <a:r>
-              <a:rPr sz="1900" b="1">
-                <a:solidFill>
-                  <a:srgbClr val="C0392B"/>
-                </a:solidFill>
-                <a:latin typeface="Meiryo UI"/>
-              </a:rPr>
-              <a:t>※ 240 は「割当の構造値」です</a:t>
-            </a:r>
-          </a:p>
-          <a:p>
-            <a:pPr lvl="1" algn="l">
-              <a:spcAft>
-                <a:spcPts val="500"/>
-              </a:spcAft>
-            </a:pPr>
-            <a:r>
-              <a:rPr sz="1600" b="0">
-                <a:solidFill>
-                  <a:srgbClr val="555555"/>
-                </a:solidFill>
-                <a:latin typeface="Meiryo UI"/>
-              </a:rPr>
-              <a:t>うちの検証では、参照 CPE (OpenWrt) が実際に使えたのは 16 個でした</a:t>
-            </a:r>
-          </a:p>
-          <a:p>
-            <a:pPr lvl="1" algn="l">
-              <a:spcAft>
-                <a:spcPts val="500"/>
-              </a:spcAft>
-            </a:pPr>
-            <a:r>
-              <a:rPr sz="1600" b="0">
-                <a:solidFill>
-                  <a:srgbClr val="555555"/>
-                </a:solidFill>
-                <a:latin typeface="Meiryo UI"/>
-              </a:rPr>
-              <a:t>実機 C1111-8P は 割当範囲内のポート (4145) を使うことを確認済み</a:t>
-            </a:r>
-          </a:p>
-          <a:p>
-            <a:pPr lvl="1" algn="l">
-              <a:spcAft>
-                <a:spcPts val="500"/>
-              </a:spcAft>
-            </a:pPr>
-            <a:r>
-              <a:rPr sz="1600" b="0">
-                <a:solidFill>
-                  <a:srgbClr val="555555"/>
-                </a:solidFill>
-                <a:latin typeface="Meiryo UI"/>
-              </a:rPr>
-              <a:t>ただし 240 個を使い切れるかは未測定。案件ごとに数え直してください</a:t>
+              <a:t>「足りるかどうか」を必ず先に確認してください (次ページ)</a:t>
             </a:r>
           </a:p>
         </p:txBody>
@@ -11819,7 +12338,7 @@
                 </a:solidFill>
                 <a:latin typeface="Meiryo UI"/>
               </a:rPr>
-              <a:t>手計算のやり方を知りたい人へ: study-guide.md に例題があります。案件では不要です</a:t>
+              <a:t>PPPoE は約 64000 個を独り占めしていました。MAP-E はその約 1/270 です</a:t>
             </a:r>
           </a:p>
         </p:txBody>
@@ -11832,7 +12351,7 @@
 </p:sld>
 </file>
 
-<file path=ppt/slides/slide28.xml><?xml version="1.0" encoding="utf-8"?>
+<file path=ppt/slides/slide29.xml><?xml version="1.0" encoding="utf-8"?>
 <p:sld xmlns:a="http://schemas.openxmlformats.org/drawingml/2006/main" xmlns:p="http://schemas.openxmlformats.org/presentationml/2006/main" xmlns:r="http://schemas.openxmlformats.org/officeDocument/2006/relationships">
   <p:cSld>
     <p:spTree>
@@ -11872,7 +12391,7 @@
                 </a:solidFill>
                 <a:latin typeface="Meiryo UI"/>
               </a:rPr>
-              <a:t>では、その「計算のルール」はどこから来るのか — これが「自動設定」の正体</a:t>
+              <a:t>「計算で決まる」って、どういうこと?</a:t>
             </a:r>
           </a:p>
         </p:txBody>
@@ -11929,7 +12448,7 @@
         <p:spPr>
           <a:xfrm>
             <a:off x="594360" y="1371600"/>
-            <a:ext cx="10972800" cy="4983480"/>
+            <a:ext cx="10972800" cy="4709160"/>
           </a:xfrm>
           <a:prstGeom prst="rect">
             <a:avLst/>
@@ -11944,225 +12463,244 @@
           <a:p>
             <a:pPr algn="l">
               <a:spcAft>
-                <a:spcPts val="800"/>
-              </a:spcAft>
-            </a:pPr>
-            <a:r>
-              <a:rPr sz="1800" b="1">
+                <a:spcPts val="900"/>
+              </a:spcAft>
+            </a:pPr>
+            <a:r>
+              <a:rPr sz="1900" b="1">
                 <a:solidFill>
                   <a:srgbClr val="1F3355"/>
                 </a:solidFill>
                 <a:latin typeface="Meiryo UI"/>
               </a:rPr>
-              <a:t>計算するには、IPv6 の住所のほかに ルール が要ります</a:t>
+              <a:t>式は覚えなくていいです。知っておくべきは 3 つだけ</a:t>
             </a:r>
           </a:p>
           <a:p>
             <a:pPr lvl="1" algn="l">
               <a:spcAft>
-                <a:spcPts val="400"/>
-              </a:spcAft>
-            </a:pPr>
-            <a:r>
-              <a:rPr sz="1500" b="0">
+                <a:spcPts val="500"/>
+              </a:spcAft>
+            </a:pPr>
+            <a:r>
+              <a:rPr sz="1600" b="0">
                 <a:solidFill>
                   <a:srgbClr val="555555"/>
                 </a:solidFill>
                 <a:latin typeface="Meiryo UI"/>
               </a:rPr>
-              <a:t>「どのビットを使うのか」「どの IPv4 の帯を分け合うのか」</a:t>
+              <a:t>① 降ってきた IPv6 の 決められた位置のビット が、</a:t>
             </a:r>
           </a:p>
           <a:p>
             <a:pPr lvl="1" algn="l">
               <a:spcAft>
-                <a:spcPts val="400"/>
-              </a:spcAft>
-            </a:pPr>
-            <a:r>
-              <a:rPr sz="1500" b="0">
+                <a:spcPts val="500"/>
+              </a:spcAft>
+            </a:pPr>
+            <a:r>
+              <a:rPr sz="1600" b="0">
                 <a:solidFill>
                   <a:srgbClr val="555555"/>
                 </a:solidFill>
                 <a:latin typeface="Meiryo UI"/>
               </a:rPr>
-              <a:t>このルールは CPE が事業者のサーバから自動で取ってきます</a:t>
+              <a:t>   共有 IPv4 アドレスの一部 と 自分のポート番号の素 になります</a:t>
+            </a:r>
+          </a:p>
+          <a:p>
+            <a:pPr lvl="1" algn="l">
+              <a:spcAft>
+                <a:spcPts val="500"/>
+              </a:spcAft>
+            </a:pPr>
+            <a:r>
+              <a:rPr sz="1600" b="0">
+                <a:solidFill>
+                  <a:srgbClr val="555555"/>
+                </a:solidFill>
+                <a:latin typeface="Meiryo UI"/>
+              </a:rPr>
+              <a:t>② 計算するのは CPE です。人間が計算する場面はありません</a:t>
+            </a:r>
+          </a:p>
+          <a:p>
+            <a:pPr lvl="1" algn="l">
+              <a:spcAft>
+                <a:spcPts val="500"/>
+              </a:spcAft>
+            </a:pPr>
+            <a:r>
+              <a:rPr sz="1600" b="0">
+                <a:solidFill>
+                  <a:srgbClr val="555555"/>
+                </a:solidFill>
+                <a:latin typeface="Meiryo UI"/>
+              </a:rPr>
+              <a:t>③ だから「計算で一意に決まる = こちらでは選べない」。ここだけ覚えてください</a:t>
             </a:r>
           </a:p>
           <a:p>
             <a:pPr algn="l">
               <a:spcAft>
-                <a:spcPts val="800"/>
-              </a:spcAft>
-            </a:pPr>
-            <a:r>
-              <a:rPr sz="1800" b="1">
-                <a:solidFill>
-                  <a:srgbClr val="1F3355"/>
-                </a:solidFill>
-                <a:latin typeface="Meiryo UI"/>
-              </a:rPr>
-              <a:t>起動してから通信できるまで</a:t>
+                <a:spcPts val="900"/>
+              </a:spcAft>
+            </a:pPr>
+            <a:r>
+              <a:rPr sz="1900" b="1">
+                <a:solidFill>
+                  <a:srgbClr val="C0392B"/>
+                </a:solidFill>
+                <a:latin typeface="Meiryo UI"/>
+              </a:rPr>
+              <a:t>「なんで 80 番が使えないの?」の答えもここです</a:t>
             </a:r>
           </a:p>
           <a:p>
             <a:pPr lvl="1" algn="l">
               <a:spcAft>
-                <a:spcPts val="400"/>
-              </a:spcAft>
-            </a:pPr>
-            <a:r>
-              <a:rPr sz="1500" b="0">
-                <a:solidFill>
-                  <a:srgbClr val="0B6040"/>
-                </a:solidFill>
-                <a:latin typeface="Consolas"/>
-              </a:rPr>
-              <a:t>① CPE が起動する</a:t>
+                <a:spcPts val="500"/>
+              </a:spcAft>
+            </a:pPr>
+            <a:r>
+              <a:rPr sz="1600" b="0">
+                <a:solidFill>
+                  <a:srgbClr val="555555"/>
+                </a:solidFill>
+                <a:latin typeface="Meiryo UI"/>
+              </a:rPr>
+              <a:t>ウェルノウンポート (0〜1023) は、どのサービスでも誰にも配られません</a:t>
             </a:r>
           </a:p>
           <a:p>
             <a:pPr lvl="1" algn="l">
               <a:spcAft>
-                <a:spcPts val="400"/>
-              </a:spcAft>
-            </a:pPr>
-            <a:r>
-              <a:rPr sz="1500" b="0">
-                <a:solidFill>
-                  <a:srgbClr val="0B6040"/>
-                </a:solidFill>
-                <a:latin typeface="Consolas"/>
-              </a:rPr>
-              <a:t>② 事業者のルール配布サーバに HTTPS で問い合わせる</a:t>
+                <a:spcPts val="500"/>
+              </a:spcAft>
+            </a:pPr>
+            <a:r>
+              <a:rPr sz="1600" b="0">
+                <a:solidFill>
+                  <a:srgbClr val="555555"/>
+                </a:solidFill>
+                <a:latin typeface="Meiryo UI"/>
+              </a:rPr>
+              <a:t>v6プラスのように、さらに広く (0〜4095) 除外するサービスもあります</a:t>
             </a:r>
           </a:p>
           <a:p>
             <a:pPr lvl="1" algn="l">
               <a:spcAft>
-                <a:spcPts val="400"/>
-              </a:spcAft>
-            </a:pPr>
-            <a:r>
-              <a:rPr sz="1500" b="0">
-                <a:solidFill>
-                  <a:srgbClr val="0B6040"/>
-                </a:solidFill>
-                <a:latin typeface="Consolas"/>
-              </a:rPr>
-              <a:t>     「私の IPv6 は 2001:db8:1014:300:: です。ルールをください」</a:t>
+                <a:spcPts val="500"/>
+              </a:spcAft>
+            </a:pPr>
+            <a:r>
+              <a:rPr sz="1600" b="0">
+                <a:solidFill>
+                  <a:srgbClr val="555555"/>
+                </a:solidFill>
+                <a:latin typeface="Meiryo UI"/>
+              </a:rPr>
+              <a:t>選べないから 80 番が来ない、という順番です</a:t>
+            </a:r>
+          </a:p>
+          <a:p>
+            <a:pPr algn="l">
+              <a:spcAft>
+                <a:spcPts val="900"/>
+              </a:spcAft>
+            </a:pPr>
+            <a:r>
+              <a:rPr sz="1900" b="1">
+                <a:solidFill>
+                  <a:srgbClr val="C0392B"/>
+                </a:solidFill>
+                <a:latin typeface="Meiryo UI"/>
+              </a:rPr>
+              <a:t>※ 240 は「事業者が割り当てる数」。実際に使える数は CPE 次第で下がります</a:t>
             </a:r>
           </a:p>
           <a:p>
             <a:pPr lvl="1" algn="l">
               <a:spcAft>
-                <a:spcPts val="400"/>
-              </a:spcAft>
-            </a:pPr>
-            <a:r>
-              <a:rPr sz="1500" b="0">
-                <a:solidFill>
-                  <a:srgbClr val="0B6040"/>
-                </a:solidFill>
-                <a:latin typeface="Consolas"/>
-              </a:rPr>
-              <a:t>③ サーバがルールを返す 「この帯を、この分け方で使ってください」</a:t>
+                <a:spcPts val="500"/>
+              </a:spcAft>
+            </a:pPr>
+            <a:r>
+              <a:rPr sz="1600" b="0">
+                <a:solidFill>
+                  <a:srgbClr val="555555"/>
+                </a:solidFill>
+                <a:latin typeface="Meiryo UI"/>
+              </a:rPr>
+              <a:t>実機 Cisco C1111-8P … 割当どおりに使い、240 を使い切って枯渇しました</a:t>
             </a:r>
           </a:p>
           <a:p>
             <a:pPr lvl="1" algn="l">
               <a:spcAft>
-                <a:spcPts val="400"/>
-              </a:spcAft>
-            </a:pPr>
-            <a:r>
-              <a:rPr sz="1500" b="0">
-                <a:solidFill>
-                  <a:srgbClr val="0B6040"/>
-                </a:solidFill>
-                <a:latin typeface="Consolas"/>
-              </a:rPr>
-              <a:t>④ CPE が 自分の IPv6 と ルール から IPv4 とポート範囲を計算する</a:t>
-            </a:r>
-          </a:p>
-          <a:p>
-            <a:pPr algn="l">
-              <a:spcAft>
-                <a:spcPts val="800"/>
-              </a:spcAft>
-            </a:pPr>
-            <a:r>
-              <a:rPr sz="1800" b="1">
+                <a:spcPts val="500"/>
+              </a:spcAft>
+            </a:pPr>
+            <a:r>
+              <a:rPr sz="1600" b="0">
+                <a:solidFill>
+                  <a:srgbClr val="555555"/>
+                </a:solidFill>
+                <a:latin typeface="Meiryo UI"/>
+              </a:rPr>
+              <a:t>参照用の OpenWrt   … ラボの設定の癖で 16 個しか使えませんでした</a:t>
+            </a:r>
+          </a:p>
+          <a:p>
+            <a:pPr lvl="1" algn="l">
+              <a:spcAft>
+                <a:spcPts val="500"/>
+              </a:spcAft>
+            </a:pPr>
+            <a:r>
+              <a:rPr sz="1600" b="1">
                 <a:solidFill>
                   <a:srgbClr val="C0392B"/>
                 </a:solidFill>
                 <a:latin typeface="Meiryo UI"/>
               </a:rPr>
-              <a:t>人が設定する場面はどこにもありません</a:t>
-            </a:r>
-          </a:p>
-          <a:p>
-            <a:pPr lvl="1" algn="l">
-              <a:spcAft>
-                <a:spcPts val="400"/>
-              </a:spcAft>
-            </a:pPr>
-            <a:r>
-              <a:rPr sz="1500" b="0">
-                <a:solidFill>
-                  <a:srgbClr val="555555"/>
-                </a:solidFill>
-                <a:latin typeface="Meiryo UI"/>
-              </a:rPr>
-              <a:t>「MAP-E に対応している」= この一連を自動でやれる、という意味です</a:t>
-            </a:r>
-          </a:p>
-          <a:p>
-            <a:pPr lvl="1" algn="l">
-              <a:spcAft>
-                <a:spcPts val="400"/>
-              </a:spcAft>
-            </a:pPr>
-            <a:r>
-              <a:rPr sz="1500" b="0">
-                <a:solidFill>
-                  <a:srgbClr val="555555"/>
-                </a:solidFill>
-                <a:latin typeface="Meiryo UI"/>
-              </a:rPr>
-              <a:t>対応表に無い機種で手動設定しても、この仕組みの外側なので噛み合いません</a:t>
-            </a:r>
-          </a:p>
-          <a:p>
-            <a:pPr algn="l">
-              <a:spcAft>
-                <a:spcPts val="800"/>
-              </a:spcAft>
-            </a:pPr>
-            <a:r>
-              <a:rPr sz="1800" b="1">
-                <a:solidFill>
-                  <a:srgbClr val="C0392B"/>
-                </a:solidFill>
-                <a:latin typeface="Meiryo UI"/>
-              </a:rPr>
-              <a:t>うちの検証環境にも、このサーバがありませんでした</a:t>
-            </a:r>
-          </a:p>
-          <a:p>
-            <a:pPr lvl="1" algn="l">
-              <a:spcAft>
-                <a:spcPts val="400"/>
-              </a:spcAft>
-            </a:pPr>
-            <a:r>
-              <a:rPr sz="1500" b="0">
-                <a:solidFill>
-                  <a:srgbClr val="555555"/>
-                </a:solidFill>
-                <a:latin typeface="Meiryo UI"/>
-              </a:rPr>
-              <a:t>だから長いあいだ 本番には存在しないやり方 で検証していました (第4部 ④)</a:t>
+              <a:t>→ 数字が減る方向にしかブレません。**案件では実機で数え直してください**</a:t>
+            </a:r>
+          </a:p>
+        </p:txBody>
+      </p:sp>
+      <p:sp>
+        <p:nvSpPr>
+          <p:cNvPr id="5" name="TextBox 4"/>
+          <p:cNvSpPr txBox="1"/>
+          <p:nvPr/>
+        </p:nvSpPr>
+        <p:spPr>
+          <a:xfrm>
+            <a:off x="594360" y="6217920"/>
+            <a:ext cx="10972800" cy="502920"/>
+          </a:xfrm>
+          <a:prstGeom prst="rect">
+            <a:avLst/>
+          </a:prstGeom>
+          <a:noFill/>
+        </p:spPr>
+        <p:txBody>
+          <a:bodyPr wrap="square">
+            <a:spAutoFit/>
+          </a:bodyPr>
+          <a:lstStyle/>
+          <a:p>
+            <a:pPr algn="l"/>
+            <a:r>
+              <a:rPr sz="1200" b="0">
+                <a:solidFill>
+                  <a:srgbClr val="007ACC"/>
+                </a:solidFill>
+                <a:latin typeface="Meiryo UI"/>
+              </a:rPr>
+              <a:t>手計算のやり方を知りたい人へ: study-guide.md に例題があります。案件では不要です</a:t>
             </a:r>
           </a:p>
         </p:txBody>
@@ -12175,7 +12713,7 @@
 </p:sld>
 </file>
 
-<file path=ppt/slides/slide29.xml><?xml version="1.0" encoding="utf-8"?>
+<file path=ppt/slides/slide3.xml><?xml version="1.0" encoding="utf-8"?>
 <p:sld xmlns:a="http://schemas.openxmlformats.org/drawingml/2006/main" xmlns:p="http://schemas.openxmlformats.org/presentationml/2006/main" xmlns:r="http://schemas.openxmlformats.org/officeDocument/2006/relationships">
   <p:cSld>
     <p:spTree>
@@ -12215,7 +12753,7 @@
                 </a:solidFill>
                 <a:latin typeface="Meiryo UI"/>
               </a:rPr>
-              <a:t>「同時接続数を実測」って、どうやるのか</a:t>
+              <a:t>今日 持ち帰ってほしいこと</a:t>
             </a:r>
           </a:p>
         </p:txBody>
@@ -12287,225 +12825,193 @@
           <a:p>
             <a:pPr algn="l">
               <a:spcAft>
-                <a:spcPts val="800"/>
-              </a:spcAft>
-            </a:pPr>
-            <a:r>
-              <a:rPr sz="1800" b="1">
+                <a:spcPts val="1000"/>
+              </a:spcAft>
+            </a:pPr>
+            <a:r>
+              <a:rPr sz="2000" b="1">
                 <a:solidFill>
                   <a:srgbClr val="1F3355"/>
                 </a:solidFill>
                 <a:latin typeface="Meiryo UI"/>
               </a:rPr>
-              <a:t>240 個で足りるかどうかは、測らないと分かりません</a:t>
+              <a:t>3 つだけです</a:t>
             </a:r>
           </a:p>
           <a:p>
             <a:pPr lvl="1" algn="l">
               <a:spcAft>
-                <a:spcPts val="400"/>
-              </a:spcAft>
-            </a:pPr>
-            <a:r>
-              <a:rPr sz="1500" b="0">
+                <a:spcPts val="600"/>
+              </a:spcAft>
+            </a:pPr>
+            <a:r>
+              <a:rPr sz="1700" b="0">
                 <a:solidFill>
                   <a:srgbClr val="555555"/>
                 </a:solidFill>
                 <a:latin typeface="Meiryo UI"/>
               </a:rPr>
-              <a:t>既設ルータで NAT のテーブル数を数えます</a:t>
+              <a:t>① なぜ IPv6 に変えるのか — 「アドレスが枯渇したから」ではありません</a:t>
             </a:r>
           </a:p>
           <a:p>
             <a:pPr lvl="1" algn="l">
               <a:spcAft>
-                <a:spcPts val="400"/>
-              </a:spcAft>
-            </a:pPr>
-            <a:r>
-              <a:rPr sz="1500" b="0">
-                <a:solidFill>
-                  <a:srgbClr val="0B6040"/>
-                </a:solidFill>
-                <a:latin typeface="Consolas"/>
-              </a:rPr>
-              <a:t>Cisco なら show ip nat translations の行数</a:t>
+                <a:spcPts val="600"/>
+              </a:spcAft>
+            </a:pPr>
+            <a:r>
+              <a:rPr sz="1700" b="0">
+                <a:solidFill>
+                  <a:srgbClr val="555555"/>
+                </a:solidFill>
+                <a:latin typeface="Meiryo UI"/>
+              </a:rPr>
+              <a:t>② お客様の回線がどの方式か、商品名から言えるようになる (v6プラス、transix など)</a:t>
             </a:r>
           </a:p>
           <a:p>
             <a:pPr lvl="1" algn="l">
               <a:spcAft>
-                <a:spcPts val="400"/>
-              </a:spcAft>
-            </a:pPr>
-            <a:r>
-              <a:rPr sz="1500" b="0">
+                <a:spcPts val="600"/>
+              </a:spcAft>
+            </a:pPr>
+            <a:r>
+              <a:rPr sz="1700" b="0">
                 <a:solidFill>
                   <a:srgbClr val="555555"/>
                 </a:solidFill>
                 <a:latin typeface="Meiryo UI"/>
               </a:rPr>
-              <a:t>業務時間帯に何回か測ってください。昼休みと夕方でまったく違います</a:t>
+              <a:t>③ 「ポート開放できますか?」に即答できるようになる</a:t>
             </a:r>
           </a:p>
           <a:p>
             <a:pPr algn="l">
               <a:spcAft>
-                <a:spcPts val="800"/>
-              </a:spcAft>
-            </a:pPr>
-            <a:r>
-              <a:rPr sz="1800" b="1">
+                <a:spcPts val="1000"/>
+              </a:spcAft>
+            </a:pPr>
+            <a:r>
+              <a:rPr sz="2000" b="1">
+                <a:solidFill>
+                  <a:srgbClr val="1F3355"/>
+                </a:solidFill>
+                <a:latin typeface="Meiryo UI"/>
+              </a:rPr>
+              <a:t>話す順番 — 大きい話から細かい話へ降ります</a:t>
+            </a:r>
+          </a:p>
+          <a:p>
+            <a:pPr lvl="1" algn="l">
+              <a:spcAft>
+                <a:spcPts val="600"/>
+              </a:spcAft>
+            </a:pPr>
+            <a:r>
+              <a:rPr sz="1700" b="0">
+                <a:solidFill>
+                  <a:srgbClr val="555555"/>
+                </a:solidFill>
+                <a:latin typeface="Meiryo UI"/>
+              </a:rPr>
+              <a:t>第0部  なぜこの話をするのか</a:t>
+            </a:r>
+          </a:p>
+          <a:p>
+            <a:pPr lvl="1" algn="l">
+              <a:spcAft>
+                <a:spcPts val="600"/>
+              </a:spcAft>
+            </a:pPr>
+            <a:r>
+              <a:rPr sz="1700" b="0">
+                <a:solidFill>
+                  <a:srgbClr val="555555"/>
+                </a:solidFill>
+                <a:latin typeface="Meiryo UI"/>
+              </a:rPr>
+              <a:t>第1部  IPv6 そのもの — どこの国でも同じ話</a:t>
+            </a:r>
+          </a:p>
+          <a:p>
+            <a:pPr lvl="1" algn="l">
+              <a:spcAft>
+                <a:spcPts val="600"/>
+              </a:spcAft>
+            </a:pPr>
+            <a:r>
+              <a:rPr sz="1700" b="0">
+                <a:solidFill>
+                  <a:srgbClr val="555555"/>
+                </a:solidFill>
+                <a:latin typeface="Meiryo UI"/>
+              </a:rPr>
+              <a:t>第2部  日本の回線 — ここからは日本だけの話</a:t>
+            </a:r>
+          </a:p>
+          <a:p>
+            <a:pPr lvl="1" algn="l">
+              <a:spcAft>
+                <a:spcPts val="600"/>
+              </a:spcAft>
+            </a:pPr>
+            <a:r>
+              <a:rPr sz="1700" b="0">
+                <a:solidFill>
+                  <a:srgbClr val="555555"/>
+                </a:solidFill>
+                <a:latin typeface="Meiryo UI"/>
+              </a:rPr>
+              <a:t>第3部  IPv4 をどうやって運ぶか — 今日の本題</a:t>
+            </a:r>
+          </a:p>
+          <a:p>
+            <a:pPr lvl="1" algn="l">
+              <a:spcAft>
+                <a:spcPts val="600"/>
+              </a:spcAft>
+            </a:pPr>
+            <a:r>
+              <a:rPr sz="1700" b="0">
+                <a:solidFill>
+                  <a:srgbClr val="555555"/>
+                </a:solidFill>
+                <a:latin typeface="Meiryo UI"/>
+              </a:rPr>
+              <a:t>第4部  検証環境で実際に見たもの</a:t>
+            </a:r>
+          </a:p>
+          <a:p>
+            <a:pPr algn="l">
+              <a:spcAft>
+                <a:spcPts val="1000"/>
+              </a:spcAft>
+            </a:pPr>
+            <a:r>
+              <a:rPr sz="2000" b="1">
                 <a:solidFill>
                   <a:srgbClr val="C0392B"/>
                 </a:solidFill>
                 <a:latin typeface="Meiryo UI"/>
               </a:rPr>
-              <a:t>目安は出せません</a:t>
-            </a:r>
-          </a:p>
-          <a:p>
-            <a:pPr lvl="1" algn="l">
-              <a:spcAft>
-                <a:spcPts val="400"/>
-              </a:spcAft>
-            </a:pPr>
-            <a:r>
-              <a:rPr sz="1500" b="0">
-                <a:solidFill>
-                  <a:srgbClr val="555555"/>
-                </a:solidFill>
-                <a:latin typeface="Meiryo UI"/>
-              </a:rPr>
-              <a:t>台数、業務アプリ、監視の有無で変わるので、他社の数字は当てになりません</a:t>
-            </a:r>
-          </a:p>
-          <a:p>
-            <a:pPr lvl="1" algn="l">
-              <a:spcAft>
-                <a:spcPts val="400"/>
-              </a:spcAft>
-            </a:pPr>
-            <a:r>
-              <a:rPr sz="1500" b="1">
-                <a:solidFill>
-                  <a:srgbClr val="C0392B"/>
-                </a:solidFill>
-                <a:latin typeface="Meiryo UI"/>
-              </a:rPr>
-              <a:t>「PC 30 台だから大丈夫」のような机上判断はしないでください</a:t>
+              <a:t>迷ったらこのページに戻ってください。どこの話か分かれば必ずついてこられます</a:t>
             </a:r>
           </a:p>
           <a:p>
             <a:pPr algn="l">
               <a:spcAft>
-                <a:spcPts val="800"/>
-              </a:spcAft>
-            </a:pPr>
-            <a:r>
-              <a:rPr sz="1800" b="1">
+                <a:spcPts val="1000"/>
+              </a:spcAft>
+            </a:pPr>
+            <a:r>
+              <a:rPr sz="2000" b="0">
                 <a:solidFill>
                   <a:srgbClr val="1F3355"/>
                 </a:solidFill>
                 <a:latin typeface="Meiryo UI"/>
               </a:rPr>
-              <a:t>測ったあと、どう判断するか — 型を決めておきます</a:t>
-            </a:r>
-          </a:p>
-          <a:p>
-            <a:pPr lvl="1" algn="l">
-              <a:spcAft>
-                <a:spcPts val="400"/>
-              </a:spcAft>
-            </a:pPr>
-            <a:r>
-              <a:rPr sz="1500" b="1">
-                <a:solidFill>
-                  <a:srgbClr val="C0392B"/>
-                </a:solidFill>
-                <a:latin typeface="Meiryo UI"/>
-              </a:rPr>
-              <a:t>ピークの実測値 × 安全率 2 倍 が 割当ポート数を超えたら、MAP-E 単独は避ける</a:t>
-            </a:r>
-          </a:p>
-          <a:p>
-            <a:pPr lvl="1" algn="l">
-              <a:spcAft>
-                <a:spcPts val="400"/>
-              </a:spcAft>
-            </a:pPr>
-            <a:r>
-              <a:rPr sz="1500" b="0">
-                <a:solidFill>
-                  <a:srgbClr val="0B6040"/>
-                </a:solidFill>
-                <a:latin typeface="Consolas"/>
-              </a:rPr>
-              <a:t>例: ピーク 180 本 × 2 = 360 &gt; 240 → 固定 IP か PPPoE 併用に倒す</a:t>
-            </a:r>
-          </a:p>
-          <a:p>
-            <a:pPr lvl="1" algn="l">
-              <a:spcAft>
-                <a:spcPts val="400"/>
-              </a:spcAft>
-            </a:pPr>
-            <a:r>
-              <a:rPr sz="1500" b="0">
-                <a:solidFill>
-                  <a:srgbClr val="555555"/>
-                </a:solidFill>
-                <a:latin typeface="Meiryo UI"/>
-              </a:rPr>
-              <a:t>※ 安全率 2 倍は「この資料での仮置き」です。実績が貯まるまで社内で決め直してください</a:t>
-            </a:r>
-          </a:p>
-          <a:p>
-            <a:pPr algn="l">
-              <a:spcAft>
-                <a:spcPts val="800"/>
-              </a:spcAft>
-            </a:pPr>
-            <a:r>
-              <a:rPr sz="1800" b="1">
-                <a:solidFill>
-                  <a:srgbClr val="1F3355"/>
-                </a:solidFill>
-                <a:latin typeface="Meiryo UI"/>
-              </a:rPr>
-              <a:t>足りないと分かったら</a:t>
-            </a:r>
-          </a:p>
-          <a:p>
-            <a:pPr lvl="1" algn="l">
-              <a:spcAft>
-                <a:spcPts val="400"/>
-              </a:spcAft>
-            </a:pPr>
-            <a:r>
-              <a:rPr sz="1500" b="0">
-                <a:solidFill>
-                  <a:srgbClr val="555555"/>
-                </a:solidFill>
-                <a:latin typeface="Meiryo UI"/>
-              </a:rPr>
-              <a:t>MAP-E でもポート数の多い VNE を選べることがあります (OCN VC は 1008)</a:t>
-            </a:r>
-          </a:p>
-          <a:p>
-            <a:pPr lvl="1" algn="l">
-              <a:spcAft>
-                <a:spcPts val="400"/>
-              </a:spcAft>
-            </a:pPr>
-            <a:r>
-              <a:rPr sz="1500" b="0">
-                <a:solidFill>
-                  <a:srgbClr val="555555"/>
-                </a:solidFill>
-                <a:latin typeface="Meiryo UI"/>
-              </a:rPr>
-              <a:t>ただし VNE は選べないことが多いので、固定 IP か PPPoE 併用の検討になります</a:t>
+              <a:t>※ 配布資料の巻末に「想定問答」8 問があります。あとで読んでください</a:t>
             </a:r>
           </a:p>
         </p:txBody>
@@ -12518,7 +13024,7 @@
 </p:sld>
 </file>
 
-<file path=ppt/slides/slide3.xml><?xml version="1.0" encoding="utf-8"?>
+<file path=ppt/slides/slide30.xml><?xml version="1.0" encoding="utf-8"?>
 <p:sld xmlns:a="http://schemas.openxmlformats.org/drawingml/2006/main" xmlns:p="http://schemas.openxmlformats.org/presentationml/2006/main" xmlns:r="http://schemas.openxmlformats.org/officeDocument/2006/relationships">
   <p:cSld>
     <p:spTree>
@@ -12558,7 +13064,7 @@
                 </a:solidFill>
                 <a:latin typeface="Meiryo UI"/>
               </a:rPr>
-              <a:t>今日 持ち帰ってほしいこと</a:t>
+              <a:t>では、その「計算のルール」はどこから来るのか — これが「自動設定」の正体</a:t>
             </a:r>
           </a:p>
         </p:txBody>
@@ -12630,193 +13136,225 @@
           <a:p>
             <a:pPr algn="l">
               <a:spcAft>
-                <a:spcPts val="1000"/>
-              </a:spcAft>
-            </a:pPr>
-            <a:r>
-              <a:rPr sz="2000" b="1">
+                <a:spcPts val="800"/>
+              </a:spcAft>
+            </a:pPr>
+            <a:r>
+              <a:rPr sz="1800" b="1">
                 <a:solidFill>
                   <a:srgbClr val="1F3355"/>
                 </a:solidFill>
                 <a:latin typeface="Meiryo UI"/>
               </a:rPr>
-              <a:t>3 つだけです</a:t>
+              <a:t>計算するには、IPv6 の住所のほかに ルール が要ります</a:t>
             </a:r>
           </a:p>
           <a:p>
             <a:pPr lvl="1" algn="l">
               <a:spcAft>
-                <a:spcPts val="600"/>
-              </a:spcAft>
-            </a:pPr>
-            <a:r>
-              <a:rPr sz="1700" b="0">
+                <a:spcPts val="400"/>
+              </a:spcAft>
+            </a:pPr>
+            <a:r>
+              <a:rPr sz="1500" b="0">
                 <a:solidFill>
                   <a:srgbClr val="555555"/>
                 </a:solidFill>
                 <a:latin typeface="Meiryo UI"/>
               </a:rPr>
-              <a:t>① なぜ IPv6 に変えるのか — 「アドレスが枯渇したから」ではありません</a:t>
+              <a:t>「どのビットを使うのか」「どの IPv4 の帯を分け合うのか」</a:t>
             </a:r>
           </a:p>
           <a:p>
             <a:pPr lvl="1" algn="l">
               <a:spcAft>
-                <a:spcPts val="600"/>
-              </a:spcAft>
-            </a:pPr>
-            <a:r>
-              <a:rPr sz="1700" b="0">
+                <a:spcPts val="400"/>
+              </a:spcAft>
+            </a:pPr>
+            <a:r>
+              <a:rPr sz="1500" b="0">
                 <a:solidFill>
                   <a:srgbClr val="555555"/>
                 </a:solidFill>
                 <a:latin typeface="Meiryo UI"/>
               </a:rPr>
-              <a:t>② お客様の回線がどの方式か、商品名から言えるようになる (v6プラス、transix など)</a:t>
+              <a:t>このルールは CPE が事業者のサーバから自動で取ってきます</a:t>
+            </a:r>
+          </a:p>
+          <a:p>
+            <a:pPr algn="l">
+              <a:spcAft>
+                <a:spcPts val="800"/>
+              </a:spcAft>
+            </a:pPr>
+            <a:r>
+              <a:rPr sz="1800" b="1">
+                <a:solidFill>
+                  <a:srgbClr val="1F3355"/>
+                </a:solidFill>
+                <a:latin typeface="Meiryo UI"/>
+              </a:rPr>
+              <a:t>起動してから通信できるまで</a:t>
             </a:r>
           </a:p>
           <a:p>
             <a:pPr lvl="1" algn="l">
               <a:spcAft>
-                <a:spcPts val="600"/>
-              </a:spcAft>
-            </a:pPr>
-            <a:r>
-              <a:rPr sz="1700" b="0">
+                <a:spcPts val="400"/>
+              </a:spcAft>
+            </a:pPr>
+            <a:r>
+              <a:rPr sz="1500" b="0">
+                <a:solidFill>
+                  <a:srgbClr val="0B6040"/>
+                </a:solidFill>
+                <a:latin typeface="Consolas"/>
+              </a:rPr>
+              <a:t>① CPE が起動する</a:t>
+            </a:r>
+          </a:p>
+          <a:p>
+            <a:pPr lvl="1" algn="l">
+              <a:spcAft>
+                <a:spcPts val="400"/>
+              </a:spcAft>
+            </a:pPr>
+            <a:r>
+              <a:rPr sz="1500" b="0">
+                <a:solidFill>
+                  <a:srgbClr val="0B6040"/>
+                </a:solidFill>
+                <a:latin typeface="Consolas"/>
+              </a:rPr>
+              <a:t>② 事業者のルール配布サーバに HTTPS で問い合わせる</a:t>
+            </a:r>
+          </a:p>
+          <a:p>
+            <a:pPr lvl="1" algn="l">
+              <a:spcAft>
+                <a:spcPts val="400"/>
+              </a:spcAft>
+            </a:pPr>
+            <a:r>
+              <a:rPr sz="1500" b="0">
+                <a:solidFill>
+                  <a:srgbClr val="0B6040"/>
+                </a:solidFill>
+                <a:latin typeface="Consolas"/>
+              </a:rPr>
+              <a:t>     「私の IPv6 は 2001:db8:1014:300:: です。ルールをください」</a:t>
+            </a:r>
+          </a:p>
+          <a:p>
+            <a:pPr lvl="1" algn="l">
+              <a:spcAft>
+                <a:spcPts val="400"/>
+              </a:spcAft>
+            </a:pPr>
+            <a:r>
+              <a:rPr sz="1500" b="0">
+                <a:solidFill>
+                  <a:srgbClr val="0B6040"/>
+                </a:solidFill>
+                <a:latin typeface="Consolas"/>
+              </a:rPr>
+              <a:t>③ サーバがルールを返す 「この帯を、この分け方で使ってください」</a:t>
+            </a:r>
+          </a:p>
+          <a:p>
+            <a:pPr lvl="1" algn="l">
+              <a:spcAft>
+                <a:spcPts val="400"/>
+              </a:spcAft>
+            </a:pPr>
+            <a:r>
+              <a:rPr sz="1500" b="0">
+                <a:solidFill>
+                  <a:srgbClr val="0B6040"/>
+                </a:solidFill>
+                <a:latin typeface="Consolas"/>
+              </a:rPr>
+              <a:t>④ CPE が 自分の IPv6 と ルール から IPv4 とポート範囲を計算する</a:t>
+            </a:r>
+          </a:p>
+          <a:p>
+            <a:pPr algn="l">
+              <a:spcAft>
+                <a:spcPts val="800"/>
+              </a:spcAft>
+            </a:pPr>
+            <a:r>
+              <a:rPr sz="1800" b="1">
+                <a:solidFill>
+                  <a:srgbClr val="C0392B"/>
+                </a:solidFill>
+                <a:latin typeface="Meiryo UI"/>
+              </a:rPr>
+              <a:t>人が設定する場面はどこにもありません</a:t>
+            </a:r>
+          </a:p>
+          <a:p>
+            <a:pPr lvl="1" algn="l">
+              <a:spcAft>
+                <a:spcPts val="400"/>
+              </a:spcAft>
+            </a:pPr>
+            <a:r>
+              <a:rPr sz="1500" b="0">
                 <a:solidFill>
                   <a:srgbClr val="555555"/>
                 </a:solidFill>
                 <a:latin typeface="Meiryo UI"/>
               </a:rPr>
-              <a:t>③ 「ポート開放できますか?」に即答できるようになる</a:t>
+              <a:t>「MAP-E に対応している」= この一連を自動でやれる、という意味です</a:t>
+            </a:r>
+          </a:p>
+          <a:p>
+            <a:pPr lvl="1" algn="l">
+              <a:spcAft>
+                <a:spcPts val="400"/>
+              </a:spcAft>
+            </a:pPr>
+            <a:r>
+              <a:rPr sz="1500" b="0">
+                <a:solidFill>
+                  <a:srgbClr val="555555"/>
+                </a:solidFill>
+                <a:latin typeface="Meiryo UI"/>
+              </a:rPr>
+              <a:t>対応表に無い機種で手動設定しても、この仕組みの外側なので噛み合いません</a:t>
             </a:r>
           </a:p>
           <a:p>
             <a:pPr algn="l">
               <a:spcAft>
-                <a:spcPts val="1000"/>
-              </a:spcAft>
-            </a:pPr>
-            <a:r>
-              <a:rPr sz="2000" b="1">
-                <a:solidFill>
-                  <a:srgbClr val="1F3355"/>
-                </a:solidFill>
-                <a:latin typeface="Meiryo UI"/>
-              </a:rPr>
-              <a:t>話す順番 — 大きい話から細かい話へ降ります</a:t>
+                <a:spcPts val="800"/>
+              </a:spcAft>
+            </a:pPr>
+            <a:r>
+              <a:rPr sz="1800" b="1">
+                <a:solidFill>
+                  <a:srgbClr val="C0392B"/>
+                </a:solidFill>
+                <a:latin typeface="Meiryo UI"/>
+              </a:rPr>
+              <a:t>うちの検証環境にも、このサーバがありませんでした</a:t>
             </a:r>
           </a:p>
           <a:p>
             <a:pPr lvl="1" algn="l">
               <a:spcAft>
-                <a:spcPts val="600"/>
-              </a:spcAft>
-            </a:pPr>
-            <a:r>
-              <a:rPr sz="1700" b="0">
+                <a:spcPts val="400"/>
+              </a:spcAft>
+            </a:pPr>
+            <a:r>
+              <a:rPr sz="1500" b="0">
                 <a:solidFill>
                   <a:srgbClr val="555555"/>
                 </a:solidFill>
                 <a:latin typeface="Meiryo UI"/>
               </a:rPr>
-              <a:t>第0部  なぜこの話をするのか</a:t>
-            </a:r>
-          </a:p>
-          <a:p>
-            <a:pPr lvl="1" algn="l">
-              <a:spcAft>
-                <a:spcPts val="600"/>
-              </a:spcAft>
-            </a:pPr>
-            <a:r>
-              <a:rPr sz="1700" b="0">
-                <a:solidFill>
-                  <a:srgbClr val="555555"/>
-                </a:solidFill>
-                <a:latin typeface="Meiryo UI"/>
-              </a:rPr>
-              <a:t>第1部  IPv6 そのもの — どこの国でも同じ話</a:t>
-            </a:r>
-          </a:p>
-          <a:p>
-            <a:pPr lvl="1" algn="l">
-              <a:spcAft>
-                <a:spcPts val="600"/>
-              </a:spcAft>
-            </a:pPr>
-            <a:r>
-              <a:rPr sz="1700" b="0">
-                <a:solidFill>
-                  <a:srgbClr val="555555"/>
-                </a:solidFill>
-                <a:latin typeface="Meiryo UI"/>
-              </a:rPr>
-              <a:t>第2部  日本の回線 — ここからは日本だけの話</a:t>
-            </a:r>
-          </a:p>
-          <a:p>
-            <a:pPr lvl="1" algn="l">
-              <a:spcAft>
-                <a:spcPts val="600"/>
-              </a:spcAft>
-            </a:pPr>
-            <a:r>
-              <a:rPr sz="1700" b="0">
-                <a:solidFill>
-                  <a:srgbClr val="555555"/>
-                </a:solidFill>
-                <a:latin typeface="Meiryo UI"/>
-              </a:rPr>
-              <a:t>第3部  IPv4 をどうやって運ぶか — 今日の本題</a:t>
-            </a:r>
-          </a:p>
-          <a:p>
-            <a:pPr lvl="1" algn="l">
-              <a:spcAft>
-                <a:spcPts val="600"/>
-              </a:spcAft>
-            </a:pPr>
-            <a:r>
-              <a:rPr sz="1700" b="0">
-                <a:solidFill>
-                  <a:srgbClr val="555555"/>
-                </a:solidFill>
-                <a:latin typeface="Meiryo UI"/>
-              </a:rPr>
-              <a:t>第4部  検証環境で実際に見たもの</a:t>
-            </a:r>
-          </a:p>
-          <a:p>
-            <a:pPr algn="l">
-              <a:spcAft>
-                <a:spcPts val="1000"/>
-              </a:spcAft>
-            </a:pPr>
-            <a:r>
-              <a:rPr sz="2000" b="1">
-                <a:solidFill>
-                  <a:srgbClr val="C0392B"/>
-                </a:solidFill>
-                <a:latin typeface="Meiryo UI"/>
-              </a:rPr>
-              <a:t>迷ったらこのページに戻ってください。どこの話か分かれば必ずついてこられます</a:t>
-            </a:r>
-          </a:p>
-          <a:p>
-            <a:pPr algn="l">
-              <a:spcAft>
-                <a:spcPts val="1000"/>
-              </a:spcAft>
-            </a:pPr>
-            <a:r>
-              <a:rPr sz="2000" b="0">
-                <a:solidFill>
-                  <a:srgbClr val="1F3355"/>
-                </a:solidFill>
-                <a:latin typeface="Meiryo UI"/>
-              </a:rPr>
-              <a:t>※ 配布資料の巻末に「想定問答」8 問があります。あとで読んでください</a:t>
+              <a:t>だから長いあいだ 本番には存在しないやり方 で検証していました (第4部 ④)</a:t>
             </a:r>
           </a:p>
         </p:txBody>
@@ -12829,7 +13367,350 @@
 </p:sld>
 </file>
 
-<file path=ppt/slides/slide30.xml><?xml version="1.0" encoding="utf-8"?>
+<file path=ppt/slides/slide31.xml><?xml version="1.0" encoding="utf-8"?>
+<p:sld xmlns:a="http://schemas.openxmlformats.org/drawingml/2006/main" xmlns:p="http://schemas.openxmlformats.org/presentationml/2006/main" xmlns:r="http://schemas.openxmlformats.org/officeDocument/2006/relationships">
+  <p:cSld>
+    <p:spTree>
+      <p:nvGrpSpPr>
+        <p:cNvPr id="1" name=""/>
+        <p:cNvGrpSpPr/>
+        <p:nvPr/>
+      </p:nvGrpSpPr>
+      <p:grpSpPr/>
+      <p:sp>
+        <p:nvSpPr>
+          <p:cNvPr id="2" name="TextBox 1"/>
+          <p:cNvSpPr txBox="1"/>
+          <p:nvPr/>
+        </p:nvSpPr>
+        <p:spPr>
+          <a:xfrm>
+            <a:off x="502920" y="320040"/>
+            <a:ext cx="11155680" cy="822960"/>
+          </a:xfrm>
+          <a:prstGeom prst="rect">
+            <a:avLst/>
+          </a:prstGeom>
+          <a:noFill/>
+        </p:spPr>
+        <p:txBody>
+          <a:bodyPr wrap="square">
+            <a:spAutoFit/>
+          </a:bodyPr>
+          <a:lstStyle/>
+          <a:p>
+            <a:pPr algn="l"/>
+            <a:r>
+              <a:rPr sz="2800" b="1">
+                <a:solidFill>
+                  <a:srgbClr val="1F3355"/>
+                </a:solidFill>
+                <a:latin typeface="Meiryo UI"/>
+              </a:rPr>
+              <a:t>「同時接続数を実測」って、どうやるのか</a:t>
+            </a:r>
+          </a:p>
+        </p:txBody>
+      </p:sp>
+      <p:sp>
+        <p:nvSpPr>
+          <p:cNvPr id="3" name="Rectangle 2"/>
+          <p:cNvSpPr/>
+          <p:nvPr/>
+        </p:nvSpPr>
+        <p:spPr>
+          <a:xfrm>
+            <a:off x="502920" y="1115568"/>
+            <a:ext cx="11155680" cy="31750"/>
+          </a:xfrm>
+          <a:prstGeom prst="rect">
+            <a:avLst/>
+          </a:prstGeom>
+          <a:solidFill>
+            <a:srgbClr val="007ACC"/>
+          </a:solidFill>
+          <a:ln>
+            <a:noFill/>
+          </a:ln>
+        </p:spPr>
+        <p:style>
+          <a:lnRef idx="1">
+            <a:schemeClr val="accent1"/>
+          </a:lnRef>
+          <a:fillRef idx="3">
+            <a:schemeClr val="accent1"/>
+          </a:fillRef>
+          <a:effectRef idx="2">
+            <a:schemeClr val="accent1"/>
+          </a:effectRef>
+          <a:fontRef idx="minor">
+            <a:schemeClr val="lt1"/>
+          </a:fontRef>
+        </p:style>
+        <p:txBody>
+          <a:bodyPr rtlCol="0" anchor="ctr"/>
+          <a:lstStyle/>
+          <a:p>
+            <a:pPr algn="ctr"/>
+          </a:p>
+        </p:txBody>
+      </p:sp>
+      <p:sp>
+        <p:nvSpPr>
+          <p:cNvPr id="4" name="TextBox 3"/>
+          <p:cNvSpPr txBox="1"/>
+          <p:nvPr/>
+        </p:nvSpPr>
+        <p:spPr>
+          <a:xfrm>
+            <a:off x="594360" y="1371600"/>
+            <a:ext cx="10972800" cy="4983480"/>
+          </a:xfrm>
+          <a:prstGeom prst="rect">
+            <a:avLst/>
+          </a:prstGeom>
+          <a:noFill/>
+        </p:spPr>
+        <p:txBody>
+          <a:bodyPr wrap="square">
+            <a:spAutoFit/>
+          </a:bodyPr>
+          <a:lstStyle/>
+          <a:p>
+            <a:pPr algn="l">
+              <a:spcAft>
+                <a:spcPts val="800"/>
+              </a:spcAft>
+            </a:pPr>
+            <a:r>
+              <a:rPr sz="1800" b="1">
+                <a:solidFill>
+                  <a:srgbClr val="1F3355"/>
+                </a:solidFill>
+                <a:latin typeface="Meiryo UI"/>
+              </a:rPr>
+              <a:t>240 個で足りるかどうかは、測らないと分かりません</a:t>
+            </a:r>
+          </a:p>
+          <a:p>
+            <a:pPr lvl="1" algn="l">
+              <a:spcAft>
+                <a:spcPts val="400"/>
+              </a:spcAft>
+            </a:pPr>
+            <a:r>
+              <a:rPr sz="1500" b="0">
+                <a:solidFill>
+                  <a:srgbClr val="555555"/>
+                </a:solidFill>
+                <a:latin typeface="Meiryo UI"/>
+              </a:rPr>
+              <a:t>既設ルータで NAT のテーブル数を数えます</a:t>
+            </a:r>
+          </a:p>
+          <a:p>
+            <a:pPr lvl="1" algn="l">
+              <a:spcAft>
+                <a:spcPts val="400"/>
+              </a:spcAft>
+            </a:pPr>
+            <a:r>
+              <a:rPr sz="1500" b="0">
+                <a:solidFill>
+                  <a:srgbClr val="0B6040"/>
+                </a:solidFill>
+                <a:latin typeface="Consolas"/>
+              </a:rPr>
+              <a:t>Cisco なら show ip nat translations の行数</a:t>
+            </a:r>
+          </a:p>
+          <a:p>
+            <a:pPr lvl="1" algn="l">
+              <a:spcAft>
+                <a:spcPts val="400"/>
+              </a:spcAft>
+            </a:pPr>
+            <a:r>
+              <a:rPr sz="1500" b="0">
+                <a:solidFill>
+                  <a:srgbClr val="555555"/>
+                </a:solidFill>
+                <a:latin typeface="Meiryo UI"/>
+              </a:rPr>
+              <a:t>業務時間帯に何回か測ってください。昼休みと夕方でまったく違います</a:t>
+            </a:r>
+          </a:p>
+          <a:p>
+            <a:pPr algn="l">
+              <a:spcAft>
+                <a:spcPts val="800"/>
+              </a:spcAft>
+            </a:pPr>
+            <a:r>
+              <a:rPr sz="1800" b="1">
+                <a:solidFill>
+                  <a:srgbClr val="C0392B"/>
+                </a:solidFill>
+                <a:latin typeface="Meiryo UI"/>
+              </a:rPr>
+              <a:t>目安は出せません</a:t>
+            </a:r>
+          </a:p>
+          <a:p>
+            <a:pPr lvl="1" algn="l">
+              <a:spcAft>
+                <a:spcPts val="400"/>
+              </a:spcAft>
+            </a:pPr>
+            <a:r>
+              <a:rPr sz="1500" b="0">
+                <a:solidFill>
+                  <a:srgbClr val="555555"/>
+                </a:solidFill>
+                <a:latin typeface="Meiryo UI"/>
+              </a:rPr>
+              <a:t>台数、業務アプリ、監視の有無で変わるので、他社の数字は当てになりません</a:t>
+            </a:r>
+          </a:p>
+          <a:p>
+            <a:pPr lvl="1" algn="l">
+              <a:spcAft>
+                <a:spcPts val="400"/>
+              </a:spcAft>
+            </a:pPr>
+            <a:r>
+              <a:rPr sz="1500" b="1">
+                <a:solidFill>
+                  <a:srgbClr val="C0392B"/>
+                </a:solidFill>
+                <a:latin typeface="Meiryo UI"/>
+              </a:rPr>
+              <a:t>「PC 30 台だから大丈夫」のような机上判断はしないでください</a:t>
+            </a:r>
+          </a:p>
+          <a:p>
+            <a:pPr algn="l">
+              <a:spcAft>
+                <a:spcPts val="800"/>
+              </a:spcAft>
+            </a:pPr>
+            <a:r>
+              <a:rPr sz="1800" b="1">
+                <a:solidFill>
+                  <a:srgbClr val="1F3355"/>
+                </a:solidFill>
+                <a:latin typeface="Meiryo UI"/>
+              </a:rPr>
+              <a:t>測ったあと、どう判断するか — 型を決めておきます</a:t>
+            </a:r>
+          </a:p>
+          <a:p>
+            <a:pPr lvl="1" algn="l">
+              <a:spcAft>
+                <a:spcPts val="400"/>
+              </a:spcAft>
+            </a:pPr>
+            <a:r>
+              <a:rPr sz="1500" b="1">
+                <a:solidFill>
+                  <a:srgbClr val="C0392B"/>
+                </a:solidFill>
+                <a:latin typeface="Meiryo UI"/>
+              </a:rPr>
+              <a:t>ピークの実測値 × 安全率 2 倍 が 割当ポート数を超えたら、MAP-E 単独は避ける</a:t>
+            </a:r>
+          </a:p>
+          <a:p>
+            <a:pPr lvl="1" algn="l">
+              <a:spcAft>
+                <a:spcPts val="400"/>
+              </a:spcAft>
+            </a:pPr>
+            <a:r>
+              <a:rPr sz="1500" b="0">
+                <a:solidFill>
+                  <a:srgbClr val="0B6040"/>
+                </a:solidFill>
+                <a:latin typeface="Consolas"/>
+              </a:rPr>
+              <a:t>例: ピーク 180 本 × 2 = 360 &gt; 240 → 固定 IP か PPPoE 併用に倒す</a:t>
+            </a:r>
+          </a:p>
+          <a:p>
+            <a:pPr lvl="1" algn="l">
+              <a:spcAft>
+                <a:spcPts val="400"/>
+              </a:spcAft>
+            </a:pPr>
+            <a:r>
+              <a:rPr sz="1500" b="0">
+                <a:solidFill>
+                  <a:srgbClr val="555555"/>
+                </a:solidFill>
+                <a:latin typeface="Meiryo UI"/>
+              </a:rPr>
+              <a:t>※ 安全率 2 倍は「この資料での仮置き」です。実績が貯まるまで社内で決め直してください</a:t>
+            </a:r>
+          </a:p>
+          <a:p>
+            <a:pPr algn="l">
+              <a:spcAft>
+                <a:spcPts val="800"/>
+              </a:spcAft>
+            </a:pPr>
+            <a:r>
+              <a:rPr sz="1800" b="1">
+                <a:solidFill>
+                  <a:srgbClr val="1F3355"/>
+                </a:solidFill>
+                <a:latin typeface="Meiryo UI"/>
+              </a:rPr>
+              <a:t>足りないと分かったら</a:t>
+            </a:r>
+          </a:p>
+          <a:p>
+            <a:pPr lvl="1" algn="l">
+              <a:spcAft>
+                <a:spcPts val="400"/>
+              </a:spcAft>
+            </a:pPr>
+            <a:r>
+              <a:rPr sz="1500" b="0">
+                <a:solidFill>
+                  <a:srgbClr val="555555"/>
+                </a:solidFill>
+                <a:latin typeface="Meiryo UI"/>
+              </a:rPr>
+              <a:t>MAP-E でもポート数の多い VNE を選べることがあります (OCN VC は 1008)</a:t>
+            </a:r>
+          </a:p>
+          <a:p>
+            <a:pPr lvl="1" algn="l">
+              <a:spcAft>
+                <a:spcPts val="400"/>
+              </a:spcAft>
+            </a:pPr>
+            <a:r>
+              <a:rPr sz="1500" b="0">
+                <a:solidFill>
+                  <a:srgbClr val="555555"/>
+                </a:solidFill>
+                <a:latin typeface="Meiryo UI"/>
+              </a:rPr>
+              <a:t>ただし VNE は選べないことが多いので、固定 IP か PPPoE 併用の検討になります</a:t>
+            </a:r>
+          </a:p>
+        </p:txBody>
+      </p:sp>
+    </p:spTree>
+  </p:cSld>
+  <p:clrMapOvr>
+    <a:masterClrMapping/>
+  </p:clrMapOvr>
+</p:sld>
+</file>
+
+<file path=ppt/slides/slide32.xml><?xml version="1.0" encoding="utf-8"?>
 <p:sld xmlns:a="http://schemas.openxmlformats.org/drawingml/2006/main" xmlns:p="http://schemas.openxmlformats.org/presentationml/2006/main" xmlns:r="http://schemas.openxmlformats.org/officeDocument/2006/relationships">
   <p:cSld>
     <p:spTree>
@@ -13157,7 +14038,7 @@
 </p:sld>
 </file>
 
-<file path=ppt/slides/slide31.xml><?xml version="1.0" encoding="utf-8"?>
+<file path=ppt/slides/slide33.xml><?xml version="1.0" encoding="utf-8"?>
 <p:sld xmlns:a="http://schemas.openxmlformats.org/drawingml/2006/main" xmlns:p="http://schemas.openxmlformats.org/presentationml/2006/main" xmlns:r="http://schemas.openxmlformats.org/officeDocument/2006/relationships">
   <p:cSld>
     <p:spTree>
@@ -13463,7 +14344,7 @@
 </p:sld>
 </file>
 
-<file path=ppt/slides/slide32.xml><?xml version="1.0" encoding="utf-8"?>
+<file path=ppt/slides/slide34.xml><?xml version="1.0" encoding="utf-8"?>
 <p:sld xmlns:a="http://schemas.openxmlformats.org/drawingml/2006/main" xmlns:p="http://schemas.openxmlformats.org/presentationml/2006/main" xmlns:r="http://schemas.openxmlformats.org/officeDocument/2006/relationships">
   <p:cSld>
     <p:spTree>
@@ -13758,7 +14639,7 @@
 </p:sld>
 </file>
 
-<file path=ppt/slides/slide33.xml><?xml version="1.0" encoding="utf-8"?>
+<file path=ppt/slides/slide35.xml><?xml version="1.0" encoding="utf-8"?>
 <p:sld xmlns:a="http://schemas.openxmlformats.org/drawingml/2006/main" xmlns:p="http://schemas.openxmlformats.org/presentationml/2006/main" xmlns:r="http://schemas.openxmlformats.org/officeDocument/2006/relationships">
   <p:cSld>
     <p:spTree>
@@ -14228,7 +15109,7 @@
 </p:sld>
 </file>
 
-<file path=ppt/slides/slide34.xml><?xml version="1.0" encoding="utf-8"?>
+<file path=ppt/slides/slide36.xml><?xml version="1.0" encoding="utf-8"?>
 <p:sld xmlns:a="http://schemas.openxmlformats.org/drawingml/2006/main" xmlns:p="http://schemas.openxmlformats.org/presentationml/2006/main" xmlns:r="http://schemas.openxmlformats.org/officeDocument/2006/relationships">
   <p:cSld>
     <p:spTree>
@@ -14667,7 +15548,7 @@
 </p:sld>
 </file>
 
-<file path=ppt/slides/slide35.xml><?xml version="1.0" encoding="utf-8"?>
+<file path=ppt/slides/slide37.xml><?xml version="1.0" encoding="utf-8"?>
 <p:sld xmlns:a="http://schemas.openxmlformats.org/drawingml/2006/main" xmlns:p="http://schemas.openxmlformats.org/presentationml/2006/main" xmlns:r="http://schemas.openxmlformats.org/officeDocument/2006/relationships">
   <p:cSld>
     <p:spTree>
@@ -15013,7 +15894,7 @@
 </p:sld>
 </file>
 
-<file path=ppt/slides/slide36.xml><?xml version="1.0" encoding="utf-8"?>
+<file path=ppt/slides/slide38.xml><?xml version="1.0" encoding="utf-8"?>
 <p:sld xmlns:a="http://schemas.openxmlformats.org/drawingml/2006/main" xmlns:p="http://schemas.openxmlformats.org/presentationml/2006/main" xmlns:r="http://schemas.openxmlformats.org/officeDocument/2006/relationships">
   <p:cSld>
     <p:spTree>
@@ -15137,7 +16018,7 @@
 </p:sld>
 </file>
 
-<file path=ppt/slides/slide37.xml><?xml version="1.0" encoding="utf-8"?>
+<file path=ppt/slides/slide39.xml><?xml version="1.0" encoding="utf-8"?>
 <p:sld xmlns:a="http://schemas.openxmlformats.org/drawingml/2006/main" xmlns:p="http://schemas.openxmlformats.org/presentationml/2006/main" xmlns:r="http://schemas.openxmlformats.org/officeDocument/2006/relationships">
   <p:cSld>
     <p:spTree>
@@ -15334,1025 +16215,6 @@
                 <a:latin typeface="Meiryo UI"/>
               </a:rPr>
               <a:t>だから 出口アドレスを見れば経路が分かる のです</a:t>
-            </a:r>
-          </a:p>
-        </p:txBody>
-      </p:sp>
-    </p:spTree>
-  </p:cSld>
-  <p:clrMapOvr>
-    <a:masterClrMapping/>
-  </p:clrMapOvr>
-</p:sld>
-</file>
-
-<file path=ppt/slides/slide38.xml><?xml version="1.0" encoding="utf-8"?>
-<p:sld xmlns:a="http://schemas.openxmlformats.org/drawingml/2006/main" xmlns:p="http://schemas.openxmlformats.org/presentationml/2006/main" xmlns:r="http://schemas.openxmlformats.org/officeDocument/2006/relationships">
-  <p:cSld>
-    <p:spTree>
-      <p:nvGrpSpPr>
-        <p:cNvPr id="1" name=""/>
-        <p:cNvGrpSpPr/>
-        <p:nvPr/>
-      </p:nvGrpSpPr>
-      <p:grpSpPr/>
-      <p:sp>
-        <p:nvSpPr>
-          <p:cNvPr id="2" name="TextBox 1"/>
-          <p:cNvSpPr txBox="1"/>
-          <p:nvPr/>
-        </p:nvSpPr>
-        <p:spPr>
-          <a:xfrm>
-            <a:off x="502920" y="274320"/>
-            <a:ext cx="11155680" cy="731520"/>
-          </a:xfrm>
-          <a:prstGeom prst="rect">
-            <a:avLst/>
-          </a:prstGeom>
-          <a:noFill/>
-        </p:spPr>
-        <p:txBody>
-          <a:bodyPr wrap="square">
-            <a:spAutoFit/>
-          </a:bodyPr>
-          <a:lstStyle/>
-          <a:p>
-            <a:pPr algn="l"/>
-            <a:r>
-              <a:rPr sz="2600" b="1">
-                <a:solidFill>
-                  <a:srgbClr val="1F3355"/>
-                </a:solidFill>
-                <a:latin typeface="Meiryo UI"/>
-              </a:rPr>
-              <a:t>何を再現しているのか</a:t>
-            </a:r>
-          </a:p>
-        </p:txBody>
-      </p:sp>
-      <p:sp>
-        <p:nvSpPr>
-          <p:cNvPr id="3" name="Rounded Rectangle 2"/>
-          <p:cNvSpPr/>
-          <p:nvPr/>
-        </p:nvSpPr>
-        <p:spPr>
-          <a:xfrm>
-            <a:off x="685800" y="2377440"/>
-            <a:ext cx="2211933" cy="1371600"/>
-          </a:xfrm>
-          <a:prstGeom prst="roundRect">
-            <a:avLst/>
-          </a:prstGeom>
-          <a:solidFill>
-            <a:srgbClr val="EFF5FA"/>
-          </a:solidFill>
-          <a:ln w="22225">
-            <a:solidFill>
-              <a:srgbClr val="007ACC"/>
-            </a:solidFill>
-          </a:ln>
-        </p:spPr>
-        <p:style>
-          <a:lnRef idx="1">
-            <a:schemeClr val="accent1"/>
-          </a:lnRef>
-          <a:fillRef idx="3">
-            <a:schemeClr val="accent1"/>
-          </a:fillRef>
-          <a:effectRef idx="2">
-            <a:schemeClr val="accent1"/>
-          </a:effectRef>
-          <a:fontRef idx="minor">
-            <a:schemeClr val="lt1"/>
-          </a:fontRef>
-        </p:style>
-        <p:txBody>
-          <a:bodyPr rtlCol="0" anchor="ctr" wrap="square"/>
-          <a:lstStyle/>
-          <a:p>
-            <a:pPr algn="ctr"/>
-            <a:r>
-              <a:rPr sz="1500" b="1">
-                <a:solidFill>
-                  <a:srgbClr val="1F3355"/>
-                </a:solidFill>
-                <a:latin typeface="Meiryo UI"/>
-              </a:rPr>
-              <a:t>お客様のルータ</a:t>
-            </a:r>
-          </a:p>
-          <a:p>
-            <a:pPr algn="ctr"/>
-            <a:r>
-              <a:rPr sz="1100" b="0">
-                <a:solidFill>
-                  <a:srgbClr val="555555"/>
-                </a:solidFill>
-                <a:latin typeface="Meiryo UI"/>
-              </a:rPr>
-              <a:t>OpenWrt / 892FJ
-/ C1111-8P</a:t>
-            </a:r>
-          </a:p>
-        </p:txBody>
-      </p:sp>
-      <p:sp>
-        <p:nvSpPr>
-          <p:cNvPr id="4" name="Right Arrow 3"/>
-          <p:cNvSpPr/>
-          <p:nvPr/>
-        </p:nvSpPr>
-        <p:spPr>
-          <a:xfrm>
-            <a:off x="2897733" y="2926080"/>
-            <a:ext cx="647395" cy="292608"/>
-          </a:xfrm>
-          <a:prstGeom prst="rightArrow">
-            <a:avLst/>
-          </a:prstGeom>
-          <a:solidFill>
-            <a:srgbClr val="007ACC"/>
-          </a:solidFill>
-          <a:ln>
-            <a:noFill/>
-          </a:ln>
-        </p:spPr>
-        <p:style>
-          <a:lnRef idx="1">
-            <a:schemeClr val="accent1"/>
-          </a:lnRef>
-          <a:fillRef idx="3">
-            <a:schemeClr val="accent1"/>
-          </a:fillRef>
-          <a:effectRef idx="2">
-            <a:schemeClr val="accent1"/>
-          </a:effectRef>
-          <a:fontRef idx="minor">
-            <a:schemeClr val="lt1"/>
-          </a:fontRef>
-        </p:style>
-        <p:txBody>
-          <a:bodyPr rtlCol="0" anchor="ctr"/>
-          <a:lstStyle/>
-          <a:p>
-            <a:pPr algn="ctr"/>
-          </a:p>
-        </p:txBody>
-      </p:sp>
-      <p:sp>
-        <p:nvSpPr>
-          <p:cNvPr id="5" name="Rounded Rectangle 4"/>
-          <p:cNvSpPr/>
-          <p:nvPr/>
-        </p:nvSpPr>
-        <p:spPr>
-          <a:xfrm>
-            <a:off x="3545128" y="2377440"/>
-            <a:ext cx="2211933" cy="1371600"/>
-          </a:xfrm>
-          <a:prstGeom prst="roundRect">
-            <a:avLst/>
-          </a:prstGeom>
-          <a:solidFill>
-            <a:srgbClr val="EFF5FA"/>
-          </a:solidFill>
-          <a:ln w="22225">
-            <a:solidFill>
-              <a:srgbClr val="007ACC"/>
-            </a:solidFill>
-          </a:ln>
-        </p:spPr>
-        <p:style>
-          <a:lnRef idx="1">
-            <a:schemeClr val="accent1"/>
-          </a:lnRef>
-          <a:fillRef idx="3">
-            <a:schemeClr val="accent1"/>
-          </a:fillRef>
-          <a:effectRef idx="2">
-            <a:schemeClr val="accent1"/>
-          </a:effectRef>
-          <a:fontRef idx="minor">
-            <a:schemeClr val="lt1"/>
-          </a:fontRef>
-        </p:style>
-        <p:txBody>
-          <a:bodyPr rtlCol="0" anchor="ctr" wrap="square"/>
-          <a:lstStyle/>
-          <a:p>
-            <a:pPr algn="ctr"/>
-            <a:r>
-              <a:rPr sz="1500" b="1">
-                <a:solidFill>
-                  <a:srgbClr val="1F3355"/>
-                </a:solidFill>
-                <a:latin typeface="Meiryo UI"/>
-              </a:rPr>
-              <a:t>NTT の網の代わり</a:t>
-            </a:r>
-          </a:p>
-          <a:p>
-            <a:pPr algn="ctr"/>
-            <a:r>
-              <a:rPr sz="1100" b="0">
-                <a:solidFill>
-                  <a:srgbClr val="555555"/>
-                </a:solidFill>
-                <a:latin typeface="Meiryo UI"/>
-              </a:rPr>
-              <a:t>住所を配る役
-RA と DHCPv6</a:t>
-            </a:r>
-          </a:p>
-        </p:txBody>
-      </p:sp>
-      <p:sp>
-        <p:nvSpPr>
-          <p:cNvPr id="6" name="Right Arrow 5"/>
-          <p:cNvSpPr/>
-          <p:nvPr/>
-        </p:nvSpPr>
-        <p:spPr>
-          <a:xfrm>
-            <a:off x="5757062" y="2926080"/>
-            <a:ext cx="647395" cy="292608"/>
-          </a:xfrm>
-          <a:prstGeom prst="rightArrow">
-            <a:avLst/>
-          </a:prstGeom>
-          <a:solidFill>
-            <a:srgbClr val="007ACC"/>
-          </a:solidFill>
-          <a:ln>
-            <a:noFill/>
-          </a:ln>
-        </p:spPr>
-        <p:style>
-          <a:lnRef idx="1">
-            <a:schemeClr val="accent1"/>
-          </a:lnRef>
-          <a:fillRef idx="3">
-            <a:schemeClr val="accent1"/>
-          </a:fillRef>
-          <a:effectRef idx="2">
-            <a:schemeClr val="accent1"/>
-          </a:effectRef>
-          <a:fontRef idx="minor">
-            <a:schemeClr val="lt1"/>
-          </a:fontRef>
-        </p:style>
-        <p:txBody>
-          <a:bodyPr rtlCol="0" anchor="ctr"/>
-          <a:lstStyle/>
-          <a:p>
-            <a:pPr algn="ctr"/>
-          </a:p>
-        </p:txBody>
-      </p:sp>
-      <p:sp>
-        <p:nvSpPr>
-          <p:cNvPr id="7" name="Rounded Rectangle 6"/>
-          <p:cNvSpPr/>
-          <p:nvPr/>
-        </p:nvSpPr>
-        <p:spPr>
-          <a:xfrm>
-            <a:off x="6404457" y="2377440"/>
-            <a:ext cx="2211933" cy="1371600"/>
-          </a:xfrm>
-          <a:prstGeom prst="roundRect">
-            <a:avLst/>
-          </a:prstGeom>
-          <a:solidFill>
-            <a:srgbClr val="EFF5FA"/>
-          </a:solidFill>
-          <a:ln w="22225">
-            <a:solidFill>
-              <a:srgbClr val="007ACC"/>
-            </a:solidFill>
-          </a:ln>
-        </p:spPr>
-        <p:style>
-          <a:lnRef idx="1">
-            <a:schemeClr val="accent1"/>
-          </a:lnRef>
-          <a:fillRef idx="3">
-            <a:schemeClr val="accent1"/>
-          </a:fillRef>
-          <a:effectRef idx="2">
-            <a:schemeClr val="accent1"/>
-          </a:effectRef>
-          <a:fontRef idx="minor">
-            <a:schemeClr val="lt1"/>
-          </a:fontRef>
-        </p:style>
-        <p:txBody>
-          <a:bodyPr rtlCol="0" anchor="ctr" wrap="square"/>
-          <a:lstStyle/>
-          <a:p>
-            <a:pPr algn="ctr"/>
-            <a:r>
-              <a:rPr sz="1500" b="1">
-                <a:solidFill>
-                  <a:srgbClr val="1F3355"/>
-                </a:solidFill>
-                <a:latin typeface="Meiryo UI"/>
-              </a:rPr>
-              <a:t>受け口</a:t>
-            </a:r>
-          </a:p>
-          <a:p>
-            <a:pPr algn="ctr"/>
-            <a:r>
-              <a:rPr sz="1100" b="0">
-                <a:solidFill>
-                  <a:srgbClr val="555555"/>
-                </a:solidFill>
-                <a:latin typeface="Meiryo UI"/>
-              </a:rPr>
-              <a:t>荷物を降ろす側
-MAP-E / DS-Lite</a:t>
-            </a:r>
-          </a:p>
-        </p:txBody>
-      </p:sp>
-      <p:sp>
-        <p:nvSpPr>
-          <p:cNvPr id="8" name="Right Arrow 7"/>
-          <p:cNvSpPr/>
-          <p:nvPr/>
-        </p:nvSpPr>
-        <p:spPr>
-          <a:xfrm>
-            <a:off x="8616391" y="2926080"/>
-            <a:ext cx="647395" cy="292608"/>
-          </a:xfrm>
-          <a:prstGeom prst="rightArrow">
-            <a:avLst/>
-          </a:prstGeom>
-          <a:solidFill>
-            <a:srgbClr val="007ACC"/>
-          </a:solidFill>
-          <a:ln>
-            <a:noFill/>
-          </a:ln>
-        </p:spPr>
-        <p:style>
-          <a:lnRef idx="1">
-            <a:schemeClr val="accent1"/>
-          </a:lnRef>
-          <a:fillRef idx="3">
-            <a:schemeClr val="accent1"/>
-          </a:fillRef>
-          <a:effectRef idx="2">
-            <a:schemeClr val="accent1"/>
-          </a:effectRef>
-          <a:fontRef idx="minor">
-            <a:schemeClr val="lt1"/>
-          </a:fontRef>
-        </p:style>
-        <p:txBody>
-          <a:bodyPr rtlCol="0" anchor="ctr"/>
-          <a:lstStyle/>
-          <a:p>
-            <a:pPr algn="ctr"/>
-          </a:p>
-        </p:txBody>
-      </p:sp>
-      <p:sp>
-        <p:nvSpPr>
-          <p:cNvPr id="9" name="Rounded Rectangle 8"/>
-          <p:cNvSpPr/>
-          <p:nvPr/>
-        </p:nvSpPr>
-        <p:spPr>
-          <a:xfrm>
-            <a:off x="9263786" y="2377440"/>
-            <a:ext cx="2211933" cy="1371600"/>
-          </a:xfrm>
-          <a:prstGeom prst="roundRect">
-            <a:avLst/>
-          </a:prstGeom>
-          <a:solidFill>
-            <a:srgbClr val="EFF5FA"/>
-          </a:solidFill>
-          <a:ln w="22225">
-            <a:solidFill>
-              <a:srgbClr val="007ACC"/>
-            </a:solidFill>
-          </a:ln>
-        </p:spPr>
-        <p:style>
-          <a:lnRef idx="1">
-            <a:schemeClr val="accent1"/>
-          </a:lnRef>
-          <a:fillRef idx="3">
-            <a:schemeClr val="accent1"/>
-          </a:fillRef>
-          <a:effectRef idx="2">
-            <a:schemeClr val="accent1"/>
-          </a:effectRef>
-          <a:fontRef idx="minor">
-            <a:schemeClr val="lt1"/>
-          </a:fontRef>
-        </p:style>
-        <p:txBody>
-          <a:bodyPr rtlCol="0" anchor="ctr" wrap="square"/>
-          <a:lstStyle/>
-          <a:p>
-            <a:pPr algn="ctr"/>
-            <a:r>
-              <a:rPr sz="1500" b="1">
-                <a:solidFill>
-                  <a:srgbClr val="1F3355"/>
-                </a:solidFill>
-                <a:latin typeface="Meiryo UI"/>
-              </a:rPr>
-              <a:t>模擬インターネット</a:t>
-            </a:r>
-          </a:p>
-          <a:p>
-            <a:pPr algn="ctr"/>
-            <a:r>
-              <a:rPr sz="1100" b="0">
-                <a:solidFill>
-                  <a:srgbClr val="555555"/>
-                </a:solidFill>
-                <a:latin typeface="Meiryo UI"/>
-              </a:rPr>
-              <a:t>Web と DNS
-+ ルール配布サーバ</a:t>
-            </a:r>
-          </a:p>
-        </p:txBody>
-      </p:sp>
-      <p:sp>
-        <p:nvSpPr>
-          <p:cNvPr id="10" name="TextBox 9"/>
-          <p:cNvSpPr txBox="1"/>
-          <p:nvPr/>
-        </p:nvSpPr>
-        <p:spPr>
-          <a:xfrm>
-            <a:off x="685800" y="4114800"/>
-            <a:ext cx="10789920" cy="1828800"/>
-          </a:xfrm>
-          <a:prstGeom prst="rect">
-            <a:avLst/>
-          </a:prstGeom>
-          <a:noFill/>
-        </p:spPr>
-        <p:txBody>
-          <a:bodyPr wrap="square">
-            <a:spAutoFit/>
-          </a:bodyPr>
-          <a:lstStyle/>
-          <a:p>
-            <a:pPr algn="l">
-              <a:spcAft>
-                <a:spcPts val="600"/>
-              </a:spcAft>
-            </a:pPr>
-            <a:r>
-              <a:rPr sz="1400" b="0">
-                <a:solidFill>
-                  <a:srgbClr val="555555"/>
-                </a:solidFill>
-                <a:latin typeface="Meiryo UI"/>
-              </a:rPr>
-              <a:t>本番の回線では試せないので、NTT の網と VNE を丸ごと自宅に再現しました。PPPoE の受け口もあるので切替前の状態も作れます。</a:t>
-            </a:r>
-          </a:p>
-          <a:p>
-            <a:pPr algn="l">
-              <a:spcAft>
-                <a:spcPts val="600"/>
-              </a:spcAft>
-            </a:pPr>
-            <a:r>
-              <a:rPr sz="1400" b="1">
-                <a:solidFill>
-                  <a:srgbClr val="C0392B"/>
-                </a:solidFill>
-                <a:latin typeface="Meiryo UI"/>
-              </a:rPr>
-              <a:t>※ 右端に MAP-E の「自動設定」の相手方 (ルール配布サーバ) もあります。本番と同じ形で試せます。</a:t>
-            </a:r>
-          </a:p>
-          <a:p>
-            <a:pPr algn="l">
-              <a:spcAft>
-                <a:spcPts val="600"/>
-              </a:spcAft>
-            </a:pPr>
-            <a:r>
-              <a:rPr sz="1400" b="1">
-                <a:solidFill>
-                  <a:srgbClr val="C0392B"/>
-                </a:solidFill>
-                <a:latin typeface="Meiryo UI"/>
-              </a:rPr>
-              <a:t>※ 同じものを会社の VMware に再現する手順書一式があります。詰まった箇所も全部載せてあるので、案件前の事前検証に使えます。</a:t>
-            </a:r>
-          </a:p>
-          <a:p>
-            <a:pPr algn="l">
-              <a:spcAft>
-                <a:spcPts val="600"/>
-              </a:spcAft>
-            </a:pPr>
-            <a:r>
-              <a:rPr sz="1400" b="0">
-                <a:solidFill>
-                  <a:srgbClr val="555555"/>
-                </a:solidFill>
-                <a:latin typeface="Meiryo UI"/>
-              </a:rPr>
-              <a:t>模擬インターネットの Web はアクセス元のアドレスを表示します。これが経路を確かめる決め手になります。</a:t>
-            </a:r>
-          </a:p>
-          <a:p>
-            <a:pPr algn="l">
-              <a:spcAft>
-                <a:spcPts val="600"/>
-              </a:spcAft>
-            </a:pPr>
-            <a:r>
-              <a:rPr sz="1400" b="1">
-                <a:solidFill>
-                  <a:srgbClr val="C0392B"/>
-                </a:solidFill>
-                <a:latin typeface="Meiryo UI"/>
-              </a:rPr>
-              <a:t>※ アドレスは全部ドキュメント用の範囲 (2001:db8::/32 / 198.51.100.0/24 / 203.0.113.0/24)。</a:t>
-            </a:r>
-          </a:p>
-          <a:p>
-            <a:pPr algn="l">
-              <a:spcAft>
-                <a:spcPts val="600"/>
-              </a:spcAft>
-            </a:pPr>
-            <a:r>
-              <a:rPr sz="1400" b="0">
-                <a:solidFill>
-                  <a:srgbClr val="555555"/>
-                </a:solidFill>
-                <a:latin typeface="Meiryo UI"/>
-              </a:rPr>
-              <a:t>  本物の誰かに迷惑をかけない設計にしてあります。</a:t>
-            </a:r>
-          </a:p>
-        </p:txBody>
-      </p:sp>
-    </p:spTree>
-  </p:cSld>
-  <p:clrMapOvr>
-    <a:masterClrMapping/>
-  </p:clrMapOvr>
-</p:sld>
-</file>
-
-<file path=ppt/slides/slide39.xml><?xml version="1.0" encoding="utf-8"?>
-<p:sld xmlns:a="http://schemas.openxmlformats.org/drawingml/2006/main" xmlns:p="http://schemas.openxmlformats.org/presentationml/2006/main" xmlns:r="http://schemas.openxmlformats.org/officeDocument/2006/relationships">
-  <p:cSld>
-    <p:spTree>
-      <p:nvGrpSpPr>
-        <p:cNvPr id="1" name=""/>
-        <p:cNvGrpSpPr/>
-        <p:nvPr/>
-      </p:nvGrpSpPr>
-      <p:grpSpPr/>
-      <p:sp>
-        <p:nvSpPr>
-          <p:cNvPr id="2" name="TextBox 1"/>
-          <p:cNvSpPr txBox="1"/>
-          <p:nvPr/>
-        </p:nvSpPr>
-        <p:spPr>
-          <a:xfrm>
-            <a:off x="502920" y="274320"/>
-            <a:ext cx="11155680" cy="731520"/>
-          </a:xfrm>
-          <a:prstGeom prst="rect">
-            <a:avLst/>
-          </a:prstGeom>
-          <a:noFill/>
-        </p:spPr>
-        <p:txBody>
-          <a:bodyPr wrap="square">
-            <a:spAutoFit/>
-          </a:bodyPr>
-          <a:lstStyle/>
-          <a:p>
-            <a:pPr algn="l"/>
-            <a:r>
-              <a:rPr sz="2600" b="1">
-                <a:solidFill>
-                  <a:srgbClr val="1F3355"/>
-                </a:solidFill>
-                <a:latin typeface="Meiryo UI"/>
-              </a:rPr>
-              <a:t>これで何ができるのか</a:t>
-            </a:r>
-          </a:p>
-        </p:txBody>
-      </p:sp>
-      <p:graphicFrame>
-        <p:nvGraphicFramePr>
-          <p:cNvPr id="3" name="Table 2"/>
-          <p:cNvGraphicFramePr>
-            <a:graphicFrameLocks noGrp="1"/>
-          </p:cNvGraphicFramePr>
-          <p:nvPr/>
-        </p:nvGraphicFramePr>
-        <p:xfrm>
-          <a:off x="502920" y="1143000"/>
-          <a:ext cx="10789920" cy="2176272"/>
-        </p:xfrm>
-        <a:graphic>
-          <a:graphicData uri="http://schemas.openxmlformats.org/drawingml/2006/table">
-            <a:tbl>
-              <a:tblPr>
-                <a:tableStyleId>{5C22544A-7EE6-4342-B048-85BDC9FD1C3A}</a:tableStyleId>
-              </a:tblPr>
-              <a:tblGrid>
-                <a:gridCol w="2743200"/>
-                <a:gridCol w="8046720"/>
-              </a:tblGrid>
-              <a:tr h="310896">
-                <a:tc>
-                  <a:txBody>
-                    <a:bodyPr/>
-                    <a:lstStyle/>
-                    <a:p>
-                      <a:pPr algn="l"/>
-                      <a:r>
-                        <a:rPr sz="1400" b="1">
-                          <a:solidFill>
-                            <a:srgbClr val="FFFFFF"/>
-                          </a:solidFill>
-                          <a:latin typeface="Meiryo UI"/>
-                        </a:rPr>
-                        <a:t>できること</a:t>
-                      </a:r>
-                    </a:p>
-                  </a:txBody>
-                  <a:tcPr>
-                    <a:solidFill>
-                      <a:srgbClr val="1F3355"/>
-                    </a:solidFill>
-                  </a:tcPr>
-                </a:tc>
-                <a:tc>
-                  <a:txBody>
-                    <a:bodyPr/>
-                    <a:lstStyle/>
-                    <a:p>
-                      <a:pPr algn="l"/>
-                      <a:r>
-                        <a:rPr sz="1400" b="1">
-                          <a:solidFill>
-                            <a:srgbClr val="FFFFFF"/>
-                          </a:solidFill>
-                          <a:latin typeface="Meiryo UI"/>
-                        </a:rPr>
-                        <a:t>具体的に</a:t>
-                      </a:r>
-                    </a:p>
-                  </a:txBody>
-                  <a:tcPr>
-                    <a:solidFill>
-                      <a:srgbClr val="1F3355"/>
-                    </a:solidFill>
-                  </a:tcPr>
-                </a:tc>
-              </a:tr>
-              <a:tr h="310896">
-                <a:tc>
-                  <a:txBody>
-                    <a:bodyPr/>
-                    <a:lstStyle/>
-                    <a:p>
-                      <a:pPr algn="l"/>
-                      <a:r>
-                        <a:rPr sz="1300" b="0">
-                          <a:solidFill>
-                            <a:srgbClr val="1F3355"/>
-                          </a:solidFill>
-                          <a:latin typeface="Meiryo UI"/>
-                        </a:rPr>
-                        <a:t>切替の練習</a:t>
-                      </a:r>
-                    </a:p>
-                  </a:txBody>
-                  <a:tcPr>
-                    <a:solidFill>
-                      <a:srgbClr val="FFFFFF"/>
-                    </a:solidFill>
-                  </a:tcPr>
-                </a:tc>
-                <a:tc>
-                  <a:txBody>
-                    <a:bodyPr/>
-                    <a:lstStyle/>
-                    <a:p>
-                      <a:pPr algn="l"/>
-                      <a:r>
-                        <a:rPr sz="1300" b="0">
-                          <a:solidFill>
-                            <a:srgbClr val="1F3355"/>
-                          </a:solidFill>
-                          <a:latin typeface="Meiryo UI"/>
-                        </a:rPr>
-                        <a:t>PPPoE から IPoE に切り替える手順を、本番と同じ順番で通せる</a:t>
-                      </a:r>
-                    </a:p>
-                  </a:txBody>
-                  <a:tcPr>
-                    <a:solidFill>
-                      <a:srgbClr val="FFFFFF"/>
-                    </a:solidFill>
-                  </a:tcPr>
-                </a:tc>
-              </a:tr>
-              <a:tr h="310896">
-                <a:tc>
-                  <a:txBody>
-                    <a:bodyPr/>
-                    <a:lstStyle/>
-                    <a:p>
-                      <a:pPr algn="l"/>
-                      <a:r>
-                        <a:rPr sz="1300" b="0">
-                          <a:solidFill>
-                            <a:srgbClr val="1F3355"/>
-                          </a:solidFill>
-                          <a:latin typeface="Meiryo UI"/>
-                        </a:rPr>
-                        <a:t>方式の切り替え</a:t>
-                      </a:r>
-                    </a:p>
-                  </a:txBody>
-                  <a:tcPr>
-                    <a:solidFill>
-                      <a:srgbClr val="F2F6FA"/>
-                    </a:solidFill>
-                  </a:tcPr>
-                </a:tc>
-                <a:tc>
-                  <a:txBody>
-                    <a:bodyPr/>
-                    <a:lstStyle/>
-                    <a:p>
-                      <a:pPr algn="l"/>
-                      <a:r>
-                        <a:rPr sz="1300" b="0">
-                          <a:solidFill>
-                            <a:srgbClr val="1F3355"/>
-                          </a:solidFill>
-                          <a:latin typeface="Meiryo UI"/>
-                        </a:rPr>
-                        <a:t>MAP-E と DS-Lite を行き来できる。RA 方式と PD 方式 (まとめ借り) も切替可</a:t>
-                      </a:r>
-                    </a:p>
-                  </a:txBody>
-                  <a:tcPr>
-                    <a:solidFill>
-                      <a:srgbClr val="F2F6FA"/>
-                    </a:solidFill>
-                  </a:tcPr>
-                </a:tc>
-              </a:tr>
-              <a:tr h="310896">
-                <a:tc>
-                  <a:txBody>
-                    <a:bodyPr/>
-                    <a:lstStyle/>
-                    <a:p>
-                      <a:pPr algn="l"/>
-                      <a:r>
-                        <a:rPr sz="1300" b="0">
-                          <a:solidFill>
-                            <a:srgbClr val="1F3355"/>
-                          </a:solidFill>
-                          <a:latin typeface="Meiryo UI"/>
-                        </a:rPr>
-                        <a:t>パケットを見る</a:t>
-                      </a:r>
-                    </a:p>
-                  </a:txBody>
-                  <a:tcPr>
-                    <a:solidFill>
-                      <a:srgbClr val="FFFFFF"/>
-                    </a:solidFill>
-                  </a:tcPr>
-                </a:tc>
-                <a:tc>
-                  <a:txBody>
-                    <a:bodyPr/>
-                    <a:lstStyle/>
-                    <a:p>
-                      <a:pPr algn="l"/>
-                      <a:r>
-                        <a:rPr sz="1300" b="0">
-                          <a:solidFill>
-                            <a:srgbClr val="1F3355"/>
-                          </a:solidFill>
-                          <a:latin typeface="Meiryo UI"/>
-                        </a:rPr>
-                        <a:t>RA、DHCPv6 のやり取り、トンネルの中身をキャプチャできる</a:t>
-                      </a:r>
-                    </a:p>
-                  </a:txBody>
-                  <a:tcPr>
-                    <a:solidFill>
-                      <a:srgbClr val="FFFFFF"/>
-                    </a:solidFill>
-                  </a:tcPr>
-                </a:tc>
-              </a:tr>
-              <a:tr h="310896">
-                <a:tc>
-                  <a:txBody>
-                    <a:bodyPr/>
-                    <a:lstStyle/>
-                    <a:p>
-                      <a:pPr algn="l"/>
-                      <a:r>
-                        <a:rPr sz="1300" b="0">
-                          <a:solidFill>
-                            <a:srgbClr val="1F3355"/>
-                          </a:solidFill>
-                          <a:latin typeface="Meiryo UI"/>
-                        </a:rPr>
-                        <a:t>わざと壊す</a:t>
-                      </a:r>
-                    </a:p>
-                  </a:txBody>
-                  <a:tcPr>
-                    <a:solidFill>
-                      <a:srgbClr val="F2F6FA"/>
-                    </a:solidFill>
-                  </a:tcPr>
-                </a:tc>
-                <a:tc>
-                  <a:txBody>
-                    <a:bodyPr/>
-                    <a:lstStyle/>
-                    <a:p>
-                      <a:pPr algn="l"/>
-                      <a:r>
-                        <a:rPr sz="1300" b="0">
-                          <a:solidFill>
-                            <a:srgbClr val="1F3355"/>
-                          </a:solidFill>
-                          <a:latin typeface="Meiryo UI"/>
-                        </a:rPr>
-                        <a:t>ポート枯渇、MTU の問題、DNS の遅延などを再現できる</a:t>
-                      </a:r>
-                    </a:p>
-                  </a:txBody>
-                  <a:tcPr>
-                    <a:solidFill>
-                      <a:srgbClr val="F2F6FA"/>
-                    </a:solidFill>
-                  </a:tcPr>
-                </a:tc>
-              </a:tr>
-              <a:tr h="310896">
-                <a:tc>
-                  <a:txBody>
-                    <a:bodyPr/>
-                    <a:lstStyle/>
-                    <a:p>
-                      <a:pPr algn="l"/>
-                      <a:r>
-                        <a:rPr sz="1300" b="0">
-                          <a:solidFill>
-                            <a:srgbClr val="1F3355"/>
-                          </a:solidFill>
-                          <a:latin typeface="Meiryo UI"/>
-                        </a:rPr>
-                        <a:t>実機を繋げる</a:t>
-                      </a:r>
-                    </a:p>
-                  </a:txBody>
-                  <a:tcPr>
-                    <a:solidFill>
-                      <a:srgbClr val="FFFFFF"/>
-                    </a:solidFill>
-                  </a:tcPr>
-                </a:tc>
-                <a:tc>
-                  <a:txBody>
-                    <a:bodyPr/>
-                    <a:lstStyle/>
-                    <a:p>
-                      <a:pPr algn="l"/>
-                      <a:r>
-                        <a:rPr sz="1300" b="0">
-                          <a:solidFill>
-                            <a:srgbClr val="1F3355"/>
-                          </a:solidFill>
-                          <a:latin typeface="Meiryo UI"/>
-                        </a:rPr>
-                        <a:t>物理の Cisco 892FJ / C1111-8P を繋ぎ込んで、本物の設定を投入できる</a:t>
-                      </a:r>
-                    </a:p>
-                  </a:txBody>
-                  <a:tcPr>
-                    <a:solidFill>
-                      <a:srgbClr val="FFFFFF"/>
-                    </a:solidFill>
-                  </a:tcPr>
-                </a:tc>
-              </a:tr>
-              <a:tr h="310896">
-                <a:tc>
-                  <a:txBody>
-                    <a:bodyPr/>
-                    <a:lstStyle/>
-                    <a:p>
-                      <a:pPr algn="l"/>
-                      <a:r>
-                        <a:rPr sz="1300" b="0">
-                          <a:solidFill>
-                            <a:srgbClr val="1F3355"/>
-                          </a:solidFill>
-                          <a:latin typeface="Meiryo UI"/>
-                        </a:rPr>
-                        <a:t>自動設定を試す</a:t>
-                      </a:r>
-                    </a:p>
-                  </a:txBody>
-                  <a:tcPr>
-                    <a:solidFill>
-                      <a:srgbClr val="F2F6FA"/>
-                    </a:solidFill>
-                  </a:tcPr>
-                </a:tc>
-                <a:tc>
-                  <a:txBody>
-                    <a:bodyPr/>
-                    <a:lstStyle/>
-                    <a:p>
-                      <a:pPr algn="l"/>
-                      <a:r>
-                        <a:rPr sz="1300" b="0">
-                          <a:solidFill>
-                            <a:srgbClr val="1F3355"/>
-                          </a:solidFill>
-                          <a:latin typeface="Meiryo UI"/>
-                        </a:rPr>
-                        <a:t>ルール配布サーバがあるので、CPE が自分で取ってくる本番の形で試せる</a:t>
-                      </a:r>
-                    </a:p>
-                  </a:txBody>
-                  <a:tcPr>
-                    <a:solidFill>
-                      <a:srgbClr val="F2F6FA"/>
-                    </a:solidFill>
-                  </a:tcPr>
-                </a:tc>
-              </a:tr>
-            </a:tbl>
-          </a:graphicData>
-        </a:graphic>
-      </p:graphicFrame>
-      <p:sp>
-        <p:nvSpPr>
-          <p:cNvPr id="4" name="TextBox 3"/>
-          <p:cNvSpPr txBox="1"/>
-          <p:nvPr/>
-        </p:nvSpPr>
-        <p:spPr>
-          <a:xfrm>
-            <a:off x="502920" y="3575304"/>
-            <a:ext cx="11155680" cy="548640"/>
-          </a:xfrm>
-          <a:prstGeom prst="rect">
-            <a:avLst/>
-          </a:prstGeom>
-          <a:noFill/>
-        </p:spPr>
-        <p:txBody>
-          <a:bodyPr wrap="square">
-            <a:spAutoFit/>
-          </a:bodyPr>
-          <a:lstStyle/>
-          <a:p>
-            <a:pPr algn="l"/>
-            <a:r>
-              <a:rPr sz="1200" b="0">
-                <a:solidFill>
-                  <a:srgbClr val="007ACC"/>
-                </a:solidFill>
-                <a:latin typeface="Meiryo UI"/>
-              </a:rPr>
-              <a:t>MAP-E の計算も確かめました。手計算した 198.51.100.10 / 4176〜4191 / MTU 1460 が、CPE の自動計算と完全に一致</a:t>
             </a:r>
           </a:p>
         </p:txBody>
@@ -17047,6 +16909,1025 @@
                 </a:solidFill>
                 <a:latin typeface="Meiryo UI"/>
               </a:rPr>
+              <a:t>何を再現しているのか</a:t>
+            </a:r>
+          </a:p>
+        </p:txBody>
+      </p:sp>
+      <p:sp>
+        <p:nvSpPr>
+          <p:cNvPr id="3" name="Rounded Rectangle 2"/>
+          <p:cNvSpPr/>
+          <p:nvPr/>
+        </p:nvSpPr>
+        <p:spPr>
+          <a:xfrm>
+            <a:off x="685800" y="2377440"/>
+            <a:ext cx="2211933" cy="1371600"/>
+          </a:xfrm>
+          <a:prstGeom prst="roundRect">
+            <a:avLst/>
+          </a:prstGeom>
+          <a:solidFill>
+            <a:srgbClr val="EFF5FA"/>
+          </a:solidFill>
+          <a:ln w="22225">
+            <a:solidFill>
+              <a:srgbClr val="007ACC"/>
+            </a:solidFill>
+          </a:ln>
+        </p:spPr>
+        <p:style>
+          <a:lnRef idx="1">
+            <a:schemeClr val="accent1"/>
+          </a:lnRef>
+          <a:fillRef idx="3">
+            <a:schemeClr val="accent1"/>
+          </a:fillRef>
+          <a:effectRef idx="2">
+            <a:schemeClr val="accent1"/>
+          </a:effectRef>
+          <a:fontRef idx="minor">
+            <a:schemeClr val="lt1"/>
+          </a:fontRef>
+        </p:style>
+        <p:txBody>
+          <a:bodyPr rtlCol="0" anchor="ctr" wrap="square"/>
+          <a:lstStyle/>
+          <a:p>
+            <a:pPr algn="ctr"/>
+            <a:r>
+              <a:rPr sz="1500" b="1">
+                <a:solidFill>
+                  <a:srgbClr val="1F3355"/>
+                </a:solidFill>
+                <a:latin typeface="Meiryo UI"/>
+              </a:rPr>
+              <a:t>お客様のルータ</a:t>
+            </a:r>
+          </a:p>
+          <a:p>
+            <a:pPr algn="ctr"/>
+            <a:r>
+              <a:rPr sz="1100" b="0">
+                <a:solidFill>
+                  <a:srgbClr val="555555"/>
+                </a:solidFill>
+                <a:latin typeface="Meiryo UI"/>
+              </a:rPr>
+              <a:t>OpenWrt / 892FJ
+/ C1111-8P</a:t>
+            </a:r>
+          </a:p>
+        </p:txBody>
+      </p:sp>
+      <p:sp>
+        <p:nvSpPr>
+          <p:cNvPr id="4" name="Right Arrow 3"/>
+          <p:cNvSpPr/>
+          <p:nvPr/>
+        </p:nvSpPr>
+        <p:spPr>
+          <a:xfrm>
+            <a:off x="2897733" y="2926080"/>
+            <a:ext cx="647395" cy="292608"/>
+          </a:xfrm>
+          <a:prstGeom prst="rightArrow">
+            <a:avLst/>
+          </a:prstGeom>
+          <a:solidFill>
+            <a:srgbClr val="007ACC"/>
+          </a:solidFill>
+          <a:ln>
+            <a:noFill/>
+          </a:ln>
+        </p:spPr>
+        <p:style>
+          <a:lnRef idx="1">
+            <a:schemeClr val="accent1"/>
+          </a:lnRef>
+          <a:fillRef idx="3">
+            <a:schemeClr val="accent1"/>
+          </a:fillRef>
+          <a:effectRef idx="2">
+            <a:schemeClr val="accent1"/>
+          </a:effectRef>
+          <a:fontRef idx="minor">
+            <a:schemeClr val="lt1"/>
+          </a:fontRef>
+        </p:style>
+        <p:txBody>
+          <a:bodyPr rtlCol="0" anchor="ctr"/>
+          <a:lstStyle/>
+          <a:p>
+            <a:pPr algn="ctr"/>
+          </a:p>
+        </p:txBody>
+      </p:sp>
+      <p:sp>
+        <p:nvSpPr>
+          <p:cNvPr id="5" name="Rounded Rectangle 4"/>
+          <p:cNvSpPr/>
+          <p:nvPr/>
+        </p:nvSpPr>
+        <p:spPr>
+          <a:xfrm>
+            <a:off x="3545128" y="2377440"/>
+            <a:ext cx="2211933" cy="1371600"/>
+          </a:xfrm>
+          <a:prstGeom prst="roundRect">
+            <a:avLst/>
+          </a:prstGeom>
+          <a:solidFill>
+            <a:srgbClr val="EFF5FA"/>
+          </a:solidFill>
+          <a:ln w="22225">
+            <a:solidFill>
+              <a:srgbClr val="007ACC"/>
+            </a:solidFill>
+          </a:ln>
+        </p:spPr>
+        <p:style>
+          <a:lnRef idx="1">
+            <a:schemeClr val="accent1"/>
+          </a:lnRef>
+          <a:fillRef idx="3">
+            <a:schemeClr val="accent1"/>
+          </a:fillRef>
+          <a:effectRef idx="2">
+            <a:schemeClr val="accent1"/>
+          </a:effectRef>
+          <a:fontRef idx="minor">
+            <a:schemeClr val="lt1"/>
+          </a:fontRef>
+        </p:style>
+        <p:txBody>
+          <a:bodyPr rtlCol="0" anchor="ctr" wrap="square"/>
+          <a:lstStyle/>
+          <a:p>
+            <a:pPr algn="ctr"/>
+            <a:r>
+              <a:rPr sz="1500" b="1">
+                <a:solidFill>
+                  <a:srgbClr val="1F3355"/>
+                </a:solidFill>
+                <a:latin typeface="Meiryo UI"/>
+              </a:rPr>
+              <a:t>NTT の網の代わり</a:t>
+            </a:r>
+          </a:p>
+          <a:p>
+            <a:pPr algn="ctr"/>
+            <a:r>
+              <a:rPr sz="1100" b="0">
+                <a:solidFill>
+                  <a:srgbClr val="555555"/>
+                </a:solidFill>
+                <a:latin typeface="Meiryo UI"/>
+              </a:rPr>
+              <a:t>住所を配る役
+RA と DHCPv6</a:t>
+            </a:r>
+          </a:p>
+        </p:txBody>
+      </p:sp>
+      <p:sp>
+        <p:nvSpPr>
+          <p:cNvPr id="6" name="Right Arrow 5"/>
+          <p:cNvSpPr/>
+          <p:nvPr/>
+        </p:nvSpPr>
+        <p:spPr>
+          <a:xfrm>
+            <a:off x="5757062" y="2926080"/>
+            <a:ext cx="647395" cy="292608"/>
+          </a:xfrm>
+          <a:prstGeom prst="rightArrow">
+            <a:avLst/>
+          </a:prstGeom>
+          <a:solidFill>
+            <a:srgbClr val="007ACC"/>
+          </a:solidFill>
+          <a:ln>
+            <a:noFill/>
+          </a:ln>
+        </p:spPr>
+        <p:style>
+          <a:lnRef idx="1">
+            <a:schemeClr val="accent1"/>
+          </a:lnRef>
+          <a:fillRef idx="3">
+            <a:schemeClr val="accent1"/>
+          </a:fillRef>
+          <a:effectRef idx="2">
+            <a:schemeClr val="accent1"/>
+          </a:effectRef>
+          <a:fontRef idx="minor">
+            <a:schemeClr val="lt1"/>
+          </a:fontRef>
+        </p:style>
+        <p:txBody>
+          <a:bodyPr rtlCol="0" anchor="ctr"/>
+          <a:lstStyle/>
+          <a:p>
+            <a:pPr algn="ctr"/>
+          </a:p>
+        </p:txBody>
+      </p:sp>
+      <p:sp>
+        <p:nvSpPr>
+          <p:cNvPr id="7" name="Rounded Rectangle 6"/>
+          <p:cNvSpPr/>
+          <p:nvPr/>
+        </p:nvSpPr>
+        <p:spPr>
+          <a:xfrm>
+            <a:off x="6404457" y="2377440"/>
+            <a:ext cx="2211933" cy="1371600"/>
+          </a:xfrm>
+          <a:prstGeom prst="roundRect">
+            <a:avLst/>
+          </a:prstGeom>
+          <a:solidFill>
+            <a:srgbClr val="EFF5FA"/>
+          </a:solidFill>
+          <a:ln w="22225">
+            <a:solidFill>
+              <a:srgbClr val="007ACC"/>
+            </a:solidFill>
+          </a:ln>
+        </p:spPr>
+        <p:style>
+          <a:lnRef idx="1">
+            <a:schemeClr val="accent1"/>
+          </a:lnRef>
+          <a:fillRef idx="3">
+            <a:schemeClr val="accent1"/>
+          </a:fillRef>
+          <a:effectRef idx="2">
+            <a:schemeClr val="accent1"/>
+          </a:effectRef>
+          <a:fontRef idx="minor">
+            <a:schemeClr val="lt1"/>
+          </a:fontRef>
+        </p:style>
+        <p:txBody>
+          <a:bodyPr rtlCol="0" anchor="ctr" wrap="square"/>
+          <a:lstStyle/>
+          <a:p>
+            <a:pPr algn="ctr"/>
+            <a:r>
+              <a:rPr sz="1500" b="1">
+                <a:solidFill>
+                  <a:srgbClr val="1F3355"/>
+                </a:solidFill>
+                <a:latin typeface="Meiryo UI"/>
+              </a:rPr>
+              <a:t>受け口</a:t>
+            </a:r>
+          </a:p>
+          <a:p>
+            <a:pPr algn="ctr"/>
+            <a:r>
+              <a:rPr sz="1100" b="0">
+                <a:solidFill>
+                  <a:srgbClr val="555555"/>
+                </a:solidFill>
+                <a:latin typeface="Meiryo UI"/>
+              </a:rPr>
+              <a:t>荷物を降ろす側
+MAP-E / DS-Lite</a:t>
+            </a:r>
+          </a:p>
+        </p:txBody>
+      </p:sp>
+      <p:sp>
+        <p:nvSpPr>
+          <p:cNvPr id="8" name="Right Arrow 7"/>
+          <p:cNvSpPr/>
+          <p:nvPr/>
+        </p:nvSpPr>
+        <p:spPr>
+          <a:xfrm>
+            <a:off x="8616391" y="2926080"/>
+            <a:ext cx="647395" cy="292608"/>
+          </a:xfrm>
+          <a:prstGeom prst="rightArrow">
+            <a:avLst/>
+          </a:prstGeom>
+          <a:solidFill>
+            <a:srgbClr val="007ACC"/>
+          </a:solidFill>
+          <a:ln>
+            <a:noFill/>
+          </a:ln>
+        </p:spPr>
+        <p:style>
+          <a:lnRef idx="1">
+            <a:schemeClr val="accent1"/>
+          </a:lnRef>
+          <a:fillRef idx="3">
+            <a:schemeClr val="accent1"/>
+          </a:fillRef>
+          <a:effectRef idx="2">
+            <a:schemeClr val="accent1"/>
+          </a:effectRef>
+          <a:fontRef idx="minor">
+            <a:schemeClr val="lt1"/>
+          </a:fontRef>
+        </p:style>
+        <p:txBody>
+          <a:bodyPr rtlCol="0" anchor="ctr"/>
+          <a:lstStyle/>
+          <a:p>
+            <a:pPr algn="ctr"/>
+          </a:p>
+        </p:txBody>
+      </p:sp>
+      <p:sp>
+        <p:nvSpPr>
+          <p:cNvPr id="9" name="Rounded Rectangle 8"/>
+          <p:cNvSpPr/>
+          <p:nvPr/>
+        </p:nvSpPr>
+        <p:spPr>
+          <a:xfrm>
+            <a:off x="9263786" y="2377440"/>
+            <a:ext cx="2211933" cy="1371600"/>
+          </a:xfrm>
+          <a:prstGeom prst="roundRect">
+            <a:avLst/>
+          </a:prstGeom>
+          <a:solidFill>
+            <a:srgbClr val="EFF5FA"/>
+          </a:solidFill>
+          <a:ln w="22225">
+            <a:solidFill>
+              <a:srgbClr val="007ACC"/>
+            </a:solidFill>
+          </a:ln>
+        </p:spPr>
+        <p:style>
+          <a:lnRef idx="1">
+            <a:schemeClr val="accent1"/>
+          </a:lnRef>
+          <a:fillRef idx="3">
+            <a:schemeClr val="accent1"/>
+          </a:fillRef>
+          <a:effectRef idx="2">
+            <a:schemeClr val="accent1"/>
+          </a:effectRef>
+          <a:fontRef idx="minor">
+            <a:schemeClr val="lt1"/>
+          </a:fontRef>
+        </p:style>
+        <p:txBody>
+          <a:bodyPr rtlCol="0" anchor="ctr" wrap="square"/>
+          <a:lstStyle/>
+          <a:p>
+            <a:pPr algn="ctr"/>
+            <a:r>
+              <a:rPr sz="1500" b="1">
+                <a:solidFill>
+                  <a:srgbClr val="1F3355"/>
+                </a:solidFill>
+                <a:latin typeface="Meiryo UI"/>
+              </a:rPr>
+              <a:t>模擬インターネット</a:t>
+            </a:r>
+          </a:p>
+          <a:p>
+            <a:pPr algn="ctr"/>
+            <a:r>
+              <a:rPr sz="1100" b="0">
+                <a:solidFill>
+                  <a:srgbClr val="555555"/>
+                </a:solidFill>
+                <a:latin typeface="Meiryo UI"/>
+              </a:rPr>
+              <a:t>Web と DNS
++ ルール配布サーバ</a:t>
+            </a:r>
+          </a:p>
+        </p:txBody>
+      </p:sp>
+      <p:sp>
+        <p:nvSpPr>
+          <p:cNvPr id="10" name="TextBox 9"/>
+          <p:cNvSpPr txBox="1"/>
+          <p:nvPr/>
+        </p:nvSpPr>
+        <p:spPr>
+          <a:xfrm>
+            <a:off x="685800" y="4114800"/>
+            <a:ext cx="10789920" cy="1828800"/>
+          </a:xfrm>
+          <a:prstGeom prst="rect">
+            <a:avLst/>
+          </a:prstGeom>
+          <a:noFill/>
+        </p:spPr>
+        <p:txBody>
+          <a:bodyPr wrap="square">
+            <a:spAutoFit/>
+          </a:bodyPr>
+          <a:lstStyle/>
+          <a:p>
+            <a:pPr algn="l">
+              <a:spcAft>
+                <a:spcPts val="600"/>
+              </a:spcAft>
+            </a:pPr>
+            <a:r>
+              <a:rPr sz="1400" b="0">
+                <a:solidFill>
+                  <a:srgbClr val="555555"/>
+                </a:solidFill>
+                <a:latin typeface="Meiryo UI"/>
+              </a:rPr>
+              <a:t>本番の回線では試せないので、NTT の網と VNE を丸ごと自宅に再現しました。PPPoE の受け口もあるので切替前の状態も作れます。</a:t>
+            </a:r>
+          </a:p>
+          <a:p>
+            <a:pPr algn="l">
+              <a:spcAft>
+                <a:spcPts val="600"/>
+              </a:spcAft>
+            </a:pPr>
+            <a:r>
+              <a:rPr sz="1400" b="1">
+                <a:solidFill>
+                  <a:srgbClr val="C0392B"/>
+                </a:solidFill>
+                <a:latin typeface="Meiryo UI"/>
+              </a:rPr>
+              <a:t>※ 右端に MAP-E の「自動設定」の相手方 (ルール配布サーバ) もあります。本番と同じ形で試せます。</a:t>
+            </a:r>
+          </a:p>
+          <a:p>
+            <a:pPr algn="l">
+              <a:spcAft>
+                <a:spcPts val="600"/>
+              </a:spcAft>
+            </a:pPr>
+            <a:r>
+              <a:rPr sz="1400" b="1">
+                <a:solidFill>
+                  <a:srgbClr val="C0392B"/>
+                </a:solidFill>
+                <a:latin typeface="Meiryo UI"/>
+              </a:rPr>
+              <a:t>※ 同じものを会社の VMware に再現する手順書一式があります。詰まった箇所も全部載せてあるので、案件前の事前検証に使えます。</a:t>
+            </a:r>
+          </a:p>
+          <a:p>
+            <a:pPr algn="l">
+              <a:spcAft>
+                <a:spcPts val="600"/>
+              </a:spcAft>
+            </a:pPr>
+            <a:r>
+              <a:rPr sz="1400" b="0">
+                <a:solidFill>
+                  <a:srgbClr val="555555"/>
+                </a:solidFill>
+                <a:latin typeface="Meiryo UI"/>
+              </a:rPr>
+              <a:t>模擬インターネットの Web はアクセス元のアドレスを表示します。これが経路を確かめる決め手になります。</a:t>
+            </a:r>
+          </a:p>
+          <a:p>
+            <a:pPr algn="l">
+              <a:spcAft>
+                <a:spcPts val="600"/>
+              </a:spcAft>
+            </a:pPr>
+            <a:r>
+              <a:rPr sz="1400" b="1">
+                <a:solidFill>
+                  <a:srgbClr val="C0392B"/>
+                </a:solidFill>
+                <a:latin typeface="Meiryo UI"/>
+              </a:rPr>
+              <a:t>※ アドレスは全部ドキュメント用の範囲 (2001:db8::/32 / 198.51.100.0/24 / 203.0.113.0/24)。</a:t>
+            </a:r>
+          </a:p>
+          <a:p>
+            <a:pPr algn="l">
+              <a:spcAft>
+                <a:spcPts val="600"/>
+              </a:spcAft>
+            </a:pPr>
+            <a:r>
+              <a:rPr sz="1400" b="0">
+                <a:solidFill>
+                  <a:srgbClr val="555555"/>
+                </a:solidFill>
+                <a:latin typeface="Meiryo UI"/>
+              </a:rPr>
+              <a:t>  本物の誰かに迷惑をかけない設計にしてあります。</a:t>
+            </a:r>
+          </a:p>
+        </p:txBody>
+      </p:sp>
+    </p:spTree>
+  </p:cSld>
+  <p:clrMapOvr>
+    <a:masterClrMapping/>
+  </p:clrMapOvr>
+</p:sld>
+</file>
+
+<file path=ppt/slides/slide41.xml><?xml version="1.0" encoding="utf-8"?>
+<p:sld xmlns:a="http://schemas.openxmlformats.org/drawingml/2006/main" xmlns:p="http://schemas.openxmlformats.org/presentationml/2006/main" xmlns:r="http://schemas.openxmlformats.org/officeDocument/2006/relationships">
+  <p:cSld>
+    <p:spTree>
+      <p:nvGrpSpPr>
+        <p:cNvPr id="1" name=""/>
+        <p:cNvGrpSpPr/>
+        <p:nvPr/>
+      </p:nvGrpSpPr>
+      <p:grpSpPr/>
+      <p:sp>
+        <p:nvSpPr>
+          <p:cNvPr id="2" name="TextBox 1"/>
+          <p:cNvSpPr txBox="1"/>
+          <p:nvPr/>
+        </p:nvSpPr>
+        <p:spPr>
+          <a:xfrm>
+            <a:off x="502920" y="274320"/>
+            <a:ext cx="11155680" cy="731520"/>
+          </a:xfrm>
+          <a:prstGeom prst="rect">
+            <a:avLst/>
+          </a:prstGeom>
+          <a:noFill/>
+        </p:spPr>
+        <p:txBody>
+          <a:bodyPr wrap="square">
+            <a:spAutoFit/>
+          </a:bodyPr>
+          <a:lstStyle/>
+          <a:p>
+            <a:pPr algn="l"/>
+            <a:r>
+              <a:rPr sz="2600" b="1">
+                <a:solidFill>
+                  <a:srgbClr val="1F3355"/>
+                </a:solidFill>
+                <a:latin typeface="Meiryo UI"/>
+              </a:rPr>
+              <a:t>これで何ができるのか</a:t>
+            </a:r>
+          </a:p>
+        </p:txBody>
+      </p:sp>
+      <p:graphicFrame>
+        <p:nvGraphicFramePr>
+          <p:cNvPr id="3" name="Table 2"/>
+          <p:cNvGraphicFramePr>
+            <a:graphicFrameLocks noGrp="1"/>
+          </p:cNvGraphicFramePr>
+          <p:nvPr/>
+        </p:nvGraphicFramePr>
+        <p:xfrm>
+          <a:off x="502920" y="1143000"/>
+          <a:ext cx="10789920" cy="2176272"/>
+        </p:xfrm>
+        <a:graphic>
+          <a:graphicData uri="http://schemas.openxmlformats.org/drawingml/2006/table">
+            <a:tbl>
+              <a:tblPr>
+                <a:tableStyleId>{5C22544A-7EE6-4342-B048-85BDC9FD1C3A}</a:tableStyleId>
+              </a:tblPr>
+              <a:tblGrid>
+                <a:gridCol w="2743200"/>
+                <a:gridCol w="8046720"/>
+              </a:tblGrid>
+              <a:tr h="310896">
+                <a:tc>
+                  <a:txBody>
+                    <a:bodyPr/>
+                    <a:lstStyle/>
+                    <a:p>
+                      <a:pPr algn="l"/>
+                      <a:r>
+                        <a:rPr sz="1400" b="1">
+                          <a:solidFill>
+                            <a:srgbClr val="FFFFFF"/>
+                          </a:solidFill>
+                          <a:latin typeface="Meiryo UI"/>
+                        </a:rPr>
+                        <a:t>できること</a:t>
+                      </a:r>
+                    </a:p>
+                  </a:txBody>
+                  <a:tcPr>
+                    <a:solidFill>
+                      <a:srgbClr val="1F3355"/>
+                    </a:solidFill>
+                  </a:tcPr>
+                </a:tc>
+                <a:tc>
+                  <a:txBody>
+                    <a:bodyPr/>
+                    <a:lstStyle/>
+                    <a:p>
+                      <a:pPr algn="l"/>
+                      <a:r>
+                        <a:rPr sz="1400" b="1">
+                          <a:solidFill>
+                            <a:srgbClr val="FFFFFF"/>
+                          </a:solidFill>
+                          <a:latin typeface="Meiryo UI"/>
+                        </a:rPr>
+                        <a:t>具体的に</a:t>
+                      </a:r>
+                    </a:p>
+                  </a:txBody>
+                  <a:tcPr>
+                    <a:solidFill>
+                      <a:srgbClr val="1F3355"/>
+                    </a:solidFill>
+                  </a:tcPr>
+                </a:tc>
+              </a:tr>
+              <a:tr h="310896">
+                <a:tc>
+                  <a:txBody>
+                    <a:bodyPr/>
+                    <a:lstStyle/>
+                    <a:p>
+                      <a:pPr algn="l"/>
+                      <a:r>
+                        <a:rPr sz="1300" b="0">
+                          <a:solidFill>
+                            <a:srgbClr val="1F3355"/>
+                          </a:solidFill>
+                          <a:latin typeface="Meiryo UI"/>
+                        </a:rPr>
+                        <a:t>切替の練習</a:t>
+                      </a:r>
+                    </a:p>
+                  </a:txBody>
+                  <a:tcPr>
+                    <a:solidFill>
+                      <a:srgbClr val="FFFFFF"/>
+                    </a:solidFill>
+                  </a:tcPr>
+                </a:tc>
+                <a:tc>
+                  <a:txBody>
+                    <a:bodyPr/>
+                    <a:lstStyle/>
+                    <a:p>
+                      <a:pPr algn="l"/>
+                      <a:r>
+                        <a:rPr sz="1300" b="0">
+                          <a:solidFill>
+                            <a:srgbClr val="1F3355"/>
+                          </a:solidFill>
+                          <a:latin typeface="Meiryo UI"/>
+                        </a:rPr>
+                        <a:t>PPPoE から IPoE に切り替える手順を、本番と同じ順番で通せる</a:t>
+                      </a:r>
+                    </a:p>
+                  </a:txBody>
+                  <a:tcPr>
+                    <a:solidFill>
+                      <a:srgbClr val="FFFFFF"/>
+                    </a:solidFill>
+                  </a:tcPr>
+                </a:tc>
+              </a:tr>
+              <a:tr h="310896">
+                <a:tc>
+                  <a:txBody>
+                    <a:bodyPr/>
+                    <a:lstStyle/>
+                    <a:p>
+                      <a:pPr algn="l"/>
+                      <a:r>
+                        <a:rPr sz="1300" b="0">
+                          <a:solidFill>
+                            <a:srgbClr val="1F3355"/>
+                          </a:solidFill>
+                          <a:latin typeface="Meiryo UI"/>
+                        </a:rPr>
+                        <a:t>方式の切り替え</a:t>
+                      </a:r>
+                    </a:p>
+                  </a:txBody>
+                  <a:tcPr>
+                    <a:solidFill>
+                      <a:srgbClr val="F2F6FA"/>
+                    </a:solidFill>
+                  </a:tcPr>
+                </a:tc>
+                <a:tc>
+                  <a:txBody>
+                    <a:bodyPr/>
+                    <a:lstStyle/>
+                    <a:p>
+                      <a:pPr algn="l"/>
+                      <a:r>
+                        <a:rPr sz="1300" b="0">
+                          <a:solidFill>
+                            <a:srgbClr val="1F3355"/>
+                          </a:solidFill>
+                          <a:latin typeface="Meiryo UI"/>
+                        </a:rPr>
+                        <a:t>MAP-E と DS-Lite を行き来できる。RA 方式と PD 方式 (まとめ借り) も切替可</a:t>
+                      </a:r>
+                    </a:p>
+                  </a:txBody>
+                  <a:tcPr>
+                    <a:solidFill>
+                      <a:srgbClr val="F2F6FA"/>
+                    </a:solidFill>
+                  </a:tcPr>
+                </a:tc>
+              </a:tr>
+              <a:tr h="310896">
+                <a:tc>
+                  <a:txBody>
+                    <a:bodyPr/>
+                    <a:lstStyle/>
+                    <a:p>
+                      <a:pPr algn="l"/>
+                      <a:r>
+                        <a:rPr sz="1300" b="0">
+                          <a:solidFill>
+                            <a:srgbClr val="1F3355"/>
+                          </a:solidFill>
+                          <a:latin typeface="Meiryo UI"/>
+                        </a:rPr>
+                        <a:t>パケットを見る</a:t>
+                      </a:r>
+                    </a:p>
+                  </a:txBody>
+                  <a:tcPr>
+                    <a:solidFill>
+                      <a:srgbClr val="FFFFFF"/>
+                    </a:solidFill>
+                  </a:tcPr>
+                </a:tc>
+                <a:tc>
+                  <a:txBody>
+                    <a:bodyPr/>
+                    <a:lstStyle/>
+                    <a:p>
+                      <a:pPr algn="l"/>
+                      <a:r>
+                        <a:rPr sz="1300" b="0">
+                          <a:solidFill>
+                            <a:srgbClr val="1F3355"/>
+                          </a:solidFill>
+                          <a:latin typeface="Meiryo UI"/>
+                        </a:rPr>
+                        <a:t>RA、DHCPv6 のやり取り、トンネルの中身をキャプチャできる</a:t>
+                      </a:r>
+                    </a:p>
+                  </a:txBody>
+                  <a:tcPr>
+                    <a:solidFill>
+                      <a:srgbClr val="FFFFFF"/>
+                    </a:solidFill>
+                  </a:tcPr>
+                </a:tc>
+              </a:tr>
+              <a:tr h="310896">
+                <a:tc>
+                  <a:txBody>
+                    <a:bodyPr/>
+                    <a:lstStyle/>
+                    <a:p>
+                      <a:pPr algn="l"/>
+                      <a:r>
+                        <a:rPr sz="1300" b="0">
+                          <a:solidFill>
+                            <a:srgbClr val="1F3355"/>
+                          </a:solidFill>
+                          <a:latin typeface="Meiryo UI"/>
+                        </a:rPr>
+                        <a:t>わざと壊す</a:t>
+                      </a:r>
+                    </a:p>
+                  </a:txBody>
+                  <a:tcPr>
+                    <a:solidFill>
+                      <a:srgbClr val="F2F6FA"/>
+                    </a:solidFill>
+                  </a:tcPr>
+                </a:tc>
+                <a:tc>
+                  <a:txBody>
+                    <a:bodyPr/>
+                    <a:lstStyle/>
+                    <a:p>
+                      <a:pPr algn="l"/>
+                      <a:r>
+                        <a:rPr sz="1300" b="0">
+                          <a:solidFill>
+                            <a:srgbClr val="1F3355"/>
+                          </a:solidFill>
+                          <a:latin typeface="Meiryo UI"/>
+                        </a:rPr>
+                        <a:t>ポート枯渇、MTU の問題、DNS の遅延などを再現できる</a:t>
+                      </a:r>
+                    </a:p>
+                  </a:txBody>
+                  <a:tcPr>
+                    <a:solidFill>
+                      <a:srgbClr val="F2F6FA"/>
+                    </a:solidFill>
+                  </a:tcPr>
+                </a:tc>
+              </a:tr>
+              <a:tr h="310896">
+                <a:tc>
+                  <a:txBody>
+                    <a:bodyPr/>
+                    <a:lstStyle/>
+                    <a:p>
+                      <a:pPr algn="l"/>
+                      <a:r>
+                        <a:rPr sz="1300" b="0">
+                          <a:solidFill>
+                            <a:srgbClr val="1F3355"/>
+                          </a:solidFill>
+                          <a:latin typeface="Meiryo UI"/>
+                        </a:rPr>
+                        <a:t>実機を繋げる</a:t>
+                      </a:r>
+                    </a:p>
+                  </a:txBody>
+                  <a:tcPr>
+                    <a:solidFill>
+                      <a:srgbClr val="FFFFFF"/>
+                    </a:solidFill>
+                  </a:tcPr>
+                </a:tc>
+                <a:tc>
+                  <a:txBody>
+                    <a:bodyPr/>
+                    <a:lstStyle/>
+                    <a:p>
+                      <a:pPr algn="l"/>
+                      <a:r>
+                        <a:rPr sz="1300" b="0">
+                          <a:solidFill>
+                            <a:srgbClr val="1F3355"/>
+                          </a:solidFill>
+                          <a:latin typeface="Meiryo UI"/>
+                        </a:rPr>
+                        <a:t>物理の Cisco 892FJ / C1111-8P を繋ぎ込んで、本物の設定を投入できる</a:t>
+                      </a:r>
+                    </a:p>
+                  </a:txBody>
+                  <a:tcPr>
+                    <a:solidFill>
+                      <a:srgbClr val="FFFFFF"/>
+                    </a:solidFill>
+                  </a:tcPr>
+                </a:tc>
+              </a:tr>
+              <a:tr h="310896">
+                <a:tc>
+                  <a:txBody>
+                    <a:bodyPr/>
+                    <a:lstStyle/>
+                    <a:p>
+                      <a:pPr algn="l"/>
+                      <a:r>
+                        <a:rPr sz="1300" b="0">
+                          <a:solidFill>
+                            <a:srgbClr val="1F3355"/>
+                          </a:solidFill>
+                          <a:latin typeface="Meiryo UI"/>
+                        </a:rPr>
+                        <a:t>自動設定を試す</a:t>
+                      </a:r>
+                    </a:p>
+                  </a:txBody>
+                  <a:tcPr>
+                    <a:solidFill>
+                      <a:srgbClr val="F2F6FA"/>
+                    </a:solidFill>
+                  </a:tcPr>
+                </a:tc>
+                <a:tc>
+                  <a:txBody>
+                    <a:bodyPr/>
+                    <a:lstStyle/>
+                    <a:p>
+                      <a:pPr algn="l"/>
+                      <a:r>
+                        <a:rPr sz="1300" b="0">
+                          <a:solidFill>
+                            <a:srgbClr val="1F3355"/>
+                          </a:solidFill>
+                          <a:latin typeface="Meiryo UI"/>
+                        </a:rPr>
+                        <a:t>ルール配布サーバがあるので、CPE が自分で取ってくる本番の形で試せる</a:t>
+                      </a:r>
+                    </a:p>
+                  </a:txBody>
+                  <a:tcPr>
+                    <a:solidFill>
+                      <a:srgbClr val="F2F6FA"/>
+                    </a:solidFill>
+                  </a:tcPr>
+                </a:tc>
+              </a:tr>
+            </a:tbl>
+          </a:graphicData>
+        </a:graphic>
+      </p:graphicFrame>
+      <p:sp>
+        <p:nvSpPr>
+          <p:cNvPr id="4" name="TextBox 3"/>
+          <p:cNvSpPr txBox="1"/>
+          <p:nvPr/>
+        </p:nvSpPr>
+        <p:spPr>
+          <a:xfrm>
+            <a:off x="502920" y="3575304"/>
+            <a:ext cx="11155680" cy="548640"/>
+          </a:xfrm>
+          <a:prstGeom prst="rect">
+            <a:avLst/>
+          </a:prstGeom>
+          <a:noFill/>
+        </p:spPr>
+        <p:txBody>
+          <a:bodyPr wrap="square">
+            <a:spAutoFit/>
+          </a:bodyPr>
+          <a:lstStyle/>
+          <a:p>
+            <a:pPr algn="l"/>
+            <a:r>
+              <a:rPr sz="1200" b="0">
+                <a:solidFill>
+                  <a:srgbClr val="007ACC"/>
+                </a:solidFill>
+                <a:latin typeface="Meiryo UI"/>
+              </a:rPr>
+              <a:t>MAP-E の計算も確かめました。手計算した 198.51.100.10 / 4176〜4191 / MTU 1460 が、CPE の自動計算と完全に一致</a:t>
+            </a:r>
+          </a:p>
+        </p:txBody>
+      </p:sp>
+    </p:spTree>
+  </p:cSld>
+  <p:clrMapOvr>
+    <a:masterClrMapping/>
+  </p:clrMapOvr>
+</p:sld>
+</file>
+
+<file path=ppt/slides/slide42.xml><?xml version="1.0" encoding="utf-8"?>
+<p:sld xmlns:a="http://schemas.openxmlformats.org/drawingml/2006/main" xmlns:p="http://schemas.openxmlformats.org/presentationml/2006/main" xmlns:r="http://schemas.openxmlformats.org/officeDocument/2006/relationships">
+  <p:cSld>
+    <p:spTree>
+      <p:nvGrpSpPr>
+        <p:cNvPr id="1" name=""/>
+        <p:cNvGrpSpPr/>
+        <p:nvPr/>
+      </p:nvGrpSpPr>
+      <p:grpSpPr/>
+      <p:sp>
+        <p:nvSpPr>
+          <p:cNvPr id="2" name="TextBox 1"/>
+          <p:cNvSpPr txBox="1"/>
+          <p:nvPr/>
+        </p:nvSpPr>
+        <p:spPr>
+          <a:xfrm>
+            <a:off x="502920" y="274320"/>
+            <a:ext cx="11155680" cy="731520"/>
+          </a:xfrm>
+          <a:prstGeom prst="rect">
+            <a:avLst/>
+          </a:prstGeom>
+          <a:noFill/>
+        </p:spPr>
+        <p:txBody>
+          <a:bodyPr wrap="square">
+            <a:spAutoFit/>
+          </a:bodyPr>
+          <a:lstStyle/>
+          <a:p>
+            <a:pPr algn="l"/>
+            <a:r>
+              <a:rPr sz="2600" b="1">
+                <a:solidFill>
+                  <a:srgbClr val="1F3355"/>
+                </a:solidFill>
+                <a:latin typeface="Meiryo UI"/>
+              </a:rPr>
               <a:t>実機の Cisco 892FJ で DS-Lite を通した結果</a:t>
             </a:r>
           </a:p>
@@ -17548,7 +18429,7 @@
 </p:sld>
 </file>
 
-<file path=ppt/slides/slide41.xml><?xml version="1.0" encoding="utf-8"?>
+<file path=ppt/slides/slide43.xml><?xml version="1.0" encoding="utf-8"?>
 <p:sld xmlns:a="http://schemas.openxmlformats.org/drawingml/2006/main" xmlns:p="http://schemas.openxmlformats.org/presentationml/2006/main" xmlns:r="http://schemas.openxmlformats.org/officeDocument/2006/relationships">
   <p:cSld>
     <p:spTree>
@@ -18089,7 +18970,7 @@
 </p:sld>
 </file>
 
-<file path=ppt/slides/slide42.xml><?xml version="1.0" encoding="utf-8"?>
+<file path=ppt/slides/slide44.xml><?xml version="1.0" encoding="utf-8"?>
 <p:sld xmlns:a="http://schemas.openxmlformats.org/drawingml/2006/main" xmlns:p="http://schemas.openxmlformats.org/presentationml/2006/main" xmlns:r="http://schemas.openxmlformats.org/officeDocument/2006/relationships">
   <p:cSld>
     <p:spTree>
@@ -18701,7 +19582,7 @@
 </p:sld>
 </file>
 
-<file path=ppt/slides/slide43.xml><?xml version="1.0" encoding="utf-8"?>
+<file path=ppt/slides/slide45.xml><?xml version="1.0" encoding="utf-8"?>
 <p:sld xmlns:a="http://schemas.openxmlformats.org/drawingml/2006/main" xmlns:p="http://schemas.openxmlformats.org/presentationml/2006/main" xmlns:r="http://schemas.openxmlformats.org/officeDocument/2006/relationships">
   <p:cSld>
     <p:spTree>
@@ -19076,7 +19957,7 @@
 </p:sld>
 </file>
 
-<file path=ppt/slides/slide44.xml><?xml version="1.0" encoding="utf-8"?>
+<file path=ppt/slides/slide46.xml><?xml version="1.0" encoding="utf-8"?>
 <p:sld xmlns:a="http://schemas.openxmlformats.org/drawingml/2006/main" xmlns:p="http://schemas.openxmlformats.org/presentationml/2006/main" xmlns:r="http://schemas.openxmlformats.org/officeDocument/2006/relationships">
   <p:cSld>
     <p:spTree>
@@ -19403,7 +20284,7 @@
 </p:sld>
 </file>
 
-<file path=ppt/slides/slide45.xml><?xml version="1.0" encoding="utf-8"?>
+<file path=ppt/slides/slide47.xml><?xml version="1.0" encoding="utf-8"?>
 <p:sld xmlns:a="http://schemas.openxmlformats.org/drawingml/2006/main" xmlns:p="http://schemas.openxmlformats.org/presentationml/2006/main" xmlns:r="http://schemas.openxmlformats.org/officeDocument/2006/relationships">
   <p:cSld>
     <p:spTree>
@@ -19714,7 +20595,7 @@
 </p:sld>
 </file>
 
-<file path=ppt/slides/slide46.xml><?xml version="1.0" encoding="utf-8"?>
+<file path=ppt/slides/slide48.xml><?xml version="1.0" encoding="utf-8"?>
 <p:sld xmlns:a="http://schemas.openxmlformats.org/drawingml/2006/main" xmlns:p="http://schemas.openxmlformats.org/presentationml/2006/main" xmlns:r="http://schemas.openxmlformats.org/officeDocument/2006/relationships">
   <p:cSld>
     <p:spTree>

--- a/docs/ipoe-lab/slides/setsumeikai.pptx
+++ b/docs/ipoe-lab/slides/setsumeikai.pptx
@@ -53,6 +53,7 @@
     <p:sldId id="301" r:id="rId53"/>
     <p:sldId id="302" r:id="rId54"/>
     <p:sldId id="303" r:id="rId55"/>
+    <p:sldId id="304" r:id="rId56"/>
   </p:sldIdLst>
   <p:sldSz cx="12191695" cy="6858000" type="screen4x3"/>
   <p:notesSz cx="6858000" cy="9144000"/>
@@ -860,6 +861,106 @@
 </file>
 
 <file path=ppt/notesSlides/notesSlide13.xml><?xml version="1.0" encoding="utf-8"?>
+<p:notes xmlns:a="http://schemas.openxmlformats.org/drawingml/2006/main" xmlns:p="http://schemas.openxmlformats.org/presentationml/2006/main" xmlns:r="http://schemas.openxmlformats.org/officeDocument/2006/relationships">
+  <p:cSld>
+    <p:spTree>
+      <p:nvGrpSpPr>
+        <p:cNvPr id="1" name=""/>
+        <p:cNvGrpSpPr/>
+        <p:nvPr/>
+      </p:nvGrpSpPr>
+      <p:grpSpPr>
+        <a:xfrm>
+          <a:off x="0" y="0"/>
+          <a:ext cx="0" cy="0"/>
+          <a:chOff x="0" y="0"/>
+          <a:chExt cx="0" cy="0"/>
+        </a:xfrm>
+      </p:grpSpPr>
+      <p:sp>
+        <p:nvSpPr>
+          <p:cNvPr id="2" name="Slide Image Placeholder 1"/>
+          <p:cNvSpPr>
+            <a:spLocks noGrp="1"/>
+          </p:cNvSpPr>
+          <p:nvPr>
+            <p:ph type="sldImg" idx="2"/>
+          </p:nvPr>
+        </p:nvSpPr>
+        <p:spPr/>
+      </p:sp>
+      <p:sp>
+        <p:nvSpPr>
+          <p:cNvPr id="3" name="Notes Placeholder 2"/>
+          <p:cNvSpPr>
+            <a:spLocks noGrp="1"/>
+          </p:cNvSpPr>
+          <p:nvPr>
+            <p:ph type="body" idx="3" sz="quarter"/>
+          </p:nvPr>
+        </p:nvSpPr>
+        <p:spPr/>
+        <p:txBody>
+          <a:bodyPr/>
+          <a:lstStyle/>
+          <a:p>
+            <a:r>
+              <a:t>【話す人へ】</a:t>
+            </a:r>
+          </a:p>
+          <a:p>
+            <a:r>
+              <a:t>・**この 3 行は切替当日に効く。**「困ったら思い出してください」と言って先へ進む。</a:t>
+            </a:r>
+          </a:p>
+          <a:p>
+            <a:r>
+              <a:t>  仕組みの説明は不要。**症状 → 見るところ** の対応だけ持ち帰らせる。</a:t>
+            </a:r>
+          </a:p>
+          <a:p>
+            <a:r>
+              <a:t>・1 行目は自分たちが実際に踏んだ。**CPE は送っているのに戻りが 0** という状態で、</a:t>
+            </a:r>
+          </a:p>
+          <a:p>
+            <a:r>
+              <a:t>  show コマンドは正常に見えた。キャプチャして初めて分かった。</a:t>
+            </a:r>
+          </a:p>
+          <a:p>
+            <a:r>
+              <a:t>・2 行目は Cisco のドキュメントにも書いてある挙動 (初回起動時に取得)。</a:t>
+            </a:r>
+          </a:p>
+          <a:p>
+            <a:r>
+              <a:t>  知らないと「設定が効かない」と延々悩む。</a:t>
+            </a:r>
+          </a:p>
+        </p:txBody>
+      </p:sp>
+      <p:sp>
+        <p:nvSpPr>
+          <p:cNvPr id="4" name="Slide Number Placeholder 3"/>
+          <p:cNvSpPr>
+            <a:spLocks noGrp="1"/>
+          </p:cNvSpPr>
+          <p:nvPr>
+            <p:ph type="sldNum" idx="5" sz="quarter"/>
+          </p:nvPr>
+        </p:nvSpPr>
+        <p:spPr/>
+      </p:sp>
+    </p:spTree>
+  </p:cSld>
+  <p:clrMapOvr>
+    <a:masterClrMapping/>
+  </p:clrMapOvr>
+</p:notes>
+</file>
+
+<file path=ppt/notesSlides/notesSlide14.xml><?xml version="1.0" encoding="utf-8"?>
 <p:notes xmlns:a="http://schemas.openxmlformats.org/drawingml/2006/main" xmlns:p="http://schemas.openxmlformats.org/presentationml/2006/main" xmlns:r="http://schemas.openxmlformats.org/officeDocument/2006/relationships">
   <p:cSld>
     <p:spTree>
@@ -19600,6 +19701,414 @@
         </p:nvSpPr>
         <p:spPr>
           <a:xfrm>
+            <a:off x="502920" y="274320"/>
+            <a:ext cx="11155680" cy="731520"/>
+          </a:xfrm>
+          <a:prstGeom prst="rect">
+            <a:avLst/>
+          </a:prstGeom>
+          <a:noFill/>
+        </p:spPr>
+        <p:txBody>
+          <a:bodyPr wrap="square">
+            <a:spAutoFit/>
+          </a:bodyPr>
+          <a:lstStyle/>
+          <a:p>
+            <a:pPr algn="l"/>
+            <a:r>
+              <a:rPr sz="2600" b="1">
+                <a:solidFill>
+                  <a:srgbClr val="1F3355"/>
+                </a:solidFill>
+                <a:latin typeface="Meiryo UI"/>
+              </a:rPr>
+              <a:t>実機を触って分かった、現場で効く 3 つ</a:t>
+            </a:r>
+          </a:p>
+        </p:txBody>
+      </p:sp>
+      <p:graphicFrame>
+        <p:nvGraphicFramePr>
+          <p:cNvPr id="3" name="Table 2"/>
+          <p:cNvGraphicFramePr>
+            <a:graphicFrameLocks noGrp="1"/>
+          </p:cNvGraphicFramePr>
+          <p:nvPr/>
+        </p:nvGraphicFramePr>
+        <p:xfrm>
+          <a:off x="502920" y="1143000"/>
+          <a:ext cx="10789920" cy="1526286"/>
+        </p:xfrm>
+        <a:graphic>
+          <a:graphicData uri="http://schemas.openxmlformats.org/drawingml/2006/table">
+            <a:tbl>
+              <a:tblPr>
+                <a:tableStyleId>{5C22544A-7EE6-4342-B048-85BDC9FD1C3A}</a:tableStyleId>
+              </a:tblPr>
+              <a:tblGrid>
+                <a:gridCol w="3108960"/>
+                <a:gridCol w="4754880"/>
+                <a:gridCol w="2926080"/>
+              </a:tblGrid>
+              <a:tr h="381571">
+                <a:tc>
+                  <a:txBody>
+                    <a:bodyPr/>
+                    <a:lstStyle/>
+                    <a:p>
+                      <a:pPr algn="l"/>
+                      <a:r>
+                        <a:rPr sz="1200" b="1">
+                          <a:solidFill>
+                            <a:srgbClr val="FFFFFF"/>
+                          </a:solidFill>
+                          <a:latin typeface="Meiryo UI"/>
+                        </a:rPr>
+                        <a:t>現場で出る症状</a:t>
+                      </a:r>
+                    </a:p>
+                  </a:txBody>
+                  <a:tcPr>
+                    <a:solidFill>
+                      <a:srgbClr val="1F3355"/>
+                    </a:solidFill>
+                  </a:tcPr>
+                </a:tc>
+                <a:tc>
+                  <a:txBody>
+                    <a:bodyPr/>
+                    <a:lstStyle/>
+                    <a:p>
+                      <a:pPr algn="l"/>
+                      <a:r>
+                        <a:rPr sz="1200" b="1">
+                          <a:solidFill>
+                            <a:srgbClr val="FFFFFF"/>
+                          </a:solidFill>
+                          <a:latin typeface="Meiryo UI"/>
+                        </a:rPr>
+                        <a:t>実機で分かった原因</a:t>
+                      </a:r>
+                    </a:p>
+                  </a:txBody>
+                  <a:tcPr>
+                    <a:solidFill>
+                      <a:srgbClr val="1F3355"/>
+                    </a:solidFill>
+                  </a:tcPr>
+                </a:tc>
+                <a:tc>
+                  <a:txBody>
+                    <a:bodyPr/>
+                    <a:lstStyle/>
+                    <a:p>
+                      <a:pPr algn="l"/>
+                      <a:r>
+                        <a:rPr sz="1200" b="1">
+                          <a:solidFill>
+                            <a:srgbClr val="FFFFFF"/>
+                          </a:solidFill>
+                          <a:latin typeface="Meiryo UI"/>
+                        </a:rPr>
+                        <a:t>最初に見るところ</a:t>
+                      </a:r>
+                    </a:p>
+                  </a:txBody>
+                  <a:tcPr>
+                    <a:solidFill>
+                      <a:srgbClr val="1F3355"/>
+                    </a:solidFill>
+                  </a:tcPr>
+                </a:tc>
+              </a:tr>
+              <a:tr h="381571">
+                <a:tc>
+                  <a:txBody>
+                    <a:bodyPr/>
+                    <a:lstStyle/>
+                    <a:p>
+                      <a:pPr algn="l"/>
+                      <a:r>
+                        <a:rPr sz="1100" b="0">
+                          <a:solidFill>
+                            <a:srgbClr val="1F3355"/>
+                          </a:solidFill>
+                          <a:latin typeface="Meiryo UI"/>
+                        </a:rPr>
+                        <a:t>固定 IP にしたら
+繋がらなくなった</a:t>
+                      </a:r>
+                    </a:p>
+                  </a:txBody>
+                  <a:tcPr>
+                    <a:solidFill>
+                      <a:srgbClr val="FFFFFF"/>
+                    </a:solidFill>
+                  </a:tcPr>
+                </a:tc>
+                <a:tc>
+                  <a:txBody>
+                    <a:bodyPr/>
+                    <a:lstStyle/>
+                    <a:p>
+                      <a:pPr algn="l"/>
+                      <a:r>
+                        <a:rPr sz="1100" b="0">
+                          <a:solidFill>
+                            <a:srgbClr val="1F3355"/>
+                          </a:solidFill>
+                          <a:latin typeface="Meiryo UI"/>
+                        </a:rPr>
+                        <a:t>事業者が配るルールの前提と、実際に降りてくる
+プレフィックスの長さが食い違うと通信が消える</a:t>
+                      </a:r>
+                    </a:p>
+                  </a:txBody>
+                  <a:tcPr>
+                    <a:solidFill>
+                      <a:srgbClr val="FFFFFF"/>
+                    </a:solidFill>
+                  </a:tcPr>
+                </a:tc>
+                <a:tc>
+                  <a:txBody>
+                    <a:bodyPr/>
+                    <a:lstStyle/>
+                    <a:p>
+                      <a:pPr algn="l"/>
+                      <a:r>
+                        <a:rPr sz="1100" b="0">
+                          <a:solidFill>
+                            <a:srgbClr val="1F3355"/>
+                          </a:solidFill>
+                          <a:latin typeface="Meiryo UI"/>
+                        </a:rPr>
+                        <a:t>CPE が使っている送信元アドレスを
+キャプチャで見る</a:t>
+                      </a:r>
+                    </a:p>
+                  </a:txBody>
+                  <a:tcPr>
+                    <a:solidFill>
+                      <a:srgbClr val="FFFFFF"/>
+                    </a:solidFill>
+                  </a:tcPr>
+                </a:tc>
+              </a:tr>
+              <a:tr h="381571">
+                <a:tc>
+                  <a:txBody>
+                    <a:bodyPr/>
+                    <a:lstStyle/>
+                    <a:p>
+                      <a:pPr algn="l"/>
+                      <a:r>
+                        <a:rPr sz="1100" b="0">
+                          <a:solidFill>
+                            <a:srgbClr val="1F3355"/>
+                          </a:solidFill>
+                          <a:latin typeface="Meiryo UI"/>
+                        </a:rPr>
+                        <a:t>設定を変えたのに
+反映されない</a:t>
+                      </a:r>
+                    </a:p>
+                  </a:txBody>
+                  <a:tcPr>
+                    <a:solidFill>
+                      <a:srgbClr val="F2F6FA"/>
+                    </a:solidFill>
+                  </a:tcPr>
+                </a:tc>
+                <a:tc>
+                  <a:txBody>
+                    <a:bodyPr/>
+                    <a:lstStyle/>
+                    <a:p>
+                      <a:pPr algn="l"/>
+                      <a:r>
+                        <a:rPr sz="1100" b="0">
+                          <a:solidFill>
+                            <a:srgbClr val="1F3355"/>
+                          </a:solidFill>
+                          <a:latin typeface="Meiryo UI"/>
+                        </a:rPr>
+                        <a:t>CPE は一度ルールを受け取ると、
+再起動するまで取りに行かない</a:t>
+                      </a:r>
+                    </a:p>
+                  </a:txBody>
+                  <a:tcPr>
+                    <a:solidFill>
+                      <a:srgbClr val="F2F6FA"/>
+                    </a:solidFill>
+                  </a:tcPr>
+                </a:tc>
+                <a:tc>
+                  <a:txBody>
+                    <a:bodyPr/>
+                    <a:lstStyle/>
+                    <a:p>
+                      <a:pPr algn="l"/>
+                      <a:r>
+                        <a:rPr sz="1100" b="0">
+                          <a:solidFill>
+                            <a:srgbClr val="1F3355"/>
+                          </a:solidFill>
+                          <a:latin typeface="Meiryo UI"/>
+                        </a:rPr>
+                        <a:t>**CPE を再起動する**
+(設定の入れ直しでは効かない)</a:t>
+                      </a:r>
+                    </a:p>
+                  </a:txBody>
+                  <a:tcPr>
+                    <a:solidFill>
+                      <a:srgbClr val="F2F6FA"/>
+                    </a:solidFill>
+                  </a:tcPr>
+                </a:tc>
+              </a:tr>
+              <a:tr h="381573">
+                <a:tc>
+                  <a:txBody>
+                    <a:bodyPr/>
+                    <a:lstStyle/>
+                    <a:p>
+                      <a:pPr algn="l"/>
+                      <a:r>
+                        <a:rPr sz="1100" b="0">
+                          <a:solidFill>
+                            <a:srgbClr val="1F3355"/>
+                          </a:solidFill>
+                          <a:latin typeface="Meiryo UI"/>
+                        </a:rPr>
+                        <a:t>うちの検証では動いたのに
+現場で弾かれた</a:t>
+                      </a:r>
+                    </a:p>
+                  </a:txBody>
+                  <a:tcPr>
+                    <a:solidFill>
+                      <a:srgbClr val="FFFFFF"/>
+                    </a:solidFill>
+                  </a:tcPr>
+                </a:tc>
+                <a:tc>
+                  <a:txBody>
+                    <a:bodyPr/>
+                    <a:lstStyle/>
+                    <a:p>
+                      <a:pPr algn="l"/>
+                      <a:r>
+                        <a:rPr sz="1100" b="0">
+                          <a:solidFill>
+                            <a:srgbClr val="1F3355"/>
+                          </a:solidFill>
+                          <a:latin typeface="Meiryo UI"/>
+                        </a:rPr>
+                        <a:t>事業者の設備は「割り当て外のポートから来た通信」
+を落とす。検証環境は素通しにしがち</a:t>
+                      </a:r>
+                    </a:p>
+                  </a:txBody>
+                  <a:tcPr>
+                    <a:solidFill>
+                      <a:srgbClr val="FFFFFF"/>
+                    </a:solidFill>
+                  </a:tcPr>
+                </a:tc>
+                <a:tc>
+                  <a:txBody>
+                    <a:bodyPr/>
+                    <a:lstStyle/>
+                    <a:p>
+                      <a:pPr algn="l"/>
+                      <a:r>
+                        <a:rPr sz="1100" b="0">
+                          <a:solidFill>
+                            <a:srgbClr val="1F3355"/>
+                          </a:solidFill>
+                          <a:latin typeface="Meiryo UI"/>
+                        </a:rPr>
+                        <a:t>CPE が割り当て範囲内の
+ポートを使っているか</a:t>
+                      </a:r>
+                    </a:p>
+                  </a:txBody>
+                  <a:tcPr>
+                    <a:solidFill>
+                      <a:srgbClr val="FFFFFF"/>
+                    </a:solidFill>
+                  </a:tcPr>
+                </a:tc>
+              </a:tr>
+            </a:tbl>
+          </a:graphicData>
+        </a:graphic>
+      </p:graphicFrame>
+      <p:sp>
+        <p:nvSpPr>
+          <p:cNvPr id="4" name="TextBox 3"/>
+          <p:cNvSpPr txBox="1"/>
+          <p:nvPr/>
+        </p:nvSpPr>
+        <p:spPr>
+          <a:xfrm>
+            <a:off x="502920" y="2925318"/>
+            <a:ext cx="11155680" cy="548640"/>
+          </a:xfrm>
+          <a:prstGeom prst="rect">
+            <a:avLst/>
+          </a:prstGeom>
+          <a:noFill/>
+        </p:spPr>
+        <p:txBody>
+          <a:bodyPr wrap="square">
+            <a:spAutoFit/>
+          </a:bodyPr>
+          <a:lstStyle/>
+          <a:p>
+            <a:pPr algn="l"/>
+            <a:r>
+              <a:rPr sz="1200" b="0">
+                <a:solidFill>
+                  <a:srgbClr val="007ACC"/>
+                </a:solidFill>
+                <a:latin typeface="Meiryo UI"/>
+              </a:rPr>
+              <a:t>どれも C1111-8P を実機で触って初めて出てきたものです。カタログにも RFC にも書いてありません</a:t>
+            </a:r>
+          </a:p>
+        </p:txBody>
+      </p:sp>
+    </p:spTree>
+  </p:cSld>
+  <p:clrMapOvr>
+    <a:masterClrMapping/>
+  </p:clrMapOvr>
+</p:sld>
+</file>
+
+<file path=ppt/slides/slide46.xml><?xml version="1.0" encoding="utf-8"?>
+<p:sld xmlns:a="http://schemas.openxmlformats.org/drawingml/2006/main" xmlns:p="http://schemas.openxmlformats.org/presentationml/2006/main" xmlns:r="http://schemas.openxmlformats.org/officeDocument/2006/relationships">
+  <p:cSld>
+    <p:spTree>
+      <p:nvGrpSpPr>
+        <p:cNvPr id="1" name=""/>
+        <p:cNvGrpSpPr/>
+        <p:nvPr/>
+      </p:nvGrpSpPr>
+      <p:grpSpPr/>
+      <p:sp>
+        <p:nvSpPr>
+          <p:cNvPr id="2" name="TextBox 1"/>
+          <p:cNvSpPr txBox="1"/>
+          <p:nvPr/>
+        </p:nvSpPr>
+        <p:spPr>
+          <a:xfrm>
             <a:off x="502920" y="320040"/>
             <a:ext cx="11155680" cy="822960"/>
           </a:xfrm>
@@ -19957,7 +20466,7 @@
 </p:sld>
 </file>
 
-<file path=ppt/slides/slide46.xml><?xml version="1.0" encoding="utf-8"?>
+<file path=ppt/slides/slide47.xml><?xml version="1.0" encoding="utf-8"?>
 <p:sld xmlns:a="http://schemas.openxmlformats.org/drawingml/2006/main" xmlns:p="http://schemas.openxmlformats.org/presentationml/2006/main" xmlns:r="http://schemas.openxmlformats.org/officeDocument/2006/relationships">
   <p:cSld>
     <p:spTree>
@@ -20284,7 +20793,7 @@
 </p:sld>
 </file>
 
-<file path=ppt/slides/slide47.xml><?xml version="1.0" encoding="utf-8"?>
+<file path=ppt/slides/slide48.xml><?xml version="1.0" encoding="utf-8"?>
 <p:sld xmlns:a="http://schemas.openxmlformats.org/drawingml/2006/main" xmlns:p="http://schemas.openxmlformats.org/presentationml/2006/main" xmlns:r="http://schemas.openxmlformats.org/officeDocument/2006/relationships">
   <p:cSld>
     <p:spTree>
@@ -20595,7 +21104,7 @@
 </p:sld>
 </file>
 
-<file path=ppt/slides/slide48.xml><?xml version="1.0" encoding="utf-8"?>
+<file path=ppt/slides/slide49.xml><?xml version="1.0" encoding="utf-8"?>
 <p:sld xmlns:a="http://schemas.openxmlformats.org/drawingml/2006/main" xmlns:p="http://schemas.openxmlformats.org/presentationml/2006/main" xmlns:r="http://schemas.openxmlformats.org/officeDocument/2006/relationships">
   <p:cSld>
     <p:spTree>
